--- a/docs/protocol_a_vs_c_path_comparison.pptx
+++ b/docs/protocol_a_vs_c_path_comparison.pptx
@@ -10,6 +10,8 @@
     <p:sldId id="258" r:id="rId9"/>
     <p:sldId id="259" r:id="rId10"/>
     <p:sldId id="260" r:id="rId11"/>
+    <p:sldId id="261" r:id="rId12"/>
+    <p:sldId id="262" r:id="rId13"/>
   </p:sldIdLst>
   <p:sldSz cx="12188952" cy="6858000" type="screen4x3"/>
   <p:notesSz cx="6858000" cy="9144000"/>
@@ -3202,8 +3204,8 @@
         </p:nvSpPr>
         <p:spPr>
           <a:xfrm>
-            <a:off x="457200" y="4754880"/>
-            <a:ext cx="11247120" cy="1371600"/>
+            <a:off x="640080" y="4754880"/>
+            <a:ext cx="10972800" cy="1554480"/>
           </a:xfrm>
           <a:prstGeom prst="rect">
             <a:avLst/>
@@ -3254,7 +3256,7 @@
         </p:nvSpPr>
         <p:spPr>
           <a:xfrm>
-            <a:off x="274320" y="137160"/>
+            <a:off x="274320" y="91440"/>
             <a:ext cx="11704320" cy="502920"/>
           </a:xfrm>
           <a:prstGeom prst="rect">
@@ -3269,12 +3271,12 @@
           <a:lstStyle/>
           <a:p>
             <a:r>
-              <a:rPr sz="2400" b="1">
-                <a:solidFill>
-                  <a:srgbClr val="333333"/>
-                </a:solidFill>
-              </a:rPr>
-              <a:t>Write path topology — cross-host update(K, V), host 0 → owner host 1</a:t>
+              <a:rPr sz="2200" b="1">
+                <a:solidFill>
+                  <a:srgbClr val="154FC2"/>
+                </a:solidFill>
+              </a:rPr>
+              <a:t>Protocol A — Write path: cross-host  update(K, V)  with peer cached</a:t>
             </a:r>
           </a:p>
         </p:txBody>
@@ -3287,8 +3289,8 @@
         </p:nvSpPr>
         <p:spPr>
           <a:xfrm>
-            <a:off x="274320" y="640080"/>
-            <a:ext cx="11704320" cy="320040"/>
+            <a:off x="274320" y="566928"/>
+            <a:ext cx="11704320" cy="292608"/>
           </a:xfrm>
           <a:prstGeom prst="rect">
             <a:avLst/>
@@ -3302,12 +3304,12 @@
           <a:lstStyle/>
           <a:p>
             <a:r>
-              <a:rPr sz="1200" i="1">
+              <a:rPr sz="1100" i="1">
                 <a:solidFill>
                   <a:srgbClr val="9E9E9E"/>
                 </a:solidFill>
               </a:rPr>
-              <a:t>A: 14 numbered steps, 3 threads, 2 cross-host blocking points  •  C: 6 numbered steps, 1 thread, 1 cross-host blocking point</a:t>
+              <a:t>14 numbered steps · 3 actors · 2 cross-host blocking points (A4 WriteRing spin, A9 InvalRing spin · 5 ms timeout cap each) · W9 = single commit point</a:t>
             </a:r>
           </a:p>
         </p:txBody>
@@ -3320,18 +3322,18 @@
         </p:nvSpPr>
         <p:spPr>
           <a:xfrm>
-            <a:off x="274320" y="1143000"/>
-            <a:ext cx="11612880" cy="868680"/>
+            <a:off x="182880" y="1188720"/>
+            <a:ext cx="2560320" cy="411480"/>
           </a:xfrm>
           <a:prstGeom prst="roundRect">
             <a:avLst/>
           </a:prstGeom>
           <a:solidFill>
-            <a:srgbClr val="FFF3E0"/>
+            <a:srgbClr val="E3F2FD"/>
           </a:solidFill>
-          <a:ln w="19050">
+          <a:ln w="15875">
             <a:solidFill>
-              <a:srgbClr val="E65100"/>
+              <a:srgbClr val="1565C0"/>
             </a:solidFill>
           </a:ln>
         </p:spPr>
@@ -3357,10 +3359,10 @@
             <a:r>
               <a:rPr sz="1000" b="1">
                 <a:solidFill>
-                  <a:srgbClr val="8C3200"/>
-                </a:solidFill>
-              </a:rPr>
-              <a:t>CXL shared region — buckets, WriteRing[0][1], ForwardStaging, InvalRing[1][0], BucketLockTable (per-bucket LFM + write_epoch), KvBlockPool</a:t>
+                  <a:srgbClr val="1565C0"/>
+                </a:solidFill>
+              </a:rPr>
+              <a:t>host 0  worker (caller, cpu 0..T-1)</a:t>
             </a:r>
           </a:p>
         </p:txBody>
@@ -3373,18 +3375,18 @@
         </p:nvSpPr>
         <p:spPr>
           <a:xfrm>
-            <a:off x="365760" y="3017520"/>
-            <a:ext cx="2377440" cy="914400"/>
+            <a:off x="4206240" y="1188720"/>
+            <a:ext cx="2560320" cy="411480"/>
           </a:xfrm>
           <a:prstGeom prst="roundRect">
             <a:avLst/>
           </a:prstGeom>
           <a:solidFill>
-            <a:srgbClr val="E3F2FD"/>
+            <a:srgbClr val="C8DAFB"/>
           </a:solidFill>
-          <a:ln w="19050">
+          <a:ln w="15875">
             <a:solidFill>
-              <a:srgbClr val="1565C0"/>
+              <a:srgbClr val="154FC2"/>
             </a:solidFill>
           </a:ln>
         </p:spPr>
@@ -3408,13 +3410,12 @@
           <a:p>
             <a:pPr algn="ctr"/>
             <a:r>
-              <a:rPr sz="1200" b="1">
-                <a:solidFill>
-                  <a:srgbClr val="0D327D"/>
-                </a:solidFill>
-              </a:rPr>
-              <a:t>host 0  worker
-(caller)</a:t>
+              <a:rPr sz="1000" b="1">
+                <a:solidFill>
+                  <a:srgbClr val="154FC2"/>
+                </a:solidFill>
+              </a:rPr>
+              <a:t>host 1  WriteReceiver (cpu 65)</a:t>
             </a:r>
           </a:p>
         </p:txBody>
@@ -3427,14 +3428,211 @@
         </p:nvSpPr>
         <p:spPr>
           <a:xfrm>
-            <a:off x="4663440" y="3017520"/>
-            <a:ext cx="2743200" cy="914400"/>
+            <a:off x="8961119" y="1188720"/>
+            <a:ext cx="2560320" cy="411480"/>
           </a:xfrm>
           <a:prstGeom prst="roundRect">
             <a:avLst/>
           </a:prstGeom>
           <a:solidFill>
             <a:srgbClr val="C8DAFB"/>
+          </a:solidFill>
+          <a:ln w="15875">
+            <a:solidFill>
+              <a:srgbClr val="154FC2"/>
+            </a:solidFill>
+          </a:ln>
+        </p:spPr>
+        <p:style>
+          <a:lnRef idx="1">
+            <a:schemeClr val="accent1"/>
+          </a:lnRef>
+          <a:fillRef idx="3">
+            <a:schemeClr val="accent1"/>
+          </a:fillRef>
+          <a:effectRef idx="2">
+            <a:schemeClr val="accent1"/>
+          </a:effectRef>
+          <a:fontRef idx="minor">
+            <a:schemeClr val="lt1"/>
+          </a:fontRef>
+        </p:style>
+        <p:txBody>
+          <a:bodyPr rtlCol="0" anchor="ctr" lIns="38100" rIns="38100" tIns="25400" bIns="25400" wrap="square"/>
+          <a:lstStyle/>
+          <a:p>
+            <a:pPr algn="ctr"/>
+            <a:r>
+              <a:rPr sz="1000" b="1">
+                <a:solidFill>
+                  <a:srgbClr val="154FC2"/>
+                </a:solidFill>
+              </a:rPr>
+              <a:t>host 0  InvalReceiver (cpu 69)</a:t>
+            </a:r>
+          </a:p>
+        </p:txBody>
+      </p:sp>
+      <p:cxnSp>
+        <p:nvCxnSpPr>
+          <p:cNvPr id="7" name="Connector 6"/>
+          <p:cNvCxnSpPr/>
+          <p:nvPr/>
+        </p:nvCxnSpPr>
+        <p:spPr>
+          <a:xfrm>
+            <a:off x="1463040" y="1600200"/>
+            <a:ext cx="0" cy="4389120"/>
+          </a:xfrm>
+          <a:prstGeom prst="line">
+            <a:avLst/>
+          </a:prstGeom>
+          <a:ln w="7620">
+            <a:solidFill>
+              <a:srgbClr val="9E9E9E"/>
+            </a:solidFill>
+            <a:prstDash val="dash"/>
+          </a:ln>
+        </p:spPr>
+        <p:style>
+          <a:lnRef idx="2">
+            <a:schemeClr val="accent1"/>
+          </a:lnRef>
+          <a:fillRef idx="0">
+            <a:schemeClr val="accent1"/>
+          </a:fillRef>
+          <a:effectRef idx="1">
+            <a:schemeClr val="accent1"/>
+          </a:effectRef>
+          <a:fontRef idx="minor">
+            <a:schemeClr val="tx1"/>
+          </a:fontRef>
+        </p:style>
+      </p:cxnSp>
+      <p:cxnSp>
+        <p:nvCxnSpPr>
+          <p:cNvPr id="8" name="Connector 7"/>
+          <p:cNvCxnSpPr/>
+          <p:nvPr/>
+        </p:nvCxnSpPr>
+        <p:spPr>
+          <a:xfrm>
+            <a:off x="5486400" y="1600200"/>
+            <a:ext cx="0" cy="4389120"/>
+          </a:xfrm>
+          <a:prstGeom prst="line">
+            <a:avLst/>
+          </a:prstGeom>
+          <a:ln w="7620">
+            <a:solidFill>
+              <a:srgbClr val="9E9E9E"/>
+            </a:solidFill>
+            <a:prstDash val="dash"/>
+          </a:ln>
+        </p:spPr>
+        <p:style>
+          <a:lnRef idx="2">
+            <a:schemeClr val="accent1"/>
+          </a:lnRef>
+          <a:fillRef idx="0">
+            <a:schemeClr val="accent1"/>
+          </a:fillRef>
+          <a:effectRef idx="1">
+            <a:schemeClr val="accent1"/>
+          </a:effectRef>
+          <a:fontRef idx="minor">
+            <a:schemeClr val="tx1"/>
+          </a:fontRef>
+        </p:style>
+      </p:cxnSp>
+      <p:cxnSp>
+        <p:nvCxnSpPr>
+          <p:cNvPr id="9" name="Connector 8"/>
+          <p:cNvCxnSpPr/>
+          <p:nvPr/>
+        </p:nvCxnSpPr>
+        <p:spPr>
+          <a:xfrm>
+            <a:off x="10241280" y="1600200"/>
+            <a:ext cx="0" cy="4389120"/>
+          </a:xfrm>
+          <a:prstGeom prst="line">
+            <a:avLst/>
+          </a:prstGeom>
+          <a:ln w="7620">
+            <a:solidFill>
+              <a:srgbClr val="9E9E9E"/>
+            </a:solidFill>
+            <a:prstDash val="dash"/>
+          </a:ln>
+        </p:spPr>
+        <p:style>
+          <a:lnRef idx="2">
+            <a:schemeClr val="accent1"/>
+          </a:lnRef>
+          <a:fillRef idx="0">
+            <a:schemeClr val="accent1"/>
+          </a:fillRef>
+          <a:effectRef idx="1">
+            <a:schemeClr val="accent1"/>
+          </a:effectRef>
+          <a:fontRef idx="minor">
+            <a:schemeClr val="tx1"/>
+          </a:fontRef>
+        </p:style>
+      </p:cxnSp>
+      <p:sp>
+        <p:nvSpPr>
+          <p:cNvPr id="10" name="TextBox 9"/>
+          <p:cNvSpPr txBox="1"/>
+          <p:nvPr/>
+        </p:nvSpPr>
+        <p:spPr>
+          <a:xfrm>
+            <a:off x="182880" y="1691640"/>
+            <a:ext cx="868680" cy="4114800"/>
+          </a:xfrm>
+          <a:prstGeom prst="rect">
+            <a:avLst/>
+          </a:prstGeom>
+          <a:noFill/>
+        </p:spPr>
+        <p:txBody>
+          <a:bodyPr wrap="square" lIns="25400" rIns="25400" tIns="0" bIns="0">
+            <a:spAutoFit/>
+          </a:bodyPr>
+          <a:lstStyle/>
+          <a:p>
+            <a:pPr algn="l"/>
+            <a:r>
+              <a:rPr sz="800" i="1" b="1">
+                <a:solidFill>
+                  <a:srgbClr val="8C3200"/>
+                </a:solidFill>
+              </a:rPr>
+              <a:t>CXL
+shared
+region</a:t>
+            </a:r>
+          </a:p>
+        </p:txBody>
+      </p:sp>
+      <p:sp>
+        <p:nvSpPr>
+          <p:cNvPr id="11" name="Oval 10"/>
+          <p:cNvSpPr/>
+          <p:nvPr/>
+        </p:nvSpPr>
+        <p:spPr>
+          <a:xfrm>
+            <a:off x="1316736" y="1773936"/>
+            <a:ext cx="292608" cy="292608"/>
+          </a:xfrm>
+          <a:prstGeom prst="ellipse">
+            <a:avLst/>
+          </a:prstGeom>
+          <a:solidFill>
+            <a:srgbClr val="FFFFFF"/>
           </a:solidFill>
           <a:ln w="19050">
             <a:solidFill>
@@ -3457,39 +3655,76 @@
           </a:fontRef>
         </p:style>
         <p:txBody>
-          <a:bodyPr rtlCol="0" anchor="ctr" lIns="38100" rIns="38100" tIns="25400" bIns="25400" wrap="square"/>
+          <a:bodyPr rtlCol="0" anchor="ctr" lIns="0" rIns="0" tIns="0" bIns="0"/>
           <a:lstStyle/>
           <a:p>
             <a:pPr algn="ctr"/>
             <a:r>
-              <a:rPr sz="1100" b="1">
-                <a:solidFill>
-                  <a:srgbClr val="0D327D"/>
-                </a:solidFill>
-              </a:rPr>
-              <a:t>host 1  WriteReceiver
-(cpu 65, single thread)
-Protocol A only</a:t>
-            </a:r>
-          </a:p>
-        </p:txBody>
-      </p:sp>
-      <p:sp>
-        <p:nvSpPr>
-          <p:cNvPr id="7" name="Rounded Rectangle 6"/>
+              <a:rPr sz="800" b="1">
+                <a:solidFill>
+                  <a:srgbClr val="154FC2"/>
+                </a:solidFill>
+              </a:rPr>
+              <a:t>A1</a:t>
+            </a:r>
+          </a:p>
+        </p:txBody>
+      </p:sp>
+      <p:sp>
+        <p:nvSpPr>
+          <p:cNvPr id="12" name="TextBox 11"/>
+          <p:cNvSpPr txBox="1"/>
+          <p:nvPr/>
+        </p:nvSpPr>
+        <p:spPr>
+          <a:xfrm>
+            <a:off x="1645920" y="1828800"/>
+            <a:ext cx="2743200" cy="219456"/>
+          </a:xfrm>
+          <a:prstGeom prst="rect">
+            <a:avLst/>
+          </a:prstGeom>
+          <a:solidFill>
+            <a:srgbClr val="FFFFFF"/>
+          </a:solidFill>
+          <a:ln>
+            <a:noFill/>
+          </a:ln>
+        </p:spPr>
+        <p:txBody>
+          <a:bodyPr wrap="none" lIns="25400" rIns="25400" tIns="0" bIns="0">
+            <a:spAutoFit/>
+          </a:bodyPr>
+          <a:lstStyle/>
+          <a:p>
+            <a:pPr algn="l"/>
+            <a:r>
+              <a:rPr sz="850" b="1" i="0">
+                <a:solidFill>
+                  <a:srgbClr val="154FC2"/>
+                </a:solidFill>
+              </a:rPr>
+              <a:t>write V bytes → ForwardStaging[0][1][slot]</a:t>
+            </a:r>
+          </a:p>
+        </p:txBody>
+      </p:sp>
+      <p:sp>
+        <p:nvSpPr>
+          <p:cNvPr id="13" name="Oval 12"/>
           <p:cNvSpPr/>
           <p:nvPr/>
         </p:nvSpPr>
         <p:spPr>
           <a:xfrm>
-            <a:off x="9326880" y="3017520"/>
-            <a:ext cx="2468880" cy="914400"/>
-          </a:xfrm>
-          <a:prstGeom prst="roundRect">
+            <a:off x="1316736" y="2066543"/>
+            <a:ext cx="292608" cy="292608"/>
+          </a:xfrm>
+          <a:prstGeom prst="ellipse">
             <a:avLst/>
           </a:prstGeom>
           <a:solidFill>
-            <a:srgbClr val="C8DAFB"/>
+            <a:srgbClr val="FFFFFF"/>
           </a:solidFill>
           <a:ln w="19050">
             <a:solidFill>
@@ -3512,38 +3747,167 @@
           </a:fontRef>
         </p:style>
         <p:txBody>
-          <a:bodyPr rtlCol="0" anchor="ctr" lIns="38100" rIns="38100" tIns="25400" bIns="25400" wrap="square"/>
+          <a:bodyPr rtlCol="0" anchor="ctr" lIns="0" rIns="0" tIns="0" bIns="0"/>
           <a:lstStyle/>
           <a:p>
             <a:pPr algn="ctr"/>
             <a:r>
-              <a:rPr sz="1100" b="1">
-                <a:solidFill>
-                  <a:srgbClr val="0D327D"/>
-                </a:solidFill>
-              </a:rPr>
-              <a:t>host 0  InvalReceiver
-(cpu 69)
-Protocol A only</a:t>
+              <a:rPr sz="800" b="1">
+                <a:solidFill>
+                  <a:srgbClr val="154FC2"/>
+                </a:solidFill>
+              </a:rPr>
+              <a:t>A2</a:t>
+            </a:r>
+          </a:p>
+        </p:txBody>
+      </p:sp>
+      <p:sp>
+        <p:nvSpPr>
+          <p:cNvPr id="14" name="TextBox 13"/>
+          <p:cNvSpPr txBox="1"/>
+          <p:nvPr/>
+        </p:nvSpPr>
+        <p:spPr>
+          <a:xfrm>
+            <a:off x="1645920" y="2121408"/>
+            <a:ext cx="2743200" cy="219456"/>
+          </a:xfrm>
+          <a:prstGeom prst="rect">
+            <a:avLst/>
+          </a:prstGeom>
+          <a:solidFill>
+            <a:srgbClr val="FFFFFF"/>
+          </a:solidFill>
+          <a:ln>
+            <a:noFill/>
+          </a:ln>
+        </p:spPr>
+        <p:txBody>
+          <a:bodyPr wrap="none" lIns="25400" rIns="25400" tIns="0" bIns="0">
+            <a:spAutoFit/>
+          </a:bodyPr>
+          <a:lstStyle/>
+          <a:p>
+            <a:pPr algn="l"/>
+            <a:r>
+              <a:rPr sz="850" b="1" i="0">
+                <a:solidFill>
+                  <a:srgbClr val="154FC2"/>
+                </a:solidFill>
+              </a:rPr>
+              <a:t>WriteRing[0][1].tail.fetch_add(1)  RMW-CXL</a:t>
+            </a:r>
+          </a:p>
+        </p:txBody>
+      </p:sp>
+      <p:sp>
+        <p:nvSpPr>
+          <p:cNvPr id="15" name="Oval 14"/>
+          <p:cNvSpPr/>
+          <p:nvPr/>
+        </p:nvSpPr>
+        <p:spPr>
+          <a:xfrm>
+            <a:off x="1316736" y="2359151"/>
+            <a:ext cx="292608" cy="292608"/>
+          </a:xfrm>
+          <a:prstGeom prst="ellipse">
+            <a:avLst/>
+          </a:prstGeom>
+          <a:solidFill>
+            <a:srgbClr val="FFFFFF"/>
+          </a:solidFill>
+          <a:ln w="19050">
+            <a:solidFill>
+              <a:srgbClr val="154FC2"/>
+            </a:solidFill>
+          </a:ln>
+        </p:spPr>
+        <p:style>
+          <a:lnRef idx="1">
+            <a:schemeClr val="accent1"/>
+          </a:lnRef>
+          <a:fillRef idx="3">
+            <a:schemeClr val="accent1"/>
+          </a:fillRef>
+          <a:effectRef idx="2">
+            <a:schemeClr val="accent1"/>
+          </a:effectRef>
+          <a:fontRef idx="minor">
+            <a:schemeClr val="lt1"/>
+          </a:fontRef>
+        </p:style>
+        <p:txBody>
+          <a:bodyPr rtlCol="0" anchor="ctr" lIns="0" rIns="0" tIns="0" bIns="0"/>
+          <a:lstStyle/>
+          <a:p>
+            <a:pPr algn="ctr"/>
+            <a:r>
+              <a:rPr sz="800" b="1">
+                <a:solidFill>
+                  <a:srgbClr val="154FC2"/>
+                </a:solidFill>
+              </a:rPr>
+              <a:t>A3</a:t>
+            </a:r>
+          </a:p>
+        </p:txBody>
+      </p:sp>
+      <p:sp>
+        <p:nvSpPr>
+          <p:cNvPr id="16" name="TextBox 15"/>
+          <p:cNvSpPr txBox="1"/>
+          <p:nvPr/>
+        </p:nvSpPr>
+        <p:spPr>
+          <a:xfrm>
+            <a:off x="1645920" y="2414015"/>
+            <a:ext cx="2743200" cy="219456"/>
+          </a:xfrm>
+          <a:prstGeom prst="rect">
+            <a:avLst/>
+          </a:prstGeom>
+          <a:solidFill>
+            <a:srgbClr val="FFFFFF"/>
+          </a:solidFill>
+          <a:ln>
+            <a:noFill/>
+          </a:ln>
+        </p:spPr>
+        <p:txBody>
+          <a:bodyPr wrap="none" lIns="25400" rIns="25400" tIns="0" bIns="0">
+            <a:spAutoFit/>
+          </a:bodyPr>
+          <a:lstStyle/>
+          <a:p>
+            <a:pPr algn="l"/>
+            <a:r>
+              <a:rPr sz="850" b="1" i="0">
+                <a:solidFill>
+                  <a:srgbClr val="154FC2"/>
+                </a:solidFill>
+              </a:rPr>
+              <a:t>write WriteEntry{key, op_kind, value_len, staging_off} + flush + sfence</a:t>
             </a:r>
           </a:p>
         </p:txBody>
       </p:sp>
       <p:cxnSp>
         <p:nvCxnSpPr>
-          <p:cNvPr id="8" name="Connector 7"/>
+          <p:cNvPr id="17" name="Connector 16"/>
           <p:cNvCxnSpPr/>
           <p:nvPr/>
         </p:nvCxnSpPr>
         <p:spPr>
-          <a:xfrm flipV="1">
-            <a:off x="1280160" y="2011680"/>
-            <a:ext cx="548640" cy="1005840"/>
+          <a:xfrm>
+            <a:off x="1463040" y="2798063"/>
+            <a:ext cx="4023360" cy="0"/>
           </a:xfrm>
           <a:prstGeom prst="line">
             <a:avLst/>
           </a:prstGeom>
-          <a:ln w="31750">
+          <a:ln w="20320">
             <a:solidFill>
               <a:srgbClr val="154FC2"/>
             </a:solidFill>
@@ -3567,14 +3931,67 @@
       </p:cxnSp>
       <p:sp>
         <p:nvSpPr>
-          <p:cNvPr id="9" name="TextBox 8"/>
+          <p:cNvPr id="18" name="Oval 17"/>
+          <p:cNvSpPr/>
+          <p:nvPr/>
+        </p:nvSpPr>
+        <p:spPr>
+          <a:xfrm>
+            <a:off x="3328415" y="2651759"/>
+            <a:ext cx="292608" cy="292608"/>
+          </a:xfrm>
+          <a:prstGeom prst="ellipse">
+            <a:avLst/>
+          </a:prstGeom>
+          <a:solidFill>
+            <a:srgbClr val="FFCDD2"/>
+          </a:solidFill>
+          <a:ln w="19050">
+            <a:solidFill>
+              <a:srgbClr val="C62828"/>
+            </a:solidFill>
+          </a:ln>
+        </p:spPr>
+        <p:style>
+          <a:lnRef idx="1">
+            <a:schemeClr val="accent1"/>
+          </a:lnRef>
+          <a:fillRef idx="3">
+            <a:schemeClr val="accent1"/>
+          </a:fillRef>
+          <a:effectRef idx="2">
+            <a:schemeClr val="accent1"/>
+          </a:effectRef>
+          <a:fontRef idx="minor">
+            <a:schemeClr val="lt1"/>
+          </a:fontRef>
+        </p:style>
+        <p:txBody>
+          <a:bodyPr rtlCol="0" anchor="ctr" lIns="0" rIns="0" tIns="0" bIns="0"/>
+          <a:lstStyle/>
+          <a:p>
+            <a:pPr algn="ctr"/>
+            <a:r>
+              <a:rPr sz="800" b="1">
+                <a:solidFill>
+                  <a:srgbClr val="333333"/>
+                </a:solidFill>
+              </a:rPr>
+              <a:t>A4</a:t>
+            </a:r>
+          </a:p>
+        </p:txBody>
+      </p:sp>
+      <p:sp>
+        <p:nvSpPr>
+          <p:cNvPr id="19" name="TextBox 18"/>
           <p:cNvSpPr txBox="1"/>
           <p:nvPr/>
         </p:nvSpPr>
         <p:spPr>
           <a:xfrm>
-            <a:off x="1600200" y="2423160"/>
-            <a:ext cx="457200" cy="201168"/>
+            <a:off x="2011679" y="2542031"/>
+            <a:ext cx="2926080" cy="219456"/>
           </a:xfrm>
           <a:prstGeom prst="rect">
             <a:avLst/>
@@ -3587,38 +4004,406 @@
           </a:ln>
         </p:spPr>
         <p:txBody>
-          <a:bodyPr wrap="none" lIns="12700" rIns="12700" tIns="0" bIns="0">
+          <a:bodyPr wrap="none" lIns="25400" rIns="25400" tIns="0" bIns="0">
             <a:spAutoFit/>
           </a:bodyPr>
           <a:lstStyle/>
           <a:p>
+            <a:pPr algn="l"/>
+            <a:r>
+              <a:rPr sz="850" b="1" i="0">
+                <a:solidFill>
+                  <a:srgbClr val="154FC2"/>
+                </a:solidFill>
+              </a:rPr>
+              <a:t>worker spin on resp_op_id  (5 ms timeout cap)</a:t>
+            </a:r>
+          </a:p>
+        </p:txBody>
+      </p:sp>
+      <p:sp>
+        <p:nvSpPr>
+          <p:cNvPr id="20" name="Oval 19"/>
+          <p:cNvSpPr/>
+          <p:nvPr/>
+        </p:nvSpPr>
+        <p:spPr>
+          <a:xfrm>
+            <a:off x="5340096" y="2944367"/>
+            <a:ext cx="292608" cy="292608"/>
+          </a:xfrm>
+          <a:prstGeom prst="ellipse">
+            <a:avLst/>
+          </a:prstGeom>
+          <a:solidFill>
+            <a:srgbClr val="FFFFFF"/>
+          </a:solidFill>
+          <a:ln w="19050">
+            <a:solidFill>
+              <a:srgbClr val="154FC2"/>
+            </a:solidFill>
+          </a:ln>
+        </p:spPr>
+        <p:style>
+          <a:lnRef idx="1">
+            <a:schemeClr val="accent1"/>
+          </a:lnRef>
+          <a:fillRef idx="3">
+            <a:schemeClr val="accent1"/>
+          </a:fillRef>
+          <a:effectRef idx="2">
+            <a:schemeClr val="accent1"/>
+          </a:effectRef>
+          <a:fontRef idx="minor">
+            <a:schemeClr val="lt1"/>
+          </a:fontRef>
+        </p:style>
+        <p:txBody>
+          <a:bodyPr rtlCol="0" anchor="ctr" lIns="0" rIns="0" tIns="0" bIns="0"/>
+          <a:lstStyle/>
+          <a:p>
             <a:pPr algn="ctr"/>
             <a:r>
-              <a:rPr sz="1000" b="1">
+              <a:rPr sz="800" b="1">
                 <a:solidFill>
                   <a:srgbClr val="154FC2"/>
                 </a:solidFill>
               </a:rPr>
-              <a:t>A1</a:t>
+              <a:t>A5</a:t>
+            </a:r>
+          </a:p>
+        </p:txBody>
+      </p:sp>
+      <p:sp>
+        <p:nvSpPr>
+          <p:cNvPr id="21" name="TextBox 20"/>
+          <p:cNvSpPr txBox="1"/>
+          <p:nvPr/>
+        </p:nvSpPr>
+        <p:spPr>
+          <a:xfrm>
+            <a:off x="5669280" y="2999231"/>
+            <a:ext cx="2743200" cy="219456"/>
+          </a:xfrm>
+          <a:prstGeom prst="rect">
+            <a:avLst/>
+          </a:prstGeom>
+          <a:solidFill>
+            <a:srgbClr val="FFFFFF"/>
+          </a:solidFill>
+          <a:ln>
+            <a:noFill/>
+          </a:ln>
+        </p:spPr>
+        <p:txBody>
+          <a:bodyPr wrap="none" lIns="25400" rIns="25400" tIns="0" bIns="0">
+            <a:spAutoFit/>
+          </a:bodyPr>
+          <a:lstStyle/>
+          <a:p>
+            <a:pPr algn="l"/>
+            <a:r>
+              <a:rPr sz="850" b="1" i="0">
+                <a:solidFill>
+                  <a:srgbClr val="154FC2"/>
+                </a:solidFill>
+              </a:rPr>
+              <a:t>poll WriteRing[0][1].tail; read ForwardStaging bytes</a:t>
+            </a:r>
+          </a:p>
+        </p:txBody>
+      </p:sp>
+      <p:sp>
+        <p:nvSpPr>
+          <p:cNvPr id="22" name="Oval 21"/>
+          <p:cNvSpPr/>
+          <p:nvPr/>
+        </p:nvSpPr>
+        <p:spPr>
+          <a:xfrm>
+            <a:off x="5340096" y="3236975"/>
+            <a:ext cx="292608" cy="292608"/>
+          </a:xfrm>
+          <a:prstGeom prst="ellipse">
+            <a:avLst/>
+          </a:prstGeom>
+          <a:solidFill>
+            <a:srgbClr val="FFFFFF"/>
+          </a:solidFill>
+          <a:ln w="19050">
+            <a:solidFill>
+              <a:srgbClr val="154FC2"/>
+            </a:solidFill>
+          </a:ln>
+        </p:spPr>
+        <p:style>
+          <a:lnRef idx="1">
+            <a:schemeClr val="accent1"/>
+          </a:lnRef>
+          <a:fillRef idx="3">
+            <a:schemeClr val="accent1"/>
+          </a:fillRef>
+          <a:effectRef idx="2">
+            <a:schemeClr val="accent1"/>
+          </a:effectRef>
+          <a:fontRef idx="minor">
+            <a:schemeClr val="lt1"/>
+          </a:fontRef>
+        </p:style>
+        <p:txBody>
+          <a:bodyPr rtlCol="0" anchor="ctr" lIns="0" rIns="0" tIns="0" bIns="0"/>
+          <a:lstStyle/>
+          <a:p>
+            <a:pPr algn="ctr"/>
+            <a:r>
+              <a:rPr sz="800" b="1">
+                <a:solidFill>
+                  <a:srgbClr val="154FC2"/>
+                </a:solidFill>
+              </a:rPr>
+              <a:t>A6</a:t>
+            </a:r>
+          </a:p>
+        </p:txBody>
+      </p:sp>
+      <p:sp>
+        <p:nvSpPr>
+          <p:cNvPr id="23" name="TextBox 22"/>
+          <p:cNvSpPr txBox="1"/>
+          <p:nvPr/>
+        </p:nvSpPr>
+        <p:spPr>
+          <a:xfrm>
+            <a:off x="5669280" y="3291839"/>
+            <a:ext cx="2743200" cy="219456"/>
+          </a:xfrm>
+          <a:prstGeom prst="rect">
+            <a:avLst/>
+          </a:prstGeom>
+          <a:solidFill>
+            <a:srgbClr val="FFFFFF"/>
+          </a:solidFill>
+          <a:ln>
+            <a:noFill/>
+          </a:ln>
+        </p:spPr>
+        <p:txBody>
+          <a:bodyPr wrap="none" lIns="25400" rIns="25400" tIns="0" bIns="0">
+            <a:spAutoFit/>
+          </a:bodyPr>
+          <a:lstStyle/>
+          <a:p>
+            <a:pPr algn="l"/>
+            <a:r>
+              <a:rPr sz="850" b="1" i="0">
+                <a:solidFill>
+                  <a:srgbClr val="154FC2"/>
+                </a:solidFill>
+              </a:rPr>
+              <a:t>execute_write_local: W1 hash+flush  · W2 spinlock+scan  · W3 bitmap</a:t>
+            </a:r>
+          </a:p>
+        </p:txBody>
+      </p:sp>
+      <p:sp>
+        <p:nvSpPr>
+          <p:cNvPr id="24" name="Oval 23"/>
+          <p:cNvSpPr/>
+          <p:nvPr/>
+        </p:nvSpPr>
+        <p:spPr>
+          <a:xfrm>
+            <a:off x="5340096" y="3529583"/>
+            <a:ext cx="292608" cy="292608"/>
+          </a:xfrm>
+          <a:prstGeom prst="ellipse">
+            <a:avLst/>
+          </a:prstGeom>
+          <a:solidFill>
+            <a:srgbClr val="FFFFFF"/>
+          </a:solidFill>
+          <a:ln w="19050">
+            <a:solidFill>
+              <a:srgbClr val="154FC2"/>
+            </a:solidFill>
+          </a:ln>
+        </p:spPr>
+        <p:style>
+          <a:lnRef idx="1">
+            <a:schemeClr val="accent1"/>
+          </a:lnRef>
+          <a:fillRef idx="3">
+            <a:schemeClr val="accent1"/>
+          </a:fillRef>
+          <a:effectRef idx="2">
+            <a:schemeClr val="accent1"/>
+          </a:effectRef>
+          <a:fontRef idx="minor">
+            <a:schemeClr val="lt1"/>
+          </a:fontRef>
+        </p:style>
+        <p:txBody>
+          <a:bodyPr rtlCol="0" anchor="ctr" lIns="0" rIns="0" tIns="0" bIns="0"/>
+          <a:lstStyle/>
+          <a:p>
+            <a:pPr algn="ctr"/>
+            <a:r>
+              <a:rPr sz="800" b="1">
+                <a:solidFill>
+                  <a:srgbClr val="154FC2"/>
+                </a:solidFill>
+              </a:rPr>
+              <a:t>A7</a:t>
+            </a:r>
+          </a:p>
+        </p:txBody>
+      </p:sp>
+      <p:sp>
+        <p:nvSpPr>
+          <p:cNvPr id="25" name="TextBox 24"/>
+          <p:cNvSpPr txBox="1"/>
+          <p:nvPr/>
+        </p:nvSpPr>
+        <p:spPr>
+          <a:xfrm>
+            <a:off x="5669280" y="3584447"/>
+            <a:ext cx="2743200" cy="219456"/>
+          </a:xfrm>
+          <a:prstGeom prst="rect">
+            <a:avLst/>
+          </a:prstGeom>
+          <a:solidFill>
+            <a:srgbClr val="FFFFFF"/>
+          </a:solidFill>
+          <a:ln>
+            <a:noFill/>
+          </a:ln>
+        </p:spPr>
+        <p:txBody>
+          <a:bodyPr wrap="none" lIns="25400" rIns="25400" tIns="0" bIns="0">
+            <a:spAutoFit/>
+          </a:bodyPr>
+          <a:lstStyle/>
+          <a:p>
+            <a:pPr algn="l"/>
+            <a:r>
+              <a:rPr sz="850" b="1" i="0">
+                <a:solidFill>
+                  <a:srgbClr val="154FC2"/>
+                </a:solidFill>
+              </a:rPr>
+              <a:t>inside W4-W6: InvalRing[1][0].tail.fetch_add(1)  RMW-CXL</a:t>
+            </a:r>
+          </a:p>
+        </p:txBody>
+      </p:sp>
+      <p:sp>
+        <p:nvSpPr>
+          <p:cNvPr id="26" name="Oval 25"/>
+          <p:cNvSpPr/>
+          <p:nvPr/>
+        </p:nvSpPr>
+        <p:spPr>
+          <a:xfrm>
+            <a:off x="5340096" y="3822191"/>
+            <a:ext cx="292608" cy="292608"/>
+          </a:xfrm>
+          <a:prstGeom prst="ellipse">
+            <a:avLst/>
+          </a:prstGeom>
+          <a:solidFill>
+            <a:srgbClr val="FFFFFF"/>
+          </a:solidFill>
+          <a:ln w="19050">
+            <a:solidFill>
+              <a:srgbClr val="154FC2"/>
+            </a:solidFill>
+          </a:ln>
+        </p:spPr>
+        <p:style>
+          <a:lnRef idx="1">
+            <a:schemeClr val="accent1"/>
+          </a:lnRef>
+          <a:fillRef idx="3">
+            <a:schemeClr val="accent1"/>
+          </a:fillRef>
+          <a:effectRef idx="2">
+            <a:schemeClr val="accent1"/>
+          </a:effectRef>
+          <a:fontRef idx="minor">
+            <a:schemeClr val="lt1"/>
+          </a:fontRef>
+        </p:style>
+        <p:txBody>
+          <a:bodyPr rtlCol="0" anchor="ctr" lIns="0" rIns="0" tIns="0" bIns="0"/>
+          <a:lstStyle/>
+          <a:p>
+            <a:pPr algn="ctr"/>
+            <a:r>
+              <a:rPr sz="800" b="1">
+                <a:solidFill>
+                  <a:srgbClr val="154FC2"/>
+                </a:solidFill>
+              </a:rPr>
+              <a:t>A8</a:t>
+            </a:r>
+          </a:p>
+        </p:txBody>
+      </p:sp>
+      <p:sp>
+        <p:nvSpPr>
+          <p:cNvPr id="27" name="TextBox 26"/>
+          <p:cNvSpPr txBox="1"/>
+          <p:nvPr/>
+        </p:nvSpPr>
+        <p:spPr>
+          <a:xfrm>
+            <a:off x="5669280" y="3877056"/>
+            <a:ext cx="2743200" cy="219456"/>
+          </a:xfrm>
+          <a:prstGeom prst="rect">
+            <a:avLst/>
+          </a:prstGeom>
+          <a:solidFill>
+            <a:srgbClr val="FFFFFF"/>
+          </a:solidFill>
+          <a:ln>
+            <a:noFill/>
+          </a:ln>
+        </p:spPr>
+        <p:txBody>
+          <a:bodyPr wrap="none" lIns="25400" rIns="25400" tIns="0" bIns="0">
+            <a:spAutoFit/>
+          </a:bodyPr>
+          <a:lstStyle/>
+          <a:p>
+            <a:pPr algn="l"/>
+            <a:r>
+              <a:rPr sz="850" b="1" i="0">
+                <a:solidFill>
+                  <a:srgbClr val="154FC2"/>
+                </a:solidFill>
+              </a:rPr>
+              <a:t>write InvalEntry{key} + flush + sfence</a:t>
             </a:r>
           </a:p>
         </p:txBody>
       </p:sp>
       <p:cxnSp>
         <p:nvCxnSpPr>
-          <p:cNvPr id="10" name="Connector 9"/>
+          <p:cNvPr id="28" name="Connector 27"/>
           <p:cNvCxnSpPr/>
           <p:nvPr/>
         </p:nvCxnSpPr>
         <p:spPr>
-          <a:xfrm flipV="1">
-            <a:off x="1554480" y="2011680"/>
-            <a:ext cx="2103120" cy="1005840"/>
+          <a:xfrm>
+            <a:off x="5486400" y="4261104"/>
+            <a:ext cx="4754880" cy="0"/>
           </a:xfrm>
           <a:prstGeom prst="line">
             <a:avLst/>
           </a:prstGeom>
-          <a:ln w="31750">
+          <a:ln w="20320">
             <a:solidFill>
               <a:srgbClr val="154FC2"/>
             </a:solidFill>
@@ -3642,14 +4427,67 @@
       </p:cxnSp>
       <p:sp>
         <p:nvSpPr>
-          <p:cNvPr id="11" name="TextBox 10"/>
+          <p:cNvPr id="29" name="Oval 28"/>
+          <p:cNvSpPr/>
+          <p:nvPr/>
+        </p:nvSpPr>
+        <p:spPr>
+          <a:xfrm>
+            <a:off x="7717536" y="4114800"/>
+            <a:ext cx="292608" cy="292608"/>
+          </a:xfrm>
+          <a:prstGeom prst="ellipse">
+            <a:avLst/>
+          </a:prstGeom>
+          <a:solidFill>
+            <a:srgbClr val="FFCDD2"/>
+          </a:solidFill>
+          <a:ln w="19050">
+            <a:solidFill>
+              <a:srgbClr val="C62828"/>
+            </a:solidFill>
+          </a:ln>
+        </p:spPr>
+        <p:style>
+          <a:lnRef idx="1">
+            <a:schemeClr val="accent1"/>
+          </a:lnRef>
+          <a:fillRef idx="3">
+            <a:schemeClr val="accent1"/>
+          </a:fillRef>
+          <a:effectRef idx="2">
+            <a:schemeClr val="accent1"/>
+          </a:effectRef>
+          <a:fontRef idx="minor">
+            <a:schemeClr val="lt1"/>
+          </a:fontRef>
+        </p:style>
+        <p:txBody>
+          <a:bodyPr rtlCol="0" anchor="ctr" lIns="0" rIns="0" tIns="0" bIns="0"/>
+          <a:lstStyle/>
+          <a:p>
+            <a:pPr algn="ctr"/>
+            <a:r>
+              <a:rPr sz="800" b="1">
+                <a:solidFill>
+                  <a:srgbClr val="333333"/>
+                </a:solidFill>
+              </a:rPr>
+              <a:t>A9</a:t>
+            </a:r>
+          </a:p>
+        </p:txBody>
+      </p:sp>
+      <p:sp>
+        <p:nvSpPr>
+          <p:cNvPr id="30" name="TextBox 29"/>
           <p:cNvSpPr txBox="1"/>
           <p:nvPr/>
         </p:nvSpPr>
         <p:spPr>
           <a:xfrm>
-            <a:off x="2377440" y="2331720"/>
-            <a:ext cx="548640" cy="201168"/>
+            <a:off x="6400800" y="4005072"/>
+            <a:ext cx="2926080" cy="219456"/>
           </a:xfrm>
           <a:prstGeom prst="rect">
             <a:avLst/>
@@ -3662,38 +4500,222 @@
           </a:ln>
         </p:spPr>
         <p:txBody>
-          <a:bodyPr wrap="none" lIns="12700" rIns="12700" tIns="0" bIns="0">
+          <a:bodyPr wrap="none" lIns="25400" rIns="25400" tIns="0" bIns="0">
             <a:spAutoFit/>
           </a:bodyPr>
           <a:lstStyle/>
           <a:p>
+            <a:pPr algn="l"/>
+            <a:r>
+              <a:rPr sz="850" b="1" i="0">
+                <a:solidFill>
+                  <a:srgbClr val="154FC2"/>
+                </a:solidFill>
+              </a:rPr>
+              <a:t>WriteReceiver spin on InvalRing resp_op_id  (5 ms cap)</a:t>
+            </a:r>
+          </a:p>
+        </p:txBody>
+      </p:sp>
+      <p:sp>
+        <p:nvSpPr>
+          <p:cNvPr id="31" name="Oval 30"/>
+          <p:cNvSpPr/>
+          <p:nvPr/>
+        </p:nvSpPr>
+        <p:spPr>
+          <a:xfrm>
+            <a:off x="10094976" y="4407408"/>
+            <a:ext cx="292608" cy="292608"/>
+          </a:xfrm>
+          <a:prstGeom prst="ellipse">
+            <a:avLst/>
+          </a:prstGeom>
+          <a:solidFill>
+            <a:srgbClr val="FFFFFF"/>
+          </a:solidFill>
+          <a:ln w="19050">
+            <a:solidFill>
+              <a:srgbClr val="154FC2"/>
+            </a:solidFill>
+          </a:ln>
+        </p:spPr>
+        <p:style>
+          <a:lnRef idx="1">
+            <a:schemeClr val="accent1"/>
+          </a:lnRef>
+          <a:fillRef idx="3">
+            <a:schemeClr val="accent1"/>
+          </a:fillRef>
+          <a:effectRef idx="2">
+            <a:schemeClr val="accent1"/>
+          </a:effectRef>
+          <a:fontRef idx="minor">
+            <a:schemeClr val="lt1"/>
+          </a:fontRef>
+        </p:style>
+        <p:txBody>
+          <a:bodyPr rtlCol="0" anchor="ctr" lIns="0" rIns="0" tIns="0" bIns="0"/>
+          <a:lstStyle/>
+          <a:p>
             <a:pPr algn="ctr"/>
             <a:r>
-              <a:rPr sz="1000" b="1">
+              <a:rPr sz="800" b="1">
                 <a:solidFill>
                   <a:srgbClr val="154FC2"/>
                 </a:solidFill>
               </a:rPr>
-              <a:t>A2</a:t>
+              <a:t>A10</a:t>
+            </a:r>
+          </a:p>
+        </p:txBody>
+      </p:sp>
+      <p:sp>
+        <p:nvSpPr>
+          <p:cNvPr id="32" name="TextBox 31"/>
+          <p:cNvSpPr txBox="1"/>
+          <p:nvPr/>
+        </p:nvSpPr>
+        <p:spPr>
+          <a:xfrm>
+            <a:off x="7680960" y="4462272"/>
+            <a:ext cx="2377440" cy="219456"/>
+          </a:xfrm>
+          <a:prstGeom prst="rect">
+            <a:avLst/>
+          </a:prstGeom>
+          <a:solidFill>
+            <a:srgbClr val="FFFFFF"/>
+          </a:solidFill>
+          <a:ln>
+            <a:noFill/>
+          </a:ln>
+        </p:spPr>
+        <p:txBody>
+          <a:bodyPr wrap="none" lIns="25400" rIns="25400" tIns="0" bIns="0">
+            <a:spAutoFit/>
+          </a:bodyPr>
+          <a:lstStyle/>
+          <a:p>
+            <a:pPr algn="r"/>
+            <a:r>
+              <a:rPr sz="850" b="1" i="0">
+                <a:solidFill>
+                  <a:srgbClr val="154FC2"/>
+                </a:solidFill>
+              </a:rPr>
+              <a:t>poll InvalRing tail; read InvalEntry</a:t>
+            </a:r>
+          </a:p>
+        </p:txBody>
+      </p:sp>
+      <p:sp>
+        <p:nvSpPr>
+          <p:cNvPr id="33" name="Oval 32"/>
+          <p:cNvSpPr/>
+          <p:nvPr/>
+        </p:nvSpPr>
+        <p:spPr>
+          <a:xfrm>
+            <a:off x="10094976" y="4700016"/>
+            <a:ext cx="292608" cy="292608"/>
+          </a:xfrm>
+          <a:prstGeom prst="ellipse">
+            <a:avLst/>
+          </a:prstGeom>
+          <a:solidFill>
+            <a:srgbClr val="FFFFFF"/>
+          </a:solidFill>
+          <a:ln w="19050">
+            <a:solidFill>
+              <a:srgbClr val="154FC2"/>
+            </a:solidFill>
+          </a:ln>
+        </p:spPr>
+        <p:style>
+          <a:lnRef idx="1">
+            <a:schemeClr val="accent1"/>
+          </a:lnRef>
+          <a:fillRef idx="3">
+            <a:schemeClr val="accent1"/>
+          </a:fillRef>
+          <a:effectRef idx="2">
+            <a:schemeClr val="accent1"/>
+          </a:effectRef>
+          <a:fontRef idx="minor">
+            <a:schemeClr val="lt1"/>
+          </a:fontRef>
+        </p:style>
+        <p:txBody>
+          <a:bodyPr rtlCol="0" anchor="ctr" lIns="0" rIns="0" tIns="0" bIns="0"/>
+          <a:lstStyle/>
+          <a:p>
+            <a:pPr algn="ctr"/>
+            <a:r>
+              <a:rPr sz="800" b="1">
+                <a:solidFill>
+                  <a:srgbClr val="154FC2"/>
+                </a:solidFill>
+              </a:rPr>
+              <a:t>A11</a:t>
+            </a:r>
+          </a:p>
+        </p:txBody>
+      </p:sp>
+      <p:sp>
+        <p:nvSpPr>
+          <p:cNvPr id="34" name="TextBox 33"/>
+          <p:cNvSpPr txBox="1"/>
+          <p:nvPr/>
+        </p:nvSpPr>
+        <p:spPr>
+          <a:xfrm>
+            <a:off x="7498079" y="4754880"/>
+            <a:ext cx="2560320" cy="219456"/>
+          </a:xfrm>
+          <a:prstGeom prst="rect">
+            <a:avLst/>
+          </a:prstGeom>
+          <a:solidFill>
+            <a:srgbClr val="FFFFFF"/>
+          </a:solidFill>
+          <a:ln>
+            <a:noFill/>
+          </a:ln>
+        </p:spPr>
+        <p:txBody>
+          <a:bodyPr wrap="none" lIns="25400" rIns="25400" tIns="0" bIns="0">
+            <a:spAutoFit/>
+          </a:bodyPr>
+          <a:lstStyle/>
+          <a:p>
+            <a:pPr algn="r"/>
+            <a:r>
+              <a:rPr sz="850" b="1" i="0">
+                <a:solidFill>
+                  <a:srgbClr val="154FC2"/>
+                </a:solidFill>
+              </a:rPr>
+              <a:t>cache_pool_set_stale(K); bucket_epoch++ (seqlock CAS)</a:t>
             </a:r>
           </a:p>
         </p:txBody>
       </p:sp>
       <p:cxnSp>
         <p:nvCxnSpPr>
-          <p:cNvPr id="12" name="Connector 11"/>
+          <p:cNvPr id="35" name="Connector 34"/>
           <p:cNvCxnSpPr/>
           <p:nvPr/>
         </p:nvCxnSpPr>
         <p:spPr>
-          <a:xfrm flipV="1">
-            <a:off x="1828800" y="2011680"/>
-            <a:ext cx="2743200" cy="1005840"/>
+          <a:xfrm flipH="1">
+            <a:off x="5486400" y="5138928"/>
+            <a:ext cx="4754880" cy="0"/>
           </a:xfrm>
           <a:prstGeom prst="line">
             <a:avLst/>
           </a:prstGeom>
-          <a:ln w="31750">
+          <a:ln w="20320">
             <a:solidFill>
               <a:srgbClr val="154FC2"/>
             </a:solidFill>
@@ -3717,14 +4739,67 @@
       </p:cxnSp>
       <p:sp>
         <p:nvSpPr>
-          <p:cNvPr id="13" name="TextBox 12"/>
+          <p:cNvPr id="36" name="Oval 35"/>
+          <p:cNvSpPr/>
+          <p:nvPr/>
+        </p:nvSpPr>
+        <p:spPr>
+          <a:xfrm>
+            <a:off x="7717536" y="4992624"/>
+            <a:ext cx="292608" cy="292608"/>
+          </a:xfrm>
+          <a:prstGeom prst="ellipse">
+            <a:avLst/>
+          </a:prstGeom>
+          <a:solidFill>
+            <a:srgbClr val="FFFFFF"/>
+          </a:solidFill>
+          <a:ln w="19050">
+            <a:solidFill>
+              <a:srgbClr val="154FC2"/>
+            </a:solidFill>
+          </a:ln>
+        </p:spPr>
+        <p:style>
+          <a:lnRef idx="1">
+            <a:schemeClr val="accent1"/>
+          </a:lnRef>
+          <a:fillRef idx="3">
+            <a:schemeClr val="accent1"/>
+          </a:fillRef>
+          <a:effectRef idx="2">
+            <a:schemeClr val="accent1"/>
+          </a:effectRef>
+          <a:fontRef idx="minor">
+            <a:schemeClr val="lt1"/>
+          </a:fontRef>
+        </p:style>
+        <p:txBody>
+          <a:bodyPr rtlCol="0" anchor="ctr" lIns="0" rIns="0" tIns="0" bIns="0"/>
+          <a:lstStyle/>
+          <a:p>
+            <a:pPr algn="ctr"/>
+            <a:r>
+              <a:rPr sz="800" b="1">
+                <a:solidFill>
+                  <a:srgbClr val="154FC2"/>
+                </a:solidFill>
+              </a:rPr>
+              <a:t>A12</a:t>
+            </a:r>
+          </a:p>
+        </p:txBody>
+      </p:sp>
+      <p:sp>
+        <p:nvSpPr>
+          <p:cNvPr id="37" name="TextBox 36"/>
           <p:cNvSpPr txBox="1"/>
           <p:nvPr/>
         </p:nvSpPr>
         <p:spPr>
           <a:xfrm>
-            <a:off x="2971800" y="2331720"/>
-            <a:ext cx="548640" cy="201168"/>
+            <a:off x="6400800" y="5230368"/>
+            <a:ext cx="2926080" cy="219456"/>
           </a:xfrm>
           <a:prstGeom prst="rect">
             <a:avLst/>
@@ -3737,38 +4812,214 @@
           </a:ln>
         </p:spPr>
         <p:txBody>
-          <a:bodyPr wrap="none" lIns="12700" rIns="12700" tIns="0" bIns="0">
+          <a:bodyPr wrap="none" lIns="25400" rIns="25400" tIns="0" bIns="0">
             <a:spAutoFit/>
           </a:bodyPr>
           <a:lstStyle/>
           <a:p>
+            <a:pPr algn="l"/>
+            <a:r>
+              <a:rPr sz="850" b="1" i="0">
+                <a:solidFill>
+                  <a:srgbClr val="154FC2"/>
+                </a:solidFill>
+              </a:rPr>
+              <a:t>write InvalRing resp_op_id  (ACK)</a:t>
+            </a:r>
+          </a:p>
+        </p:txBody>
+      </p:sp>
+      <p:sp>
+        <p:nvSpPr>
+          <p:cNvPr id="38" name="Rectangle 37"/>
+          <p:cNvSpPr/>
+          <p:nvPr/>
+        </p:nvSpPr>
+        <p:spPr>
+          <a:xfrm>
+            <a:off x="5404104" y="4215384"/>
+            <a:ext cx="164592" cy="1197864"/>
+          </a:xfrm>
+          <a:prstGeom prst="rect">
+            <a:avLst/>
+          </a:prstGeom>
+          <a:solidFill>
+            <a:srgbClr val="FFCDD2"/>
+          </a:solidFill>
+          <a:ln w="6350">
+            <a:solidFill>
+              <a:srgbClr val="C62828"/>
+            </a:solidFill>
+          </a:ln>
+        </p:spPr>
+        <p:style>
+          <a:lnRef idx="1">
+            <a:schemeClr val="accent1"/>
+          </a:lnRef>
+          <a:fillRef idx="3">
+            <a:schemeClr val="accent1"/>
+          </a:fillRef>
+          <a:effectRef idx="2">
+            <a:schemeClr val="accent1"/>
+          </a:effectRef>
+          <a:fontRef idx="minor">
+            <a:schemeClr val="lt1"/>
+          </a:fontRef>
+        </p:style>
+        <p:txBody>
+          <a:bodyPr rtlCol="0" anchor="ctr"/>
+          <a:lstStyle/>
+          <a:p>
             <a:pPr algn="ctr"/>
-            <a:r>
-              <a:rPr sz="1000" b="1">
+          </a:p>
+        </p:txBody>
+      </p:sp>
+      <p:sp>
+        <p:nvSpPr>
+          <p:cNvPr id="39" name="TextBox 38"/>
+          <p:cNvSpPr txBox="1"/>
+          <p:nvPr/>
+        </p:nvSpPr>
+        <p:spPr>
+          <a:xfrm>
+            <a:off x="5623560" y="4722876"/>
+            <a:ext cx="1463040" cy="219456"/>
+          </a:xfrm>
+          <a:prstGeom prst="rect">
+            <a:avLst/>
+          </a:prstGeom>
+          <a:solidFill>
+            <a:srgbClr val="FFFFFF"/>
+          </a:solidFill>
+          <a:ln>
+            <a:noFill/>
+          </a:ln>
+        </p:spPr>
+        <p:txBody>
+          <a:bodyPr wrap="none" lIns="25400" rIns="25400" tIns="0" bIns="0">
+            <a:spAutoFit/>
+          </a:bodyPr>
+          <a:lstStyle/>
+          <a:p>
+            <a:pPr algn="l"/>
+            <a:r>
+              <a:rPr sz="800" b="1" i="1">
+                <a:solidFill>
+                  <a:srgbClr val="C62828"/>
+                </a:solidFill>
+              </a:rPr>
+              <a:t>blocked</a:t>
+            </a:r>
+          </a:p>
+        </p:txBody>
+      </p:sp>
+      <p:sp>
+        <p:nvSpPr>
+          <p:cNvPr id="40" name="Oval 39"/>
+          <p:cNvSpPr/>
+          <p:nvPr/>
+        </p:nvSpPr>
+        <p:spPr>
+          <a:xfrm>
+            <a:off x="5340096" y="5285232"/>
+            <a:ext cx="292608" cy="292608"/>
+          </a:xfrm>
+          <a:prstGeom prst="ellipse">
+            <a:avLst/>
+          </a:prstGeom>
+          <a:solidFill>
+            <a:srgbClr val="FFF49C"/>
+          </a:solidFill>
+          <a:ln w="19050">
+            <a:solidFill>
+              <a:srgbClr val="F9A825"/>
+            </a:solidFill>
+          </a:ln>
+        </p:spPr>
+        <p:style>
+          <a:lnRef idx="1">
+            <a:schemeClr val="accent1"/>
+          </a:lnRef>
+          <a:fillRef idx="3">
+            <a:schemeClr val="accent1"/>
+          </a:fillRef>
+          <a:effectRef idx="2">
+            <a:schemeClr val="accent1"/>
+          </a:effectRef>
+          <a:fontRef idx="minor">
+            <a:schemeClr val="lt1"/>
+          </a:fontRef>
+        </p:style>
+        <p:txBody>
+          <a:bodyPr rtlCol="0" anchor="ctr" lIns="0" rIns="0" tIns="0" bIns="0"/>
+          <a:lstStyle/>
+          <a:p>
+            <a:pPr algn="ctr"/>
+            <a:r>
+              <a:rPr sz="800" b="1">
+                <a:solidFill>
+                  <a:srgbClr val="333333"/>
+                </a:solidFill>
+              </a:rPr>
+              <a:t>A13</a:t>
+            </a:r>
+          </a:p>
+        </p:txBody>
+      </p:sp>
+      <p:sp>
+        <p:nvSpPr>
+          <p:cNvPr id="41" name="TextBox 40"/>
+          <p:cNvSpPr txBox="1"/>
+          <p:nvPr/>
+        </p:nvSpPr>
+        <p:spPr>
+          <a:xfrm>
+            <a:off x="5669280" y="5340096"/>
+            <a:ext cx="2743200" cy="219456"/>
+          </a:xfrm>
+          <a:prstGeom prst="rect">
+            <a:avLst/>
+          </a:prstGeom>
+          <a:solidFill>
+            <a:srgbClr val="FFFFFF"/>
+          </a:solidFill>
+          <a:ln>
+            <a:noFill/>
+          </a:ln>
+        </p:spPr>
+        <p:txBody>
+          <a:bodyPr wrap="none" lIns="25400" rIns="25400" tIns="0" bIns="0">
+            <a:spAutoFit/>
+          </a:bodyPr>
+          <a:lstStyle/>
+          <a:p>
+            <a:pPr algn="l"/>
+            <a:r>
+              <a:rPr sz="850" b="1" i="0">
                 <a:solidFill>
                   <a:srgbClr val="154FC2"/>
                 </a:solidFill>
               </a:rPr>
-              <a:t>A3</a:t>
+              <a:t>W7-W12: pool_alloc · pool_write · ★ W9 publish_slot_cow ★ · W10 dir + cache_pool_insert</a:t>
             </a:r>
           </a:p>
         </p:txBody>
       </p:sp>
       <p:cxnSp>
         <p:nvCxnSpPr>
-          <p:cNvPr id="14" name="Connector 13"/>
+          <p:cNvPr id="42" name="Connector 41"/>
           <p:cNvCxnSpPr/>
           <p:nvPr/>
         </p:nvCxnSpPr>
         <p:spPr>
-          <a:xfrm>
-            <a:off x="5486400" y="2011680"/>
-            <a:ext cx="0" cy="1005840"/>
+          <a:xfrm flipH="1">
+            <a:off x="1463040" y="5724144"/>
+            <a:ext cx="4023360" cy="0"/>
           </a:xfrm>
           <a:prstGeom prst="line">
             <a:avLst/>
           </a:prstGeom>
-          <a:ln w="31750">
+          <a:ln w="20320">
             <a:solidFill>
               <a:srgbClr val="154FC2"/>
             </a:solidFill>
@@ -3792,14 +5043,67 @@
       </p:cxnSp>
       <p:sp>
         <p:nvSpPr>
-          <p:cNvPr id="15" name="TextBox 14"/>
+          <p:cNvPr id="43" name="Oval 42"/>
+          <p:cNvSpPr/>
+          <p:nvPr/>
+        </p:nvSpPr>
+        <p:spPr>
+          <a:xfrm>
+            <a:off x="3328415" y="5577840"/>
+            <a:ext cx="292608" cy="292608"/>
+          </a:xfrm>
+          <a:prstGeom prst="ellipse">
+            <a:avLst/>
+          </a:prstGeom>
+          <a:solidFill>
+            <a:srgbClr val="FFFFFF"/>
+          </a:solidFill>
+          <a:ln w="19050">
+            <a:solidFill>
+              <a:srgbClr val="154FC2"/>
+            </a:solidFill>
+          </a:ln>
+        </p:spPr>
+        <p:style>
+          <a:lnRef idx="1">
+            <a:schemeClr val="accent1"/>
+          </a:lnRef>
+          <a:fillRef idx="3">
+            <a:schemeClr val="accent1"/>
+          </a:fillRef>
+          <a:effectRef idx="2">
+            <a:schemeClr val="accent1"/>
+          </a:effectRef>
+          <a:fontRef idx="minor">
+            <a:schemeClr val="lt1"/>
+          </a:fontRef>
+        </p:style>
+        <p:txBody>
+          <a:bodyPr rtlCol="0" anchor="ctr" lIns="0" rIns="0" tIns="0" bIns="0"/>
+          <a:lstStyle/>
+          <a:p>
+            <a:pPr algn="ctr"/>
+            <a:r>
+              <a:rPr sz="800" b="1">
+                <a:solidFill>
+                  <a:srgbClr val="154FC2"/>
+                </a:solidFill>
+              </a:rPr>
+              <a:t>A14</a:t>
+            </a:r>
+          </a:p>
+        </p:txBody>
+      </p:sp>
+      <p:sp>
+        <p:nvSpPr>
+          <p:cNvPr id="44" name="TextBox 43"/>
           <p:cNvSpPr txBox="1"/>
           <p:nvPr/>
         </p:nvSpPr>
         <p:spPr>
           <a:xfrm>
-            <a:off x="4983480" y="2423160"/>
-            <a:ext cx="457200" cy="201168"/>
+            <a:off x="2011679" y="5815584"/>
+            <a:ext cx="2926080" cy="219456"/>
           </a:xfrm>
           <a:prstGeom prst="rect">
             <a:avLst/>
@@ -3812,103 +5116,78 @@
           </a:ln>
         </p:spPr>
         <p:txBody>
-          <a:bodyPr wrap="none" lIns="12700" rIns="12700" tIns="0" bIns="0">
+          <a:bodyPr wrap="none" lIns="25400" rIns="25400" tIns="0" bIns="0">
             <a:spAutoFit/>
           </a:bodyPr>
           <a:lstStyle/>
           <a:p>
-            <a:pPr algn="ctr"/>
-            <a:r>
-              <a:rPr sz="1000" b="1">
+            <a:pPr algn="l"/>
+            <a:r>
+              <a:rPr sz="850" b="1" i="0">
                 <a:solidFill>
                   <a:srgbClr val="154FC2"/>
                 </a:solidFill>
               </a:rPr>
-              <a:t>A5</a:t>
-            </a:r>
-          </a:p>
-        </p:txBody>
-      </p:sp>
-      <p:sp>
-        <p:nvSpPr>
-          <p:cNvPr id="16" name="TextBox 15"/>
-          <p:cNvSpPr txBox="1"/>
-          <p:nvPr/>
-        </p:nvSpPr>
-        <p:spPr>
-          <a:xfrm>
-            <a:off x="4572000" y="4114800"/>
-            <a:ext cx="2926080" cy="365760"/>
+              <a:t>write WriteRing resp_op_id  (ACK)  ⇒ worker A4 returns 0</a:t>
+            </a:r>
+          </a:p>
+        </p:txBody>
+      </p:sp>
+      <p:sp>
+        <p:nvSpPr>
+          <p:cNvPr id="45" name="Rectangle 44"/>
+          <p:cNvSpPr/>
+          <p:nvPr/>
+        </p:nvSpPr>
+        <p:spPr>
+          <a:xfrm>
+            <a:off x="1380744" y="2752344"/>
+            <a:ext cx="164592" cy="3246120"/>
           </a:xfrm>
           <a:prstGeom prst="rect">
             <a:avLst/>
           </a:prstGeom>
-          <a:noFill/>
-        </p:spPr>
-        <p:txBody>
-          <a:bodyPr wrap="none">
-            <a:spAutoFit/>
-          </a:bodyPr>
-          <a:lstStyle/>
-          <a:p>
-            <a:pPr algn="ctr"/>
-            <a:r>
-              <a:rPr sz="1000" b="1">
-                <a:solidFill>
-                  <a:srgbClr val="0D327D"/>
-                </a:solidFill>
-              </a:rPr>
-              <a:t>A6: execute_write_local W1..W12</a:t>
-            </a:r>
-          </a:p>
-        </p:txBody>
-      </p:sp>
-      <p:cxnSp>
-        <p:nvCxnSpPr>
-          <p:cNvPr id="17" name="Connector 16"/>
-          <p:cNvCxnSpPr/>
-          <p:nvPr/>
-        </p:nvCxnSpPr>
-        <p:spPr>
-          <a:xfrm flipV="1">
-            <a:off x="6949440" y="2011680"/>
-            <a:ext cx="822960" cy="1005840"/>
-          </a:xfrm>
-          <a:prstGeom prst="line">
-            <a:avLst/>
-          </a:prstGeom>
-          <a:ln w="31750">
+          <a:solidFill>
+            <a:srgbClr val="FFCDD2"/>
+          </a:solidFill>
+          <a:ln w="6350">
             <a:solidFill>
-              <a:srgbClr val="154FC2"/>
+              <a:srgbClr val="C62828"/>
             </a:solidFill>
-            <a:tailEnd type="triangle" w="med" h="med"/>
           </a:ln>
         </p:spPr>
         <p:style>
-          <a:lnRef idx="2">
+          <a:lnRef idx="1">
             <a:schemeClr val="accent1"/>
           </a:lnRef>
-          <a:fillRef idx="0">
+          <a:fillRef idx="3">
             <a:schemeClr val="accent1"/>
           </a:fillRef>
-          <a:effectRef idx="1">
+          <a:effectRef idx="2">
             <a:schemeClr val="accent1"/>
           </a:effectRef>
           <a:fontRef idx="minor">
-            <a:schemeClr val="tx1"/>
+            <a:schemeClr val="lt1"/>
           </a:fontRef>
         </p:style>
-      </p:cxnSp>
-      <p:sp>
-        <p:nvSpPr>
-          <p:cNvPr id="18" name="TextBox 17"/>
+        <p:txBody>
+          <a:bodyPr rtlCol="0" anchor="ctr"/>
+          <a:lstStyle/>
+          <a:p>
+            <a:pPr algn="ctr"/>
+          </a:p>
+        </p:txBody>
+      </p:sp>
+      <p:sp>
+        <p:nvSpPr>
+          <p:cNvPr id="46" name="TextBox 45"/>
           <p:cNvSpPr txBox="1"/>
           <p:nvPr/>
         </p:nvSpPr>
         <p:spPr>
           <a:xfrm>
-            <a:off x="7406640" y="2423160"/>
-            <a:ext cx="457200" cy="201168"/>
+            <a:off x="1600200" y="4283964"/>
+            <a:ext cx="1463040" cy="219456"/>
           </a:xfrm>
           <a:prstGeom prst="rect">
             <a:avLst/>
@@ -3921,561 +5200,43 @@
           </a:ln>
         </p:spPr>
         <p:txBody>
-          <a:bodyPr wrap="none" lIns="12700" rIns="12700" tIns="0" bIns="0">
+          <a:bodyPr wrap="none" lIns="25400" rIns="25400" tIns="0" bIns="0">
             <a:spAutoFit/>
           </a:bodyPr>
           <a:lstStyle/>
           <a:p>
-            <a:pPr algn="ctr"/>
-            <a:r>
-              <a:rPr sz="1000" b="1">
-                <a:solidFill>
-                  <a:srgbClr val="154FC2"/>
-                </a:solidFill>
-              </a:rPr>
-              <a:t>A7</a:t>
-            </a:r>
-          </a:p>
-        </p:txBody>
-      </p:sp>
-      <p:cxnSp>
-        <p:nvCxnSpPr>
-          <p:cNvPr id="19" name="Connector 18"/>
-          <p:cNvCxnSpPr/>
-          <p:nvPr/>
-        </p:nvCxnSpPr>
-        <p:spPr>
-          <a:xfrm flipV="1">
-            <a:off x="7223760" y="2011680"/>
-            <a:ext cx="1463040" cy="1005840"/>
-          </a:xfrm>
-          <a:prstGeom prst="line">
-            <a:avLst/>
-          </a:prstGeom>
-          <a:ln w="31750">
-            <a:solidFill>
-              <a:srgbClr val="154FC2"/>
-            </a:solidFill>
-            <a:tailEnd type="triangle" w="med" h="med"/>
-          </a:ln>
-        </p:spPr>
-        <p:style>
-          <a:lnRef idx="2">
-            <a:schemeClr val="accent1"/>
-          </a:lnRef>
-          <a:fillRef idx="0">
-            <a:schemeClr val="accent1"/>
-          </a:fillRef>
-          <a:effectRef idx="1">
-            <a:schemeClr val="accent1"/>
-          </a:effectRef>
-          <a:fontRef idx="minor">
-            <a:schemeClr val="tx1"/>
-          </a:fontRef>
-        </p:style>
-      </p:cxnSp>
-      <p:sp>
-        <p:nvSpPr>
-          <p:cNvPr id="20" name="TextBox 19"/>
-          <p:cNvSpPr txBox="1"/>
-          <p:nvPr/>
-        </p:nvSpPr>
-        <p:spPr>
-          <a:xfrm>
-            <a:off x="7726679" y="2331720"/>
-            <a:ext cx="548640" cy="201168"/>
-          </a:xfrm>
-          <a:prstGeom prst="rect">
+            <a:pPr algn="l"/>
+            <a:r>
+              <a:rPr sz="800" b="1" i="1">
+                <a:solidFill>
+                  <a:srgbClr val="C62828"/>
+                </a:solidFill>
+              </a:rPr>
+              <a:t>blocked</a:t>
+            </a:r>
+          </a:p>
+        </p:txBody>
+      </p:sp>
+      <p:sp>
+        <p:nvSpPr>
+          <p:cNvPr id="47" name="Rounded Rectangle 46"/>
+          <p:cNvSpPr/>
+          <p:nvPr/>
+        </p:nvSpPr>
+        <p:spPr>
+          <a:xfrm>
+            <a:off x="274320" y="6355080"/>
+            <a:ext cx="7772400" cy="365760"/>
+          </a:xfrm>
+          <a:prstGeom prst="roundRect">
             <a:avLst/>
           </a:prstGeom>
           <a:solidFill>
             <a:srgbClr val="FFFFFF"/>
           </a:solidFill>
-          <a:ln>
-            <a:noFill/>
-          </a:ln>
-        </p:spPr>
-        <p:txBody>
-          <a:bodyPr wrap="none" lIns="12700" rIns="12700" tIns="0" bIns="0">
-            <a:spAutoFit/>
-          </a:bodyPr>
-          <a:lstStyle/>
-          <a:p>
-            <a:pPr algn="ctr"/>
-            <a:r>
-              <a:rPr sz="1000" b="1">
-                <a:solidFill>
-                  <a:srgbClr val="154FC2"/>
-                </a:solidFill>
-              </a:rPr>
-              <a:t>A8</a:t>
-            </a:r>
-          </a:p>
-        </p:txBody>
-      </p:sp>
-      <p:cxnSp>
-        <p:nvCxnSpPr>
-          <p:cNvPr id="21" name="Connector 20"/>
-          <p:cNvCxnSpPr/>
-          <p:nvPr/>
-        </p:nvCxnSpPr>
-        <p:spPr>
-          <a:xfrm>
-            <a:off x="9784080" y="2011680"/>
-            <a:ext cx="0" cy="1005840"/>
-          </a:xfrm>
-          <a:prstGeom prst="line">
-            <a:avLst/>
-          </a:prstGeom>
-          <a:ln w="31750">
+          <a:ln w="7620">
             <a:solidFill>
-              <a:srgbClr val="154FC2"/>
-            </a:solidFill>
-            <a:tailEnd type="triangle" w="med" h="med"/>
-          </a:ln>
-        </p:spPr>
-        <p:style>
-          <a:lnRef idx="2">
-            <a:schemeClr val="accent1"/>
-          </a:lnRef>
-          <a:fillRef idx="0">
-            <a:schemeClr val="accent1"/>
-          </a:fillRef>
-          <a:effectRef idx="1">
-            <a:schemeClr val="accent1"/>
-          </a:effectRef>
-          <a:fontRef idx="minor">
-            <a:schemeClr val="tx1"/>
-          </a:fontRef>
-        </p:style>
-      </p:cxnSp>
-      <p:sp>
-        <p:nvSpPr>
-          <p:cNvPr id="22" name="TextBox 21"/>
-          <p:cNvSpPr txBox="1"/>
-          <p:nvPr/>
-        </p:nvSpPr>
-        <p:spPr>
-          <a:xfrm>
-            <a:off x="9281159" y="2423160"/>
-            <a:ext cx="457200" cy="201168"/>
-          </a:xfrm>
-          <a:prstGeom prst="rect">
-            <a:avLst/>
-          </a:prstGeom>
-          <a:solidFill>
-            <a:srgbClr val="FFFFFF"/>
-          </a:solidFill>
-          <a:ln>
-            <a:noFill/>
-          </a:ln>
-        </p:spPr>
-        <p:txBody>
-          <a:bodyPr wrap="none" lIns="12700" rIns="12700" tIns="0" bIns="0">
-            <a:spAutoFit/>
-          </a:bodyPr>
-          <a:lstStyle/>
-          <a:p>
-            <a:pPr algn="ctr"/>
-            <a:r>
-              <a:rPr sz="1000" b="1">
-                <a:solidFill>
-                  <a:srgbClr val="154FC2"/>
-                </a:solidFill>
-              </a:rPr>
-              <a:t>A10</a:t>
-            </a:r>
-          </a:p>
-        </p:txBody>
-      </p:sp>
-      <p:sp>
-        <p:nvSpPr>
-          <p:cNvPr id="23" name="TextBox 22"/>
-          <p:cNvSpPr txBox="1"/>
-          <p:nvPr/>
-        </p:nvSpPr>
-        <p:spPr>
-          <a:xfrm>
-            <a:off x="9144000" y="4114800"/>
-            <a:ext cx="2834640" cy="365760"/>
-          </a:xfrm>
-          <a:prstGeom prst="rect">
-            <a:avLst/>
-          </a:prstGeom>
-          <a:noFill/>
-        </p:spPr>
-        <p:txBody>
-          <a:bodyPr wrap="none">
-            <a:spAutoFit/>
-          </a:bodyPr>
-          <a:lstStyle/>
-          <a:p>
-            <a:pPr algn="ctr"/>
-            <a:r>
-              <a:rPr sz="900" b="1">
-                <a:solidFill>
-                  <a:srgbClr val="0D327D"/>
-                </a:solidFill>
-              </a:rPr>
-              <a:t>A11: cache_pool_set_stale + epoch++</a:t>
-            </a:r>
-          </a:p>
-        </p:txBody>
-      </p:sp>
-      <p:cxnSp>
-        <p:nvCxnSpPr>
-          <p:cNvPr id="24" name="Connector 23"/>
-          <p:cNvCxnSpPr/>
-          <p:nvPr/>
-        </p:nvCxnSpPr>
-        <p:spPr>
-          <a:xfrm flipV="1">
-            <a:off x="10607040" y="2011680"/>
-            <a:ext cx="0" cy="1005840"/>
-          </a:xfrm>
-          <a:prstGeom prst="line">
-            <a:avLst/>
-          </a:prstGeom>
-          <a:ln w="31750">
-            <a:solidFill>
-              <a:srgbClr val="154FC2"/>
-            </a:solidFill>
-            <a:tailEnd type="triangle" w="med" h="med"/>
-          </a:ln>
-        </p:spPr>
-        <p:style>
-          <a:lnRef idx="2">
-            <a:schemeClr val="accent1"/>
-          </a:lnRef>
-          <a:fillRef idx="0">
-            <a:schemeClr val="accent1"/>
-          </a:fillRef>
-          <a:effectRef idx="1">
-            <a:schemeClr val="accent1"/>
-          </a:effectRef>
-          <a:fontRef idx="minor">
-            <a:schemeClr val="tx1"/>
-          </a:fontRef>
-        </p:style>
-      </p:cxnSp>
-      <p:sp>
-        <p:nvSpPr>
-          <p:cNvPr id="25" name="TextBox 24"/>
-          <p:cNvSpPr txBox="1"/>
-          <p:nvPr/>
-        </p:nvSpPr>
-        <p:spPr>
-          <a:xfrm>
-            <a:off x="10652760" y="2423160"/>
-            <a:ext cx="457200" cy="201168"/>
-          </a:xfrm>
-          <a:prstGeom prst="rect">
-            <a:avLst/>
-          </a:prstGeom>
-          <a:solidFill>
-            <a:srgbClr val="FFFFFF"/>
-          </a:solidFill>
-          <a:ln>
-            <a:noFill/>
-          </a:ln>
-        </p:spPr>
-        <p:txBody>
-          <a:bodyPr wrap="none" lIns="12700" rIns="12700" tIns="0" bIns="0">
-            <a:spAutoFit/>
-          </a:bodyPr>
-          <a:lstStyle/>
-          <a:p>
-            <a:pPr algn="ctr"/>
-            <a:r>
-              <a:rPr sz="1000" b="1">
-                <a:solidFill>
-                  <a:srgbClr val="154FC2"/>
-                </a:solidFill>
-              </a:rPr>
-              <a:t>A12</a:t>
-            </a:r>
-          </a:p>
-        </p:txBody>
-      </p:sp>
-      <p:cxnSp>
-        <p:nvCxnSpPr>
-          <p:cNvPr id="26" name="Connector 25"/>
-          <p:cNvCxnSpPr/>
-          <p:nvPr/>
-        </p:nvCxnSpPr>
-        <p:spPr>
-          <a:xfrm flipH="1">
-            <a:off x="8046720" y="2011680"/>
-            <a:ext cx="2194560" cy="0"/>
-          </a:xfrm>
-          <a:prstGeom prst="line">
-            <a:avLst/>
-          </a:prstGeom>
-          <a:ln w="19050">
-            <a:solidFill>
-              <a:srgbClr val="154FC2"/>
-            </a:solidFill>
-            <a:tailEnd type="triangle" w="med" h="med"/>
-          </a:ln>
-        </p:spPr>
-        <p:style>
-          <a:lnRef idx="2">
-            <a:schemeClr val="accent1"/>
-          </a:lnRef>
-          <a:fillRef idx="0">
-            <a:schemeClr val="accent1"/>
-          </a:fillRef>
-          <a:effectRef idx="1">
-            <a:schemeClr val="accent1"/>
-          </a:effectRef>
-          <a:fontRef idx="minor">
-            <a:schemeClr val="tx1"/>
-          </a:fontRef>
-        </p:style>
-      </p:cxnSp>
-      <p:sp>
-        <p:nvSpPr>
-          <p:cNvPr id="27" name="TextBox 26"/>
-          <p:cNvSpPr txBox="1"/>
-          <p:nvPr/>
-        </p:nvSpPr>
-        <p:spPr>
-          <a:xfrm>
-            <a:off x="8915400" y="1828800"/>
-            <a:ext cx="548640" cy="201168"/>
-          </a:xfrm>
-          <a:prstGeom prst="rect">
-            <a:avLst/>
-          </a:prstGeom>
-          <a:solidFill>
-            <a:srgbClr val="FFFFFF"/>
-          </a:solidFill>
-          <a:ln>
-            <a:noFill/>
-          </a:ln>
-        </p:spPr>
-        <p:txBody>
-          <a:bodyPr wrap="none" lIns="12700" rIns="12700" tIns="0" bIns="0">
-            <a:spAutoFit/>
-          </a:bodyPr>
-          <a:lstStyle/>
-          <a:p>
-            <a:pPr algn="ctr"/>
-            <a:r>
-              <a:rPr sz="1000" b="1">
-                <a:solidFill>
-                  <a:srgbClr val="154FC2"/>
-                </a:solidFill>
-              </a:rPr>
-              <a:t>A9 ACK</a:t>
-            </a:r>
-          </a:p>
-        </p:txBody>
-      </p:sp>
-      <p:cxnSp>
-        <p:nvCxnSpPr>
-          <p:cNvPr id="28" name="Connector 27"/>
-          <p:cNvCxnSpPr/>
-          <p:nvPr/>
-        </p:nvCxnSpPr>
-        <p:spPr>
-          <a:xfrm flipH="1" flipV="1">
-            <a:off x="4937760" y="2011680"/>
-            <a:ext cx="457200" cy="1005840"/>
-          </a:xfrm>
-          <a:prstGeom prst="line">
-            <a:avLst/>
-          </a:prstGeom>
-          <a:ln w="31750">
-            <a:solidFill>
-              <a:srgbClr val="154FC2"/>
-            </a:solidFill>
-            <a:tailEnd type="triangle" w="med" h="med"/>
-          </a:ln>
-        </p:spPr>
-        <p:style>
-          <a:lnRef idx="2">
-            <a:schemeClr val="accent1"/>
-          </a:lnRef>
-          <a:fillRef idx="0">
-            <a:schemeClr val="accent1"/>
-          </a:fillRef>
-          <a:effectRef idx="1">
-            <a:schemeClr val="accent1"/>
-          </a:effectRef>
-          <a:fontRef idx="minor">
-            <a:schemeClr val="tx1"/>
-          </a:fontRef>
-        </p:style>
-      </p:cxnSp>
-      <p:sp>
-        <p:nvSpPr>
-          <p:cNvPr id="29" name="TextBox 28"/>
-          <p:cNvSpPr txBox="1"/>
-          <p:nvPr/>
-        </p:nvSpPr>
-        <p:spPr>
-          <a:xfrm>
-            <a:off x="4663440" y="2423160"/>
-            <a:ext cx="457200" cy="201168"/>
-          </a:xfrm>
-          <a:prstGeom prst="rect">
-            <a:avLst/>
-          </a:prstGeom>
-          <a:solidFill>
-            <a:srgbClr val="FFFFFF"/>
-          </a:solidFill>
-          <a:ln>
-            <a:noFill/>
-          </a:ln>
-        </p:spPr>
-        <p:txBody>
-          <a:bodyPr wrap="none" lIns="12700" rIns="12700" tIns="0" bIns="0">
-            <a:spAutoFit/>
-          </a:bodyPr>
-          <a:lstStyle/>
-          <a:p>
-            <a:pPr algn="ctr"/>
-            <a:r>
-              <a:rPr sz="1000" b="1">
-                <a:solidFill>
-                  <a:srgbClr val="154FC2"/>
-                </a:solidFill>
-              </a:rPr>
-              <a:t>A13</a:t>
-            </a:r>
-          </a:p>
-        </p:txBody>
-      </p:sp>
-      <p:cxnSp>
-        <p:nvCxnSpPr>
-          <p:cNvPr id="30" name="Connector 29"/>
-          <p:cNvCxnSpPr/>
-          <p:nvPr/>
-        </p:nvCxnSpPr>
-        <p:spPr>
-          <a:xfrm flipH="1">
-            <a:off x="2286000" y="2011680"/>
-            <a:ext cx="1920240" cy="0"/>
-          </a:xfrm>
-          <a:prstGeom prst="line">
-            <a:avLst/>
-          </a:prstGeom>
-          <a:ln w="19050">
-            <a:solidFill>
-              <a:srgbClr val="154FC2"/>
-            </a:solidFill>
-            <a:tailEnd type="triangle" w="med" h="med"/>
-          </a:ln>
-        </p:spPr>
-        <p:style>
-          <a:lnRef idx="2">
-            <a:schemeClr val="accent1"/>
-          </a:lnRef>
-          <a:fillRef idx="0">
-            <a:schemeClr val="accent1"/>
-          </a:fillRef>
-          <a:effectRef idx="1">
-            <a:schemeClr val="accent1"/>
-          </a:effectRef>
-          <a:fontRef idx="minor">
-            <a:schemeClr val="tx1"/>
-          </a:fontRef>
-        </p:style>
-      </p:cxnSp>
-      <p:sp>
-        <p:nvSpPr>
-          <p:cNvPr id="31" name="TextBox 30"/>
-          <p:cNvSpPr txBox="1"/>
-          <p:nvPr/>
-        </p:nvSpPr>
-        <p:spPr>
-          <a:xfrm>
-            <a:off x="3017520" y="2057400"/>
-            <a:ext cx="548640" cy="201168"/>
-          </a:xfrm>
-          <a:prstGeom prst="rect">
-            <a:avLst/>
-          </a:prstGeom>
-          <a:solidFill>
-            <a:srgbClr val="FFFFFF"/>
-          </a:solidFill>
-          <a:ln>
-            <a:noFill/>
-          </a:ln>
-        </p:spPr>
-        <p:txBody>
-          <a:bodyPr wrap="none" lIns="12700" rIns="12700" tIns="0" bIns="0">
-            <a:spAutoFit/>
-          </a:bodyPr>
-          <a:lstStyle/>
-          <a:p>
-            <a:pPr algn="ctr"/>
-            <a:r>
-              <a:rPr sz="1000" b="1">
-                <a:solidFill>
-                  <a:srgbClr val="154FC2"/>
-                </a:solidFill>
-              </a:rPr>
-              <a:t>A4 ACK</a:t>
-            </a:r>
-          </a:p>
-        </p:txBody>
-      </p:sp>
-      <p:sp>
-        <p:nvSpPr>
-          <p:cNvPr id="32" name="TextBox 31"/>
-          <p:cNvSpPr txBox="1"/>
-          <p:nvPr/>
-        </p:nvSpPr>
-        <p:spPr>
-          <a:xfrm>
-            <a:off x="274320" y="4023360"/>
-            <a:ext cx="2560320" cy="365760"/>
-          </a:xfrm>
-          <a:prstGeom prst="rect">
-            <a:avLst/>
-          </a:prstGeom>
-          <a:noFill/>
-        </p:spPr>
-        <p:txBody>
-          <a:bodyPr wrap="none">
-            <a:spAutoFit/>
-          </a:bodyPr>
-          <a:lstStyle/>
-          <a:p>
-            <a:pPr algn="ctr"/>
-            <a:r>
-              <a:rPr sz="900" b="1">
-                <a:solidFill>
-                  <a:srgbClr val="0D327D"/>
-                </a:solidFill>
-              </a:rPr>
-              <a:t>A14: free slot, return 0</a:t>
-            </a:r>
-          </a:p>
-        </p:txBody>
-      </p:sp>
-      <p:sp>
-        <p:nvSpPr>
-          <p:cNvPr id="33" name="Rounded Rectangle 32"/>
-          <p:cNvSpPr/>
-          <p:nvPr/>
-        </p:nvSpPr>
-        <p:spPr>
-          <a:xfrm>
-            <a:off x="274320" y="4572000"/>
-            <a:ext cx="11612880" cy="1463040"/>
-          </a:xfrm>
-          <a:prstGeom prst="roundRect">
-            <a:avLst/>
-          </a:prstGeom>
-          <a:solidFill>
-            <a:srgbClr val="FFE0B2"/>
-          </a:solidFill>
-          <a:ln w="19050">
-            <a:solidFill>
-              <a:srgbClr val="E65100"/>
+              <a:srgbClr val="9E9E9E"/>
             </a:solidFill>
           </a:ln>
         </p:spPr>
@@ -4494,634 +5255,23 @@
           </a:fontRef>
         </p:style>
         <p:txBody>
-          <a:bodyPr rtlCol="0" anchor="ctr" lIns="38100" rIns="38100" tIns="25400" bIns="25400" wrap="square"/>
+          <a:bodyPr rtlCol="0" anchor="ctr"/>
           <a:lstStyle/>
           <a:p>
             <a:pPr algn="ctr"/>
-            <a:r>
-              <a:rPr sz="1100" b="1">
-                <a:solidFill>
-                  <a:srgbClr val="8C3200"/>
-                </a:solidFill>
-              </a:rPr>
-              <a:t>Protocol C — host 0 worker only, in-place under cross-host LFM lock</a:t>
-            </a:r>
-          </a:p>
-        </p:txBody>
-      </p:sp>
-      <p:cxnSp>
-        <p:nvCxnSpPr>
-          <p:cNvPr id="34" name="Connector 33"/>
-          <p:cNvCxnSpPr/>
-          <p:nvPr/>
-        </p:nvCxnSpPr>
-        <p:spPr>
-          <a:xfrm flipV="1">
-            <a:off x="1828800" y="2011680"/>
-            <a:ext cx="0" cy="2560320"/>
-          </a:xfrm>
-          <a:prstGeom prst="line">
-            <a:avLst/>
-          </a:prstGeom>
-          <a:ln w="25400">
-            <a:solidFill>
-              <a:srgbClr val="E65100"/>
-            </a:solidFill>
-            <a:tailEnd type="triangle" w="med" h="med"/>
-            <a:prstDash val="dash"/>
-          </a:ln>
-        </p:spPr>
-        <p:style>
-          <a:lnRef idx="2">
-            <a:schemeClr val="accent1"/>
-          </a:lnRef>
-          <a:fillRef idx="0">
-            <a:schemeClr val="accent1"/>
-          </a:fillRef>
-          <a:effectRef idx="1">
-            <a:schemeClr val="accent1"/>
-          </a:effectRef>
-          <a:fontRef idx="minor">
-            <a:schemeClr val="tx1"/>
-          </a:fontRef>
-        </p:style>
-      </p:cxnSp>
-      <p:sp>
-        <p:nvSpPr>
-          <p:cNvPr id="35" name="TextBox 34"/>
+          </a:p>
+        </p:txBody>
+      </p:sp>
+      <p:sp>
+        <p:nvSpPr>
+          <p:cNvPr id="48" name="TextBox 47"/>
           <p:cNvSpPr txBox="1"/>
           <p:nvPr/>
         </p:nvSpPr>
         <p:spPr>
           <a:xfrm>
-            <a:off x="1325880" y="3200400"/>
-            <a:ext cx="457200" cy="201168"/>
-          </a:xfrm>
-          <a:prstGeom prst="rect">
-            <a:avLst/>
-          </a:prstGeom>
-          <a:solidFill>
-            <a:srgbClr val="FFFFFF"/>
-          </a:solidFill>
-          <a:ln>
-            <a:noFill/>
-          </a:ln>
-        </p:spPr>
-        <p:txBody>
-          <a:bodyPr wrap="none" lIns="12700" rIns="12700" tIns="0" bIns="0">
-            <a:spAutoFit/>
-          </a:bodyPr>
-          <a:lstStyle/>
-          <a:p>
-            <a:pPr algn="ctr"/>
-            <a:r>
-              <a:rPr sz="1000" b="1">
-                <a:solidFill>
-                  <a:srgbClr val="E65100"/>
-                </a:solidFill>
-              </a:rPr>
-              <a:t>C1 LFM acquire</a:t>
-            </a:r>
-          </a:p>
-        </p:txBody>
-      </p:sp>
-      <p:cxnSp>
-        <p:nvCxnSpPr>
-          <p:cNvPr id="36" name="Connector 35"/>
-          <p:cNvCxnSpPr/>
-          <p:nvPr/>
-        </p:nvCxnSpPr>
-        <p:spPr>
-          <a:xfrm flipV="1">
-            <a:off x="3200400" y="2011680"/>
-            <a:ext cx="0" cy="2560320"/>
-          </a:xfrm>
-          <a:prstGeom prst="line">
-            <a:avLst/>
-          </a:prstGeom>
-          <a:ln w="31750">
-            <a:solidFill>
-              <a:srgbClr val="E65100"/>
-            </a:solidFill>
-            <a:tailEnd type="triangle" w="med" h="med"/>
-            <a:prstDash val="dash"/>
-          </a:ln>
-        </p:spPr>
-        <p:style>
-          <a:lnRef idx="2">
-            <a:schemeClr val="accent1"/>
-          </a:lnRef>
-          <a:fillRef idx="0">
-            <a:schemeClr val="accent1"/>
-          </a:fillRef>
-          <a:effectRef idx="1">
-            <a:schemeClr val="accent1"/>
-          </a:effectRef>
-          <a:fontRef idx="minor">
-            <a:schemeClr val="tx1"/>
-          </a:fontRef>
-        </p:style>
-      </p:cxnSp>
-      <p:sp>
-        <p:nvSpPr>
-          <p:cNvPr id="37" name="TextBox 36"/>
-          <p:cNvSpPr txBox="1"/>
-          <p:nvPr/>
-        </p:nvSpPr>
-        <p:spPr>
-          <a:xfrm>
-            <a:off x="3246120" y="3200400"/>
-            <a:ext cx="457200" cy="201168"/>
-          </a:xfrm>
-          <a:prstGeom prst="rect">
-            <a:avLst/>
-          </a:prstGeom>
-          <a:solidFill>
-            <a:srgbClr val="FFFFFF"/>
-          </a:solidFill>
-          <a:ln>
-            <a:noFill/>
-          </a:ln>
-        </p:spPr>
-        <p:txBody>
-          <a:bodyPr wrap="none" lIns="12700" rIns="12700" tIns="0" bIns="0">
-            <a:spAutoFit/>
-          </a:bodyPr>
-          <a:lstStyle/>
-          <a:p>
-            <a:pPr algn="ctr"/>
-            <a:r>
-              <a:rPr sz="1000" b="1">
-                <a:solidFill>
-                  <a:srgbClr val="E65100"/>
-                </a:solidFill>
-              </a:rPr>
-              <a:t>C2 flush</a:t>
-            </a:r>
-          </a:p>
-        </p:txBody>
-      </p:sp>
-      <p:cxnSp>
-        <p:nvCxnSpPr>
-          <p:cNvPr id="38" name="Connector 37"/>
-          <p:cNvCxnSpPr/>
-          <p:nvPr/>
-        </p:nvCxnSpPr>
-        <p:spPr>
-          <a:xfrm flipV="1">
-            <a:off x="4572000" y="2011680"/>
-            <a:ext cx="0" cy="2560320"/>
-          </a:xfrm>
-          <a:prstGeom prst="line">
-            <a:avLst/>
-          </a:prstGeom>
-          <a:ln w="31750">
-            <a:solidFill>
-              <a:srgbClr val="E65100"/>
-            </a:solidFill>
-            <a:tailEnd type="triangle" w="med" h="med"/>
-            <a:prstDash val="dash"/>
-          </a:ln>
-        </p:spPr>
-        <p:style>
-          <a:lnRef idx="2">
-            <a:schemeClr val="accent1"/>
-          </a:lnRef>
-          <a:fillRef idx="0">
-            <a:schemeClr val="accent1"/>
-          </a:fillRef>
-          <a:effectRef idx="1">
-            <a:schemeClr val="accent1"/>
-          </a:effectRef>
-          <a:fontRef idx="minor">
-            <a:schemeClr val="tx1"/>
-          </a:fontRef>
-        </p:style>
-      </p:cxnSp>
-      <p:sp>
-        <p:nvSpPr>
-          <p:cNvPr id="39" name="TextBox 38"/>
-          <p:cNvSpPr txBox="1"/>
-          <p:nvPr/>
-        </p:nvSpPr>
-        <p:spPr>
-          <a:xfrm>
-            <a:off x="4617720" y="3200400"/>
-            <a:ext cx="457200" cy="201168"/>
-          </a:xfrm>
-          <a:prstGeom prst="rect">
-            <a:avLst/>
-          </a:prstGeom>
-          <a:solidFill>
-            <a:srgbClr val="FFFFFF"/>
-          </a:solidFill>
-          <a:ln>
-            <a:noFill/>
-          </a:ln>
-        </p:spPr>
-        <p:txBody>
-          <a:bodyPr wrap="none" lIns="12700" rIns="12700" tIns="0" bIns="0">
-            <a:spAutoFit/>
-          </a:bodyPr>
-          <a:lstStyle/>
-          <a:p>
-            <a:pPr algn="ctr"/>
-            <a:r>
-              <a:rPr sz="1000" b="1">
-                <a:solidFill>
-                  <a:srgbClr val="E65100"/>
-                </a:solidFill>
-              </a:rPr>
-              <a:t>C3 scan</a:t>
-            </a:r>
-          </a:p>
-        </p:txBody>
-      </p:sp>
-      <p:cxnSp>
-        <p:nvCxnSpPr>
-          <p:cNvPr id="40" name="Connector 39"/>
-          <p:cNvCxnSpPr/>
-          <p:nvPr/>
-        </p:nvCxnSpPr>
-        <p:spPr>
-          <a:xfrm flipV="1">
-            <a:off x="6126480" y="2011680"/>
-            <a:ext cx="0" cy="2560320"/>
-          </a:xfrm>
-          <a:prstGeom prst="line">
-            <a:avLst/>
-          </a:prstGeom>
-          <a:ln w="31750">
-            <a:solidFill>
-              <a:srgbClr val="E65100"/>
-            </a:solidFill>
-            <a:tailEnd type="triangle" w="med" h="med"/>
-            <a:prstDash val="dash"/>
-          </a:ln>
-        </p:spPr>
-        <p:style>
-          <a:lnRef idx="2">
-            <a:schemeClr val="accent1"/>
-          </a:lnRef>
-          <a:fillRef idx="0">
-            <a:schemeClr val="accent1"/>
-          </a:fillRef>
-          <a:effectRef idx="1">
-            <a:schemeClr val="accent1"/>
-          </a:effectRef>
-          <a:fontRef idx="minor">
-            <a:schemeClr val="tx1"/>
-          </a:fontRef>
-        </p:style>
-      </p:cxnSp>
-      <p:sp>
-        <p:nvSpPr>
-          <p:cNvPr id="41" name="TextBox 40"/>
-          <p:cNvSpPr txBox="1"/>
-          <p:nvPr/>
-        </p:nvSpPr>
-        <p:spPr>
-          <a:xfrm>
-            <a:off x="6172200" y="3200400"/>
-            <a:ext cx="457200" cy="201168"/>
-          </a:xfrm>
-          <a:prstGeom prst="rect">
-            <a:avLst/>
-          </a:prstGeom>
-          <a:solidFill>
-            <a:srgbClr val="FFFFFF"/>
-          </a:solidFill>
-          <a:ln>
-            <a:noFill/>
-          </a:ln>
-        </p:spPr>
-        <p:txBody>
-          <a:bodyPr wrap="none" lIns="12700" rIns="12700" tIns="0" bIns="0">
-            <a:spAutoFit/>
-          </a:bodyPr>
-          <a:lstStyle/>
-          <a:p>
-            <a:pPr algn="ctr"/>
-            <a:r>
-              <a:rPr sz="1000" b="1">
-                <a:solidFill>
-                  <a:srgbClr val="E65100"/>
-                </a:solidFill>
-              </a:rPr>
-              <a:t>C4 commit</a:t>
-            </a:r>
-          </a:p>
-        </p:txBody>
-      </p:sp>
-      <p:cxnSp>
-        <p:nvCxnSpPr>
-          <p:cNvPr id="42" name="Connector 41"/>
-          <p:cNvCxnSpPr/>
-          <p:nvPr/>
-        </p:nvCxnSpPr>
-        <p:spPr>
-          <a:xfrm flipV="1">
-            <a:off x="7680960" y="2011680"/>
-            <a:ext cx="0" cy="2560320"/>
-          </a:xfrm>
-          <a:prstGeom prst="line">
-            <a:avLst/>
-          </a:prstGeom>
-          <a:ln w="31750">
-            <a:solidFill>
-              <a:srgbClr val="E65100"/>
-            </a:solidFill>
-            <a:tailEnd type="triangle" w="med" h="med"/>
-            <a:prstDash val="dash"/>
-          </a:ln>
-        </p:spPr>
-        <p:style>
-          <a:lnRef idx="2">
-            <a:schemeClr val="accent1"/>
-          </a:lnRef>
-          <a:fillRef idx="0">
-            <a:schemeClr val="accent1"/>
-          </a:fillRef>
-          <a:effectRef idx="1">
-            <a:schemeClr val="accent1"/>
-          </a:effectRef>
-          <a:fontRef idx="minor">
-            <a:schemeClr val="tx1"/>
-          </a:fontRef>
-        </p:style>
-      </p:cxnSp>
-      <p:sp>
-        <p:nvSpPr>
-          <p:cNvPr id="43" name="TextBox 42"/>
-          <p:cNvSpPr txBox="1"/>
-          <p:nvPr/>
-        </p:nvSpPr>
-        <p:spPr>
-          <a:xfrm>
-            <a:off x="7726680" y="3200400"/>
-            <a:ext cx="457200" cy="201168"/>
-          </a:xfrm>
-          <a:prstGeom prst="rect">
-            <a:avLst/>
-          </a:prstGeom>
-          <a:solidFill>
-            <a:srgbClr val="FFFFFF"/>
-          </a:solidFill>
-          <a:ln>
-            <a:noFill/>
-          </a:ln>
-        </p:spPr>
-        <p:txBody>
-          <a:bodyPr wrap="none" lIns="12700" rIns="12700" tIns="0" bIns="0">
-            <a:spAutoFit/>
-          </a:bodyPr>
-          <a:lstStyle/>
-          <a:p>
-            <a:pPr algn="ctr"/>
-            <a:r>
-              <a:rPr sz="1000" b="1">
-                <a:solidFill>
-                  <a:srgbClr val="E65100"/>
-                </a:solidFill>
-              </a:rPr>
-              <a:t>C5 epoch++</a:t>
-            </a:r>
-          </a:p>
-        </p:txBody>
-      </p:sp>
-      <p:cxnSp>
-        <p:nvCxnSpPr>
-          <p:cNvPr id="44" name="Connector 43"/>
-          <p:cNvCxnSpPr/>
-          <p:nvPr/>
-        </p:nvCxnSpPr>
-        <p:spPr>
-          <a:xfrm flipV="1">
-            <a:off x="9235440" y="2011680"/>
-            <a:ext cx="0" cy="2560320"/>
-          </a:xfrm>
-          <a:prstGeom prst="line">
-            <a:avLst/>
-          </a:prstGeom>
-          <a:ln w="31750">
-            <a:solidFill>
-              <a:srgbClr val="E65100"/>
-            </a:solidFill>
-            <a:tailEnd type="triangle" w="med" h="med"/>
-            <a:prstDash val="dash"/>
-          </a:ln>
-        </p:spPr>
-        <p:style>
-          <a:lnRef idx="2">
-            <a:schemeClr val="accent1"/>
-          </a:lnRef>
-          <a:fillRef idx="0">
-            <a:schemeClr val="accent1"/>
-          </a:fillRef>
-          <a:effectRef idx="1">
-            <a:schemeClr val="accent1"/>
-          </a:effectRef>
-          <a:fontRef idx="minor">
-            <a:schemeClr val="tx1"/>
-          </a:fontRef>
-        </p:style>
-      </p:cxnSp>
-      <p:sp>
-        <p:nvSpPr>
-          <p:cNvPr id="45" name="TextBox 44"/>
-          <p:cNvSpPr txBox="1"/>
-          <p:nvPr/>
-        </p:nvSpPr>
-        <p:spPr>
-          <a:xfrm>
-            <a:off x="9281160" y="3200400"/>
-            <a:ext cx="457200" cy="201168"/>
-          </a:xfrm>
-          <a:prstGeom prst="rect">
-            <a:avLst/>
-          </a:prstGeom>
-          <a:solidFill>
-            <a:srgbClr val="FFFFFF"/>
-          </a:solidFill>
-          <a:ln>
-            <a:noFill/>
-          </a:ln>
-        </p:spPr>
-        <p:txBody>
-          <a:bodyPr wrap="none" lIns="12700" rIns="12700" tIns="0" bIns="0">
-            <a:spAutoFit/>
-          </a:bodyPr>
-          <a:lstStyle/>
-          <a:p>
-            <a:pPr algn="ctr"/>
-            <a:r>
-              <a:rPr sz="1000" b="1">
-                <a:solidFill>
-                  <a:srgbClr val="E65100"/>
-                </a:solidFill>
-              </a:rPr>
-              <a:t>C6 unlock</a:t>
-            </a:r>
-          </a:p>
-        </p:txBody>
-      </p:sp>
-      <p:sp>
-        <p:nvSpPr>
-          <p:cNvPr id="46" name="Oval 45"/>
-          <p:cNvSpPr/>
-          <p:nvPr/>
-        </p:nvSpPr>
-        <p:spPr>
-          <a:xfrm>
-            <a:off x="5852160" y="3200400"/>
-            <a:ext cx="228600" cy="228600"/>
-          </a:xfrm>
-          <a:prstGeom prst="ellipse">
-            <a:avLst/>
-          </a:prstGeom>
-          <a:solidFill>
-            <a:srgbClr val="FFF49C"/>
-          </a:solidFill>
-          <a:ln w="12700">
-            <a:solidFill>
-              <a:srgbClr val="F9A825"/>
-            </a:solidFill>
-          </a:ln>
-        </p:spPr>
-        <p:style>
-          <a:lnRef idx="1">
-            <a:schemeClr val="accent1"/>
-          </a:lnRef>
-          <a:fillRef idx="3">
-            <a:schemeClr val="accent1"/>
-          </a:fillRef>
-          <a:effectRef idx="2">
-            <a:schemeClr val="accent1"/>
-          </a:effectRef>
-          <a:fontRef idx="minor">
-            <a:schemeClr val="lt1"/>
-          </a:fontRef>
-        </p:style>
-        <p:txBody>
-          <a:bodyPr rtlCol="0" anchor="ctr" lIns="12700" tIns="0" rIns="12700" bIns="0"/>
-          <a:lstStyle/>
-          <a:p>
-            <a:pPr algn="ctr"/>
-            <a:r>
-              <a:rPr sz="700" b="1">
-                <a:solidFill>
-                  <a:srgbClr val="8C3200"/>
-                </a:solidFill>
-              </a:rPr>
-              <a:t>W9</a:t>
-            </a:r>
-          </a:p>
-        </p:txBody>
-      </p:sp>
-      <p:sp>
-        <p:nvSpPr>
-          <p:cNvPr id="47" name="Oval 46"/>
-          <p:cNvSpPr/>
-          <p:nvPr/>
-        </p:nvSpPr>
-        <p:spPr>
-          <a:xfrm>
-            <a:off x="6016752" y="5029200"/>
-            <a:ext cx="228600" cy="228600"/>
-          </a:xfrm>
-          <a:prstGeom prst="ellipse">
-            <a:avLst/>
-          </a:prstGeom>
-          <a:solidFill>
-            <a:srgbClr val="FFF49C"/>
-          </a:solidFill>
-          <a:ln w="12700">
-            <a:solidFill>
-              <a:srgbClr val="F9A825"/>
-            </a:solidFill>
-          </a:ln>
-        </p:spPr>
-        <p:style>
-          <a:lnRef idx="1">
-            <a:schemeClr val="accent1"/>
-          </a:lnRef>
-          <a:fillRef idx="3">
-            <a:schemeClr val="accent1"/>
-          </a:fillRef>
-          <a:effectRef idx="2">
-            <a:schemeClr val="accent1"/>
-          </a:effectRef>
-          <a:fontRef idx="minor">
-            <a:schemeClr val="lt1"/>
-          </a:fontRef>
-        </p:style>
-        <p:txBody>
-          <a:bodyPr rtlCol="0" anchor="ctr" lIns="12700" rIns="12700" tIns="0" bIns="0"/>
-          <a:lstStyle/>
-          <a:p>
-            <a:pPr algn="ctr"/>
-            <a:r>
-              <a:rPr sz="800" b="1"/>
-              <a:t>★</a:t>
-            </a:r>
-          </a:p>
-        </p:txBody>
-      </p:sp>
-      <p:sp>
-        <p:nvSpPr>
-          <p:cNvPr id="48" name="Rounded Rectangle 47"/>
-          <p:cNvSpPr/>
-          <p:nvPr/>
-        </p:nvSpPr>
-        <p:spPr>
-          <a:xfrm>
-            <a:off x="274320" y="6355080"/>
-            <a:ext cx="5943600" cy="411480"/>
-          </a:xfrm>
-          <a:prstGeom prst="roundRect">
-            <a:avLst/>
-          </a:prstGeom>
-          <a:solidFill>
-            <a:srgbClr val="FFFFFF"/>
-          </a:solidFill>
-          <a:ln w="9525">
-            <a:solidFill>
-              <a:srgbClr val="9E9E9E"/>
-            </a:solidFill>
-          </a:ln>
-        </p:spPr>
-        <p:style>
-          <a:lnRef idx="1">
-            <a:schemeClr val="accent1"/>
-          </a:lnRef>
-          <a:fillRef idx="3">
-            <a:schemeClr val="accent1"/>
-          </a:fillRef>
-          <a:effectRef idx="2">
-            <a:schemeClr val="accent1"/>
-          </a:effectRef>
-          <a:fontRef idx="minor">
-            <a:schemeClr val="lt1"/>
-          </a:fontRef>
-        </p:style>
-        <p:txBody>
-          <a:bodyPr rtlCol="0" anchor="ctr"/>
-          <a:lstStyle/>
-          <a:p>
-            <a:pPr algn="ctr"/>
-          </a:p>
-        </p:txBody>
-      </p:sp>
-      <p:sp>
-        <p:nvSpPr>
-          <p:cNvPr id="49" name="TextBox 48"/>
-          <p:cNvSpPr txBox="1"/>
-          <p:nvPr/>
-        </p:nvSpPr>
-        <p:spPr>
-          <a:xfrm>
-            <a:off x="365760" y="6400800"/>
-            <a:ext cx="1463040" cy="320040"/>
+            <a:off x="365760" y="6391656"/>
+            <a:ext cx="1828800" cy="292608"/>
           </a:xfrm>
           <a:prstGeom prst="rect">
             <a:avLst/>
@@ -5141,21 +5291,21 @@
                   <a:srgbClr val="154FC2"/>
                 </a:solidFill>
               </a:rPr>
-              <a:t>─── ▶  Protocol A</a:t>
-            </a:r>
-          </a:p>
-        </p:txBody>
-      </p:sp>
-      <p:sp>
-        <p:nvSpPr>
-          <p:cNvPr id="50" name="TextBox 49"/>
+              <a:t>— ▶  Step arrow</a:t>
+            </a:r>
+          </a:p>
+        </p:txBody>
+      </p:sp>
+      <p:sp>
+        <p:nvSpPr>
+          <p:cNvPr id="49" name="TextBox 48"/>
           <p:cNvSpPr txBox="1"/>
           <p:nvPr/>
         </p:nvSpPr>
         <p:spPr>
           <a:xfrm>
-            <a:off x="1828800" y="6400800"/>
-            <a:ext cx="1463040" cy="320040"/>
+            <a:off x="2240279" y="6391656"/>
+            <a:ext cx="1828800" cy="292608"/>
           </a:xfrm>
           <a:prstGeom prst="rect">
             <a:avLst/>
@@ -5172,24 +5322,24 @@
             <a:r>
               <a:rPr sz="900" b="1">
                 <a:solidFill>
-                  <a:srgbClr val="E65100"/>
-                </a:solidFill>
-              </a:rPr>
-              <a:t>╌╌╌ ▶  Protocol C</a:t>
-            </a:r>
-          </a:p>
-        </p:txBody>
-      </p:sp>
-      <p:sp>
-        <p:nvSpPr>
-          <p:cNvPr id="51" name="TextBox 50"/>
+                  <a:srgbClr val="F9A825"/>
+                </a:solidFill>
+              </a:rPr>
+              <a:t>● Linearization (W9, A13)</a:t>
+            </a:r>
+          </a:p>
+        </p:txBody>
+      </p:sp>
+      <p:sp>
+        <p:nvSpPr>
+          <p:cNvPr id="50" name="TextBox 49"/>
           <p:cNvSpPr txBox="1"/>
           <p:nvPr/>
         </p:nvSpPr>
         <p:spPr>
           <a:xfrm>
-            <a:off x="3291840" y="6400800"/>
-            <a:ext cx="1554480" cy="320040"/>
+            <a:off x="4114800" y="6391656"/>
+            <a:ext cx="1828800" cy="292608"/>
           </a:xfrm>
           <a:prstGeom prst="rect">
             <a:avLst/>
@@ -5206,24 +5356,24 @@
             <a:r>
               <a:rPr sz="900" b="1">
                 <a:solidFill>
-                  <a:srgbClr val="F9A825"/>
-                </a:solidFill>
-              </a:rPr>
-              <a:t>● Linearization point</a:t>
-            </a:r>
-          </a:p>
-        </p:txBody>
-      </p:sp>
-      <p:sp>
-        <p:nvSpPr>
-          <p:cNvPr id="52" name="TextBox 51"/>
+                  <a:srgbClr val="C62828"/>
+                </a:solidFill>
+              </a:rPr>
+              <a:t>● Cross-host blocking (A4, A9)</a:t>
+            </a:r>
+          </a:p>
+        </p:txBody>
+      </p:sp>
+      <p:sp>
+        <p:nvSpPr>
+          <p:cNvPr id="51" name="TextBox 50"/>
           <p:cNvSpPr txBox="1"/>
           <p:nvPr/>
         </p:nvSpPr>
         <p:spPr>
           <a:xfrm>
-            <a:off x="4846320" y="6400800"/>
-            <a:ext cx="1554480" cy="320040"/>
+            <a:off x="5989320" y="6391656"/>
+            <a:ext cx="1828800" cy="292608"/>
           </a:xfrm>
           <a:prstGeom prst="rect">
             <a:avLst/>
@@ -5243,21 +5393,21 @@
                   <a:srgbClr val="C62828"/>
                 </a:solidFill>
               </a:rPr>
-              <a:t>● Cross-host blocking</a:t>
-            </a:r>
-          </a:p>
-        </p:txBody>
-      </p:sp>
-      <p:sp>
-        <p:nvSpPr>
-          <p:cNvPr id="53" name="TextBox 52"/>
+              <a:t>▌ blocked lifeline</a:t>
+            </a:r>
+          </a:p>
+        </p:txBody>
+      </p:sp>
+      <p:sp>
+        <p:nvSpPr>
+          <p:cNvPr id="52" name="TextBox 51"/>
           <p:cNvSpPr txBox="1"/>
           <p:nvPr/>
         </p:nvSpPr>
         <p:spPr>
           <a:xfrm>
-            <a:off x="6400800" y="6355080"/>
-            <a:ext cx="5486400" cy="411480"/>
+            <a:off x="8229600" y="6355080"/>
+            <a:ext cx="3840480" cy="365760"/>
           </a:xfrm>
           <a:prstGeom prst="rect">
             <a:avLst/>
@@ -5265,19 +5415,19 @@
           <a:noFill/>
         </p:spPr>
         <p:txBody>
-          <a:bodyPr wrap="square" tIns="38100">
+          <a:bodyPr wrap="none" tIns="38100">
             <a:spAutoFit/>
           </a:bodyPr>
           <a:lstStyle/>
           <a:p>
             <a:pPr algn="r"/>
             <a:r>
-              <a:rPr sz="1000" b="1">
-                <a:solidFill>
-                  <a:srgbClr val="333333"/>
-                </a:solidFill>
-              </a:rPr>
-              <a:t>A: 14 steps · 3 threads · 2 cross-host blocks   |   C: 6 steps · 1 thread · 1 LFM acquire</a:t>
+              <a:rPr sz="1100" b="1">
+                <a:solidFill>
+                  <a:srgbClr val="0D327D"/>
+                </a:solidFill>
+              </a:rPr>
+              <a:t>14 steps · 3 actors · 2 blocking points</a:t>
             </a:r>
           </a:p>
         </p:txBody>
@@ -5308,7 +5458,7 @@
         </p:nvSpPr>
         <p:spPr>
           <a:xfrm>
-            <a:off x="274320" y="137160"/>
+            <a:off x="274320" y="91440"/>
             <a:ext cx="11704320" cy="502920"/>
           </a:xfrm>
           <a:prstGeom prst="rect">
@@ -5323,12 +5473,12 @@
           <a:lstStyle/>
           <a:p>
             <a:r>
-              <a:rPr sz="2400" b="1">
-                <a:solidFill>
-                  <a:srgbClr val="333333"/>
-                </a:solidFill>
-              </a:rPr>
-              <a:t>Read path topology — cross-host search(K) on cache miss</a:t>
+              <a:rPr sz="2200" b="1">
+                <a:solidFill>
+                  <a:srgbClr val="E65100"/>
+                </a:solidFill>
+              </a:rPr>
+              <a:t>Protocol C — Write path: in-place under cross-host LFM lock</a:t>
             </a:r>
           </a:p>
         </p:txBody>
@@ -5341,8 +5491,8 @@
         </p:nvSpPr>
         <p:spPr>
           <a:xfrm>
-            <a:off x="274320" y="640080"/>
-            <a:ext cx="11704320" cy="320040"/>
+            <a:off x="274320" y="566928"/>
+            <a:ext cx="11704320" cy="292608"/>
           </a:xfrm>
           <a:prstGeom prst="rect">
             <a:avLst/>
@@ -5356,12 +5506,12 @@
           <a:lstStyle/>
           <a:p>
             <a:r>
-              <a:rPr sz="1200" i="1">
+              <a:rPr sz="1100" i="1">
                 <a:solidFill>
                   <a:srgbClr val="9E9E9E"/>
                 </a:solidFill>
               </a:rPr>
-              <a:t>A: 16 steps, 2 threads, 1 cross-host blocking (R3 staging poll 200ms cap)  •  C: 4 steps, 1 thread, 0 cross-host blocking</a:t>
+              <a:t>6 numbered steps · 1 actor · 1 cross-host blocking (C1 LFM acquire) · C5 atomic write_epoch bump = single commit point</a:t>
             </a:r>
           </a:p>
         </p:txBody>
@@ -5374,18 +5524,18 @@
         </p:nvSpPr>
         <p:spPr>
           <a:xfrm>
-            <a:off x="274320" y="1143000"/>
-            <a:ext cx="11612880" cy="868680"/>
+            <a:off x="731519" y="1188720"/>
+            <a:ext cx="2926080" cy="411480"/>
           </a:xfrm>
           <a:prstGeom prst="roundRect">
             <a:avLst/>
           </a:prstGeom>
           <a:solidFill>
-            <a:srgbClr val="FFF3E0"/>
+            <a:srgbClr val="E3F2FD"/>
           </a:solidFill>
-          <a:ln w="19050">
+          <a:ln w="15875">
             <a:solidFill>
-              <a:srgbClr val="E65100"/>
+              <a:srgbClr val="1565C0"/>
             </a:solidFill>
           </a:ln>
         </p:spPr>
@@ -5411,253 +5561,33 @@
             <a:r>
               <a:rPr sz="1000" b="1">
                 <a:solidFill>
-                  <a:srgbClr val="8C3200"/>
-                </a:solidFill>
-              </a:rPr>
-              <a:t>CXL shared region — buckets, ReadRing[0][1], ReadStaging[0][1], BucketLockTable.write_epoch, KvBlockPool</a:t>
-            </a:r>
-          </a:p>
-        </p:txBody>
-      </p:sp>
-      <p:sp>
-        <p:nvSpPr>
-          <p:cNvPr id="5" name="Rounded Rectangle 4"/>
-          <p:cNvSpPr/>
-          <p:nvPr/>
-        </p:nvSpPr>
-        <p:spPr>
-          <a:xfrm>
-            <a:off x="365760" y="3017520"/>
-            <a:ext cx="2377440" cy="914400"/>
-          </a:xfrm>
-          <a:prstGeom prst="roundRect">
-            <a:avLst/>
-          </a:prstGeom>
-          <a:solidFill>
-            <a:srgbClr val="E3F2FD"/>
-          </a:solidFill>
-          <a:ln w="19050">
-            <a:solidFill>
-              <a:srgbClr val="1565C0"/>
-            </a:solidFill>
-          </a:ln>
-        </p:spPr>
-        <p:style>
-          <a:lnRef idx="1">
-            <a:schemeClr val="accent1"/>
-          </a:lnRef>
-          <a:fillRef idx="3">
-            <a:schemeClr val="accent1"/>
-          </a:fillRef>
-          <a:effectRef idx="2">
-            <a:schemeClr val="accent1"/>
-          </a:effectRef>
-          <a:fontRef idx="minor">
-            <a:schemeClr val="lt1"/>
-          </a:fontRef>
-        </p:style>
-        <p:txBody>
-          <a:bodyPr rtlCol="0" anchor="ctr" lIns="38100" rIns="38100" tIns="25400" bIns="25400" wrap="square"/>
-          <a:lstStyle/>
-          <a:p>
-            <a:pPr algn="ctr"/>
-            <a:r>
-              <a:rPr sz="1100" b="1">
-                <a:solidFill>
-                  <a:srgbClr val="0D327D"/>
-                </a:solidFill>
-              </a:rPr>
-              <a:t>host 0  worker
-(caller)
-+ TLS L1 (private DRAM)</a:t>
-            </a:r>
-          </a:p>
-        </p:txBody>
-      </p:sp>
-      <p:sp>
-        <p:nvSpPr>
-          <p:cNvPr id="6" name="Rounded Rectangle 5"/>
-          <p:cNvSpPr/>
-          <p:nvPr/>
-        </p:nvSpPr>
-        <p:spPr>
-          <a:xfrm>
-            <a:off x="3017520" y="3017520"/>
-            <a:ext cx="2377440" cy="914400"/>
-          </a:xfrm>
-          <a:prstGeom prst="roundRect">
-            <a:avLst/>
-          </a:prstGeom>
-          <a:solidFill>
-            <a:srgbClr val="E3F2FD"/>
-          </a:solidFill>
-          <a:ln w="19050">
-            <a:solidFill>
-              <a:srgbClr val="1565C0"/>
-            </a:solidFill>
-          </a:ln>
-        </p:spPr>
-        <p:style>
-          <a:lnRef idx="1">
-            <a:schemeClr val="accent1"/>
-          </a:lnRef>
-          <a:fillRef idx="3">
-            <a:schemeClr val="accent1"/>
-          </a:fillRef>
-          <a:effectRef idx="2">
-            <a:schemeClr val="accent1"/>
-          </a:effectRef>
-          <a:fontRef idx="minor">
-            <a:schemeClr val="lt1"/>
-          </a:fontRef>
-        </p:style>
-        <p:txBody>
-          <a:bodyPr rtlCol="0" anchor="ctr" lIns="38100" rIns="38100" tIns="25400" bIns="25400" wrap="square"/>
-          <a:lstStyle/>
-          <a:p>
-            <a:pPr algn="ctr"/>
-            <a:r>
-              <a:rPr sz="1000" b="1">
-                <a:solidFill>
-                  <a:srgbClr val="0D327D"/>
-                </a:solidFill>
-              </a:rPr>
-              <a:t>host 0  KvCachePool L2
-(MAP_SHARED DRAM)
-seqlock CAS reader</a:t>
-            </a:r>
-          </a:p>
-        </p:txBody>
-      </p:sp>
-      <p:sp>
-        <p:nvSpPr>
-          <p:cNvPr id="7" name="Rounded Rectangle 6"/>
-          <p:cNvSpPr/>
-          <p:nvPr/>
-        </p:nvSpPr>
-        <p:spPr>
-          <a:xfrm>
-            <a:off x="6858000" y="3017520"/>
-            <a:ext cx="2743200" cy="914400"/>
-          </a:xfrm>
-          <a:prstGeom prst="roundRect">
-            <a:avLst/>
-          </a:prstGeom>
-          <a:solidFill>
-            <a:srgbClr val="C8DAFB"/>
-          </a:solidFill>
-          <a:ln w="19050">
-            <a:solidFill>
-              <a:srgbClr val="154FC2"/>
-            </a:solidFill>
-          </a:ln>
-        </p:spPr>
-        <p:style>
-          <a:lnRef idx="1">
-            <a:schemeClr val="accent1"/>
-          </a:lnRef>
-          <a:fillRef idx="3">
-            <a:schemeClr val="accent1"/>
-          </a:fillRef>
-          <a:effectRef idx="2">
-            <a:schemeClr val="accent1"/>
-          </a:effectRef>
-          <a:fontRef idx="minor">
-            <a:schemeClr val="lt1"/>
-          </a:fontRef>
-        </p:style>
-        <p:txBody>
-          <a:bodyPr rtlCol="0" anchor="ctr" lIns="38100" rIns="38100" tIns="25400" bIns="25400" wrap="square"/>
-          <a:lstStyle/>
-          <a:p>
-            <a:pPr algn="ctr"/>
-            <a:r>
-              <a:rPr sz="1100" b="1">
-                <a:solidFill>
-                  <a:srgbClr val="0D327D"/>
-                </a:solidFill>
-              </a:rPr>
-              <a:t>host 1  ReadReceiver
-(cpu 67, single thread)
-Protocol A only</a:t>
-            </a:r>
-          </a:p>
-        </p:txBody>
-      </p:sp>
-      <p:sp>
-        <p:nvSpPr>
-          <p:cNvPr id="8" name="Rounded Rectangle 7"/>
-          <p:cNvSpPr/>
-          <p:nvPr/>
-        </p:nvSpPr>
-        <p:spPr>
-          <a:xfrm>
-            <a:off x="9784080" y="3017520"/>
-            <a:ext cx="2103120" cy="914400"/>
-          </a:xfrm>
-          <a:prstGeom prst="roundRect">
-            <a:avLst/>
-          </a:prstGeom>
-          <a:solidFill>
-            <a:srgbClr val="FFE0B2"/>
-          </a:solidFill>
-          <a:ln w="19050">
-            <a:solidFill>
-              <a:srgbClr val="E65100"/>
-            </a:solidFill>
-          </a:ln>
-        </p:spPr>
-        <p:style>
-          <a:lnRef idx="1">
-            <a:schemeClr val="accent1"/>
-          </a:lnRef>
-          <a:fillRef idx="3">
-            <a:schemeClr val="accent1"/>
-          </a:fillRef>
-          <a:effectRef idx="2">
-            <a:schemeClr val="accent1"/>
-          </a:effectRef>
-          <a:fontRef idx="minor">
-            <a:schemeClr val="lt1"/>
-          </a:fontRef>
-        </p:style>
-        <p:txBody>
-          <a:bodyPr rtlCol="0" anchor="ctr" lIns="38100" rIns="38100" tIns="25400" bIns="25400" wrap="square"/>
-          <a:lstStyle/>
-          <a:p>
-            <a:pPr algn="ctr"/>
-            <a:r>
-              <a:rPr sz="1000" b="1">
-                <a:solidFill>
-                  <a:srgbClr val="8C3200"/>
-                </a:solidFill>
-              </a:rPr>
-              <a:t>host 0  DRAM cache
-(opt, per-process)
-Protocol C only</a:t>
+                  <a:srgbClr val="1565C0"/>
+                </a:solidFill>
+              </a:rPr>
+              <a:t>host 0  worker (caller, cpu 0..T-1)</a:t>
             </a:r>
           </a:p>
         </p:txBody>
       </p:sp>
       <p:cxnSp>
         <p:nvCxnSpPr>
-          <p:cNvPr id="9" name="Connector 8"/>
+          <p:cNvPr id="5" name="Connector 4"/>
           <p:cNvCxnSpPr/>
           <p:nvPr/>
         </p:nvCxnSpPr>
         <p:spPr>
-          <a:xfrm flipV="1">
-            <a:off x="914400" y="2011680"/>
-            <a:ext cx="0" cy="1005840"/>
+          <a:xfrm>
+            <a:off x="2194560" y="1600200"/>
+            <a:ext cx="0" cy="4389120"/>
           </a:xfrm>
           <a:prstGeom prst="line">
             <a:avLst/>
           </a:prstGeom>
-          <a:ln w="31750">
+          <a:ln w="7620">
             <a:solidFill>
-              <a:srgbClr val="154FC2"/>
+              <a:srgbClr val="9E9E9E"/>
             </a:solidFill>
-            <a:tailEnd type="triangle" w="med" h="med"/>
+            <a:prstDash val="dash"/>
           </a:ln>
         </p:spPr>
         <p:style>
@@ -5677,96 +5607,289 @@
       </p:cxnSp>
       <p:sp>
         <p:nvSpPr>
-          <p:cNvPr id="10" name="TextBox 9"/>
-          <p:cNvSpPr txBox="1"/>
-          <p:nvPr/>
-        </p:nvSpPr>
-        <p:spPr>
-          <a:xfrm>
-            <a:off x="411479" y="2423160"/>
-            <a:ext cx="457200" cy="201168"/>
-          </a:xfrm>
-          <a:prstGeom prst="rect">
+          <p:cNvPr id="6" name="Rounded Rectangle 5"/>
+          <p:cNvSpPr/>
+          <p:nvPr/>
+        </p:nvSpPr>
+        <p:spPr>
+          <a:xfrm>
+            <a:off x="5943600" y="1188720"/>
+            <a:ext cx="5852160" cy="411480"/>
+          </a:xfrm>
+          <a:prstGeom prst="roundRect">
             <a:avLst/>
           </a:prstGeom>
           <a:solidFill>
-            <a:srgbClr val="FFFFFF"/>
+            <a:srgbClr val="FFF3E0"/>
           </a:solidFill>
-          <a:ln>
-            <a:noFill/>
+          <a:ln w="15875">
+            <a:solidFill>
+              <a:srgbClr val="E65100"/>
+            </a:solidFill>
           </a:ln>
         </p:spPr>
-        <p:txBody>
-          <a:bodyPr wrap="none" lIns="12700" rIns="12700" tIns="0" bIns="0">
-            <a:spAutoFit/>
-          </a:bodyPr>
+        <p:style>
+          <a:lnRef idx="1">
+            <a:schemeClr val="accent1"/>
+          </a:lnRef>
+          <a:fillRef idx="3">
+            <a:schemeClr val="accent1"/>
+          </a:fillRef>
+          <a:effectRef idx="2">
+            <a:schemeClr val="accent1"/>
+          </a:effectRef>
+          <a:fontRef idx="minor">
+            <a:schemeClr val="lt1"/>
+          </a:fontRef>
+        </p:style>
+        <p:txBody>
+          <a:bodyPr rtlCol="0" anchor="ctr" lIns="38100" rIns="38100" tIns="25400" bIns="25400" wrap="square"/>
           <a:lstStyle/>
           <a:p>
             <a:pPr algn="ctr"/>
             <a:r>
-              <a:rPr sz="1000" b="1">
-                <a:solidFill>
-                  <a:srgbClr val="154FC2"/>
-                </a:solidFill>
-              </a:rPr>
-              <a:t>A1r</a:t>
-            </a:r>
-          </a:p>
-        </p:txBody>
-      </p:sp>
-      <p:sp>
-        <p:nvSpPr>
-          <p:cNvPr id="11" name="TextBox 10"/>
-          <p:cNvSpPr txBox="1"/>
-          <p:nvPr/>
-        </p:nvSpPr>
-        <p:spPr>
-          <a:xfrm>
-            <a:off x="365760" y="4023360"/>
-            <a:ext cx="2377440" cy="365760"/>
-          </a:xfrm>
-          <a:prstGeom prst="rect">
-            <a:avLst/>
-          </a:prstGeom>
-          <a:noFill/>
-        </p:spPr>
-        <p:txBody>
-          <a:bodyPr wrap="none">
-            <a:spAutoFit/>
-          </a:bodyPr>
-          <a:lstStyle/>
-          <a:p>
-            <a:pPr algn="ctr"/>
-            <a:r>
-              <a:rPr sz="900" b="1">
-                <a:solidFill>
-                  <a:srgbClr val="0D327D"/>
-                </a:solidFill>
-              </a:rPr>
-              <a:t>A2r: TLS hit? ★ R0_tls_hit ~80 ns</a:t>
-            </a:r>
-          </a:p>
-        </p:txBody>
-      </p:sp>
-      <p:cxnSp>
-        <p:nvCxnSpPr>
-          <p:cNvPr id="12" name="Connector 11"/>
-          <p:cNvCxnSpPr/>
-          <p:nvPr/>
-        </p:nvCxnSpPr>
-        <p:spPr>
-          <a:xfrm>
-            <a:off x="2743200" y="3383280"/>
-            <a:ext cx="274320" cy="0"/>
-          </a:xfrm>
-          <a:prstGeom prst="line">
-            <a:avLst/>
-          </a:prstGeom>
-          <a:ln w="19050">
+              <a:rPr sz="1100" b="1">
+                <a:solidFill>
+                  <a:srgbClr val="8C3200"/>
+                </a:solidFill>
+              </a:rPr>
+              <a:t>CXL state touched on the write path</a:t>
+            </a:r>
+          </a:p>
+        </p:txBody>
+      </p:sp>
+      <p:sp>
+        <p:nvSpPr>
+          <p:cNvPr id="7" name="Rounded Rectangle 6"/>
+          <p:cNvSpPr/>
+          <p:nvPr/>
+        </p:nvSpPr>
+        <p:spPr>
+          <a:xfrm>
+            <a:off x="6126480" y="1920240"/>
+            <a:ext cx="5486400" cy="502920"/>
+          </a:xfrm>
+          <a:prstGeom prst="roundRect">
+            <a:avLst/>
+          </a:prstGeom>
+          <a:solidFill>
+            <a:srgbClr val="C8DAFB"/>
+          </a:solidFill>
+          <a:ln w="15875">
             <a:solidFill>
               <a:srgbClr val="154FC2"/>
             </a:solidFill>
+          </a:ln>
+        </p:spPr>
+        <p:style>
+          <a:lnRef idx="1">
+            <a:schemeClr val="accent1"/>
+          </a:lnRef>
+          <a:fillRef idx="3">
+            <a:schemeClr val="accent1"/>
+          </a:fillRef>
+          <a:effectRef idx="2">
+            <a:schemeClr val="accent1"/>
+          </a:effectRef>
+          <a:fontRef idx="minor">
+            <a:schemeClr val="lt1"/>
+          </a:fontRef>
+        </p:style>
+        <p:txBody>
+          <a:bodyPr rtlCol="0" anchor="ctr" lIns="38100" rIns="38100" tIns="25400" bIns="25400" wrap="square"/>
+          <a:lstStyle/>
+          <a:p>
+            <a:pPr algn="ctr"/>
+            <a:r>
+              <a:rPr sz="1000" b="1">
+                <a:solidFill>
+                  <a:srgbClr val="0D327D"/>
+                </a:solidFill>
+              </a:rPr>
+              <a:t>BucketLockEntry  •  shm_mutex_t (LFM) cross-host  •  write_epoch (cacheline_u64)</a:t>
+            </a:r>
+          </a:p>
+        </p:txBody>
+      </p:sp>
+      <p:sp>
+        <p:nvSpPr>
+          <p:cNvPr id="8" name="Rounded Rectangle 7"/>
+          <p:cNvSpPr/>
+          <p:nvPr/>
+        </p:nvSpPr>
+        <p:spPr>
+          <a:xfrm>
+            <a:off x="6126480" y="2606040"/>
+            <a:ext cx="5486400" cy="502920"/>
+          </a:xfrm>
+          <a:prstGeom prst="roundRect">
+            <a:avLst/>
+          </a:prstGeom>
+          <a:solidFill>
+            <a:srgbClr val="C8DAFB"/>
+          </a:solidFill>
+          <a:ln w="15875">
+            <a:solidFill>
+              <a:srgbClr val="154FC2"/>
+            </a:solidFill>
+          </a:ln>
+        </p:spPr>
+        <p:style>
+          <a:lnRef idx="1">
+            <a:schemeClr val="accent1"/>
+          </a:lnRef>
+          <a:fillRef idx="3">
+            <a:schemeClr val="accent1"/>
+          </a:fillRef>
+          <a:effectRef idx="2">
+            <a:schemeClr val="accent1"/>
+          </a:effectRef>
+          <a:fontRef idx="minor">
+            <a:schemeClr val="lt1"/>
+          </a:fontRef>
+        </p:style>
+        <p:txBody>
+          <a:bodyPr rtlCol="0" anchor="ctr" lIns="38100" rIns="38100" tIns="25400" bIns="25400" wrap="square"/>
+          <a:lstStyle/>
+          <a:p>
+            <a:pPr algn="ctr"/>
+            <a:r>
+              <a:rPr sz="1000" b="1">
+                <a:solidFill>
+                  <a:srgbClr val="0D327D"/>
+                </a:solidFill>
+              </a:rPr>
+              <a:t>CxlKvBucket  •  7 × {key, value} = 112 B = 2 cachelines</a:t>
+            </a:r>
+          </a:p>
+        </p:txBody>
+      </p:sp>
+      <p:sp>
+        <p:nvSpPr>
+          <p:cNvPr id="9" name="Rounded Rectangle 8"/>
+          <p:cNvSpPr/>
+          <p:nvPr/>
+        </p:nvSpPr>
+        <p:spPr>
+          <a:xfrm>
+            <a:off x="6126480" y="3291840"/>
+            <a:ext cx="5486400" cy="502920"/>
+          </a:xfrm>
+          <a:prstGeom prst="roundRect">
+            <a:avLst/>
+          </a:prstGeom>
+          <a:solidFill>
+            <a:srgbClr val="EEEEEE"/>
+          </a:solidFill>
+          <a:ln w="15875">
+            <a:solidFill>
+              <a:srgbClr val="9E9E9E"/>
+            </a:solidFill>
+          </a:ln>
+        </p:spPr>
+        <p:style>
+          <a:lnRef idx="1">
+            <a:schemeClr val="accent1"/>
+          </a:lnRef>
+          <a:fillRef idx="3">
+            <a:schemeClr val="accent1"/>
+          </a:fillRef>
+          <a:effectRef idx="2">
+            <a:schemeClr val="accent1"/>
+          </a:effectRef>
+          <a:fontRef idx="minor">
+            <a:schemeClr val="lt1"/>
+          </a:fontRef>
+        </p:style>
+        <p:txBody>
+          <a:bodyPr rtlCol="0" anchor="ctr" lIns="38100" rIns="38100" tIns="25400" bIns="25400" wrap="square"/>
+          <a:lstStyle/>
+          <a:p>
+            <a:pPr algn="ctr"/>
+            <a:r>
+              <a:rPr sz="1000" b="0">
+                <a:solidFill>
+                  <a:srgbClr val="333333"/>
+                </a:solidFill>
+              </a:rPr>
+              <a:t>KvBlockPool  (optional for value_len &gt; 8 B)</a:t>
+            </a:r>
+          </a:p>
+        </p:txBody>
+      </p:sp>
+      <p:sp>
+        <p:nvSpPr>
+          <p:cNvPr id="10" name="Rounded Rectangle 9"/>
+          <p:cNvSpPr/>
+          <p:nvPr/>
+        </p:nvSpPr>
+        <p:spPr>
+          <a:xfrm>
+            <a:off x="6126480" y="3977639"/>
+            <a:ext cx="5486400" cy="502920"/>
+          </a:xfrm>
+          <a:prstGeom prst="roundRect">
+            <a:avLst/>
+          </a:prstGeom>
+          <a:solidFill>
+            <a:srgbClr val="EEEEEE"/>
+          </a:solidFill>
+          <a:ln w="15875">
+            <a:solidFill>
+              <a:srgbClr val="9E9E9E"/>
+            </a:solidFill>
+          </a:ln>
+        </p:spPr>
+        <p:style>
+          <a:lnRef idx="1">
+            <a:schemeClr val="accent1"/>
+          </a:lnRef>
+          <a:fillRef idx="3">
+            <a:schemeClr val="accent1"/>
+          </a:fillRef>
+          <a:effectRef idx="2">
+            <a:schemeClr val="accent1"/>
+          </a:effectRef>
+          <a:fontRef idx="minor">
+            <a:schemeClr val="lt1"/>
+          </a:fontRef>
+        </p:style>
+        <p:txBody>
+          <a:bodyPr rtlCol="0" anchor="ctr" lIns="38100" rIns="38100" tIns="25400" bIns="25400" wrap="square"/>
+          <a:lstStyle/>
+          <a:p>
+            <a:pPr algn="ctr"/>
+            <a:r>
+              <a:rPr sz="1000" b="0">
+                <a:solidFill>
+                  <a:srgbClr val="333333"/>
+                </a:solidFill>
+              </a:rPr>
+              <a:t>OpLog  (optional, recovery)</a:t>
+            </a:r>
+          </a:p>
+        </p:txBody>
+      </p:sp>
+      <p:cxnSp>
+        <p:nvCxnSpPr>
+          <p:cNvPr id="11" name="Connector 10"/>
+          <p:cNvCxnSpPr/>
+          <p:nvPr/>
+        </p:nvCxnSpPr>
+        <p:spPr>
+          <a:xfrm>
+            <a:off x="2194560" y="2194560"/>
+            <a:ext cx="3931920" cy="0"/>
+          </a:xfrm>
+          <a:prstGeom prst="line">
+            <a:avLst/>
+          </a:prstGeom>
+          <a:ln w="20320">
+            <a:solidFill>
+              <a:srgbClr val="E65100"/>
+            </a:solidFill>
             <a:tailEnd type="triangle" w="med" h="med"/>
+            <a:prstDash val="dash"/>
           </a:ln>
         </p:spPr>
         <p:style>
@@ -5786,353 +5909,14 @@
       </p:cxnSp>
       <p:sp>
         <p:nvSpPr>
-          <p:cNvPr id="13" name="TextBox 12"/>
-          <p:cNvSpPr txBox="1"/>
-          <p:nvPr/>
-        </p:nvSpPr>
-        <p:spPr>
-          <a:xfrm>
-            <a:off x="2651760" y="3200400"/>
-            <a:ext cx="548640" cy="201168"/>
-          </a:xfrm>
-          <a:prstGeom prst="rect">
-            <a:avLst/>
-          </a:prstGeom>
-          <a:solidFill>
-            <a:srgbClr val="FFFFFF"/>
-          </a:solidFill>
-          <a:ln>
-            <a:noFill/>
-          </a:ln>
-        </p:spPr>
-        <p:txBody>
-          <a:bodyPr wrap="none" lIns="12700" rIns="12700" tIns="0" bIns="0">
-            <a:spAutoFit/>
-          </a:bodyPr>
-          <a:lstStyle/>
-          <a:p>
-            <a:pPr algn="ctr"/>
-            <a:r>
-              <a:rPr sz="1000" b="1">
-                <a:solidFill>
-                  <a:srgbClr val="154FC2"/>
-                </a:solidFill>
-              </a:rPr>
-              <a:t>A3r</a:t>
-            </a:r>
-          </a:p>
-        </p:txBody>
-      </p:sp>
-      <p:cxnSp>
-        <p:nvCxnSpPr>
-          <p:cNvPr id="14" name="Connector 13"/>
-          <p:cNvCxnSpPr/>
-          <p:nvPr/>
-        </p:nvCxnSpPr>
-        <p:spPr>
-          <a:xfrm flipV="1">
-            <a:off x="1920240" y="2011680"/>
-            <a:ext cx="0" cy="1005840"/>
-          </a:xfrm>
-          <a:prstGeom prst="line">
-            <a:avLst/>
-          </a:prstGeom>
-          <a:ln w="31750">
-            <a:solidFill>
-              <a:srgbClr val="154FC2"/>
-            </a:solidFill>
-            <a:tailEnd type="triangle" w="med" h="med"/>
-          </a:ln>
-        </p:spPr>
-        <p:style>
-          <a:lnRef idx="2">
-            <a:schemeClr val="accent1"/>
-          </a:lnRef>
-          <a:fillRef idx="0">
-            <a:schemeClr val="accent1"/>
-          </a:fillRef>
-          <a:effectRef idx="1">
-            <a:schemeClr val="accent1"/>
-          </a:effectRef>
-          <a:fontRef idx="minor">
-            <a:schemeClr val="tx1"/>
-          </a:fontRef>
-        </p:style>
-      </p:cxnSp>
-      <p:sp>
-        <p:nvSpPr>
-          <p:cNvPr id="15" name="TextBox 14"/>
-          <p:cNvSpPr txBox="1"/>
-          <p:nvPr/>
-        </p:nvSpPr>
-        <p:spPr>
-          <a:xfrm>
-            <a:off x="1965960" y="2423160"/>
-            <a:ext cx="457200" cy="201168"/>
-          </a:xfrm>
-          <a:prstGeom prst="rect">
-            <a:avLst/>
-          </a:prstGeom>
-          <a:solidFill>
-            <a:srgbClr val="FFFFFF"/>
-          </a:solidFill>
-          <a:ln>
-            <a:noFill/>
-          </a:ln>
-        </p:spPr>
-        <p:txBody>
-          <a:bodyPr wrap="none" lIns="12700" rIns="12700" tIns="0" bIns="0">
-            <a:spAutoFit/>
-          </a:bodyPr>
-          <a:lstStyle/>
-          <a:p>
-            <a:pPr algn="ctr"/>
-            <a:r>
-              <a:rPr sz="1000" b="1">
-                <a:solidFill>
-                  <a:srgbClr val="154FC2"/>
-                </a:solidFill>
-              </a:rPr>
-              <a:t>A4r</a:t>
-            </a:r>
-          </a:p>
-        </p:txBody>
-      </p:sp>
-      <p:cxnSp>
-        <p:nvCxnSpPr>
-          <p:cNvPr id="16" name="Connector 15"/>
-          <p:cNvCxnSpPr/>
-          <p:nvPr/>
-        </p:nvCxnSpPr>
-        <p:spPr>
-          <a:xfrm flipV="1">
-            <a:off x="2377440" y="2011680"/>
-            <a:ext cx="2377440" cy="1005840"/>
-          </a:xfrm>
-          <a:prstGeom prst="line">
-            <a:avLst/>
-          </a:prstGeom>
-          <a:ln w="31750">
-            <a:solidFill>
-              <a:srgbClr val="154FC2"/>
-            </a:solidFill>
-            <a:tailEnd type="triangle" w="med" h="med"/>
-          </a:ln>
-        </p:spPr>
-        <p:style>
-          <a:lnRef idx="2">
-            <a:schemeClr val="accent1"/>
-          </a:lnRef>
-          <a:fillRef idx="0">
-            <a:schemeClr val="accent1"/>
-          </a:fillRef>
-          <a:effectRef idx="1">
-            <a:schemeClr val="accent1"/>
-          </a:effectRef>
-          <a:fontRef idx="minor">
-            <a:schemeClr val="tx1"/>
-          </a:fontRef>
-        </p:style>
-      </p:cxnSp>
-      <p:sp>
-        <p:nvSpPr>
-          <p:cNvPr id="17" name="TextBox 16"/>
-          <p:cNvSpPr txBox="1"/>
-          <p:nvPr/>
-        </p:nvSpPr>
-        <p:spPr>
-          <a:xfrm>
-            <a:off x="3337560" y="2331720"/>
-            <a:ext cx="548640" cy="201168"/>
-          </a:xfrm>
-          <a:prstGeom prst="rect">
-            <a:avLst/>
-          </a:prstGeom>
-          <a:solidFill>
-            <a:srgbClr val="FFFFFF"/>
-          </a:solidFill>
-          <a:ln>
-            <a:noFill/>
-          </a:ln>
-        </p:spPr>
-        <p:txBody>
-          <a:bodyPr wrap="none" lIns="12700" rIns="12700" tIns="0" bIns="0">
-            <a:spAutoFit/>
-          </a:bodyPr>
-          <a:lstStyle/>
-          <a:p>
-            <a:pPr algn="ctr"/>
-            <a:r>
-              <a:rPr sz="1000" b="1">
-                <a:solidFill>
-                  <a:srgbClr val="154FC2"/>
-                </a:solidFill>
-              </a:rPr>
-              <a:t>A5r</a:t>
-            </a:r>
-          </a:p>
-        </p:txBody>
-      </p:sp>
-      <p:cxnSp>
-        <p:nvCxnSpPr>
-          <p:cNvPr id="18" name="Connector 17"/>
-          <p:cNvCxnSpPr/>
-          <p:nvPr/>
-        </p:nvCxnSpPr>
-        <p:spPr>
-          <a:xfrm flipV="1">
-            <a:off x="2468880" y="2011680"/>
-            <a:ext cx="2651760" cy="1005840"/>
-          </a:xfrm>
-          <a:prstGeom prst="line">
-            <a:avLst/>
-          </a:prstGeom>
-          <a:ln w="31750">
-            <a:solidFill>
-              <a:srgbClr val="154FC2"/>
-            </a:solidFill>
-            <a:tailEnd type="triangle" w="med" h="med"/>
-          </a:ln>
-        </p:spPr>
-        <p:style>
-          <a:lnRef idx="2">
-            <a:schemeClr val="accent1"/>
-          </a:lnRef>
-          <a:fillRef idx="0">
-            <a:schemeClr val="accent1"/>
-          </a:fillRef>
-          <a:effectRef idx="1">
-            <a:schemeClr val="accent1"/>
-          </a:effectRef>
-          <a:fontRef idx="minor">
-            <a:schemeClr val="tx1"/>
-          </a:fontRef>
-        </p:style>
-      </p:cxnSp>
-      <p:sp>
-        <p:nvSpPr>
-          <p:cNvPr id="19" name="TextBox 18"/>
-          <p:cNvSpPr txBox="1"/>
-          <p:nvPr/>
-        </p:nvSpPr>
-        <p:spPr>
-          <a:xfrm>
-            <a:off x="3566160" y="2560320"/>
-            <a:ext cx="548640" cy="201168"/>
-          </a:xfrm>
-          <a:prstGeom prst="rect">
-            <a:avLst/>
-          </a:prstGeom>
-          <a:solidFill>
-            <a:srgbClr val="FFFFFF"/>
-          </a:solidFill>
-          <a:ln>
-            <a:noFill/>
-          </a:ln>
-        </p:spPr>
-        <p:txBody>
-          <a:bodyPr wrap="none" lIns="12700" rIns="12700" tIns="0" bIns="0">
-            <a:spAutoFit/>
-          </a:bodyPr>
-          <a:lstStyle/>
-          <a:p>
-            <a:pPr algn="ctr"/>
-            <a:r>
-              <a:rPr sz="1000" b="1">
-                <a:solidFill>
-                  <a:srgbClr val="154FC2"/>
-                </a:solidFill>
-              </a:rPr>
-              <a:t>A6r</a:t>
-            </a:r>
-          </a:p>
-        </p:txBody>
-      </p:sp>
-      <p:cxnSp>
-        <p:nvCxnSpPr>
-          <p:cNvPr id="20" name="Connector 19"/>
-          <p:cNvCxnSpPr/>
-          <p:nvPr/>
-        </p:nvCxnSpPr>
-        <p:spPr>
-          <a:xfrm flipV="1">
-            <a:off x="2560320" y="2011680"/>
-            <a:ext cx="2926080" cy="1005840"/>
-          </a:xfrm>
-          <a:prstGeom prst="line">
-            <a:avLst/>
-          </a:prstGeom>
-          <a:ln w="31750">
-            <a:solidFill>
-              <a:srgbClr val="154FC2"/>
-            </a:solidFill>
-            <a:tailEnd type="triangle" w="med" h="med"/>
-          </a:ln>
-        </p:spPr>
-        <p:style>
-          <a:lnRef idx="2">
-            <a:schemeClr val="accent1"/>
-          </a:lnRef>
-          <a:fillRef idx="0">
-            <a:schemeClr val="accent1"/>
-          </a:fillRef>
-          <a:effectRef idx="1">
-            <a:schemeClr val="accent1"/>
-          </a:effectRef>
-          <a:fontRef idx="minor">
-            <a:schemeClr val="tx1"/>
-          </a:fontRef>
-        </p:style>
-      </p:cxnSp>
-      <p:sp>
-        <p:nvSpPr>
-          <p:cNvPr id="21" name="TextBox 20"/>
-          <p:cNvSpPr txBox="1"/>
-          <p:nvPr/>
-        </p:nvSpPr>
-        <p:spPr>
-          <a:xfrm>
-            <a:off x="3794760" y="2331720"/>
-            <a:ext cx="548640" cy="201168"/>
-          </a:xfrm>
-          <a:prstGeom prst="rect">
-            <a:avLst/>
-          </a:prstGeom>
-          <a:solidFill>
-            <a:srgbClr val="FFFFFF"/>
-          </a:solidFill>
-          <a:ln>
-            <a:noFill/>
-          </a:ln>
-        </p:spPr>
-        <p:txBody>
-          <a:bodyPr wrap="none" lIns="12700" rIns="12700" tIns="0" bIns="0">
-            <a:spAutoFit/>
-          </a:bodyPr>
-          <a:lstStyle/>
-          <a:p>
-            <a:pPr algn="ctr"/>
-            <a:r>
-              <a:rPr sz="1000" b="1">
-                <a:solidFill>
-                  <a:srgbClr val="154FC2"/>
-                </a:solidFill>
-              </a:rPr>
-              <a:t>A7r</a:t>
-            </a:r>
-          </a:p>
-        </p:txBody>
-      </p:sp>
-      <p:sp>
-        <p:nvSpPr>
-          <p:cNvPr id="22" name="Oval 21"/>
+          <p:cNvPr id="12" name="Oval 11"/>
           <p:cNvSpPr/>
           <p:nvPr/>
         </p:nvSpPr>
         <p:spPr>
           <a:xfrm>
-            <a:off x="2468880" y="2697480"/>
-            <a:ext cx="365760" cy="365760"/>
+            <a:off x="4014215" y="2048255"/>
+            <a:ext cx="292608" cy="292608"/>
           </a:xfrm>
           <a:prstGeom prst="ellipse">
             <a:avLst/>
@@ -6161,70 +5945,80 @@
           </a:fontRef>
         </p:style>
         <p:txBody>
-          <a:bodyPr rtlCol="0" anchor="ctr" lIns="12700" rIns="12700" tIns="0" bIns="0"/>
+          <a:bodyPr rtlCol="0" anchor="ctr" lIns="0" rIns="0" tIns="0" bIns="0"/>
           <a:lstStyle/>
           <a:p>
             <a:pPr algn="ctr"/>
             <a:r>
-              <a:rPr sz="800" b="1"/>
-              <a:t>A8r</a:t>
-            </a:r>
-          </a:p>
-        </p:txBody>
-      </p:sp>
-      <p:sp>
-        <p:nvSpPr>
-          <p:cNvPr id="23" name="TextBox 22"/>
+              <a:rPr sz="800" b="1">
+                <a:solidFill>
+                  <a:srgbClr val="333333"/>
+                </a:solidFill>
+              </a:rPr>
+              <a:t>C1</a:t>
+            </a:r>
+          </a:p>
+        </p:txBody>
+      </p:sp>
+      <p:sp>
+        <p:nvSpPr>
+          <p:cNvPr id="13" name="TextBox 12"/>
           <p:cNvSpPr txBox="1"/>
           <p:nvPr/>
         </p:nvSpPr>
         <p:spPr>
           <a:xfrm>
-            <a:off x="6766560" y="4023360"/>
-            <a:ext cx="2926080" cy="548640"/>
+            <a:off x="2697479" y="1938528"/>
+            <a:ext cx="2926080" cy="219456"/>
           </a:xfrm>
           <a:prstGeom prst="rect">
             <a:avLst/>
           </a:prstGeom>
-          <a:noFill/>
-        </p:spPr>
-        <p:txBody>
-          <a:bodyPr wrap="square">
+          <a:solidFill>
+            <a:srgbClr val="FFFFFF"/>
+          </a:solidFill>
+          <a:ln>
+            <a:noFill/>
+          </a:ln>
+        </p:spPr>
+        <p:txBody>
+          <a:bodyPr wrap="none" lIns="25400" rIns="25400" tIns="0" bIns="0">
             <a:spAutoFit/>
           </a:bodyPr>
           <a:lstStyle/>
           <a:p>
-            <a:pPr algn="ctr"/>
-            <a:r>
-              <a:rPr sz="700">
-                <a:solidFill>
-                  <a:srgbClr val="0D327D"/>
-                </a:solidFill>
-              </a:rPr>
-              <a:t>A9r-A15r:  flush+scan bucket → lock + sharer_bitmap |=  →  pool-&gt;read → ReadStaging write + ready_op_id publish</a:t>
+            <a:pPr algn="l"/>
+            <a:r>
+              <a:rPr sz="850" b="1" i="0">
+                <a:solidFill>
+                  <a:srgbClr val="E65100"/>
+                </a:solidFill>
+              </a:rPr>
+              <a:t>lock_table_.lock(idx)   LFM acquire  (cross-host blocking spin)</a:t>
             </a:r>
           </a:p>
         </p:txBody>
       </p:sp>
       <p:cxnSp>
         <p:nvCxnSpPr>
-          <p:cNvPr id="24" name="Connector 23"/>
+          <p:cNvPr id="14" name="Connector 13"/>
           <p:cNvCxnSpPr/>
           <p:nvPr/>
         </p:nvCxnSpPr>
         <p:spPr>
           <a:xfrm>
-            <a:off x="5760720" y="2011680"/>
-            <a:ext cx="1828800" cy="1005840"/>
+            <a:off x="2194560" y="2578608"/>
+            <a:ext cx="3931920" cy="0"/>
           </a:xfrm>
           <a:prstGeom prst="line">
             <a:avLst/>
           </a:prstGeom>
-          <a:ln w="19050">
+          <a:ln w="20320">
             <a:solidFill>
-              <a:srgbClr val="154FC2"/>
+              <a:srgbClr val="E65100"/>
             </a:solidFill>
             <a:tailEnd type="triangle" w="med" h="med"/>
+            <a:prstDash val="dash"/>
           </a:ln>
         </p:spPr>
         <p:style>
@@ -6242,25 +6036,118 @@
           </a:fontRef>
         </p:style>
       </p:cxnSp>
+      <p:sp>
+        <p:nvSpPr>
+          <p:cNvPr id="15" name="Oval 14"/>
+          <p:cNvSpPr/>
+          <p:nvPr/>
+        </p:nvSpPr>
+        <p:spPr>
+          <a:xfrm>
+            <a:off x="4014215" y="2432303"/>
+            <a:ext cx="292608" cy="292608"/>
+          </a:xfrm>
+          <a:prstGeom prst="ellipse">
+            <a:avLst/>
+          </a:prstGeom>
+          <a:solidFill>
+            <a:srgbClr val="FFFFFF"/>
+          </a:solidFill>
+          <a:ln w="19050">
+            <a:solidFill>
+              <a:srgbClr val="E65100"/>
+            </a:solidFill>
+          </a:ln>
+        </p:spPr>
+        <p:style>
+          <a:lnRef idx="1">
+            <a:schemeClr val="accent1"/>
+          </a:lnRef>
+          <a:fillRef idx="3">
+            <a:schemeClr val="accent1"/>
+          </a:fillRef>
+          <a:effectRef idx="2">
+            <a:schemeClr val="accent1"/>
+          </a:effectRef>
+          <a:fontRef idx="minor">
+            <a:schemeClr val="lt1"/>
+          </a:fontRef>
+        </p:style>
+        <p:txBody>
+          <a:bodyPr rtlCol="0" anchor="ctr" lIns="0" rIns="0" tIns="0" bIns="0"/>
+          <a:lstStyle/>
+          <a:p>
+            <a:pPr algn="ctr"/>
+            <a:r>
+              <a:rPr sz="800" b="1">
+                <a:solidFill>
+                  <a:srgbClr val="E65100"/>
+                </a:solidFill>
+              </a:rPr>
+              <a:t>C2</a:t>
+            </a:r>
+          </a:p>
+        </p:txBody>
+      </p:sp>
+      <p:sp>
+        <p:nvSpPr>
+          <p:cNvPr id="16" name="TextBox 15"/>
+          <p:cNvSpPr txBox="1"/>
+          <p:nvPr/>
+        </p:nvSpPr>
+        <p:spPr>
+          <a:xfrm>
+            <a:off x="2697479" y="2322576"/>
+            <a:ext cx="2926080" cy="219456"/>
+          </a:xfrm>
+          <a:prstGeom prst="rect">
+            <a:avLst/>
+          </a:prstGeom>
+          <a:solidFill>
+            <a:srgbClr val="FFFFFF"/>
+          </a:solidFill>
+          <a:ln>
+            <a:noFill/>
+          </a:ln>
+        </p:spPr>
+        <p:txBody>
+          <a:bodyPr wrap="none" lIns="25400" rIns="25400" tIns="0" bIns="0">
+            <a:spAutoFit/>
+          </a:bodyPr>
+          <a:lstStyle/>
+          <a:p>
+            <a:pPr algn="l"/>
+            <a:r>
+              <a:rPr sz="850" b="1" i="0">
+                <a:solidFill>
+                  <a:srgbClr val="E65100"/>
+                </a:solidFill>
+              </a:rPr>
+              <a:t>flush_line(slots[0]); flush_line(slots[4]); mfence  (Phase-2.6 flush-collapse)</a:t>
+            </a:r>
+          </a:p>
+        </p:txBody>
+      </p:sp>
       <p:cxnSp>
         <p:nvCxnSpPr>
-          <p:cNvPr id="25" name="Connector 24"/>
+          <p:cNvPr id="17" name="Connector 16"/>
           <p:cNvCxnSpPr/>
           <p:nvPr/>
         </p:nvCxnSpPr>
         <p:spPr>
-          <a:xfrm flipH="1" flipV="1">
-            <a:off x="3657600" y="2011680"/>
-            <a:ext cx="4389120" cy="1005840"/>
+          <a:xfrm>
+            <a:off x="2194560" y="2962656"/>
+            <a:ext cx="3931920" cy="0"/>
           </a:xfrm>
           <a:prstGeom prst="line">
             <a:avLst/>
           </a:prstGeom>
-          <a:ln w="19050">
+          <a:ln w="20320">
             <a:solidFill>
-              <a:srgbClr val="154FC2"/>
+              <a:srgbClr val="E65100"/>
             </a:solidFill>
             <a:tailEnd type="triangle" w="med" h="med"/>
+            <a:prstDash val="dash"/>
           </a:ln>
         </p:spPr>
         <p:style>
@@ -6280,14 +6167,67 @@
       </p:cxnSp>
       <p:sp>
         <p:nvSpPr>
-          <p:cNvPr id="26" name="TextBox 25"/>
+          <p:cNvPr id="18" name="Oval 17"/>
+          <p:cNvSpPr/>
+          <p:nvPr/>
+        </p:nvSpPr>
+        <p:spPr>
+          <a:xfrm>
+            <a:off x="4014215" y="2816351"/>
+            <a:ext cx="292608" cy="292608"/>
+          </a:xfrm>
+          <a:prstGeom prst="ellipse">
+            <a:avLst/>
+          </a:prstGeom>
+          <a:solidFill>
+            <a:srgbClr val="FFFFFF"/>
+          </a:solidFill>
+          <a:ln w="19050">
+            <a:solidFill>
+              <a:srgbClr val="E65100"/>
+            </a:solidFill>
+          </a:ln>
+        </p:spPr>
+        <p:style>
+          <a:lnRef idx="1">
+            <a:schemeClr val="accent1"/>
+          </a:lnRef>
+          <a:fillRef idx="3">
+            <a:schemeClr val="accent1"/>
+          </a:fillRef>
+          <a:effectRef idx="2">
+            <a:schemeClr val="accent1"/>
+          </a:effectRef>
+          <a:fontRef idx="minor">
+            <a:schemeClr val="lt1"/>
+          </a:fontRef>
+        </p:style>
+        <p:txBody>
+          <a:bodyPr rtlCol="0" anchor="ctr" lIns="0" rIns="0" tIns="0" bIns="0"/>
+          <a:lstStyle/>
+          <a:p>
+            <a:pPr algn="ctr"/>
+            <a:r>
+              <a:rPr sz="800" b="1">
+                <a:solidFill>
+                  <a:srgbClr val="E65100"/>
+                </a:solidFill>
+              </a:rPr>
+              <a:t>C3</a:t>
+            </a:r>
+          </a:p>
+        </p:txBody>
+      </p:sp>
+      <p:sp>
+        <p:nvSpPr>
+          <p:cNvPr id="19" name="TextBox 18"/>
           <p:cNvSpPr txBox="1"/>
           <p:nvPr/>
         </p:nvSpPr>
         <p:spPr>
           <a:xfrm>
-            <a:off x="5623560" y="2331720"/>
-            <a:ext cx="548640" cy="201168"/>
+            <a:off x="2697479" y="2706624"/>
+            <a:ext cx="2926080" cy="219456"/>
           </a:xfrm>
           <a:prstGeom prst="rect">
             <a:avLst/>
@@ -6300,33 +6240,123 @@
           </a:ln>
         </p:spPr>
         <p:txBody>
-          <a:bodyPr wrap="none" lIns="12700" rIns="12700" tIns="0" bIns="0">
+          <a:bodyPr wrap="none" lIns="25400" rIns="25400" tIns="0" bIns="0">
             <a:spAutoFit/>
           </a:bodyPr>
           <a:lstStyle/>
           <a:p>
+            <a:pPr algn="l"/>
+            <a:r>
+              <a:rPr sz="850" b="1" i="0">
+                <a:solidFill>
+                  <a:srgbClr val="E65100"/>
+                </a:solidFill>
+              </a:rPr>
+              <a:t>scan 7 slots; pick target_slot for UPDATE / INSERT / DELETE</a:t>
+            </a:r>
+          </a:p>
+        </p:txBody>
+      </p:sp>
+      <p:cxnSp>
+        <p:nvCxnSpPr>
+          <p:cNvPr id="20" name="Connector 19"/>
+          <p:cNvCxnSpPr/>
+          <p:nvPr/>
+        </p:nvCxnSpPr>
+        <p:spPr>
+          <a:xfrm>
+            <a:off x="2194560" y="3346703"/>
+            <a:ext cx="3931920" cy="0"/>
+          </a:xfrm>
+          <a:prstGeom prst="line">
+            <a:avLst/>
+          </a:prstGeom>
+          <a:ln w="20320">
+            <a:solidFill>
+              <a:srgbClr val="E65100"/>
+            </a:solidFill>
+            <a:tailEnd type="triangle" w="med" h="med"/>
+            <a:prstDash val="dash"/>
+          </a:ln>
+        </p:spPr>
+        <p:style>
+          <a:lnRef idx="2">
+            <a:schemeClr val="accent1"/>
+          </a:lnRef>
+          <a:fillRef idx="0">
+            <a:schemeClr val="accent1"/>
+          </a:fillRef>
+          <a:effectRef idx="1">
+            <a:schemeClr val="accent1"/>
+          </a:effectRef>
+          <a:fontRef idx="minor">
+            <a:schemeClr val="tx1"/>
+          </a:fontRef>
+        </p:style>
+      </p:cxnSp>
+      <p:sp>
+        <p:nvSpPr>
+          <p:cNvPr id="21" name="Oval 20"/>
+          <p:cNvSpPr/>
+          <p:nvPr/>
+        </p:nvSpPr>
+        <p:spPr>
+          <a:xfrm>
+            <a:off x="4014215" y="3200399"/>
+            <a:ext cx="292608" cy="292608"/>
+          </a:xfrm>
+          <a:prstGeom prst="ellipse">
+            <a:avLst/>
+          </a:prstGeom>
+          <a:solidFill>
+            <a:srgbClr val="FFFFFF"/>
+          </a:solidFill>
+          <a:ln w="19050">
+            <a:solidFill>
+              <a:srgbClr val="E65100"/>
+            </a:solidFill>
+          </a:ln>
+        </p:spPr>
+        <p:style>
+          <a:lnRef idx="1">
+            <a:schemeClr val="accent1"/>
+          </a:lnRef>
+          <a:fillRef idx="3">
+            <a:schemeClr val="accent1"/>
+          </a:fillRef>
+          <a:effectRef idx="2">
+            <a:schemeClr val="accent1"/>
+          </a:effectRef>
+          <a:fontRef idx="minor">
+            <a:schemeClr val="lt1"/>
+          </a:fontRef>
+        </p:style>
+        <p:txBody>
+          <a:bodyPr rtlCol="0" anchor="ctr" lIns="0" rIns="0" tIns="0" bIns="0"/>
+          <a:lstStyle/>
+          <a:p>
             <a:pPr algn="ctr"/>
             <a:r>
-              <a:rPr sz="1000" b="1">
-                <a:solidFill>
-                  <a:srgbClr val="154FC2"/>
-                </a:solidFill>
-              </a:rPr>
-              <a:t>A15r ready</a:t>
-            </a:r>
-          </a:p>
-        </p:txBody>
-      </p:sp>
-      <p:sp>
-        <p:nvSpPr>
-          <p:cNvPr id="27" name="TextBox 26"/>
+              <a:rPr sz="800" b="1">
+                <a:solidFill>
+                  <a:srgbClr val="E65100"/>
+                </a:solidFill>
+              </a:rPr>
+              <a:t>C4</a:t>
+            </a:r>
+          </a:p>
+        </p:txBody>
+      </p:sp>
+      <p:sp>
+        <p:nvSpPr>
+          <p:cNvPr id="22" name="TextBox 21"/>
           <p:cNvSpPr txBox="1"/>
           <p:nvPr/>
         </p:nvSpPr>
         <p:spPr>
           <a:xfrm>
-            <a:off x="2743200" y="2331720"/>
-            <a:ext cx="1828800" cy="274320"/>
+            <a:off x="2697479" y="3090672"/>
+            <a:ext cx="2926080" cy="219456"/>
           </a:xfrm>
           <a:prstGeom prst="rect">
             <a:avLst/>
@@ -6339,39 +6369,205 @@
           </a:ln>
         </p:spPr>
         <p:txBody>
-          <a:bodyPr wrap="none">
+          <a:bodyPr wrap="none" lIns="25400" rIns="25400" tIns="0" bIns="0">
             <a:spAutoFit/>
           </a:bodyPr>
           <a:lstStyle/>
           <a:p>
+            <a:pPr algn="l"/>
+            <a:r>
+              <a:rPr sz="850" b="1" i="0">
+                <a:solidFill>
+                  <a:srgbClr val="E65100"/>
+                </a:solidFill>
+              </a:rPr>
+              <a:t>slot.value = V; flush; sfence    (or INSERT key+value pair publish)</a:t>
+            </a:r>
+          </a:p>
+        </p:txBody>
+      </p:sp>
+      <p:cxnSp>
+        <p:nvCxnSpPr>
+          <p:cNvPr id="23" name="Connector 22"/>
+          <p:cNvCxnSpPr/>
+          <p:nvPr/>
+        </p:nvCxnSpPr>
+        <p:spPr>
+          <a:xfrm>
+            <a:off x="2194560" y="3730752"/>
+            <a:ext cx="3931920" cy="0"/>
+          </a:xfrm>
+          <a:prstGeom prst="line">
+            <a:avLst/>
+          </a:prstGeom>
+          <a:ln w="20320">
+            <a:solidFill>
+              <a:srgbClr val="E65100"/>
+            </a:solidFill>
+            <a:tailEnd type="triangle" w="med" h="med"/>
+            <a:prstDash val="dash"/>
+          </a:ln>
+        </p:spPr>
+        <p:style>
+          <a:lnRef idx="2">
+            <a:schemeClr val="accent1"/>
+          </a:lnRef>
+          <a:fillRef idx="0">
+            <a:schemeClr val="accent1"/>
+          </a:fillRef>
+          <a:effectRef idx="1">
+            <a:schemeClr val="accent1"/>
+          </a:effectRef>
+          <a:fontRef idx="minor">
+            <a:schemeClr val="tx1"/>
+          </a:fontRef>
+        </p:style>
+      </p:cxnSp>
+      <p:sp>
+        <p:nvSpPr>
+          <p:cNvPr id="24" name="Oval 23"/>
+          <p:cNvSpPr/>
+          <p:nvPr/>
+        </p:nvSpPr>
+        <p:spPr>
+          <a:xfrm>
+            <a:off x="4014215" y="3584448"/>
+            <a:ext cx="292608" cy="292608"/>
+          </a:xfrm>
+          <a:prstGeom prst="ellipse">
+            <a:avLst/>
+          </a:prstGeom>
+          <a:solidFill>
+            <a:srgbClr val="FFF49C"/>
+          </a:solidFill>
+          <a:ln w="19050">
+            <a:solidFill>
+              <a:srgbClr val="F9A825"/>
+            </a:solidFill>
+          </a:ln>
+        </p:spPr>
+        <p:style>
+          <a:lnRef idx="1">
+            <a:schemeClr val="accent1"/>
+          </a:lnRef>
+          <a:fillRef idx="3">
+            <a:schemeClr val="accent1"/>
+          </a:fillRef>
+          <a:effectRef idx="2">
+            <a:schemeClr val="accent1"/>
+          </a:effectRef>
+          <a:fontRef idx="minor">
+            <a:schemeClr val="lt1"/>
+          </a:fontRef>
+        </p:style>
+        <p:txBody>
+          <a:bodyPr rtlCol="0" anchor="ctr" lIns="0" rIns="0" tIns="0" bIns="0"/>
+          <a:lstStyle/>
+          <a:p>
             <a:pPr algn="ctr"/>
             <a:r>
               <a:rPr sz="800" b="1">
                 <a:solidFill>
-                  <a:srgbClr val="0D327D"/>
-                </a:solidFill>
-              </a:rPr>
-              <a:t>A16r: C13 + memcpy</a:t>
-            </a:r>
-          </a:p>
-        </p:txBody>
-      </p:sp>
-      <p:sp>
-        <p:nvSpPr>
-          <p:cNvPr id="28" name="Rounded Rectangle 27"/>
+                  <a:srgbClr val="333333"/>
+                </a:solidFill>
+              </a:rPr>
+              <a:t>C5</a:t>
+            </a:r>
+          </a:p>
+        </p:txBody>
+      </p:sp>
+      <p:sp>
+        <p:nvSpPr>
+          <p:cNvPr id="25" name="TextBox 24"/>
+          <p:cNvSpPr txBox="1"/>
+          <p:nvPr/>
+        </p:nvSpPr>
+        <p:spPr>
+          <a:xfrm>
+            <a:off x="2697479" y="3474720"/>
+            <a:ext cx="2926080" cy="219456"/>
+          </a:xfrm>
+          <a:prstGeom prst="rect">
+            <a:avLst/>
+          </a:prstGeom>
+          <a:solidFill>
+            <a:srgbClr val="FFFFFF"/>
+          </a:solidFill>
+          <a:ln>
+            <a:noFill/>
+          </a:ln>
+        </p:spPr>
+        <p:txBody>
+          <a:bodyPr wrap="none" lIns="25400" rIns="25400" tIns="0" bIns="0">
+            <a:spAutoFit/>
+          </a:bodyPr>
+          <a:lstStyle/>
+          <a:p>
+            <a:pPr algn="l"/>
+            <a:r>
+              <a:rPr sz="850" b="1" i="0">
+                <a:solidFill>
+                  <a:srgbClr val="E65100"/>
+                </a:solidFill>
+              </a:rPr>
+              <a:t>★ atomic_add_fetch(&amp;write_epoch, 1) + flush + sfence ★  (1.4 µs CXL atomic = peer-visible commit)</a:t>
+            </a:r>
+          </a:p>
+        </p:txBody>
+      </p:sp>
+      <p:cxnSp>
+        <p:nvCxnSpPr>
+          <p:cNvPr id="26" name="Connector 25"/>
+          <p:cNvCxnSpPr/>
+          <p:nvPr/>
+        </p:nvCxnSpPr>
+        <p:spPr>
+          <a:xfrm>
+            <a:off x="2194560" y="4114800"/>
+            <a:ext cx="3931920" cy="0"/>
+          </a:xfrm>
+          <a:prstGeom prst="line">
+            <a:avLst/>
+          </a:prstGeom>
+          <a:ln w="20320">
+            <a:solidFill>
+              <a:srgbClr val="E65100"/>
+            </a:solidFill>
+            <a:tailEnd type="triangle" w="med" h="med"/>
+            <a:prstDash val="dash"/>
+          </a:ln>
+        </p:spPr>
+        <p:style>
+          <a:lnRef idx="2">
+            <a:schemeClr val="accent1"/>
+          </a:lnRef>
+          <a:fillRef idx="0">
+            <a:schemeClr val="accent1"/>
+          </a:fillRef>
+          <a:effectRef idx="1">
+            <a:schemeClr val="accent1"/>
+          </a:effectRef>
+          <a:fontRef idx="minor">
+            <a:schemeClr val="tx1"/>
+          </a:fontRef>
+        </p:style>
+      </p:cxnSp>
+      <p:sp>
+        <p:nvSpPr>
+          <p:cNvPr id="27" name="Oval 26"/>
           <p:cNvSpPr/>
           <p:nvPr/>
         </p:nvSpPr>
         <p:spPr>
           <a:xfrm>
-            <a:off x="274320" y="4572000"/>
-            <a:ext cx="11612880" cy="1463040"/>
-          </a:xfrm>
-          <a:prstGeom prst="roundRect">
+            <a:off x="4014215" y="3968496"/>
+            <a:ext cx="292608" cy="292608"/>
+          </a:xfrm>
+          <a:prstGeom prst="ellipse">
             <a:avLst/>
           </a:prstGeom>
           <a:solidFill>
-            <a:srgbClr val="FFE0B2"/>
+            <a:srgbClr val="FFFFFF"/>
           </a:solidFill>
           <a:ln w="19050">
             <a:solidFill>
@@ -6394,102 +6590,31 @@
           </a:fontRef>
         </p:style>
         <p:txBody>
-          <a:bodyPr rtlCol="0" anchor="ctr" lIns="38100" rIns="38100" tIns="25400" bIns="25400" wrap="square"/>
+          <a:bodyPr rtlCol="0" anchor="ctr" lIns="0" rIns="0" tIns="0" bIns="0"/>
           <a:lstStyle/>
           <a:p>
             <a:pPr algn="ctr"/>
             <a:r>
-              <a:rPr sz="1100" b="1">
-                <a:solidFill>
-                  <a:srgbClr val="8C3200"/>
-                </a:solidFill>
-              </a:rPr>
-              <a:t>Protocol C — host 0 worker only, no cross-host coordination</a:t>
-            </a:r>
-          </a:p>
-        </p:txBody>
-      </p:sp>
-      <p:sp>
-        <p:nvSpPr>
-          <p:cNvPr id="29" name="TextBox 28"/>
+              <a:rPr sz="800" b="1">
+                <a:solidFill>
+                  <a:srgbClr val="E65100"/>
+                </a:solidFill>
+              </a:rPr>
+              <a:t>C6</a:t>
+            </a:r>
+          </a:p>
+        </p:txBody>
+      </p:sp>
+      <p:sp>
+        <p:nvSpPr>
+          <p:cNvPr id="28" name="TextBox 27"/>
           <p:cNvSpPr txBox="1"/>
           <p:nvPr/>
         </p:nvSpPr>
         <p:spPr>
           <a:xfrm>
-            <a:off x="457200" y="5212080"/>
-            <a:ext cx="1828800" cy="457200"/>
-          </a:xfrm>
-          <a:prstGeom prst="rect">
-            <a:avLst/>
-          </a:prstGeom>
-          <a:noFill/>
-        </p:spPr>
-        <p:txBody>
-          <a:bodyPr wrap="none">
-            <a:spAutoFit/>
-          </a:bodyPr>
-          <a:lstStyle/>
-          <a:p>
-            <a:pPr algn="ctr"/>
-            <a:r>
-              <a:rPr sz="1000" b="1">
-                <a:solidFill>
-                  <a:srgbClr val="8C3200"/>
-                </a:solidFill>
-              </a:rPr>
-              <a:t>C1r: hash(K) → bucket_idx</a:t>
-            </a:r>
-          </a:p>
-        </p:txBody>
-      </p:sp>
-      <p:cxnSp>
-        <p:nvCxnSpPr>
-          <p:cNvPr id="30" name="Connector 29"/>
-          <p:cNvCxnSpPr/>
-          <p:nvPr/>
-        </p:nvCxnSpPr>
-        <p:spPr>
-          <a:xfrm flipV="1">
-            <a:off x="3657600" y="2011680"/>
-            <a:ext cx="0" cy="2560320"/>
-          </a:xfrm>
-          <a:prstGeom prst="line">
-            <a:avLst/>
-          </a:prstGeom>
-          <a:ln w="31750">
-            <a:solidFill>
-              <a:srgbClr val="E65100"/>
-            </a:solidFill>
-            <a:tailEnd type="triangle" w="med" h="med"/>
-            <a:prstDash val="dash"/>
-          </a:ln>
-        </p:spPr>
-        <p:style>
-          <a:lnRef idx="2">
-            <a:schemeClr val="accent1"/>
-          </a:lnRef>
-          <a:fillRef idx="0">
-            <a:schemeClr val="accent1"/>
-          </a:fillRef>
-          <a:effectRef idx="1">
-            <a:schemeClr val="accent1"/>
-          </a:effectRef>
-          <a:fontRef idx="minor">
-            <a:schemeClr val="tx1"/>
-          </a:fontRef>
-        </p:style>
-      </p:cxnSp>
-      <p:sp>
-        <p:nvSpPr>
-          <p:cNvPr id="31" name="TextBox 30"/>
-          <p:cNvSpPr txBox="1"/>
-          <p:nvPr/>
-        </p:nvSpPr>
-        <p:spPr>
-          <a:xfrm>
-            <a:off x="3703320" y="3200400"/>
-            <a:ext cx="457200" cy="201168"/>
+            <a:off x="2697479" y="3858768"/>
+            <a:ext cx="2926080" cy="219456"/>
           </a:xfrm>
           <a:prstGeom prst="rect">
             <a:avLst/>
@@ -6502,229 +6627,43 @@
           </a:ln>
         </p:spPr>
         <p:txBody>
-          <a:bodyPr wrap="none" lIns="12700" rIns="12700" tIns="0" bIns="0">
+          <a:bodyPr wrap="none" lIns="25400" rIns="25400" tIns="0" bIns="0">
             <a:spAutoFit/>
           </a:bodyPr>
           <a:lstStyle/>
           <a:p>
-            <a:pPr algn="ctr"/>
-            <a:r>
-              <a:rPr sz="1000" b="1">
+            <a:pPr algn="l"/>
+            <a:r>
+              <a:rPr sz="850" b="1" i="0">
                 <a:solidFill>
                   <a:srgbClr val="E65100"/>
                 </a:solidFill>
               </a:rPr>
-              <a:t>C2r epoch</a:t>
-            </a:r>
-          </a:p>
-        </p:txBody>
-      </p:sp>
-      <p:cxnSp>
-        <p:nvCxnSpPr>
-          <p:cNvPr id="32" name="Connector 31"/>
-          <p:cNvCxnSpPr/>
-          <p:nvPr/>
-        </p:nvCxnSpPr>
-        <p:spPr>
-          <a:xfrm flipV="1">
-            <a:off x="10789920" y="3931920"/>
-            <a:ext cx="0" cy="640080"/>
-          </a:xfrm>
-          <a:prstGeom prst="line">
-            <a:avLst/>
-          </a:prstGeom>
-          <a:ln w="31750">
+              <a:t>lock_table_.unlock()   LFM release  →  return 0</a:t>
+            </a:r>
+          </a:p>
+        </p:txBody>
+      </p:sp>
+      <p:sp>
+        <p:nvSpPr>
+          <p:cNvPr id="29" name="Rounded Rectangle 28"/>
+          <p:cNvSpPr/>
+          <p:nvPr/>
+        </p:nvSpPr>
+        <p:spPr>
+          <a:xfrm>
+            <a:off x="274320" y="4937760"/>
+            <a:ext cx="5212080" cy="1280160"/>
+          </a:xfrm>
+          <a:prstGeom prst="roundRect">
+            <a:avLst/>
+          </a:prstGeom>
+          <a:solidFill>
+            <a:srgbClr val="EEEEEE"/>
+          </a:solidFill>
+          <a:ln w="7620">
             <a:solidFill>
-              <a:srgbClr val="E65100"/>
-            </a:solidFill>
-            <a:tailEnd type="triangle" w="med" h="med"/>
-            <a:prstDash val="dash"/>
-          </a:ln>
-        </p:spPr>
-        <p:style>
-          <a:lnRef idx="2">
-            <a:schemeClr val="accent1"/>
-          </a:lnRef>
-          <a:fillRef idx="0">
-            <a:schemeClr val="accent1"/>
-          </a:fillRef>
-          <a:effectRef idx="1">
-            <a:schemeClr val="accent1"/>
-          </a:effectRef>
-          <a:fontRef idx="minor">
-            <a:schemeClr val="tx1"/>
-          </a:fontRef>
-        </p:style>
-      </p:cxnSp>
-      <p:sp>
-        <p:nvSpPr>
-          <p:cNvPr id="33" name="TextBox 32"/>
-          <p:cNvSpPr txBox="1"/>
-          <p:nvPr/>
-        </p:nvSpPr>
-        <p:spPr>
-          <a:xfrm>
-            <a:off x="10835640" y="4160520"/>
-            <a:ext cx="457200" cy="201168"/>
-          </a:xfrm>
-          <a:prstGeom prst="rect">
-            <a:avLst/>
-          </a:prstGeom>
-          <a:solidFill>
-            <a:srgbClr val="FFFFFF"/>
-          </a:solidFill>
-          <a:ln>
-            <a:noFill/>
-          </a:ln>
-        </p:spPr>
-        <p:txBody>
-          <a:bodyPr wrap="none" lIns="12700" rIns="12700" tIns="0" bIns="0">
-            <a:spAutoFit/>
-          </a:bodyPr>
-          <a:lstStyle/>
-          <a:p>
-            <a:pPr algn="ctr"/>
-            <a:r>
-              <a:rPr sz="1000" b="1">
-                <a:solidFill>
-                  <a:srgbClr val="E65100"/>
-                </a:solidFill>
-              </a:rPr>
-              <a:t>C2r DRAM hit?</a:t>
-            </a:r>
-          </a:p>
-        </p:txBody>
-      </p:sp>
-      <p:cxnSp>
-        <p:nvCxnSpPr>
-          <p:cNvPr id="34" name="Connector 33"/>
-          <p:cNvCxnSpPr/>
-          <p:nvPr/>
-        </p:nvCxnSpPr>
-        <p:spPr>
-          <a:xfrm flipV="1">
-            <a:off x="5486400" y="2011680"/>
-            <a:ext cx="0" cy="2560320"/>
-          </a:xfrm>
-          <a:prstGeom prst="line">
-            <a:avLst/>
-          </a:prstGeom>
-          <a:ln w="31750">
-            <a:solidFill>
-              <a:srgbClr val="E65100"/>
-            </a:solidFill>
-            <a:tailEnd type="triangle" w="med" h="med"/>
-            <a:prstDash val="dash"/>
-          </a:ln>
-        </p:spPr>
-        <p:style>
-          <a:lnRef idx="2">
-            <a:schemeClr val="accent1"/>
-          </a:lnRef>
-          <a:fillRef idx="0">
-            <a:schemeClr val="accent1"/>
-          </a:fillRef>
-          <a:effectRef idx="1">
-            <a:schemeClr val="accent1"/>
-          </a:effectRef>
-          <a:fontRef idx="minor">
-            <a:schemeClr val="tx1"/>
-          </a:fontRef>
-        </p:style>
-      </p:cxnSp>
-      <p:sp>
-        <p:nvSpPr>
-          <p:cNvPr id="35" name="TextBox 34"/>
-          <p:cNvSpPr txBox="1"/>
-          <p:nvPr/>
-        </p:nvSpPr>
-        <p:spPr>
-          <a:xfrm>
-            <a:off x="5532120" y="3200400"/>
-            <a:ext cx="457200" cy="201168"/>
-          </a:xfrm>
-          <a:prstGeom prst="rect">
-            <a:avLst/>
-          </a:prstGeom>
-          <a:solidFill>
-            <a:srgbClr val="FFFFFF"/>
-          </a:solidFill>
-          <a:ln>
-            <a:noFill/>
-          </a:ln>
-        </p:spPr>
-        <p:txBody>
-          <a:bodyPr wrap="none" lIns="12700" rIns="12700" tIns="0" bIns="0">
-            <a:spAutoFit/>
-          </a:bodyPr>
-          <a:lstStyle/>
-          <a:p>
-            <a:pPr algn="ctr"/>
-            <a:r>
-              <a:rPr sz="1000" b="1">
-                <a:solidFill>
-                  <a:srgbClr val="E65100"/>
-                </a:solidFill>
-              </a:rPr>
-              <a:t>C3r flush</a:t>
-            </a:r>
-          </a:p>
-        </p:txBody>
-      </p:sp>
-      <p:sp>
-        <p:nvSpPr>
-          <p:cNvPr id="36" name="TextBox 35"/>
-          <p:cNvSpPr txBox="1"/>
-          <p:nvPr/>
-        </p:nvSpPr>
-        <p:spPr>
-          <a:xfrm>
-            <a:off x="6400800" y="5212080"/>
-            <a:ext cx="3200400" cy="457200"/>
-          </a:xfrm>
-          <a:prstGeom prst="rect">
-            <a:avLst/>
-          </a:prstGeom>
-          <a:noFill/>
-        </p:spPr>
-        <p:txBody>
-          <a:bodyPr wrap="none">
-            <a:spAutoFit/>
-          </a:bodyPr>
-          <a:lstStyle/>
-          <a:p>
-            <a:pPr algn="ctr"/>
-            <a:r>
-              <a:rPr sz="1000" b="1">
-                <a:solidFill>
-                  <a:srgbClr val="8C3200"/>
-                </a:solidFill>
-              </a:rPr>
-              <a:t>C4r: scan 7 slots → return (LRC: no revalidation)</a:t>
-            </a:r>
-          </a:p>
-        </p:txBody>
-      </p:sp>
-      <p:sp>
-        <p:nvSpPr>
-          <p:cNvPr id="37" name="Oval 36"/>
-          <p:cNvSpPr/>
-          <p:nvPr/>
-        </p:nvSpPr>
-        <p:spPr>
-          <a:xfrm>
-            <a:off x="7955279" y="3108960"/>
-            <a:ext cx="246888" cy="246888"/>
-          </a:xfrm>
-          <a:prstGeom prst="ellipse">
-            <a:avLst/>
-          </a:prstGeom>
-          <a:solidFill>
-            <a:srgbClr val="FFF49C"/>
-          </a:solidFill>
-          <a:ln w="12700">
-            <a:solidFill>
-              <a:srgbClr val="F9A825"/>
+              <a:srgbClr val="9E9E9E"/>
             </a:solidFill>
           </a:ln>
         </p:spPr>
@@ -6743,27 +6682,71 @@
           </a:fontRef>
         </p:style>
         <p:txBody>
-          <a:bodyPr rtlCol="0" anchor="ctr" lIns="0" rIns="0" tIns="0" bIns="0"/>
+          <a:bodyPr rtlCol="0" anchor="ctr" lIns="101600" rIns="101600" tIns="63500" bIns="63500" wrap="square"/>
           <a:lstStyle/>
           <a:p>
             <a:pPr algn="ctr"/>
             <a:r>
-              <a:rPr sz="800" b="1"/>
-              <a:t>★</a:t>
-            </a:r>
-          </a:p>
-        </p:txBody>
-      </p:sp>
-      <p:sp>
-        <p:nvSpPr>
-          <p:cNvPr id="38" name="Rounded Rectangle 37"/>
+              <a:rPr sz="1100" b="1">
+                <a:solidFill>
+                  <a:srgbClr val="8C3200"/>
+                </a:solidFill>
+              </a:rPr>
+              <a:t>Key features of Protocol C write path:</a:t>
+            </a:r>
+          </a:p>
+          <a:p>
+            <a:r>
+              <a:rPr sz="1000">
+                <a:solidFill>
+                  <a:srgbClr val="333333"/>
+                </a:solidFill>
+              </a:rPr>
+              <a:t>• 1 actor — no senders / receivers / dispatchers</a:t>
+            </a:r>
+          </a:p>
+          <a:p>
+            <a:r>
+              <a:rPr sz="1000">
+                <a:solidFill>
+                  <a:srgbClr val="333333"/>
+                </a:solidFill>
+              </a:rPr>
+              <a:t>• 0 cross-host messages — coordination via shared CXL mutex + epoch</a:t>
+            </a:r>
+          </a:p>
+          <a:p>
+            <a:r>
+              <a:rPr sz="1000">
+                <a:solidFill>
+                  <a:srgbClr val="333333"/>
+                </a:solidFill>
+              </a:rPr>
+              <a:t>• 1 linearization point — write_epoch atomic bump (C5)</a:t>
+            </a:r>
+          </a:p>
+          <a:p>
+            <a:r>
+              <a:rPr sz="1000">
+                <a:solidFill>
+                  <a:srgbClr val="333333"/>
+                </a:solidFill>
+              </a:rPr>
+              <a:t>• Failure mode: hot-bucket LFM contention scales catastrophically with T</a:t>
+            </a:r>
+          </a:p>
+        </p:txBody>
+      </p:sp>
+      <p:sp>
+        <p:nvSpPr>
+          <p:cNvPr id="30" name="Rounded Rectangle 29"/>
           <p:cNvSpPr/>
           <p:nvPr/>
         </p:nvSpPr>
         <p:spPr>
           <a:xfrm>
             <a:off x="274320" y="6355080"/>
-            <a:ext cx="5943600" cy="411480"/>
+            <a:ext cx="7772400" cy="365760"/>
           </a:xfrm>
           <a:prstGeom prst="roundRect">
             <a:avLst/>
@@ -6771,7 +6754,7 @@
           <a:solidFill>
             <a:srgbClr val="FFFFFF"/>
           </a:solidFill>
-          <a:ln w="9525">
+          <a:ln w="7620">
             <a:solidFill>
               <a:srgbClr val="9E9E9E"/>
             </a:solidFill>
@@ -6801,14 +6784,14 @@
       </p:sp>
       <p:sp>
         <p:nvSpPr>
-          <p:cNvPr id="39" name="TextBox 38"/>
+          <p:cNvPr id="31" name="TextBox 30"/>
           <p:cNvSpPr txBox="1"/>
           <p:nvPr/>
         </p:nvSpPr>
         <p:spPr>
           <a:xfrm>
-            <a:off x="365760" y="6400800"/>
-            <a:ext cx="1463040" cy="320040"/>
+            <a:off x="365760" y="6391656"/>
+            <a:ext cx="1828800" cy="292608"/>
           </a:xfrm>
           <a:prstGeom prst="rect">
             <a:avLst/>
@@ -6825,24 +6808,24 @@
             <a:r>
               <a:rPr sz="900" b="1">
                 <a:solidFill>
-                  <a:srgbClr val="154FC2"/>
-                </a:solidFill>
-              </a:rPr>
-              <a:t>─── ▶  Protocol A</a:t>
-            </a:r>
-          </a:p>
-        </p:txBody>
-      </p:sp>
-      <p:sp>
-        <p:nvSpPr>
-          <p:cNvPr id="40" name="TextBox 39"/>
+                  <a:srgbClr val="E65100"/>
+                </a:solidFill>
+              </a:rPr>
+              <a:t>╌╌▶  Step arrow</a:t>
+            </a:r>
+          </a:p>
+        </p:txBody>
+      </p:sp>
+      <p:sp>
+        <p:nvSpPr>
+          <p:cNvPr id="32" name="TextBox 31"/>
           <p:cNvSpPr txBox="1"/>
           <p:nvPr/>
         </p:nvSpPr>
         <p:spPr>
           <a:xfrm>
-            <a:off x="1828800" y="6400800"/>
-            <a:ext cx="1463040" cy="320040"/>
+            <a:off x="2240279" y="6391656"/>
+            <a:ext cx="1828800" cy="292608"/>
           </a:xfrm>
           <a:prstGeom prst="rect">
             <a:avLst/>
@@ -6859,24 +6842,24 @@
             <a:r>
               <a:rPr sz="900" b="1">
                 <a:solidFill>
-                  <a:srgbClr val="E65100"/>
-                </a:solidFill>
-              </a:rPr>
-              <a:t>╌╌╌ ▶  Protocol C</a:t>
-            </a:r>
-          </a:p>
-        </p:txBody>
-      </p:sp>
-      <p:sp>
-        <p:nvSpPr>
-          <p:cNvPr id="41" name="TextBox 40"/>
+                  <a:srgbClr val="F9A825"/>
+                </a:solidFill>
+              </a:rPr>
+              <a:t>● Linearization (C5 epoch)</a:t>
+            </a:r>
+          </a:p>
+        </p:txBody>
+      </p:sp>
+      <p:sp>
+        <p:nvSpPr>
+          <p:cNvPr id="33" name="TextBox 32"/>
           <p:cNvSpPr txBox="1"/>
           <p:nvPr/>
         </p:nvSpPr>
         <p:spPr>
           <a:xfrm>
-            <a:off x="3291840" y="6400800"/>
-            <a:ext cx="1554480" cy="320040"/>
+            <a:off x="4114800" y="6391656"/>
+            <a:ext cx="1828800" cy="292608"/>
           </a:xfrm>
           <a:prstGeom prst="rect">
             <a:avLst/>
@@ -6893,24 +6876,24 @@
             <a:r>
               <a:rPr sz="900" b="1">
                 <a:solidFill>
-                  <a:srgbClr val="F9A825"/>
-                </a:solidFill>
-              </a:rPr>
-              <a:t>● Linearization point</a:t>
-            </a:r>
-          </a:p>
-        </p:txBody>
-      </p:sp>
-      <p:sp>
-        <p:nvSpPr>
-          <p:cNvPr id="42" name="TextBox 41"/>
+                  <a:srgbClr val="C62828"/>
+                </a:solidFill>
+              </a:rPr>
+              <a:t>● Cross-host blocking (C1 LFM)</a:t>
+            </a:r>
+          </a:p>
+        </p:txBody>
+      </p:sp>
+      <p:sp>
+        <p:nvSpPr>
+          <p:cNvPr id="34" name="TextBox 33"/>
           <p:cNvSpPr txBox="1"/>
           <p:nvPr/>
         </p:nvSpPr>
         <p:spPr>
           <a:xfrm>
-            <a:off x="4846320" y="6400800"/>
-            <a:ext cx="1554480" cy="320040"/>
+            <a:off x="5989320" y="6391656"/>
+            <a:ext cx="1828800" cy="292608"/>
           </a:xfrm>
           <a:prstGeom prst="rect">
             <a:avLst/>
@@ -6927,24 +6910,24 @@
             <a:r>
               <a:rPr sz="900" b="1">
                 <a:solidFill>
-                  <a:srgbClr val="C62828"/>
-                </a:solidFill>
-              </a:rPr>
-              <a:t>● Cross-host blocking</a:t>
-            </a:r>
-          </a:p>
-        </p:txBody>
-      </p:sp>
-      <p:sp>
-        <p:nvSpPr>
-          <p:cNvPr id="43" name="TextBox 42"/>
+                  <a:srgbClr val="FFFFFF"/>
+                </a:solidFill>
+              </a:rPr>
+              <a:t>—</a:t>
+            </a:r>
+          </a:p>
+        </p:txBody>
+      </p:sp>
+      <p:sp>
+        <p:nvSpPr>
+          <p:cNvPr id="35" name="TextBox 34"/>
           <p:cNvSpPr txBox="1"/>
           <p:nvPr/>
         </p:nvSpPr>
         <p:spPr>
           <a:xfrm>
-            <a:off x="6400800" y="6355080"/>
-            <a:ext cx="5486400" cy="411480"/>
+            <a:off x="8229600" y="6355080"/>
+            <a:ext cx="3840480" cy="365760"/>
           </a:xfrm>
           <a:prstGeom prst="rect">
             <a:avLst/>
@@ -6952,19 +6935,19 @@
           <a:noFill/>
         </p:spPr>
         <p:txBody>
-          <a:bodyPr wrap="square" tIns="38100">
+          <a:bodyPr wrap="none" tIns="38100">
             <a:spAutoFit/>
           </a:bodyPr>
           <a:lstStyle/>
           <a:p>
             <a:pPr algn="r"/>
             <a:r>
-              <a:rPr sz="1000" b="1">
-                <a:solidFill>
-                  <a:srgbClr val="333333"/>
-                </a:solidFill>
-              </a:rPr>
-              <a:t>A: 16 steps · 2 threads · 1 cross-host block   |   C: 4 steps · 1 thread · 0 cross-host blocks</a:t>
+              <a:rPr sz="1100" b="1">
+                <a:solidFill>
+                  <a:srgbClr val="8C3200"/>
+                </a:solidFill>
+              </a:rPr>
+              <a:t>6 steps · 1 actor · 1 blocking point</a:t>
             </a:r>
           </a:p>
         </p:txBody>
@@ -6995,7 +6978,7 @@
         </p:nvSpPr>
         <p:spPr>
           <a:xfrm>
-            <a:off x="274320" y="137160"/>
+            <a:off x="274320" y="91440"/>
             <a:ext cx="11704320" cy="502920"/>
           </a:xfrm>
           <a:prstGeom prst="rect">
@@ -7010,12 +6993,12 @@
           <a:lstStyle/>
           <a:p>
             <a:r>
-              <a:rPr sz="2400" b="1">
-                <a:solidFill>
-                  <a:srgbClr val="333333"/>
-                </a:solidFill>
-              </a:rPr>
-              <a:t>Write path — measured per-stage latency (T=64 workload-A)</a:t>
+              <a:rPr sz="2200" b="1">
+                <a:solidFill>
+                  <a:srgbClr val="154FC2"/>
+                </a:solidFill>
+              </a:rPr>
+              <a:t>Protocol A — Read path: TLS L1 → KvCachePool L2 → cross-host forwarder-pool-direct</a:t>
             </a:r>
           </a:p>
         </p:txBody>
@@ -7028,8 +7011,8 @@
         </p:nvSpPr>
         <p:spPr>
           <a:xfrm>
-            <a:off x="274320" y="640080"/>
-            <a:ext cx="11704320" cy="320040"/>
+            <a:off x="274320" y="566928"/>
+            <a:ext cx="11704320" cy="292608"/>
           </a:xfrm>
           <a:prstGeom prst="rect">
             <a:avLst/>
@@ -7043,7 +7026,3949 @@
           <a:lstStyle/>
           <a:p>
             <a:r>
-              <a:rPr sz="1200" i="1">
+              <a:rPr sz="1100" i="1">
+                <a:solidFill>
+                  <a:srgbClr val="9E9E9E"/>
+                </a:solidFill>
+              </a:rPr>
+              <a:t>16 numbered steps · 4 actors · 1 cross-host blocking (A8r staging poll, 200 ms cap) · 3 linearization checkpoints (TLS epoch, L2 seqlock seq, C13 lookup_epoch)</a:t>
+            </a:r>
+          </a:p>
+        </p:txBody>
+      </p:sp>
+      <p:sp>
+        <p:nvSpPr>
+          <p:cNvPr id="4" name="Rounded Rectangle 3"/>
+          <p:cNvSpPr/>
+          <p:nvPr/>
+        </p:nvSpPr>
+        <p:spPr>
+          <a:xfrm>
+            <a:off x="137159" y="1188720"/>
+            <a:ext cx="2286000" cy="411480"/>
+          </a:xfrm>
+          <a:prstGeom prst="roundRect">
+            <a:avLst/>
+          </a:prstGeom>
+          <a:solidFill>
+            <a:srgbClr val="E3F2FD"/>
+          </a:solidFill>
+          <a:ln w="15875">
+            <a:solidFill>
+              <a:srgbClr val="1565C0"/>
+            </a:solidFill>
+          </a:ln>
+        </p:spPr>
+        <p:style>
+          <a:lnRef idx="1">
+            <a:schemeClr val="accent1"/>
+          </a:lnRef>
+          <a:fillRef idx="3">
+            <a:schemeClr val="accent1"/>
+          </a:fillRef>
+          <a:effectRef idx="2">
+            <a:schemeClr val="accent1"/>
+          </a:effectRef>
+          <a:fontRef idx="minor">
+            <a:schemeClr val="lt1"/>
+          </a:fontRef>
+        </p:style>
+        <p:txBody>
+          <a:bodyPr rtlCol="0" anchor="ctr" lIns="38100" rIns="38100" tIns="25400" bIns="25400" wrap="square"/>
+          <a:lstStyle/>
+          <a:p>
+            <a:pPr algn="ctr"/>
+            <a:r>
+              <a:rPr sz="1000" b="1">
+                <a:solidFill>
+                  <a:srgbClr val="1565C0"/>
+                </a:solidFill>
+              </a:rPr>
+              <a:t>host 0  worker (caller)</a:t>
+            </a:r>
+          </a:p>
+        </p:txBody>
+      </p:sp>
+      <p:sp>
+        <p:nvSpPr>
+          <p:cNvPr id="5" name="Rounded Rectangle 4"/>
+          <p:cNvSpPr/>
+          <p:nvPr/>
+        </p:nvSpPr>
+        <p:spPr>
+          <a:xfrm>
+            <a:off x="2560320" y="1188720"/>
+            <a:ext cx="2286000" cy="411480"/>
+          </a:xfrm>
+          <a:prstGeom prst="roundRect">
+            <a:avLst/>
+          </a:prstGeom>
+          <a:solidFill>
+            <a:srgbClr val="E3F2FD"/>
+          </a:solidFill>
+          <a:ln w="15875">
+            <a:solidFill>
+              <a:srgbClr val="1565C0"/>
+            </a:solidFill>
+          </a:ln>
+        </p:spPr>
+        <p:style>
+          <a:lnRef idx="1">
+            <a:schemeClr val="accent1"/>
+          </a:lnRef>
+          <a:fillRef idx="3">
+            <a:schemeClr val="accent1"/>
+          </a:fillRef>
+          <a:effectRef idx="2">
+            <a:schemeClr val="accent1"/>
+          </a:effectRef>
+          <a:fontRef idx="minor">
+            <a:schemeClr val="lt1"/>
+          </a:fontRef>
+        </p:style>
+        <p:txBody>
+          <a:bodyPr rtlCol="0" anchor="ctr" lIns="38100" rIns="38100" tIns="25400" bIns="25400" wrap="square"/>
+          <a:lstStyle/>
+          <a:p>
+            <a:pPr algn="ctr"/>
+            <a:r>
+              <a:rPr sz="1000" b="1">
+                <a:solidFill>
+                  <a:srgbClr val="1565C0"/>
+                </a:solidFill>
+              </a:rPr>
+              <a:t>TLS L1
+(per-worker private DRAM)</a:t>
+            </a:r>
+          </a:p>
+        </p:txBody>
+      </p:sp>
+      <p:sp>
+        <p:nvSpPr>
+          <p:cNvPr id="6" name="Rounded Rectangle 5"/>
+          <p:cNvSpPr/>
+          <p:nvPr/>
+        </p:nvSpPr>
+        <p:spPr>
+          <a:xfrm>
+            <a:off x="4983480" y="1188720"/>
+            <a:ext cx="2286000" cy="411480"/>
+          </a:xfrm>
+          <a:prstGeom prst="roundRect">
+            <a:avLst/>
+          </a:prstGeom>
+          <a:solidFill>
+            <a:srgbClr val="E3F2FD"/>
+          </a:solidFill>
+          <a:ln w="15875">
+            <a:solidFill>
+              <a:srgbClr val="1565C0"/>
+            </a:solidFill>
+          </a:ln>
+        </p:spPr>
+        <p:style>
+          <a:lnRef idx="1">
+            <a:schemeClr val="accent1"/>
+          </a:lnRef>
+          <a:fillRef idx="3">
+            <a:schemeClr val="accent1"/>
+          </a:fillRef>
+          <a:effectRef idx="2">
+            <a:schemeClr val="accent1"/>
+          </a:effectRef>
+          <a:fontRef idx="minor">
+            <a:schemeClr val="lt1"/>
+          </a:fontRef>
+        </p:style>
+        <p:txBody>
+          <a:bodyPr rtlCol="0" anchor="ctr" lIns="38100" rIns="38100" tIns="25400" bIns="25400" wrap="square"/>
+          <a:lstStyle/>
+          <a:p>
+            <a:pPr algn="ctr"/>
+            <a:r>
+              <a:rPr sz="1000" b="1">
+                <a:solidFill>
+                  <a:srgbClr val="1565C0"/>
+                </a:solidFill>
+              </a:rPr>
+              <a:t>L2 KvCachePool
+(host-shared DRAM, seqlock)</a:t>
+            </a:r>
+          </a:p>
+        </p:txBody>
+      </p:sp>
+      <p:sp>
+        <p:nvSpPr>
+          <p:cNvPr id="7" name="Rounded Rectangle 6"/>
+          <p:cNvSpPr/>
+          <p:nvPr/>
+        </p:nvSpPr>
+        <p:spPr>
+          <a:xfrm>
+            <a:off x="7863840" y="1188720"/>
+            <a:ext cx="2286000" cy="411480"/>
+          </a:xfrm>
+          <a:prstGeom prst="roundRect">
+            <a:avLst/>
+          </a:prstGeom>
+          <a:solidFill>
+            <a:srgbClr val="C8DAFB"/>
+          </a:solidFill>
+          <a:ln w="15875">
+            <a:solidFill>
+              <a:srgbClr val="154FC2"/>
+            </a:solidFill>
+          </a:ln>
+        </p:spPr>
+        <p:style>
+          <a:lnRef idx="1">
+            <a:schemeClr val="accent1"/>
+          </a:lnRef>
+          <a:fillRef idx="3">
+            <a:schemeClr val="accent1"/>
+          </a:fillRef>
+          <a:effectRef idx="2">
+            <a:schemeClr val="accent1"/>
+          </a:effectRef>
+          <a:fontRef idx="minor">
+            <a:schemeClr val="lt1"/>
+          </a:fontRef>
+        </p:style>
+        <p:txBody>
+          <a:bodyPr rtlCol="0" anchor="ctr" lIns="38100" rIns="38100" tIns="25400" bIns="25400" wrap="square"/>
+          <a:lstStyle/>
+          <a:p>
+            <a:pPr algn="ctr"/>
+            <a:r>
+              <a:rPr sz="1000" b="1">
+                <a:solidFill>
+                  <a:srgbClr val="154FC2"/>
+                </a:solidFill>
+              </a:rPr>
+              <a:t>host 1  ReadReceiver (cpu 67)</a:t>
+            </a:r>
+          </a:p>
+        </p:txBody>
+      </p:sp>
+      <p:sp>
+        <p:nvSpPr>
+          <p:cNvPr id="8" name="Rounded Rectangle 7"/>
+          <p:cNvSpPr/>
+          <p:nvPr/>
+        </p:nvSpPr>
+        <p:spPr>
+          <a:xfrm>
+            <a:off x="10424160" y="1188720"/>
+            <a:ext cx="1645920" cy="411480"/>
+          </a:xfrm>
+          <a:prstGeom prst="roundRect">
+            <a:avLst/>
+          </a:prstGeom>
+          <a:solidFill>
+            <a:srgbClr val="FFF3E0"/>
+          </a:solidFill>
+          <a:ln w="15875">
+            <a:solidFill>
+              <a:srgbClr val="E65100"/>
+            </a:solidFill>
+          </a:ln>
+        </p:spPr>
+        <p:style>
+          <a:lnRef idx="1">
+            <a:schemeClr val="accent1"/>
+          </a:lnRef>
+          <a:fillRef idx="3">
+            <a:schemeClr val="accent1"/>
+          </a:fillRef>
+          <a:effectRef idx="2">
+            <a:schemeClr val="accent1"/>
+          </a:effectRef>
+          <a:fontRef idx="minor">
+            <a:schemeClr val="lt1"/>
+          </a:fontRef>
+        </p:style>
+        <p:txBody>
+          <a:bodyPr rtlCol="0" anchor="ctr" lIns="38100" rIns="38100" tIns="25400" bIns="25400" wrap="square"/>
+          <a:lstStyle/>
+          <a:p>
+            <a:pPr algn="ctr"/>
+            <a:r>
+              <a:rPr sz="900" b="1">
+                <a:solidFill>
+                  <a:srgbClr val="8C3200"/>
+                </a:solidFill>
+              </a:rPr>
+              <a:t>ReadStaging[0][1] (CXL)</a:t>
+            </a:r>
+          </a:p>
+        </p:txBody>
+      </p:sp>
+      <p:cxnSp>
+        <p:nvCxnSpPr>
+          <p:cNvPr id="9" name="Connector 8"/>
+          <p:cNvCxnSpPr/>
+          <p:nvPr/>
+        </p:nvCxnSpPr>
+        <p:spPr>
+          <a:xfrm>
+            <a:off x="1280160" y="1600200"/>
+            <a:ext cx="0" cy="4389120"/>
+          </a:xfrm>
+          <a:prstGeom prst="line">
+            <a:avLst/>
+          </a:prstGeom>
+          <a:ln w="7620">
+            <a:solidFill>
+              <a:srgbClr val="9E9E9E"/>
+            </a:solidFill>
+            <a:prstDash val="dash"/>
+          </a:ln>
+        </p:spPr>
+        <p:style>
+          <a:lnRef idx="2">
+            <a:schemeClr val="accent1"/>
+          </a:lnRef>
+          <a:fillRef idx="0">
+            <a:schemeClr val="accent1"/>
+          </a:fillRef>
+          <a:effectRef idx="1">
+            <a:schemeClr val="accent1"/>
+          </a:effectRef>
+          <a:fontRef idx="minor">
+            <a:schemeClr val="tx1"/>
+          </a:fontRef>
+        </p:style>
+      </p:cxnSp>
+      <p:cxnSp>
+        <p:nvCxnSpPr>
+          <p:cNvPr id="10" name="Connector 9"/>
+          <p:cNvCxnSpPr/>
+          <p:nvPr/>
+        </p:nvCxnSpPr>
+        <p:spPr>
+          <a:xfrm>
+            <a:off x="3703320" y="1600200"/>
+            <a:ext cx="0" cy="4389120"/>
+          </a:xfrm>
+          <a:prstGeom prst="line">
+            <a:avLst/>
+          </a:prstGeom>
+          <a:ln w="7620">
+            <a:solidFill>
+              <a:srgbClr val="9E9E9E"/>
+            </a:solidFill>
+            <a:prstDash val="dash"/>
+          </a:ln>
+        </p:spPr>
+        <p:style>
+          <a:lnRef idx="2">
+            <a:schemeClr val="accent1"/>
+          </a:lnRef>
+          <a:fillRef idx="0">
+            <a:schemeClr val="accent1"/>
+          </a:fillRef>
+          <a:effectRef idx="1">
+            <a:schemeClr val="accent1"/>
+          </a:effectRef>
+          <a:fontRef idx="minor">
+            <a:schemeClr val="tx1"/>
+          </a:fontRef>
+        </p:style>
+      </p:cxnSp>
+      <p:cxnSp>
+        <p:nvCxnSpPr>
+          <p:cNvPr id="11" name="Connector 10"/>
+          <p:cNvCxnSpPr/>
+          <p:nvPr/>
+        </p:nvCxnSpPr>
+        <p:spPr>
+          <a:xfrm>
+            <a:off x="6126480" y="1600200"/>
+            <a:ext cx="0" cy="4389120"/>
+          </a:xfrm>
+          <a:prstGeom prst="line">
+            <a:avLst/>
+          </a:prstGeom>
+          <a:ln w="7620">
+            <a:solidFill>
+              <a:srgbClr val="9E9E9E"/>
+            </a:solidFill>
+            <a:prstDash val="dash"/>
+          </a:ln>
+        </p:spPr>
+        <p:style>
+          <a:lnRef idx="2">
+            <a:schemeClr val="accent1"/>
+          </a:lnRef>
+          <a:fillRef idx="0">
+            <a:schemeClr val="accent1"/>
+          </a:fillRef>
+          <a:effectRef idx="1">
+            <a:schemeClr val="accent1"/>
+          </a:effectRef>
+          <a:fontRef idx="minor">
+            <a:schemeClr val="tx1"/>
+          </a:fontRef>
+        </p:style>
+      </p:cxnSp>
+      <p:cxnSp>
+        <p:nvCxnSpPr>
+          <p:cNvPr id="12" name="Connector 11"/>
+          <p:cNvCxnSpPr/>
+          <p:nvPr/>
+        </p:nvCxnSpPr>
+        <p:spPr>
+          <a:xfrm>
+            <a:off x="9006840" y="1600200"/>
+            <a:ext cx="0" cy="4389120"/>
+          </a:xfrm>
+          <a:prstGeom prst="line">
+            <a:avLst/>
+          </a:prstGeom>
+          <a:ln w="7620">
+            <a:solidFill>
+              <a:srgbClr val="9E9E9E"/>
+            </a:solidFill>
+            <a:prstDash val="dash"/>
+          </a:ln>
+        </p:spPr>
+        <p:style>
+          <a:lnRef idx="2">
+            <a:schemeClr val="accent1"/>
+          </a:lnRef>
+          <a:fillRef idx="0">
+            <a:schemeClr val="accent1"/>
+          </a:fillRef>
+          <a:effectRef idx="1">
+            <a:schemeClr val="accent1"/>
+          </a:effectRef>
+          <a:fontRef idx="minor">
+            <a:schemeClr val="tx1"/>
+          </a:fontRef>
+        </p:style>
+      </p:cxnSp>
+      <p:cxnSp>
+        <p:nvCxnSpPr>
+          <p:cNvPr id="13" name="Connector 12"/>
+          <p:cNvCxnSpPr/>
+          <p:nvPr/>
+        </p:nvCxnSpPr>
+        <p:spPr>
+          <a:xfrm>
+            <a:off x="11247120" y="1600200"/>
+            <a:ext cx="0" cy="4389120"/>
+          </a:xfrm>
+          <a:prstGeom prst="line">
+            <a:avLst/>
+          </a:prstGeom>
+          <a:ln w="7620">
+            <a:solidFill>
+              <a:srgbClr val="9E9E9E"/>
+            </a:solidFill>
+            <a:prstDash val="dash"/>
+          </a:ln>
+        </p:spPr>
+        <p:style>
+          <a:lnRef idx="2">
+            <a:schemeClr val="accent1"/>
+          </a:lnRef>
+          <a:fillRef idx="0">
+            <a:schemeClr val="accent1"/>
+          </a:fillRef>
+          <a:effectRef idx="1">
+            <a:schemeClr val="accent1"/>
+          </a:effectRef>
+          <a:fontRef idx="minor">
+            <a:schemeClr val="tx1"/>
+          </a:fontRef>
+        </p:style>
+      </p:cxnSp>
+      <p:sp>
+        <p:nvSpPr>
+          <p:cNvPr id="14" name="Oval 13"/>
+          <p:cNvSpPr/>
+          <p:nvPr/>
+        </p:nvSpPr>
+        <p:spPr>
+          <a:xfrm>
+            <a:off x="1133856" y="1636776"/>
+            <a:ext cx="292608" cy="292608"/>
+          </a:xfrm>
+          <a:prstGeom prst="ellipse">
+            <a:avLst/>
+          </a:prstGeom>
+          <a:solidFill>
+            <a:srgbClr val="FFFFFF"/>
+          </a:solidFill>
+          <a:ln w="19050">
+            <a:solidFill>
+              <a:srgbClr val="154FC2"/>
+            </a:solidFill>
+          </a:ln>
+        </p:spPr>
+        <p:style>
+          <a:lnRef idx="1">
+            <a:schemeClr val="accent1"/>
+          </a:lnRef>
+          <a:fillRef idx="3">
+            <a:schemeClr val="accent1"/>
+          </a:fillRef>
+          <a:effectRef idx="2">
+            <a:schemeClr val="accent1"/>
+          </a:effectRef>
+          <a:fontRef idx="minor">
+            <a:schemeClr val="lt1"/>
+          </a:fontRef>
+        </p:style>
+        <p:txBody>
+          <a:bodyPr rtlCol="0" anchor="ctr" lIns="0" rIns="0" tIns="0" bIns="0"/>
+          <a:lstStyle/>
+          <a:p>
+            <a:pPr algn="ctr"/>
+            <a:r>
+              <a:rPr sz="800" b="1">
+                <a:solidFill>
+                  <a:srgbClr val="154FC2"/>
+                </a:solidFill>
+              </a:rPr>
+              <a:t>A1r</a:t>
+            </a:r>
+          </a:p>
+        </p:txBody>
+      </p:sp>
+      <p:sp>
+        <p:nvSpPr>
+          <p:cNvPr id="15" name="TextBox 14"/>
+          <p:cNvSpPr txBox="1"/>
+          <p:nvPr/>
+        </p:nvSpPr>
+        <p:spPr>
+          <a:xfrm>
+            <a:off x="1463039" y="1691639"/>
+            <a:ext cx="2743200" cy="219456"/>
+          </a:xfrm>
+          <a:prstGeom prst="rect">
+            <a:avLst/>
+          </a:prstGeom>
+          <a:solidFill>
+            <a:srgbClr val="FFFFFF"/>
+          </a:solidFill>
+          <a:ln>
+            <a:noFill/>
+          </a:ln>
+        </p:spPr>
+        <p:txBody>
+          <a:bodyPr wrap="none" lIns="25400" rIns="25400" tIns="0" bIns="0">
+            <a:spAutoFit/>
+          </a:bodyPr>
+          <a:lstStyle/>
+          <a:p>
+            <a:pPr algn="l"/>
+            <a:r>
+              <a:rPr sz="850" b="1" i="0">
+                <a:solidFill>
+                  <a:srgbClr val="154FC2"/>
+                </a:solidFill>
+              </a:rPr>
+              <a:t>enter search(K)</a:t>
+            </a:r>
+          </a:p>
+        </p:txBody>
+      </p:sp>
+      <p:cxnSp>
+        <p:nvCxnSpPr>
+          <p:cNvPr id="16" name="Connector 15"/>
+          <p:cNvCxnSpPr/>
+          <p:nvPr/>
+        </p:nvCxnSpPr>
+        <p:spPr>
+          <a:xfrm>
+            <a:off x="1280160" y="2039112"/>
+            <a:ext cx="2423160" cy="0"/>
+          </a:xfrm>
+          <a:prstGeom prst="line">
+            <a:avLst/>
+          </a:prstGeom>
+          <a:ln w="20320">
+            <a:solidFill>
+              <a:srgbClr val="154FC2"/>
+            </a:solidFill>
+            <a:tailEnd type="triangle" w="med" h="med"/>
+          </a:ln>
+        </p:spPr>
+        <p:style>
+          <a:lnRef idx="2">
+            <a:schemeClr val="accent1"/>
+          </a:lnRef>
+          <a:fillRef idx="0">
+            <a:schemeClr val="accent1"/>
+          </a:fillRef>
+          <a:effectRef idx="1">
+            <a:schemeClr val="accent1"/>
+          </a:effectRef>
+          <a:fontRef idx="minor">
+            <a:schemeClr val="tx1"/>
+          </a:fontRef>
+        </p:style>
+      </p:cxnSp>
+      <p:sp>
+        <p:nvSpPr>
+          <p:cNvPr id="17" name="Oval 16"/>
+          <p:cNvSpPr/>
+          <p:nvPr/>
+        </p:nvSpPr>
+        <p:spPr>
+          <a:xfrm>
+            <a:off x="2345435" y="1892807"/>
+            <a:ext cx="292608" cy="292608"/>
+          </a:xfrm>
+          <a:prstGeom prst="ellipse">
+            <a:avLst/>
+          </a:prstGeom>
+          <a:solidFill>
+            <a:srgbClr val="FFF49C"/>
+          </a:solidFill>
+          <a:ln w="19050">
+            <a:solidFill>
+              <a:srgbClr val="F9A825"/>
+            </a:solidFill>
+          </a:ln>
+        </p:spPr>
+        <p:style>
+          <a:lnRef idx="1">
+            <a:schemeClr val="accent1"/>
+          </a:lnRef>
+          <a:fillRef idx="3">
+            <a:schemeClr val="accent1"/>
+          </a:fillRef>
+          <a:effectRef idx="2">
+            <a:schemeClr val="accent1"/>
+          </a:effectRef>
+          <a:fontRef idx="minor">
+            <a:schemeClr val="lt1"/>
+          </a:fontRef>
+        </p:style>
+        <p:txBody>
+          <a:bodyPr rtlCol="0" anchor="ctr" lIns="0" rIns="0" tIns="0" bIns="0"/>
+          <a:lstStyle/>
+          <a:p>
+            <a:pPr algn="ctr"/>
+            <a:r>
+              <a:rPr sz="800" b="1">
+                <a:solidFill>
+                  <a:srgbClr val="333333"/>
+                </a:solidFill>
+              </a:rPr>
+              <a:t>A2r</a:t>
+            </a:r>
+          </a:p>
+        </p:txBody>
+      </p:sp>
+      <p:sp>
+        <p:nvSpPr>
+          <p:cNvPr id="18" name="TextBox 17"/>
+          <p:cNvSpPr txBox="1"/>
+          <p:nvPr/>
+        </p:nvSpPr>
+        <p:spPr>
+          <a:xfrm>
+            <a:off x="1028699" y="1783080"/>
+            <a:ext cx="2926080" cy="219456"/>
+          </a:xfrm>
+          <a:prstGeom prst="rect">
+            <a:avLst/>
+          </a:prstGeom>
+          <a:solidFill>
+            <a:srgbClr val="FFFFFF"/>
+          </a:solidFill>
+          <a:ln>
+            <a:noFill/>
+          </a:ln>
+        </p:spPr>
+        <p:txBody>
+          <a:bodyPr wrap="none" lIns="25400" rIns="25400" tIns="0" bIns="0">
+            <a:spAutoFit/>
+          </a:bodyPr>
+          <a:lstStyle/>
+          <a:p>
+            <a:pPr algn="l"/>
+            <a:r>
+              <a:rPr sz="850" b="1" i="0">
+                <a:solidFill>
+                  <a:srgbClr val="154FC2"/>
+                </a:solidFill>
+              </a:rPr>
+              <a:t>tls_lookup: read bucket_epoch (1 LD); compare observed_epoch</a:t>
+            </a:r>
+          </a:p>
+        </p:txBody>
+      </p:sp>
+      <p:sp>
+        <p:nvSpPr>
+          <p:cNvPr id="19" name="Oval 18"/>
+          <p:cNvSpPr/>
+          <p:nvPr/>
+        </p:nvSpPr>
+        <p:spPr>
+          <a:xfrm>
+            <a:off x="1133856" y="2148839"/>
+            <a:ext cx="292608" cy="292608"/>
+          </a:xfrm>
+          <a:prstGeom prst="ellipse">
+            <a:avLst/>
+          </a:prstGeom>
+          <a:solidFill>
+            <a:srgbClr val="FFF49C"/>
+          </a:solidFill>
+          <a:ln w="19050">
+            <a:solidFill>
+              <a:srgbClr val="F9A825"/>
+            </a:solidFill>
+          </a:ln>
+        </p:spPr>
+        <p:style>
+          <a:lnRef idx="1">
+            <a:schemeClr val="accent1"/>
+          </a:lnRef>
+          <a:fillRef idx="3">
+            <a:schemeClr val="accent1"/>
+          </a:fillRef>
+          <a:effectRef idx="2">
+            <a:schemeClr val="accent1"/>
+          </a:effectRef>
+          <a:fontRef idx="minor">
+            <a:schemeClr val="lt1"/>
+          </a:fontRef>
+        </p:style>
+        <p:txBody>
+          <a:bodyPr rtlCol="0" anchor="ctr" lIns="0" rIns="0" tIns="0" bIns="0"/>
+          <a:lstStyle/>
+          <a:p>
+            <a:pPr algn="ctr"/>
+            <a:r>
+              <a:rPr sz="800" b="1">
+                <a:solidFill>
+                  <a:srgbClr val="333333"/>
+                </a:solidFill>
+              </a:rPr>
+              <a:t>R0</a:t>
+            </a:r>
+          </a:p>
+        </p:txBody>
+      </p:sp>
+      <p:sp>
+        <p:nvSpPr>
+          <p:cNvPr id="20" name="TextBox 19"/>
+          <p:cNvSpPr txBox="1"/>
+          <p:nvPr/>
+        </p:nvSpPr>
+        <p:spPr>
+          <a:xfrm>
+            <a:off x="1463039" y="2203703"/>
+            <a:ext cx="2743200" cy="219456"/>
+          </a:xfrm>
+          <a:prstGeom prst="rect">
+            <a:avLst/>
+          </a:prstGeom>
+          <a:solidFill>
+            <a:srgbClr val="FFFFFF"/>
+          </a:solidFill>
+          <a:ln>
+            <a:noFill/>
+          </a:ln>
+        </p:spPr>
+        <p:txBody>
+          <a:bodyPr wrap="none" lIns="25400" rIns="25400" tIns="0" bIns="0">
+            <a:spAutoFit/>
+          </a:bodyPr>
+          <a:lstStyle/>
+          <a:p>
+            <a:pPr algn="l"/>
+            <a:r>
+              <a:rPr sz="850" b="1" i="0">
+                <a:solidFill>
+                  <a:srgbClr val="154FC2"/>
+                </a:solidFill>
+              </a:rPr>
+              <a:t>★ on hit: ~80 ns total, return value to caller ★</a:t>
+            </a:r>
+          </a:p>
+        </p:txBody>
+      </p:sp>
+      <p:cxnSp>
+        <p:nvCxnSpPr>
+          <p:cNvPr id="21" name="Connector 20"/>
+          <p:cNvCxnSpPr/>
+          <p:nvPr/>
+        </p:nvCxnSpPr>
+        <p:spPr>
+          <a:xfrm>
+            <a:off x="1280160" y="2551176"/>
+            <a:ext cx="4846320" cy="0"/>
+          </a:xfrm>
+          <a:prstGeom prst="line">
+            <a:avLst/>
+          </a:prstGeom>
+          <a:ln w="20320">
+            <a:solidFill>
+              <a:srgbClr val="154FC2"/>
+            </a:solidFill>
+            <a:tailEnd type="triangle" w="med" h="med"/>
+          </a:ln>
+        </p:spPr>
+        <p:style>
+          <a:lnRef idx="2">
+            <a:schemeClr val="accent1"/>
+          </a:lnRef>
+          <a:fillRef idx="0">
+            <a:schemeClr val="accent1"/>
+          </a:fillRef>
+          <a:effectRef idx="1">
+            <a:schemeClr val="accent1"/>
+          </a:effectRef>
+          <a:fontRef idx="minor">
+            <a:schemeClr val="tx1"/>
+          </a:fontRef>
+        </p:style>
+      </p:cxnSp>
+      <p:sp>
+        <p:nvSpPr>
+          <p:cNvPr id="22" name="Oval 21"/>
+          <p:cNvSpPr/>
+          <p:nvPr/>
+        </p:nvSpPr>
+        <p:spPr>
+          <a:xfrm>
+            <a:off x="3557015" y="2404872"/>
+            <a:ext cx="292608" cy="292608"/>
+          </a:xfrm>
+          <a:prstGeom prst="ellipse">
+            <a:avLst/>
+          </a:prstGeom>
+          <a:solidFill>
+            <a:srgbClr val="FFF49C"/>
+          </a:solidFill>
+          <a:ln w="19050">
+            <a:solidFill>
+              <a:srgbClr val="F9A825"/>
+            </a:solidFill>
+          </a:ln>
+        </p:spPr>
+        <p:style>
+          <a:lnRef idx="1">
+            <a:schemeClr val="accent1"/>
+          </a:lnRef>
+          <a:fillRef idx="3">
+            <a:schemeClr val="accent1"/>
+          </a:fillRef>
+          <a:effectRef idx="2">
+            <a:schemeClr val="accent1"/>
+          </a:effectRef>
+          <a:fontRef idx="minor">
+            <a:schemeClr val="lt1"/>
+          </a:fontRef>
+        </p:style>
+        <p:txBody>
+          <a:bodyPr rtlCol="0" anchor="ctr" lIns="0" rIns="0" tIns="0" bIns="0"/>
+          <a:lstStyle/>
+          <a:p>
+            <a:pPr algn="ctr"/>
+            <a:r>
+              <a:rPr sz="800" b="1">
+                <a:solidFill>
+                  <a:srgbClr val="333333"/>
+                </a:solidFill>
+              </a:rPr>
+              <a:t>A3r</a:t>
+            </a:r>
+          </a:p>
+        </p:txBody>
+      </p:sp>
+      <p:sp>
+        <p:nvSpPr>
+          <p:cNvPr id="23" name="TextBox 22"/>
+          <p:cNvSpPr txBox="1"/>
+          <p:nvPr/>
+        </p:nvSpPr>
+        <p:spPr>
+          <a:xfrm>
+            <a:off x="2240279" y="2295144"/>
+            <a:ext cx="2926080" cy="219456"/>
+          </a:xfrm>
+          <a:prstGeom prst="rect">
+            <a:avLst/>
+          </a:prstGeom>
+          <a:solidFill>
+            <a:srgbClr val="FFFFFF"/>
+          </a:solidFill>
+          <a:ln>
+            <a:noFill/>
+          </a:ln>
+        </p:spPr>
+        <p:txBody>
+          <a:bodyPr wrap="none" lIns="25400" rIns="25400" tIns="0" bIns="0">
+            <a:spAutoFit/>
+          </a:bodyPr>
+          <a:lstStyle/>
+          <a:p>
+            <a:pPr algn="l"/>
+            <a:r>
+              <a:rPr sz="850" b="1" i="0">
+                <a:solidFill>
+                  <a:srgbClr val="154FC2"/>
+                </a:solidFill>
+              </a:rPr>
+              <a:t>else cache_pool_lookup: seqlock CAS read of L2 entry</a:t>
+            </a:r>
+          </a:p>
+        </p:txBody>
+      </p:sp>
+      <p:sp>
+        <p:nvSpPr>
+          <p:cNvPr id="24" name="Oval 23"/>
+          <p:cNvSpPr/>
+          <p:nvPr/>
+        </p:nvSpPr>
+        <p:spPr>
+          <a:xfrm>
+            <a:off x="1133856" y="2660904"/>
+            <a:ext cx="292608" cy="292608"/>
+          </a:xfrm>
+          <a:prstGeom prst="ellipse">
+            <a:avLst/>
+          </a:prstGeom>
+          <a:solidFill>
+            <a:srgbClr val="FFFFFF"/>
+          </a:solidFill>
+          <a:ln w="19050">
+            <a:solidFill>
+              <a:srgbClr val="154FC2"/>
+            </a:solidFill>
+          </a:ln>
+        </p:spPr>
+        <p:style>
+          <a:lnRef idx="1">
+            <a:schemeClr val="accent1"/>
+          </a:lnRef>
+          <a:fillRef idx="3">
+            <a:schemeClr val="accent1"/>
+          </a:fillRef>
+          <a:effectRef idx="2">
+            <a:schemeClr val="accent1"/>
+          </a:effectRef>
+          <a:fontRef idx="minor">
+            <a:schemeClr val="lt1"/>
+          </a:fontRef>
+        </p:style>
+        <p:txBody>
+          <a:bodyPr rtlCol="0" anchor="ctr" lIns="0" rIns="0" tIns="0" bIns="0"/>
+          <a:lstStyle/>
+          <a:p>
+            <a:pPr algn="ctr"/>
+            <a:r>
+              <a:rPr sz="800" b="1">
+                <a:solidFill>
+                  <a:srgbClr val="154FC2"/>
+                </a:solidFill>
+              </a:rPr>
+              <a:t>R2h</a:t>
+            </a:r>
+          </a:p>
+        </p:txBody>
+      </p:sp>
+      <p:sp>
+        <p:nvSpPr>
+          <p:cNvPr id="25" name="TextBox 24"/>
+          <p:cNvSpPr txBox="1"/>
+          <p:nvPr/>
+        </p:nvSpPr>
+        <p:spPr>
+          <a:xfrm>
+            <a:off x="1463039" y="2715768"/>
+            <a:ext cx="2743200" cy="219456"/>
+          </a:xfrm>
+          <a:prstGeom prst="rect">
+            <a:avLst/>
+          </a:prstGeom>
+          <a:solidFill>
+            <a:srgbClr val="FFFFFF"/>
+          </a:solidFill>
+          <a:ln>
+            <a:noFill/>
+          </a:ln>
+        </p:spPr>
+        <p:txBody>
+          <a:bodyPr wrap="none" lIns="25400" rIns="25400" tIns="0" bIns="0">
+            <a:spAutoFit/>
+          </a:bodyPr>
+          <a:lstStyle/>
+          <a:p>
+            <a:pPr algn="l"/>
+            <a:r>
+              <a:rPr sz="850" b="1" i="0">
+                <a:solidFill>
+                  <a:srgbClr val="154FC2"/>
+                </a:solidFill>
+              </a:rPr>
+              <a:t>★ on L2 hit: ~5-7 µs total (KV memcpy under MESI), return ★</a:t>
+            </a:r>
+          </a:p>
+        </p:txBody>
+      </p:sp>
+      <p:cxnSp>
+        <p:nvCxnSpPr>
+          <p:cNvPr id="26" name="Connector 25"/>
+          <p:cNvCxnSpPr/>
+          <p:nvPr/>
+        </p:nvCxnSpPr>
+        <p:spPr>
+          <a:xfrm>
+            <a:off x="1280160" y="3063240"/>
+            <a:ext cx="4846320" cy="0"/>
+          </a:xfrm>
+          <a:prstGeom prst="line">
+            <a:avLst/>
+          </a:prstGeom>
+          <a:ln w="20320">
+            <a:solidFill>
+              <a:srgbClr val="154FC2"/>
+            </a:solidFill>
+            <a:tailEnd type="triangle" w="med" h="med"/>
+          </a:ln>
+        </p:spPr>
+        <p:style>
+          <a:lnRef idx="2">
+            <a:schemeClr val="accent1"/>
+          </a:lnRef>
+          <a:fillRef idx="0">
+            <a:schemeClr val="accent1"/>
+          </a:fillRef>
+          <a:effectRef idx="1">
+            <a:schemeClr val="accent1"/>
+          </a:effectRef>
+          <a:fontRef idx="minor">
+            <a:schemeClr val="tx1"/>
+          </a:fontRef>
+        </p:style>
+      </p:cxnSp>
+      <p:sp>
+        <p:nvSpPr>
+          <p:cNvPr id="27" name="Oval 26"/>
+          <p:cNvSpPr/>
+          <p:nvPr/>
+        </p:nvSpPr>
+        <p:spPr>
+          <a:xfrm>
+            <a:off x="3557015" y="2916936"/>
+            <a:ext cx="292608" cy="292608"/>
+          </a:xfrm>
+          <a:prstGeom prst="ellipse">
+            <a:avLst/>
+          </a:prstGeom>
+          <a:solidFill>
+            <a:srgbClr val="FFFFFF"/>
+          </a:solidFill>
+          <a:ln w="19050">
+            <a:solidFill>
+              <a:srgbClr val="154FC2"/>
+            </a:solidFill>
+          </a:ln>
+        </p:spPr>
+        <p:style>
+          <a:lnRef idx="1">
+            <a:schemeClr val="accent1"/>
+          </a:lnRef>
+          <a:fillRef idx="3">
+            <a:schemeClr val="accent1"/>
+          </a:fillRef>
+          <a:effectRef idx="2">
+            <a:schemeClr val="accent1"/>
+          </a:effectRef>
+          <a:fontRef idx="minor">
+            <a:schemeClr val="lt1"/>
+          </a:fontRef>
+        </p:style>
+        <p:txBody>
+          <a:bodyPr rtlCol="0" anchor="ctr" lIns="0" rIns="0" tIns="0" bIns="0"/>
+          <a:lstStyle/>
+          <a:p>
+            <a:pPr algn="ctr"/>
+            <a:r>
+              <a:rPr sz="800" b="1">
+                <a:solidFill>
+                  <a:srgbClr val="154FC2"/>
+                </a:solidFill>
+              </a:rPr>
+              <a:t>A4r</a:t>
+            </a:r>
+          </a:p>
+        </p:txBody>
+      </p:sp>
+      <p:sp>
+        <p:nvSpPr>
+          <p:cNvPr id="28" name="TextBox 27"/>
+          <p:cNvSpPr txBox="1"/>
+          <p:nvPr/>
+        </p:nvSpPr>
+        <p:spPr>
+          <a:xfrm>
+            <a:off x="2240279" y="3154680"/>
+            <a:ext cx="2926080" cy="219456"/>
+          </a:xfrm>
+          <a:prstGeom prst="rect">
+            <a:avLst/>
+          </a:prstGeom>
+          <a:solidFill>
+            <a:srgbClr val="FFFFFF"/>
+          </a:solidFill>
+          <a:ln>
+            <a:noFill/>
+          </a:ln>
+        </p:spPr>
+        <p:txBody>
+          <a:bodyPr wrap="none" lIns="25400" rIns="25400" tIns="0" bIns="0">
+            <a:spAutoFit/>
+          </a:bodyPr>
+          <a:lstStyle/>
+          <a:p>
+            <a:pPr algn="l"/>
+            <a:r>
+              <a:rPr sz="850" b="1" i="0">
+                <a:solidFill>
+                  <a:srgbClr val="154FC2"/>
+                </a:solidFill>
+              </a:rPr>
+              <a:t>on L2 miss: re-load bucket_epoch  ← my_epoch_at_send (C13 tag)</a:t>
+            </a:r>
+          </a:p>
+        </p:txBody>
+      </p:sp>
+      <p:cxnSp>
+        <p:nvCxnSpPr>
+          <p:cNvPr id="29" name="Connector 28"/>
+          <p:cNvCxnSpPr/>
+          <p:nvPr/>
+        </p:nvCxnSpPr>
+        <p:spPr>
+          <a:xfrm>
+            <a:off x="1280160" y="3319272"/>
+            <a:ext cx="9966960" cy="0"/>
+          </a:xfrm>
+          <a:prstGeom prst="line">
+            <a:avLst/>
+          </a:prstGeom>
+          <a:ln w="20320">
+            <a:solidFill>
+              <a:srgbClr val="154FC2"/>
+            </a:solidFill>
+            <a:tailEnd type="triangle" w="med" h="med"/>
+          </a:ln>
+        </p:spPr>
+        <p:style>
+          <a:lnRef idx="2">
+            <a:schemeClr val="accent1"/>
+          </a:lnRef>
+          <a:fillRef idx="0">
+            <a:schemeClr val="accent1"/>
+          </a:fillRef>
+          <a:effectRef idx="1">
+            <a:schemeClr val="accent1"/>
+          </a:effectRef>
+          <a:fontRef idx="minor">
+            <a:schemeClr val="tx1"/>
+          </a:fontRef>
+        </p:style>
+      </p:cxnSp>
+      <p:sp>
+        <p:nvSpPr>
+          <p:cNvPr id="30" name="Oval 29"/>
+          <p:cNvSpPr/>
+          <p:nvPr/>
+        </p:nvSpPr>
+        <p:spPr>
+          <a:xfrm>
+            <a:off x="6117336" y="3172968"/>
+            <a:ext cx="292608" cy="292608"/>
+          </a:xfrm>
+          <a:prstGeom prst="ellipse">
+            <a:avLst/>
+          </a:prstGeom>
+          <a:solidFill>
+            <a:srgbClr val="FFFFFF"/>
+          </a:solidFill>
+          <a:ln w="19050">
+            <a:solidFill>
+              <a:srgbClr val="154FC2"/>
+            </a:solidFill>
+          </a:ln>
+        </p:spPr>
+        <p:style>
+          <a:lnRef idx="1">
+            <a:schemeClr val="accent1"/>
+          </a:lnRef>
+          <a:fillRef idx="3">
+            <a:schemeClr val="accent1"/>
+          </a:fillRef>
+          <a:effectRef idx="2">
+            <a:schemeClr val="accent1"/>
+          </a:effectRef>
+          <a:fontRef idx="minor">
+            <a:schemeClr val="lt1"/>
+          </a:fontRef>
+        </p:style>
+        <p:txBody>
+          <a:bodyPr rtlCol="0" anchor="ctr" lIns="0" rIns="0" tIns="0" bIns="0"/>
+          <a:lstStyle/>
+          <a:p>
+            <a:pPr algn="ctr"/>
+            <a:r>
+              <a:rPr sz="800" b="1">
+                <a:solidFill>
+                  <a:srgbClr val="154FC2"/>
+                </a:solidFill>
+              </a:rPr>
+              <a:t>A5r</a:t>
+            </a:r>
+          </a:p>
+        </p:txBody>
+      </p:sp>
+      <p:sp>
+        <p:nvSpPr>
+          <p:cNvPr id="31" name="TextBox 30"/>
+          <p:cNvSpPr txBox="1"/>
+          <p:nvPr/>
+        </p:nvSpPr>
+        <p:spPr>
+          <a:xfrm>
+            <a:off x="4800600" y="3063240"/>
+            <a:ext cx="2926080" cy="219456"/>
+          </a:xfrm>
+          <a:prstGeom prst="rect">
+            <a:avLst/>
+          </a:prstGeom>
+          <a:solidFill>
+            <a:srgbClr val="FFFFFF"/>
+          </a:solidFill>
+          <a:ln>
+            <a:noFill/>
+          </a:ln>
+        </p:spPr>
+        <p:txBody>
+          <a:bodyPr wrap="none" lIns="25400" rIns="25400" tIns="0" bIns="0">
+            <a:spAutoFit/>
+          </a:bodyPr>
+          <a:lstStyle/>
+          <a:p>
+            <a:pPr algn="l"/>
+            <a:r>
+              <a:rPr sz="850" b="1" i="0">
+                <a:solidFill>
+                  <a:srgbClr val="154FC2"/>
+                </a:solidFill>
+              </a:rPr>
+              <a:t>ReadStaging[0][1][slot].ready_op_id = 0; flush; sfence</a:t>
+            </a:r>
+          </a:p>
+        </p:txBody>
+      </p:sp>
+      <p:cxnSp>
+        <p:nvCxnSpPr>
+          <p:cNvPr id="32" name="Connector 31"/>
+          <p:cNvCxnSpPr/>
+          <p:nvPr/>
+        </p:nvCxnSpPr>
+        <p:spPr>
+          <a:xfrm>
+            <a:off x="1280160" y="3575304"/>
+            <a:ext cx="7726680" cy="0"/>
+          </a:xfrm>
+          <a:prstGeom prst="line">
+            <a:avLst/>
+          </a:prstGeom>
+          <a:ln w="20320">
+            <a:solidFill>
+              <a:srgbClr val="154FC2"/>
+            </a:solidFill>
+            <a:tailEnd type="triangle" w="med" h="med"/>
+          </a:ln>
+        </p:spPr>
+        <p:style>
+          <a:lnRef idx="2">
+            <a:schemeClr val="accent1"/>
+          </a:lnRef>
+          <a:fillRef idx="0">
+            <a:schemeClr val="accent1"/>
+          </a:fillRef>
+          <a:effectRef idx="1">
+            <a:schemeClr val="accent1"/>
+          </a:effectRef>
+          <a:fontRef idx="minor">
+            <a:schemeClr val="tx1"/>
+          </a:fontRef>
+        </p:style>
+      </p:cxnSp>
+      <p:sp>
+        <p:nvSpPr>
+          <p:cNvPr id="33" name="Oval 32"/>
+          <p:cNvSpPr/>
+          <p:nvPr/>
+        </p:nvSpPr>
+        <p:spPr>
+          <a:xfrm>
+            <a:off x="4997196" y="3429000"/>
+            <a:ext cx="292608" cy="292608"/>
+          </a:xfrm>
+          <a:prstGeom prst="ellipse">
+            <a:avLst/>
+          </a:prstGeom>
+          <a:solidFill>
+            <a:srgbClr val="FFFFFF"/>
+          </a:solidFill>
+          <a:ln w="19050">
+            <a:solidFill>
+              <a:srgbClr val="154FC2"/>
+            </a:solidFill>
+          </a:ln>
+        </p:spPr>
+        <p:style>
+          <a:lnRef idx="1">
+            <a:schemeClr val="accent1"/>
+          </a:lnRef>
+          <a:fillRef idx="3">
+            <a:schemeClr val="accent1"/>
+          </a:fillRef>
+          <a:effectRef idx="2">
+            <a:schemeClr val="accent1"/>
+          </a:effectRef>
+          <a:fontRef idx="minor">
+            <a:schemeClr val="lt1"/>
+          </a:fontRef>
+        </p:style>
+        <p:txBody>
+          <a:bodyPr rtlCol="0" anchor="ctr" lIns="0" rIns="0" tIns="0" bIns="0"/>
+          <a:lstStyle/>
+          <a:p>
+            <a:pPr algn="ctr"/>
+            <a:r>
+              <a:rPr sz="800" b="1">
+                <a:solidFill>
+                  <a:srgbClr val="154FC2"/>
+                </a:solidFill>
+              </a:rPr>
+              <a:t>A6r</a:t>
+            </a:r>
+          </a:p>
+        </p:txBody>
+      </p:sp>
+      <p:sp>
+        <p:nvSpPr>
+          <p:cNvPr id="34" name="TextBox 33"/>
+          <p:cNvSpPr txBox="1"/>
+          <p:nvPr/>
+        </p:nvSpPr>
+        <p:spPr>
+          <a:xfrm>
+            <a:off x="3680460" y="3319272"/>
+            <a:ext cx="2926080" cy="219456"/>
+          </a:xfrm>
+          <a:prstGeom prst="rect">
+            <a:avLst/>
+          </a:prstGeom>
+          <a:solidFill>
+            <a:srgbClr val="FFFFFF"/>
+          </a:solidFill>
+          <a:ln>
+            <a:noFill/>
+          </a:ln>
+        </p:spPr>
+        <p:txBody>
+          <a:bodyPr wrap="none" lIns="25400" rIns="25400" tIns="0" bIns="0">
+            <a:spAutoFit/>
+          </a:bodyPr>
+          <a:lstStyle/>
+          <a:p>
+            <a:pPr algn="l"/>
+            <a:r>
+              <a:rPr sz="850" b="1" i="0">
+                <a:solidFill>
+                  <a:srgbClr val="154FC2"/>
+                </a:solidFill>
+              </a:rPr>
+              <a:t>ReadRing[0][1].tail.fetch_add(1)  RMW-CXL</a:t>
+            </a:r>
+          </a:p>
+        </p:txBody>
+      </p:sp>
+      <p:cxnSp>
+        <p:nvCxnSpPr>
+          <p:cNvPr id="35" name="Connector 34"/>
+          <p:cNvCxnSpPr/>
+          <p:nvPr/>
+        </p:nvCxnSpPr>
+        <p:spPr>
+          <a:xfrm>
+            <a:off x="1280160" y="3831336"/>
+            <a:ext cx="7726680" cy="0"/>
+          </a:xfrm>
+          <a:prstGeom prst="line">
+            <a:avLst/>
+          </a:prstGeom>
+          <a:ln w="20320">
+            <a:solidFill>
+              <a:srgbClr val="154FC2"/>
+            </a:solidFill>
+            <a:tailEnd type="triangle" w="med" h="med"/>
+          </a:ln>
+        </p:spPr>
+        <p:style>
+          <a:lnRef idx="2">
+            <a:schemeClr val="accent1"/>
+          </a:lnRef>
+          <a:fillRef idx="0">
+            <a:schemeClr val="accent1"/>
+          </a:fillRef>
+          <a:effectRef idx="1">
+            <a:schemeClr val="accent1"/>
+          </a:effectRef>
+          <a:fontRef idx="minor">
+            <a:schemeClr val="tx1"/>
+          </a:fontRef>
+        </p:style>
+      </p:cxnSp>
+      <p:sp>
+        <p:nvSpPr>
+          <p:cNvPr id="36" name="Oval 35"/>
+          <p:cNvSpPr/>
+          <p:nvPr/>
+        </p:nvSpPr>
+        <p:spPr>
+          <a:xfrm>
+            <a:off x="4997196" y="3685032"/>
+            <a:ext cx="292608" cy="292608"/>
+          </a:xfrm>
+          <a:prstGeom prst="ellipse">
+            <a:avLst/>
+          </a:prstGeom>
+          <a:solidFill>
+            <a:srgbClr val="FFFFFF"/>
+          </a:solidFill>
+          <a:ln w="19050">
+            <a:solidFill>
+              <a:srgbClr val="154FC2"/>
+            </a:solidFill>
+          </a:ln>
+        </p:spPr>
+        <p:style>
+          <a:lnRef idx="1">
+            <a:schemeClr val="accent1"/>
+          </a:lnRef>
+          <a:fillRef idx="3">
+            <a:schemeClr val="accent1"/>
+          </a:fillRef>
+          <a:effectRef idx="2">
+            <a:schemeClr val="accent1"/>
+          </a:effectRef>
+          <a:fontRef idx="minor">
+            <a:schemeClr val="lt1"/>
+          </a:fontRef>
+        </p:style>
+        <p:txBody>
+          <a:bodyPr rtlCol="0" anchor="ctr" lIns="0" rIns="0" tIns="0" bIns="0"/>
+          <a:lstStyle/>
+          <a:p>
+            <a:pPr algn="ctr"/>
+            <a:r>
+              <a:rPr sz="800" b="1">
+                <a:solidFill>
+                  <a:srgbClr val="154FC2"/>
+                </a:solidFill>
+              </a:rPr>
+              <a:t>A7r</a:t>
+            </a:r>
+          </a:p>
+        </p:txBody>
+      </p:sp>
+      <p:sp>
+        <p:nvSpPr>
+          <p:cNvPr id="37" name="TextBox 36"/>
+          <p:cNvSpPr txBox="1"/>
+          <p:nvPr/>
+        </p:nvSpPr>
+        <p:spPr>
+          <a:xfrm>
+            <a:off x="3680460" y="3575304"/>
+            <a:ext cx="2926080" cy="219456"/>
+          </a:xfrm>
+          <a:prstGeom prst="rect">
+            <a:avLst/>
+          </a:prstGeom>
+          <a:solidFill>
+            <a:srgbClr val="FFFFFF"/>
+          </a:solidFill>
+          <a:ln>
+            <a:noFill/>
+          </a:ln>
+        </p:spPr>
+        <p:txBody>
+          <a:bodyPr wrap="none" lIns="25400" rIns="25400" tIns="0" bIns="0">
+            <a:spAutoFit/>
+          </a:bodyPr>
+          <a:lstStyle/>
+          <a:p>
+            <a:pPr algn="l"/>
+            <a:r>
+              <a:rPr sz="850" b="1" i="0">
+                <a:solidFill>
+                  <a:srgbClr val="154FC2"/>
+                </a:solidFill>
+              </a:rPr>
+              <a:t>write ReadEntry{key, req_op_id}; flush; sfence</a:t>
+            </a:r>
+          </a:p>
+        </p:txBody>
+      </p:sp>
+      <p:cxnSp>
+        <p:nvCxnSpPr>
+          <p:cNvPr id="38" name="Connector 37"/>
+          <p:cNvCxnSpPr/>
+          <p:nvPr/>
+        </p:nvCxnSpPr>
+        <p:spPr>
+          <a:xfrm>
+            <a:off x="1280160" y="4087368"/>
+            <a:ext cx="9966960" cy="0"/>
+          </a:xfrm>
+          <a:prstGeom prst="line">
+            <a:avLst/>
+          </a:prstGeom>
+          <a:ln w="20320">
+            <a:solidFill>
+              <a:srgbClr val="154FC2"/>
+            </a:solidFill>
+            <a:tailEnd type="triangle" w="med" h="med"/>
+          </a:ln>
+        </p:spPr>
+        <p:style>
+          <a:lnRef idx="2">
+            <a:schemeClr val="accent1"/>
+          </a:lnRef>
+          <a:fillRef idx="0">
+            <a:schemeClr val="accent1"/>
+          </a:fillRef>
+          <a:effectRef idx="1">
+            <a:schemeClr val="accent1"/>
+          </a:effectRef>
+          <a:fontRef idx="minor">
+            <a:schemeClr val="tx1"/>
+          </a:fontRef>
+        </p:style>
+      </p:cxnSp>
+      <p:sp>
+        <p:nvSpPr>
+          <p:cNvPr id="39" name="Oval 38"/>
+          <p:cNvSpPr/>
+          <p:nvPr/>
+        </p:nvSpPr>
+        <p:spPr>
+          <a:xfrm>
+            <a:off x="6117336" y="3941064"/>
+            <a:ext cx="292608" cy="292608"/>
+          </a:xfrm>
+          <a:prstGeom prst="ellipse">
+            <a:avLst/>
+          </a:prstGeom>
+          <a:solidFill>
+            <a:srgbClr val="FFCDD2"/>
+          </a:solidFill>
+          <a:ln w="19050">
+            <a:solidFill>
+              <a:srgbClr val="C62828"/>
+            </a:solidFill>
+          </a:ln>
+        </p:spPr>
+        <p:style>
+          <a:lnRef idx="1">
+            <a:schemeClr val="accent1"/>
+          </a:lnRef>
+          <a:fillRef idx="3">
+            <a:schemeClr val="accent1"/>
+          </a:fillRef>
+          <a:effectRef idx="2">
+            <a:schemeClr val="accent1"/>
+          </a:effectRef>
+          <a:fontRef idx="minor">
+            <a:schemeClr val="lt1"/>
+          </a:fontRef>
+        </p:style>
+        <p:txBody>
+          <a:bodyPr rtlCol="0" anchor="ctr" lIns="0" rIns="0" tIns="0" bIns="0"/>
+          <a:lstStyle/>
+          <a:p>
+            <a:pPr algn="ctr"/>
+            <a:r>
+              <a:rPr sz="800" b="1">
+                <a:solidFill>
+                  <a:srgbClr val="333333"/>
+                </a:solidFill>
+              </a:rPr>
+              <a:t>A8r</a:t>
+            </a:r>
+          </a:p>
+        </p:txBody>
+      </p:sp>
+      <p:sp>
+        <p:nvSpPr>
+          <p:cNvPr id="40" name="TextBox 39"/>
+          <p:cNvSpPr txBox="1"/>
+          <p:nvPr/>
+        </p:nvSpPr>
+        <p:spPr>
+          <a:xfrm>
+            <a:off x="4800600" y="3831336"/>
+            <a:ext cx="2926080" cy="219456"/>
+          </a:xfrm>
+          <a:prstGeom prst="rect">
+            <a:avLst/>
+          </a:prstGeom>
+          <a:solidFill>
+            <a:srgbClr val="FFFFFF"/>
+          </a:solidFill>
+          <a:ln>
+            <a:noFill/>
+          </a:ln>
+        </p:spPr>
+        <p:txBody>
+          <a:bodyPr wrap="none" lIns="25400" rIns="25400" tIns="0" bIns="0">
+            <a:spAutoFit/>
+          </a:bodyPr>
+          <a:lstStyle/>
+          <a:p>
+            <a:pPr algn="l"/>
+            <a:r>
+              <a:rPr sz="850" b="1" i="0">
+                <a:solidFill>
+                  <a:srgbClr val="154FC2"/>
+                </a:solidFill>
+              </a:rPr>
+              <a:t>worker spin on ReadStaging.ready_op_id  (200 ms cap)</a:t>
+            </a:r>
+          </a:p>
+        </p:txBody>
+      </p:sp>
+      <p:sp>
+        <p:nvSpPr>
+          <p:cNvPr id="41" name="Oval 40"/>
+          <p:cNvSpPr/>
+          <p:nvPr/>
+        </p:nvSpPr>
+        <p:spPr>
+          <a:xfrm>
+            <a:off x="8860536" y="4197096"/>
+            <a:ext cx="292608" cy="292608"/>
+          </a:xfrm>
+          <a:prstGeom prst="ellipse">
+            <a:avLst/>
+          </a:prstGeom>
+          <a:solidFill>
+            <a:srgbClr val="FFFFFF"/>
+          </a:solidFill>
+          <a:ln w="19050">
+            <a:solidFill>
+              <a:srgbClr val="154FC2"/>
+            </a:solidFill>
+          </a:ln>
+        </p:spPr>
+        <p:style>
+          <a:lnRef idx="1">
+            <a:schemeClr val="accent1"/>
+          </a:lnRef>
+          <a:fillRef idx="3">
+            <a:schemeClr val="accent1"/>
+          </a:fillRef>
+          <a:effectRef idx="2">
+            <a:schemeClr val="accent1"/>
+          </a:effectRef>
+          <a:fontRef idx="minor">
+            <a:schemeClr val="lt1"/>
+          </a:fontRef>
+        </p:style>
+        <p:txBody>
+          <a:bodyPr rtlCol="0" anchor="ctr" lIns="0" rIns="0" tIns="0" bIns="0"/>
+          <a:lstStyle/>
+          <a:p>
+            <a:pPr algn="ctr"/>
+            <a:r>
+              <a:rPr sz="800" b="1">
+                <a:solidFill>
+                  <a:srgbClr val="154FC2"/>
+                </a:solidFill>
+              </a:rPr>
+              <a:t>A9r</a:t>
+            </a:r>
+          </a:p>
+        </p:txBody>
+      </p:sp>
+      <p:sp>
+        <p:nvSpPr>
+          <p:cNvPr id="42" name="TextBox 41"/>
+          <p:cNvSpPr txBox="1"/>
+          <p:nvPr/>
+        </p:nvSpPr>
+        <p:spPr>
+          <a:xfrm>
+            <a:off x="9189719" y="4251960"/>
+            <a:ext cx="2743200" cy="219456"/>
+          </a:xfrm>
+          <a:prstGeom prst="rect">
+            <a:avLst/>
+          </a:prstGeom>
+          <a:solidFill>
+            <a:srgbClr val="FFFFFF"/>
+          </a:solidFill>
+          <a:ln>
+            <a:noFill/>
+          </a:ln>
+        </p:spPr>
+        <p:txBody>
+          <a:bodyPr wrap="none" lIns="25400" rIns="25400" tIns="0" bIns="0">
+            <a:spAutoFit/>
+          </a:bodyPr>
+          <a:lstStyle/>
+          <a:p>
+            <a:pPr algn="l"/>
+            <a:r>
+              <a:rPr sz="850" b="1" i="0">
+                <a:solidFill>
+                  <a:srgbClr val="154FC2"/>
+                </a:solidFill>
+              </a:rPr>
+              <a:t>poll ReadRing tail; flush bucket; scan 7 slots</a:t>
+            </a:r>
+          </a:p>
+        </p:txBody>
+      </p:sp>
+      <p:sp>
+        <p:nvSpPr>
+          <p:cNvPr id="43" name="Oval 42"/>
+          <p:cNvSpPr/>
+          <p:nvPr/>
+        </p:nvSpPr>
+        <p:spPr>
+          <a:xfrm>
+            <a:off x="8860536" y="4453128"/>
+            <a:ext cx="292608" cy="292608"/>
+          </a:xfrm>
+          <a:prstGeom prst="ellipse">
+            <a:avLst/>
+          </a:prstGeom>
+          <a:solidFill>
+            <a:srgbClr val="FFF49C"/>
+          </a:solidFill>
+          <a:ln w="19050">
+            <a:solidFill>
+              <a:srgbClr val="F9A825"/>
+            </a:solidFill>
+          </a:ln>
+        </p:spPr>
+        <p:style>
+          <a:lnRef idx="1">
+            <a:schemeClr val="accent1"/>
+          </a:lnRef>
+          <a:fillRef idx="3">
+            <a:schemeClr val="accent1"/>
+          </a:fillRef>
+          <a:effectRef idx="2">
+            <a:schemeClr val="accent1"/>
+          </a:effectRef>
+          <a:fontRef idx="minor">
+            <a:schemeClr val="lt1"/>
+          </a:fontRef>
+        </p:style>
+        <p:txBody>
+          <a:bodyPr rtlCol="0" anchor="ctr" lIns="0" rIns="0" tIns="0" bIns="0"/>
+          <a:lstStyle/>
+          <a:p>
+            <a:pPr algn="ctr"/>
+            <a:r>
+              <a:rPr sz="800" b="1">
+                <a:solidFill>
+                  <a:srgbClr val="333333"/>
+                </a:solidFill>
+              </a:rPr>
+              <a:t>A10r</a:t>
+            </a:r>
+          </a:p>
+        </p:txBody>
+      </p:sp>
+      <p:sp>
+        <p:nvSpPr>
+          <p:cNvPr id="44" name="TextBox 43"/>
+          <p:cNvSpPr txBox="1"/>
+          <p:nvPr/>
+        </p:nvSpPr>
+        <p:spPr>
+          <a:xfrm>
+            <a:off x="9189719" y="4507992"/>
+            <a:ext cx="2743200" cy="219456"/>
+          </a:xfrm>
+          <a:prstGeom prst="rect">
+            <a:avLst/>
+          </a:prstGeom>
+          <a:solidFill>
+            <a:srgbClr val="FFFFFF"/>
+          </a:solidFill>
+          <a:ln>
+            <a:noFill/>
+          </a:ln>
+        </p:spPr>
+        <p:txBody>
+          <a:bodyPr wrap="none" lIns="25400" rIns="25400" tIns="0" bIns="0">
+            <a:spAutoFit/>
+          </a:bodyPr>
+          <a:lstStyle/>
+          <a:p>
+            <a:pPr algn="l"/>
+            <a:r>
+              <a:rPr sz="850" b="1" i="0">
+                <a:solidFill>
+                  <a:srgbClr val="154FC2"/>
+                </a:solidFill>
+              </a:rPr>
+              <a:t>acquire SlotDirectoryEntry.spinlock; sharer_bitmap |= (1&lt;&lt;src)  ★ peer-visible state change ★</a:t>
+            </a:r>
+          </a:p>
+        </p:txBody>
+      </p:sp>
+      <p:sp>
+        <p:nvSpPr>
+          <p:cNvPr id="45" name="Oval 44"/>
+          <p:cNvSpPr/>
+          <p:nvPr/>
+        </p:nvSpPr>
+        <p:spPr>
+          <a:xfrm>
+            <a:off x="8860536" y="4709160"/>
+            <a:ext cx="292608" cy="292608"/>
+          </a:xfrm>
+          <a:prstGeom prst="ellipse">
+            <a:avLst/>
+          </a:prstGeom>
+          <a:solidFill>
+            <a:srgbClr val="FFFFFF"/>
+          </a:solidFill>
+          <a:ln w="19050">
+            <a:solidFill>
+              <a:srgbClr val="154FC2"/>
+            </a:solidFill>
+          </a:ln>
+        </p:spPr>
+        <p:style>
+          <a:lnRef idx="1">
+            <a:schemeClr val="accent1"/>
+          </a:lnRef>
+          <a:fillRef idx="3">
+            <a:schemeClr val="accent1"/>
+          </a:fillRef>
+          <a:effectRef idx="2">
+            <a:schemeClr val="accent1"/>
+          </a:effectRef>
+          <a:fontRef idx="minor">
+            <a:schemeClr val="lt1"/>
+          </a:fontRef>
+        </p:style>
+        <p:txBody>
+          <a:bodyPr rtlCol="0" anchor="ctr" lIns="0" rIns="0" tIns="0" bIns="0"/>
+          <a:lstStyle/>
+          <a:p>
+            <a:pPr algn="ctr"/>
+            <a:r>
+              <a:rPr sz="800" b="1">
+                <a:solidFill>
+                  <a:srgbClr val="154FC2"/>
+                </a:solidFill>
+              </a:rPr>
+              <a:t>A11r</a:t>
+            </a:r>
+          </a:p>
+        </p:txBody>
+      </p:sp>
+      <p:sp>
+        <p:nvSpPr>
+          <p:cNvPr id="46" name="TextBox 45"/>
+          <p:cNvSpPr txBox="1"/>
+          <p:nvPr/>
+        </p:nvSpPr>
+        <p:spPr>
+          <a:xfrm>
+            <a:off x="9189719" y="4764024"/>
+            <a:ext cx="2743200" cy="219456"/>
+          </a:xfrm>
+          <a:prstGeom prst="rect">
+            <a:avLst/>
+          </a:prstGeom>
+          <a:solidFill>
+            <a:srgbClr val="FFFFFF"/>
+          </a:solidFill>
+          <a:ln>
+            <a:noFill/>
+          </a:ln>
+        </p:spPr>
+        <p:txBody>
+          <a:bodyPr wrap="none" lIns="25400" rIns="25400" tIns="0" bIns="0">
+            <a:spAutoFit/>
+          </a:bodyPr>
+          <a:lstStyle/>
+          <a:p>
+            <a:pPr algn="l"/>
+            <a:r>
+              <a:rPr sz="850" b="1" i="0">
+                <a:solidFill>
+                  <a:srgbClr val="154FC2"/>
+                </a:solidFill>
+              </a:rPr>
+              <a:t>pool-&gt;read(blk_off, 4) → value_len; pool-&gt;read(blk_off+4, vlen)</a:t>
+            </a:r>
+          </a:p>
+        </p:txBody>
+      </p:sp>
+      <p:cxnSp>
+        <p:nvCxnSpPr>
+          <p:cNvPr id="47" name="Connector 46"/>
+          <p:cNvCxnSpPr/>
+          <p:nvPr/>
+        </p:nvCxnSpPr>
+        <p:spPr>
+          <a:xfrm>
+            <a:off x="9006840" y="5111496"/>
+            <a:ext cx="2240280" cy="0"/>
+          </a:xfrm>
+          <a:prstGeom prst="line">
+            <a:avLst/>
+          </a:prstGeom>
+          <a:ln w="20320">
+            <a:solidFill>
+              <a:srgbClr val="154FC2"/>
+            </a:solidFill>
+            <a:tailEnd type="triangle" w="med" h="med"/>
+          </a:ln>
+        </p:spPr>
+        <p:style>
+          <a:lnRef idx="2">
+            <a:schemeClr val="accent1"/>
+          </a:lnRef>
+          <a:fillRef idx="0">
+            <a:schemeClr val="accent1"/>
+          </a:fillRef>
+          <a:effectRef idx="1">
+            <a:schemeClr val="accent1"/>
+          </a:effectRef>
+          <a:fontRef idx="minor">
+            <a:schemeClr val="tx1"/>
+          </a:fontRef>
+        </p:style>
+      </p:cxnSp>
+      <p:sp>
+        <p:nvSpPr>
+          <p:cNvPr id="48" name="Oval 47"/>
+          <p:cNvSpPr/>
+          <p:nvPr/>
+        </p:nvSpPr>
+        <p:spPr>
+          <a:xfrm>
+            <a:off x="9980676" y="4965192"/>
+            <a:ext cx="292608" cy="292608"/>
+          </a:xfrm>
+          <a:prstGeom prst="ellipse">
+            <a:avLst/>
+          </a:prstGeom>
+          <a:solidFill>
+            <a:srgbClr val="FFFFFF"/>
+          </a:solidFill>
+          <a:ln w="19050">
+            <a:solidFill>
+              <a:srgbClr val="154FC2"/>
+            </a:solidFill>
+          </a:ln>
+        </p:spPr>
+        <p:style>
+          <a:lnRef idx="1">
+            <a:schemeClr val="accent1"/>
+          </a:lnRef>
+          <a:fillRef idx="3">
+            <a:schemeClr val="accent1"/>
+          </a:fillRef>
+          <a:effectRef idx="2">
+            <a:schemeClr val="accent1"/>
+          </a:effectRef>
+          <a:fontRef idx="minor">
+            <a:schemeClr val="lt1"/>
+          </a:fontRef>
+        </p:style>
+        <p:txBody>
+          <a:bodyPr rtlCol="0" anchor="ctr" lIns="0" rIns="0" tIns="0" bIns="0"/>
+          <a:lstStyle/>
+          <a:p>
+            <a:pPr algn="ctr"/>
+            <a:r>
+              <a:rPr sz="800" b="1">
+                <a:solidFill>
+                  <a:srgbClr val="154FC2"/>
+                </a:solidFill>
+              </a:rPr>
+              <a:t>A12r</a:t>
+            </a:r>
+          </a:p>
+        </p:txBody>
+      </p:sp>
+      <p:sp>
+        <p:nvSpPr>
+          <p:cNvPr id="49" name="TextBox 48"/>
+          <p:cNvSpPr txBox="1"/>
+          <p:nvPr/>
+        </p:nvSpPr>
+        <p:spPr>
+          <a:xfrm>
+            <a:off x="8663940" y="4855464"/>
+            <a:ext cx="2926080" cy="219456"/>
+          </a:xfrm>
+          <a:prstGeom prst="rect">
+            <a:avLst/>
+          </a:prstGeom>
+          <a:solidFill>
+            <a:srgbClr val="FFFFFF"/>
+          </a:solidFill>
+          <a:ln>
+            <a:noFill/>
+          </a:ln>
+        </p:spPr>
+        <p:txBody>
+          <a:bodyPr wrap="none" lIns="25400" rIns="25400" tIns="0" bIns="0">
+            <a:spAutoFit/>
+          </a:bodyPr>
+          <a:lstStyle/>
+          <a:p>
+            <a:pPr algn="l"/>
+            <a:r>
+              <a:rPr sz="850" b="1" i="0">
+                <a:solidFill>
+                  <a:srgbClr val="154FC2"/>
+                </a:solidFill>
+              </a:rPr>
+              <a:t>write ReadStaging value_bytes + lookup_epoch (C13 tag) + status; flush</a:t>
+            </a:r>
+          </a:p>
+        </p:txBody>
+      </p:sp>
+      <p:cxnSp>
+        <p:nvCxnSpPr>
+          <p:cNvPr id="50" name="Connector 49"/>
+          <p:cNvCxnSpPr/>
+          <p:nvPr/>
+        </p:nvCxnSpPr>
+        <p:spPr>
+          <a:xfrm>
+            <a:off x="9006840" y="5367528"/>
+            <a:ext cx="2240280" cy="0"/>
+          </a:xfrm>
+          <a:prstGeom prst="line">
+            <a:avLst/>
+          </a:prstGeom>
+          <a:ln w="20320">
+            <a:solidFill>
+              <a:srgbClr val="154FC2"/>
+            </a:solidFill>
+            <a:tailEnd type="triangle" w="med" h="med"/>
+          </a:ln>
+        </p:spPr>
+        <p:style>
+          <a:lnRef idx="2">
+            <a:schemeClr val="accent1"/>
+          </a:lnRef>
+          <a:fillRef idx="0">
+            <a:schemeClr val="accent1"/>
+          </a:fillRef>
+          <a:effectRef idx="1">
+            <a:schemeClr val="accent1"/>
+          </a:effectRef>
+          <a:fontRef idx="minor">
+            <a:schemeClr val="tx1"/>
+          </a:fontRef>
+        </p:style>
+      </p:cxnSp>
+      <p:sp>
+        <p:nvSpPr>
+          <p:cNvPr id="51" name="Oval 50"/>
+          <p:cNvSpPr/>
+          <p:nvPr/>
+        </p:nvSpPr>
+        <p:spPr>
+          <a:xfrm>
+            <a:off x="9980676" y="5221224"/>
+            <a:ext cx="292608" cy="292608"/>
+          </a:xfrm>
+          <a:prstGeom prst="ellipse">
+            <a:avLst/>
+          </a:prstGeom>
+          <a:solidFill>
+            <a:srgbClr val="FFF49C"/>
+          </a:solidFill>
+          <a:ln w="19050">
+            <a:solidFill>
+              <a:srgbClr val="F9A825"/>
+            </a:solidFill>
+          </a:ln>
+        </p:spPr>
+        <p:style>
+          <a:lnRef idx="1">
+            <a:schemeClr val="accent1"/>
+          </a:lnRef>
+          <a:fillRef idx="3">
+            <a:schemeClr val="accent1"/>
+          </a:fillRef>
+          <a:effectRef idx="2">
+            <a:schemeClr val="accent1"/>
+          </a:effectRef>
+          <a:fontRef idx="minor">
+            <a:schemeClr val="lt1"/>
+          </a:fontRef>
+        </p:style>
+        <p:txBody>
+          <a:bodyPr rtlCol="0" anchor="ctr" lIns="0" rIns="0" tIns="0" bIns="0"/>
+          <a:lstStyle/>
+          <a:p>
+            <a:pPr algn="ctr"/>
+            <a:r>
+              <a:rPr sz="800" b="1">
+                <a:solidFill>
+                  <a:srgbClr val="333333"/>
+                </a:solidFill>
+              </a:rPr>
+              <a:t>A13r</a:t>
+            </a:r>
+          </a:p>
+        </p:txBody>
+      </p:sp>
+      <p:sp>
+        <p:nvSpPr>
+          <p:cNvPr id="52" name="TextBox 51"/>
+          <p:cNvSpPr txBox="1"/>
+          <p:nvPr/>
+        </p:nvSpPr>
+        <p:spPr>
+          <a:xfrm>
+            <a:off x="8663940" y="5458968"/>
+            <a:ext cx="2926080" cy="219456"/>
+          </a:xfrm>
+          <a:prstGeom prst="rect">
+            <a:avLst/>
+          </a:prstGeom>
+          <a:solidFill>
+            <a:srgbClr val="FFFFFF"/>
+          </a:solidFill>
+          <a:ln>
+            <a:noFill/>
+          </a:ln>
+        </p:spPr>
+        <p:txBody>
+          <a:bodyPr wrap="none" lIns="25400" rIns="25400" tIns="0" bIns="0">
+            <a:spAutoFit/>
+          </a:bodyPr>
+          <a:lstStyle/>
+          <a:p>
+            <a:pPr algn="l"/>
+            <a:r>
+              <a:rPr sz="850" b="1" i="0">
+                <a:solidFill>
+                  <a:srgbClr val="154FC2"/>
+                </a:solidFill>
+              </a:rPr>
+              <a:t>★ publish staging.ready_op_id = req_op_id ★ (release-publish)</a:t>
+            </a:r>
+          </a:p>
+        </p:txBody>
+      </p:sp>
+      <p:cxnSp>
+        <p:nvCxnSpPr>
+          <p:cNvPr id="53" name="Connector 52"/>
+          <p:cNvCxnSpPr/>
+          <p:nvPr/>
+        </p:nvCxnSpPr>
+        <p:spPr>
+          <a:xfrm flipH="1">
+            <a:off x="1280160" y="5623560"/>
+            <a:ext cx="9966960" cy="0"/>
+          </a:xfrm>
+          <a:prstGeom prst="line">
+            <a:avLst/>
+          </a:prstGeom>
+          <a:ln w="20320">
+            <a:solidFill>
+              <a:srgbClr val="154FC2"/>
+            </a:solidFill>
+            <a:tailEnd type="triangle" w="med" h="med"/>
+          </a:ln>
+        </p:spPr>
+        <p:style>
+          <a:lnRef idx="2">
+            <a:schemeClr val="accent1"/>
+          </a:lnRef>
+          <a:fillRef idx="0">
+            <a:schemeClr val="accent1"/>
+          </a:fillRef>
+          <a:effectRef idx="1">
+            <a:schemeClr val="accent1"/>
+          </a:effectRef>
+          <a:fontRef idx="minor">
+            <a:schemeClr val="tx1"/>
+          </a:fontRef>
+        </p:style>
+      </p:cxnSp>
+      <p:sp>
+        <p:nvSpPr>
+          <p:cNvPr id="54" name="Oval 53"/>
+          <p:cNvSpPr/>
+          <p:nvPr/>
+        </p:nvSpPr>
+        <p:spPr>
+          <a:xfrm>
+            <a:off x="6117336" y="5477256"/>
+            <a:ext cx="292608" cy="292608"/>
+          </a:xfrm>
+          <a:prstGeom prst="ellipse">
+            <a:avLst/>
+          </a:prstGeom>
+          <a:solidFill>
+            <a:srgbClr val="FFFFFF"/>
+          </a:solidFill>
+          <a:ln w="19050">
+            <a:solidFill>
+              <a:srgbClr val="154FC2"/>
+            </a:solidFill>
+          </a:ln>
+        </p:spPr>
+        <p:style>
+          <a:lnRef idx="1">
+            <a:schemeClr val="accent1"/>
+          </a:lnRef>
+          <a:fillRef idx="3">
+            <a:schemeClr val="accent1"/>
+          </a:fillRef>
+          <a:effectRef idx="2">
+            <a:schemeClr val="accent1"/>
+          </a:effectRef>
+          <a:fontRef idx="minor">
+            <a:schemeClr val="lt1"/>
+          </a:fontRef>
+        </p:style>
+        <p:txBody>
+          <a:bodyPr rtlCol="0" anchor="ctr" lIns="0" rIns="0" tIns="0" bIns="0"/>
+          <a:lstStyle/>
+          <a:p>
+            <a:pPr algn="ctr"/>
+            <a:r>
+              <a:rPr sz="800" b="1">
+                <a:solidFill>
+                  <a:srgbClr val="154FC2"/>
+                </a:solidFill>
+              </a:rPr>
+              <a:t>A14r</a:t>
+            </a:r>
+          </a:p>
+        </p:txBody>
+      </p:sp>
+      <p:sp>
+        <p:nvSpPr>
+          <p:cNvPr id="55" name="TextBox 54"/>
+          <p:cNvSpPr txBox="1"/>
+          <p:nvPr/>
+        </p:nvSpPr>
+        <p:spPr>
+          <a:xfrm>
+            <a:off x="4800600" y="5715000"/>
+            <a:ext cx="2926080" cy="219456"/>
+          </a:xfrm>
+          <a:prstGeom prst="rect">
+            <a:avLst/>
+          </a:prstGeom>
+          <a:solidFill>
+            <a:srgbClr val="FFFFFF"/>
+          </a:solidFill>
+          <a:ln>
+            <a:noFill/>
+          </a:ln>
+        </p:spPr>
+        <p:txBody>
+          <a:bodyPr wrap="none" lIns="25400" rIns="25400" tIns="0" bIns="0">
+            <a:spAutoFit/>
+          </a:bodyPr>
+          <a:lstStyle/>
+          <a:p>
+            <a:pPr algn="l"/>
+            <a:r>
+              <a:rPr sz="850" b="1" i="0">
+                <a:solidFill>
+                  <a:srgbClr val="154FC2"/>
+                </a:solidFill>
+              </a:rPr>
+              <a:t>worker A8r poll observes ready_op_id == req_op_id  → break spin</a:t>
+            </a:r>
+          </a:p>
+        </p:txBody>
+      </p:sp>
+      <p:sp>
+        <p:nvSpPr>
+          <p:cNvPr id="56" name="Rectangle 55"/>
+          <p:cNvSpPr/>
+          <p:nvPr/>
+        </p:nvSpPr>
+        <p:spPr>
+          <a:xfrm>
+            <a:off x="1197863" y="4041648"/>
+            <a:ext cx="164592" cy="1819656"/>
+          </a:xfrm>
+          <a:prstGeom prst="rect">
+            <a:avLst/>
+          </a:prstGeom>
+          <a:solidFill>
+            <a:srgbClr val="FFCDD2"/>
+          </a:solidFill>
+          <a:ln w="6350">
+            <a:solidFill>
+              <a:srgbClr val="C62828"/>
+            </a:solidFill>
+          </a:ln>
+        </p:spPr>
+        <p:style>
+          <a:lnRef idx="1">
+            <a:schemeClr val="accent1"/>
+          </a:lnRef>
+          <a:fillRef idx="3">
+            <a:schemeClr val="accent1"/>
+          </a:fillRef>
+          <a:effectRef idx="2">
+            <a:schemeClr val="accent1"/>
+          </a:effectRef>
+          <a:fontRef idx="minor">
+            <a:schemeClr val="lt1"/>
+          </a:fontRef>
+        </p:style>
+        <p:txBody>
+          <a:bodyPr rtlCol="0" anchor="ctr"/>
+          <a:lstStyle/>
+          <a:p>
+            <a:pPr algn="ctr"/>
+          </a:p>
+        </p:txBody>
+      </p:sp>
+      <p:sp>
+        <p:nvSpPr>
+          <p:cNvPr id="57" name="Oval 56"/>
+          <p:cNvSpPr/>
+          <p:nvPr/>
+        </p:nvSpPr>
+        <p:spPr>
+          <a:xfrm>
+            <a:off x="1133856" y="5733288"/>
+            <a:ext cx="292608" cy="292608"/>
+          </a:xfrm>
+          <a:prstGeom prst="ellipse">
+            <a:avLst/>
+          </a:prstGeom>
+          <a:solidFill>
+            <a:srgbClr val="FFF49C"/>
+          </a:solidFill>
+          <a:ln w="19050">
+            <a:solidFill>
+              <a:srgbClr val="F9A825"/>
+            </a:solidFill>
+          </a:ln>
+        </p:spPr>
+        <p:style>
+          <a:lnRef idx="1">
+            <a:schemeClr val="accent1"/>
+          </a:lnRef>
+          <a:fillRef idx="3">
+            <a:schemeClr val="accent1"/>
+          </a:fillRef>
+          <a:effectRef idx="2">
+            <a:schemeClr val="accent1"/>
+          </a:effectRef>
+          <a:fontRef idx="minor">
+            <a:schemeClr val="lt1"/>
+          </a:fontRef>
+        </p:style>
+        <p:txBody>
+          <a:bodyPr rtlCol="0" anchor="ctr" lIns="0" rIns="0" tIns="0" bIns="0"/>
+          <a:lstStyle/>
+          <a:p>
+            <a:pPr algn="ctr"/>
+            <a:r>
+              <a:rPr sz="800" b="1">
+                <a:solidFill>
+                  <a:srgbClr val="333333"/>
+                </a:solidFill>
+              </a:rPr>
+              <a:t>A15r</a:t>
+            </a:r>
+          </a:p>
+        </p:txBody>
+      </p:sp>
+      <p:sp>
+        <p:nvSpPr>
+          <p:cNvPr id="58" name="TextBox 57"/>
+          <p:cNvSpPr txBox="1"/>
+          <p:nvPr/>
+        </p:nvSpPr>
+        <p:spPr>
+          <a:xfrm>
+            <a:off x="1463039" y="5788152"/>
+            <a:ext cx="2743200" cy="219456"/>
+          </a:xfrm>
+          <a:prstGeom prst="rect">
+            <a:avLst/>
+          </a:prstGeom>
+          <a:solidFill>
+            <a:srgbClr val="FFFFFF"/>
+          </a:solidFill>
+          <a:ln>
+            <a:noFill/>
+          </a:ln>
+        </p:spPr>
+        <p:txBody>
+          <a:bodyPr wrap="none" lIns="25400" rIns="25400" tIns="0" bIns="0">
+            <a:spAutoFit/>
+          </a:bodyPr>
+          <a:lstStyle/>
+          <a:p>
+            <a:pPr algn="l"/>
+            <a:r>
+              <a:rPr sz="850" b="1" i="0">
+                <a:solidFill>
+                  <a:srgbClr val="154FC2"/>
+                </a:solidFill>
+              </a:rPr>
+              <a:t>C13: if staging.lookup_epoch &lt; my_epoch_at_send → return -3 (retry from L2)</a:t>
+            </a:r>
+          </a:p>
+        </p:txBody>
+      </p:sp>
+      <p:sp>
+        <p:nvSpPr>
+          <p:cNvPr id="59" name="Oval 58"/>
+          <p:cNvSpPr/>
+          <p:nvPr/>
+        </p:nvSpPr>
+        <p:spPr>
+          <a:xfrm>
+            <a:off x="1133856" y="5989320"/>
+            <a:ext cx="292608" cy="292608"/>
+          </a:xfrm>
+          <a:prstGeom prst="ellipse">
+            <a:avLst/>
+          </a:prstGeom>
+          <a:solidFill>
+            <a:srgbClr val="FFFFFF"/>
+          </a:solidFill>
+          <a:ln w="19050">
+            <a:solidFill>
+              <a:srgbClr val="154FC2"/>
+            </a:solidFill>
+          </a:ln>
+        </p:spPr>
+        <p:style>
+          <a:lnRef idx="1">
+            <a:schemeClr val="accent1"/>
+          </a:lnRef>
+          <a:fillRef idx="3">
+            <a:schemeClr val="accent1"/>
+          </a:fillRef>
+          <a:effectRef idx="2">
+            <a:schemeClr val="accent1"/>
+          </a:effectRef>
+          <a:fontRef idx="minor">
+            <a:schemeClr val="lt1"/>
+          </a:fontRef>
+        </p:style>
+        <p:txBody>
+          <a:bodyPr rtlCol="0" anchor="ctr" lIns="0" rIns="0" tIns="0" bIns="0"/>
+          <a:lstStyle/>
+          <a:p>
+            <a:pPr algn="ctr"/>
+            <a:r>
+              <a:rPr sz="800" b="1">
+                <a:solidFill>
+                  <a:srgbClr val="154FC2"/>
+                </a:solidFill>
+              </a:rPr>
+              <a:t>A16r</a:t>
+            </a:r>
+          </a:p>
+        </p:txBody>
+      </p:sp>
+      <p:sp>
+        <p:nvSpPr>
+          <p:cNvPr id="60" name="TextBox 59"/>
+          <p:cNvSpPr txBox="1"/>
+          <p:nvPr/>
+        </p:nvSpPr>
+        <p:spPr>
+          <a:xfrm>
+            <a:off x="1463039" y="6044184"/>
+            <a:ext cx="2743200" cy="219456"/>
+          </a:xfrm>
+          <a:prstGeom prst="rect">
+            <a:avLst/>
+          </a:prstGeom>
+          <a:solidFill>
+            <a:srgbClr val="FFFFFF"/>
+          </a:solidFill>
+          <a:ln>
+            <a:noFill/>
+          </a:ln>
+        </p:spPr>
+        <p:txBody>
+          <a:bodyPr wrap="none" lIns="25400" rIns="25400" tIns="0" bIns="0">
+            <a:spAutoFit/>
+          </a:bodyPr>
+          <a:lstStyle/>
+          <a:p>
+            <a:pPr algn="l"/>
+            <a:r>
+              <a:rPr sz="850" b="1" i="0">
+                <a:solidFill>
+                  <a:srgbClr val="154FC2"/>
+                </a:solidFill>
+              </a:rPr>
+              <a:t>memcpy value_bytes from staging; populate L2; populate TLS L1; return</a:t>
+            </a:r>
+          </a:p>
+        </p:txBody>
+      </p:sp>
+      <p:sp>
+        <p:nvSpPr>
+          <p:cNvPr id="61" name="Rounded Rectangle 60"/>
+          <p:cNvSpPr/>
+          <p:nvPr/>
+        </p:nvSpPr>
+        <p:spPr>
+          <a:xfrm>
+            <a:off x="274320" y="6355080"/>
+            <a:ext cx="7772400" cy="365760"/>
+          </a:xfrm>
+          <a:prstGeom prst="roundRect">
+            <a:avLst/>
+          </a:prstGeom>
+          <a:solidFill>
+            <a:srgbClr val="FFFFFF"/>
+          </a:solidFill>
+          <a:ln w="7620">
+            <a:solidFill>
+              <a:srgbClr val="9E9E9E"/>
+            </a:solidFill>
+          </a:ln>
+        </p:spPr>
+        <p:style>
+          <a:lnRef idx="1">
+            <a:schemeClr val="accent1"/>
+          </a:lnRef>
+          <a:fillRef idx="3">
+            <a:schemeClr val="accent1"/>
+          </a:fillRef>
+          <a:effectRef idx="2">
+            <a:schemeClr val="accent1"/>
+          </a:effectRef>
+          <a:fontRef idx="minor">
+            <a:schemeClr val="lt1"/>
+          </a:fontRef>
+        </p:style>
+        <p:txBody>
+          <a:bodyPr rtlCol="0" anchor="ctr"/>
+          <a:lstStyle/>
+          <a:p>
+            <a:pPr algn="ctr"/>
+          </a:p>
+        </p:txBody>
+      </p:sp>
+      <p:sp>
+        <p:nvSpPr>
+          <p:cNvPr id="62" name="TextBox 61"/>
+          <p:cNvSpPr txBox="1"/>
+          <p:nvPr/>
+        </p:nvSpPr>
+        <p:spPr>
+          <a:xfrm>
+            <a:off x="365760" y="6391656"/>
+            <a:ext cx="1828800" cy="292608"/>
+          </a:xfrm>
+          <a:prstGeom prst="rect">
+            <a:avLst/>
+          </a:prstGeom>
+          <a:noFill/>
+        </p:spPr>
+        <p:txBody>
+          <a:bodyPr wrap="none" lIns="25400" rIns="25400" tIns="0" bIns="0">
+            <a:spAutoFit/>
+          </a:bodyPr>
+          <a:lstStyle/>
+          <a:p>
+            <a:pPr algn="l"/>
+            <a:r>
+              <a:rPr sz="900" b="1">
+                <a:solidFill>
+                  <a:srgbClr val="154FC2"/>
+                </a:solidFill>
+              </a:rPr>
+              <a:t>—▶  Step arrow</a:t>
+            </a:r>
+          </a:p>
+        </p:txBody>
+      </p:sp>
+      <p:sp>
+        <p:nvSpPr>
+          <p:cNvPr id="63" name="TextBox 62"/>
+          <p:cNvSpPr txBox="1"/>
+          <p:nvPr/>
+        </p:nvSpPr>
+        <p:spPr>
+          <a:xfrm>
+            <a:off x="2240279" y="6391656"/>
+            <a:ext cx="1828800" cy="292608"/>
+          </a:xfrm>
+          <a:prstGeom prst="rect">
+            <a:avLst/>
+          </a:prstGeom>
+          <a:noFill/>
+        </p:spPr>
+        <p:txBody>
+          <a:bodyPr wrap="none" lIns="25400" rIns="25400" tIns="0" bIns="0">
+            <a:spAutoFit/>
+          </a:bodyPr>
+          <a:lstStyle/>
+          <a:p>
+            <a:pPr algn="l"/>
+            <a:r>
+              <a:rPr sz="900" b="1">
+                <a:solidFill>
+                  <a:srgbClr val="F9A825"/>
+                </a:solidFill>
+              </a:rPr>
+              <a:t>● Linearization checkpoint</a:t>
+            </a:r>
+          </a:p>
+        </p:txBody>
+      </p:sp>
+      <p:sp>
+        <p:nvSpPr>
+          <p:cNvPr id="64" name="TextBox 63"/>
+          <p:cNvSpPr txBox="1"/>
+          <p:nvPr/>
+        </p:nvSpPr>
+        <p:spPr>
+          <a:xfrm>
+            <a:off x="4114800" y="6391656"/>
+            <a:ext cx="1828800" cy="292608"/>
+          </a:xfrm>
+          <a:prstGeom prst="rect">
+            <a:avLst/>
+          </a:prstGeom>
+          <a:noFill/>
+        </p:spPr>
+        <p:txBody>
+          <a:bodyPr wrap="none" lIns="25400" rIns="25400" tIns="0" bIns="0">
+            <a:spAutoFit/>
+          </a:bodyPr>
+          <a:lstStyle/>
+          <a:p>
+            <a:pPr algn="l"/>
+            <a:r>
+              <a:rPr sz="900" b="1">
+                <a:solidFill>
+                  <a:srgbClr val="C62828"/>
+                </a:solidFill>
+              </a:rPr>
+              <a:t>● Cross-host blocking</a:t>
+            </a:r>
+          </a:p>
+        </p:txBody>
+      </p:sp>
+      <p:sp>
+        <p:nvSpPr>
+          <p:cNvPr id="65" name="TextBox 64"/>
+          <p:cNvSpPr txBox="1"/>
+          <p:nvPr/>
+        </p:nvSpPr>
+        <p:spPr>
+          <a:xfrm>
+            <a:off x="5989320" y="6391656"/>
+            <a:ext cx="1828800" cy="292608"/>
+          </a:xfrm>
+          <a:prstGeom prst="rect">
+            <a:avLst/>
+          </a:prstGeom>
+          <a:noFill/>
+        </p:spPr>
+        <p:txBody>
+          <a:bodyPr wrap="none" lIns="25400" rIns="25400" tIns="0" bIns="0">
+            <a:spAutoFit/>
+          </a:bodyPr>
+          <a:lstStyle/>
+          <a:p>
+            <a:pPr algn="l"/>
+            <a:r>
+              <a:rPr sz="900" b="1">
+                <a:solidFill>
+                  <a:srgbClr val="C62828"/>
+                </a:solidFill>
+              </a:rPr>
+              <a:t>▌ blocked lifeline</a:t>
+            </a:r>
+          </a:p>
+        </p:txBody>
+      </p:sp>
+      <p:sp>
+        <p:nvSpPr>
+          <p:cNvPr id="66" name="TextBox 65"/>
+          <p:cNvSpPr txBox="1"/>
+          <p:nvPr/>
+        </p:nvSpPr>
+        <p:spPr>
+          <a:xfrm>
+            <a:off x="8229600" y="6355080"/>
+            <a:ext cx="3840480" cy="365760"/>
+          </a:xfrm>
+          <a:prstGeom prst="rect">
+            <a:avLst/>
+          </a:prstGeom>
+          <a:noFill/>
+        </p:spPr>
+        <p:txBody>
+          <a:bodyPr wrap="none" tIns="38100">
+            <a:spAutoFit/>
+          </a:bodyPr>
+          <a:lstStyle/>
+          <a:p>
+            <a:pPr algn="r"/>
+            <a:r>
+              <a:rPr sz="1100" b="1">
+                <a:solidFill>
+                  <a:srgbClr val="0D327D"/>
+                </a:solidFill>
+              </a:rPr>
+              <a:t>16 steps · 4 actors · 1 blocking point</a:t>
+            </a:r>
+          </a:p>
+        </p:txBody>
+      </p:sp>
+    </p:spTree>
+  </p:cSld>
+  <p:clrMapOvr>
+    <a:masterClrMapping/>
+  </p:clrMapOvr>
+</p:sld>
+</file>
+
+<file path=ppt/slides/slide5.xml><?xml version="1.0" encoding="utf-8"?>
+<p:sld xmlns:a="http://schemas.openxmlformats.org/drawingml/2006/main" xmlns:p="http://schemas.openxmlformats.org/presentationml/2006/main" xmlns:r="http://schemas.openxmlformats.org/officeDocument/2006/relationships">
+  <p:cSld>
+    <p:spTree>
+      <p:nvGrpSpPr>
+        <p:cNvPr id="1" name=""/>
+        <p:cNvGrpSpPr/>
+        <p:nvPr/>
+      </p:nvGrpSpPr>
+      <p:grpSpPr/>
+      <p:sp>
+        <p:nvSpPr>
+          <p:cNvPr id="2" name="TextBox 1"/>
+          <p:cNvSpPr txBox="1"/>
+          <p:nvPr/>
+        </p:nvSpPr>
+        <p:spPr>
+          <a:xfrm>
+            <a:off x="274320" y="91440"/>
+            <a:ext cx="11704320" cy="502920"/>
+          </a:xfrm>
+          <a:prstGeom prst="rect">
+            <a:avLst/>
+          </a:prstGeom>
+          <a:noFill/>
+        </p:spPr>
+        <p:txBody>
+          <a:bodyPr wrap="none" tIns="0" bIns="0">
+            <a:spAutoFit/>
+          </a:bodyPr>
+          <a:lstStyle/>
+          <a:p>
+            <a:r>
+              <a:rPr sz="2200" b="1">
+                <a:solidFill>
+                  <a:srgbClr val="E65100"/>
+                </a:solidFill>
+              </a:rPr>
+              <a:t>Protocol C — Read path: 1 epoch load + 1 flush + scan  (LRC read-singleshot)</a:t>
+            </a:r>
+          </a:p>
+        </p:txBody>
+      </p:sp>
+      <p:sp>
+        <p:nvSpPr>
+          <p:cNvPr id="3" name="TextBox 2"/>
+          <p:cNvSpPr txBox="1"/>
+          <p:nvPr/>
+        </p:nvSpPr>
+        <p:spPr>
+          <a:xfrm>
+            <a:off x="274320" y="566928"/>
+            <a:ext cx="11704320" cy="292608"/>
+          </a:xfrm>
+          <a:prstGeom prst="rect">
+            <a:avLst/>
+          </a:prstGeom>
+          <a:noFill/>
+        </p:spPr>
+        <p:txBody>
+          <a:bodyPr wrap="none" tIns="0" bIns="0">
+            <a:spAutoFit/>
+          </a:bodyPr>
+          <a:lstStyle/>
+          <a:p>
+            <a:r>
+              <a:rPr sz="1100" i="1">
+                <a:solidFill>
+                  <a:srgbClr val="9E9E9E"/>
+                </a:solidFill>
+              </a:rPr>
+              <a:t>4 numbered steps · 1 actor · 0 cross-host blocking · no seqlock revalidation (LRC: value is committed at SOME instant during scan)</a:t>
+            </a:r>
+          </a:p>
+        </p:txBody>
+      </p:sp>
+      <p:sp>
+        <p:nvSpPr>
+          <p:cNvPr id="4" name="Rounded Rectangle 3"/>
+          <p:cNvSpPr/>
+          <p:nvPr/>
+        </p:nvSpPr>
+        <p:spPr>
+          <a:xfrm>
+            <a:off x="731519" y="1188720"/>
+            <a:ext cx="2926080" cy="411480"/>
+          </a:xfrm>
+          <a:prstGeom prst="roundRect">
+            <a:avLst/>
+          </a:prstGeom>
+          <a:solidFill>
+            <a:srgbClr val="E3F2FD"/>
+          </a:solidFill>
+          <a:ln w="15875">
+            <a:solidFill>
+              <a:srgbClr val="1565C0"/>
+            </a:solidFill>
+          </a:ln>
+        </p:spPr>
+        <p:style>
+          <a:lnRef idx="1">
+            <a:schemeClr val="accent1"/>
+          </a:lnRef>
+          <a:fillRef idx="3">
+            <a:schemeClr val="accent1"/>
+          </a:fillRef>
+          <a:effectRef idx="2">
+            <a:schemeClr val="accent1"/>
+          </a:effectRef>
+          <a:fontRef idx="minor">
+            <a:schemeClr val="lt1"/>
+          </a:fontRef>
+        </p:style>
+        <p:txBody>
+          <a:bodyPr rtlCol="0" anchor="ctr" lIns="38100" rIns="38100" tIns="25400" bIns="25400" wrap="square"/>
+          <a:lstStyle/>
+          <a:p>
+            <a:pPr algn="ctr"/>
+            <a:r>
+              <a:rPr sz="1000" b="1">
+                <a:solidFill>
+                  <a:srgbClr val="1565C0"/>
+                </a:solidFill>
+              </a:rPr>
+              <a:t>host 0  worker (caller)</a:t>
+            </a:r>
+          </a:p>
+        </p:txBody>
+      </p:sp>
+      <p:cxnSp>
+        <p:nvCxnSpPr>
+          <p:cNvPr id="5" name="Connector 4"/>
+          <p:cNvCxnSpPr/>
+          <p:nvPr/>
+        </p:nvCxnSpPr>
+        <p:spPr>
+          <a:xfrm>
+            <a:off x="2194560" y="1600200"/>
+            <a:ext cx="0" cy="4389120"/>
+          </a:xfrm>
+          <a:prstGeom prst="line">
+            <a:avLst/>
+          </a:prstGeom>
+          <a:ln w="7620">
+            <a:solidFill>
+              <a:srgbClr val="9E9E9E"/>
+            </a:solidFill>
+            <a:prstDash val="dash"/>
+          </a:ln>
+        </p:spPr>
+        <p:style>
+          <a:lnRef idx="2">
+            <a:schemeClr val="accent1"/>
+          </a:lnRef>
+          <a:fillRef idx="0">
+            <a:schemeClr val="accent1"/>
+          </a:fillRef>
+          <a:effectRef idx="1">
+            <a:schemeClr val="accent1"/>
+          </a:effectRef>
+          <a:fontRef idx="minor">
+            <a:schemeClr val="tx1"/>
+          </a:fontRef>
+        </p:style>
+      </p:cxnSp>
+      <p:sp>
+        <p:nvSpPr>
+          <p:cNvPr id="6" name="Rounded Rectangle 5"/>
+          <p:cNvSpPr/>
+          <p:nvPr/>
+        </p:nvSpPr>
+        <p:spPr>
+          <a:xfrm>
+            <a:off x="5943600" y="1188720"/>
+            <a:ext cx="5852160" cy="411480"/>
+          </a:xfrm>
+          <a:prstGeom prst="roundRect">
+            <a:avLst/>
+          </a:prstGeom>
+          <a:solidFill>
+            <a:srgbClr val="FFF3E0"/>
+          </a:solidFill>
+          <a:ln w="15875">
+            <a:solidFill>
+              <a:srgbClr val="E65100"/>
+            </a:solidFill>
+          </a:ln>
+        </p:spPr>
+        <p:style>
+          <a:lnRef idx="1">
+            <a:schemeClr val="accent1"/>
+          </a:lnRef>
+          <a:fillRef idx="3">
+            <a:schemeClr val="accent1"/>
+          </a:fillRef>
+          <a:effectRef idx="2">
+            <a:schemeClr val="accent1"/>
+          </a:effectRef>
+          <a:fontRef idx="minor">
+            <a:schemeClr val="lt1"/>
+          </a:fontRef>
+        </p:style>
+        <p:txBody>
+          <a:bodyPr rtlCol="0" anchor="ctr" lIns="38100" rIns="38100" tIns="25400" bIns="25400" wrap="square"/>
+          <a:lstStyle/>
+          <a:p>
+            <a:pPr algn="ctr"/>
+            <a:r>
+              <a:rPr sz="1100" b="1">
+                <a:solidFill>
+                  <a:srgbClr val="8C3200"/>
+                </a:solidFill>
+              </a:rPr>
+              <a:t>CXL state read on the search path</a:t>
+            </a:r>
+          </a:p>
+        </p:txBody>
+      </p:sp>
+      <p:sp>
+        <p:nvSpPr>
+          <p:cNvPr id="7" name="Rounded Rectangle 6"/>
+          <p:cNvSpPr/>
+          <p:nvPr/>
+        </p:nvSpPr>
+        <p:spPr>
+          <a:xfrm>
+            <a:off x="6126480" y="1920240"/>
+            <a:ext cx="5486400" cy="502920"/>
+          </a:xfrm>
+          <a:prstGeom prst="roundRect">
+            <a:avLst/>
+          </a:prstGeom>
+          <a:solidFill>
+            <a:srgbClr val="C8DAFB"/>
+          </a:solidFill>
+          <a:ln w="15875">
+            <a:solidFill>
+              <a:srgbClr val="154FC2"/>
+            </a:solidFill>
+          </a:ln>
+        </p:spPr>
+        <p:style>
+          <a:lnRef idx="1">
+            <a:schemeClr val="accent1"/>
+          </a:lnRef>
+          <a:fillRef idx="3">
+            <a:schemeClr val="accent1"/>
+          </a:fillRef>
+          <a:effectRef idx="2">
+            <a:schemeClr val="accent1"/>
+          </a:effectRef>
+          <a:fontRef idx="minor">
+            <a:schemeClr val="lt1"/>
+          </a:fontRef>
+        </p:style>
+        <p:txBody>
+          <a:bodyPr rtlCol="0" anchor="ctr" lIns="38100" rIns="38100" tIns="25400" bIns="25400" wrap="square"/>
+          <a:lstStyle/>
+          <a:p>
+            <a:pPr algn="ctr"/>
+            <a:r>
+              <a:rPr sz="1000" b="1">
+                <a:solidFill>
+                  <a:srgbClr val="0D327D"/>
+                </a:solidFill>
+              </a:rPr>
+              <a:t>BucketLockEntry.write_epoch (cacheline_u64) — read seqlock tag</a:t>
+            </a:r>
+          </a:p>
+        </p:txBody>
+      </p:sp>
+      <p:sp>
+        <p:nvSpPr>
+          <p:cNvPr id="8" name="Rounded Rectangle 7"/>
+          <p:cNvSpPr/>
+          <p:nvPr/>
+        </p:nvSpPr>
+        <p:spPr>
+          <a:xfrm>
+            <a:off x="6126480" y="2606040"/>
+            <a:ext cx="5486400" cy="502920"/>
+          </a:xfrm>
+          <a:prstGeom prst="roundRect">
+            <a:avLst/>
+          </a:prstGeom>
+          <a:solidFill>
+            <a:srgbClr val="C8DAFB"/>
+          </a:solidFill>
+          <a:ln w="15875">
+            <a:solidFill>
+              <a:srgbClr val="154FC2"/>
+            </a:solidFill>
+          </a:ln>
+        </p:spPr>
+        <p:style>
+          <a:lnRef idx="1">
+            <a:schemeClr val="accent1"/>
+          </a:lnRef>
+          <a:fillRef idx="3">
+            <a:schemeClr val="accent1"/>
+          </a:fillRef>
+          <a:effectRef idx="2">
+            <a:schemeClr val="accent1"/>
+          </a:effectRef>
+          <a:fontRef idx="minor">
+            <a:schemeClr val="lt1"/>
+          </a:fontRef>
+        </p:style>
+        <p:txBody>
+          <a:bodyPr rtlCol="0" anchor="ctr" lIns="38100" rIns="38100" tIns="25400" bIns="25400" wrap="square"/>
+          <a:lstStyle/>
+          <a:p>
+            <a:pPr algn="ctr"/>
+            <a:r>
+              <a:rPr sz="1000" b="1">
+                <a:solidFill>
+                  <a:srgbClr val="0D327D"/>
+                </a:solidFill>
+              </a:rPr>
+              <a:t>CxlKvBucket  •  flush 2 cachelines, scan 7 slots in L1</a:t>
+            </a:r>
+          </a:p>
+        </p:txBody>
+      </p:sp>
+      <p:sp>
+        <p:nvSpPr>
+          <p:cNvPr id="9" name="Rounded Rectangle 8"/>
+          <p:cNvSpPr/>
+          <p:nvPr/>
+        </p:nvSpPr>
+        <p:spPr>
+          <a:xfrm>
+            <a:off x="6126480" y="3291840"/>
+            <a:ext cx="5486400" cy="502920"/>
+          </a:xfrm>
+          <a:prstGeom prst="roundRect">
+            <a:avLst/>
+          </a:prstGeom>
+          <a:solidFill>
+            <a:srgbClr val="FFE0B2"/>
+          </a:solidFill>
+          <a:ln w="15875">
+            <a:solidFill>
+              <a:srgbClr val="E65100"/>
+            </a:solidFill>
+          </a:ln>
+        </p:spPr>
+        <p:style>
+          <a:lnRef idx="1">
+            <a:schemeClr val="accent1"/>
+          </a:lnRef>
+          <a:fillRef idx="3">
+            <a:schemeClr val="accent1"/>
+          </a:fillRef>
+          <a:effectRef idx="2">
+            <a:schemeClr val="accent1"/>
+          </a:effectRef>
+          <a:fontRef idx="minor">
+            <a:schemeClr val="lt1"/>
+          </a:fontRef>
+        </p:style>
+        <p:txBody>
+          <a:bodyPr rtlCol="0" anchor="ctr" lIns="38100" rIns="38100" tIns="25400" bIns="25400" wrap="square"/>
+          <a:lstStyle/>
+          <a:p>
+            <a:pPr algn="ctr"/>
+            <a:r>
+              <a:rPr sz="1000" b="1">
+                <a:solidFill>
+                  <a:srgbClr val="8C3200"/>
+                </a:solidFill>
+              </a:rPr>
+              <a:t>DRAM bucket cache (optional, per-process)  •  cache_buckets_[idx], cache_epoch_[idx]</a:t>
+            </a:r>
+          </a:p>
+        </p:txBody>
+      </p:sp>
+      <p:sp>
+        <p:nvSpPr>
+          <p:cNvPr id="10" name="Oval 9"/>
+          <p:cNvSpPr/>
+          <p:nvPr/>
+        </p:nvSpPr>
+        <p:spPr>
+          <a:xfrm>
+            <a:off x="2048255" y="2048255"/>
+            <a:ext cx="292608" cy="292608"/>
+          </a:xfrm>
+          <a:prstGeom prst="ellipse">
+            <a:avLst/>
+          </a:prstGeom>
+          <a:solidFill>
+            <a:srgbClr val="FFFFFF"/>
+          </a:solidFill>
+          <a:ln w="19050">
+            <a:solidFill>
+              <a:srgbClr val="E65100"/>
+            </a:solidFill>
+          </a:ln>
+        </p:spPr>
+        <p:style>
+          <a:lnRef idx="1">
+            <a:schemeClr val="accent1"/>
+          </a:lnRef>
+          <a:fillRef idx="3">
+            <a:schemeClr val="accent1"/>
+          </a:fillRef>
+          <a:effectRef idx="2">
+            <a:schemeClr val="accent1"/>
+          </a:effectRef>
+          <a:fontRef idx="minor">
+            <a:schemeClr val="lt1"/>
+          </a:fontRef>
+        </p:style>
+        <p:txBody>
+          <a:bodyPr rtlCol="0" anchor="ctr" lIns="0" rIns="0" tIns="0" bIns="0"/>
+          <a:lstStyle/>
+          <a:p>
+            <a:pPr algn="ctr"/>
+            <a:r>
+              <a:rPr sz="800" b="1">
+                <a:solidFill>
+                  <a:srgbClr val="E65100"/>
+                </a:solidFill>
+              </a:rPr>
+              <a:t>C1r</a:t>
+            </a:r>
+          </a:p>
+        </p:txBody>
+      </p:sp>
+      <p:sp>
+        <p:nvSpPr>
+          <p:cNvPr id="11" name="TextBox 10"/>
+          <p:cNvSpPr txBox="1"/>
+          <p:nvPr/>
+        </p:nvSpPr>
+        <p:spPr>
+          <a:xfrm>
+            <a:off x="2377440" y="2103120"/>
+            <a:ext cx="2743200" cy="219456"/>
+          </a:xfrm>
+          <a:prstGeom prst="rect">
+            <a:avLst/>
+          </a:prstGeom>
+          <a:solidFill>
+            <a:srgbClr val="FFFFFF"/>
+          </a:solidFill>
+          <a:ln>
+            <a:noFill/>
+          </a:ln>
+        </p:spPr>
+        <p:txBody>
+          <a:bodyPr wrap="none" lIns="25400" rIns="25400" tIns="0" bIns="0">
+            <a:spAutoFit/>
+          </a:bodyPr>
+          <a:lstStyle/>
+          <a:p>
+            <a:pPr algn="l"/>
+            <a:r>
+              <a:rPr sz="850" b="1" i="0">
+                <a:solidFill>
+                  <a:srgbClr val="E65100"/>
+                </a:solidFill>
+              </a:rPr>
+              <a:t>bucket_idx = fnv1a_u64(K) % B; entry = lock_table_.entry(idx)</a:t>
+            </a:r>
+          </a:p>
+        </p:txBody>
+      </p:sp>
+      <p:cxnSp>
+        <p:nvCxnSpPr>
+          <p:cNvPr id="12" name="Connector 11"/>
+          <p:cNvCxnSpPr/>
+          <p:nvPr/>
+        </p:nvCxnSpPr>
+        <p:spPr>
+          <a:xfrm>
+            <a:off x="2194560" y="2697480"/>
+            <a:ext cx="3931920" cy="0"/>
+          </a:xfrm>
+          <a:prstGeom prst="line">
+            <a:avLst/>
+          </a:prstGeom>
+          <a:ln w="20320">
+            <a:solidFill>
+              <a:srgbClr val="E65100"/>
+            </a:solidFill>
+            <a:tailEnd type="triangle" w="med" h="med"/>
+            <a:prstDash val="dash"/>
+          </a:ln>
+        </p:spPr>
+        <p:style>
+          <a:lnRef idx="2">
+            <a:schemeClr val="accent1"/>
+          </a:lnRef>
+          <a:fillRef idx="0">
+            <a:schemeClr val="accent1"/>
+          </a:fillRef>
+          <a:effectRef idx="1">
+            <a:schemeClr val="accent1"/>
+          </a:effectRef>
+          <a:fontRef idx="minor">
+            <a:schemeClr val="tx1"/>
+          </a:fontRef>
+        </p:style>
+      </p:cxnSp>
+      <p:sp>
+        <p:nvSpPr>
+          <p:cNvPr id="13" name="Oval 12"/>
+          <p:cNvSpPr/>
+          <p:nvPr/>
+        </p:nvSpPr>
+        <p:spPr>
+          <a:xfrm>
+            <a:off x="4014215" y="2551176"/>
+            <a:ext cx="292608" cy="292608"/>
+          </a:xfrm>
+          <a:prstGeom prst="ellipse">
+            <a:avLst/>
+          </a:prstGeom>
+          <a:solidFill>
+            <a:srgbClr val="FFF49C"/>
+          </a:solidFill>
+          <a:ln w="19050">
+            <a:solidFill>
+              <a:srgbClr val="F9A825"/>
+            </a:solidFill>
+          </a:ln>
+        </p:spPr>
+        <p:style>
+          <a:lnRef idx="1">
+            <a:schemeClr val="accent1"/>
+          </a:lnRef>
+          <a:fillRef idx="3">
+            <a:schemeClr val="accent1"/>
+          </a:fillRef>
+          <a:effectRef idx="2">
+            <a:schemeClr val="accent1"/>
+          </a:effectRef>
+          <a:fontRef idx="minor">
+            <a:schemeClr val="lt1"/>
+          </a:fontRef>
+        </p:style>
+        <p:txBody>
+          <a:bodyPr rtlCol="0" anchor="ctr" lIns="0" rIns="0" tIns="0" bIns="0"/>
+          <a:lstStyle/>
+          <a:p>
+            <a:pPr algn="ctr"/>
+            <a:r>
+              <a:rPr sz="800" b="1">
+                <a:solidFill>
+                  <a:srgbClr val="333333"/>
+                </a:solidFill>
+              </a:rPr>
+              <a:t>C2r</a:t>
+            </a:r>
+          </a:p>
+        </p:txBody>
+      </p:sp>
+      <p:sp>
+        <p:nvSpPr>
+          <p:cNvPr id="14" name="TextBox 13"/>
+          <p:cNvSpPr txBox="1"/>
+          <p:nvPr/>
+        </p:nvSpPr>
+        <p:spPr>
+          <a:xfrm>
+            <a:off x="2697479" y="2441448"/>
+            <a:ext cx="2926080" cy="219456"/>
+          </a:xfrm>
+          <a:prstGeom prst="rect">
+            <a:avLst/>
+          </a:prstGeom>
+          <a:solidFill>
+            <a:srgbClr val="FFFFFF"/>
+          </a:solidFill>
+          <a:ln>
+            <a:noFill/>
+          </a:ln>
+        </p:spPr>
+        <p:txBody>
+          <a:bodyPr wrap="none" lIns="25400" rIns="25400" tIns="0" bIns="0">
+            <a:spAutoFit/>
+          </a:bodyPr>
+          <a:lstStyle/>
+          <a:p>
+            <a:pPr algn="l"/>
+            <a:r>
+              <a:rPr sz="850" b="1" i="0">
+                <a:solidFill>
+                  <a:srgbClr val="E65100"/>
+                </a:solidFill>
+              </a:rPr>
+              <a:t>load CXL write_epoch  (1 LD-CXL cacheline)  ★ if == cached_epoch_[idx]: scan DRAM copy + return ★</a:t>
+            </a:r>
+          </a:p>
+        </p:txBody>
+      </p:sp>
+      <p:cxnSp>
+        <p:nvCxnSpPr>
+          <p:cNvPr id="15" name="Connector 14"/>
+          <p:cNvCxnSpPr/>
+          <p:nvPr/>
+        </p:nvCxnSpPr>
+        <p:spPr>
+          <a:xfrm>
+            <a:off x="2194560" y="3200400"/>
+            <a:ext cx="3931920" cy="0"/>
+          </a:xfrm>
+          <a:prstGeom prst="line">
+            <a:avLst/>
+          </a:prstGeom>
+          <a:ln w="20320">
+            <a:solidFill>
+              <a:srgbClr val="E65100"/>
+            </a:solidFill>
+            <a:tailEnd type="triangle" w="med" h="med"/>
+            <a:prstDash val="dash"/>
+          </a:ln>
+        </p:spPr>
+        <p:style>
+          <a:lnRef idx="2">
+            <a:schemeClr val="accent1"/>
+          </a:lnRef>
+          <a:fillRef idx="0">
+            <a:schemeClr val="accent1"/>
+          </a:fillRef>
+          <a:effectRef idx="1">
+            <a:schemeClr val="accent1"/>
+          </a:effectRef>
+          <a:fontRef idx="minor">
+            <a:schemeClr val="tx1"/>
+          </a:fontRef>
+        </p:style>
+      </p:cxnSp>
+      <p:sp>
+        <p:nvSpPr>
+          <p:cNvPr id="16" name="Oval 15"/>
+          <p:cNvSpPr/>
+          <p:nvPr/>
+        </p:nvSpPr>
+        <p:spPr>
+          <a:xfrm>
+            <a:off x="4014215" y="3054096"/>
+            <a:ext cx="292608" cy="292608"/>
+          </a:xfrm>
+          <a:prstGeom prst="ellipse">
+            <a:avLst/>
+          </a:prstGeom>
+          <a:solidFill>
+            <a:srgbClr val="FFFFFF"/>
+          </a:solidFill>
+          <a:ln w="19050">
+            <a:solidFill>
+              <a:srgbClr val="E65100"/>
+            </a:solidFill>
+          </a:ln>
+        </p:spPr>
+        <p:style>
+          <a:lnRef idx="1">
+            <a:schemeClr val="accent1"/>
+          </a:lnRef>
+          <a:fillRef idx="3">
+            <a:schemeClr val="accent1"/>
+          </a:fillRef>
+          <a:effectRef idx="2">
+            <a:schemeClr val="accent1"/>
+          </a:effectRef>
+          <a:fontRef idx="minor">
+            <a:schemeClr val="lt1"/>
+          </a:fontRef>
+        </p:style>
+        <p:txBody>
+          <a:bodyPr rtlCol="0" anchor="ctr" lIns="0" rIns="0" tIns="0" bIns="0"/>
+          <a:lstStyle/>
+          <a:p>
+            <a:pPr algn="ctr"/>
+            <a:r>
+              <a:rPr sz="800" b="1">
+                <a:solidFill>
+                  <a:srgbClr val="E65100"/>
+                </a:solidFill>
+              </a:rPr>
+              <a:t>C3r</a:t>
+            </a:r>
+          </a:p>
+        </p:txBody>
+      </p:sp>
+      <p:sp>
+        <p:nvSpPr>
+          <p:cNvPr id="17" name="TextBox 16"/>
+          <p:cNvSpPr txBox="1"/>
+          <p:nvPr/>
+        </p:nvSpPr>
+        <p:spPr>
+          <a:xfrm>
+            <a:off x="2697479" y="2944368"/>
+            <a:ext cx="2926080" cy="219456"/>
+          </a:xfrm>
+          <a:prstGeom prst="rect">
+            <a:avLst/>
+          </a:prstGeom>
+          <a:solidFill>
+            <a:srgbClr val="FFFFFF"/>
+          </a:solidFill>
+          <a:ln>
+            <a:noFill/>
+          </a:ln>
+        </p:spPr>
+        <p:txBody>
+          <a:bodyPr wrap="none" lIns="25400" rIns="25400" tIns="0" bIns="0">
+            <a:spAutoFit/>
+          </a:bodyPr>
+          <a:lstStyle/>
+          <a:p>
+            <a:pPr algn="l"/>
+            <a:r>
+              <a:rPr sz="850" b="1" i="0">
+                <a:solidFill>
+                  <a:srgbClr val="E65100"/>
+                </a:solidFill>
+              </a:rPr>
+              <a:t>cache miss / cache disabled: flush_line(slots[0]) + flush_line(slots[4]) + mfence</a:t>
+            </a:r>
+          </a:p>
+        </p:txBody>
+      </p:sp>
+      <p:sp>
+        <p:nvSpPr>
+          <p:cNvPr id="18" name="Oval 17"/>
+          <p:cNvSpPr/>
+          <p:nvPr/>
+        </p:nvSpPr>
+        <p:spPr>
+          <a:xfrm>
+            <a:off x="2048255" y="3557015"/>
+            <a:ext cx="292608" cy="292608"/>
+          </a:xfrm>
+          <a:prstGeom prst="ellipse">
+            <a:avLst/>
+          </a:prstGeom>
+          <a:solidFill>
+            <a:srgbClr val="FFF49C"/>
+          </a:solidFill>
+          <a:ln w="19050">
+            <a:solidFill>
+              <a:srgbClr val="F9A825"/>
+            </a:solidFill>
+          </a:ln>
+        </p:spPr>
+        <p:style>
+          <a:lnRef idx="1">
+            <a:schemeClr val="accent1"/>
+          </a:lnRef>
+          <a:fillRef idx="3">
+            <a:schemeClr val="accent1"/>
+          </a:fillRef>
+          <a:effectRef idx="2">
+            <a:schemeClr val="accent1"/>
+          </a:effectRef>
+          <a:fontRef idx="minor">
+            <a:schemeClr val="lt1"/>
+          </a:fontRef>
+        </p:style>
+        <p:txBody>
+          <a:bodyPr rtlCol="0" anchor="ctr" lIns="0" rIns="0" tIns="0" bIns="0"/>
+          <a:lstStyle/>
+          <a:p>
+            <a:pPr algn="ctr"/>
+            <a:r>
+              <a:rPr sz="800" b="1">
+                <a:solidFill>
+                  <a:srgbClr val="333333"/>
+                </a:solidFill>
+              </a:rPr>
+              <a:t>C4r</a:t>
+            </a:r>
+          </a:p>
+        </p:txBody>
+      </p:sp>
+      <p:sp>
+        <p:nvSpPr>
+          <p:cNvPr id="19" name="TextBox 18"/>
+          <p:cNvSpPr txBox="1"/>
+          <p:nvPr/>
+        </p:nvSpPr>
+        <p:spPr>
+          <a:xfrm>
+            <a:off x="2377440" y="3611879"/>
+            <a:ext cx="2743200" cy="219456"/>
+          </a:xfrm>
+          <a:prstGeom prst="rect">
+            <a:avLst/>
+          </a:prstGeom>
+          <a:solidFill>
+            <a:srgbClr val="FFFFFF"/>
+          </a:solidFill>
+          <a:ln>
+            <a:noFill/>
+          </a:ln>
+        </p:spPr>
+        <p:txBody>
+          <a:bodyPr wrap="none" lIns="25400" rIns="25400" tIns="0" bIns="0">
+            <a:spAutoFit/>
+          </a:bodyPr>
+          <a:lstStyle/>
+          <a:p>
+            <a:pPr algn="l"/>
+            <a:r>
+              <a:rPr sz="850" b="1" i="0">
+                <a:solidFill>
+                  <a:srgbClr val="E65100"/>
+                </a:solidFill>
+              </a:rPr>
+              <a:t>scan 7 slots in L1 (now fresh from CXL); return value or -1   ★ NO post-scan revalidation (LRC) ★</a:t>
+            </a:r>
+          </a:p>
+        </p:txBody>
+      </p:sp>
+      <p:sp>
+        <p:nvSpPr>
+          <p:cNvPr id="20" name="Rounded Rectangle 19"/>
+          <p:cNvSpPr/>
+          <p:nvPr/>
+        </p:nvSpPr>
+        <p:spPr>
+          <a:xfrm>
+            <a:off x="274320" y="4937760"/>
+            <a:ext cx="5212080" cy="1280160"/>
+          </a:xfrm>
+          <a:prstGeom prst="roundRect">
+            <a:avLst/>
+          </a:prstGeom>
+          <a:solidFill>
+            <a:srgbClr val="EEEEEE"/>
+          </a:solidFill>
+          <a:ln w="7620">
+            <a:solidFill>
+              <a:srgbClr val="9E9E9E"/>
+            </a:solidFill>
+          </a:ln>
+        </p:spPr>
+        <p:style>
+          <a:lnRef idx="1">
+            <a:schemeClr val="accent1"/>
+          </a:lnRef>
+          <a:fillRef idx="3">
+            <a:schemeClr val="accent1"/>
+          </a:fillRef>
+          <a:effectRef idx="2">
+            <a:schemeClr val="accent1"/>
+          </a:effectRef>
+          <a:fontRef idx="minor">
+            <a:schemeClr val="lt1"/>
+          </a:fontRef>
+        </p:style>
+        <p:txBody>
+          <a:bodyPr rtlCol="0" anchor="ctr" lIns="101600" rIns="101600" tIns="63500" bIns="63500" wrap="square"/>
+          <a:lstStyle/>
+          <a:p>
+            <a:pPr algn="ctr"/>
+            <a:r>
+              <a:rPr sz="1100" b="1">
+                <a:solidFill>
+                  <a:srgbClr val="8C3200"/>
+                </a:solidFill>
+              </a:rPr>
+              <a:t>Key features of Protocol C read path:</a:t>
+            </a:r>
+          </a:p>
+          <a:p>
+            <a:r>
+              <a:rPr sz="1000">
+                <a:solidFill>
+                  <a:srgbClr val="333333"/>
+                </a:solidFill>
+              </a:rPr>
+              <a:t>• Reader takes NO lock — bucket lock only serializes writers</a:t>
+            </a:r>
+          </a:p>
+          <a:p>
+            <a:r>
+              <a:rPr sz="1000">
+                <a:solidFill>
+                  <a:srgbClr val="333333"/>
+                </a:solidFill>
+              </a:rPr>
+              <a:t>• Optional DRAM cache hit path: ~700 ns (1 CXL epoch load + DRAM scan)</a:t>
+            </a:r>
+          </a:p>
+          <a:p>
+            <a:r>
+              <a:rPr sz="1000">
+                <a:solidFill>
+                  <a:srgbClr val="333333"/>
+                </a:solidFill>
+              </a:rPr>
+              <a:t>• Cache-miss path: ~1 µs (2 flushes + mfence + L1 scan)</a:t>
+            </a:r>
+          </a:p>
+          <a:p>
+            <a:r>
+              <a:rPr sz="1000">
+                <a:solidFill>
+                  <a:srgbClr val="333333"/>
+                </a:solidFill>
+              </a:rPr>
+              <a:t>• LRC semantics: returned value committed at SOME instant during scan</a:t>
+            </a:r>
+          </a:p>
+        </p:txBody>
+      </p:sp>
+      <p:sp>
+        <p:nvSpPr>
+          <p:cNvPr id="21" name="Rounded Rectangle 20"/>
+          <p:cNvSpPr/>
+          <p:nvPr/>
+        </p:nvSpPr>
+        <p:spPr>
+          <a:xfrm>
+            <a:off x="274320" y="6355080"/>
+            <a:ext cx="7772400" cy="365760"/>
+          </a:xfrm>
+          <a:prstGeom prst="roundRect">
+            <a:avLst/>
+          </a:prstGeom>
+          <a:solidFill>
+            <a:srgbClr val="FFFFFF"/>
+          </a:solidFill>
+          <a:ln w="7620">
+            <a:solidFill>
+              <a:srgbClr val="9E9E9E"/>
+            </a:solidFill>
+          </a:ln>
+        </p:spPr>
+        <p:style>
+          <a:lnRef idx="1">
+            <a:schemeClr val="accent1"/>
+          </a:lnRef>
+          <a:fillRef idx="3">
+            <a:schemeClr val="accent1"/>
+          </a:fillRef>
+          <a:effectRef idx="2">
+            <a:schemeClr val="accent1"/>
+          </a:effectRef>
+          <a:fontRef idx="minor">
+            <a:schemeClr val="lt1"/>
+          </a:fontRef>
+        </p:style>
+        <p:txBody>
+          <a:bodyPr rtlCol="0" anchor="ctr"/>
+          <a:lstStyle/>
+          <a:p>
+            <a:pPr algn="ctr"/>
+          </a:p>
+        </p:txBody>
+      </p:sp>
+      <p:sp>
+        <p:nvSpPr>
+          <p:cNvPr id="22" name="TextBox 21"/>
+          <p:cNvSpPr txBox="1"/>
+          <p:nvPr/>
+        </p:nvSpPr>
+        <p:spPr>
+          <a:xfrm>
+            <a:off x="365760" y="6391656"/>
+            <a:ext cx="1828800" cy="292608"/>
+          </a:xfrm>
+          <a:prstGeom prst="rect">
+            <a:avLst/>
+          </a:prstGeom>
+          <a:noFill/>
+        </p:spPr>
+        <p:txBody>
+          <a:bodyPr wrap="none" lIns="25400" rIns="25400" tIns="0" bIns="0">
+            <a:spAutoFit/>
+          </a:bodyPr>
+          <a:lstStyle/>
+          <a:p>
+            <a:pPr algn="l"/>
+            <a:r>
+              <a:rPr sz="900" b="1">
+                <a:solidFill>
+                  <a:srgbClr val="E65100"/>
+                </a:solidFill>
+              </a:rPr>
+              <a:t>╌╌▶  Step arrow</a:t>
+            </a:r>
+          </a:p>
+        </p:txBody>
+      </p:sp>
+      <p:sp>
+        <p:nvSpPr>
+          <p:cNvPr id="23" name="TextBox 22"/>
+          <p:cNvSpPr txBox="1"/>
+          <p:nvPr/>
+        </p:nvSpPr>
+        <p:spPr>
+          <a:xfrm>
+            <a:off x="2240279" y="6391656"/>
+            <a:ext cx="1828800" cy="292608"/>
+          </a:xfrm>
+          <a:prstGeom prst="rect">
+            <a:avLst/>
+          </a:prstGeom>
+          <a:noFill/>
+        </p:spPr>
+        <p:txBody>
+          <a:bodyPr wrap="none" lIns="25400" rIns="25400" tIns="0" bIns="0">
+            <a:spAutoFit/>
+          </a:bodyPr>
+          <a:lstStyle/>
+          <a:p>
+            <a:pPr algn="l"/>
+            <a:r>
+              <a:rPr sz="900" b="1">
+                <a:solidFill>
+                  <a:srgbClr val="F9A825"/>
+                </a:solidFill>
+              </a:rPr>
+              <a:t>● Linearization checkpoint</a:t>
+            </a:r>
+          </a:p>
+        </p:txBody>
+      </p:sp>
+      <p:sp>
+        <p:nvSpPr>
+          <p:cNvPr id="24" name="TextBox 23"/>
+          <p:cNvSpPr txBox="1"/>
+          <p:nvPr/>
+        </p:nvSpPr>
+        <p:spPr>
+          <a:xfrm>
+            <a:off x="4114800" y="6391656"/>
+            <a:ext cx="1828800" cy="292608"/>
+          </a:xfrm>
+          <a:prstGeom prst="rect">
+            <a:avLst/>
+          </a:prstGeom>
+          <a:noFill/>
+        </p:spPr>
+        <p:txBody>
+          <a:bodyPr wrap="none" lIns="25400" rIns="25400" tIns="0" bIns="0">
+            <a:spAutoFit/>
+          </a:bodyPr>
+          <a:lstStyle/>
+          <a:p>
+            <a:pPr algn="l"/>
+            <a:r>
+              <a:rPr sz="900" b="1">
+                <a:solidFill>
+                  <a:srgbClr val="C62828"/>
+                </a:solidFill>
+              </a:rPr>
+              <a:t>● Cross-host blocking (none!)</a:t>
+            </a:r>
+          </a:p>
+        </p:txBody>
+      </p:sp>
+      <p:sp>
+        <p:nvSpPr>
+          <p:cNvPr id="25" name="TextBox 24"/>
+          <p:cNvSpPr txBox="1"/>
+          <p:nvPr/>
+        </p:nvSpPr>
+        <p:spPr>
+          <a:xfrm>
+            <a:off x="5989320" y="6391656"/>
+            <a:ext cx="1828800" cy="292608"/>
+          </a:xfrm>
+          <a:prstGeom prst="rect">
+            <a:avLst/>
+          </a:prstGeom>
+          <a:noFill/>
+        </p:spPr>
+        <p:txBody>
+          <a:bodyPr wrap="none" lIns="25400" rIns="25400" tIns="0" bIns="0">
+            <a:spAutoFit/>
+          </a:bodyPr>
+          <a:lstStyle/>
+          <a:p>
+            <a:pPr algn="l"/>
+            <a:r>
+              <a:rPr sz="900" b="1">
+                <a:solidFill>
+                  <a:srgbClr val="FFFFFF"/>
+                </a:solidFill>
+              </a:rPr>
+              <a:t>—</a:t>
+            </a:r>
+          </a:p>
+        </p:txBody>
+      </p:sp>
+      <p:sp>
+        <p:nvSpPr>
+          <p:cNvPr id="26" name="TextBox 25"/>
+          <p:cNvSpPr txBox="1"/>
+          <p:nvPr/>
+        </p:nvSpPr>
+        <p:spPr>
+          <a:xfrm>
+            <a:off x="8229600" y="6355080"/>
+            <a:ext cx="3840480" cy="365760"/>
+          </a:xfrm>
+          <a:prstGeom prst="rect">
+            <a:avLst/>
+          </a:prstGeom>
+          <a:noFill/>
+        </p:spPr>
+        <p:txBody>
+          <a:bodyPr wrap="none" tIns="38100">
+            <a:spAutoFit/>
+          </a:bodyPr>
+          <a:lstStyle/>
+          <a:p>
+            <a:pPr algn="r"/>
+            <a:r>
+              <a:rPr sz="1100" b="1">
+                <a:solidFill>
+                  <a:srgbClr val="8C3200"/>
+                </a:solidFill>
+              </a:rPr>
+              <a:t>4 steps · 1 actor · 0 blocking points</a:t>
+            </a:r>
+          </a:p>
+        </p:txBody>
+      </p:sp>
+    </p:spTree>
+  </p:cSld>
+  <p:clrMapOvr>
+    <a:masterClrMapping/>
+  </p:clrMapOvr>
+</p:sld>
+</file>
+
+<file path=ppt/slides/slide6.xml><?xml version="1.0" encoding="utf-8"?>
+<p:sld xmlns:a="http://schemas.openxmlformats.org/drawingml/2006/main" xmlns:p="http://schemas.openxmlformats.org/presentationml/2006/main" xmlns:r="http://schemas.openxmlformats.org/officeDocument/2006/relationships">
+  <p:cSld>
+    <p:spTree>
+      <p:nvGrpSpPr>
+        <p:cNvPr id="1" name=""/>
+        <p:cNvGrpSpPr/>
+        <p:nvPr/>
+      </p:nvGrpSpPr>
+      <p:grpSpPr/>
+      <p:sp>
+        <p:nvSpPr>
+          <p:cNvPr id="2" name="TextBox 1"/>
+          <p:cNvSpPr txBox="1"/>
+          <p:nvPr/>
+        </p:nvSpPr>
+        <p:spPr>
+          <a:xfrm>
+            <a:off x="274320" y="91440"/>
+            <a:ext cx="11704320" cy="502920"/>
+          </a:xfrm>
+          <a:prstGeom prst="rect">
+            <a:avLst/>
+          </a:prstGeom>
+          <a:noFill/>
+        </p:spPr>
+        <p:txBody>
+          <a:bodyPr wrap="none" tIns="0" bIns="0">
+            <a:spAutoFit/>
+          </a:bodyPr>
+          <a:lstStyle/>
+          <a:p>
+            <a:r>
+              <a:rPr sz="2200" b="1">
+                <a:solidFill>
+                  <a:srgbClr val="333333"/>
+                </a:solidFill>
+              </a:rPr>
+              <a:t>Write path — measured per-stage latency (T=64 workload-A)</a:t>
+            </a:r>
+          </a:p>
+        </p:txBody>
+      </p:sp>
+      <p:sp>
+        <p:nvSpPr>
+          <p:cNvPr id="3" name="TextBox 2"/>
+          <p:cNvSpPr txBox="1"/>
+          <p:nvPr/>
+        </p:nvSpPr>
+        <p:spPr>
+          <a:xfrm>
+            <a:off x="274320" y="566928"/>
+            <a:ext cx="11704320" cy="292608"/>
+          </a:xfrm>
+          <a:prstGeom prst="rect">
+            <a:avLst/>
+          </a:prstGeom>
+          <a:noFill/>
+        </p:spPr>
+        <p:txBody>
+          <a:bodyPr wrap="none" tIns="0" bIns="0">
+            <a:spAutoFit/>
+          </a:bodyPr>
+          <a:lstStyle/>
+          <a:p>
+            <a:r>
+              <a:rPr sz="1100" i="1">
                 <a:solidFill>
                   <a:srgbClr val="9E9E9E"/>
                 </a:solidFill>
@@ -10572,7 +14497,7 @@
           <a:bodyPr rtlCol="0" anchor="ctr" lIns="101600" rIns="101600" tIns="63500" bIns="63500" wrap="square"/>
           <a:lstStyle/>
           <a:p>
-            <a:pPr algn="l"/>
+            <a:pPr algn="ctr"/>
             <a:r>
               <a:rPr sz="1100" b="1">
                 <a:solidFill>
@@ -10589,8 +14514,7 @@
                   <a:srgbClr val="0D327D"/>
                 </a:solidFill>
               </a:rPr>
-              <a:t>
-  Protocol A (no remote sharer):   ~ 13 µs/op</a:t>
+              <a:t>  Protocol A (no remote sharer):    ~ 13 µs/op</a:t>
             </a:r>
           </a:p>
           <a:p>
@@ -10615,13 +14539,22 @@
           </a:p>
           <a:p>
             <a:r>
+              <a:rPr sz="1000">
+                <a:solidFill>
+                  <a:srgbClr val="333333"/>
+                </a:solidFill>
+              </a:rPr>
+              <a:t/>
+            </a:r>
+          </a:p>
+          <a:p>
+            <a:r>
               <a:rPr sz="1100" b="1">
                 <a:solidFill>
                   <a:srgbClr val="333333"/>
                 </a:solidFill>
               </a:rPr>
-              <a:t>
-Dominant stage shape:</a:t>
+              <a:t>Dominant stage shape:</a:t>
             </a:r>
           </a:p>
           <a:p>
@@ -10631,8 +14564,7 @@
                   <a:srgbClr val="333333"/>
                 </a:solidFill>
               </a:rPr>
-              <a:t>
-  A: spread across 12 stages (W10 = 6.2 µs largest, MESI on shared L2 insert)</a:t>
+              <a:t>  A: spread across 12 stages (W10 = 6.2 µs largest, MESI on shared L2 insert)</a:t>
             </a:r>
           </a:p>
           <a:p>
@@ -10655,7 +14587,7 @@
 </p:sld>
 </file>
 
-<file path=ppt/slides/slide5.xml><?xml version="1.0" encoding="utf-8"?>
+<file path=ppt/slides/slide7.xml><?xml version="1.0" encoding="utf-8"?>
 <p:sld xmlns:a="http://schemas.openxmlformats.org/drawingml/2006/main" xmlns:p="http://schemas.openxmlformats.org/presentationml/2006/main" xmlns:r="http://schemas.openxmlformats.org/officeDocument/2006/relationships">
   <p:cSld>
     <p:spTree>
@@ -10673,7 +14605,7 @@
         </p:nvSpPr>
         <p:spPr>
           <a:xfrm>
-            <a:off x="274320" y="137160"/>
+            <a:off x="274320" y="91440"/>
             <a:ext cx="11704320" cy="502920"/>
           </a:xfrm>
           <a:prstGeom prst="rect">
@@ -10688,7 +14620,7 @@
           <a:lstStyle/>
           <a:p>
             <a:r>
-              <a:rPr sz="2400" b="1">
+              <a:rPr sz="2200" b="1">
                 <a:solidFill>
                   <a:srgbClr val="333333"/>
                 </a:solidFill>
@@ -10706,8 +14638,8 @@
         </p:nvSpPr>
         <p:spPr>
           <a:xfrm>
-            <a:off x="274320" y="640080"/>
-            <a:ext cx="11704320" cy="320040"/>
+            <a:off x="274320" y="566928"/>
+            <a:ext cx="11704320" cy="292608"/>
           </a:xfrm>
           <a:prstGeom prst="rect">
             <a:avLst/>
@@ -10721,7 +14653,7 @@
           <a:lstStyle/>
           <a:p>
             <a:r>
-              <a:rPr sz="1200" i="1">
+              <a:rPr sz="1100" i="1">
                 <a:solidFill>
                   <a:srgbClr val="9E9E9E"/>
                 </a:solidFill>
@@ -13628,7 +17560,7 @@
           </a:p>
           <a:p>
             <a:r>
-              <a:rPr sz="1000">
+              <a:rPr sz="1000" b="0">
                 <a:solidFill>
                   <a:srgbClr val="0D327D"/>
                 </a:solidFill>
@@ -13638,12 +17570,22 @@
           </a:p>
           <a:p>
             <a:r>
-              <a:rPr sz="1000">
+              <a:rPr sz="1000" b="0">
                 <a:solidFill>
                   <a:srgbClr val="8C3200"/>
                 </a:solidFill>
               </a:rPr>
-              <a:t>  C (DRAM cache hit): ~ 700 ns</a:t>
+              <a:t>  C (DRAM cache hit):  ~ 700 ns</a:t>
+            </a:r>
+          </a:p>
+          <a:p>
+            <a:r>
+              <a:rPr sz="1000" b="0">
+                <a:solidFill>
+                  <a:srgbClr val="333333"/>
+                </a:solidFill>
+              </a:rPr>
+              <a:t/>
             </a:r>
           </a:p>
           <a:p>
@@ -13653,13 +17595,12 @@
                   <a:srgbClr val="333333"/>
                 </a:solidFill>
               </a:rPr>
-              <a:t>
-Reader worst-case (cross-host miss)</a:t>
-            </a:r>
-          </a:p>
-          <a:p>
-            <a:r>
-              <a:rPr sz="1000">
+              <a:t>Reader worst-case (cross-host miss)</a:t>
+            </a:r>
+          </a:p>
+          <a:p>
+            <a:r>
+              <a:rPr sz="1000" b="0">
                 <a:solidFill>
                   <a:srgbClr val="0D327D"/>
                 </a:solidFill>
@@ -13669,7 +17610,7 @@
           </a:p>
           <a:p>
             <a:r>
-              <a:rPr sz="1000">
+              <a:rPr sz="1000" b="0">
                 <a:solidFill>
                   <a:srgbClr val="8C3200"/>
                 </a:solidFill>
@@ -13679,18 +17620,27 @@
           </a:p>
           <a:p>
             <a:r>
+              <a:rPr sz="1000" b="0">
+                <a:solidFill>
+                  <a:srgbClr val="333333"/>
+                </a:solidFill>
+              </a:rPr>
+              <a:t/>
+            </a:r>
+          </a:p>
+          <a:p>
+            <a:r>
               <a:rPr sz="1100" b="1">
                 <a:solidFill>
                   <a:srgbClr val="333333"/>
                 </a:solidFill>
               </a:rPr>
-              <a:t>
-Key insight</a:t>
-            </a:r>
-          </a:p>
-          <a:p>
-            <a:r>
-              <a:rPr sz="1000">
+              <a:t>Key insight</a:t>
+            </a:r>
+          </a:p>
+          <a:p>
+            <a:r>
+              <a:rPr sz="1000" b="0">
                 <a:solidFill>
                   <a:srgbClr val="333333"/>
                 </a:solidFill>

--- a/docs/protocol_a_vs_c_path_comparison.pptx
+++ b/docs/protocol_a_vs_c_path_comparison.pptx
@@ -3309,7 +3309,7 @@
                   <a:srgbClr val="9E9E9E"/>
                 </a:solidFill>
               </a:rPr>
-              <a:t>14 numbered steps · 3 actors · 2 cross-host blocking points (A4 WriteRing spin, A9 InvalRing spin · 5 ms timeout cap each) · W9 = single commit point</a:t>
+              <a:t>Steps labelled by path_decomp probe tag (W1..W12, I1..I8). Greyed "untracked" steps = code without PROBE_OP (ring fetch_add, slot wait, ACK spin). Same probe tags appear in slide 6 latency table.</a:t>
             </a:r>
           </a:p>
         </p:txBody>
@@ -3362,7 +3362,8 @@
                   <a:srgbClr val="1565C0"/>
                 </a:solidFill>
               </a:rPr>
-              <a:t>host 0  worker (caller, cpu 0..T-1)</a:t>
+              <a:t>host 0  worker (caller)
+forward_write_direct() — no probes</a:t>
             </a:r>
           </a:p>
         </p:txBody>
@@ -3415,7 +3416,8 @@
                   <a:srgbClr val="154FC2"/>
                 </a:solidFill>
               </a:rPr>
-              <a:t>host 1  WriteReceiver (cpu 65)</a:t>
+              <a:t>host 1  WriteReceiver (cpu 65)
+execute_write_local() — W*/I* probes</a:t>
             </a:r>
           </a:p>
         </p:txBody>
@@ -3468,7 +3470,8 @@
                   <a:srgbClr val="154FC2"/>
                 </a:solidFill>
               </a:rPr>
-              <a:t>host 0  InvalReceiver (cpu 69)</a:t>
+              <a:t>host 0  InvalReceiver (cpu 69)
+inval_receiver_loop() — I3..I6</a:t>
             </a:r>
           </a:p>
         </p:txBody>
@@ -3481,8 +3484,8 @@
         </p:nvCxnSpPr>
         <p:spPr>
           <a:xfrm>
-            <a:off x="1463040" y="1600200"/>
-            <a:ext cx="0" cy="4389120"/>
+            <a:off x="1463040" y="1691640"/>
+            <a:ext cx="0" cy="4297680"/>
           </a:xfrm>
           <a:prstGeom prst="line">
             <a:avLst/>
@@ -3517,8 +3520,8 @@
         </p:nvCxnSpPr>
         <p:spPr>
           <a:xfrm>
-            <a:off x="5486400" y="1600200"/>
-            <a:ext cx="0" cy="4389120"/>
+            <a:off x="5486400" y="1691640"/>
+            <a:ext cx="0" cy="4297680"/>
           </a:xfrm>
           <a:prstGeom prst="line">
             <a:avLst/>
@@ -3553,8 +3556,8 @@
         </p:nvCxnSpPr>
         <p:spPr>
           <a:xfrm>
-            <a:off x="10241280" y="1600200"/>
-            <a:ext cx="0" cy="4389120"/>
+            <a:off x="10241280" y="1691640"/>
+            <a:ext cx="0" cy="4297680"/>
           </a:xfrm>
           <a:prstGeom prst="line">
             <a:avLst/>
@@ -3583,49 +3586,325 @@
       </p:cxnSp>
       <p:sp>
         <p:nvSpPr>
-          <p:cNvPr id="10" name="TextBox 9"/>
+          <p:cNvPr id="10" name="Oval 9"/>
+          <p:cNvSpPr/>
+          <p:nvPr/>
+        </p:nvSpPr>
+        <p:spPr>
+          <a:xfrm>
+            <a:off x="1316736" y="1728216"/>
+            <a:ext cx="292608" cy="292608"/>
+          </a:xfrm>
+          <a:prstGeom prst="ellipse">
+            <a:avLst/>
+          </a:prstGeom>
+          <a:solidFill>
+            <a:srgbClr val="FFFFFF"/>
+          </a:solidFill>
+          <a:ln w="19050">
+            <a:solidFill>
+              <a:srgbClr val="9E9E9E"/>
+            </a:solidFill>
+          </a:ln>
+        </p:spPr>
+        <p:style>
+          <a:lnRef idx="1">
+            <a:schemeClr val="accent1"/>
+          </a:lnRef>
+          <a:fillRef idx="3">
+            <a:schemeClr val="accent1"/>
+          </a:fillRef>
+          <a:effectRef idx="2">
+            <a:schemeClr val="accent1"/>
+          </a:effectRef>
+          <a:fontRef idx="minor">
+            <a:schemeClr val="lt1"/>
+          </a:fontRef>
+        </p:style>
+        <p:txBody>
+          <a:bodyPr rtlCol="0" anchor="ctr" lIns="0" rIns="0" tIns="0" bIns="0"/>
+          <a:lstStyle/>
+          <a:p>
+            <a:pPr algn="ctr"/>
+            <a:r>
+              <a:rPr sz="800" b="1">
+                <a:solidFill>
+                  <a:srgbClr val="9E9E9E"/>
+                </a:solidFill>
+              </a:rPr>
+              <a:t>—</a:t>
+            </a:r>
+          </a:p>
+        </p:txBody>
+      </p:sp>
+      <p:sp>
+        <p:nvSpPr>
+          <p:cNvPr id="11" name="TextBox 10"/>
           <p:cNvSpPr txBox="1"/>
           <p:nvPr/>
         </p:nvSpPr>
         <p:spPr>
           <a:xfrm>
-            <a:off x="182880" y="1691640"/>
-            <a:ext cx="868680" cy="4114800"/>
+            <a:off x="1645920" y="1783079"/>
+            <a:ext cx="2743200" cy="219456"/>
           </a:xfrm>
           <a:prstGeom prst="rect">
             <a:avLst/>
           </a:prstGeom>
-          <a:noFill/>
-        </p:spPr>
-        <p:txBody>
-          <a:bodyPr wrap="square" lIns="25400" rIns="25400" tIns="0" bIns="0">
+          <a:solidFill>
+            <a:srgbClr val="FFFFFF"/>
+          </a:solidFill>
+          <a:ln>
+            <a:noFill/>
+          </a:ln>
+        </p:spPr>
+        <p:txBody>
+          <a:bodyPr wrap="none" lIns="25400" rIns="25400" tIns="0" bIns="0">
             <a:spAutoFit/>
           </a:bodyPr>
           <a:lstStyle/>
           <a:p>
             <a:pPr algn="l"/>
             <a:r>
-              <a:rPr sz="800" i="1" b="1">
-                <a:solidFill>
-                  <a:srgbClr val="8C3200"/>
-                </a:solidFill>
-              </a:rPr>
-              <a:t>CXL
-shared
-region</a:t>
-            </a:r>
-          </a:p>
-        </p:txBody>
-      </p:sp>
-      <p:sp>
-        <p:nvSpPr>
-          <p:cNvPr id="11" name="Oval 10"/>
+              <a:rPr sz="850" b="1" i="0">
+                <a:solidFill>
+                  <a:srgbClr val="9E9E9E"/>
+                </a:solidFill>
+              </a:rPr>
+              <a:t>forward_write_direct: write staging + WriteRing.fetch_add + write Entry</a:t>
+            </a:r>
+          </a:p>
+        </p:txBody>
+      </p:sp>
+      <p:sp>
+        <p:nvSpPr>
+          <p:cNvPr id="12" name="Oval 11"/>
           <p:cNvSpPr/>
           <p:nvPr/>
         </p:nvSpPr>
         <p:spPr>
           <a:xfrm>
-            <a:off x="1316736" y="1773936"/>
+            <a:off x="1316736" y="1929384"/>
+            <a:ext cx="292608" cy="292608"/>
+          </a:xfrm>
+          <a:prstGeom prst="ellipse">
+            <a:avLst/>
+          </a:prstGeom>
+          <a:solidFill>
+            <a:srgbClr val="FFCDD2"/>
+          </a:solidFill>
+          <a:ln w="19050">
+            <a:solidFill>
+              <a:srgbClr val="C62828"/>
+            </a:solidFill>
+          </a:ln>
+        </p:spPr>
+        <p:style>
+          <a:lnRef idx="1">
+            <a:schemeClr val="accent1"/>
+          </a:lnRef>
+          <a:fillRef idx="3">
+            <a:schemeClr val="accent1"/>
+          </a:fillRef>
+          <a:effectRef idx="2">
+            <a:schemeClr val="accent1"/>
+          </a:effectRef>
+          <a:fontRef idx="minor">
+            <a:schemeClr val="lt1"/>
+          </a:fontRef>
+        </p:style>
+        <p:txBody>
+          <a:bodyPr rtlCol="0" anchor="ctr" lIns="0" rIns="0" tIns="0" bIns="0"/>
+          <a:lstStyle/>
+          <a:p>
+            <a:pPr algn="ctr"/>
+            <a:r>
+              <a:rPr sz="800" b="1">
+                <a:solidFill>
+                  <a:srgbClr val="333333"/>
+                </a:solidFill>
+              </a:rPr>
+              <a:t>—</a:t>
+            </a:r>
+          </a:p>
+        </p:txBody>
+      </p:sp>
+      <p:sp>
+        <p:nvSpPr>
+          <p:cNvPr id="13" name="TextBox 12"/>
+          <p:cNvSpPr txBox="1"/>
+          <p:nvPr/>
+        </p:nvSpPr>
+        <p:spPr>
+          <a:xfrm>
+            <a:off x="1645920" y="1984248"/>
+            <a:ext cx="2743200" cy="219456"/>
+          </a:xfrm>
+          <a:prstGeom prst="rect">
+            <a:avLst/>
+          </a:prstGeom>
+          <a:solidFill>
+            <a:srgbClr val="FFFFFF"/>
+          </a:solidFill>
+          <a:ln>
+            <a:noFill/>
+          </a:ln>
+        </p:spPr>
+        <p:txBody>
+          <a:bodyPr wrap="none" lIns="25400" rIns="25400" tIns="0" bIns="0">
+            <a:spAutoFit/>
+          </a:bodyPr>
+          <a:lstStyle/>
+          <a:p>
+            <a:pPr algn="l"/>
+            <a:r>
+              <a:rPr sz="850" b="1" i="0">
+                <a:solidFill>
+                  <a:srgbClr val="9E9E9E"/>
+                </a:solidFill>
+              </a:rPr>
+              <a:t>worker spin on WriteRing.resp_op_id  (5 ms cap)  ← BLOCKING</a:t>
+            </a:r>
+          </a:p>
+        </p:txBody>
+      </p:sp>
+      <p:cxnSp>
+        <p:nvCxnSpPr>
+          <p:cNvPr id="14" name="Connector 13"/>
+          <p:cNvCxnSpPr/>
+          <p:nvPr/>
+        </p:nvCxnSpPr>
+        <p:spPr>
+          <a:xfrm>
+            <a:off x="1463040" y="2276856"/>
+            <a:ext cx="4023360" cy="0"/>
+          </a:xfrm>
+          <a:prstGeom prst="line">
+            <a:avLst/>
+          </a:prstGeom>
+          <a:ln w="20320">
+            <a:solidFill>
+              <a:srgbClr val="9E9E9E"/>
+            </a:solidFill>
+            <a:tailEnd type="triangle" w="med" h="med"/>
+          </a:ln>
+        </p:spPr>
+        <p:style>
+          <a:lnRef idx="2">
+            <a:schemeClr val="accent1"/>
+          </a:lnRef>
+          <a:fillRef idx="0">
+            <a:schemeClr val="accent1"/>
+          </a:fillRef>
+          <a:effectRef idx="1">
+            <a:schemeClr val="accent1"/>
+          </a:effectRef>
+          <a:fontRef idx="minor">
+            <a:schemeClr val="tx1"/>
+          </a:fontRef>
+        </p:style>
+      </p:cxnSp>
+      <p:sp>
+        <p:nvSpPr>
+          <p:cNvPr id="15" name="Oval 14"/>
+          <p:cNvSpPr/>
+          <p:nvPr/>
+        </p:nvSpPr>
+        <p:spPr>
+          <a:xfrm>
+            <a:off x="3328415" y="2130552"/>
+            <a:ext cx="292608" cy="292608"/>
+          </a:xfrm>
+          <a:prstGeom prst="ellipse">
+            <a:avLst/>
+          </a:prstGeom>
+          <a:solidFill>
+            <a:srgbClr val="FFFFFF"/>
+          </a:solidFill>
+          <a:ln w="19050">
+            <a:solidFill>
+              <a:srgbClr val="9E9E9E"/>
+            </a:solidFill>
+          </a:ln>
+        </p:spPr>
+        <p:style>
+          <a:lnRef idx="1">
+            <a:schemeClr val="accent1"/>
+          </a:lnRef>
+          <a:fillRef idx="3">
+            <a:schemeClr val="accent1"/>
+          </a:fillRef>
+          <a:effectRef idx="2">
+            <a:schemeClr val="accent1"/>
+          </a:effectRef>
+          <a:fontRef idx="minor">
+            <a:schemeClr val="lt1"/>
+          </a:fontRef>
+        </p:style>
+        <p:txBody>
+          <a:bodyPr rtlCol="0" anchor="ctr" lIns="0" rIns="0" tIns="0" bIns="0"/>
+          <a:lstStyle/>
+          <a:p>
+            <a:pPr algn="ctr"/>
+            <a:r>
+              <a:rPr sz="800" b="1">
+                <a:solidFill>
+                  <a:srgbClr val="9E9E9E"/>
+                </a:solidFill>
+              </a:rPr>
+              <a:t>—</a:t>
+            </a:r>
+          </a:p>
+        </p:txBody>
+      </p:sp>
+      <p:sp>
+        <p:nvSpPr>
+          <p:cNvPr id="16" name="TextBox 15"/>
+          <p:cNvSpPr txBox="1"/>
+          <p:nvPr/>
+        </p:nvSpPr>
+        <p:spPr>
+          <a:xfrm>
+            <a:off x="2011679" y="2020824"/>
+            <a:ext cx="2926080" cy="219456"/>
+          </a:xfrm>
+          <a:prstGeom prst="rect">
+            <a:avLst/>
+          </a:prstGeom>
+          <a:solidFill>
+            <a:srgbClr val="FFFFFF"/>
+          </a:solidFill>
+          <a:ln>
+            <a:noFill/>
+          </a:ln>
+        </p:spPr>
+        <p:txBody>
+          <a:bodyPr wrap="none" lIns="25400" rIns="25400" tIns="0" bIns="0">
+            <a:spAutoFit/>
+          </a:bodyPr>
+          <a:lstStyle/>
+          <a:p>
+            <a:pPr algn="l"/>
+            <a:r>
+              <a:rPr sz="850" b="1" i="0">
+                <a:solidFill>
+                  <a:srgbClr val="9E9E9E"/>
+                </a:solidFill>
+              </a:rPr>
+              <a:t>WriteReceiver poll observes new tail; reads staging bytes</a:t>
+            </a:r>
+          </a:p>
+        </p:txBody>
+      </p:sp>
+      <p:sp>
+        <p:nvSpPr>
+          <p:cNvPr id="17" name="Oval 16"/>
+          <p:cNvSpPr/>
+          <p:nvPr/>
+        </p:nvSpPr>
+        <p:spPr>
+          <a:xfrm>
+            <a:off x="5340096" y="2331720"/>
             <a:ext cx="292608" cy="292608"/>
           </a:xfrm>
           <a:prstGeom prst="ellipse">
@@ -3665,20 +3944,20 @@
                   <a:srgbClr val="154FC2"/>
                 </a:solidFill>
               </a:rPr>
-              <a:t>A1</a:t>
-            </a:r>
-          </a:p>
-        </p:txBody>
-      </p:sp>
-      <p:sp>
-        <p:nvSpPr>
-          <p:cNvPr id="12" name="TextBox 11"/>
+              <a:t>W1</a:t>
+            </a:r>
+          </a:p>
+        </p:txBody>
+      </p:sp>
+      <p:sp>
+        <p:nvSpPr>
+          <p:cNvPr id="18" name="TextBox 17"/>
           <p:cNvSpPr txBox="1"/>
           <p:nvPr/>
         </p:nvSpPr>
         <p:spPr>
           <a:xfrm>
-            <a:off x="1645920" y="1828800"/>
+            <a:off x="5669280" y="2386584"/>
             <a:ext cx="2743200" cy="219456"/>
           </a:xfrm>
           <a:prstGeom prst="rect">
@@ -3704,20 +3983,20 @@
                   <a:srgbClr val="154FC2"/>
                 </a:solidFill>
               </a:rPr>
-              <a:t>write V bytes → ForwardStaging[0][1][slot]</a:t>
-            </a:r>
-          </a:p>
-        </p:txBody>
-      </p:sp>
-      <p:sp>
-        <p:nvSpPr>
-          <p:cNvPr id="13" name="Oval 12"/>
+              <a:t>hash + bucket flush + mfence</a:t>
+            </a:r>
+          </a:p>
+        </p:txBody>
+      </p:sp>
+      <p:sp>
+        <p:nvSpPr>
+          <p:cNvPr id="19" name="Oval 18"/>
           <p:cNvSpPr/>
           <p:nvPr/>
         </p:nvSpPr>
         <p:spPr>
           <a:xfrm>
-            <a:off x="1316736" y="2066543"/>
+            <a:off x="5340096" y="2532888"/>
             <a:ext cx="292608" cy="292608"/>
           </a:xfrm>
           <a:prstGeom prst="ellipse">
@@ -3757,20 +4036,20 @@
                   <a:srgbClr val="154FC2"/>
                 </a:solidFill>
               </a:rPr>
-              <a:t>A2</a:t>
-            </a:r>
-          </a:p>
-        </p:txBody>
-      </p:sp>
-      <p:sp>
-        <p:nvSpPr>
-          <p:cNvPr id="14" name="TextBox 13"/>
+              <a:t>W2</a:t>
+            </a:r>
+          </a:p>
+        </p:txBody>
+      </p:sp>
+      <p:sp>
+        <p:nvSpPr>
+          <p:cNvPr id="20" name="TextBox 19"/>
           <p:cNvSpPr txBox="1"/>
           <p:nvPr/>
         </p:nvSpPr>
         <p:spPr>
           <a:xfrm>
-            <a:off x="1645920" y="2121408"/>
+            <a:off x="5669280" y="2587752"/>
             <a:ext cx="2743200" cy="219456"/>
           </a:xfrm>
           <a:prstGeom prst="rect">
@@ -3796,20 +4075,20 @@
                   <a:srgbClr val="154FC2"/>
                 </a:solidFill>
               </a:rPr>
-              <a:t>WriteRing[0][1].tail.fetch_add(1)  RMW-CXL</a:t>
-            </a:r>
-          </a:p>
-        </p:txBody>
-      </p:sp>
-      <p:sp>
-        <p:nvSpPr>
-          <p:cNvPr id="15" name="Oval 14"/>
+              <a:t>scan 7 slots + DRAM SlotDirectoryEntry spinlock</a:t>
+            </a:r>
+          </a:p>
+        </p:txBody>
+      </p:sp>
+      <p:sp>
+        <p:nvSpPr>
+          <p:cNvPr id="21" name="Oval 20"/>
           <p:cNvSpPr/>
           <p:nvPr/>
         </p:nvSpPr>
         <p:spPr>
           <a:xfrm>
-            <a:off x="1316736" y="2359151"/>
+            <a:off x="5340096" y="2734056"/>
             <a:ext cx="292608" cy="292608"/>
           </a:xfrm>
           <a:prstGeom prst="ellipse">
@@ -3849,20 +4128,20 @@
                   <a:srgbClr val="154FC2"/>
                 </a:solidFill>
               </a:rPr>
-              <a:t>A3</a:t>
-            </a:r>
-          </a:p>
-        </p:txBody>
-      </p:sp>
-      <p:sp>
-        <p:nvSpPr>
-          <p:cNvPr id="16" name="TextBox 15"/>
+              <a:t>W3</a:t>
+            </a:r>
+          </a:p>
+        </p:txBody>
+      </p:sp>
+      <p:sp>
+        <p:nvSpPr>
+          <p:cNvPr id="22" name="TextBox 21"/>
           <p:cNvSpPr txBox="1"/>
           <p:nvPr/>
         </p:nvSpPr>
         <p:spPr>
           <a:xfrm>
-            <a:off x="1645920" y="2414015"/>
+            <a:off x="5669280" y="2788920"/>
             <a:ext cx="2743200" cy="219456"/>
           </a:xfrm>
           <a:prstGeom prst="rect">
@@ -3888,148 +4167,20 @@
                   <a:srgbClr val="154FC2"/>
                 </a:solidFill>
               </a:rPr>
-              <a:t>write WriteEntry{key, op_kind, value_len, staging_off} + flush + sfence</a:t>
-            </a:r>
-          </a:p>
-        </p:txBody>
-      </p:sp>
-      <p:cxnSp>
-        <p:nvCxnSpPr>
-          <p:cNvPr id="17" name="Connector 16"/>
-          <p:cNvCxnSpPr/>
-          <p:nvPr/>
-        </p:nvCxnSpPr>
-        <p:spPr>
-          <a:xfrm>
-            <a:off x="1463040" y="2798063"/>
-            <a:ext cx="4023360" cy="0"/>
-          </a:xfrm>
-          <a:prstGeom prst="line">
-            <a:avLst/>
-          </a:prstGeom>
-          <a:ln w="20320">
-            <a:solidFill>
-              <a:srgbClr val="154FC2"/>
-            </a:solidFill>
-            <a:tailEnd type="triangle" w="med" h="med"/>
-          </a:ln>
-        </p:spPr>
-        <p:style>
-          <a:lnRef idx="2">
-            <a:schemeClr val="accent1"/>
-          </a:lnRef>
-          <a:fillRef idx="0">
-            <a:schemeClr val="accent1"/>
-          </a:fillRef>
-          <a:effectRef idx="1">
-            <a:schemeClr val="accent1"/>
-          </a:effectRef>
-          <a:fontRef idx="minor">
-            <a:schemeClr val="tx1"/>
-          </a:fontRef>
-        </p:style>
-      </p:cxnSp>
-      <p:sp>
-        <p:nvSpPr>
-          <p:cNvPr id="18" name="Oval 17"/>
+              <a:t>re-flush bucket; read sharer_bitmap</a:t>
+            </a:r>
+          </a:p>
+        </p:txBody>
+      </p:sp>
+      <p:sp>
+        <p:nvSpPr>
+          <p:cNvPr id="23" name="Oval 22"/>
           <p:cNvSpPr/>
           <p:nvPr/>
         </p:nvSpPr>
         <p:spPr>
           <a:xfrm>
-            <a:off x="3328415" y="2651759"/>
-            <a:ext cx="292608" cy="292608"/>
-          </a:xfrm>
-          <a:prstGeom prst="ellipse">
-            <a:avLst/>
-          </a:prstGeom>
-          <a:solidFill>
-            <a:srgbClr val="FFCDD2"/>
-          </a:solidFill>
-          <a:ln w="19050">
-            <a:solidFill>
-              <a:srgbClr val="C62828"/>
-            </a:solidFill>
-          </a:ln>
-        </p:spPr>
-        <p:style>
-          <a:lnRef idx="1">
-            <a:schemeClr val="accent1"/>
-          </a:lnRef>
-          <a:fillRef idx="3">
-            <a:schemeClr val="accent1"/>
-          </a:fillRef>
-          <a:effectRef idx="2">
-            <a:schemeClr val="accent1"/>
-          </a:effectRef>
-          <a:fontRef idx="minor">
-            <a:schemeClr val="lt1"/>
-          </a:fontRef>
-        </p:style>
-        <p:txBody>
-          <a:bodyPr rtlCol="0" anchor="ctr" lIns="0" rIns="0" tIns="0" bIns="0"/>
-          <a:lstStyle/>
-          <a:p>
-            <a:pPr algn="ctr"/>
-            <a:r>
-              <a:rPr sz="800" b="1">
-                <a:solidFill>
-                  <a:srgbClr val="333333"/>
-                </a:solidFill>
-              </a:rPr>
-              <a:t>A4</a:t>
-            </a:r>
-          </a:p>
-        </p:txBody>
-      </p:sp>
-      <p:sp>
-        <p:nvSpPr>
-          <p:cNvPr id="19" name="TextBox 18"/>
-          <p:cNvSpPr txBox="1"/>
-          <p:nvPr/>
-        </p:nvSpPr>
-        <p:spPr>
-          <a:xfrm>
-            <a:off x="2011679" y="2542031"/>
-            <a:ext cx="2926080" cy="219456"/>
-          </a:xfrm>
-          <a:prstGeom prst="rect">
-            <a:avLst/>
-          </a:prstGeom>
-          <a:solidFill>
-            <a:srgbClr val="FFFFFF"/>
-          </a:solidFill>
-          <a:ln>
-            <a:noFill/>
-          </a:ln>
-        </p:spPr>
-        <p:txBody>
-          <a:bodyPr wrap="none" lIns="25400" rIns="25400" tIns="0" bIns="0">
-            <a:spAutoFit/>
-          </a:bodyPr>
-          <a:lstStyle/>
-          <a:p>
-            <a:pPr algn="l"/>
-            <a:r>
-              <a:rPr sz="850" b="1" i="0">
-                <a:solidFill>
-                  <a:srgbClr val="154FC2"/>
-                </a:solidFill>
-              </a:rPr>
-              <a:t>worker spin on resp_op_id  (5 ms timeout cap)</a:t>
-            </a:r>
-          </a:p>
-        </p:txBody>
-      </p:sp>
-      <p:sp>
-        <p:nvSpPr>
-          <p:cNvPr id="20" name="Oval 19"/>
-          <p:cNvSpPr/>
-          <p:nvPr/>
-        </p:nvSpPr>
-        <p:spPr>
-          <a:xfrm>
-            <a:off x="5340096" y="2944367"/>
+            <a:off x="5340096" y="2935224"/>
             <a:ext cx="292608" cy="292608"/>
           </a:xfrm>
           <a:prstGeom prst="ellipse">
@@ -4069,20 +4220,20 @@
                   <a:srgbClr val="154FC2"/>
                 </a:solidFill>
               </a:rPr>
-              <a:t>A5</a:t>
-            </a:r>
-          </a:p>
-        </p:txBody>
-      </p:sp>
-      <p:sp>
-        <p:nvSpPr>
-          <p:cNvPr id="21" name="TextBox 20"/>
+              <a:t>W4</a:t>
+            </a:r>
+          </a:p>
+        </p:txBody>
+      </p:sp>
+      <p:sp>
+        <p:nvSpPr>
+          <p:cNvPr id="24" name="TextBox 23"/>
           <p:cNvSpPr txBox="1"/>
           <p:nvPr/>
         </p:nvSpPr>
         <p:spPr>
           <a:xfrm>
-            <a:off x="5669280" y="2999231"/>
+            <a:off x="5669280" y="2990088"/>
             <a:ext cx="2743200" cy="219456"/>
           </a:xfrm>
           <a:prstGeom prst="rect">
@@ -4108,20 +4259,20 @@
                   <a:srgbClr val="154FC2"/>
                 </a:solidFill>
               </a:rPr>
-              <a:t>poll WriteRing[0][1].tail; read ForwardStaging bytes</a:t>
-            </a:r>
-          </a:p>
-        </p:txBody>
-      </p:sp>
-      <p:sp>
-        <p:nvSpPr>
-          <p:cNvPr id="22" name="Oval 21"/>
+              <a:t>enter invalidate broadcast loop</a:t>
+            </a:r>
+          </a:p>
+        </p:txBody>
+      </p:sp>
+      <p:sp>
+        <p:nvSpPr>
+          <p:cNvPr id="25" name="Oval 24"/>
           <p:cNvSpPr/>
           <p:nvPr/>
         </p:nvSpPr>
         <p:spPr>
           <a:xfrm>
-            <a:off x="5340096" y="3236975"/>
+            <a:off x="5340096" y="3136392"/>
             <a:ext cx="292608" cy="292608"/>
           </a:xfrm>
           <a:prstGeom prst="ellipse">
@@ -4161,20 +4312,20 @@
                   <a:srgbClr val="154FC2"/>
                 </a:solidFill>
               </a:rPr>
-              <a:t>A6</a:t>
-            </a:r>
-          </a:p>
-        </p:txBody>
-      </p:sp>
-      <p:sp>
-        <p:nvSpPr>
-          <p:cNvPr id="23" name="TextBox 22"/>
+              <a:t>I1</a:t>
+            </a:r>
+          </a:p>
+        </p:txBody>
+      </p:sp>
+      <p:sp>
+        <p:nvSpPr>
+          <p:cNvPr id="26" name="TextBox 25"/>
           <p:cNvSpPr txBox="1"/>
           <p:nvPr/>
         </p:nvSpPr>
         <p:spPr>
           <a:xfrm>
-            <a:off x="5669280" y="3291839"/>
+            <a:off x="5669280" y="3191256"/>
             <a:ext cx="2743200" cy="219456"/>
           </a:xfrm>
           <a:prstGeom prst="rect">
@@ -4200,20 +4351,56 @@
                   <a:srgbClr val="154FC2"/>
                 </a:solidFill>
               </a:rPr>
-              <a:t>execute_write_local: W1 hash+flush  · W2 spinlock+scan  · W3 bitmap</a:t>
-            </a:r>
-          </a:p>
-        </p:txBody>
-      </p:sp>
-      <p:sp>
-        <p:nvSpPr>
-          <p:cNvPr id="24" name="Oval 23"/>
+              <a:t>InvalRing[1][0].tail.fetch_add(1)  RMW-CXL</a:t>
+            </a:r>
+          </a:p>
+        </p:txBody>
+      </p:sp>
+      <p:cxnSp>
+        <p:nvCxnSpPr>
+          <p:cNvPr id="27" name="Connector 26"/>
+          <p:cNvCxnSpPr/>
+          <p:nvPr/>
+        </p:nvCxnSpPr>
+        <p:spPr>
+          <a:xfrm>
+            <a:off x="5486400" y="3483864"/>
+            <a:ext cx="4754880" cy="0"/>
+          </a:xfrm>
+          <a:prstGeom prst="line">
+            <a:avLst/>
+          </a:prstGeom>
+          <a:ln w="20320">
+            <a:solidFill>
+              <a:srgbClr val="154FC2"/>
+            </a:solidFill>
+            <a:tailEnd type="triangle" w="med" h="med"/>
+          </a:ln>
+        </p:spPr>
+        <p:style>
+          <a:lnRef idx="2">
+            <a:schemeClr val="accent1"/>
+          </a:lnRef>
+          <a:fillRef idx="0">
+            <a:schemeClr val="accent1"/>
+          </a:fillRef>
+          <a:effectRef idx="1">
+            <a:schemeClr val="accent1"/>
+          </a:effectRef>
+          <a:fontRef idx="minor">
+            <a:schemeClr val="tx1"/>
+          </a:fontRef>
+        </p:style>
+      </p:cxnSp>
+      <p:sp>
+        <p:nvSpPr>
+          <p:cNvPr id="28" name="Oval 27"/>
           <p:cNvSpPr/>
           <p:nvPr/>
         </p:nvSpPr>
         <p:spPr>
           <a:xfrm>
-            <a:off x="5340096" y="3529583"/>
+            <a:off x="7717536" y="3337560"/>
             <a:ext cx="292608" cy="292608"/>
           </a:xfrm>
           <a:prstGeom prst="ellipse">
@@ -4253,21 +4440,21 @@
                   <a:srgbClr val="154FC2"/>
                 </a:solidFill>
               </a:rPr>
-              <a:t>A7</a:t>
-            </a:r>
-          </a:p>
-        </p:txBody>
-      </p:sp>
-      <p:sp>
-        <p:nvSpPr>
-          <p:cNvPr id="25" name="TextBox 24"/>
+              <a:t>I2</a:t>
+            </a:r>
+          </a:p>
+        </p:txBody>
+      </p:sp>
+      <p:sp>
+        <p:nvSpPr>
+          <p:cNvPr id="29" name="TextBox 28"/>
           <p:cNvSpPr txBox="1"/>
           <p:nvPr/>
         </p:nvSpPr>
         <p:spPr>
           <a:xfrm>
-            <a:off x="5669280" y="3584447"/>
-            <a:ext cx="2743200" cy="219456"/>
+            <a:off x="6400800" y="3227832"/>
+            <a:ext cx="2926080" cy="219456"/>
           </a:xfrm>
           <a:prstGeom prst="rect">
             <a:avLst/>
@@ -4292,20 +4479,20 @@
                   <a:srgbClr val="154FC2"/>
                 </a:solidFill>
               </a:rPr>
-              <a:t>inside W4-W6: InvalRing[1][0].tail.fetch_add(1)  RMW-CXL</a:t>
-            </a:r>
-          </a:p>
-        </p:txBody>
-      </p:sp>
-      <p:sp>
-        <p:nvSpPr>
-          <p:cNvPr id="26" name="Oval 25"/>
+              <a:t>write InvalEntry{key, req_op_id} + flush + sfence</a:t>
+            </a:r>
+          </a:p>
+        </p:txBody>
+      </p:sp>
+      <p:sp>
+        <p:nvSpPr>
+          <p:cNvPr id="30" name="Oval 29"/>
           <p:cNvSpPr/>
           <p:nvPr/>
         </p:nvSpPr>
         <p:spPr>
           <a:xfrm>
-            <a:off x="5340096" y="3822191"/>
+            <a:off x="10094976" y="3538728"/>
             <a:ext cx="292608" cy="292608"/>
           </a:xfrm>
           <a:prstGeom prst="ellipse">
@@ -4345,21 +4532,21 @@
                   <a:srgbClr val="154FC2"/>
                 </a:solidFill>
               </a:rPr>
-              <a:t>A8</a:t>
-            </a:r>
-          </a:p>
-        </p:txBody>
-      </p:sp>
-      <p:sp>
-        <p:nvSpPr>
-          <p:cNvPr id="27" name="TextBox 26"/>
+              <a:t>I3</a:t>
+            </a:r>
+          </a:p>
+        </p:txBody>
+      </p:sp>
+      <p:sp>
+        <p:nvSpPr>
+          <p:cNvPr id="31" name="TextBox 30"/>
           <p:cNvSpPr txBox="1"/>
           <p:nvPr/>
         </p:nvSpPr>
         <p:spPr>
           <a:xfrm>
-            <a:off x="5669280" y="3877056"/>
-            <a:ext cx="2743200" cy="219456"/>
+            <a:off x="7680960" y="3593592"/>
+            <a:ext cx="2377440" cy="219456"/>
           </a:xfrm>
           <a:prstGeom prst="rect">
             <a:avLst/>
@@ -4377,155 +4564,27 @@
           </a:bodyPr>
           <a:lstStyle/>
           <a:p>
-            <a:pPr algn="l"/>
+            <a:pPr algn="r"/>
             <a:r>
               <a:rPr sz="850" b="1" i="0">
                 <a:solidFill>
                   <a:srgbClr val="154FC2"/>
                 </a:solidFill>
               </a:rPr>
-              <a:t>write InvalEntry{key} + flush + sfence</a:t>
-            </a:r>
-          </a:p>
-        </p:txBody>
-      </p:sp>
-      <p:cxnSp>
-        <p:nvCxnSpPr>
-          <p:cNvPr id="28" name="Connector 27"/>
-          <p:cNvCxnSpPr/>
-          <p:nvPr/>
-        </p:nvCxnSpPr>
-        <p:spPr>
-          <a:xfrm>
-            <a:off x="5486400" y="4261104"/>
-            <a:ext cx="4754880" cy="0"/>
-          </a:xfrm>
-          <a:prstGeom prst="line">
-            <a:avLst/>
-          </a:prstGeom>
-          <a:ln w="20320">
-            <a:solidFill>
-              <a:srgbClr val="154FC2"/>
-            </a:solidFill>
-            <a:tailEnd type="triangle" w="med" h="med"/>
-          </a:ln>
-        </p:spPr>
-        <p:style>
-          <a:lnRef idx="2">
-            <a:schemeClr val="accent1"/>
-          </a:lnRef>
-          <a:fillRef idx="0">
-            <a:schemeClr val="accent1"/>
-          </a:fillRef>
-          <a:effectRef idx="1">
-            <a:schemeClr val="accent1"/>
-          </a:effectRef>
-          <a:fontRef idx="minor">
-            <a:schemeClr val="tx1"/>
-          </a:fontRef>
-        </p:style>
-      </p:cxnSp>
-      <p:sp>
-        <p:nvSpPr>
-          <p:cNvPr id="29" name="Oval 28"/>
+              <a:t>poll InvalRing tail; observes new entry</a:t>
+            </a:r>
+          </a:p>
+        </p:txBody>
+      </p:sp>
+      <p:sp>
+        <p:nvSpPr>
+          <p:cNvPr id="32" name="Oval 31"/>
           <p:cNvSpPr/>
           <p:nvPr/>
         </p:nvSpPr>
         <p:spPr>
           <a:xfrm>
-            <a:off x="7717536" y="4114800"/>
-            <a:ext cx="292608" cy="292608"/>
-          </a:xfrm>
-          <a:prstGeom prst="ellipse">
-            <a:avLst/>
-          </a:prstGeom>
-          <a:solidFill>
-            <a:srgbClr val="FFCDD2"/>
-          </a:solidFill>
-          <a:ln w="19050">
-            <a:solidFill>
-              <a:srgbClr val="C62828"/>
-            </a:solidFill>
-          </a:ln>
-        </p:spPr>
-        <p:style>
-          <a:lnRef idx="1">
-            <a:schemeClr val="accent1"/>
-          </a:lnRef>
-          <a:fillRef idx="3">
-            <a:schemeClr val="accent1"/>
-          </a:fillRef>
-          <a:effectRef idx="2">
-            <a:schemeClr val="accent1"/>
-          </a:effectRef>
-          <a:fontRef idx="minor">
-            <a:schemeClr val="lt1"/>
-          </a:fontRef>
-        </p:style>
-        <p:txBody>
-          <a:bodyPr rtlCol="0" anchor="ctr" lIns="0" rIns="0" tIns="0" bIns="0"/>
-          <a:lstStyle/>
-          <a:p>
-            <a:pPr algn="ctr"/>
-            <a:r>
-              <a:rPr sz="800" b="1">
-                <a:solidFill>
-                  <a:srgbClr val="333333"/>
-                </a:solidFill>
-              </a:rPr>
-              <a:t>A9</a:t>
-            </a:r>
-          </a:p>
-        </p:txBody>
-      </p:sp>
-      <p:sp>
-        <p:nvSpPr>
-          <p:cNvPr id="30" name="TextBox 29"/>
-          <p:cNvSpPr txBox="1"/>
-          <p:nvPr/>
-        </p:nvSpPr>
-        <p:spPr>
-          <a:xfrm>
-            <a:off x="6400800" y="4005072"/>
-            <a:ext cx="2926080" cy="219456"/>
-          </a:xfrm>
-          <a:prstGeom prst="rect">
-            <a:avLst/>
-          </a:prstGeom>
-          <a:solidFill>
-            <a:srgbClr val="FFFFFF"/>
-          </a:solidFill>
-          <a:ln>
-            <a:noFill/>
-          </a:ln>
-        </p:spPr>
-        <p:txBody>
-          <a:bodyPr wrap="none" lIns="25400" rIns="25400" tIns="0" bIns="0">
-            <a:spAutoFit/>
-          </a:bodyPr>
-          <a:lstStyle/>
-          <a:p>
-            <a:pPr algn="l"/>
-            <a:r>
-              <a:rPr sz="850" b="1" i="0">
-                <a:solidFill>
-                  <a:srgbClr val="154FC2"/>
-                </a:solidFill>
-              </a:rPr>
-              <a:t>WriteReceiver spin on InvalRing resp_op_id  (5 ms cap)</a:t>
-            </a:r>
-          </a:p>
-        </p:txBody>
-      </p:sp>
-      <p:sp>
-        <p:nvSpPr>
-          <p:cNvPr id="31" name="Oval 30"/>
-          <p:cNvSpPr/>
-          <p:nvPr/>
-        </p:nvSpPr>
-        <p:spPr>
-          <a:xfrm>
-            <a:off x="10094976" y="4407408"/>
+            <a:off x="10094976" y="3739896"/>
             <a:ext cx="292608" cy="292608"/>
           </a:xfrm>
           <a:prstGeom prst="ellipse">
@@ -4565,20 +4624,20 @@
                   <a:srgbClr val="154FC2"/>
                 </a:solidFill>
               </a:rPr>
-              <a:t>A10</a:t>
-            </a:r>
-          </a:p>
-        </p:txBody>
-      </p:sp>
-      <p:sp>
-        <p:nvSpPr>
-          <p:cNvPr id="32" name="TextBox 31"/>
+              <a:t>I4</a:t>
+            </a:r>
+          </a:p>
+        </p:txBody>
+      </p:sp>
+      <p:sp>
+        <p:nvSpPr>
+          <p:cNvPr id="33" name="TextBox 32"/>
           <p:cNvSpPr txBox="1"/>
           <p:nvPr/>
         </p:nvSpPr>
         <p:spPr>
           <a:xfrm>
-            <a:off x="7680960" y="4462272"/>
+            <a:off x="7680960" y="3794760"/>
             <a:ext cx="2377440" cy="219456"/>
           </a:xfrm>
           <a:prstGeom prst="rect">
@@ -4604,20 +4663,148 @@
                   <a:srgbClr val="154FC2"/>
                 </a:solidFill>
               </a:rPr>
-              <a:t>poll InvalRing tail; read InvalEntry</a:t>
-            </a:r>
-          </a:p>
-        </p:txBody>
-      </p:sp>
-      <p:sp>
-        <p:nvSpPr>
-          <p:cNvPr id="33" name="Oval 32"/>
+              <a:t>read req_op_id</a:t>
+            </a:r>
+          </a:p>
+        </p:txBody>
+      </p:sp>
+      <p:sp>
+        <p:nvSpPr>
+          <p:cNvPr id="34" name="Oval 33"/>
           <p:cNvSpPr/>
           <p:nvPr/>
         </p:nvSpPr>
         <p:spPr>
           <a:xfrm>
-            <a:off x="10094976" y="4700016"/>
+            <a:off x="10094976" y="3941064"/>
+            <a:ext cx="292608" cy="292608"/>
+          </a:xfrm>
+          <a:prstGeom prst="ellipse">
+            <a:avLst/>
+          </a:prstGeom>
+          <a:solidFill>
+            <a:srgbClr val="FFF49C"/>
+          </a:solidFill>
+          <a:ln w="19050">
+            <a:solidFill>
+              <a:srgbClr val="F9A825"/>
+            </a:solidFill>
+          </a:ln>
+        </p:spPr>
+        <p:style>
+          <a:lnRef idx="1">
+            <a:schemeClr val="accent1"/>
+          </a:lnRef>
+          <a:fillRef idx="3">
+            <a:schemeClr val="accent1"/>
+          </a:fillRef>
+          <a:effectRef idx="2">
+            <a:schemeClr val="accent1"/>
+          </a:effectRef>
+          <a:fontRef idx="minor">
+            <a:schemeClr val="lt1"/>
+          </a:fontRef>
+        </p:style>
+        <p:txBody>
+          <a:bodyPr rtlCol="0" anchor="ctr" lIns="0" rIns="0" tIns="0" bIns="0"/>
+          <a:lstStyle/>
+          <a:p>
+            <a:pPr algn="ctr"/>
+            <a:r>
+              <a:rPr sz="800" b="1">
+                <a:solidFill>
+                  <a:srgbClr val="333333"/>
+                </a:solidFill>
+              </a:rPr>
+              <a:t>I5</a:t>
+            </a:r>
+          </a:p>
+        </p:txBody>
+      </p:sp>
+      <p:sp>
+        <p:nvSpPr>
+          <p:cNvPr id="35" name="TextBox 34"/>
+          <p:cNvSpPr txBox="1"/>
+          <p:nvPr/>
+        </p:nvSpPr>
+        <p:spPr>
+          <a:xfrm>
+            <a:off x="7315199" y="3995928"/>
+            <a:ext cx="2743200" cy="219456"/>
+          </a:xfrm>
+          <a:prstGeom prst="rect">
+            <a:avLst/>
+          </a:prstGeom>
+          <a:solidFill>
+            <a:srgbClr val="FFFFFF"/>
+          </a:solidFill>
+          <a:ln>
+            <a:noFill/>
+          </a:ln>
+        </p:spPr>
+        <p:txBody>
+          <a:bodyPr wrap="none" lIns="25400" rIns="25400" tIns="0" bIns="0">
+            <a:spAutoFit/>
+          </a:bodyPr>
+          <a:lstStyle/>
+          <a:p>
+            <a:pPr algn="r"/>
+            <a:r>
+              <a:rPr sz="850" b="1" i="0">
+                <a:solidFill>
+                  <a:srgbClr val="154FC2"/>
+                </a:solidFill>
+              </a:rPr>
+              <a:t>cache_pool_set_stale; bucket_epoch++  (seqlock CAS)</a:t>
+            </a:r>
+          </a:p>
+        </p:txBody>
+      </p:sp>
+      <p:cxnSp>
+        <p:nvCxnSpPr>
+          <p:cNvPr id="36" name="Connector 35"/>
+          <p:cNvCxnSpPr/>
+          <p:nvPr/>
+        </p:nvCxnSpPr>
+        <p:spPr>
+          <a:xfrm flipH="1">
+            <a:off x="5486400" y="4288536"/>
+            <a:ext cx="4754880" cy="0"/>
+          </a:xfrm>
+          <a:prstGeom prst="line">
+            <a:avLst/>
+          </a:prstGeom>
+          <a:ln w="20320">
+            <a:solidFill>
+              <a:srgbClr val="154FC2"/>
+            </a:solidFill>
+            <a:tailEnd type="triangle" w="med" h="med"/>
+          </a:ln>
+        </p:spPr>
+        <p:style>
+          <a:lnRef idx="2">
+            <a:schemeClr val="accent1"/>
+          </a:lnRef>
+          <a:fillRef idx="0">
+            <a:schemeClr val="accent1"/>
+          </a:fillRef>
+          <a:effectRef idx="1">
+            <a:schemeClr val="accent1"/>
+          </a:effectRef>
+          <a:fontRef idx="minor">
+            <a:schemeClr val="tx1"/>
+          </a:fontRef>
+        </p:style>
+      </p:cxnSp>
+      <p:sp>
+        <p:nvSpPr>
+          <p:cNvPr id="37" name="Oval 36"/>
+          <p:cNvSpPr/>
+          <p:nvPr/>
+        </p:nvSpPr>
+        <p:spPr>
+          <a:xfrm>
+            <a:off x="7717536" y="4142232"/>
             <a:ext cx="292608" cy="292608"/>
           </a:xfrm>
           <a:prstGeom prst="ellipse">
@@ -4657,21 +4844,21 @@
                   <a:srgbClr val="154FC2"/>
                 </a:solidFill>
               </a:rPr>
-              <a:t>A11</a:t>
-            </a:r>
-          </a:p>
-        </p:txBody>
-      </p:sp>
-      <p:sp>
-        <p:nvSpPr>
-          <p:cNvPr id="34" name="TextBox 33"/>
+              <a:t>I6</a:t>
+            </a:r>
+          </a:p>
+        </p:txBody>
+      </p:sp>
+      <p:sp>
+        <p:nvSpPr>
+          <p:cNvPr id="38" name="TextBox 37"/>
           <p:cNvSpPr txBox="1"/>
           <p:nvPr/>
         </p:nvSpPr>
         <p:spPr>
           <a:xfrm>
-            <a:off x="7498079" y="4754880"/>
-            <a:ext cx="2560320" cy="219456"/>
+            <a:off x="6400800" y="4379976"/>
+            <a:ext cx="2926080" cy="219456"/>
           </a:xfrm>
           <a:prstGeom prst="rect">
             <a:avLst/>
@@ -4689,63 +4876,27 @@
           </a:bodyPr>
           <a:lstStyle/>
           <a:p>
-            <a:pPr algn="r"/>
+            <a:pPr algn="l"/>
             <a:r>
               <a:rPr sz="850" b="1" i="0">
                 <a:solidFill>
                   <a:srgbClr val="154FC2"/>
                 </a:solidFill>
               </a:rPr>
-              <a:t>cache_pool_set_stale(K); bucket_epoch++ (seqlock CAS)</a:t>
-            </a:r>
-          </a:p>
-        </p:txBody>
-      </p:sp>
-      <p:cxnSp>
-        <p:nvCxnSpPr>
-          <p:cNvPr id="35" name="Connector 34"/>
-          <p:cNvCxnSpPr/>
-          <p:nvPr/>
-        </p:nvCxnSpPr>
-        <p:spPr>
-          <a:xfrm flipH="1">
-            <a:off x="5486400" y="5138928"/>
-            <a:ext cx="4754880" cy="0"/>
-          </a:xfrm>
-          <a:prstGeom prst="line">
-            <a:avLst/>
-          </a:prstGeom>
-          <a:ln w="20320">
-            <a:solidFill>
-              <a:srgbClr val="154FC2"/>
-            </a:solidFill>
-            <a:tailEnd type="triangle" w="med" h="med"/>
-          </a:ln>
-        </p:spPr>
-        <p:style>
-          <a:lnRef idx="2">
-            <a:schemeClr val="accent1"/>
-          </a:lnRef>
-          <a:fillRef idx="0">
-            <a:schemeClr val="accent1"/>
-          </a:fillRef>
-          <a:effectRef idx="1">
-            <a:schemeClr val="accent1"/>
-          </a:effectRef>
-          <a:fontRef idx="minor">
-            <a:schemeClr val="tx1"/>
-          </a:fontRef>
-        </p:style>
-      </p:cxnSp>
-      <p:sp>
-        <p:nvSpPr>
-          <p:cNvPr id="36" name="Oval 35"/>
+              <a:t>write resp_op_id ACK + flush + sfence</a:t>
+            </a:r>
+          </a:p>
+        </p:txBody>
+      </p:sp>
+      <p:sp>
+        <p:nvSpPr>
+          <p:cNvPr id="39" name="Oval 38"/>
           <p:cNvSpPr/>
           <p:nvPr/>
         </p:nvSpPr>
         <p:spPr>
           <a:xfrm>
-            <a:off x="7717536" y="4992624"/>
+            <a:off x="5340096" y="4343400"/>
             <a:ext cx="292608" cy="292608"/>
           </a:xfrm>
           <a:prstGeom prst="ellipse">
@@ -4785,21 +4936,21 @@
                   <a:srgbClr val="154FC2"/>
                 </a:solidFill>
               </a:rPr>
-              <a:t>A12</a:t>
-            </a:r>
-          </a:p>
-        </p:txBody>
-      </p:sp>
-      <p:sp>
-        <p:nvSpPr>
-          <p:cNvPr id="37" name="TextBox 36"/>
+              <a:t>I7</a:t>
+            </a:r>
+          </a:p>
+        </p:txBody>
+      </p:sp>
+      <p:sp>
+        <p:nvSpPr>
+          <p:cNvPr id="40" name="TextBox 39"/>
           <p:cNvSpPr txBox="1"/>
           <p:nvPr/>
         </p:nvSpPr>
         <p:spPr>
           <a:xfrm>
-            <a:off x="6400800" y="5230368"/>
-            <a:ext cx="2926080" cy="219456"/>
+            <a:off x="5669280" y="4398264"/>
+            <a:ext cx="2743200" cy="219456"/>
           </a:xfrm>
           <a:prstGeom prst="rect">
             <a:avLst/>
@@ -4824,21 +4975,21 @@
                   <a:srgbClr val="154FC2"/>
                 </a:solidFill>
               </a:rPr>
-              <a:t>write InvalRing resp_op_id  (ACK)</a:t>
-            </a:r>
-          </a:p>
-        </p:txBody>
-      </p:sp>
-      <p:sp>
-        <p:nvSpPr>
-          <p:cNvPr id="38" name="Rectangle 37"/>
+              <a:t>spin observes ACK  (end of cross-host blocking)</a:t>
+            </a:r>
+          </a:p>
+        </p:txBody>
+      </p:sp>
+      <p:sp>
+        <p:nvSpPr>
+          <p:cNvPr id="41" name="Rectangle 40"/>
           <p:cNvSpPr/>
           <p:nvPr/>
         </p:nvSpPr>
         <p:spPr>
           <a:xfrm>
-            <a:off x="5404104" y="4215384"/>
-            <a:ext cx="164592" cy="1197864"/>
+            <a:off x="5404104" y="3438144"/>
+            <a:ext cx="164592" cy="1216151"/>
           </a:xfrm>
           <a:prstGeom prst="rect">
             <a:avLst/>
@@ -4876,14 +5027,67 @@
       </p:sp>
       <p:sp>
         <p:nvSpPr>
-          <p:cNvPr id="39" name="TextBox 38"/>
+          <p:cNvPr id="42" name="Oval 41"/>
+          <p:cNvSpPr/>
+          <p:nvPr/>
+        </p:nvSpPr>
+        <p:spPr>
+          <a:xfrm>
+            <a:off x="5340096" y="4544568"/>
+            <a:ext cx="292608" cy="292608"/>
+          </a:xfrm>
+          <a:prstGeom prst="ellipse">
+            <a:avLst/>
+          </a:prstGeom>
+          <a:solidFill>
+            <a:srgbClr val="FFFFFF"/>
+          </a:solidFill>
+          <a:ln w="19050">
+            <a:solidFill>
+              <a:srgbClr val="154FC2"/>
+            </a:solidFill>
+          </a:ln>
+        </p:spPr>
+        <p:style>
+          <a:lnRef idx="1">
+            <a:schemeClr val="accent1"/>
+          </a:lnRef>
+          <a:fillRef idx="3">
+            <a:schemeClr val="accent1"/>
+          </a:fillRef>
+          <a:effectRef idx="2">
+            <a:schemeClr val="accent1"/>
+          </a:effectRef>
+          <a:fontRef idx="minor">
+            <a:schemeClr val="lt1"/>
+          </a:fontRef>
+        </p:style>
+        <p:txBody>
+          <a:bodyPr rtlCol="0" anchor="ctr" lIns="0" rIns="0" tIns="0" bIns="0"/>
+          <a:lstStyle/>
+          <a:p>
+            <a:pPr algn="ctr"/>
+            <a:r>
+              <a:rPr sz="800" b="1">
+                <a:solidFill>
+                  <a:srgbClr val="154FC2"/>
+                </a:solidFill>
+              </a:rPr>
+              <a:t>I8</a:t>
+            </a:r>
+          </a:p>
+        </p:txBody>
+      </p:sp>
+      <p:sp>
+        <p:nvSpPr>
+          <p:cNvPr id="43" name="TextBox 42"/>
           <p:cNvSpPr txBox="1"/>
           <p:nvPr/>
         </p:nvSpPr>
         <p:spPr>
           <a:xfrm>
-            <a:off x="5623560" y="4722876"/>
-            <a:ext cx="1463040" cy="219456"/>
+            <a:off x="5669280" y="4599432"/>
+            <a:ext cx="2743200" cy="219456"/>
           </a:xfrm>
           <a:prstGeom prst="rect">
             <a:avLst/>
@@ -4903,25 +5107,301 @@
           <a:p>
             <a:pPr algn="l"/>
             <a:r>
-              <a:rPr sz="800" b="1" i="1">
-                <a:solidFill>
-                  <a:srgbClr val="C62828"/>
-                </a:solidFill>
-              </a:rPr>
-              <a:t>blocked</a:t>
-            </a:r>
-          </a:p>
-        </p:txBody>
-      </p:sp>
-      <p:sp>
-        <p:nvSpPr>
-          <p:cNvPr id="40" name="Oval 39"/>
+              <a:rPr sz="850" b="1" i="0">
+                <a:solidFill>
+                  <a:srgbClr val="154FC2"/>
+                </a:solidFill>
+              </a:rPr>
+              <a:t>free InvalRing slot (req_op_id = 0)</a:t>
+            </a:r>
+          </a:p>
+        </p:txBody>
+      </p:sp>
+      <p:sp>
+        <p:nvSpPr>
+          <p:cNvPr id="44" name="Oval 43"/>
           <p:cNvSpPr/>
           <p:nvPr/>
         </p:nvSpPr>
         <p:spPr>
           <a:xfrm>
-            <a:off x="5340096" y="5285232"/>
+            <a:off x="5340096" y="4745736"/>
+            <a:ext cx="292608" cy="292608"/>
+          </a:xfrm>
+          <a:prstGeom prst="ellipse">
+            <a:avLst/>
+          </a:prstGeom>
+          <a:solidFill>
+            <a:srgbClr val="FFFFFF"/>
+          </a:solidFill>
+          <a:ln w="19050">
+            <a:solidFill>
+              <a:srgbClr val="154FC2"/>
+            </a:solidFill>
+          </a:ln>
+        </p:spPr>
+        <p:style>
+          <a:lnRef idx="1">
+            <a:schemeClr val="accent1"/>
+          </a:lnRef>
+          <a:fillRef idx="3">
+            <a:schemeClr val="accent1"/>
+          </a:fillRef>
+          <a:effectRef idx="2">
+            <a:schemeClr val="accent1"/>
+          </a:effectRef>
+          <a:fontRef idx="minor">
+            <a:schemeClr val="lt1"/>
+          </a:fontRef>
+        </p:style>
+        <p:txBody>
+          <a:bodyPr rtlCol="0" anchor="ctr" lIns="0" rIns="0" tIns="0" bIns="0"/>
+          <a:lstStyle/>
+          <a:p>
+            <a:pPr algn="ctr"/>
+            <a:r>
+              <a:rPr sz="800" b="1">
+                <a:solidFill>
+                  <a:srgbClr val="154FC2"/>
+                </a:solidFill>
+              </a:rPr>
+              <a:t>W6</a:t>
+            </a:r>
+          </a:p>
+        </p:txBody>
+      </p:sp>
+      <p:sp>
+        <p:nvSpPr>
+          <p:cNvPr id="45" name="TextBox 44"/>
+          <p:cNvSpPr txBox="1"/>
+          <p:nvPr/>
+        </p:nvSpPr>
+        <p:spPr>
+          <a:xfrm>
+            <a:off x="5669280" y="4800600"/>
+            <a:ext cx="2743200" cy="219456"/>
+          </a:xfrm>
+          <a:prstGeom prst="rect">
+            <a:avLst/>
+          </a:prstGeom>
+          <a:solidFill>
+            <a:srgbClr val="FFFFFF"/>
+          </a:solidFill>
+          <a:ln>
+            <a:noFill/>
+          </a:ln>
+        </p:spPr>
+        <p:txBody>
+          <a:bodyPr wrap="none" lIns="25400" rIns="25400" tIns="0" bIns="0">
+            <a:spAutoFit/>
+          </a:bodyPr>
+          <a:lstStyle/>
+          <a:p>
+            <a:pPr algn="l"/>
+            <a:r>
+              <a:rPr sz="850" b="1" i="0">
+                <a:solidFill>
+                  <a:srgbClr val="154FC2"/>
+                </a:solidFill>
+              </a:rPr>
+              <a:t>end of invalidate broadcast loop</a:t>
+            </a:r>
+          </a:p>
+        </p:txBody>
+      </p:sp>
+      <p:sp>
+        <p:nvSpPr>
+          <p:cNvPr id="46" name="Oval 45"/>
+          <p:cNvSpPr/>
+          <p:nvPr/>
+        </p:nvSpPr>
+        <p:spPr>
+          <a:xfrm>
+            <a:off x="5340096" y="4946903"/>
+            <a:ext cx="292608" cy="292608"/>
+          </a:xfrm>
+          <a:prstGeom prst="ellipse">
+            <a:avLst/>
+          </a:prstGeom>
+          <a:solidFill>
+            <a:srgbClr val="FFFFFF"/>
+          </a:solidFill>
+          <a:ln w="19050">
+            <a:solidFill>
+              <a:srgbClr val="154FC2"/>
+            </a:solidFill>
+          </a:ln>
+        </p:spPr>
+        <p:style>
+          <a:lnRef idx="1">
+            <a:schemeClr val="accent1"/>
+          </a:lnRef>
+          <a:fillRef idx="3">
+            <a:schemeClr val="accent1"/>
+          </a:fillRef>
+          <a:effectRef idx="2">
+            <a:schemeClr val="accent1"/>
+          </a:effectRef>
+          <a:fontRef idx="minor">
+            <a:schemeClr val="lt1"/>
+          </a:fontRef>
+        </p:style>
+        <p:txBody>
+          <a:bodyPr rtlCol="0" anchor="ctr" lIns="0" rIns="0" tIns="0" bIns="0"/>
+          <a:lstStyle/>
+          <a:p>
+            <a:pPr algn="ctr"/>
+            <a:r>
+              <a:rPr sz="800" b="1">
+                <a:solidFill>
+                  <a:srgbClr val="154FC2"/>
+                </a:solidFill>
+              </a:rPr>
+              <a:t>W7</a:t>
+            </a:r>
+          </a:p>
+        </p:txBody>
+      </p:sp>
+      <p:sp>
+        <p:nvSpPr>
+          <p:cNvPr id="47" name="TextBox 46"/>
+          <p:cNvSpPr txBox="1"/>
+          <p:nvPr/>
+        </p:nvSpPr>
+        <p:spPr>
+          <a:xfrm>
+            <a:off x="5669280" y="5001768"/>
+            <a:ext cx="2743200" cy="219456"/>
+          </a:xfrm>
+          <a:prstGeom prst="rect">
+            <a:avLst/>
+          </a:prstGeom>
+          <a:solidFill>
+            <a:srgbClr val="FFFFFF"/>
+          </a:solidFill>
+          <a:ln>
+            <a:noFill/>
+          </a:ln>
+        </p:spPr>
+        <p:txBody>
+          <a:bodyPr wrap="none" lIns="25400" rIns="25400" tIns="0" bIns="0">
+            <a:spAutoFit/>
+          </a:bodyPr>
+          <a:lstStyle/>
+          <a:p>
+            <a:pPr algn="l"/>
+            <a:r>
+              <a:rPr sz="850" b="1" i="0">
+                <a:solidFill>
+                  <a:srgbClr val="154FC2"/>
+                </a:solidFill>
+              </a:rPr>
+              <a:t>pool-&gt;alloc  (bump.fetch_add CXL atomic)</a:t>
+            </a:r>
+          </a:p>
+        </p:txBody>
+      </p:sp>
+      <p:sp>
+        <p:nvSpPr>
+          <p:cNvPr id="48" name="Oval 47"/>
+          <p:cNvSpPr/>
+          <p:nvPr/>
+        </p:nvSpPr>
+        <p:spPr>
+          <a:xfrm>
+            <a:off x="5340096" y="5148071"/>
+            <a:ext cx="292608" cy="292608"/>
+          </a:xfrm>
+          <a:prstGeom prst="ellipse">
+            <a:avLst/>
+          </a:prstGeom>
+          <a:solidFill>
+            <a:srgbClr val="FFFFFF"/>
+          </a:solidFill>
+          <a:ln w="19050">
+            <a:solidFill>
+              <a:srgbClr val="154FC2"/>
+            </a:solidFill>
+          </a:ln>
+        </p:spPr>
+        <p:style>
+          <a:lnRef idx="1">
+            <a:schemeClr val="accent1"/>
+          </a:lnRef>
+          <a:fillRef idx="3">
+            <a:schemeClr val="accent1"/>
+          </a:fillRef>
+          <a:effectRef idx="2">
+            <a:schemeClr val="accent1"/>
+          </a:effectRef>
+          <a:fontRef idx="minor">
+            <a:schemeClr val="lt1"/>
+          </a:fontRef>
+        </p:style>
+        <p:txBody>
+          <a:bodyPr rtlCol="0" anchor="ctr" lIns="0" rIns="0" tIns="0" bIns="0"/>
+          <a:lstStyle/>
+          <a:p>
+            <a:pPr algn="ctr"/>
+            <a:r>
+              <a:rPr sz="800" b="1">
+                <a:solidFill>
+                  <a:srgbClr val="154FC2"/>
+                </a:solidFill>
+              </a:rPr>
+              <a:t>W8</a:t>
+            </a:r>
+          </a:p>
+        </p:txBody>
+      </p:sp>
+      <p:sp>
+        <p:nvSpPr>
+          <p:cNvPr id="49" name="TextBox 48"/>
+          <p:cNvSpPr txBox="1"/>
+          <p:nvPr/>
+        </p:nvSpPr>
+        <p:spPr>
+          <a:xfrm>
+            <a:off x="5669280" y="5202936"/>
+            <a:ext cx="2743200" cy="219456"/>
+          </a:xfrm>
+          <a:prstGeom prst="rect">
+            <a:avLst/>
+          </a:prstGeom>
+          <a:solidFill>
+            <a:srgbClr val="FFFFFF"/>
+          </a:solidFill>
+          <a:ln>
+            <a:noFill/>
+          </a:ln>
+        </p:spPr>
+        <p:txBody>
+          <a:bodyPr wrap="none" lIns="25400" rIns="25400" tIns="0" bIns="0">
+            <a:spAutoFit/>
+          </a:bodyPr>
+          <a:lstStyle/>
+          <a:p>
+            <a:pPr algn="l"/>
+            <a:r>
+              <a:rPr sz="850" b="1" i="0">
+                <a:solidFill>
+                  <a:srgbClr val="154FC2"/>
+                </a:solidFill>
+              </a:rPr>
+              <a:t>pool-&gt;write  (memcpy + per-cacheline flush + sfence)</a:t>
+            </a:r>
+          </a:p>
+        </p:txBody>
+      </p:sp>
+      <p:sp>
+        <p:nvSpPr>
+          <p:cNvPr id="50" name="Oval 49"/>
+          <p:cNvSpPr/>
+          <p:nvPr/>
+        </p:nvSpPr>
+        <p:spPr>
+          <a:xfrm>
+            <a:off x="5340096" y="5349239"/>
             <a:ext cx="292608" cy="292608"/>
           </a:xfrm>
           <a:prstGeom prst="ellipse">
@@ -4961,20 +5441,20 @@
                   <a:srgbClr val="333333"/>
                 </a:solidFill>
               </a:rPr>
-              <a:t>A13</a:t>
-            </a:r>
-          </a:p>
-        </p:txBody>
-      </p:sp>
-      <p:sp>
-        <p:nvSpPr>
-          <p:cNvPr id="41" name="TextBox 40"/>
+              <a:t>W9</a:t>
+            </a:r>
+          </a:p>
+        </p:txBody>
+      </p:sp>
+      <p:sp>
+        <p:nvSpPr>
+          <p:cNvPr id="51" name="TextBox 50"/>
           <p:cNvSpPr txBox="1"/>
           <p:nvPr/>
         </p:nvSpPr>
         <p:spPr>
           <a:xfrm>
-            <a:off x="5669280" y="5340096"/>
+            <a:off x="5669280" y="5404103"/>
             <a:ext cx="2743200" cy="219456"/>
           </a:xfrm>
           <a:prstGeom prst="rect">
@@ -5000,56 +5480,112 @@
                   <a:srgbClr val="154FC2"/>
                 </a:solidFill>
               </a:rPr>
-              <a:t>W7-W12: pool_alloc · pool_write · ★ W9 publish_slot_cow ★ · W10 dir + cache_pool_insert</a:t>
-            </a:r>
-          </a:p>
-        </p:txBody>
-      </p:sp>
-      <p:cxnSp>
-        <p:nvCxnSpPr>
-          <p:cNvPr id="42" name="Connector 41"/>
-          <p:cNvCxnSpPr/>
-          <p:nvPr/>
-        </p:nvCxnSpPr>
-        <p:spPr>
-          <a:xfrm flipH="1">
-            <a:off x="1463040" y="5724144"/>
-            <a:ext cx="4023360" cy="0"/>
-          </a:xfrm>
-          <a:prstGeom prst="line">
-            <a:avLst/>
-          </a:prstGeom>
-          <a:ln w="20320">
+              <a:t>★ publish_slot_cow ★ — value flush + key flush + 2× sfence</a:t>
+            </a:r>
+          </a:p>
+        </p:txBody>
+      </p:sp>
+      <p:sp>
+        <p:nvSpPr>
+          <p:cNvPr id="52" name="Oval 51"/>
+          <p:cNvSpPr/>
+          <p:nvPr/>
+        </p:nvSpPr>
+        <p:spPr>
+          <a:xfrm>
+            <a:off x="5340096" y="5550407"/>
+            <a:ext cx="292608" cy="292608"/>
+          </a:xfrm>
+          <a:prstGeom prst="ellipse">
+            <a:avLst/>
+          </a:prstGeom>
+          <a:solidFill>
+            <a:srgbClr val="FFF49C"/>
+          </a:solidFill>
+          <a:ln w="19050">
             <a:solidFill>
-              <a:srgbClr val="154FC2"/>
+              <a:srgbClr val="F9A825"/>
             </a:solidFill>
-            <a:tailEnd type="triangle" w="med" h="med"/>
           </a:ln>
         </p:spPr>
         <p:style>
-          <a:lnRef idx="2">
+          <a:lnRef idx="1">
             <a:schemeClr val="accent1"/>
           </a:lnRef>
-          <a:fillRef idx="0">
+          <a:fillRef idx="3">
             <a:schemeClr val="accent1"/>
           </a:fillRef>
-          <a:effectRef idx="1">
+          <a:effectRef idx="2">
             <a:schemeClr val="accent1"/>
           </a:effectRef>
           <a:fontRef idx="minor">
-            <a:schemeClr val="tx1"/>
+            <a:schemeClr val="lt1"/>
           </a:fontRef>
         </p:style>
-      </p:cxnSp>
-      <p:sp>
-        <p:nvSpPr>
-          <p:cNvPr id="43" name="Oval 42"/>
+        <p:txBody>
+          <a:bodyPr rtlCol="0" anchor="ctr" lIns="0" rIns="0" tIns="0" bIns="0"/>
+          <a:lstStyle/>
+          <a:p>
+            <a:pPr algn="ctr"/>
+            <a:r>
+              <a:rPr sz="800" b="1">
+                <a:solidFill>
+                  <a:srgbClr val="333333"/>
+                </a:solidFill>
+              </a:rPr>
+              <a:t>W10</a:t>
+            </a:r>
+          </a:p>
+        </p:txBody>
+      </p:sp>
+      <p:sp>
+        <p:nvSpPr>
+          <p:cNvPr id="53" name="TextBox 52"/>
+          <p:cNvSpPr txBox="1"/>
+          <p:nvPr/>
+        </p:nvSpPr>
+        <p:spPr>
+          <a:xfrm>
+            <a:off x="5669280" y="5605271"/>
+            <a:ext cx="2743200" cy="219456"/>
+          </a:xfrm>
+          <a:prstGeom prst="rect">
+            <a:avLst/>
+          </a:prstGeom>
+          <a:solidFill>
+            <a:srgbClr val="FFFFFF"/>
+          </a:solidFill>
+          <a:ln>
+            <a:noFill/>
+          </a:ln>
+        </p:spPr>
+        <p:txBody>
+          <a:bodyPr wrap="none" lIns="25400" rIns="25400" tIns="0" bIns="0">
+            <a:spAutoFit/>
+          </a:bodyPr>
+          <a:lstStyle/>
+          <a:p>
+            <a:pPr algn="l"/>
+            <a:r>
+              <a:rPr sz="850" b="1" i="0">
+                <a:solidFill>
+                  <a:srgbClr val="154FC2"/>
+                </a:solidFill>
+              </a:rPr>
+              <a:t>directory update + cache_pool_insert + bucket_epoch++  ★ lin #2</a:t>
+            </a:r>
+          </a:p>
+        </p:txBody>
+      </p:sp>
+      <p:sp>
+        <p:nvSpPr>
+          <p:cNvPr id="54" name="Oval 53"/>
           <p:cNvSpPr/>
           <p:nvPr/>
         </p:nvSpPr>
         <p:spPr>
           <a:xfrm>
-            <a:off x="3328415" y="5577840"/>
+            <a:off x="5340096" y="5751575"/>
             <a:ext cx="292608" cy="292608"/>
           </a:xfrm>
           <a:prstGeom prst="ellipse">
@@ -5089,21 +5625,21 @@
                   <a:srgbClr val="154FC2"/>
                 </a:solidFill>
               </a:rPr>
-              <a:t>A14</a:t>
-            </a:r>
-          </a:p>
-        </p:txBody>
-      </p:sp>
-      <p:sp>
-        <p:nvSpPr>
-          <p:cNvPr id="44" name="TextBox 43"/>
+              <a:t>W12</a:t>
+            </a:r>
+          </a:p>
+        </p:txBody>
+      </p:sp>
+      <p:sp>
+        <p:nvSpPr>
+          <p:cNvPr id="55" name="TextBox 54"/>
           <p:cNvSpPr txBox="1"/>
           <p:nvPr/>
         </p:nvSpPr>
         <p:spPr>
           <a:xfrm>
-            <a:off x="2011679" y="5815584"/>
-            <a:ext cx="2926080" cy="219456"/>
+            <a:off x="5669280" y="5806439"/>
+            <a:ext cx="2743200" cy="219456"/>
           </a:xfrm>
           <a:prstGeom prst="rect">
             <a:avLst/>
@@ -5128,21 +5664,149 @@
                   <a:srgbClr val="154FC2"/>
                 </a:solidFill>
               </a:rPr>
-              <a:t>write WriteRing resp_op_id  (ACK)  ⇒ worker A4 returns 0</a:t>
-            </a:r>
-          </a:p>
-        </p:txBody>
-      </p:sp>
-      <p:sp>
-        <p:nvSpPr>
-          <p:cNvPr id="45" name="Rectangle 44"/>
+              <a:t>return 0 to write_receiver_loop</a:t>
+            </a:r>
+          </a:p>
+        </p:txBody>
+      </p:sp>
+      <p:cxnSp>
+        <p:nvCxnSpPr>
+          <p:cNvPr id="56" name="Connector 55"/>
+          <p:cNvCxnSpPr/>
+          <p:nvPr/>
+        </p:nvCxnSpPr>
+        <p:spPr>
+          <a:xfrm flipH="1">
+            <a:off x="1463040" y="6099047"/>
+            <a:ext cx="4023360" cy="0"/>
+          </a:xfrm>
+          <a:prstGeom prst="line">
+            <a:avLst/>
+          </a:prstGeom>
+          <a:ln w="20320">
+            <a:solidFill>
+              <a:srgbClr val="9E9E9E"/>
+            </a:solidFill>
+            <a:tailEnd type="triangle" w="med" h="med"/>
+          </a:ln>
+        </p:spPr>
+        <p:style>
+          <a:lnRef idx="2">
+            <a:schemeClr val="accent1"/>
+          </a:lnRef>
+          <a:fillRef idx="0">
+            <a:schemeClr val="accent1"/>
+          </a:fillRef>
+          <a:effectRef idx="1">
+            <a:schemeClr val="accent1"/>
+          </a:effectRef>
+          <a:fontRef idx="minor">
+            <a:schemeClr val="tx1"/>
+          </a:fontRef>
+        </p:style>
+      </p:cxnSp>
+      <p:sp>
+        <p:nvSpPr>
+          <p:cNvPr id="57" name="Oval 56"/>
           <p:cNvSpPr/>
           <p:nvPr/>
         </p:nvSpPr>
         <p:spPr>
           <a:xfrm>
-            <a:off x="1380744" y="2752344"/>
-            <a:ext cx="164592" cy="3246120"/>
+            <a:off x="3328415" y="5952743"/>
+            <a:ext cx="292608" cy="292608"/>
+          </a:xfrm>
+          <a:prstGeom prst="ellipse">
+            <a:avLst/>
+          </a:prstGeom>
+          <a:solidFill>
+            <a:srgbClr val="FFFFFF"/>
+          </a:solidFill>
+          <a:ln w="19050">
+            <a:solidFill>
+              <a:srgbClr val="9E9E9E"/>
+            </a:solidFill>
+          </a:ln>
+        </p:spPr>
+        <p:style>
+          <a:lnRef idx="1">
+            <a:schemeClr val="accent1"/>
+          </a:lnRef>
+          <a:fillRef idx="3">
+            <a:schemeClr val="accent1"/>
+          </a:fillRef>
+          <a:effectRef idx="2">
+            <a:schemeClr val="accent1"/>
+          </a:effectRef>
+          <a:fontRef idx="minor">
+            <a:schemeClr val="lt1"/>
+          </a:fontRef>
+        </p:style>
+        <p:txBody>
+          <a:bodyPr rtlCol="0" anchor="ctr" lIns="0" rIns="0" tIns="0" bIns="0"/>
+          <a:lstStyle/>
+          <a:p>
+            <a:pPr algn="ctr"/>
+            <a:r>
+              <a:rPr sz="800" b="1">
+                <a:solidFill>
+                  <a:srgbClr val="9E9E9E"/>
+                </a:solidFill>
+              </a:rPr>
+              <a:t>—</a:t>
+            </a:r>
+          </a:p>
+        </p:txBody>
+      </p:sp>
+      <p:sp>
+        <p:nvSpPr>
+          <p:cNvPr id="58" name="TextBox 57"/>
+          <p:cNvSpPr txBox="1"/>
+          <p:nvPr/>
+        </p:nvSpPr>
+        <p:spPr>
+          <a:xfrm>
+            <a:off x="2011679" y="6190487"/>
+            <a:ext cx="2926080" cy="219456"/>
+          </a:xfrm>
+          <a:prstGeom prst="rect">
+            <a:avLst/>
+          </a:prstGeom>
+          <a:solidFill>
+            <a:srgbClr val="FFFFFF"/>
+          </a:solidFill>
+          <a:ln>
+            <a:noFill/>
+          </a:ln>
+        </p:spPr>
+        <p:txBody>
+          <a:bodyPr wrap="none" lIns="25400" rIns="25400" tIns="0" bIns="0">
+            <a:spAutoFit/>
+          </a:bodyPr>
+          <a:lstStyle/>
+          <a:p>
+            <a:pPr algn="l"/>
+            <a:r>
+              <a:rPr sz="850" b="1" i="0">
+                <a:solidFill>
+                  <a:srgbClr val="9E9E9E"/>
+                </a:solidFill>
+              </a:rPr>
+              <a:t>write WriteRing.resp_op_id ACK + flush; worker spin breaks; free slot</a:t>
+            </a:r>
+          </a:p>
+        </p:txBody>
+      </p:sp>
+      <p:sp>
+        <p:nvSpPr>
+          <p:cNvPr id="59" name="Rectangle 58"/>
+          <p:cNvSpPr/>
+          <p:nvPr/>
+        </p:nvSpPr>
+        <p:spPr>
+          <a:xfrm>
+            <a:off x="1380744" y="2029968"/>
+            <a:ext cx="164592" cy="4224527"/>
           </a:xfrm>
           <a:prstGeom prst="rect">
             <a:avLst/>
@@ -5180,46 +5844,7 @@
       </p:sp>
       <p:sp>
         <p:nvSpPr>
-          <p:cNvPr id="46" name="TextBox 45"/>
-          <p:cNvSpPr txBox="1"/>
-          <p:nvPr/>
-        </p:nvSpPr>
-        <p:spPr>
-          <a:xfrm>
-            <a:off x="1600200" y="4283964"/>
-            <a:ext cx="1463040" cy="219456"/>
-          </a:xfrm>
-          <a:prstGeom prst="rect">
-            <a:avLst/>
-          </a:prstGeom>
-          <a:solidFill>
-            <a:srgbClr val="FFFFFF"/>
-          </a:solidFill>
-          <a:ln>
-            <a:noFill/>
-          </a:ln>
-        </p:spPr>
-        <p:txBody>
-          <a:bodyPr wrap="none" lIns="25400" rIns="25400" tIns="0" bIns="0">
-            <a:spAutoFit/>
-          </a:bodyPr>
-          <a:lstStyle/>
-          <a:p>
-            <a:pPr algn="l"/>
-            <a:r>
-              <a:rPr sz="800" b="1" i="1">
-                <a:solidFill>
-                  <a:srgbClr val="C62828"/>
-                </a:solidFill>
-              </a:rPr>
-              <a:t>blocked</a:t>
-            </a:r>
-          </a:p>
-        </p:txBody>
-      </p:sp>
-      <p:sp>
-        <p:nvSpPr>
-          <p:cNvPr id="47" name="Rounded Rectangle 46"/>
+          <p:cNvPr id="60" name="Rounded Rectangle 59"/>
           <p:cNvSpPr/>
           <p:nvPr/>
         </p:nvSpPr>
@@ -5264,7 +5889,7 @@
       </p:sp>
       <p:sp>
         <p:nvSpPr>
-          <p:cNvPr id="48" name="TextBox 47"/>
+          <p:cNvPr id="61" name="TextBox 60"/>
           <p:cNvSpPr txBox="1"/>
           <p:nvPr/>
         </p:nvSpPr>
@@ -5291,14 +5916,14 @@
                   <a:srgbClr val="154FC2"/>
                 </a:solidFill>
               </a:rPr>
-              <a:t>— ▶  Step arrow</a:t>
-            </a:r>
-          </a:p>
-        </p:txBody>
-      </p:sp>
-      <p:sp>
-        <p:nvSpPr>
-          <p:cNvPr id="49" name="TextBox 48"/>
+              <a:t>● W1..W12 probe (host 1)</a:t>
+            </a:r>
+          </a:p>
+        </p:txBody>
+      </p:sp>
+      <p:sp>
+        <p:nvSpPr>
+          <p:cNvPr id="62" name="TextBox 61"/>
           <p:cNvSpPr txBox="1"/>
           <p:nvPr/>
         </p:nvSpPr>
@@ -5322,17 +5947,17 @@
             <a:r>
               <a:rPr sz="900" b="1">
                 <a:solidFill>
-                  <a:srgbClr val="F9A825"/>
-                </a:solidFill>
-              </a:rPr>
-              <a:t>● Linearization (W9, A13)</a:t>
-            </a:r>
-          </a:p>
-        </p:txBody>
-      </p:sp>
-      <p:sp>
-        <p:nvSpPr>
-          <p:cNvPr id="50" name="TextBox 49"/>
+                  <a:srgbClr val="154FC2"/>
+                </a:solidFill>
+              </a:rPr>
+              <a:t>● I3..I6 probe (host 0)</a:t>
+            </a:r>
+          </a:p>
+        </p:txBody>
+      </p:sp>
+      <p:sp>
+        <p:nvSpPr>
+          <p:cNvPr id="63" name="TextBox 62"/>
           <p:cNvSpPr txBox="1"/>
           <p:nvPr/>
         </p:nvSpPr>
@@ -5356,17 +5981,17 @@
             <a:r>
               <a:rPr sz="900" b="1">
                 <a:solidFill>
-                  <a:srgbClr val="C62828"/>
-                </a:solidFill>
-              </a:rPr>
-              <a:t>● Cross-host blocking (A4, A9)</a:t>
-            </a:r>
-          </a:p>
-        </p:txBody>
-      </p:sp>
-      <p:sp>
-        <p:nvSpPr>
-          <p:cNvPr id="51" name="TextBox 50"/>
+                  <a:srgbClr val="9E9E9E"/>
+                </a:solidFill>
+              </a:rPr>
+              <a:t>untr — no PROBE_OP</a:t>
+            </a:r>
+          </a:p>
+        </p:txBody>
+      </p:sp>
+      <p:sp>
+        <p:nvSpPr>
+          <p:cNvPr id="64" name="TextBox 63"/>
           <p:cNvSpPr txBox="1"/>
           <p:nvPr/>
         </p:nvSpPr>
@@ -5390,17 +6015,17 @@
             <a:r>
               <a:rPr sz="900" b="1">
                 <a:solidFill>
-                  <a:srgbClr val="C62828"/>
-                </a:solidFill>
-              </a:rPr>
-              <a:t>▌ blocked lifeline</a:t>
-            </a:r>
-          </a:p>
-        </p:txBody>
-      </p:sp>
-      <p:sp>
-        <p:nvSpPr>
-          <p:cNvPr id="52" name="TextBox 51"/>
+                  <a:srgbClr val="F9A825"/>
+                </a:solidFill>
+              </a:rPr>
+              <a:t>★ Linearization point</a:t>
+            </a:r>
+          </a:p>
+        </p:txBody>
+      </p:sp>
+      <p:sp>
+        <p:nvSpPr>
+          <p:cNvPr id="65" name="TextBox 64"/>
           <p:cNvSpPr txBox="1"/>
           <p:nvPr/>
         </p:nvSpPr>
@@ -5427,7 +6052,7 @@
                   <a:srgbClr val="0D327D"/>
                 </a:solidFill>
               </a:rPr>
-              <a:t>14 steps · 3 actors · 2 blocking points</a:t>
+              <a:t>17 probed stages · 3 untracked · 2 blocking spans</a:t>
             </a:r>
           </a:p>
         </p:txBody>
@@ -5511,7 +6136,7 @@
                   <a:srgbClr val="9E9E9E"/>
                 </a:solidFill>
               </a:rPr>
-              <a:t>6 numbered steps · 1 actor · 1 cross-host blocking (C1 LFM acquire) · C5 atomic write_epoch bump = single commit point</a:t>
+              <a:t>Steps labelled by DECOMP_REC stage tag (Lock / Scan / Publish / Epoch / Unlock). Same probe tags appear in slide 6 latency table. 1 actor · no cross-host messages.</a:t>
             </a:r>
           </a:p>
         </p:txBody>
@@ -5564,7 +6189,8 @@
                   <a:srgbClr val="1565C0"/>
                 </a:solidFill>
               </a:rPr>
-              <a:t>host 0  worker (caller, cpu 0..T-1)</a:t>
+              <a:t>host 0  worker (caller)
+insert / update / remove — DECOMP_REC probes</a:t>
             </a:r>
           </a:p>
         </p:txBody>
@@ -5577,8 +6203,8 @@
         </p:nvCxnSpPr>
         <p:spPr>
           <a:xfrm>
-            <a:off x="2194560" y="1600200"/>
-            <a:ext cx="0" cy="4389120"/>
+            <a:off x="2194560" y="1691640"/>
+            <a:ext cx="0" cy="4297680"/>
           </a:xfrm>
           <a:prstGeom prst="line">
             <a:avLst/>
@@ -5878,7 +6504,7 @@
         </p:nvCxnSpPr>
         <p:spPr>
           <a:xfrm>
-            <a:off x="2194560" y="2194560"/>
+            <a:off x="2194560" y="2103120"/>
             <a:ext cx="3931920" cy="0"/>
           </a:xfrm>
           <a:prstGeom prst="line">
@@ -5915,7 +6541,7 @@
         </p:nvSpPr>
         <p:spPr>
           <a:xfrm>
-            <a:off x="4014215" y="2048255"/>
+            <a:off x="4014215" y="1956815"/>
             <a:ext cx="292608" cy="292608"/>
           </a:xfrm>
           <a:prstGeom prst="ellipse">
@@ -5955,7 +6581,7 @@
                   <a:srgbClr val="333333"/>
                 </a:solidFill>
               </a:rPr>
-              <a:t>C1</a:t>
+              <a:t>Lock</a:t>
             </a:r>
           </a:p>
         </p:txBody>
@@ -5968,7 +6594,7 @@
         </p:nvSpPr>
         <p:spPr>
           <a:xfrm>
-            <a:off x="2697479" y="1938528"/>
+            <a:off x="2697479" y="1847087"/>
             <a:ext cx="2926080" cy="219456"/>
           </a:xfrm>
           <a:prstGeom prst="rect">
@@ -6007,7 +6633,7 @@
         </p:nvCxnSpPr>
         <p:spPr>
           <a:xfrm>
-            <a:off x="2194560" y="2578608"/>
+            <a:off x="2194560" y="2514600"/>
             <a:ext cx="3931920" cy="0"/>
           </a:xfrm>
           <a:prstGeom prst="line">
@@ -6044,7 +6670,7 @@
         </p:nvSpPr>
         <p:spPr>
           <a:xfrm>
-            <a:off x="4014215" y="2432303"/>
+            <a:off x="4014215" y="2368296"/>
             <a:ext cx="292608" cy="292608"/>
           </a:xfrm>
           <a:prstGeom prst="ellipse">
@@ -6084,7 +6710,7 @@
                   <a:srgbClr val="E65100"/>
                 </a:solidFill>
               </a:rPr>
-              <a:t>C2</a:t>
+              <a:t>Scan</a:t>
             </a:r>
           </a:p>
         </p:txBody>
@@ -6097,7 +6723,7 @@
         </p:nvSpPr>
         <p:spPr>
           <a:xfrm>
-            <a:off x="2697479" y="2322576"/>
+            <a:off x="2697479" y="2258568"/>
             <a:ext cx="2926080" cy="219456"/>
           </a:xfrm>
           <a:prstGeom prst="rect">
@@ -6123,7 +6749,7 @@
                   <a:srgbClr val="E65100"/>
                 </a:solidFill>
               </a:rPr>
-              <a:t>flush_line(slots[0]); flush_line(slots[4]); mfence  (Phase-2.6 flush-collapse)</a:t>
+              <a:t>flush_line(slots[0]); flush_line(slots[4]); mfence; scan 7 slots</a:t>
             </a:r>
           </a:p>
         </p:txBody>
@@ -6136,7 +6762,7 @@
         </p:nvCxnSpPr>
         <p:spPr>
           <a:xfrm>
-            <a:off x="2194560" y="2962656"/>
+            <a:off x="2194560" y="2926080"/>
             <a:ext cx="3931920" cy="0"/>
           </a:xfrm>
           <a:prstGeom prst="line">
@@ -6173,7 +6799,7 @@
         </p:nvSpPr>
         <p:spPr>
           <a:xfrm>
-            <a:off x="4014215" y="2816351"/>
+            <a:off x="4014215" y="2779776"/>
             <a:ext cx="292608" cy="292608"/>
           </a:xfrm>
           <a:prstGeom prst="ellipse">
@@ -6213,7 +6839,7 @@
                   <a:srgbClr val="E65100"/>
                 </a:solidFill>
               </a:rPr>
-              <a:t>C3</a:t>
+              <a:t>Pub</a:t>
             </a:r>
           </a:p>
         </p:txBody>
@@ -6226,7 +6852,7 @@
         </p:nvSpPr>
         <p:spPr>
           <a:xfrm>
-            <a:off x="2697479" y="2706624"/>
+            <a:off x="2697479" y="2670048"/>
             <a:ext cx="2926080" cy="219456"/>
           </a:xfrm>
           <a:prstGeom prst="rect">
@@ -6252,7 +6878,7 @@
                   <a:srgbClr val="E65100"/>
                 </a:solidFill>
               </a:rPr>
-              <a:t>scan 7 slots; pick target_slot for UPDATE / INSERT / DELETE</a:t>
+              <a:t>slot.value = V; flush; sfence    (INSERT: + key flush + sfence)</a:t>
             </a:r>
           </a:p>
         </p:txBody>
@@ -6265,7 +6891,7 @@
         </p:nvCxnSpPr>
         <p:spPr>
           <a:xfrm>
-            <a:off x="2194560" y="3346703"/>
+            <a:off x="2194560" y="3337560"/>
             <a:ext cx="3931920" cy="0"/>
           </a:xfrm>
           <a:prstGeom prst="line">
@@ -6302,7 +6928,136 @@
         </p:nvSpPr>
         <p:spPr>
           <a:xfrm>
-            <a:off x="4014215" y="3200399"/>
+            <a:off x="4014215" y="3191256"/>
+            <a:ext cx="292608" cy="292608"/>
+          </a:xfrm>
+          <a:prstGeom prst="ellipse">
+            <a:avLst/>
+          </a:prstGeom>
+          <a:solidFill>
+            <a:srgbClr val="FFF49C"/>
+          </a:solidFill>
+          <a:ln w="19050">
+            <a:solidFill>
+              <a:srgbClr val="F9A825"/>
+            </a:solidFill>
+          </a:ln>
+        </p:spPr>
+        <p:style>
+          <a:lnRef idx="1">
+            <a:schemeClr val="accent1"/>
+          </a:lnRef>
+          <a:fillRef idx="3">
+            <a:schemeClr val="accent1"/>
+          </a:fillRef>
+          <a:effectRef idx="2">
+            <a:schemeClr val="accent1"/>
+          </a:effectRef>
+          <a:fontRef idx="minor">
+            <a:schemeClr val="lt1"/>
+          </a:fontRef>
+        </p:style>
+        <p:txBody>
+          <a:bodyPr rtlCol="0" anchor="ctr" lIns="0" rIns="0" tIns="0" bIns="0"/>
+          <a:lstStyle/>
+          <a:p>
+            <a:pPr algn="ctr"/>
+            <a:r>
+              <a:rPr sz="800" b="1">
+                <a:solidFill>
+                  <a:srgbClr val="333333"/>
+                </a:solidFill>
+              </a:rPr>
+              <a:t>Epoch</a:t>
+            </a:r>
+          </a:p>
+        </p:txBody>
+      </p:sp>
+      <p:sp>
+        <p:nvSpPr>
+          <p:cNvPr id="22" name="TextBox 21"/>
+          <p:cNvSpPr txBox="1"/>
+          <p:nvPr/>
+        </p:nvSpPr>
+        <p:spPr>
+          <a:xfrm>
+            <a:off x="2697479" y="3081528"/>
+            <a:ext cx="2926080" cy="219456"/>
+          </a:xfrm>
+          <a:prstGeom prst="rect">
+            <a:avLst/>
+          </a:prstGeom>
+          <a:solidFill>
+            <a:srgbClr val="FFFFFF"/>
+          </a:solidFill>
+          <a:ln>
+            <a:noFill/>
+          </a:ln>
+        </p:spPr>
+        <p:txBody>
+          <a:bodyPr wrap="none" lIns="25400" rIns="25400" tIns="0" bIns="0">
+            <a:spAutoFit/>
+          </a:bodyPr>
+          <a:lstStyle/>
+          <a:p>
+            <a:pPr algn="l"/>
+            <a:r>
+              <a:rPr sz="850" b="1" i="0">
+                <a:solidFill>
+                  <a:srgbClr val="E65100"/>
+                </a:solidFill>
+              </a:rPr>
+              <a:t>★ atomic_add_fetch(&amp;write_epoch, 1) + flush + sfence ★  1.4 µs CXL atomic = peer-visible commit</a:t>
+            </a:r>
+          </a:p>
+        </p:txBody>
+      </p:sp>
+      <p:cxnSp>
+        <p:nvCxnSpPr>
+          <p:cNvPr id="23" name="Connector 22"/>
+          <p:cNvCxnSpPr/>
+          <p:nvPr/>
+        </p:nvCxnSpPr>
+        <p:spPr>
+          <a:xfrm>
+            <a:off x="2194560" y="3749040"/>
+            <a:ext cx="3931920" cy="0"/>
+          </a:xfrm>
+          <a:prstGeom prst="line">
+            <a:avLst/>
+          </a:prstGeom>
+          <a:ln w="20320">
+            <a:solidFill>
+              <a:srgbClr val="E65100"/>
+            </a:solidFill>
+            <a:tailEnd type="triangle" w="med" h="med"/>
+            <a:prstDash val="dash"/>
+          </a:ln>
+        </p:spPr>
+        <p:style>
+          <a:lnRef idx="2">
+            <a:schemeClr val="accent1"/>
+          </a:lnRef>
+          <a:fillRef idx="0">
+            <a:schemeClr val="accent1"/>
+          </a:fillRef>
+          <a:effectRef idx="1">
+            <a:schemeClr val="accent1"/>
+          </a:effectRef>
+          <a:fontRef idx="minor">
+            <a:schemeClr val="tx1"/>
+          </a:fontRef>
+        </p:style>
+      </p:cxnSp>
+      <p:sp>
+        <p:nvSpPr>
+          <p:cNvPr id="24" name="Oval 23"/>
+          <p:cNvSpPr/>
+          <p:nvPr/>
+        </p:nvSpPr>
+        <p:spPr>
+          <a:xfrm>
+            <a:off x="4014215" y="3602736"/>
             <a:ext cx="292608" cy="292608"/>
           </a:xfrm>
           <a:prstGeom prst="ellipse">
@@ -6342,20 +7097,20 @@
                   <a:srgbClr val="E65100"/>
                 </a:solidFill>
               </a:rPr>
-              <a:t>C4</a:t>
-            </a:r>
-          </a:p>
-        </p:txBody>
-      </p:sp>
-      <p:sp>
-        <p:nvSpPr>
-          <p:cNvPr id="22" name="TextBox 21"/>
+              <a:t>Unlk</a:t>
+            </a:r>
+          </a:p>
+        </p:txBody>
+      </p:sp>
+      <p:sp>
+        <p:nvSpPr>
+          <p:cNvPr id="25" name="TextBox 24"/>
           <p:cNvSpPr txBox="1"/>
           <p:nvPr/>
         </p:nvSpPr>
         <p:spPr>
           <a:xfrm>
-            <a:off x="2697479" y="3090672"/>
+            <a:off x="2697479" y="3493008"/>
             <a:ext cx="2926080" cy="219456"/>
           </a:xfrm>
           <a:prstGeom prst="rect">
@@ -6381,264 +7136,6 @@
                   <a:srgbClr val="E65100"/>
                 </a:solidFill>
               </a:rPr>
-              <a:t>slot.value = V; flush; sfence    (or INSERT key+value pair publish)</a:t>
-            </a:r>
-          </a:p>
-        </p:txBody>
-      </p:sp>
-      <p:cxnSp>
-        <p:nvCxnSpPr>
-          <p:cNvPr id="23" name="Connector 22"/>
-          <p:cNvCxnSpPr/>
-          <p:nvPr/>
-        </p:nvCxnSpPr>
-        <p:spPr>
-          <a:xfrm>
-            <a:off x="2194560" y="3730752"/>
-            <a:ext cx="3931920" cy="0"/>
-          </a:xfrm>
-          <a:prstGeom prst="line">
-            <a:avLst/>
-          </a:prstGeom>
-          <a:ln w="20320">
-            <a:solidFill>
-              <a:srgbClr val="E65100"/>
-            </a:solidFill>
-            <a:tailEnd type="triangle" w="med" h="med"/>
-            <a:prstDash val="dash"/>
-          </a:ln>
-        </p:spPr>
-        <p:style>
-          <a:lnRef idx="2">
-            <a:schemeClr val="accent1"/>
-          </a:lnRef>
-          <a:fillRef idx="0">
-            <a:schemeClr val="accent1"/>
-          </a:fillRef>
-          <a:effectRef idx="1">
-            <a:schemeClr val="accent1"/>
-          </a:effectRef>
-          <a:fontRef idx="minor">
-            <a:schemeClr val="tx1"/>
-          </a:fontRef>
-        </p:style>
-      </p:cxnSp>
-      <p:sp>
-        <p:nvSpPr>
-          <p:cNvPr id="24" name="Oval 23"/>
-          <p:cNvSpPr/>
-          <p:nvPr/>
-        </p:nvSpPr>
-        <p:spPr>
-          <a:xfrm>
-            <a:off x="4014215" y="3584448"/>
-            <a:ext cx="292608" cy="292608"/>
-          </a:xfrm>
-          <a:prstGeom prst="ellipse">
-            <a:avLst/>
-          </a:prstGeom>
-          <a:solidFill>
-            <a:srgbClr val="FFF49C"/>
-          </a:solidFill>
-          <a:ln w="19050">
-            <a:solidFill>
-              <a:srgbClr val="F9A825"/>
-            </a:solidFill>
-          </a:ln>
-        </p:spPr>
-        <p:style>
-          <a:lnRef idx="1">
-            <a:schemeClr val="accent1"/>
-          </a:lnRef>
-          <a:fillRef idx="3">
-            <a:schemeClr val="accent1"/>
-          </a:fillRef>
-          <a:effectRef idx="2">
-            <a:schemeClr val="accent1"/>
-          </a:effectRef>
-          <a:fontRef idx="minor">
-            <a:schemeClr val="lt1"/>
-          </a:fontRef>
-        </p:style>
-        <p:txBody>
-          <a:bodyPr rtlCol="0" anchor="ctr" lIns="0" rIns="0" tIns="0" bIns="0"/>
-          <a:lstStyle/>
-          <a:p>
-            <a:pPr algn="ctr"/>
-            <a:r>
-              <a:rPr sz="800" b="1">
-                <a:solidFill>
-                  <a:srgbClr val="333333"/>
-                </a:solidFill>
-              </a:rPr>
-              <a:t>C5</a:t>
-            </a:r>
-          </a:p>
-        </p:txBody>
-      </p:sp>
-      <p:sp>
-        <p:nvSpPr>
-          <p:cNvPr id="25" name="TextBox 24"/>
-          <p:cNvSpPr txBox="1"/>
-          <p:nvPr/>
-        </p:nvSpPr>
-        <p:spPr>
-          <a:xfrm>
-            <a:off x="2697479" y="3474720"/>
-            <a:ext cx="2926080" cy="219456"/>
-          </a:xfrm>
-          <a:prstGeom prst="rect">
-            <a:avLst/>
-          </a:prstGeom>
-          <a:solidFill>
-            <a:srgbClr val="FFFFFF"/>
-          </a:solidFill>
-          <a:ln>
-            <a:noFill/>
-          </a:ln>
-        </p:spPr>
-        <p:txBody>
-          <a:bodyPr wrap="none" lIns="25400" rIns="25400" tIns="0" bIns="0">
-            <a:spAutoFit/>
-          </a:bodyPr>
-          <a:lstStyle/>
-          <a:p>
-            <a:pPr algn="l"/>
-            <a:r>
-              <a:rPr sz="850" b="1" i="0">
-                <a:solidFill>
-                  <a:srgbClr val="E65100"/>
-                </a:solidFill>
-              </a:rPr>
-              <a:t>★ atomic_add_fetch(&amp;write_epoch, 1) + flush + sfence ★  (1.4 µs CXL atomic = peer-visible commit)</a:t>
-            </a:r>
-          </a:p>
-        </p:txBody>
-      </p:sp>
-      <p:cxnSp>
-        <p:nvCxnSpPr>
-          <p:cNvPr id="26" name="Connector 25"/>
-          <p:cNvCxnSpPr/>
-          <p:nvPr/>
-        </p:nvCxnSpPr>
-        <p:spPr>
-          <a:xfrm>
-            <a:off x="2194560" y="4114800"/>
-            <a:ext cx="3931920" cy="0"/>
-          </a:xfrm>
-          <a:prstGeom prst="line">
-            <a:avLst/>
-          </a:prstGeom>
-          <a:ln w="20320">
-            <a:solidFill>
-              <a:srgbClr val="E65100"/>
-            </a:solidFill>
-            <a:tailEnd type="triangle" w="med" h="med"/>
-            <a:prstDash val="dash"/>
-          </a:ln>
-        </p:spPr>
-        <p:style>
-          <a:lnRef idx="2">
-            <a:schemeClr val="accent1"/>
-          </a:lnRef>
-          <a:fillRef idx="0">
-            <a:schemeClr val="accent1"/>
-          </a:fillRef>
-          <a:effectRef idx="1">
-            <a:schemeClr val="accent1"/>
-          </a:effectRef>
-          <a:fontRef idx="minor">
-            <a:schemeClr val="tx1"/>
-          </a:fontRef>
-        </p:style>
-      </p:cxnSp>
-      <p:sp>
-        <p:nvSpPr>
-          <p:cNvPr id="27" name="Oval 26"/>
-          <p:cNvSpPr/>
-          <p:nvPr/>
-        </p:nvSpPr>
-        <p:spPr>
-          <a:xfrm>
-            <a:off x="4014215" y="3968496"/>
-            <a:ext cx="292608" cy="292608"/>
-          </a:xfrm>
-          <a:prstGeom prst="ellipse">
-            <a:avLst/>
-          </a:prstGeom>
-          <a:solidFill>
-            <a:srgbClr val="FFFFFF"/>
-          </a:solidFill>
-          <a:ln w="19050">
-            <a:solidFill>
-              <a:srgbClr val="E65100"/>
-            </a:solidFill>
-          </a:ln>
-        </p:spPr>
-        <p:style>
-          <a:lnRef idx="1">
-            <a:schemeClr val="accent1"/>
-          </a:lnRef>
-          <a:fillRef idx="3">
-            <a:schemeClr val="accent1"/>
-          </a:fillRef>
-          <a:effectRef idx="2">
-            <a:schemeClr val="accent1"/>
-          </a:effectRef>
-          <a:fontRef idx="minor">
-            <a:schemeClr val="lt1"/>
-          </a:fontRef>
-        </p:style>
-        <p:txBody>
-          <a:bodyPr rtlCol="0" anchor="ctr" lIns="0" rIns="0" tIns="0" bIns="0"/>
-          <a:lstStyle/>
-          <a:p>
-            <a:pPr algn="ctr"/>
-            <a:r>
-              <a:rPr sz="800" b="1">
-                <a:solidFill>
-                  <a:srgbClr val="E65100"/>
-                </a:solidFill>
-              </a:rPr>
-              <a:t>C6</a:t>
-            </a:r>
-          </a:p>
-        </p:txBody>
-      </p:sp>
-      <p:sp>
-        <p:nvSpPr>
-          <p:cNvPr id="28" name="TextBox 27"/>
-          <p:cNvSpPr txBox="1"/>
-          <p:nvPr/>
-        </p:nvSpPr>
-        <p:spPr>
-          <a:xfrm>
-            <a:off x="2697479" y="3858768"/>
-            <a:ext cx="2926080" cy="219456"/>
-          </a:xfrm>
-          <a:prstGeom prst="rect">
-            <a:avLst/>
-          </a:prstGeom>
-          <a:solidFill>
-            <a:srgbClr val="FFFFFF"/>
-          </a:solidFill>
-          <a:ln>
-            <a:noFill/>
-          </a:ln>
-        </p:spPr>
-        <p:txBody>
-          <a:bodyPr wrap="none" lIns="25400" rIns="25400" tIns="0" bIns="0">
-            <a:spAutoFit/>
-          </a:bodyPr>
-          <a:lstStyle/>
-          <a:p>
-            <a:pPr algn="l"/>
-            <a:r>
-              <a:rPr sz="850" b="1" i="0">
-                <a:solidFill>
-                  <a:srgbClr val="E65100"/>
-                </a:solidFill>
-              </a:rPr>
               <a:t>lock_table_.unlock()   LFM release  →  return 0</a:t>
             </a:r>
           </a:p>
@@ -6646,7 +7143,7 @@
       </p:sp>
       <p:sp>
         <p:nvSpPr>
-          <p:cNvPr id="29" name="Rounded Rectangle 28"/>
+          <p:cNvPr id="26" name="Rounded Rectangle 25"/>
           <p:cNvSpPr/>
           <p:nvPr/>
         </p:nvSpPr>
@@ -6722,7 +7219,7 @@
                   <a:srgbClr val="333333"/>
                 </a:solidFill>
               </a:rPr>
-              <a:t>• 1 linearization point — write_epoch atomic bump (C5)</a:t>
+              <a:t>• 1 linearization point — Epoch atomic bump</a:t>
             </a:r>
           </a:p>
           <a:p>
@@ -6739,7 +7236,7 @@
       </p:sp>
       <p:sp>
         <p:nvSpPr>
-          <p:cNvPr id="30" name="Rounded Rectangle 29"/>
+          <p:cNvPr id="27" name="Rounded Rectangle 26"/>
           <p:cNvSpPr/>
           <p:nvPr/>
         </p:nvSpPr>
@@ -6784,7 +7281,7 @@
       </p:sp>
       <p:sp>
         <p:nvSpPr>
-          <p:cNvPr id="31" name="TextBox 30"/>
+          <p:cNvPr id="28" name="TextBox 27"/>
           <p:cNvSpPr txBox="1"/>
           <p:nvPr/>
         </p:nvSpPr>
@@ -6811,14 +7308,14 @@
                   <a:srgbClr val="E65100"/>
                 </a:solidFill>
               </a:rPr>
-              <a:t>╌╌▶  Step arrow</a:t>
-            </a:r>
-          </a:p>
-        </p:txBody>
-      </p:sp>
-      <p:sp>
-        <p:nvSpPr>
-          <p:cNvPr id="32" name="TextBox 31"/>
+              <a:t>● DECOMP_REC probe</a:t>
+            </a:r>
+          </a:p>
+        </p:txBody>
+      </p:sp>
+      <p:sp>
+        <p:nvSpPr>
+          <p:cNvPr id="29" name="TextBox 28"/>
           <p:cNvSpPr txBox="1"/>
           <p:nvPr/>
         </p:nvSpPr>
@@ -6845,14 +7342,14 @@
                   <a:srgbClr val="F9A825"/>
                 </a:solidFill>
               </a:rPr>
-              <a:t>● Linearization (C5 epoch)</a:t>
-            </a:r>
-          </a:p>
-        </p:txBody>
-      </p:sp>
-      <p:sp>
-        <p:nvSpPr>
-          <p:cNvPr id="33" name="TextBox 32"/>
+              <a:t>★ Linearization (Epoch)</a:t>
+            </a:r>
+          </a:p>
+        </p:txBody>
+      </p:sp>
+      <p:sp>
+        <p:nvSpPr>
+          <p:cNvPr id="30" name="TextBox 29"/>
           <p:cNvSpPr txBox="1"/>
           <p:nvPr/>
         </p:nvSpPr>
@@ -6879,14 +7376,14 @@
                   <a:srgbClr val="C62828"/>
                 </a:solidFill>
               </a:rPr>
-              <a:t>● Cross-host blocking (C1 LFM)</a:t>
-            </a:r>
-          </a:p>
-        </p:txBody>
-      </p:sp>
-      <p:sp>
-        <p:nvSpPr>
-          <p:cNvPr id="34" name="TextBox 33"/>
+              <a:t>● Cross-host blocking (Lock)</a:t>
+            </a:r>
+          </a:p>
+        </p:txBody>
+      </p:sp>
+      <p:sp>
+        <p:nvSpPr>
+          <p:cNvPr id="31" name="TextBox 30"/>
           <p:cNvSpPr txBox="1"/>
           <p:nvPr/>
         </p:nvSpPr>
@@ -6920,7 +7417,7 @@
       </p:sp>
       <p:sp>
         <p:nvSpPr>
-          <p:cNvPr id="35" name="TextBox 34"/>
+          <p:cNvPr id="32" name="TextBox 31"/>
           <p:cNvSpPr txBox="1"/>
           <p:nvPr/>
         </p:nvSpPr>
@@ -6947,7 +7444,7 @@
                   <a:srgbClr val="8C3200"/>
                 </a:solidFill>
               </a:rPr>
-              <a:t>6 steps · 1 actor · 1 blocking point</a:t>
+              <a:t>5 probed stages · 1 actor · 1 blocking point</a:t>
             </a:r>
           </a:p>
         </p:txBody>
@@ -6998,7 +7495,7 @@
                   <a:srgbClr val="154FC2"/>
                 </a:solidFill>
               </a:rPr>
-              <a:t>Protocol A — Read path: TLS L1 → KvCachePool L2 → cross-host forwarder-pool-direct</a:t>
+              <a:t>Protocol A — Read path: TLS L1 → L2 → cross-host forwarder-pool-direct</a:t>
             </a:r>
           </a:p>
         </p:txBody>
@@ -7031,7 +7528,7 @@
                   <a:srgbClr val="9E9E9E"/>
                 </a:solidFill>
               </a:rPr>
-              <a:t>16 numbered steps · 4 actors · 1 cross-host blocking (A8r staging poll, 200 ms cap) · 3 linearization checkpoints (TLS epoch, L2 seqlock seq, C13 lookup_epoch)</a:t>
+              <a:t>Steps labelled by path_decomp probe tag (R0_tls_hit, R1, R2hit, R2miss, R3, R4, R6). Greyed "untracked" steps = code without PROBE_OP. Same probe tags appear in slide 7 latency table.</a:t>
             </a:r>
           </a:p>
         </p:txBody>
@@ -7084,7 +7581,8 @@
                   <a:srgbClr val="1565C0"/>
                 </a:solidFill>
               </a:rPr>
-              <a:t>host 0  worker (caller)</a:t>
+              <a:t>host 0  worker (caller)
+search() — R* probes</a:t>
             </a:r>
           </a:p>
         </p:txBody>
@@ -7138,7 +7636,7 @@
                 </a:solidFill>
               </a:rPr>
               <a:t>TLS L1
-(per-worker private DRAM)</a:t>
+(private DRAM)</a:t>
             </a:r>
           </a:p>
         </p:txBody>
@@ -7192,7 +7690,7 @@
                 </a:solidFill>
               </a:rPr>
               <a:t>L2 KvCachePool
-(host-shared DRAM, seqlock)</a:t>
+(MAP_SHARED DRAM, seqlock CAS)</a:t>
             </a:r>
           </a:p>
         </p:txBody>
@@ -7245,7 +7743,8 @@
                   <a:srgbClr val="154FC2"/>
                 </a:solidFill>
               </a:rPr>
-              <a:t>host 1  ReadReceiver (cpu 67)</a:t>
+              <a:t>host 1  ReadReceiver (cpu 67)
+read_handler — no R* probes</a:t>
             </a:r>
           </a:p>
         </p:txBody>
@@ -7259,7 +7758,7 @@
         <p:spPr>
           <a:xfrm>
             <a:off x="10424160" y="1188720"/>
-            <a:ext cx="1645920" cy="411480"/>
+            <a:ext cx="1645920" cy="457200"/>
           </a:xfrm>
           <a:prstGeom prst="roundRect">
             <a:avLst/>
@@ -7298,7 +7797,8 @@
                   <a:srgbClr val="8C3200"/>
                 </a:solidFill>
               </a:rPr>
-              <a:t>ReadStaging[0][1] (CXL)</a:t>
+              <a:t>ReadStaging[0][1]
+(CXL arena)</a:t>
             </a:r>
           </a:p>
         </p:txBody>
@@ -7311,8 +7811,8 @@
         </p:nvCxnSpPr>
         <p:spPr>
           <a:xfrm>
-            <a:off x="1280160" y="1600200"/>
-            <a:ext cx="0" cy="4389120"/>
+            <a:off x="1280160" y="1691640"/>
+            <a:ext cx="0" cy="4297680"/>
           </a:xfrm>
           <a:prstGeom prst="line">
             <a:avLst/>
@@ -7347,8 +7847,8 @@
         </p:nvCxnSpPr>
         <p:spPr>
           <a:xfrm>
-            <a:off x="3703320" y="1600200"/>
-            <a:ext cx="0" cy="4389120"/>
+            <a:off x="3703320" y="1691640"/>
+            <a:ext cx="0" cy="4297680"/>
           </a:xfrm>
           <a:prstGeom prst="line">
             <a:avLst/>
@@ -7383,8 +7883,8 @@
         </p:nvCxnSpPr>
         <p:spPr>
           <a:xfrm>
-            <a:off x="6126480" y="1600200"/>
-            <a:ext cx="0" cy="4389120"/>
+            <a:off x="6126480" y="1691640"/>
+            <a:ext cx="0" cy="4297680"/>
           </a:xfrm>
           <a:prstGeom prst="line">
             <a:avLst/>
@@ -7419,8 +7919,8 @@
         </p:nvCxnSpPr>
         <p:spPr>
           <a:xfrm>
-            <a:off x="9006840" y="1600200"/>
-            <a:ext cx="0" cy="4389120"/>
+            <a:off x="9006840" y="1691640"/>
+            <a:ext cx="0" cy="4297680"/>
           </a:xfrm>
           <a:prstGeom prst="line">
             <a:avLst/>
@@ -7455,8 +7955,8 @@
         </p:nvCxnSpPr>
         <p:spPr>
           <a:xfrm>
-            <a:off x="11247120" y="1600200"/>
-            <a:ext cx="0" cy="4389120"/>
+            <a:off x="11247120" y="1691640"/>
+            <a:ext cx="0" cy="4297680"/>
           </a:xfrm>
           <a:prstGeom prst="line">
             <a:avLst/>
@@ -7531,7 +8031,7 @@
                   <a:srgbClr val="154FC2"/>
                 </a:solidFill>
               </a:rPr>
-              <a:t>A1r</a:t>
+              <a:t>R1</a:t>
             </a:r>
           </a:p>
         </p:txBody>
@@ -7570,7 +8070,7 @@
                   <a:srgbClr val="154FC2"/>
                 </a:solidFill>
               </a:rPr>
-              <a:t>enter search(K)</a:t>
+              <a:t>enter search(K)  PROBE_OP("R1")</a:t>
             </a:r>
           </a:p>
         </p:txBody>
@@ -7583,7 +8083,7 @@
         </p:nvCxnSpPr>
         <p:spPr>
           <a:xfrm>
-            <a:off x="1280160" y="2039112"/>
+            <a:off x="1280160" y="1984248"/>
             <a:ext cx="2423160" cy="0"/>
           </a:xfrm>
           <a:prstGeom prst="line">
@@ -7591,7 +8091,7 @@
           </a:prstGeom>
           <a:ln w="20320">
             <a:solidFill>
-              <a:srgbClr val="154FC2"/>
+              <a:srgbClr val="9E9E9E"/>
             </a:solidFill>
             <a:tailEnd type="triangle" w="med" h="med"/>
           </a:ln>
@@ -7619,7 +8119,99 @@
         </p:nvSpPr>
         <p:spPr>
           <a:xfrm>
-            <a:off x="2345435" y="1892807"/>
+            <a:off x="2345435" y="1837943"/>
+            <a:ext cx="292608" cy="292608"/>
+          </a:xfrm>
+          <a:prstGeom prst="ellipse">
+            <a:avLst/>
+          </a:prstGeom>
+          <a:solidFill>
+            <a:srgbClr val="FFFFFF"/>
+          </a:solidFill>
+          <a:ln w="19050">
+            <a:solidFill>
+              <a:srgbClr val="9E9E9E"/>
+            </a:solidFill>
+          </a:ln>
+        </p:spPr>
+        <p:style>
+          <a:lnRef idx="1">
+            <a:schemeClr val="accent1"/>
+          </a:lnRef>
+          <a:fillRef idx="3">
+            <a:schemeClr val="accent1"/>
+          </a:fillRef>
+          <a:effectRef idx="2">
+            <a:schemeClr val="accent1"/>
+          </a:effectRef>
+          <a:fontRef idx="minor">
+            <a:schemeClr val="lt1"/>
+          </a:fontRef>
+        </p:style>
+        <p:txBody>
+          <a:bodyPr rtlCol="0" anchor="ctr" lIns="0" rIns="0" tIns="0" bIns="0"/>
+          <a:lstStyle/>
+          <a:p>
+            <a:pPr algn="ctr"/>
+            <a:r>
+              <a:rPr sz="800" b="1">
+                <a:solidFill>
+                  <a:srgbClr val="9E9E9E"/>
+                </a:solidFill>
+              </a:rPr>
+              <a:t>—</a:t>
+            </a:r>
+          </a:p>
+        </p:txBody>
+      </p:sp>
+      <p:sp>
+        <p:nvSpPr>
+          <p:cNvPr id="18" name="TextBox 17"/>
+          <p:cNvSpPr txBox="1"/>
+          <p:nvPr/>
+        </p:nvSpPr>
+        <p:spPr>
+          <a:xfrm>
+            <a:off x="1028699" y="1728216"/>
+            <a:ext cx="2926080" cy="219456"/>
+          </a:xfrm>
+          <a:prstGeom prst="rect">
+            <a:avLst/>
+          </a:prstGeom>
+          <a:solidFill>
+            <a:srgbClr val="FFFFFF"/>
+          </a:solidFill>
+          <a:ln>
+            <a:noFill/>
+          </a:ln>
+        </p:spPr>
+        <p:txBody>
+          <a:bodyPr wrap="none" lIns="25400" rIns="25400" tIns="0" bIns="0">
+            <a:spAutoFit/>
+          </a:bodyPr>
+          <a:lstStyle/>
+          <a:p>
+            <a:pPr algn="l"/>
+            <a:r>
+              <a:rPr sz="850" b="1" i="0">
+                <a:solidFill>
+                  <a:srgbClr val="9E9E9E"/>
+                </a:solidFill>
+              </a:rPr>
+              <a:t>tls_lookup: read bucket_epoch; compare observed_epoch</a:t>
+            </a:r>
+          </a:p>
+        </p:txBody>
+      </p:sp>
+      <p:sp>
+        <p:nvSpPr>
+          <p:cNvPr id="19" name="Oval 18"/>
+          <p:cNvSpPr/>
+          <p:nvPr/>
+        </p:nvSpPr>
+        <p:spPr>
+          <a:xfrm>
+            <a:off x="1133856" y="2039112"/>
             <a:ext cx="292608" cy="292608"/>
           </a:xfrm>
           <a:prstGeom prst="ellipse">
@@ -7659,21 +8251,21 @@
                   <a:srgbClr val="333333"/>
                 </a:solidFill>
               </a:rPr>
-              <a:t>A2r</a:t>
-            </a:r>
-          </a:p>
-        </p:txBody>
-      </p:sp>
-      <p:sp>
-        <p:nvSpPr>
-          <p:cNvPr id="18" name="TextBox 17"/>
+              <a:t>R0_h</a:t>
+            </a:r>
+          </a:p>
+        </p:txBody>
+      </p:sp>
+      <p:sp>
+        <p:nvSpPr>
+          <p:cNvPr id="20" name="TextBox 19"/>
           <p:cNvSpPr txBox="1"/>
           <p:nvPr/>
         </p:nvSpPr>
         <p:spPr>
           <a:xfrm>
-            <a:off x="1028699" y="1783080"/>
-            <a:ext cx="2926080" cy="219456"/>
+            <a:off x="1463039" y="2093976"/>
+            <a:ext cx="2743200" cy="219456"/>
           </a:xfrm>
           <a:prstGeom prst="rect">
             <a:avLst/>
@@ -7698,20 +8290,148 @@
                   <a:srgbClr val="154FC2"/>
                 </a:solidFill>
               </a:rPr>
-              <a:t>tls_lookup: read bucket_epoch (1 LD); compare observed_epoch</a:t>
-            </a:r>
-          </a:p>
-        </p:txBody>
-      </p:sp>
-      <p:sp>
-        <p:nvSpPr>
-          <p:cNvPr id="19" name="Oval 18"/>
+              <a:t>★ if TLS hit + epoch fresh: PROBE_OP("R0_tls_hit") → return ~80 ns ★</a:t>
+            </a:r>
+          </a:p>
+        </p:txBody>
+      </p:sp>
+      <p:cxnSp>
+        <p:nvCxnSpPr>
+          <p:cNvPr id="21" name="Connector 20"/>
+          <p:cNvCxnSpPr/>
+          <p:nvPr/>
+        </p:nvCxnSpPr>
+        <p:spPr>
+          <a:xfrm>
+            <a:off x="1280160" y="2386584"/>
+            <a:ext cx="4846320" cy="0"/>
+          </a:xfrm>
+          <a:prstGeom prst="line">
+            <a:avLst/>
+          </a:prstGeom>
+          <a:ln w="20320">
+            <a:solidFill>
+              <a:srgbClr val="9E9E9E"/>
+            </a:solidFill>
+            <a:tailEnd type="triangle" w="med" h="med"/>
+          </a:ln>
+        </p:spPr>
+        <p:style>
+          <a:lnRef idx="2">
+            <a:schemeClr val="accent1"/>
+          </a:lnRef>
+          <a:fillRef idx="0">
+            <a:schemeClr val="accent1"/>
+          </a:fillRef>
+          <a:effectRef idx="1">
+            <a:schemeClr val="accent1"/>
+          </a:effectRef>
+          <a:fontRef idx="minor">
+            <a:schemeClr val="tx1"/>
+          </a:fontRef>
+        </p:style>
+      </p:cxnSp>
+      <p:sp>
+        <p:nvSpPr>
+          <p:cNvPr id="22" name="Oval 21"/>
           <p:cNvSpPr/>
           <p:nvPr/>
         </p:nvSpPr>
         <p:spPr>
           <a:xfrm>
-            <a:off x="1133856" y="2148839"/>
+            <a:off x="3557015" y="2240280"/>
+            <a:ext cx="292608" cy="292608"/>
+          </a:xfrm>
+          <a:prstGeom prst="ellipse">
+            <a:avLst/>
+          </a:prstGeom>
+          <a:solidFill>
+            <a:srgbClr val="FFFFFF"/>
+          </a:solidFill>
+          <a:ln w="19050">
+            <a:solidFill>
+              <a:srgbClr val="9E9E9E"/>
+            </a:solidFill>
+          </a:ln>
+        </p:spPr>
+        <p:style>
+          <a:lnRef idx="1">
+            <a:schemeClr val="accent1"/>
+          </a:lnRef>
+          <a:fillRef idx="3">
+            <a:schemeClr val="accent1"/>
+          </a:fillRef>
+          <a:effectRef idx="2">
+            <a:schemeClr val="accent1"/>
+          </a:effectRef>
+          <a:fontRef idx="minor">
+            <a:schemeClr val="lt1"/>
+          </a:fontRef>
+        </p:style>
+        <p:txBody>
+          <a:bodyPr rtlCol="0" anchor="ctr" lIns="0" rIns="0" tIns="0" bIns="0"/>
+          <a:lstStyle/>
+          <a:p>
+            <a:pPr algn="ctr"/>
+            <a:r>
+              <a:rPr sz="800" b="1">
+                <a:solidFill>
+                  <a:srgbClr val="9E9E9E"/>
+                </a:solidFill>
+              </a:rPr>
+              <a:t>—</a:t>
+            </a:r>
+          </a:p>
+        </p:txBody>
+      </p:sp>
+      <p:sp>
+        <p:nvSpPr>
+          <p:cNvPr id="23" name="TextBox 22"/>
+          <p:cNvSpPr txBox="1"/>
+          <p:nvPr/>
+        </p:nvSpPr>
+        <p:spPr>
+          <a:xfrm>
+            <a:off x="2240279" y="2130552"/>
+            <a:ext cx="2926080" cy="219456"/>
+          </a:xfrm>
+          <a:prstGeom prst="rect">
+            <a:avLst/>
+          </a:prstGeom>
+          <a:solidFill>
+            <a:srgbClr val="FFFFFF"/>
+          </a:solidFill>
+          <a:ln>
+            <a:noFill/>
+          </a:ln>
+        </p:spPr>
+        <p:txBody>
+          <a:bodyPr wrap="none" lIns="25400" rIns="25400" tIns="0" bIns="0">
+            <a:spAutoFit/>
+          </a:bodyPr>
+          <a:lstStyle/>
+          <a:p>
+            <a:pPr algn="l"/>
+            <a:r>
+              <a:rPr sz="850" b="1" i="0">
+                <a:solidFill>
+                  <a:srgbClr val="9E9E9E"/>
+                </a:solidFill>
+              </a:rPr>
+              <a:t>else cache_pool_lookup: seqlock CAS read of L2 entry</a:t>
+            </a:r>
+          </a:p>
+        </p:txBody>
+      </p:sp>
+      <p:sp>
+        <p:nvSpPr>
+          <p:cNvPr id="24" name="Oval 23"/>
+          <p:cNvSpPr/>
+          <p:nvPr/>
+        </p:nvSpPr>
+        <p:spPr>
+          <a:xfrm>
+            <a:off x="1133856" y="2441448"/>
             <a:ext cx="292608" cy="292608"/>
           </a:xfrm>
           <a:prstGeom prst="ellipse">
@@ -7751,20 +8471,20 @@
                   <a:srgbClr val="333333"/>
                 </a:solidFill>
               </a:rPr>
-              <a:t>R0</a:t>
-            </a:r>
-          </a:p>
-        </p:txBody>
-      </p:sp>
-      <p:sp>
-        <p:nvSpPr>
-          <p:cNvPr id="20" name="TextBox 19"/>
+              <a:t>R2hit</a:t>
+            </a:r>
+          </a:p>
+        </p:txBody>
+      </p:sp>
+      <p:sp>
+        <p:nvSpPr>
+          <p:cNvPr id="25" name="TextBox 24"/>
           <p:cNvSpPr txBox="1"/>
           <p:nvPr/>
         </p:nvSpPr>
         <p:spPr>
           <a:xfrm>
-            <a:off x="1463039" y="2203703"/>
+            <a:off x="1463039" y="2496312"/>
             <a:ext cx="2743200" cy="219456"/>
           </a:xfrm>
           <a:prstGeom prst="rect">
@@ -7790,28 +8510,212 @@
                   <a:srgbClr val="154FC2"/>
                 </a:solidFill>
               </a:rPr>
-              <a:t>★ on hit: ~80 ns total, return value to caller ★</a:t>
+              <a:t>★ if L2 hit: PROBE_OP("R2hit") → populate TLS → return ~5-7 µs ★</a:t>
+            </a:r>
+          </a:p>
+        </p:txBody>
+      </p:sp>
+      <p:sp>
+        <p:nvSpPr>
+          <p:cNvPr id="26" name="Oval 25"/>
+          <p:cNvSpPr/>
+          <p:nvPr/>
+        </p:nvSpPr>
+        <p:spPr>
+          <a:xfrm>
+            <a:off x="1133856" y="2642616"/>
+            <a:ext cx="292608" cy="292608"/>
+          </a:xfrm>
+          <a:prstGeom prst="ellipse">
+            <a:avLst/>
+          </a:prstGeom>
+          <a:solidFill>
+            <a:srgbClr val="FFFFFF"/>
+          </a:solidFill>
+          <a:ln w="19050">
+            <a:solidFill>
+              <a:srgbClr val="154FC2"/>
+            </a:solidFill>
+          </a:ln>
+        </p:spPr>
+        <p:style>
+          <a:lnRef idx="1">
+            <a:schemeClr val="accent1"/>
+          </a:lnRef>
+          <a:fillRef idx="3">
+            <a:schemeClr val="accent1"/>
+          </a:fillRef>
+          <a:effectRef idx="2">
+            <a:schemeClr val="accent1"/>
+          </a:effectRef>
+          <a:fontRef idx="minor">
+            <a:schemeClr val="lt1"/>
+          </a:fontRef>
+        </p:style>
+        <p:txBody>
+          <a:bodyPr rtlCol="0" anchor="ctr" lIns="0" rIns="0" tIns="0" bIns="0"/>
+          <a:lstStyle/>
+          <a:p>
+            <a:pPr algn="ctr"/>
+            <a:r>
+              <a:rPr sz="800" b="1">
+                <a:solidFill>
+                  <a:srgbClr val="154FC2"/>
+                </a:solidFill>
+              </a:rPr>
+              <a:t>R2miss</a:t>
+            </a:r>
+          </a:p>
+        </p:txBody>
+      </p:sp>
+      <p:sp>
+        <p:nvSpPr>
+          <p:cNvPr id="27" name="TextBox 26"/>
+          <p:cNvSpPr txBox="1"/>
+          <p:nvPr/>
+        </p:nvSpPr>
+        <p:spPr>
+          <a:xfrm>
+            <a:off x="1463039" y="2697480"/>
+            <a:ext cx="2743200" cy="219456"/>
+          </a:xfrm>
+          <a:prstGeom prst="rect">
+            <a:avLst/>
+          </a:prstGeom>
+          <a:solidFill>
+            <a:srgbClr val="FFFFFF"/>
+          </a:solidFill>
+          <a:ln>
+            <a:noFill/>
+          </a:ln>
+        </p:spPr>
+        <p:txBody>
+          <a:bodyPr wrap="none" lIns="25400" rIns="25400" tIns="0" bIns="0">
+            <a:spAutoFit/>
+          </a:bodyPr>
+          <a:lstStyle/>
+          <a:p>
+            <a:pPr algn="l"/>
+            <a:r>
+              <a:rPr sz="850" b="1" i="0">
+                <a:solidFill>
+                  <a:srgbClr val="154FC2"/>
+                </a:solidFill>
+              </a:rPr>
+              <a:t>L2 miss → forward_read_direct  PROBE_OP("R2miss")</a:t>
+            </a:r>
+          </a:p>
+        </p:txBody>
+      </p:sp>
+      <p:sp>
+        <p:nvSpPr>
+          <p:cNvPr id="28" name="Oval 27"/>
+          <p:cNvSpPr/>
+          <p:nvPr/>
+        </p:nvSpPr>
+        <p:spPr>
+          <a:xfrm>
+            <a:off x="1133856" y="2843784"/>
+            <a:ext cx="292608" cy="292608"/>
+          </a:xfrm>
+          <a:prstGeom prst="ellipse">
+            <a:avLst/>
+          </a:prstGeom>
+          <a:solidFill>
+            <a:srgbClr val="FFFFFF"/>
+          </a:solidFill>
+          <a:ln w="19050">
+            <a:solidFill>
+              <a:srgbClr val="9E9E9E"/>
+            </a:solidFill>
+          </a:ln>
+        </p:spPr>
+        <p:style>
+          <a:lnRef idx="1">
+            <a:schemeClr val="accent1"/>
+          </a:lnRef>
+          <a:fillRef idx="3">
+            <a:schemeClr val="accent1"/>
+          </a:fillRef>
+          <a:effectRef idx="2">
+            <a:schemeClr val="accent1"/>
+          </a:effectRef>
+          <a:fontRef idx="minor">
+            <a:schemeClr val="lt1"/>
+          </a:fontRef>
+        </p:style>
+        <p:txBody>
+          <a:bodyPr rtlCol="0" anchor="ctr" lIns="0" rIns="0" tIns="0" bIns="0"/>
+          <a:lstStyle/>
+          <a:p>
+            <a:pPr algn="ctr"/>
+            <a:r>
+              <a:rPr sz="800" b="1">
+                <a:solidFill>
+                  <a:srgbClr val="9E9E9E"/>
+                </a:solidFill>
+              </a:rPr>
+              <a:t>—</a:t>
+            </a:r>
+          </a:p>
+        </p:txBody>
+      </p:sp>
+      <p:sp>
+        <p:nvSpPr>
+          <p:cNvPr id="29" name="TextBox 28"/>
+          <p:cNvSpPr txBox="1"/>
+          <p:nvPr/>
+        </p:nvSpPr>
+        <p:spPr>
+          <a:xfrm>
+            <a:off x="1463039" y="2898648"/>
+            <a:ext cx="2743200" cy="219456"/>
+          </a:xfrm>
+          <a:prstGeom prst="rect">
+            <a:avLst/>
+          </a:prstGeom>
+          <a:solidFill>
+            <a:srgbClr val="FFFFFF"/>
+          </a:solidFill>
+          <a:ln>
+            <a:noFill/>
+          </a:ln>
+        </p:spPr>
+        <p:txBody>
+          <a:bodyPr wrap="none" lIns="25400" rIns="25400" tIns="0" bIns="0">
+            <a:spAutoFit/>
+          </a:bodyPr>
+          <a:lstStyle/>
+          <a:p>
+            <a:pPr algn="l"/>
+            <a:r>
+              <a:rPr sz="850" b="1" i="0">
+                <a:solidFill>
+                  <a:srgbClr val="9E9E9E"/>
+                </a:solidFill>
+              </a:rPr>
+              <a:t>my_epoch_at_send = bucket_epoch.load(K)   (C13 capture)</a:t>
             </a:r>
           </a:p>
         </p:txBody>
       </p:sp>
       <p:cxnSp>
         <p:nvCxnSpPr>
-          <p:cNvPr id="21" name="Connector 20"/>
+          <p:cNvPr id="30" name="Connector 29"/>
           <p:cNvCxnSpPr/>
           <p:nvPr/>
         </p:nvCxnSpPr>
         <p:spPr>
           <a:xfrm>
-            <a:off x="1280160" y="2551176"/>
-            <a:ext cx="4846320" cy="0"/>
+            <a:off x="1280160" y="3191256"/>
+            <a:ext cx="9966960" cy="0"/>
           </a:xfrm>
           <a:prstGeom prst="line">
             <a:avLst/>
           </a:prstGeom>
           <a:ln w="20320">
             <a:solidFill>
-              <a:srgbClr val="154FC2"/>
+              <a:srgbClr val="9E9E9E"/>
             </a:solidFill>
             <a:tailEnd type="triangle" w="med" h="med"/>
           </a:ln>
@@ -7833,13 +8737,545 @@
       </p:cxnSp>
       <p:sp>
         <p:nvSpPr>
-          <p:cNvPr id="22" name="Oval 21"/>
+          <p:cNvPr id="31" name="Oval 30"/>
           <p:cNvSpPr/>
           <p:nvPr/>
         </p:nvSpPr>
         <p:spPr>
           <a:xfrm>
-            <a:off x="3557015" y="2404872"/>
+            <a:off x="6117336" y="3044952"/>
+            <a:ext cx="292608" cy="292608"/>
+          </a:xfrm>
+          <a:prstGeom prst="ellipse">
+            <a:avLst/>
+          </a:prstGeom>
+          <a:solidFill>
+            <a:srgbClr val="FFFFFF"/>
+          </a:solidFill>
+          <a:ln w="19050">
+            <a:solidFill>
+              <a:srgbClr val="9E9E9E"/>
+            </a:solidFill>
+          </a:ln>
+        </p:spPr>
+        <p:style>
+          <a:lnRef idx="1">
+            <a:schemeClr val="accent1"/>
+          </a:lnRef>
+          <a:fillRef idx="3">
+            <a:schemeClr val="accent1"/>
+          </a:fillRef>
+          <a:effectRef idx="2">
+            <a:schemeClr val="accent1"/>
+          </a:effectRef>
+          <a:fontRef idx="minor">
+            <a:schemeClr val="lt1"/>
+          </a:fontRef>
+        </p:style>
+        <p:txBody>
+          <a:bodyPr rtlCol="0" anchor="ctr" lIns="0" rIns="0" tIns="0" bIns="0"/>
+          <a:lstStyle/>
+          <a:p>
+            <a:pPr algn="ctr"/>
+            <a:r>
+              <a:rPr sz="800" b="1">
+                <a:solidFill>
+                  <a:srgbClr val="9E9E9E"/>
+                </a:solidFill>
+              </a:rPr>
+              <a:t>—</a:t>
+            </a:r>
+          </a:p>
+        </p:txBody>
+      </p:sp>
+      <p:sp>
+        <p:nvSpPr>
+          <p:cNvPr id="32" name="TextBox 31"/>
+          <p:cNvSpPr txBox="1"/>
+          <p:nvPr/>
+        </p:nvSpPr>
+        <p:spPr>
+          <a:xfrm>
+            <a:off x="4800600" y="2935224"/>
+            <a:ext cx="2926080" cy="219456"/>
+          </a:xfrm>
+          <a:prstGeom prst="rect">
+            <a:avLst/>
+          </a:prstGeom>
+          <a:solidFill>
+            <a:srgbClr val="FFFFFF"/>
+          </a:solidFill>
+          <a:ln>
+            <a:noFill/>
+          </a:ln>
+        </p:spPr>
+        <p:txBody>
+          <a:bodyPr wrap="none" lIns="25400" rIns="25400" tIns="0" bIns="0">
+            <a:spAutoFit/>
+          </a:bodyPr>
+          <a:lstStyle/>
+          <a:p>
+            <a:pPr algn="l"/>
+            <a:r>
+              <a:rPr sz="850" b="1" i="0">
+                <a:solidFill>
+                  <a:srgbClr val="9E9E9E"/>
+                </a:solidFill>
+              </a:rPr>
+              <a:t>staging.ready_op_id = 0; flush; sfence  (clear prior signal)</a:t>
+            </a:r>
+          </a:p>
+        </p:txBody>
+      </p:sp>
+      <p:cxnSp>
+        <p:nvCxnSpPr>
+          <p:cNvPr id="33" name="Connector 32"/>
+          <p:cNvCxnSpPr/>
+          <p:nvPr/>
+        </p:nvCxnSpPr>
+        <p:spPr>
+          <a:xfrm>
+            <a:off x="1280160" y="3392424"/>
+            <a:ext cx="7726680" cy="0"/>
+          </a:xfrm>
+          <a:prstGeom prst="line">
+            <a:avLst/>
+          </a:prstGeom>
+          <a:ln w="20320">
+            <a:solidFill>
+              <a:srgbClr val="9E9E9E"/>
+            </a:solidFill>
+            <a:tailEnd type="triangle" w="med" h="med"/>
+          </a:ln>
+        </p:spPr>
+        <p:style>
+          <a:lnRef idx="2">
+            <a:schemeClr val="accent1"/>
+          </a:lnRef>
+          <a:fillRef idx="0">
+            <a:schemeClr val="accent1"/>
+          </a:fillRef>
+          <a:effectRef idx="1">
+            <a:schemeClr val="accent1"/>
+          </a:effectRef>
+          <a:fontRef idx="minor">
+            <a:schemeClr val="tx1"/>
+          </a:fontRef>
+        </p:style>
+      </p:cxnSp>
+      <p:sp>
+        <p:nvSpPr>
+          <p:cNvPr id="34" name="Oval 33"/>
+          <p:cNvSpPr/>
+          <p:nvPr/>
+        </p:nvSpPr>
+        <p:spPr>
+          <a:xfrm>
+            <a:off x="4997196" y="3246120"/>
+            <a:ext cx="292608" cy="292608"/>
+          </a:xfrm>
+          <a:prstGeom prst="ellipse">
+            <a:avLst/>
+          </a:prstGeom>
+          <a:solidFill>
+            <a:srgbClr val="FFFFFF"/>
+          </a:solidFill>
+          <a:ln w="19050">
+            <a:solidFill>
+              <a:srgbClr val="9E9E9E"/>
+            </a:solidFill>
+          </a:ln>
+        </p:spPr>
+        <p:style>
+          <a:lnRef idx="1">
+            <a:schemeClr val="accent1"/>
+          </a:lnRef>
+          <a:fillRef idx="3">
+            <a:schemeClr val="accent1"/>
+          </a:fillRef>
+          <a:effectRef idx="2">
+            <a:schemeClr val="accent1"/>
+          </a:effectRef>
+          <a:fontRef idx="minor">
+            <a:schemeClr val="lt1"/>
+          </a:fontRef>
+        </p:style>
+        <p:txBody>
+          <a:bodyPr rtlCol="0" anchor="ctr" lIns="0" rIns="0" tIns="0" bIns="0"/>
+          <a:lstStyle/>
+          <a:p>
+            <a:pPr algn="ctr"/>
+            <a:r>
+              <a:rPr sz="800" b="1">
+                <a:solidFill>
+                  <a:srgbClr val="9E9E9E"/>
+                </a:solidFill>
+              </a:rPr>
+              <a:t>—</a:t>
+            </a:r>
+          </a:p>
+        </p:txBody>
+      </p:sp>
+      <p:sp>
+        <p:nvSpPr>
+          <p:cNvPr id="35" name="TextBox 34"/>
+          <p:cNvSpPr txBox="1"/>
+          <p:nvPr/>
+        </p:nvSpPr>
+        <p:spPr>
+          <a:xfrm>
+            <a:off x="3680460" y="3136392"/>
+            <a:ext cx="2926080" cy="219456"/>
+          </a:xfrm>
+          <a:prstGeom prst="rect">
+            <a:avLst/>
+          </a:prstGeom>
+          <a:solidFill>
+            <a:srgbClr val="FFFFFF"/>
+          </a:solidFill>
+          <a:ln>
+            <a:noFill/>
+          </a:ln>
+        </p:spPr>
+        <p:txBody>
+          <a:bodyPr wrap="none" lIns="25400" rIns="25400" tIns="0" bIns="0">
+            <a:spAutoFit/>
+          </a:bodyPr>
+          <a:lstStyle/>
+          <a:p>
+            <a:pPr algn="l"/>
+            <a:r>
+              <a:rPr sz="850" b="1" i="0">
+                <a:solidFill>
+                  <a:srgbClr val="9E9E9E"/>
+                </a:solidFill>
+              </a:rPr>
+              <a:t>ReadRing[0][1].tail.fetch_add(1) + write Entry + flush + sfence</a:t>
+            </a:r>
+          </a:p>
+        </p:txBody>
+      </p:sp>
+      <p:sp>
+        <p:nvSpPr>
+          <p:cNvPr id="36" name="Oval 35"/>
+          <p:cNvSpPr/>
+          <p:nvPr/>
+        </p:nvSpPr>
+        <p:spPr>
+          <a:xfrm>
+            <a:off x="1133856" y="3447288"/>
+            <a:ext cx="292608" cy="292608"/>
+          </a:xfrm>
+          <a:prstGeom prst="ellipse">
+            <a:avLst/>
+          </a:prstGeom>
+          <a:solidFill>
+            <a:srgbClr val="FFCDD2"/>
+          </a:solidFill>
+          <a:ln w="19050">
+            <a:solidFill>
+              <a:srgbClr val="C62828"/>
+            </a:solidFill>
+          </a:ln>
+        </p:spPr>
+        <p:style>
+          <a:lnRef idx="1">
+            <a:schemeClr val="accent1"/>
+          </a:lnRef>
+          <a:fillRef idx="3">
+            <a:schemeClr val="accent1"/>
+          </a:fillRef>
+          <a:effectRef idx="2">
+            <a:schemeClr val="accent1"/>
+          </a:effectRef>
+          <a:fontRef idx="minor">
+            <a:schemeClr val="lt1"/>
+          </a:fontRef>
+        </p:style>
+        <p:txBody>
+          <a:bodyPr rtlCol="0" anchor="ctr" lIns="0" rIns="0" tIns="0" bIns="0"/>
+          <a:lstStyle/>
+          <a:p>
+            <a:pPr algn="ctr"/>
+            <a:r>
+              <a:rPr sz="800" b="1">
+                <a:solidFill>
+                  <a:srgbClr val="333333"/>
+                </a:solidFill>
+              </a:rPr>
+              <a:t>R3</a:t>
+            </a:r>
+          </a:p>
+        </p:txBody>
+      </p:sp>
+      <p:sp>
+        <p:nvSpPr>
+          <p:cNvPr id="37" name="TextBox 36"/>
+          <p:cNvSpPr txBox="1"/>
+          <p:nvPr/>
+        </p:nvSpPr>
+        <p:spPr>
+          <a:xfrm>
+            <a:off x="1463039" y="3502152"/>
+            <a:ext cx="2743200" cy="219456"/>
+          </a:xfrm>
+          <a:prstGeom prst="rect">
+            <a:avLst/>
+          </a:prstGeom>
+          <a:solidFill>
+            <a:srgbClr val="FFFFFF"/>
+          </a:solidFill>
+          <a:ln>
+            <a:noFill/>
+          </a:ln>
+        </p:spPr>
+        <p:txBody>
+          <a:bodyPr wrap="none" lIns="25400" rIns="25400" tIns="0" bIns="0">
+            <a:spAutoFit/>
+          </a:bodyPr>
+          <a:lstStyle/>
+          <a:p>
+            <a:pPr algn="l"/>
+            <a:r>
+              <a:rPr sz="850" b="1" i="0">
+                <a:solidFill>
+                  <a:srgbClr val="154FC2"/>
+                </a:solidFill>
+              </a:rPr>
+              <a:t>PROBE_OP("R3") emitted; worker spins on staging.ready_op_id  (200 ms cap)  ← measured interval starts here</a:t>
+            </a:r>
+          </a:p>
+        </p:txBody>
+      </p:sp>
+      <p:cxnSp>
+        <p:nvCxnSpPr>
+          <p:cNvPr id="38" name="Connector 37"/>
+          <p:cNvCxnSpPr/>
+          <p:nvPr/>
+        </p:nvCxnSpPr>
+        <p:spPr>
+          <a:xfrm>
+            <a:off x="1280160" y="3794760"/>
+            <a:ext cx="7726680" cy="0"/>
+          </a:xfrm>
+          <a:prstGeom prst="line">
+            <a:avLst/>
+          </a:prstGeom>
+          <a:ln w="20320">
+            <a:solidFill>
+              <a:srgbClr val="9E9E9E"/>
+            </a:solidFill>
+            <a:tailEnd type="triangle" w="med" h="med"/>
+          </a:ln>
+        </p:spPr>
+        <p:style>
+          <a:lnRef idx="2">
+            <a:schemeClr val="accent1"/>
+          </a:lnRef>
+          <a:fillRef idx="0">
+            <a:schemeClr val="accent1"/>
+          </a:fillRef>
+          <a:effectRef idx="1">
+            <a:schemeClr val="accent1"/>
+          </a:effectRef>
+          <a:fontRef idx="minor">
+            <a:schemeClr val="tx1"/>
+          </a:fontRef>
+        </p:style>
+      </p:cxnSp>
+      <p:sp>
+        <p:nvSpPr>
+          <p:cNvPr id="39" name="Oval 38"/>
+          <p:cNvSpPr/>
+          <p:nvPr/>
+        </p:nvSpPr>
+        <p:spPr>
+          <a:xfrm>
+            <a:off x="4997196" y="3648456"/>
+            <a:ext cx="292608" cy="292608"/>
+          </a:xfrm>
+          <a:prstGeom prst="ellipse">
+            <a:avLst/>
+          </a:prstGeom>
+          <a:solidFill>
+            <a:srgbClr val="FFFFFF"/>
+          </a:solidFill>
+          <a:ln w="19050">
+            <a:solidFill>
+              <a:srgbClr val="9E9E9E"/>
+            </a:solidFill>
+          </a:ln>
+        </p:spPr>
+        <p:style>
+          <a:lnRef idx="1">
+            <a:schemeClr val="accent1"/>
+          </a:lnRef>
+          <a:fillRef idx="3">
+            <a:schemeClr val="accent1"/>
+          </a:fillRef>
+          <a:effectRef idx="2">
+            <a:schemeClr val="accent1"/>
+          </a:effectRef>
+          <a:fontRef idx="minor">
+            <a:schemeClr val="lt1"/>
+          </a:fontRef>
+        </p:style>
+        <p:txBody>
+          <a:bodyPr rtlCol="0" anchor="ctr" lIns="0" rIns="0" tIns="0" bIns="0"/>
+          <a:lstStyle/>
+          <a:p>
+            <a:pPr algn="ctr"/>
+            <a:r>
+              <a:rPr sz="800" b="1">
+                <a:solidFill>
+                  <a:srgbClr val="9E9E9E"/>
+                </a:solidFill>
+              </a:rPr>
+              <a:t>—</a:t>
+            </a:r>
+          </a:p>
+        </p:txBody>
+      </p:sp>
+      <p:sp>
+        <p:nvSpPr>
+          <p:cNvPr id="40" name="TextBox 39"/>
+          <p:cNvSpPr txBox="1"/>
+          <p:nvPr/>
+        </p:nvSpPr>
+        <p:spPr>
+          <a:xfrm>
+            <a:off x="3680460" y="3538728"/>
+            <a:ext cx="2926080" cy="219456"/>
+          </a:xfrm>
+          <a:prstGeom prst="rect">
+            <a:avLst/>
+          </a:prstGeom>
+          <a:solidFill>
+            <a:srgbClr val="FFFFFF"/>
+          </a:solidFill>
+          <a:ln>
+            <a:noFill/>
+          </a:ln>
+        </p:spPr>
+        <p:txBody>
+          <a:bodyPr wrap="none" lIns="25400" rIns="25400" tIns="0" bIns="0">
+            <a:spAutoFit/>
+          </a:bodyPr>
+          <a:lstStyle/>
+          <a:p>
+            <a:pPr algn="l"/>
+            <a:r>
+              <a:rPr sz="850" b="1" i="0">
+                <a:solidFill>
+                  <a:srgbClr val="9E9E9E"/>
+                </a:solidFill>
+              </a:rPr>
+              <a:t>ReadReceiver poll observes new ReadRing tail</a:t>
+            </a:r>
+          </a:p>
+        </p:txBody>
+      </p:sp>
+      <p:sp>
+        <p:nvSpPr>
+          <p:cNvPr id="41" name="Oval 40"/>
+          <p:cNvSpPr/>
+          <p:nvPr/>
+        </p:nvSpPr>
+        <p:spPr>
+          <a:xfrm>
+            <a:off x="8860536" y="3849624"/>
+            <a:ext cx="292608" cy="292608"/>
+          </a:xfrm>
+          <a:prstGeom prst="ellipse">
+            <a:avLst/>
+          </a:prstGeom>
+          <a:solidFill>
+            <a:srgbClr val="FFFFFF"/>
+          </a:solidFill>
+          <a:ln w="19050">
+            <a:solidFill>
+              <a:srgbClr val="9E9E9E"/>
+            </a:solidFill>
+          </a:ln>
+        </p:spPr>
+        <p:style>
+          <a:lnRef idx="1">
+            <a:schemeClr val="accent1"/>
+          </a:lnRef>
+          <a:fillRef idx="3">
+            <a:schemeClr val="accent1"/>
+          </a:fillRef>
+          <a:effectRef idx="2">
+            <a:schemeClr val="accent1"/>
+          </a:effectRef>
+          <a:fontRef idx="minor">
+            <a:schemeClr val="lt1"/>
+          </a:fontRef>
+        </p:style>
+        <p:txBody>
+          <a:bodyPr rtlCol="0" anchor="ctr" lIns="0" rIns="0" tIns="0" bIns="0"/>
+          <a:lstStyle/>
+          <a:p>
+            <a:pPr algn="ctr"/>
+            <a:r>
+              <a:rPr sz="800" b="1">
+                <a:solidFill>
+                  <a:srgbClr val="9E9E9E"/>
+                </a:solidFill>
+              </a:rPr>
+              <a:t>—</a:t>
+            </a:r>
+          </a:p>
+        </p:txBody>
+      </p:sp>
+      <p:sp>
+        <p:nvSpPr>
+          <p:cNvPr id="42" name="TextBox 41"/>
+          <p:cNvSpPr txBox="1"/>
+          <p:nvPr/>
+        </p:nvSpPr>
+        <p:spPr>
+          <a:xfrm>
+            <a:off x="9189719" y="3904488"/>
+            <a:ext cx="2743200" cy="219456"/>
+          </a:xfrm>
+          <a:prstGeom prst="rect">
+            <a:avLst/>
+          </a:prstGeom>
+          <a:solidFill>
+            <a:srgbClr val="FFFFFF"/>
+          </a:solidFill>
+          <a:ln>
+            <a:noFill/>
+          </a:ln>
+        </p:spPr>
+        <p:txBody>
+          <a:bodyPr wrap="none" lIns="25400" rIns="25400" tIns="0" bIns="0">
+            <a:spAutoFit/>
+          </a:bodyPr>
+          <a:lstStyle/>
+          <a:p>
+            <a:pPr algn="l"/>
+            <a:r>
+              <a:rPr sz="850" b="1" i="0">
+                <a:solidFill>
+                  <a:srgbClr val="9E9E9E"/>
+                </a:solidFill>
+              </a:rPr>
+              <a:t>flush bucket cachelines; scan 7 slots</a:t>
+            </a:r>
+          </a:p>
+        </p:txBody>
+      </p:sp>
+      <p:sp>
+        <p:nvSpPr>
+          <p:cNvPr id="43" name="Oval 42"/>
+          <p:cNvSpPr/>
+          <p:nvPr/>
+        </p:nvSpPr>
+        <p:spPr>
+          <a:xfrm>
+            <a:off x="8860536" y="4050792"/>
             <a:ext cx="292608" cy="292608"/>
           </a:xfrm>
           <a:prstGeom prst="ellipse">
@@ -7879,21 +9315,21 @@
                   <a:srgbClr val="333333"/>
                 </a:solidFill>
               </a:rPr>
-              <a:t>A3r</a:t>
-            </a:r>
-          </a:p>
-        </p:txBody>
-      </p:sp>
-      <p:sp>
-        <p:nvSpPr>
-          <p:cNvPr id="23" name="TextBox 22"/>
+              <a:t>—</a:t>
+            </a:r>
+          </a:p>
+        </p:txBody>
+      </p:sp>
+      <p:sp>
+        <p:nvSpPr>
+          <p:cNvPr id="44" name="TextBox 43"/>
           <p:cNvSpPr txBox="1"/>
           <p:nvPr/>
         </p:nvSpPr>
         <p:spPr>
           <a:xfrm>
-            <a:off x="2240279" y="2295144"/>
-            <a:ext cx="2926080" cy="219456"/>
+            <a:off x="9189719" y="4105656"/>
+            <a:ext cx="2743200" cy="219456"/>
           </a:xfrm>
           <a:prstGeom prst="rect">
             <a:avLst/>
@@ -7915,23 +9351,544 @@
             <a:r>
               <a:rPr sz="850" b="1" i="0">
                 <a:solidFill>
-                  <a:srgbClr val="154FC2"/>
-                </a:solidFill>
-              </a:rPr>
-              <a:t>else cache_pool_lookup: seqlock CAS read of L2 entry</a:t>
-            </a:r>
-          </a:p>
-        </p:txBody>
-      </p:sp>
-      <p:sp>
-        <p:nvSpPr>
-          <p:cNvPr id="24" name="Oval 23"/>
+                  <a:srgbClr val="9E9E9E"/>
+                </a:solidFill>
+              </a:rPr>
+              <a:t>acquire SlotDirectoryEntry.spinlock; sharer_bitmap |= (1&lt;&lt;src)  ★ peer-visible state change</a:t>
+            </a:r>
+          </a:p>
+        </p:txBody>
+      </p:sp>
+      <p:sp>
+        <p:nvSpPr>
+          <p:cNvPr id="45" name="Oval 44"/>
           <p:cNvSpPr/>
           <p:nvPr/>
         </p:nvSpPr>
         <p:spPr>
           <a:xfrm>
-            <a:off x="1133856" y="2660904"/>
+            <a:off x="8860536" y="4251960"/>
+            <a:ext cx="292608" cy="292608"/>
+          </a:xfrm>
+          <a:prstGeom prst="ellipse">
+            <a:avLst/>
+          </a:prstGeom>
+          <a:solidFill>
+            <a:srgbClr val="FFFFFF"/>
+          </a:solidFill>
+          <a:ln w="19050">
+            <a:solidFill>
+              <a:srgbClr val="9E9E9E"/>
+            </a:solidFill>
+          </a:ln>
+        </p:spPr>
+        <p:style>
+          <a:lnRef idx="1">
+            <a:schemeClr val="accent1"/>
+          </a:lnRef>
+          <a:fillRef idx="3">
+            <a:schemeClr val="accent1"/>
+          </a:fillRef>
+          <a:effectRef idx="2">
+            <a:schemeClr val="accent1"/>
+          </a:effectRef>
+          <a:fontRef idx="minor">
+            <a:schemeClr val="lt1"/>
+          </a:fontRef>
+        </p:style>
+        <p:txBody>
+          <a:bodyPr rtlCol="0" anchor="ctr" lIns="0" rIns="0" tIns="0" bIns="0"/>
+          <a:lstStyle/>
+          <a:p>
+            <a:pPr algn="ctr"/>
+            <a:r>
+              <a:rPr sz="800" b="1">
+                <a:solidFill>
+                  <a:srgbClr val="9E9E9E"/>
+                </a:solidFill>
+              </a:rPr>
+              <a:t>—</a:t>
+            </a:r>
+          </a:p>
+        </p:txBody>
+      </p:sp>
+      <p:sp>
+        <p:nvSpPr>
+          <p:cNvPr id="46" name="TextBox 45"/>
+          <p:cNvSpPr txBox="1"/>
+          <p:nvPr/>
+        </p:nvSpPr>
+        <p:spPr>
+          <a:xfrm>
+            <a:off x="9189719" y="4306824"/>
+            <a:ext cx="2743200" cy="219456"/>
+          </a:xfrm>
+          <a:prstGeom prst="rect">
+            <a:avLst/>
+          </a:prstGeom>
+          <a:solidFill>
+            <a:srgbClr val="FFFFFF"/>
+          </a:solidFill>
+          <a:ln>
+            <a:noFill/>
+          </a:ln>
+        </p:spPr>
+        <p:txBody>
+          <a:bodyPr wrap="none" lIns="25400" rIns="25400" tIns="0" bIns="0">
+            <a:spAutoFit/>
+          </a:bodyPr>
+          <a:lstStyle/>
+          <a:p>
+            <a:pPr algn="l"/>
+            <a:r>
+              <a:rPr sz="850" b="1" i="0">
+                <a:solidFill>
+                  <a:srgbClr val="9E9E9E"/>
+                </a:solidFill>
+              </a:rPr>
+              <a:t>pool-&gt;read(blk_off, 4) → value_len; pool-&gt;read(blk_off+4, vlen)</a:t>
+            </a:r>
+          </a:p>
+        </p:txBody>
+      </p:sp>
+      <p:cxnSp>
+        <p:nvCxnSpPr>
+          <p:cNvPr id="47" name="Connector 46"/>
+          <p:cNvCxnSpPr/>
+          <p:nvPr/>
+        </p:nvCxnSpPr>
+        <p:spPr>
+          <a:xfrm>
+            <a:off x="9006840" y="4599432"/>
+            <a:ext cx="2240280" cy="0"/>
+          </a:xfrm>
+          <a:prstGeom prst="line">
+            <a:avLst/>
+          </a:prstGeom>
+          <a:ln w="20320">
+            <a:solidFill>
+              <a:srgbClr val="9E9E9E"/>
+            </a:solidFill>
+            <a:tailEnd type="triangle" w="med" h="med"/>
+          </a:ln>
+        </p:spPr>
+        <p:style>
+          <a:lnRef idx="2">
+            <a:schemeClr val="accent1"/>
+          </a:lnRef>
+          <a:fillRef idx="0">
+            <a:schemeClr val="accent1"/>
+          </a:fillRef>
+          <a:effectRef idx="1">
+            <a:schemeClr val="accent1"/>
+          </a:effectRef>
+          <a:fontRef idx="minor">
+            <a:schemeClr val="tx1"/>
+          </a:fontRef>
+        </p:style>
+      </p:cxnSp>
+      <p:sp>
+        <p:nvSpPr>
+          <p:cNvPr id="48" name="Oval 47"/>
+          <p:cNvSpPr/>
+          <p:nvPr/>
+        </p:nvSpPr>
+        <p:spPr>
+          <a:xfrm>
+            <a:off x="9980676" y="4453128"/>
+            <a:ext cx="292608" cy="292608"/>
+          </a:xfrm>
+          <a:prstGeom prst="ellipse">
+            <a:avLst/>
+          </a:prstGeom>
+          <a:solidFill>
+            <a:srgbClr val="FFFFFF"/>
+          </a:solidFill>
+          <a:ln w="19050">
+            <a:solidFill>
+              <a:srgbClr val="9E9E9E"/>
+            </a:solidFill>
+          </a:ln>
+        </p:spPr>
+        <p:style>
+          <a:lnRef idx="1">
+            <a:schemeClr val="accent1"/>
+          </a:lnRef>
+          <a:fillRef idx="3">
+            <a:schemeClr val="accent1"/>
+          </a:fillRef>
+          <a:effectRef idx="2">
+            <a:schemeClr val="accent1"/>
+          </a:effectRef>
+          <a:fontRef idx="minor">
+            <a:schemeClr val="lt1"/>
+          </a:fontRef>
+        </p:style>
+        <p:txBody>
+          <a:bodyPr rtlCol="0" anchor="ctr" lIns="0" rIns="0" tIns="0" bIns="0"/>
+          <a:lstStyle/>
+          <a:p>
+            <a:pPr algn="ctr"/>
+            <a:r>
+              <a:rPr sz="800" b="1">
+                <a:solidFill>
+                  <a:srgbClr val="9E9E9E"/>
+                </a:solidFill>
+              </a:rPr>
+              <a:t>—</a:t>
+            </a:r>
+          </a:p>
+        </p:txBody>
+      </p:sp>
+      <p:sp>
+        <p:nvSpPr>
+          <p:cNvPr id="49" name="TextBox 48"/>
+          <p:cNvSpPr txBox="1"/>
+          <p:nvPr/>
+        </p:nvSpPr>
+        <p:spPr>
+          <a:xfrm>
+            <a:off x="8663940" y="4343400"/>
+            <a:ext cx="2926080" cy="219456"/>
+          </a:xfrm>
+          <a:prstGeom prst="rect">
+            <a:avLst/>
+          </a:prstGeom>
+          <a:solidFill>
+            <a:srgbClr val="FFFFFF"/>
+          </a:solidFill>
+          <a:ln>
+            <a:noFill/>
+          </a:ln>
+        </p:spPr>
+        <p:txBody>
+          <a:bodyPr wrap="none" lIns="25400" rIns="25400" tIns="0" bIns="0">
+            <a:spAutoFit/>
+          </a:bodyPr>
+          <a:lstStyle/>
+          <a:p>
+            <a:pPr algn="l"/>
+            <a:r>
+              <a:rPr sz="850" b="1" i="0">
+                <a:solidFill>
+                  <a:srgbClr val="9E9E9E"/>
+                </a:solidFill>
+              </a:rPr>
+              <a:t>write staging.value_bytes + lookup_epoch (C13 tag) + status; flush</a:t>
+            </a:r>
+          </a:p>
+        </p:txBody>
+      </p:sp>
+      <p:cxnSp>
+        <p:nvCxnSpPr>
+          <p:cNvPr id="50" name="Connector 49"/>
+          <p:cNvCxnSpPr/>
+          <p:nvPr/>
+        </p:nvCxnSpPr>
+        <p:spPr>
+          <a:xfrm>
+            <a:off x="9006840" y="4800600"/>
+            <a:ext cx="2240280" cy="0"/>
+          </a:xfrm>
+          <a:prstGeom prst="line">
+            <a:avLst/>
+          </a:prstGeom>
+          <a:ln w="20320">
+            <a:solidFill>
+              <a:srgbClr val="9E9E9E"/>
+            </a:solidFill>
+            <a:tailEnd type="triangle" w="med" h="med"/>
+          </a:ln>
+        </p:spPr>
+        <p:style>
+          <a:lnRef idx="2">
+            <a:schemeClr val="accent1"/>
+          </a:lnRef>
+          <a:fillRef idx="0">
+            <a:schemeClr val="accent1"/>
+          </a:fillRef>
+          <a:effectRef idx="1">
+            <a:schemeClr val="accent1"/>
+          </a:effectRef>
+          <a:fontRef idx="minor">
+            <a:schemeClr val="tx1"/>
+          </a:fontRef>
+        </p:style>
+      </p:cxnSp>
+      <p:sp>
+        <p:nvSpPr>
+          <p:cNvPr id="51" name="Oval 50"/>
+          <p:cNvSpPr/>
+          <p:nvPr/>
+        </p:nvSpPr>
+        <p:spPr>
+          <a:xfrm>
+            <a:off x="9980676" y="4654296"/>
+            <a:ext cx="292608" cy="292608"/>
+          </a:xfrm>
+          <a:prstGeom prst="ellipse">
+            <a:avLst/>
+          </a:prstGeom>
+          <a:solidFill>
+            <a:srgbClr val="FFF49C"/>
+          </a:solidFill>
+          <a:ln w="19050">
+            <a:solidFill>
+              <a:srgbClr val="F9A825"/>
+            </a:solidFill>
+          </a:ln>
+        </p:spPr>
+        <p:style>
+          <a:lnRef idx="1">
+            <a:schemeClr val="accent1"/>
+          </a:lnRef>
+          <a:fillRef idx="3">
+            <a:schemeClr val="accent1"/>
+          </a:fillRef>
+          <a:effectRef idx="2">
+            <a:schemeClr val="accent1"/>
+          </a:effectRef>
+          <a:fontRef idx="minor">
+            <a:schemeClr val="lt1"/>
+          </a:fontRef>
+        </p:style>
+        <p:txBody>
+          <a:bodyPr rtlCol="0" anchor="ctr" lIns="0" rIns="0" tIns="0" bIns="0"/>
+          <a:lstStyle/>
+          <a:p>
+            <a:pPr algn="ctr"/>
+            <a:r>
+              <a:rPr sz="800" b="1">
+                <a:solidFill>
+                  <a:srgbClr val="333333"/>
+                </a:solidFill>
+              </a:rPr>
+              <a:t>—</a:t>
+            </a:r>
+          </a:p>
+        </p:txBody>
+      </p:sp>
+      <p:sp>
+        <p:nvSpPr>
+          <p:cNvPr id="52" name="TextBox 51"/>
+          <p:cNvSpPr txBox="1"/>
+          <p:nvPr/>
+        </p:nvSpPr>
+        <p:spPr>
+          <a:xfrm>
+            <a:off x="8663940" y="4892040"/>
+            <a:ext cx="2926080" cy="219456"/>
+          </a:xfrm>
+          <a:prstGeom prst="rect">
+            <a:avLst/>
+          </a:prstGeom>
+          <a:solidFill>
+            <a:srgbClr val="FFFFFF"/>
+          </a:solidFill>
+          <a:ln>
+            <a:noFill/>
+          </a:ln>
+        </p:spPr>
+        <p:txBody>
+          <a:bodyPr wrap="none" lIns="25400" rIns="25400" tIns="0" bIns="0">
+            <a:spAutoFit/>
+          </a:bodyPr>
+          <a:lstStyle/>
+          <a:p>
+            <a:pPr algn="l"/>
+            <a:r>
+              <a:rPr sz="850" b="1" i="0">
+                <a:solidFill>
+                  <a:srgbClr val="9E9E9E"/>
+                </a:solidFill>
+              </a:rPr>
+              <a:t>staging.ready_op_id = req_op_id  ★ release-publish ★</a:t>
+            </a:r>
+          </a:p>
+        </p:txBody>
+      </p:sp>
+      <p:cxnSp>
+        <p:nvCxnSpPr>
+          <p:cNvPr id="53" name="Connector 52"/>
+          <p:cNvCxnSpPr/>
+          <p:nvPr/>
+        </p:nvCxnSpPr>
+        <p:spPr>
+          <a:xfrm flipH="1">
+            <a:off x="1280160" y="5001768"/>
+            <a:ext cx="9966960" cy="0"/>
+          </a:xfrm>
+          <a:prstGeom prst="line">
+            <a:avLst/>
+          </a:prstGeom>
+          <a:ln w="20320">
+            <a:solidFill>
+              <a:srgbClr val="9E9E9E"/>
+            </a:solidFill>
+            <a:tailEnd type="triangle" w="med" h="med"/>
+          </a:ln>
+        </p:spPr>
+        <p:style>
+          <a:lnRef idx="2">
+            <a:schemeClr val="accent1"/>
+          </a:lnRef>
+          <a:fillRef idx="0">
+            <a:schemeClr val="accent1"/>
+          </a:fillRef>
+          <a:effectRef idx="1">
+            <a:schemeClr val="accent1"/>
+          </a:effectRef>
+          <a:fontRef idx="minor">
+            <a:schemeClr val="tx1"/>
+          </a:fontRef>
+        </p:style>
+      </p:cxnSp>
+      <p:sp>
+        <p:nvSpPr>
+          <p:cNvPr id="54" name="Oval 53"/>
+          <p:cNvSpPr/>
+          <p:nvPr/>
+        </p:nvSpPr>
+        <p:spPr>
+          <a:xfrm>
+            <a:off x="6117336" y="4855464"/>
+            <a:ext cx="292608" cy="292608"/>
+          </a:xfrm>
+          <a:prstGeom prst="ellipse">
+            <a:avLst/>
+          </a:prstGeom>
+          <a:solidFill>
+            <a:srgbClr val="FFFFFF"/>
+          </a:solidFill>
+          <a:ln w="19050">
+            <a:solidFill>
+              <a:srgbClr val="9E9E9E"/>
+            </a:solidFill>
+          </a:ln>
+        </p:spPr>
+        <p:style>
+          <a:lnRef idx="1">
+            <a:schemeClr val="accent1"/>
+          </a:lnRef>
+          <a:fillRef idx="3">
+            <a:schemeClr val="accent1"/>
+          </a:fillRef>
+          <a:effectRef idx="2">
+            <a:schemeClr val="accent1"/>
+          </a:effectRef>
+          <a:fontRef idx="minor">
+            <a:schemeClr val="lt1"/>
+          </a:fontRef>
+        </p:style>
+        <p:txBody>
+          <a:bodyPr rtlCol="0" anchor="ctr" lIns="0" rIns="0" tIns="0" bIns="0"/>
+          <a:lstStyle/>
+          <a:p>
+            <a:pPr algn="ctr"/>
+            <a:r>
+              <a:rPr sz="800" b="1">
+                <a:solidFill>
+                  <a:srgbClr val="9E9E9E"/>
+                </a:solidFill>
+              </a:rPr>
+              <a:t>—</a:t>
+            </a:r>
+          </a:p>
+        </p:txBody>
+      </p:sp>
+      <p:sp>
+        <p:nvSpPr>
+          <p:cNvPr id="55" name="TextBox 54"/>
+          <p:cNvSpPr txBox="1"/>
+          <p:nvPr/>
+        </p:nvSpPr>
+        <p:spPr>
+          <a:xfrm>
+            <a:off x="4800600" y="5093207"/>
+            <a:ext cx="2926080" cy="219456"/>
+          </a:xfrm>
+          <a:prstGeom prst="rect">
+            <a:avLst/>
+          </a:prstGeom>
+          <a:solidFill>
+            <a:srgbClr val="FFFFFF"/>
+          </a:solidFill>
+          <a:ln>
+            <a:noFill/>
+          </a:ln>
+        </p:spPr>
+        <p:txBody>
+          <a:bodyPr wrap="none" lIns="25400" rIns="25400" tIns="0" bIns="0">
+            <a:spAutoFit/>
+          </a:bodyPr>
+          <a:lstStyle/>
+          <a:p>
+            <a:pPr algn="l"/>
+            <a:r>
+              <a:rPr sz="850" b="1" i="0">
+                <a:solidFill>
+                  <a:srgbClr val="9E9E9E"/>
+                </a:solidFill>
+              </a:rPr>
+              <a:t>worker spin observes ready_op_id  → break</a:t>
+            </a:r>
+          </a:p>
+        </p:txBody>
+      </p:sp>
+      <p:sp>
+        <p:nvSpPr>
+          <p:cNvPr id="56" name="Rectangle 55"/>
+          <p:cNvSpPr/>
+          <p:nvPr/>
+        </p:nvSpPr>
+        <p:spPr>
+          <a:xfrm>
+            <a:off x="1197863" y="3547872"/>
+            <a:ext cx="164592" cy="1618487"/>
+          </a:xfrm>
+          <a:prstGeom prst="rect">
+            <a:avLst/>
+          </a:prstGeom>
+          <a:solidFill>
+            <a:srgbClr val="FFCDD2"/>
+          </a:solidFill>
+          <a:ln w="6350">
+            <a:solidFill>
+              <a:srgbClr val="C62828"/>
+            </a:solidFill>
+          </a:ln>
+        </p:spPr>
+        <p:style>
+          <a:lnRef idx="1">
+            <a:schemeClr val="accent1"/>
+          </a:lnRef>
+          <a:fillRef idx="3">
+            <a:schemeClr val="accent1"/>
+          </a:fillRef>
+          <a:effectRef idx="2">
+            <a:schemeClr val="accent1"/>
+          </a:effectRef>
+          <a:fontRef idx="minor">
+            <a:schemeClr val="lt1"/>
+          </a:fontRef>
+        </p:style>
+        <p:txBody>
+          <a:bodyPr rtlCol="0" anchor="ctr"/>
+          <a:lstStyle/>
+          <a:p>
+            <a:pPr algn="ctr"/>
+          </a:p>
+        </p:txBody>
+      </p:sp>
+      <p:sp>
+        <p:nvSpPr>
+          <p:cNvPr id="57" name="Oval 56"/>
+          <p:cNvSpPr/>
+          <p:nvPr/>
+        </p:nvSpPr>
+        <p:spPr>
+          <a:xfrm>
+            <a:off x="1133856" y="5056631"/>
             <a:ext cx="292608" cy="292608"/>
           </a:xfrm>
           <a:prstGeom prst="ellipse">
@@ -7971,20 +9928,20 @@
                   <a:srgbClr val="154FC2"/>
                 </a:solidFill>
               </a:rPr>
-              <a:t>R2h</a:t>
-            </a:r>
-          </a:p>
-        </p:txBody>
-      </p:sp>
-      <p:sp>
-        <p:nvSpPr>
-          <p:cNvPr id="25" name="TextBox 24"/>
+              <a:t>R4</a:t>
+            </a:r>
+          </a:p>
+        </p:txBody>
+      </p:sp>
+      <p:sp>
+        <p:nvSpPr>
+          <p:cNvPr id="58" name="TextBox 57"/>
           <p:cNvSpPr txBox="1"/>
           <p:nvPr/>
         </p:nvSpPr>
         <p:spPr>
           <a:xfrm>
-            <a:off x="1463039" y="2715768"/>
+            <a:off x="1463039" y="5111496"/>
             <a:ext cx="2743200" cy="219456"/>
           </a:xfrm>
           <a:prstGeom prst="rect">
@@ -8010,56 +9967,112 @@
                   <a:srgbClr val="154FC2"/>
                 </a:solidFill>
               </a:rPr>
-              <a:t>★ on L2 hit: ~5-7 µs total (KV memcpy under MESI), return ★</a:t>
-            </a:r>
-          </a:p>
-        </p:txBody>
-      </p:sp>
-      <p:cxnSp>
-        <p:nvCxnSpPr>
-          <p:cNvPr id="26" name="Connector 25"/>
-          <p:cNvCxnSpPr/>
-          <p:nvPr/>
-        </p:nvCxnSpPr>
-        <p:spPr>
-          <a:xfrm>
-            <a:off x="1280160" y="3063240"/>
-            <a:ext cx="4846320" cy="0"/>
-          </a:xfrm>
-          <a:prstGeom prst="line">
-            <a:avLst/>
-          </a:prstGeom>
-          <a:ln w="20320">
+              <a:t>PROBE_OP("R4") emitted; C13 validate + memcpy from staging  ← measured interval R3→R4 ≈ 14 µs</a:t>
+            </a:r>
+          </a:p>
+        </p:txBody>
+      </p:sp>
+      <p:sp>
+        <p:nvSpPr>
+          <p:cNvPr id="59" name="Oval 58"/>
+          <p:cNvSpPr/>
+          <p:nvPr/>
+        </p:nvSpPr>
+        <p:spPr>
+          <a:xfrm>
+            <a:off x="1133856" y="5257799"/>
+            <a:ext cx="292608" cy="292608"/>
+          </a:xfrm>
+          <a:prstGeom prst="ellipse">
+            <a:avLst/>
+          </a:prstGeom>
+          <a:solidFill>
+            <a:srgbClr val="FFFFFF"/>
+          </a:solidFill>
+          <a:ln w="19050">
             <a:solidFill>
-              <a:srgbClr val="154FC2"/>
+              <a:srgbClr val="9E9E9E"/>
             </a:solidFill>
-            <a:tailEnd type="triangle" w="med" h="med"/>
           </a:ln>
         </p:spPr>
         <p:style>
-          <a:lnRef idx="2">
+          <a:lnRef idx="1">
             <a:schemeClr val="accent1"/>
           </a:lnRef>
-          <a:fillRef idx="0">
+          <a:fillRef idx="3">
             <a:schemeClr val="accent1"/>
           </a:fillRef>
-          <a:effectRef idx="1">
+          <a:effectRef idx="2">
             <a:schemeClr val="accent1"/>
           </a:effectRef>
           <a:fontRef idx="minor">
-            <a:schemeClr val="tx1"/>
+            <a:schemeClr val="lt1"/>
           </a:fontRef>
         </p:style>
-      </p:cxnSp>
-      <p:sp>
-        <p:nvSpPr>
-          <p:cNvPr id="27" name="Oval 26"/>
+        <p:txBody>
+          <a:bodyPr rtlCol="0" anchor="ctr" lIns="0" rIns="0" tIns="0" bIns="0"/>
+          <a:lstStyle/>
+          <a:p>
+            <a:pPr algn="ctr"/>
+            <a:r>
+              <a:rPr sz="800" b="1">
+                <a:solidFill>
+                  <a:srgbClr val="9E9E9E"/>
+                </a:solidFill>
+              </a:rPr>
+              <a:t>—</a:t>
+            </a:r>
+          </a:p>
+        </p:txBody>
+      </p:sp>
+      <p:sp>
+        <p:nvSpPr>
+          <p:cNvPr id="60" name="TextBox 59"/>
+          <p:cNvSpPr txBox="1"/>
+          <p:nvPr/>
+        </p:nvSpPr>
+        <p:spPr>
+          <a:xfrm>
+            <a:off x="1463039" y="5312664"/>
+            <a:ext cx="2743200" cy="219456"/>
+          </a:xfrm>
+          <a:prstGeom prst="rect">
+            <a:avLst/>
+          </a:prstGeom>
+          <a:solidFill>
+            <a:srgbClr val="FFFFFF"/>
+          </a:solidFill>
+          <a:ln>
+            <a:noFill/>
+          </a:ln>
+        </p:spPr>
+        <p:txBody>
+          <a:bodyPr wrap="none" lIns="25400" rIns="25400" tIns="0" bIns="0">
+            <a:spAutoFit/>
+          </a:bodyPr>
+          <a:lstStyle/>
+          <a:p>
+            <a:pPr algn="l"/>
+            <a:r>
+              <a:rPr sz="850" b="1" i="0">
+                <a:solidFill>
+                  <a:srgbClr val="9E9E9E"/>
+                </a:solidFill>
+              </a:rPr>
+              <a:t>cache_pool_insert (L2 seqlock CAS); tls_insert (L1)</a:t>
+            </a:r>
+          </a:p>
+        </p:txBody>
+      </p:sp>
+      <p:sp>
+        <p:nvSpPr>
+          <p:cNvPr id="61" name="Oval 60"/>
           <p:cNvSpPr/>
           <p:nvPr/>
         </p:nvSpPr>
         <p:spPr>
           <a:xfrm>
-            <a:off x="3557015" y="2916936"/>
+            <a:off x="1133856" y="5458967"/>
             <a:ext cx="292608" cy="292608"/>
           </a:xfrm>
           <a:prstGeom prst="ellipse">
@@ -8099,21 +10112,21 @@
                   <a:srgbClr val="154FC2"/>
                 </a:solidFill>
               </a:rPr>
-              <a:t>A4r</a:t>
-            </a:r>
-          </a:p>
-        </p:txBody>
-      </p:sp>
-      <p:sp>
-        <p:nvSpPr>
-          <p:cNvPr id="28" name="TextBox 27"/>
+              <a:t>R6</a:t>
+            </a:r>
+          </a:p>
+        </p:txBody>
+      </p:sp>
+      <p:sp>
+        <p:nvSpPr>
+          <p:cNvPr id="62" name="TextBox 61"/>
           <p:cNvSpPr txBox="1"/>
           <p:nvPr/>
         </p:nvSpPr>
         <p:spPr>
           <a:xfrm>
-            <a:off x="2240279" y="3154680"/>
-            <a:ext cx="2926080" cy="219456"/>
+            <a:off x="1463039" y="5513831"/>
+            <a:ext cx="2743200" cy="219456"/>
           </a:xfrm>
           <a:prstGeom prst="rect">
             <a:avLst/>
@@ -8138,1415 +10151,14 @@
                   <a:srgbClr val="154FC2"/>
                 </a:solidFill>
               </a:rPr>
-              <a:t>on L2 miss: re-load bucket_epoch  ← my_epoch_at_send (C13 tag)</a:t>
-            </a:r>
-          </a:p>
-        </p:txBody>
-      </p:sp>
-      <p:cxnSp>
-        <p:nvCxnSpPr>
-          <p:cNvPr id="29" name="Connector 28"/>
-          <p:cNvCxnSpPr/>
-          <p:nvPr/>
-        </p:nvCxnSpPr>
-        <p:spPr>
-          <a:xfrm>
-            <a:off x="1280160" y="3319272"/>
-            <a:ext cx="9966960" cy="0"/>
-          </a:xfrm>
-          <a:prstGeom prst="line">
-            <a:avLst/>
-          </a:prstGeom>
-          <a:ln w="20320">
-            <a:solidFill>
-              <a:srgbClr val="154FC2"/>
-            </a:solidFill>
-            <a:tailEnd type="triangle" w="med" h="med"/>
-          </a:ln>
-        </p:spPr>
-        <p:style>
-          <a:lnRef idx="2">
-            <a:schemeClr val="accent1"/>
-          </a:lnRef>
-          <a:fillRef idx="0">
-            <a:schemeClr val="accent1"/>
-          </a:fillRef>
-          <a:effectRef idx="1">
-            <a:schemeClr val="accent1"/>
-          </a:effectRef>
-          <a:fontRef idx="minor">
-            <a:schemeClr val="tx1"/>
-          </a:fontRef>
-        </p:style>
-      </p:cxnSp>
-      <p:sp>
-        <p:nvSpPr>
-          <p:cNvPr id="30" name="Oval 29"/>
-          <p:cNvSpPr/>
-          <p:nvPr/>
-        </p:nvSpPr>
-        <p:spPr>
-          <a:xfrm>
-            <a:off x="6117336" y="3172968"/>
-            <a:ext cx="292608" cy="292608"/>
-          </a:xfrm>
-          <a:prstGeom prst="ellipse">
-            <a:avLst/>
-          </a:prstGeom>
-          <a:solidFill>
-            <a:srgbClr val="FFFFFF"/>
-          </a:solidFill>
-          <a:ln w="19050">
-            <a:solidFill>
-              <a:srgbClr val="154FC2"/>
-            </a:solidFill>
-          </a:ln>
-        </p:spPr>
-        <p:style>
-          <a:lnRef idx="1">
-            <a:schemeClr val="accent1"/>
-          </a:lnRef>
-          <a:fillRef idx="3">
-            <a:schemeClr val="accent1"/>
-          </a:fillRef>
-          <a:effectRef idx="2">
-            <a:schemeClr val="accent1"/>
-          </a:effectRef>
-          <a:fontRef idx="minor">
-            <a:schemeClr val="lt1"/>
-          </a:fontRef>
-        </p:style>
-        <p:txBody>
-          <a:bodyPr rtlCol="0" anchor="ctr" lIns="0" rIns="0" tIns="0" bIns="0"/>
-          <a:lstStyle/>
-          <a:p>
-            <a:pPr algn="ctr"/>
-            <a:r>
-              <a:rPr sz="800" b="1">
-                <a:solidFill>
-                  <a:srgbClr val="154FC2"/>
-                </a:solidFill>
-              </a:rPr>
-              <a:t>A5r</a:t>
-            </a:r>
-          </a:p>
-        </p:txBody>
-      </p:sp>
-      <p:sp>
-        <p:nvSpPr>
-          <p:cNvPr id="31" name="TextBox 30"/>
-          <p:cNvSpPr txBox="1"/>
-          <p:nvPr/>
-        </p:nvSpPr>
-        <p:spPr>
-          <a:xfrm>
-            <a:off x="4800600" y="3063240"/>
-            <a:ext cx="2926080" cy="219456"/>
-          </a:xfrm>
-          <a:prstGeom prst="rect">
-            <a:avLst/>
-          </a:prstGeom>
-          <a:solidFill>
-            <a:srgbClr val="FFFFFF"/>
-          </a:solidFill>
-          <a:ln>
-            <a:noFill/>
-          </a:ln>
-        </p:spPr>
-        <p:txBody>
-          <a:bodyPr wrap="none" lIns="25400" rIns="25400" tIns="0" bIns="0">
-            <a:spAutoFit/>
-          </a:bodyPr>
-          <a:lstStyle/>
-          <a:p>
-            <a:pPr algn="l"/>
-            <a:r>
-              <a:rPr sz="850" b="1" i="0">
-                <a:solidFill>
-                  <a:srgbClr val="154FC2"/>
-                </a:solidFill>
-              </a:rPr>
-              <a:t>ReadStaging[0][1][slot].ready_op_id = 0; flush; sfence</a:t>
-            </a:r>
-          </a:p>
-        </p:txBody>
-      </p:sp>
-      <p:cxnSp>
-        <p:nvCxnSpPr>
-          <p:cNvPr id="32" name="Connector 31"/>
-          <p:cNvCxnSpPr/>
-          <p:nvPr/>
-        </p:nvCxnSpPr>
-        <p:spPr>
-          <a:xfrm>
-            <a:off x="1280160" y="3575304"/>
-            <a:ext cx="7726680" cy="0"/>
-          </a:xfrm>
-          <a:prstGeom prst="line">
-            <a:avLst/>
-          </a:prstGeom>
-          <a:ln w="20320">
-            <a:solidFill>
-              <a:srgbClr val="154FC2"/>
-            </a:solidFill>
-            <a:tailEnd type="triangle" w="med" h="med"/>
-          </a:ln>
-        </p:spPr>
-        <p:style>
-          <a:lnRef idx="2">
-            <a:schemeClr val="accent1"/>
-          </a:lnRef>
-          <a:fillRef idx="0">
-            <a:schemeClr val="accent1"/>
-          </a:fillRef>
-          <a:effectRef idx="1">
-            <a:schemeClr val="accent1"/>
-          </a:effectRef>
-          <a:fontRef idx="minor">
-            <a:schemeClr val="tx1"/>
-          </a:fontRef>
-        </p:style>
-      </p:cxnSp>
-      <p:sp>
-        <p:nvSpPr>
-          <p:cNvPr id="33" name="Oval 32"/>
-          <p:cNvSpPr/>
-          <p:nvPr/>
-        </p:nvSpPr>
-        <p:spPr>
-          <a:xfrm>
-            <a:off x="4997196" y="3429000"/>
-            <a:ext cx="292608" cy="292608"/>
-          </a:xfrm>
-          <a:prstGeom prst="ellipse">
-            <a:avLst/>
-          </a:prstGeom>
-          <a:solidFill>
-            <a:srgbClr val="FFFFFF"/>
-          </a:solidFill>
-          <a:ln w="19050">
-            <a:solidFill>
-              <a:srgbClr val="154FC2"/>
-            </a:solidFill>
-          </a:ln>
-        </p:spPr>
-        <p:style>
-          <a:lnRef idx="1">
-            <a:schemeClr val="accent1"/>
-          </a:lnRef>
-          <a:fillRef idx="3">
-            <a:schemeClr val="accent1"/>
-          </a:fillRef>
-          <a:effectRef idx="2">
-            <a:schemeClr val="accent1"/>
-          </a:effectRef>
-          <a:fontRef idx="minor">
-            <a:schemeClr val="lt1"/>
-          </a:fontRef>
-        </p:style>
-        <p:txBody>
-          <a:bodyPr rtlCol="0" anchor="ctr" lIns="0" rIns="0" tIns="0" bIns="0"/>
-          <a:lstStyle/>
-          <a:p>
-            <a:pPr algn="ctr"/>
-            <a:r>
-              <a:rPr sz="800" b="1">
-                <a:solidFill>
-                  <a:srgbClr val="154FC2"/>
-                </a:solidFill>
-              </a:rPr>
-              <a:t>A6r</a:t>
-            </a:r>
-          </a:p>
-        </p:txBody>
-      </p:sp>
-      <p:sp>
-        <p:nvSpPr>
-          <p:cNvPr id="34" name="TextBox 33"/>
-          <p:cNvSpPr txBox="1"/>
-          <p:nvPr/>
-        </p:nvSpPr>
-        <p:spPr>
-          <a:xfrm>
-            <a:off x="3680460" y="3319272"/>
-            <a:ext cx="2926080" cy="219456"/>
-          </a:xfrm>
-          <a:prstGeom prst="rect">
-            <a:avLst/>
-          </a:prstGeom>
-          <a:solidFill>
-            <a:srgbClr val="FFFFFF"/>
-          </a:solidFill>
-          <a:ln>
-            <a:noFill/>
-          </a:ln>
-        </p:spPr>
-        <p:txBody>
-          <a:bodyPr wrap="none" lIns="25400" rIns="25400" tIns="0" bIns="0">
-            <a:spAutoFit/>
-          </a:bodyPr>
-          <a:lstStyle/>
-          <a:p>
-            <a:pPr algn="l"/>
-            <a:r>
-              <a:rPr sz="850" b="1" i="0">
-                <a:solidFill>
-                  <a:srgbClr val="154FC2"/>
-                </a:solidFill>
-              </a:rPr>
-              <a:t>ReadRing[0][1].tail.fetch_add(1)  RMW-CXL</a:t>
-            </a:r>
-          </a:p>
-        </p:txBody>
-      </p:sp>
-      <p:cxnSp>
-        <p:nvCxnSpPr>
-          <p:cNvPr id="35" name="Connector 34"/>
-          <p:cNvCxnSpPr/>
-          <p:nvPr/>
-        </p:nvCxnSpPr>
-        <p:spPr>
-          <a:xfrm>
-            <a:off x="1280160" y="3831336"/>
-            <a:ext cx="7726680" cy="0"/>
-          </a:xfrm>
-          <a:prstGeom prst="line">
-            <a:avLst/>
-          </a:prstGeom>
-          <a:ln w="20320">
-            <a:solidFill>
-              <a:srgbClr val="154FC2"/>
-            </a:solidFill>
-            <a:tailEnd type="triangle" w="med" h="med"/>
-          </a:ln>
-        </p:spPr>
-        <p:style>
-          <a:lnRef idx="2">
-            <a:schemeClr val="accent1"/>
-          </a:lnRef>
-          <a:fillRef idx="0">
-            <a:schemeClr val="accent1"/>
-          </a:fillRef>
-          <a:effectRef idx="1">
-            <a:schemeClr val="accent1"/>
-          </a:effectRef>
-          <a:fontRef idx="minor">
-            <a:schemeClr val="tx1"/>
-          </a:fontRef>
-        </p:style>
-      </p:cxnSp>
-      <p:sp>
-        <p:nvSpPr>
-          <p:cNvPr id="36" name="Oval 35"/>
-          <p:cNvSpPr/>
-          <p:nvPr/>
-        </p:nvSpPr>
-        <p:spPr>
-          <a:xfrm>
-            <a:off x="4997196" y="3685032"/>
-            <a:ext cx="292608" cy="292608"/>
-          </a:xfrm>
-          <a:prstGeom prst="ellipse">
-            <a:avLst/>
-          </a:prstGeom>
-          <a:solidFill>
-            <a:srgbClr val="FFFFFF"/>
-          </a:solidFill>
-          <a:ln w="19050">
-            <a:solidFill>
-              <a:srgbClr val="154FC2"/>
-            </a:solidFill>
-          </a:ln>
-        </p:spPr>
-        <p:style>
-          <a:lnRef idx="1">
-            <a:schemeClr val="accent1"/>
-          </a:lnRef>
-          <a:fillRef idx="3">
-            <a:schemeClr val="accent1"/>
-          </a:fillRef>
-          <a:effectRef idx="2">
-            <a:schemeClr val="accent1"/>
-          </a:effectRef>
-          <a:fontRef idx="minor">
-            <a:schemeClr val="lt1"/>
-          </a:fontRef>
-        </p:style>
-        <p:txBody>
-          <a:bodyPr rtlCol="0" anchor="ctr" lIns="0" rIns="0" tIns="0" bIns="0"/>
-          <a:lstStyle/>
-          <a:p>
-            <a:pPr algn="ctr"/>
-            <a:r>
-              <a:rPr sz="800" b="1">
-                <a:solidFill>
-                  <a:srgbClr val="154FC2"/>
-                </a:solidFill>
-              </a:rPr>
-              <a:t>A7r</a:t>
-            </a:r>
-          </a:p>
-        </p:txBody>
-      </p:sp>
-      <p:sp>
-        <p:nvSpPr>
-          <p:cNvPr id="37" name="TextBox 36"/>
-          <p:cNvSpPr txBox="1"/>
-          <p:nvPr/>
-        </p:nvSpPr>
-        <p:spPr>
-          <a:xfrm>
-            <a:off x="3680460" y="3575304"/>
-            <a:ext cx="2926080" cy="219456"/>
-          </a:xfrm>
-          <a:prstGeom prst="rect">
-            <a:avLst/>
-          </a:prstGeom>
-          <a:solidFill>
-            <a:srgbClr val="FFFFFF"/>
-          </a:solidFill>
-          <a:ln>
-            <a:noFill/>
-          </a:ln>
-        </p:spPr>
-        <p:txBody>
-          <a:bodyPr wrap="none" lIns="25400" rIns="25400" tIns="0" bIns="0">
-            <a:spAutoFit/>
-          </a:bodyPr>
-          <a:lstStyle/>
-          <a:p>
-            <a:pPr algn="l"/>
-            <a:r>
-              <a:rPr sz="850" b="1" i="0">
-                <a:solidFill>
-                  <a:srgbClr val="154FC2"/>
-                </a:solidFill>
-              </a:rPr>
-              <a:t>write ReadEntry{key, req_op_id}; flush; sfence</a:t>
-            </a:r>
-          </a:p>
-        </p:txBody>
-      </p:sp>
-      <p:cxnSp>
-        <p:nvCxnSpPr>
-          <p:cNvPr id="38" name="Connector 37"/>
-          <p:cNvCxnSpPr/>
-          <p:nvPr/>
-        </p:nvCxnSpPr>
-        <p:spPr>
-          <a:xfrm>
-            <a:off x="1280160" y="4087368"/>
-            <a:ext cx="9966960" cy="0"/>
-          </a:xfrm>
-          <a:prstGeom prst="line">
-            <a:avLst/>
-          </a:prstGeom>
-          <a:ln w="20320">
-            <a:solidFill>
-              <a:srgbClr val="154FC2"/>
-            </a:solidFill>
-            <a:tailEnd type="triangle" w="med" h="med"/>
-          </a:ln>
-        </p:spPr>
-        <p:style>
-          <a:lnRef idx="2">
-            <a:schemeClr val="accent1"/>
-          </a:lnRef>
-          <a:fillRef idx="0">
-            <a:schemeClr val="accent1"/>
-          </a:fillRef>
-          <a:effectRef idx="1">
-            <a:schemeClr val="accent1"/>
-          </a:effectRef>
-          <a:fontRef idx="minor">
-            <a:schemeClr val="tx1"/>
-          </a:fontRef>
-        </p:style>
-      </p:cxnSp>
-      <p:sp>
-        <p:nvSpPr>
-          <p:cNvPr id="39" name="Oval 38"/>
-          <p:cNvSpPr/>
-          <p:nvPr/>
-        </p:nvSpPr>
-        <p:spPr>
-          <a:xfrm>
-            <a:off x="6117336" y="3941064"/>
-            <a:ext cx="292608" cy="292608"/>
-          </a:xfrm>
-          <a:prstGeom prst="ellipse">
-            <a:avLst/>
-          </a:prstGeom>
-          <a:solidFill>
-            <a:srgbClr val="FFCDD2"/>
-          </a:solidFill>
-          <a:ln w="19050">
-            <a:solidFill>
-              <a:srgbClr val="C62828"/>
-            </a:solidFill>
-          </a:ln>
-        </p:spPr>
-        <p:style>
-          <a:lnRef idx="1">
-            <a:schemeClr val="accent1"/>
-          </a:lnRef>
-          <a:fillRef idx="3">
-            <a:schemeClr val="accent1"/>
-          </a:fillRef>
-          <a:effectRef idx="2">
-            <a:schemeClr val="accent1"/>
-          </a:effectRef>
-          <a:fontRef idx="minor">
-            <a:schemeClr val="lt1"/>
-          </a:fontRef>
-        </p:style>
-        <p:txBody>
-          <a:bodyPr rtlCol="0" anchor="ctr" lIns="0" rIns="0" tIns="0" bIns="0"/>
-          <a:lstStyle/>
-          <a:p>
-            <a:pPr algn="ctr"/>
-            <a:r>
-              <a:rPr sz="800" b="1">
-                <a:solidFill>
-                  <a:srgbClr val="333333"/>
-                </a:solidFill>
-              </a:rPr>
-              <a:t>A8r</a:t>
-            </a:r>
-          </a:p>
-        </p:txBody>
-      </p:sp>
-      <p:sp>
-        <p:nvSpPr>
-          <p:cNvPr id="40" name="TextBox 39"/>
-          <p:cNvSpPr txBox="1"/>
-          <p:nvPr/>
-        </p:nvSpPr>
-        <p:spPr>
-          <a:xfrm>
-            <a:off x="4800600" y="3831336"/>
-            <a:ext cx="2926080" cy="219456"/>
-          </a:xfrm>
-          <a:prstGeom prst="rect">
-            <a:avLst/>
-          </a:prstGeom>
-          <a:solidFill>
-            <a:srgbClr val="FFFFFF"/>
-          </a:solidFill>
-          <a:ln>
-            <a:noFill/>
-          </a:ln>
-        </p:spPr>
-        <p:txBody>
-          <a:bodyPr wrap="none" lIns="25400" rIns="25400" tIns="0" bIns="0">
-            <a:spAutoFit/>
-          </a:bodyPr>
-          <a:lstStyle/>
-          <a:p>
-            <a:pPr algn="l"/>
-            <a:r>
-              <a:rPr sz="850" b="1" i="0">
-                <a:solidFill>
-                  <a:srgbClr val="154FC2"/>
-                </a:solidFill>
-              </a:rPr>
-              <a:t>worker spin on ReadStaging.ready_op_id  (200 ms cap)</a:t>
-            </a:r>
-          </a:p>
-        </p:txBody>
-      </p:sp>
-      <p:sp>
-        <p:nvSpPr>
-          <p:cNvPr id="41" name="Oval 40"/>
-          <p:cNvSpPr/>
-          <p:nvPr/>
-        </p:nvSpPr>
-        <p:spPr>
-          <a:xfrm>
-            <a:off x="8860536" y="4197096"/>
-            <a:ext cx="292608" cy="292608"/>
-          </a:xfrm>
-          <a:prstGeom prst="ellipse">
-            <a:avLst/>
-          </a:prstGeom>
-          <a:solidFill>
-            <a:srgbClr val="FFFFFF"/>
-          </a:solidFill>
-          <a:ln w="19050">
-            <a:solidFill>
-              <a:srgbClr val="154FC2"/>
-            </a:solidFill>
-          </a:ln>
-        </p:spPr>
-        <p:style>
-          <a:lnRef idx="1">
-            <a:schemeClr val="accent1"/>
-          </a:lnRef>
-          <a:fillRef idx="3">
-            <a:schemeClr val="accent1"/>
-          </a:fillRef>
-          <a:effectRef idx="2">
-            <a:schemeClr val="accent1"/>
-          </a:effectRef>
-          <a:fontRef idx="minor">
-            <a:schemeClr val="lt1"/>
-          </a:fontRef>
-        </p:style>
-        <p:txBody>
-          <a:bodyPr rtlCol="0" anchor="ctr" lIns="0" rIns="0" tIns="0" bIns="0"/>
-          <a:lstStyle/>
-          <a:p>
-            <a:pPr algn="ctr"/>
-            <a:r>
-              <a:rPr sz="800" b="1">
-                <a:solidFill>
-                  <a:srgbClr val="154FC2"/>
-                </a:solidFill>
-              </a:rPr>
-              <a:t>A9r</a:t>
-            </a:r>
-          </a:p>
-        </p:txBody>
-      </p:sp>
-      <p:sp>
-        <p:nvSpPr>
-          <p:cNvPr id="42" name="TextBox 41"/>
-          <p:cNvSpPr txBox="1"/>
-          <p:nvPr/>
-        </p:nvSpPr>
-        <p:spPr>
-          <a:xfrm>
-            <a:off x="9189719" y="4251960"/>
-            <a:ext cx="2743200" cy="219456"/>
-          </a:xfrm>
-          <a:prstGeom prst="rect">
-            <a:avLst/>
-          </a:prstGeom>
-          <a:solidFill>
-            <a:srgbClr val="FFFFFF"/>
-          </a:solidFill>
-          <a:ln>
-            <a:noFill/>
-          </a:ln>
-        </p:spPr>
-        <p:txBody>
-          <a:bodyPr wrap="none" lIns="25400" rIns="25400" tIns="0" bIns="0">
-            <a:spAutoFit/>
-          </a:bodyPr>
-          <a:lstStyle/>
-          <a:p>
-            <a:pPr algn="l"/>
-            <a:r>
-              <a:rPr sz="850" b="1" i="0">
-                <a:solidFill>
-                  <a:srgbClr val="154FC2"/>
-                </a:solidFill>
-              </a:rPr>
-              <a:t>poll ReadRing tail; flush bucket; scan 7 slots</a:t>
-            </a:r>
-          </a:p>
-        </p:txBody>
-      </p:sp>
-      <p:sp>
-        <p:nvSpPr>
-          <p:cNvPr id="43" name="Oval 42"/>
-          <p:cNvSpPr/>
-          <p:nvPr/>
-        </p:nvSpPr>
-        <p:spPr>
-          <a:xfrm>
-            <a:off x="8860536" y="4453128"/>
-            <a:ext cx="292608" cy="292608"/>
-          </a:xfrm>
-          <a:prstGeom prst="ellipse">
-            <a:avLst/>
-          </a:prstGeom>
-          <a:solidFill>
-            <a:srgbClr val="FFF49C"/>
-          </a:solidFill>
-          <a:ln w="19050">
-            <a:solidFill>
-              <a:srgbClr val="F9A825"/>
-            </a:solidFill>
-          </a:ln>
-        </p:spPr>
-        <p:style>
-          <a:lnRef idx="1">
-            <a:schemeClr val="accent1"/>
-          </a:lnRef>
-          <a:fillRef idx="3">
-            <a:schemeClr val="accent1"/>
-          </a:fillRef>
-          <a:effectRef idx="2">
-            <a:schemeClr val="accent1"/>
-          </a:effectRef>
-          <a:fontRef idx="minor">
-            <a:schemeClr val="lt1"/>
-          </a:fontRef>
-        </p:style>
-        <p:txBody>
-          <a:bodyPr rtlCol="0" anchor="ctr" lIns="0" rIns="0" tIns="0" bIns="0"/>
-          <a:lstStyle/>
-          <a:p>
-            <a:pPr algn="ctr"/>
-            <a:r>
-              <a:rPr sz="800" b="1">
-                <a:solidFill>
-                  <a:srgbClr val="333333"/>
-                </a:solidFill>
-              </a:rPr>
-              <a:t>A10r</a:t>
-            </a:r>
-          </a:p>
-        </p:txBody>
-      </p:sp>
-      <p:sp>
-        <p:nvSpPr>
-          <p:cNvPr id="44" name="TextBox 43"/>
-          <p:cNvSpPr txBox="1"/>
-          <p:nvPr/>
-        </p:nvSpPr>
-        <p:spPr>
-          <a:xfrm>
-            <a:off x="9189719" y="4507992"/>
-            <a:ext cx="2743200" cy="219456"/>
-          </a:xfrm>
-          <a:prstGeom prst="rect">
-            <a:avLst/>
-          </a:prstGeom>
-          <a:solidFill>
-            <a:srgbClr val="FFFFFF"/>
-          </a:solidFill>
-          <a:ln>
-            <a:noFill/>
-          </a:ln>
-        </p:spPr>
-        <p:txBody>
-          <a:bodyPr wrap="none" lIns="25400" rIns="25400" tIns="0" bIns="0">
-            <a:spAutoFit/>
-          </a:bodyPr>
-          <a:lstStyle/>
-          <a:p>
-            <a:pPr algn="l"/>
-            <a:r>
-              <a:rPr sz="850" b="1" i="0">
-                <a:solidFill>
-                  <a:srgbClr val="154FC2"/>
-                </a:solidFill>
-              </a:rPr>
-              <a:t>acquire SlotDirectoryEntry.spinlock; sharer_bitmap |= (1&lt;&lt;src)  ★ peer-visible state change ★</a:t>
-            </a:r>
-          </a:p>
-        </p:txBody>
-      </p:sp>
-      <p:sp>
-        <p:nvSpPr>
-          <p:cNvPr id="45" name="Oval 44"/>
-          <p:cNvSpPr/>
-          <p:nvPr/>
-        </p:nvSpPr>
-        <p:spPr>
-          <a:xfrm>
-            <a:off x="8860536" y="4709160"/>
-            <a:ext cx="292608" cy="292608"/>
-          </a:xfrm>
-          <a:prstGeom prst="ellipse">
-            <a:avLst/>
-          </a:prstGeom>
-          <a:solidFill>
-            <a:srgbClr val="FFFFFF"/>
-          </a:solidFill>
-          <a:ln w="19050">
-            <a:solidFill>
-              <a:srgbClr val="154FC2"/>
-            </a:solidFill>
-          </a:ln>
-        </p:spPr>
-        <p:style>
-          <a:lnRef idx="1">
-            <a:schemeClr val="accent1"/>
-          </a:lnRef>
-          <a:fillRef idx="3">
-            <a:schemeClr val="accent1"/>
-          </a:fillRef>
-          <a:effectRef idx="2">
-            <a:schemeClr val="accent1"/>
-          </a:effectRef>
-          <a:fontRef idx="minor">
-            <a:schemeClr val="lt1"/>
-          </a:fontRef>
-        </p:style>
-        <p:txBody>
-          <a:bodyPr rtlCol="0" anchor="ctr" lIns="0" rIns="0" tIns="0" bIns="0"/>
-          <a:lstStyle/>
-          <a:p>
-            <a:pPr algn="ctr"/>
-            <a:r>
-              <a:rPr sz="800" b="1">
-                <a:solidFill>
-                  <a:srgbClr val="154FC2"/>
-                </a:solidFill>
-              </a:rPr>
-              <a:t>A11r</a:t>
-            </a:r>
-          </a:p>
-        </p:txBody>
-      </p:sp>
-      <p:sp>
-        <p:nvSpPr>
-          <p:cNvPr id="46" name="TextBox 45"/>
-          <p:cNvSpPr txBox="1"/>
-          <p:nvPr/>
-        </p:nvSpPr>
-        <p:spPr>
-          <a:xfrm>
-            <a:off x="9189719" y="4764024"/>
-            <a:ext cx="2743200" cy="219456"/>
-          </a:xfrm>
-          <a:prstGeom prst="rect">
-            <a:avLst/>
-          </a:prstGeom>
-          <a:solidFill>
-            <a:srgbClr val="FFFFFF"/>
-          </a:solidFill>
-          <a:ln>
-            <a:noFill/>
-          </a:ln>
-        </p:spPr>
-        <p:txBody>
-          <a:bodyPr wrap="none" lIns="25400" rIns="25400" tIns="0" bIns="0">
-            <a:spAutoFit/>
-          </a:bodyPr>
-          <a:lstStyle/>
-          <a:p>
-            <a:pPr algn="l"/>
-            <a:r>
-              <a:rPr sz="850" b="1" i="0">
-                <a:solidFill>
-                  <a:srgbClr val="154FC2"/>
-                </a:solidFill>
-              </a:rPr>
-              <a:t>pool-&gt;read(blk_off, 4) → value_len; pool-&gt;read(blk_off+4, vlen)</a:t>
-            </a:r>
-          </a:p>
-        </p:txBody>
-      </p:sp>
-      <p:cxnSp>
-        <p:nvCxnSpPr>
-          <p:cNvPr id="47" name="Connector 46"/>
-          <p:cNvCxnSpPr/>
-          <p:nvPr/>
-        </p:nvCxnSpPr>
-        <p:spPr>
-          <a:xfrm>
-            <a:off x="9006840" y="5111496"/>
-            <a:ext cx="2240280" cy="0"/>
-          </a:xfrm>
-          <a:prstGeom prst="line">
-            <a:avLst/>
-          </a:prstGeom>
-          <a:ln w="20320">
-            <a:solidFill>
-              <a:srgbClr val="154FC2"/>
-            </a:solidFill>
-            <a:tailEnd type="triangle" w="med" h="med"/>
-          </a:ln>
-        </p:spPr>
-        <p:style>
-          <a:lnRef idx="2">
-            <a:schemeClr val="accent1"/>
-          </a:lnRef>
-          <a:fillRef idx="0">
-            <a:schemeClr val="accent1"/>
-          </a:fillRef>
-          <a:effectRef idx="1">
-            <a:schemeClr val="accent1"/>
-          </a:effectRef>
-          <a:fontRef idx="minor">
-            <a:schemeClr val="tx1"/>
-          </a:fontRef>
-        </p:style>
-      </p:cxnSp>
-      <p:sp>
-        <p:nvSpPr>
-          <p:cNvPr id="48" name="Oval 47"/>
-          <p:cNvSpPr/>
-          <p:nvPr/>
-        </p:nvSpPr>
-        <p:spPr>
-          <a:xfrm>
-            <a:off x="9980676" y="4965192"/>
-            <a:ext cx="292608" cy="292608"/>
-          </a:xfrm>
-          <a:prstGeom prst="ellipse">
-            <a:avLst/>
-          </a:prstGeom>
-          <a:solidFill>
-            <a:srgbClr val="FFFFFF"/>
-          </a:solidFill>
-          <a:ln w="19050">
-            <a:solidFill>
-              <a:srgbClr val="154FC2"/>
-            </a:solidFill>
-          </a:ln>
-        </p:spPr>
-        <p:style>
-          <a:lnRef idx="1">
-            <a:schemeClr val="accent1"/>
-          </a:lnRef>
-          <a:fillRef idx="3">
-            <a:schemeClr val="accent1"/>
-          </a:fillRef>
-          <a:effectRef idx="2">
-            <a:schemeClr val="accent1"/>
-          </a:effectRef>
-          <a:fontRef idx="minor">
-            <a:schemeClr val="lt1"/>
-          </a:fontRef>
-        </p:style>
-        <p:txBody>
-          <a:bodyPr rtlCol="0" anchor="ctr" lIns="0" rIns="0" tIns="0" bIns="0"/>
-          <a:lstStyle/>
-          <a:p>
-            <a:pPr algn="ctr"/>
-            <a:r>
-              <a:rPr sz="800" b="1">
-                <a:solidFill>
-                  <a:srgbClr val="154FC2"/>
-                </a:solidFill>
-              </a:rPr>
-              <a:t>A12r</a:t>
-            </a:r>
-          </a:p>
-        </p:txBody>
-      </p:sp>
-      <p:sp>
-        <p:nvSpPr>
-          <p:cNvPr id="49" name="TextBox 48"/>
-          <p:cNvSpPr txBox="1"/>
-          <p:nvPr/>
-        </p:nvSpPr>
-        <p:spPr>
-          <a:xfrm>
-            <a:off x="8663940" y="4855464"/>
-            <a:ext cx="2926080" cy="219456"/>
-          </a:xfrm>
-          <a:prstGeom prst="rect">
-            <a:avLst/>
-          </a:prstGeom>
-          <a:solidFill>
-            <a:srgbClr val="FFFFFF"/>
-          </a:solidFill>
-          <a:ln>
-            <a:noFill/>
-          </a:ln>
-        </p:spPr>
-        <p:txBody>
-          <a:bodyPr wrap="none" lIns="25400" rIns="25400" tIns="0" bIns="0">
-            <a:spAutoFit/>
-          </a:bodyPr>
-          <a:lstStyle/>
-          <a:p>
-            <a:pPr algn="l"/>
-            <a:r>
-              <a:rPr sz="850" b="1" i="0">
-                <a:solidFill>
-                  <a:srgbClr val="154FC2"/>
-                </a:solidFill>
-              </a:rPr>
-              <a:t>write ReadStaging value_bytes + lookup_epoch (C13 tag) + status; flush</a:t>
-            </a:r>
-          </a:p>
-        </p:txBody>
-      </p:sp>
-      <p:cxnSp>
-        <p:nvCxnSpPr>
-          <p:cNvPr id="50" name="Connector 49"/>
-          <p:cNvCxnSpPr/>
-          <p:nvPr/>
-        </p:nvCxnSpPr>
-        <p:spPr>
-          <a:xfrm>
-            <a:off x="9006840" y="5367528"/>
-            <a:ext cx="2240280" cy="0"/>
-          </a:xfrm>
-          <a:prstGeom prst="line">
-            <a:avLst/>
-          </a:prstGeom>
-          <a:ln w="20320">
-            <a:solidFill>
-              <a:srgbClr val="154FC2"/>
-            </a:solidFill>
-            <a:tailEnd type="triangle" w="med" h="med"/>
-          </a:ln>
-        </p:spPr>
-        <p:style>
-          <a:lnRef idx="2">
-            <a:schemeClr val="accent1"/>
-          </a:lnRef>
-          <a:fillRef idx="0">
-            <a:schemeClr val="accent1"/>
-          </a:fillRef>
-          <a:effectRef idx="1">
-            <a:schemeClr val="accent1"/>
-          </a:effectRef>
-          <a:fontRef idx="minor">
-            <a:schemeClr val="tx1"/>
-          </a:fontRef>
-        </p:style>
-      </p:cxnSp>
-      <p:sp>
-        <p:nvSpPr>
-          <p:cNvPr id="51" name="Oval 50"/>
-          <p:cNvSpPr/>
-          <p:nvPr/>
-        </p:nvSpPr>
-        <p:spPr>
-          <a:xfrm>
-            <a:off x="9980676" y="5221224"/>
-            <a:ext cx="292608" cy="292608"/>
-          </a:xfrm>
-          <a:prstGeom prst="ellipse">
-            <a:avLst/>
-          </a:prstGeom>
-          <a:solidFill>
-            <a:srgbClr val="FFF49C"/>
-          </a:solidFill>
-          <a:ln w="19050">
-            <a:solidFill>
-              <a:srgbClr val="F9A825"/>
-            </a:solidFill>
-          </a:ln>
-        </p:spPr>
-        <p:style>
-          <a:lnRef idx="1">
-            <a:schemeClr val="accent1"/>
-          </a:lnRef>
-          <a:fillRef idx="3">
-            <a:schemeClr val="accent1"/>
-          </a:fillRef>
-          <a:effectRef idx="2">
-            <a:schemeClr val="accent1"/>
-          </a:effectRef>
-          <a:fontRef idx="minor">
-            <a:schemeClr val="lt1"/>
-          </a:fontRef>
-        </p:style>
-        <p:txBody>
-          <a:bodyPr rtlCol="0" anchor="ctr" lIns="0" rIns="0" tIns="0" bIns="0"/>
-          <a:lstStyle/>
-          <a:p>
-            <a:pPr algn="ctr"/>
-            <a:r>
-              <a:rPr sz="800" b="1">
-                <a:solidFill>
-                  <a:srgbClr val="333333"/>
-                </a:solidFill>
-              </a:rPr>
-              <a:t>A13r</a:t>
-            </a:r>
-          </a:p>
-        </p:txBody>
-      </p:sp>
-      <p:sp>
-        <p:nvSpPr>
-          <p:cNvPr id="52" name="TextBox 51"/>
-          <p:cNvSpPr txBox="1"/>
-          <p:nvPr/>
-        </p:nvSpPr>
-        <p:spPr>
-          <a:xfrm>
-            <a:off x="8663940" y="5458968"/>
-            <a:ext cx="2926080" cy="219456"/>
-          </a:xfrm>
-          <a:prstGeom prst="rect">
-            <a:avLst/>
-          </a:prstGeom>
-          <a:solidFill>
-            <a:srgbClr val="FFFFFF"/>
-          </a:solidFill>
-          <a:ln>
-            <a:noFill/>
-          </a:ln>
-        </p:spPr>
-        <p:txBody>
-          <a:bodyPr wrap="none" lIns="25400" rIns="25400" tIns="0" bIns="0">
-            <a:spAutoFit/>
-          </a:bodyPr>
-          <a:lstStyle/>
-          <a:p>
-            <a:pPr algn="l"/>
-            <a:r>
-              <a:rPr sz="850" b="1" i="0">
-                <a:solidFill>
-                  <a:srgbClr val="154FC2"/>
-                </a:solidFill>
-              </a:rPr>
-              <a:t>★ publish staging.ready_op_id = req_op_id ★ (release-publish)</a:t>
-            </a:r>
-          </a:p>
-        </p:txBody>
-      </p:sp>
-      <p:cxnSp>
-        <p:nvCxnSpPr>
-          <p:cNvPr id="53" name="Connector 52"/>
-          <p:cNvCxnSpPr/>
-          <p:nvPr/>
-        </p:nvCxnSpPr>
-        <p:spPr>
-          <a:xfrm flipH="1">
-            <a:off x="1280160" y="5623560"/>
-            <a:ext cx="9966960" cy="0"/>
-          </a:xfrm>
-          <a:prstGeom prst="line">
-            <a:avLst/>
-          </a:prstGeom>
-          <a:ln w="20320">
-            <a:solidFill>
-              <a:srgbClr val="154FC2"/>
-            </a:solidFill>
-            <a:tailEnd type="triangle" w="med" h="med"/>
-          </a:ln>
-        </p:spPr>
-        <p:style>
-          <a:lnRef idx="2">
-            <a:schemeClr val="accent1"/>
-          </a:lnRef>
-          <a:fillRef idx="0">
-            <a:schemeClr val="accent1"/>
-          </a:fillRef>
-          <a:effectRef idx="1">
-            <a:schemeClr val="accent1"/>
-          </a:effectRef>
-          <a:fontRef idx="minor">
-            <a:schemeClr val="tx1"/>
-          </a:fontRef>
-        </p:style>
-      </p:cxnSp>
-      <p:sp>
-        <p:nvSpPr>
-          <p:cNvPr id="54" name="Oval 53"/>
-          <p:cNvSpPr/>
-          <p:nvPr/>
-        </p:nvSpPr>
-        <p:spPr>
-          <a:xfrm>
-            <a:off x="6117336" y="5477256"/>
-            <a:ext cx="292608" cy="292608"/>
-          </a:xfrm>
-          <a:prstGeom prst="ellipse">
-            <a:avLst/>
-          </a:prstGeom>
-          <a:solidFill>
-            <a:srgbClr val="FFFFFF"/>
-          </a:solidFill>
-          <a:ln w="19050">
-            <a:solidFill>
-              <a:srgbClr val="154FC2"/>
-            </a:solidFill>
-          </a:ln>
-        </p:spPr>
-        <p:style>
-          <a:lnRef idx="1">
-            <a:schemeClr val="accent1"/>
-          </a:lnRef>
-          <a:fillRef idx="3">
-            <a:schemeClr val="accent1"/>
-          </a:fillRef>
-          <a:effectRef idx="2">
-            <a:schemeClr val="accent1"/>
-          </a:effectRef>
-          <a:fontRef idx="minor">
-            <a:schemeClr val="lt1"/>
-          </a:fontRef>
-        </p:style>
-        <p:txBody>
-          <a:bodyPr rtlCol="0" anchor="ctr" lIns="0" rIns="0" tIns="0" bIns="0"/>
-          <a:lstStyle/>
-          <a:p>
-            <a:pPr algn="ctr"/>
-            <a:r>
-              <a:rPr sz="800" b="1">
-                <a:solidFill>
-                  <a:srgbClr val="154FC2"/>
-                </a:solidFill>
-              </a:rPr>
-              <a:t>A14r</a:t>
-            </a:r>
-          </a:p>
-        </p:txBody>
-      </p:sp>
-      <p:sp>
-        <p:nvSpPr>
-          <p:cNvPr id="55" name="TextBox 54"/>
-          <p:cNvSpPr txBox="1"/>
-          <p:nvPr/>
-        </p:nvSpPr>
-        <p:spPr>
-          <a:xfrm>
-            <a:off x="4800600" y="5715000"/>
-            <a:ext cx="2926080" cy="219456"/>
-          </a:xfrm>
-          <a:prstGeom prst="rect">
-            <a:avLst/>
-          </a:prstGeom>
-          <a:solidFill>
-            <a:srgbClr val="FFFFFF"/>
-          </a:solidFill>
-          <a:ln>
-            <a:noFill/>
-          </a:ln>
-        </p:spPr>
-        <p:txBody>
-          <a:bodyPr wrap="none" lIns="25400" rIns="25400" tIns="0" bIns="0">
-            <a:spAutoFit/>
-          </a:bodyPr>
-          <a:lstStyle/>
-          <a:p>
-            <a:pPr algn="l"/>
-            <a:r>
-              <a:rPr sz="850" b="1" i="0">
-                <a:solidFill>
-                  <a:srgbClr val="154FC2"/>
-                </a:solidFill>
-              </a:rPr>
-              <a:t>worker A8r poll observes ready_op_id == req_op_id  → break spin</a:t>
-            </a:r>
-          </a:p>
-        </p:txBody>
-      </p:sp>
-      <p:sp>
-        <p:nvSpPr>
-          <p:cNvPr id="56" name="Rectangle 55"/>
-          <p:cNvSpPr/>
-          <p:nvPr/>
-        </p:nvSpPr>
-        <p:spPr>
-          <a:xfrm>
-            <a:off x="1197863" y="4041648"/>
-            <a:ext cx="164592" cy="1819656"/>
-          </a:xfrm>
-          <a:prstGeom prst="rect">
-            <a:avLst/>
-          </a:prstGeom>
-          <a:solidFill>
-            <a:srgbClr val="FFCDD2"/>
-          </a:solidFill>
-          <a:ln w="6350">
-            <a:solidFill>
-              <a:srgbClr val="C62828"/>
-            </a:solidFill>
-          </a:ln>
-        </p:spPr>
-        <p:style>
-          <a:lnRef idx="1">
-            <a:schemeClr val="accent1"/>
-          </a:lnRef>
-          <a:fillRef idx="3">
-            <a:schemeClr val="accent1"/>
-          </a:fillRef>
-          <a:effectRef idx="2">
-            <a:schemeClr val="accent1"/>
-          </a:effectRef>
-          <a:fontRef idx="minor">
-            <a:schemeClr val="lt1"/>
-          </a:fontRef>
-        </p:style>
-        <p:txBody>
-          <a:bodyPr rtlCol="0" anchor="ctr"/>
-          <a:lstStyle/>
-          <a:p>
-            <a:pPr algn="ctr"/>
-          </a:p>
-        </p:txBody>
-      </p:sp>
-      <p:sp>
-        <p:nvSpPr>
-          <p:cNvPr id="57" name="Oval 56"/>
-          <p:cNvSpPr/>
-          <p:nvPr/>
-        </p:nvSpPr>
-        <p:spPr>
-          <a:xfrm>
-            <a:off x="1133856" y="5733288"/>
-            <a:ext cx="292608" cy="292608"/>
-          </a:xfrm>
-          <a:prstGeom prst="ellipse">
-            <a:avLst/>
-          </a:prstGeom>
-          <a:solidFill>
-            <a:srgbClr val="FFF49C"/>
-          </a:solidFill>
-          <a:ln w="19050">
-            <a:solidFill>
-              <a:srgbClr val="F9A825"/>
-            </a:solidFill>
-          </a:ln>
-        </p:spPr>
-        <p:style>
-          <a:lnRef idx="1">
-            <a:schemeClr val="accent1"/>
-          </a:lnRef>
-          <a:fillRef idx="3">
-            <a:schemeClr val="accent1"/>
-          </a:fillRef>
-          <a:effectRef idx="2">
-            <a:schemeClr val="accent1"/>
-          </a:effectRef>
-          <a:fontRef idx="minor">
-            <a:schemeClr val="lt1"/>
-          </a:fontRef>
-        </p:style>
-        <p:txBody>
-          <a:bodyPr rtlCol="0" anchor="ctr" lIns="0" rIns="0" tIns="0" bIns="0"/>
-          <a:lstStyle/>
-          <a:p>
-            <a:pPr algn="ctr"/>
-            <a:r>
-              <a:rPr sz="800" b="1">
-                <a:solidFill>
-                  <a:srgbClr val="333333"/>
-                </a:solidFill>
-              </a:rPr>
-              <a:t>A15r</a:t>
-            </a:r>
-          </a:p>
-        </p:txBody>
-      </p:sp>
-      <p:sp>
-        <p:nvSpPr>
-          <p:cNvPr id="58" name="TextBox 57"/>
-          <p:cNvSpPr txBox="1"/>
-          <p:nvPr/>
-        </p:nvSpPr>
-        <p:spPr>
-          <a:xfrm>
-            <a:off x="1463039" y="5788152"/>
-            <a:ext cx="2743200" cy="219456"/>
-          </a:xfrm>
-          <a:prstGeom prst="rect">
-            <a:avLst/>
-          </a:prstGeom>
-          <a:solidFill>
-            <a:srgbClr val="FFFFFF"/>
-          </a:solidFill>
-          <a:ln>
-            <a:noFill/>
-          </a:ln>
-        </p:spPr>
-        <p:txBody>
-          <a:bodyPr wrap="none" lIns="25400" rIns="25400" tIns="0" bIns="0">
-            <a:spAutoFit/>
-          </a:bodyPr>
-          <a:lstStyle/>
-          <a:p>
-            <a:pPr algn="l"/>
-            <a:r>
-              <a:rPr sz="850" b="1" i="0">
-                <a:solidFill>
-                  <a:srgbClr val="154FC2"/>
-                </a:solidFill>
-              </a:rPr>
-              <a:t>C13: if staging.lookup_epoch &lt; my_epoch_at_send → return -3 (retry from L2)</a:t>
-            </a:r>
-          </a:p>
-        </p:txBody>
-      </p:sp>
-      <p:sp>
-        <p:nvSpPr>
-          <p:cNvPr id="59" name="Oval 58"/>
-          <p:cNvSpPr/>
-          <p:nvPr/>
-        </p:nvSpPr>
-        <p:spPr>
-          <a:xfrm>
-            <a:off x="1133856" y="5989320"/>
-            <a:ext cx="292608" cy="292608"/>
-          </a:xfrm>
-          <a:prstGeom prst="ellipse">
-            <a:avLst/>
-          </a:prstGeom>
-          <a:solidFill>
-            <a:srgbClr val="FFFFFF"/>
-          </a:solidFill>
-          <a:ln w="19050">
-            <a:solidFill>
-              <a:srgbClr val="154FC2"/>
-            </a:solidFill>
-          </a:ln>
-        </p:spPr>
-        <p:style>
-          <a:lnRef idx="1">
-            <a:schemeClr val="accent1"/>
-          </a:lnRef>
-          <a:fillRef idx="3">
-            <a:schemeClr val="accent1"/>
-          </a:fillRef>
-          <a:effectRef idx="2">
-            <a:schemeClr val="accent1"/>
-          </a:effectRef>
-          <a:fontRef idx="minor">
-            <a:schemeClr val="lt1"/>
-          </a:fontRef>
-        </p:style>
-        <p:txBody>
-          <a:bodyPr rtlCol="0" anchor="ctr" lIns="0" rIns="0" tIns="0" bIns="0"/>
-          <a:lstStyle/>
-          <a:p>
-            <a:pPr algn="ctr"/>
-            <a:r>
-              <a:rPr sz="800" b="1">
-                <a:solidFill>
-                  <a:srgbClr val="154FC2"/>
-                </a:solidFill>
-              </a:rPr>
-              <a:t>A16r</a:t>
-            </a:r>
-          </a:p>
-        </p:txBody>
-      </p:sp>
-      <p:sp>
-        <p:nvSpPr>
-          <p:cNvPr id="60" name="TextBox 59"/>
-          <p:cNvSpPr txBox="1"/>
-          <p:nvPr/>
-        </p:nvSpPr>
-        <p:spPr>
-          <a:xfrm>
-            <a:off x="1463039" y="6044184"/>
-            <a:ext cx="2743200" cy="219456"/>
-          </a:xfrm>
-          <a:prstGeom prst="rect">
-            <a:avLst/>
-          </a:prstGeom>
-          <a:solidFill>
-            <a:srgbClr val="FFFFFF"/>
-          </a:solidFill>
-          <a:ln>
-            <a:noFill/>
-          </a:ln>
-        </p:spPr>
-        <p:txBody>
-          <a:bodyPr wrap="none" lIns="25400" rIns="25400" tIns="0" bIns="0">
-            <a:spAutoFit/>
-          </a:bodyPr>
-          <a:lstStyle/>
-          <a:p>
-            <a:pPr algn="l"/>
-            <a:r>
-              <a:rPr sz="850" b="1" i="0">
-                <a:solidFill>
-                  <a:srgbClr val="154FC2"/>
-                </a:solidFill>
-              </a:rPr>
-              <a:t>memcpy value_bytes from staging; populate L2; populate TLS L1; return</a:t>
-            </a:r>
-          </a:p>
-        </p:txBody>
-      </p:sp>
-      <p:sp>
-        <p:nvSpPr>
-          <p:cNvPr id="61" name="Rounded Rectangle 60"/>
+              <a:t>PROBE_OP("R6"); return 0</a:t>
+            </a:r>
+          </a:p>
+        </p:txBody>
+      </p:sp>
+      <p:sp>
+        <p:nvSpPr>
+          <p:cNvPr id="63" name="Rounded Rectangle 62"/>
           <p:cNvSpPr/>
           <p:nvPr/>
         </p:nvSpPr>
@@ -9591,7 +10203,7 @@
       </p:sp>
       <p:sp>
         <p:nvSpPr>
-          <p:cNvPr id="62" name="TextBox 61"/>
+          <p:cNvPr id="64" name="TextBox 63"/>
           <p:cNvSpPr txBox="1"/>
           <p:nvPr/>
         </p:nvSpPr>
@@ -9618,14 +10230,14 @@
                   <a:srgbClr val="154FC2"/>
                 </a:solidFill>
               </a:rPr>
-              <a:t>—▶  Step arrow</a:t>
-            </a:r>
-          </a:p>
-        </p:txBody>
-      </p:sp>
-      <p:sp>
-        <p:nvSpPr>
-          <p:cNvPr id="63" name="TextBox 62"/>
+              <a:t>● R*  probe (worker)</a:t>
+            </a:r>
+          </a:p>
+        </p:txBody>
+      </p:sp>
+      <p:sp>
+        <p:nvSpPr>
+          <p:cNvPr id="65" name="TextBox 64"/>
           <p:cNvSpPr txBox="1"/>
           <p:nvPr/>
         </p:nvSpPr>
@@ -9649,17 +10261,17 @@
             <a:r>
               <a:rPr sz="900" b="1">
                 <a:solidFill>
-                  <a:srgbClr val="F9A825"/>
-                </a:solidFill>
-              </a:rPr>
-              <a:t>● Linearization checkpoint</a:t>
-            </a:r>
-          </a:p>
-        </p:txBody>
-      </p:sp>
-      <p:sp>
-        <p:nvSpPr>
-          <p:cNvPr id="64" name="TextBox 63"/>
+                  <a:srgbClr val="9E9E9E"/>
+                </a:solidFill>
+              </a:rPr>
+              <a:t>— = no PROBE_OP</a:t>
+            </a:r>
+          </a:p>
+        </p:txBody>
+      </p:sp>
+      <p:sp>
+        <p:nvSpPr>
+          <p:cNvPr id="66" name="TextBox 65"/>
           <p:cNvSpPr txBox="1"/>
           <p:nvPr/>
         </p:nvSpPr>
@@ -9683,17 +10295,17 @@
             <a:r>
               <a:rPr sz="900" b="1">
                 <a:solidFill>
-                  <a:srgbClr val="C62828"/>
-                </a:solidFill>
-              </a:rPr>
-              <a:t>● Cross-host blocking</a:t>
-            </a:r>
-          </a:p>
-        </p:txBody>
-      </p:sp>
-      <p:sp>
-        <p:nvSpPr>
-          <p:cNvPr id="65" name="TextBox 64"/>
+                  <a:srgbClr val="F9A825"/>
+                </a:solidFill>
+              </a:rPr>
+              <a:t>★ Linearization checkpoint</a:t>
+            </a:r>
+          </a:p>
+        </p:txBody>
+      </p:sp>
+      <p:sp>
+        <p:nvSpPr>
+          <p:cNvPr id="67" name="TextBox 66"/>
           <p:cNvSpPr txBox="1"/>
           <p:nvPr/>
         </p:nvSpPr>
@@ -9720,14 +10332,14 @@
                   <a:srgbClr val="C62828"/>
                 </a:solidFill>
               </a:rPr>
-              <a:t>▌ blocked lifeline</a:t>
-            </a:r>
-          </a:p>
-        </p:txBody>
-      </p:sp>
-      <p:sp>
-        <p:nvSpPr>
-          <p:cNvPr id="66" name="TextBox 65"/>
+              <a:t>● Cross-host blocking (R3)</a:t>
+            </a:r>
+          </a:p>
+        </p:txBody>
+      </p:sp>
+      <p:sp>
+        <p:nvSpPr>
+          <p:cNvPr id="68" name="TextBox 67"/>
           <p:cNvSpPr txBox="1"/>
           <p:nvPr/>
         </p:nvSpPr>
@@ -9754,7 +10366,7 @@
                   <a:srgbClr val="0D327D"/>
                 </a:solidFill>
               </a:rPr>
-              <a:t>16 steps · 4 actors · 1 blocking point</a:t>
+              <a:t>5 probed stages · 14 untracked · 1 blocking span</a:t>
             </a:r>
           </a:p>
         </p:txBody>
@@ -9838,7 +10450,7 @@
                   <a:srgbClr val="9E9E9E"/>
                 </a:solidFill>
               </a:rPr>
-              <a:t>4 numbered steps · 1 actor · 0 cross-host blocking · no seqlock revalidation (LRC: value is committed at SOME instant during scan)</a:t>
+              <a:t>No DECOMP_REC probe on search() — latency inferred from primitives. 1 actor · 0 cross-host blocking · no seqlock revalidation (LRC: value is committed at SOME instant during scan).</a:t>
             </a:r>
           </a:p>
         </p:txBody>

--- a/docs/protocol_a_vs_c_path_comparison.pptx
+++ b/docs/protocol_a_vs_c_path_comparison.pptx
@@ -3276,7 +3276,7 @@
                   <a:srgbClr val="154FC2"/>
                 </a:solidFill>
               </a:rPr>
-              <a:t>Protocol A — Write path: cross-host  update(K, V)  with peer cached</a:t>
+              <a:t>Protocol A — Write path: cross-host  update(K=1024 B, V)  T=64</a:t>
             </a:r>
           </a:p>
         </p:txBody>
@@ -3309,7 +3309,7 @@
                   <a:srgbClr val="9E9E9E"/>
                 </a:solidFill>
               </a:rPr>
-              <a:t>Steps labelled by path_decomp probe tag (W1..W12, I1..I8). Greyed "untracked" steps = code without PROBE_OP (ring fetch_add, slot wait, ACK spin). Same probe tags appear in slide 6 latency table.</a:t>
+              <a:t>14 narrative steps · 3 actors · per-step latency in [µs]  (measured = from iter-11A Phase 5 path_decomp KV=512 scaled to KV=1024; estimated = derived from CXL primitives)</a:t>
             </a:r>
           </a:p>
         </p:txBody>
@@ -3362,8 +3362,7 @@
                   <a:srgbClr val="1565C0"/>
                 </a:solidFill>
               </a:rPr>
-              <a:t>host 0  worker (caller)
-forward_write_direct() — no probes</a:t>
+              <a:t>host 0  worker (caller)</a:t>
             </a:r>
           </a:p>
         </p:txBody>
@@ -3416,8 +3415,7 @@
                   <a:srgbClr val="154FC2"/>
                 </a:solidFill>
               </a:rPr>
-              <a:t>host 1  WriteReceiver (cpu 65)
-execute_write_local() — W*/I* probes</a:t>
+              <a:t>host 1  WriteReceiver (cpu 65)</a:t>
             </a:r>
           </a:p>
         </p:txBody>
@@ -3470,8 +3468,7 @@
                   <a:srgbClr val="154FC2"/>
                 </a:solidFill>
               </a:rPr>
-              <a:t>host 0  InvalReceiver (cpu 69)
-inval_receiver_loop() — I3..I6</a:t>
+              <a:t>host 0  InvalReceiver (cpu 69)</a:t>
             </a:r>
           </a:p>
         </p:txBody>
@@ -3603,7 +3600,7 @@
           </a:solidFill>
           <a:ln w="19050">
             <a:solidFill>
-              <a:srgbClr val="9E9E9E"/>
+              <a:srgbClr val="154FC2"/>
             </a:solidFill>
           </a:ln>
         </p:spPr>
@@ -3629,10 +3626,10 @@
             <a:r>
               <a:rPr sz="800" b="1">
                 <a:solidFill>
-                  <a:srgbClr val="9E9E9E"/>
+                  <a:srgbClr val="154FC2"/>
                 </a:solidFill>
               </a:rPr>
-              <a:t>—</a:t>
+              <a:t>A1</a:t>
             </a:r>
           </a:p>
         </p:txBody>
@@ -3668,10 +3665,10 @@
             <a:r>
               <a:rPr sz="850" b="1" i="0">
                 <a:solidFill>
-                  <a:srgbClr val="9E9E9E"/>
+                  <a:srgbClr val="154FC2"/>
                 </a:solidFill>
               </a:rPr>
-              <a:t>forward_write_direct: write staging + WriteRing.fetch_add + write Entry</a:t>
+              <a:t>[1.1 µs est] write V bytes → ForwardStaging[0][1][slot]  (16 CL flush)</a:t>
             </a:r>
           </a:p>
         </p:txBody>
@@ -3684,7 +3681,227 @@
         </p:nvSpPr>
         <p:spPr>
           <a:xfrm>
-            <a:off x="1316736" y="1929384"/>
+            <a:off x="1316736" y="2020823"/>
+            <a:ext cx="292608" cy="292608"/>
+          </a:xfrm>
+          <a:prstGeom prst="ellipse">
+            <a:avLst/>
+          </a:prstGeom>
+          <a:solidFill>
+            <a:srgbClr val="FFFFFF"/>
+          </a:solidFill>
+          <a:ln w="19050">
+            <a:solidFill>
+              <a:srgbClr val="154FC2"/>
+            </a:solidFill>
+          </a:ln>
+        </p:spPr>
+        <p:style>
+          <a:lnRef idx="1">
+            <a:schemeClr val="accent1"/>
+          </a:lnRef>
+          <a:fillRef idx="3">
+            <a:schemeClr val="accent1"/>
+          </a:fillRef>
+          <a:effectRef idx="2">
+            <a:schemeClr val="accent1"/>
+          </a:effectRef>
+          <a:fontRef idx="minor">
+            <a:schemeClr val="lt1"/>
+          </a:fontRef>
+        </p:style>
+        <p:txBody>
+          <a:bodyPr rtlCol="0" anchor="ctr" lIns="0" rIns="0" tIns="0" bIns="0"/>
+          <a:lstStyle/>
+          <a:p>
+            <a:pPr algn="ctr"/>
+            <a:r>
+              <a:rPr sz="800" b="1">
+                <a:solidFill>
+                  <a:srgbClr val="154FC2"/>
+                </a:solidFill>
+              </a:rPr>
+              <a:t>A2</a:t>
+            </a:r>
+          </a:p>
+        </p:txBody>
+      </p:sp>
+      <p:sp>
+        <p:nvSpPr>
+          <p:cNvPr id="13" name="TextBox 12"/>
+          <p:cNvSpPr txBox="1"/>
+          <p:nvPr/>
+        </p:nvSpPr>
+        <p:spPr>
+          <a:xfrm>
+            <a:off x="1645920" y="2075687"/>
+            <a:ext cx="2743200" cy="219456"/>
+          </a:xfrm>
+          <a:prstGeom prst="rect">
+            <a:avLst/>
+          </a:prstGeom>
+          <a:solidFill>
+            <a:srgbClr val="FFFFFF"/>
+          </a:solidFill>
+          <a:ln>
+            <a:noFill/>
+          </a:ln>
+        </p:spPr>
+        <p:txBody>
+          <a:bodyPr wrap="none" lIns="25400" rIns="25400" tIns="0" bIns="0">
+            <a:spAutoFit/>
+          </a:bodyPr>
+          <a:lstStyle/>
+          <a:p>
+            <a:pPr algn="l"/>
+            <a:r>
+              <a:rPr sz="850" b="1" i="0">
+                <a:solidFill>
+                  <a:srgbClr val="154FC2"/>
+                </a:solidFill>
+              </a:rPr>
+              <a:t>[1.4 µs est] WriteRing[0][1].tail.fetch_add(1)  CXL atomic</a:t>
+            </a:r>
+          </a:p>
+        </p:txBody>
+      </p:sp>
+      <p:sp>
+        <p:nvSpPr>
+          <p:cNvPr id="14" name="Oval 13"/>
+          <p:cNvSpPr/>
+          <p:nvPr/>
+        </p:nvSpPr>
+        <p:spPr>
+          <a:xfrm>
+            <a:off x="1316736" y="2313431"/>
+            <a:ext cx="292608" cy="292608"/>
+          </a:xfrm>
+          <a:prstGeom prst="ellipse">
+            <a:avLst/>
+          </a:prstGeom>
+          <a:solidFill>
+            <a:srgbClr val="FFFFFF"/>
+          </a:solidFill>
+          <a:ln w="19050">
+            <a:solidFill>
+              <a:srgbClr val="154FC2"/>
+            </a:solidFill>
+          </a:ln>
+        </p:spPr>
+        <p:style>
+          <a:lnRef idx="1">
+            <a:schemeClr val="accent1"/>
+          </a:lnRef>
+          <a:fillRef idx="3">
+            <a:schemeClr val="accent1"/>
+          </a:fillRef>
+          <a:effectRef idx="2">
+            <a:schemeClr val="accent1"/>
+          </a:effectRef>
+          <a:fontRef idx="minor">
+            <a:schemeClr val="lt1"/>
+          </a:fontRef>
+        </p:style>
+        <p:txBody>
+          <a:bodyPr rtlCol="0" anchor="ctr" lIns="0" rIns="0" tIns="0" bIns="0"/>
+          <a:lstStyle/>
+          <a:p>
+            <a:pPr algn="ctr"/>
+            <a:r>
+              <a:rPr sz="800" b="1">
+                <a:solidFill>
+                  <a:srgbClr val="154FC2"/>
+                </a:solidFill>
+              </a:rPr>
+              <a:t>A3</a:t>
+            </a:r>
+          </a:p>
+        </p:txBody>
+      </p:sp>
+      <p:sp>
+        <p:nvSpPr>
+          <p:cNvPr id="15" name="TextBox 14"/>
+          <p:cNvSpPr txBox="1"/>
+          <p:nvPr/>
+        </p:nvSpPr>
+        <p:spPr>
+          <a:xfrm>
+            <a:off x="1645920" y="2368295"/>
+            <a:ext cx="2743200" cy="219456"/>
+          </a:xfrm>
+          <a:prstGeom prst="rect">
+            <a:avLst/>
+          </a:prstGeom>
+          <a:solidFill>
+            <a:srgbClr val="FFFFFF"/>
+          </a:solidFill>
+          <a:ln>
+            <a:noFill/>
+          </a:ln>
+        </p:spPr>
+        <p:txBody>
+          <a:bodyPr wrap="none" lIns="25400" rIns="25400" tIns="0" bIns="0">
+            <a:spAutoFit/>
+          </a:bodyPr>
+          <a:lstStyle/>
+          <a:p>
+            <a:pPr algn="l"/>
+            <a:r>
+              <a:rPr sz="850" b="1" i="0">
+                <a:solidFill>
+                  <a:srgbClr val="154FC2"/>
+                </a:solidFill>
+              </a:rPr>
+              <a:t>[0.1 µs est] write WriteEntry{key, op_kind, value_len, staging_off} + flush + sfence</a:t>
+            </a:r>
+          </a:p>
+        </p:txBody>
+      </p:sp>
+      <p:cxnSp>
+        <p:nvCxnSpPr>
+          <p:cNvPr id="16" name="Connector 15"/>
+          <p:cNvCxnSpPr/>
+          <p:nvPr/>
+        </p:nvCxnSpPr>
+        <p:spPr>
+          <a:xfrm>
+            <a:off x="1463040" y="2752343"/>
+            <a:ext cx="4023360" cy="0"/>
+          </a:xfrm>
+          <a:prstGeom prst="line">
+            <a:avLst/>
+          </a:prstGeom>
+          <a:ln w="20320">
+            <a:solidFill>
+              <a:srgbClr val="154FC2"/>
+            </a:solidFill>
+            <a:tailEnd type="triangle" w="med" h="med"/>
+          </a:ln>
+        </p:spPr>
+        <p:style>
+          <a:lnRef idx="2">
+            <a:schemeClr val="accent1"/>
+          </a:lnRef>
+          <a:fillRef idx="0">
+            <a:schemeClr val="accent1"/>
+          </a:fillRef>
+          <a:effectRef idx="1">
+            <a:schemeClr val="accent1"/>
+          </a:effectRef>
+          <a:fontRef idx="minor">
+            <a:schemeClr val="tx1"/>
+          </a:fontRef>
+        </p:style>
+      </p:cxnSp>
+      <p:sp>
+        <p:nvSpPr>
+          <p:cNvPr id="17" name="Oval 16"/>
+          <p:cNvSpPr/>
+          <p:nvPr/>
+        </p:nvSpPr>
+        <p:spPr>
+          <a:xfrm>
+            <a:off x="3328415" y="2606039"/>
             <a:ext cx="292608" cy="292608"/>
           </a:xfrm>
           <a:prstGeom prst="ellipse">
@@ -3724,21 +3941,21 @@
                   <a:srgbClr val="333333"/>
                 </a:solidFill>
               </a:rPr>
-              <a:t>—</a:t>
-            </a:r>
-          </a:p>
-        </p:txBody>
-      </p:sp>
-      <p:sp>
-        <p:nvSpPr>
-          <p:cNvPr id="13" name="TextBox 12"/>
+              <a:t>A4</a:t>
+            </a:r>
+          </a:p>
+        </p:txBody>
+      </p:sp>
+      <p:sp>
+        <p:nvSpPr>
+          <p:cNvPr id="18" name="TextBox 17"/>
           <p:cNvSpPr txBox="1"/>
           <p:nvPr/>
         </p:nvSpPr>
         <p:spPr>
           <a:xfrm>
-            <a:off x="1645920" y="1984248"/>
-            <a:ext cx="2743200" cy="219456"/>
+            <a:off x="2011679" y="2496311"/>
+            <a:ext cx="2926080" cy="219456"/>
           </a:xfrm>
           <a:prstGeom prst="rect">
             <a:avLst/>
@@ -3760,151 +3977,23 @@
             <a:r>
               <a:rPr sz="850" b="1" i="0">
                 <a:solidFill>
-                  <a:srgbClr val="9E9E9E"/>
+                  <a:srgbClr val="154FC2"/>
                 </a:solidFill>
               </a:rPr>
-              <a:t>worker spin on WriteRing.resp_op_id  (5 ms cap)  ← BLOCKING</a:t>
-            </a:r>
-          </a:p>
-        </p:txBody>
-      </p:sp>
-      <p:cxnSp>
-        <p:nvCxnSpPr>
-          <p:cNvPr id="14" name="Connector 13"/>
-          <p:cNvCxnSpPr/>
-          <p:nvPr/>
-        </p:nvCxnSpPr>
-        <p:spPr>
-          <a:xfrm>
-            <a:off x="1463040" y="2276856"/>
-            <a:ext cx="4023360" cy="0"/>
-          </a:xfrm>
-          <a:prstGeom prst="line">
-            <a:avLst/>
-          </a:prstGeom>
-          <a:ln w="20320">
-            <a:solidFill>
-              <a:srgbClr val="9E9E9E"/>
-            </a:solidFill>
-            <a:tailEnd type="triangle" w="med" h="med"/>
-          </a:ln>
-        </p:spPr>
-        <p:style>
-          <a:lnRef idx="2">
-            <a:schemeClr val="accent1"/>
-          </a:lnRef>
-          <a:fillRef idx="0">
-            <a:schemeClr val="accent1"/>
-          </a:fillRef>
-          <a:effectRef idx="1">
-            <a:schemeClr val="accent1"/>
-          </a:effectRef>
-          <a:fontRef idx="minor">
-            <a:schemeClr val="tx1"/>
-          </a:fontRef>
-        </p:style>
-      </p:cxnSp>
-      <p:sp>
-        <p:nvSpPr>
-          <p:cNvPr id="15" name="Oval 14"/>
+              <a:t>[~22 µs blocked] worker spin on WriteRing.resp_op_id  (5 ms cap)</a:t>
+            </a:r>
+          </a:p>
+        </p:txBody>
+      </p:sp>
+      <p:sp>
+        <p:nvSpPr>
+          <p:cNvPr id="19" name="Oval 18"/>
           <p:cNvSpPr/>
           <p:nvPr/>
         </p:nvSpPr>
         <p:spPr>
           <a:xfrm>
-            <a:off x="3328415" y="2130552"/>
-            <a:ext cx="292608" cy="292608"/>
-          </a:xfrm>
-          <a:prstGeom prst="ellipse">
-            <a:avLst/>
-          </a:prstGeom>
-          <a:solidFill>
-            <a:srgbClr val="FFFFFF"/>
-          </a:solidFill>
-          <a:ln w="19050">
-            <a:solidFill>
-              <a:srgbClr val="9E9E9E"/>
-            </a:solidFill>
-          </a:ln>
-        </p:spPr>
-        <p:style>
-          <a:lnRef idx="1">
-            <a:schemeClr val="accent1"/>
-          </a:lnRef>
-          <a:fillRef idx="3">
-            <a:schemeClr val="accent1"/>
-          </a:fillRef>
-          <a:effectRef idx="2">
-            <a:schemeClr val="accent1"/>
-          </a:effectRef>
-          <a:fontRef idx="minor">
-            <a:schemeClr val="lt1"/>
-          </a:fontRef>
-        </p:style>
-        <p:txBody>
-          <a:bodyPr rtlCol="0" anchor="ctr" lIns="0" rIns="0" tIns="0" bIns="0"/>
-          <a:lstStyle/>
-          <a:p>
-            <a:pPr algn="ctr"/>
-            <a:r>
-              <a:rPr sz="800" b="1">
-                <a:solidFill>
-                  <a:srgbClr val="9E9E9E"/>
-                </a:solidFill>
-              </a:rPr>
-              <a:t>—</a:t>
-            </a:r>
-          </a:p>
-        </p:txBody>
-      </p:sp>
-      <p:sp>
-        <p:nvSpPr>
-          <p:cNvPr id="16" name="TextBox 15"/>
-          <p:cNvSpPr txBox="1"/>
-          <p:nvPr/>
-        </p:nvSpPr>
-        <p:spPr>
-          <a:xfrm>
-            <a:off x="2011679" y="2020824"/>
-            <a:ext cx="2926080" cy="219456"/>
-          </a:xfrm>
-          <a:prstGeom prst="rect">
-            <a:avLst/>
-          </a:prstGeom>
-          <a:solidFill>
-            <a:srgbClr val="FFFFFF"/>
-          </a:solidFill>
-          <a:ln>
-            <a:noFill/>
-          </a:ln>
-        </p:spPr>
-        <p:txBody>
-          <a:bodyPr wrap="none" lIns="25400" rIns="25400" tIns="0" bIns="0">
-            <a:spAutoFit/>
-          </a:bodyPr>
-          <a:lstStyle/>
-          <a:p>
-            <a:pPr algn="l"/>
-            <a:r>
-              <a:rPr sz="850" b="1" i="0">
-                <a:solidFill>
-                  <a:srgbClr val="9E9E9E"/>
-                </a:solidFill>
-              </a:rPr>
-              <a:t>WriteReceiver poll observes new tail; reads staging bytes</a:t>
-            </a:r>
-          </a:p>
-        </p:txBody>
-      </p:sp>
-      <p:sp>
-        <p:nvSpPr>
-          <p:cNvPr id="17" name="Oval 16"/>
-          <p:cNvSpPr/>
-          <p:nvPr/>
-        </p:nvSpPr>
-        <p:spPr>
-          <a:xfrm>
-            <a:off x="5340096" y="2331720"/>
+            <a:off x="5340096" y="2898647"/>
             <a:ext cx="292608" cy="292608"/>
           </a:xfrm>
           <a:prstGeom prst="ellipse">
@@ -3944,20 +4033,20 @@
                   <a:srgbClr val="154FC2"/>
                 </a:solidFill>
               </a:rPr>
-              <a:t>W1</a:t>
-            </a:r>
-          </a:p>
-        </p:txBody>
-      </p:sp>
-      <p:sp>
-        <p:nvSpPr>
-          <p:cNvPr id="18" name="TextBox 17"/>
+              <a:t>A5</a:t>
+            </a:r>
+          </a:p>
+        </p:txBody>
+      </p:sp>
+      <p:sp>
+        <p:nvSpPr>
+          <p:cNvPr id="20" name="TextBox 19"/>
           <p:cNvSpPr txBox="1"/>
           <p:nvPr/>
         </p:nvSpPr>
         <p:spPr>
           <a:xfrm>
-            <a:off x="5669280" y="2386584"/>
+            <a:off x="5669280" y="2953511"/>
             <a:ext cx="2743200" cy="219456"/>
           </a:xfrm>
           <a:prstGeom prst="rect">
@@ -3983,20 +4072,20 @@
                   <a:srgbClr val="154FC2"/>
                 </a:solidFill>
               </a:rPr>
-              <a:t>hash + bucket flush + mfence</a:t>
-            </a:r>
-          </a:p>
-        </p:txBody>
-      </p:sp>
-      <p:sp>
-        <p:nvSpPr>
-          <p:cNvPr id="19" name="Oval 18"/>
+              <a:t>[1.5 µs est] WriteReceiver poll WriteRing.tail; reads staging bytes</a:t>
+            </a:r>
+          </a:p>
+        </p:txBody>
+      </p:sp>
+      <p:sp>
+        <p:nvSpPr>
+          <p:cNvPr id="21" name="Oval 20"/>
           <p:cNvSpPr/>
           <p:nvPr/>
         </p:nvSpPr>
         <p:spPr>
           <a:xfrm>
-            <a:off x="5340096" y="2532888"/>
+            <a:off x="5340096" y="3191255"/>
             <a:ext cx="292608" cy="292608"/>
           </a:xfrm>
           <a:prstGeom prst="ellipse">
@@ -4036,20 +4125,20 @@
                   <a:srgbClr val="154FC2"/>
                 </a:solidFill>
               </a:rPr>
-              <a:t>W2</a:t>
-            </a:r>
-          </a:p>
-        </p:txBody>
-      </p:sp>
-      <p:sp>
-        <p:nvSpPr>
-          <p:cNvPr id="20" name="TextBox 19"/>
+              <a:t>A6</a:t>
+            </a:r>
+          </a:p>
+        </p:txBody>
+      </p:sp>
+      <p:sp>
+        <p:nvSpPr>
+          <p:cNvPr id="22" name="TextBox 21"/>
           <p:cNvSpPr txBox="1"/>
           <p:nvPr/>
         </p:nvSpPr>
         <p:spPr>
           <a:xfrm>
-            <a:off x="5669280" y="2587752"/>
+            <a:off x="5669280" y="3246119"/>
             <a:ext cx="2743200" cy="219456"/>
           </a:xfrm>
           <a:prstGeom prst="rect">
@@ -4075,20 +4164,20 @@
                   <a:srgbClr val="154FC2"/>
                 </a:solidFill>
               </a:rPr>
-              <a:t>scan 7 slots + DRAM SlotDirectoryEntry spinlock</a:t>
-            </a:r>
-          </a:p>
-        </p:txBody>
-      </p:sp>
-      <p:sp>
-        <p:nvSpPr>
-          <p:cNvPr id="21" name="Oval 20"/>
+              <a:t>[5.0 µs measured] execute_write_local: W1 flush+mfence + W2 scan+spinlock + W3 bitmap</a:t>
+            </a:r>
+          </a:p>
+        </p:txBody>
+      </p:sp>
+      <p:sp>
+        <p:nvSpPr>
+          <p:cNvPr id="23" name="Oval 22"/>
           <p:cNvSpPr/>
           <p:nvPr/>
         </p:nvSpPr>
         <p:spPr>
           <a:xfrm>
-            <a:off x="5340096" y="2734056"/>
+            <a:off x="5340096" y="3483863"/>
             <a:ext cx="292608" cy="292608"/>
           </a:xfrm>
           <a:prstGeom prst="ellipse">
@@ -4128,20 +4217,20 @@
                   <a:srgbClr val="154FC2"/>
                 </a:solidFill>
               </a:rPr>
-              <a:t>W3</a:t>
-            </a:r>
-          </a:p>
-        </p:txBody>
-      </p:sp>
-      <p:sp>
-        <p:nvSpPr>
-          <p:cNvPr id="22" name="TextBox 21"/>
+              <a:t>A7</a:t>
+            </a:r>
+          </a:p>
+        </p:txBody>
+      </p:sp>
+      <p:sp>
+        <p:nvSpPr>
+          <p:cNvPr id="24" name="TextBox 23"/>
           <p:cNvSpPr txBox="1"/>
           <p:nvPr/>
         </p:nvSpPr>
         <p:spPr>
           <a:xfrm>
-            <a:off x="5669280" y="2788920"/>
+            <a:off x="5669280" y="3538727"/>
             <a:ext cx="2743200" cy="219456"/>
           </a:xfrm>
           <a:prstGeom prst="rect">
@@ -4167,20 +4256,56 @@
                   <a:srgbClr val="154FC2"/>
                 </a:solidFill>
               </a:rPr>
-              <a:t>re-flush bucket; read sharer_bitmap</a:t>
-            </a:r>
-          </a:p>
-        </p:txBody>
-      </p:sp>
-      <p:sp>
-        <p:nvSpPr>
-          <p:cNvPr id="23" name="Oval 22"/>
+              <a:t>[1.65 µs measured I1] InvalRing[1][0].tail.fetch_add(1)  CXL atomic</a:t>
+            </a:r>
+          </a:p>
+        </p:txBody>
+      </p:sp>
+      <p:cxnSp>
+        <p:nvCxnSpPr>
+          <p:cNvPr id="25" name="Connector 24"/>
+          <p:cNvCxnSpPr/>
+          <p:nvPr/>
+        </p:nvCxnSpPr>
+        <p:spPr>
+          <a:xfrm>
+            <a:off x="5486400" y="3922775"/>
+            <a:ext cx="4754880" cy="0"/>
+          </a:xfrm>
+          <a:prstGeom prst="line">
+            <a:avLst/>
+          </a:prstGeom>
+          <a:ln w="20320">
+            <a:solidFill>
+              <a:srgbClr val="154FC2"/>
+            </a:solidFill>
+            <a:tailEnd type="triangle" w="med" h="med"/>
+          </a:ln>
+        </p:spPr>
+        <p:style>
+          <a:lnRef idx="2">
+            <a:schemeClr val="accent1"/>
+          </a:lnRef>
+          <a:fillRef idx="0">
+            <a:schemeClr val="accent1"/>
+          </a:fillRef>
+          <a:effectRef idx="1">
+            <a:schemeClr val="accent1"/>
+          </a:effectRef>
+          <a:fontRef idx="minor">
+            <a:schemeClr val="tx1"/>
+          </a:fontRef>
+        </p:style>
+      </p:cxnSp>
+      <p:sp>
+        <p:nvSpPr>
+          <p:cNvPr id="26" name="Oval 25"/>
           <p:cNvSpPr/>
           <p:nvPr/>
         </p:nvSpPr>
         <p:spPr>
           <a:xfrm>
-            <a:off x="5340096" y="2935224"/>
+            <a:off x="7717536" y="3776471"/>
             <a:ext cx="292608" cy="292608"/>
           </a:xfrm>
           <a:prstGeom prst="ellipse">
@@ -4220,21 +4345,21 @@
                   <a:srgbClr val="154FC2"/>
                 </a:solidFill>
               </a:rPr>
-              <a:t>W4</a:t>
-            </a:r>
-          </a:p>
-        </p:txBody>
-      </p:sp>
-      <p:sp>
-        <p:nvSpPr>
-          <p:cNvPr id="24" name="TextBox 23"/>
+              <a:t>A8</a:t>
+            </a:r>
+          </a:p>
+        </p:txBody>
+      </p:sp>
+      <p:sp>
+        <p:nvSpPr>
+          <p:cNvPr id="27" name="TextBox 26"/>
           <p:cNvSpPr txBox="1"/>
           <p:nvPr/>
         </p:nvSpPr>
         <p:spPr>
           <a:xfrm>
-            <a:off x="5669280" y="2990088"/>
-            <a:ext cx="2743200" cy="219456"/>
+            <a:off x="6400800" y="3666743"/>
+            <a:ext cx="2926080" cy="219456"/>
           </a:xfrm>
           <a:prstGeom prst="rect">
             <a:avLst/>
@@ -4259,20 +4384,112 @@
                   <a:srgbClr val="154FC2"/>
                 </a:solidFill>
               </a:rPr>
-              <a:t>enter invalidate broadcast loop</a:t>
-            </a:r>
-          </a:p>
-        </p:txBody>
-      </p:sp>
-      <p:sp>
-        <p:nvSpPr>
-          <p:cNvPr id="25" name="Oval 24"/>
+              <a:t>[3.7 µs measured I2] write InvalEntry{key} + flush + sfence</a:t>
+            </a:r>
+          </a:p>
+        </p:txBody>
+      </p:sp>
+      <p:sp>
+        <p:nvSpPr>
+          <p:cNvPr id="28" name="Oval 27"/>
           <p:cNvSpPr/>
           <p:nvPr/>
         </p:nvSpPr>
         <p:spPr>
           <a:xfrm>
-            <a:off x="5340096" y="3136392"/>
+            <a:off x="5340096" y="4069079"/>
+            <a:ext cx="292608" cy="292608"/>
+          </a:xfrm>
+          <a:prstGeom prst="ellipse">
+            <a:avLst/>
+          </a:prstGeom>
+          <a:solidFill>
+            <a:srgbClr val="FFCDD2"/>
+          </a:solidFill>
+          <a:ln w="19050">
+            <a:solidFill>
+              <a:srgbClr val="C62828"/>
+            </a:solidFill>
+          </a:ln>
+        </p:spPr>
+        <p:style>
+          <a:lnRef idx="1">
+            <a:schemeClr val="accent1"/>
+          </a:lnRef>
+          <a:fillRef idx="3">
+            <a:schemeClr val="accent1"/>
+          </a:fillRef>
+          <a:effectRef idx="2">
+            <a:schemeClr val="accent1"/>
+          </a:effectRef>
+          <a:fontRef idx="minor">
+            <a:schemeClr val="lt1"/>
+          </a:fontRef>
+        </p:style>
+        <p:txBody>
+          <a:bodyPr rtlCol="0" anchor="ctr" lIns="0" rIns="0" tIns="0" bIns="0"/>
+          <a:lstStyle/>
+          <a:p>
+            <a:pPr algn="ctr"/>
+            <a:r>
+              <a:rPr sz="800" b="1">
+                <a:solidFill>
+                  <a:srgbClr val="333333"/>
+                </a:solidFill>
+              </a:rPr>
+              <a:t>A9</a:t>
+            </a:r>
+          </a:p>
+        </p:txBody>
+      </p:sp>
+      <p:sp>
+        <p:nvSpPr>
+          <p:cNvPr id="29" name="TextBox 28"/>
+          <p:cNvSpPr txBox="1"/>
+          <p:nvPr/>
+        </p:nvSpPr>
+        <p:spPr>
+          <a:xfrm>
+            <a:off x="5669280" y="4123944"/>
+            <a:ext cx="2743200" cy="219456"/>
+          </a:xfrm>
+          <a:prstGeom prst="rect">
+            <a:avLst/>
+          </a:prstGeom>
+          <a:solidFill>
+            <a:srgbClr val="FFFFFF"/>
+          </a:solidFill>
+          <a:ln>
+            <a:noFill/>
+          </a:ln>
+        </p:spPr>
+        <p:txBody>
+          <a:bodyPr wrap="none" lIns="25400" rIns="25400" tIns="0" bIns="0">
+            <a:spAutoFit/>
+          </a:bodyPr>
+          <a:lstStyle/>
+          <a:p>
+            <a:pPr algn="l"/>
+            <a:r>
+              <a:rPr sz="850" b="1" i="0">
+                <a:solidFill>
+                  <a:srgbClr val="154FC2"/>
+                </a:solidFill>
+              </a:rPr>
+              <a:t>[~1.9 µs blocked] WriteReceiver spin on InvalRing.resp_op_id  (5 ms cap)</a:t>
+            </a:r>
+          </a:p>
+        </p:txBody>
+      </p:sp>
+      <p:sp>
+        <p:nvSpPr>
+          <p:cNvPr id="30" name="Oval 29"/>
+          <p:cNvSpPr/>
+          <p:nvPr/>
+        </p:nvSpPr>
+        <p:spPr>
+          <a:xfrm>
+            <a:off x="10094976" y="4361688"/>
             <a:ext cx="292608" cy="292608"/>
           </a:xfrm>
           <a:prstGeom prst="ellipse">
@@ -4312,21 +4529,21 @@
                   <a:srgbClr val="154FC2"/>
                 </a:solidFill>
               </a:rPr>
-              <a:t>I1</a:t>
-            </a:r>
-          </a:p>
-        </p:txBody>
-      </p:sp>
-      <p:sp>
-        <p:nvSpPr>
-          <p:cNvPr id="26" name="TextBox 25"/>
+              <a:t>A10</a:t>
+            </a:r>
+          </a:p>
+        </p:txBody>
+      </p:sp>
+      <p:sp>
+        <p:nvSpPr>
+          <p:cNvPr id="31" name="TextBox 30"/>
           <p:cNvSpPr txBox="1"/>
           <p:nvPr/>
         </p:nvSpPr>
         <p:spPr>
           <a:xfrm>
-            <a:off x="5669280" y="3191256"/>
-            <a:ext cx="2743200" cy="219456"/>
+            <a:off x="7498079" y="4416552"/>
+            <a:ext cx="2560320" cy="219456"/>
           </a:xfrm>
           <a:prstGeom prst="rect">
             <a:avLst/>
@@ -4344,27 +4561,119 @@
           </a:bodyPr>
           <a:lstStyle/>
           <a:p>
-            <a:pPr algn="l"/>
+            <a:pPr algn="r"/>
             <a:r>
               <a:rPr sz="850" b="1" i="0">
                 <a:solidFill>
                   <a:srgbClr val="154FC2"/>
                 </a:solidFill>
               </a:rPr>
-              <a:t>InvalRing[1][0].tail.fetch_add(1)  RMW-CXL</a:t>
+              <a:t>[1.75 µs measured I3+I4] poll InvalRing tail; read req_op_id</a:t>
+            </a:r>
+          </a:p>
+        </p:txBody>
+      </p:sp>
+      <p:sp>
+        <p:nvSpPr>
+          <p:cNvPr id="32" name="Oval 31"/>
+          <p:cNvSpPr/>
+          <p:nvPr/>
+        </p:nvSpPr>
+        <p:spPr>
+          <a:xfrm>
+            <a:off x="10094976" y="4654296"/>
+            <a:ext cx="292608" cy="292608"/>
+          </a:xfrm>
+          <a:prstGeom prst="ellipse">
+            <a:avLst/>
+          </a:prstGeom>
+          <a:solidFill>
+            <a:srgbClr val="FFF49C"/>
+          </a:solidFill>
+          <a:ln w="19050">
+            <a:solidFill>
+              <a:srgbClr val="F9A825"/>
+            </a:solidFill>
+          </a:ln>
+        </p:spPr>
+        <p:style>
+          <a:lnRef idx="1">
+            <a:schemeClr val="accent1"/>
+          </a:lnRef>
+          <a:fillRef idx="3">
+            <a:schemeClr val="accent1"/>
+          </a:fillRef>
+          <a:effectRef idx="2">
+            <a:schemeClr val="accent1"/>
+          </a:effectRef>
+          <a:fontRef idx="minor">
+            <a:schemeClr val="lt1"/>
+          </a:fontRef>
+        </p:style>
+        <p:txBody>
+          <a:bodyPr rtlCol="0" anchor="ctr" lIns="0" rIns="0" tIns="0" bIns="0"/>
+          <a:lstStyle/>
+          <a:p>
+            <a:pPr algn="ctr"/>
+            <a:r>
+              <a:rPr sz="800" b="1">
+                <a:solidFill>
+                  <a:srgbClr val="333333"/>
+                </a:solidFill>
+              </a:rPr>
+              <a:t>A11</a:t>
+            </a:r>
+          </a:p>
+        </p:txBody>
+      </p:sp>
+      <p:sp>
+        <p:nvSpPr>
+          <p:cNvPr id="33" name="TextBox 32"/>
+          <p:cNvSpPr txBox="1"/>
+          <p:nvPr/>
+        </p:nvSpPr>
+        <p:spPr>
+          <a:xfrm>
+            <a:off x="7406640" y="4709160"/>
+            <a:ext cx="2651760" cy="219456"/>
+          </a:xfrm>
+          <a:prstGeom prst="rect">
+            <a:avLst/>
+          </a:prstGeom>
+          <a:solidFill>
+            <a:srgbClr val="FFFFFF"/>
+          </a:solidFill>
+          <a:ln>
+            <a:noFill/>
+          </a:ln>
+        </p:spPr>
+        <p:txBody>
+          <a:bodyPr wrap="none" lIns="25400" rIns="25400" tIns="0" bIns="0">
+            <a:spAutoFit/>
+          </a:bodyPr>
+          <a:lstStyle/>
+          <a:p>
+            <a:pPr algn="r"/>
+            <a:r>
+              <a:rPr sz="850" b="1" i="0">
+                <a:solidFill>
+                  <a:srgbClr val="154FC2"/>
+                </a:solidFill>
+              </a:rPr>
+              <a:t>[0.03 µs measured I5] cache_pool_set_stale; bucket_epoch++  (seqlock CAS)</a:t>
             </a:r>
           </a:p>
         </p:txBody>
       </p:sp>
       <p:cxnSp>
         <p:nvCxnSpPr>
-          <p:cNvPr id="27" name="Connector 26"/>
+          <p:cNvPr id="34" name="Connector 33"/>
           <p:cNvCxnSpPr/>
           <p:nvPr/>
         </p:nvCxnSpPr>
         <p:spPr>
-          <a:xfrm>
-            <a:off x="5486400" y="3483864"/>
+          <a:xfrm flipH="1">
+            <a:off x="5486400" y="5093208"/>
             <a:ext cx="4754880" cy="0"/>
           </a:xfrm>
           <a:prstGeom prst="line">
@@ -4394,13 +4703,13 @@
       </p:cxnSp>
       <p:sp>
         <p:nvSpPr>
-          <p:cNvPr id="28" name="Oval 27"/>
+          <p:cNvPr id="35" name="Oval 34"/>
           <p:cNvSpPr/>
           <p:nvPr/>
         </p:nvSpPr>
         <p:spPr>
           <a:xfrm>
-            <a:off x="7717536" y="3337560"/>
+            <a:off x="7717536" y="4946904"/>
             <a:ext cx="292608" cy="292608"/>
           </a:xfrm>
           <a:prstGeom prst="ellipse">
@@ -4440,20 +4749,20 @@
                   <a:srgbClr val="154FC2"/>
                 </a:solidFill>
               </a:rPr>
-              <a:t>I2</a:t>
-            </a:r>
-          </a:p>
-        </p:txBody>
-      </p:sp>
-      <p:sp>
-        <p:nvSpPr>
-          <p:cNvPr id="29" name="TextBox 28"/>
+              <a:t>A12</a:t>
+            </a:r>
+          </a:p>
+        </p:txBody>
+      </p:sp>
+      <p:sp>
+        <p:nvSpPr>
+          <p:cNvPr id="36" name="TextBox 35"/>
           <p:cNvSpPr txBox="1"/>
           <p:nvPr/>
         </p:nvSpPr>
         <p:spPr>
           <a:xfrm>
-            <a:off x="6400800" y="3227832"/>
+            <a:off x="6400800" y="5184648"/>
             <a:ext cx="2926080" cy="219456"/>
           </a:xfrm>
           <a:prstGeom prst="rect">
@@ -4479,20 +4788,193 @@
                   <a:srgbClr val="154FC2"/>
                 </a:solidFill>
               </a:rPr>
-              <a:t>write InvalEntry{key, req_op_id} + flush + sfence</a:t>
-            </a:r>
-          </a:p>
-        </p:txBody>
-      </p:sp>
-      <p:sp>
-        <p:nvSpPr>
-          <p:cNvPr id="30" name="Oval 29"/>
+              <a:t>[0.07 µs est] write InvalRing.resp_op_id ACK + flush + sfence</a:t>
+            </a:r>
+          </a:p>
+        </p:txBody>
+      </p:sp>
+      <p:sp>
+        <p:nvSpPr>
+          <p:cNvPr id="37" name="Rectangle 36"/>
           <p:cNvSpPr/>
           <p:nvPr/>
         </p:nvSpPr>
         <p:spPr>
           <a:xfrm>
-            <a:off x="10094976" y="3538728"/>
+            <a:off x="5404104" y="3877055"/>
+            <a:ext cx="164592" cy="1463040"/>
+          </a:xfrm>
+          <a:prstGeom prst="rect">
+            <a:avLst/>
+          </a:prstGeom>
+          <a:solidFill>
+            <a:srgbClr val="FFCDD2"/>
+          </a:solidFill>
+          <a:ln w="6350">
+            <a:solidFill>
+              <a:srgbClr val="C62828"/>
+            </a:solidFill>
+          </a:ln>
+        </p:spPr>
+        <p:style>
+          <a:lnRef idx="1">
+            <a:schemeClr val="accent1"/>
+          </a:lnRef>
+          <a:fillRef idx="3">
+            <a:schemeClr val="accent1"/>
+          </a:fillRef>
+          <a:effectRef idx="2">
+            <a:schemeClr val="accent1"/>
+          </a:effectRef>
+          <a:fontRef idx="minor">
+            <a:schemeClr val="lt1"/>
+          </a:fontRef>
+        </p:style>
+        <p:txBody>
+          <a:bodyPr rtlCol="0" anchor="ctr"/>
+          <a:lstStyle/>
+          <a:p>
+            <a:pPr algn="ctr"/>
+          </a:p>
+        </p:txBody>
+      </p:sp>
+      <p:sp>
+        <p:nvSpPr>
+          <p:cNvPr id="38" name="Oval 37"/>
+          <p:cNvSpPr/>
+          <p:nvPr/>
+        </p:nvSpPr>
+        <p:spPr>
+          <a:xfrm>
+            <a:off x="5340096" y="5239512"/>
+            <a:ext cx="292608" cy="292608"/>
+          </a:xfrm>
+          <a:prstGeom prst="ellipse">
+            <a:avLst/>
+          </a:prstGeom>
+          <a:solidFill>
+            <a:srgbClr val="FFF49C"/>
+          </a:solidFill>
+          <a:ln w="19050">
+            <a:solidFill>
+              <a:srgbClr val="F9A825"/>
+            </a:solidFill>
+          </a:ln>
+        </p:spPr>
+        <p:style>
+          <a:lnRef idx="1">
+            <a:schemeClr val="accent1"/>
+          </a:lnRef>
+          <a:fillRef idx="3">
+            <a:schemeClr val="accent1"/>
+          </a:fillRef>
+          <a:effectRef idx="2">
+            <a:schemeClr val="accent1"/>
+          </a:effectRef>
+          <a:fontRef idx="minor">
+            <a:schemeClr val="lt1"/>
+          </a:fontRef>
+        </p:style>
+        <p:txBody>
+          <a:bodyPr rtlCol="0" anchor="ctr" lIns="0" rIns="0" tIns="0" bIns="0"/>
+          <a:lstStyle/>
+          <a:p>
+            <a:pPr algn="ctr"/>
+            <a:r>
+              <a:rPr sz="800" b="1">
+                <a:solidFill>
+                  <a:srgbClr val="333333"/>
+                </a:solidFill>
+              </a:rPr>
+              <a:t>A13</a:t>
+            </a:r>
+          </a:p>
+        </p:txBody>
+      </p:sp>
+      <p:sp>
+        <p:nvSpPr>
+          <p:cNvPr id="39" name="TextBox 38"/>
+          <p:cNvSpPr txBox="1"/>
+          <p:nvPr/>
+        </p:nvSpPr>
+        <p:spPr>
+          <a:xfrm>
+            <a:off x="5669280" y="5294376"/>
+            <a:ext cx="2743200" cy="219456"/>
+          </a:xfrm>
+          <a:prstGeom prst="rect">
+            <a:avLst/>
+          </a:prstGeom>
+          <a:solidFill>
+            <a:srgbClr val="FFFFFF"/>
+          </a:solidFill>
+          <a:ln>
+            <a:noFill/>
+          </a:ln>
+        </p:spPr>
+        <p:txBody>
+          <a:bodyPr wrap="none" lIns="25400" rIns="25400" tIns="0" bIns="0">
+            <a:spAutoFit/>
+          </a:bodyPr>
+          <a:lstStyle/>
+          <a:p>
+            <a:pPr algn="l"/>
+            <a:r>
+              <a:rPr sz="850" b="1" i="0">
+                <a:solidFill>
+                  <a:srgbClr val="154FC2"/>
+                </a:solidFill>
+              </a:rPr>
+              <a:t>[10 µs measured+est] W7 pool_alloc + W8 pool_write(1024B) + ★ W9 publish_slot_cow ★ + W10 dir + cache_pool_insert + bucket_epoch++ + W12 return</a:t>
+            </a:r>
+          </a:p>
+        </p:txBody>
+      </p:sp>
+      <p:cxnSp>
+        <p:nvCxnSpPr>
+          <p:cNvPr id="40" name="Connector 39"/>
+          <p:cNvCxnSpPr/>
+          <p:nvPr/>
+        </p:nvCxnSpPr>
+        <p:spPr>
+          <a:xfrm flipH="1">
+            <a:off x="1463040" y="5678424"/>
+            <a:ext cx="4023360" cy="0"/>
+          </a:xfrm>
+          <a:prstGeom prst="line">
+            <a:avLst/>
+          </a:prstGeom>
+          <a:ln w="20320">
+            <a:solidFill>
+              <a:srgbClr val="154FC2"/>
+            </a:solidFill>
+            <a:tailEnd type="triangle" w="med" h="med"/>
+          </a:ln>
+        </p:spPr>
+        <p:style>
+          <a:lnRef idx="2">
+            <a:schemeClr val="accent1"/>
+          </a:lnRef>
+          <a:fillRef idx="0">
+            <a:schemeClr val="accent1"/>
+          </a:fillRef>
+          <a:effectRef idx="1">
+            <a:schemeClr val="accent1"/>
+          </a:effectRef>
+          <a:fontRef idx="minor">
+            <a:schemeClr val="tx1"/>
+          </a:fontRef>
+        </p:style>
+      </p:cxnSp>
+      <p:sp>
+        <p:nvSpPr>
+          <p:cNvPr id="41" name="Oval 40"/>
+          <p:cNvSpPr/>
+          <p:nvPr/>
+        </p:nvSpPr>
+        <p:spPr>
+          <a:xfrm>
+            <a:off x="3328415" y="5532120"/>
             <a:ext cx="292608" cy="292608"/>
           </a:xfrm>
           <a:prstGeom prst="ellipse">
@@ -4532,21 +5014,21 @@
                   <a:srgbClr val="154FC2"/>
                 </a:solidFill>
               </a:rPr>
-              <a:t>I3</a:t>
-            </a:r>
-          </a:p>
-        </p:txBody>
-      </p:sp>
-      <p:sp>
-        <p:nvSpPr>
-          <p:cNvPr id="31" name="TextBox 30"/>
+              <a:t>A14</a:t>
+            </a:r>
+          </a:p>
+        </p:txBody>
+      </p:sp>
+      <p:sp>
+        <p:nvSpPr>
+          <p:cNvPr id="42" name="TextBox 41"/>
           <p:cNvSpPr txBox="1"/>
           <p:nvPr/>
         </p:nvSpPr>
         <p:spPr>
           <a:xfrm>
-            <a:off x="7680960" y="3593592"/>
-            <a:ext cx="2377440" cy="219456"/>
+            <a:off x="2011679" y="5769864"/>
+            <a:ext cx="2926080" cy="219456"/>
           </a:xfrm>
           <a:prstGeom prst="rect">
             <a:avLst/>
@@ -4564,432 +5046,28 @@
           </a:bodyPr>
           <a:lstStyle/>
           <a:p>
-            <a:pPr algn="r"/>
+            <a:pPr algn="l"/>
             <a:r>
               <a:rPr sz="850" b="1" i="0">
                 <a:solidFill>
                   <a:srgbClr val="154FC2"/>
                 </a:solidFill>
               </a:rPr>
-              <a:t>poll InvalRing tail; observes new entry</a:t>
-            </a:r>
-          </a:p>
-        </p:txBody>
-      </p:sp>
-      <p:sp>
-        <p:nvSpPr>
-          <p:cNvPr id="32" name="Oval 31"/>
+              <a:t>[0.2 µs est] write WriteRing.resp_op_id ACK; worker A4 spin breaks; free slot; return 0</a:t>
+            </a:r>
+          </a:p>
+        </p:txBody>
+      </p:sp>
+      <p:sp>
+        <p:nvSpPr>
+          <p:cNvPr id="43" name="Rectangle 42"/>
           <p:cNvSpPr/>
           <p:nvPr/>
         </p:nvSpPr>
         <p:spPr>
           <a:xfrm>
-            <a:off x="10094976" y="3739896"/>
-            <a:ext cx="292608" cy="292608"/>
-          </a:xfrm>
-          <a:prstGeom prst="ellipse">
-            <a:avLst/>
-          </a:prstGeom>
-          <a:solidFill>
-            <a:srgbClr val="FFFFFF"/>
-          </a:solidFill>
-          <a:ln w="19050">
-            <a:solidFill>
-              <a:srgbClr val="154FC2"/>
-            </a:solidFill>
-          </a:ln>
-        </p:spPr>
-        <p:style>
-          <a:lnRef idx="1">
-            <a:schemeClr val="accent1"/>
-          </a:lnRef>
-          <a:fillRef idx="3">
-            <a:schemeClr val="accent1"/>
-          </a:fillRef>
-          <a:effectRef idx="2">
-            <a:schemeClr val="accent1"/>
-          </a:effectRef>
-          <a:fontRef idx="minor">
-            <a:schemeClr val="lt1"/>
-          </a:fontRef>
-        </p:style>
-        <p:txBody>
-          <a:bodyPr rtlCol="0" anchor="ctr" lIns="0" rIns="0" tIns="0" bIns="0"/>
-          <a:lstStyle/>
-          <a:p>
-            <a:pPr algn="ctr"/>
-            <a:r>
-              <a:rPr sz="800" b="1">
-                <a:solidFill>
-                  <a:srgbClr val="154FC2"/>
-                </a:solidFill>
-              </a:rPr>
-              <a:t>I4</a:t>
-            </a:r>
-          </a:p>
-        </p:txBody>
-      </p:sp>
-      <p:sp>
-        <p:nvSpPr>
-          <p:cNvPr id="33" name="TextBox 32"/>
-          <p:cNvSpPr txBox="1"/>
-          <p:nvPr/>
-        </p:nvSpPr>
-        <p:spPr>
-          <a:xfrm>
-            <a:off x="7680960" y="3794760"/>
-            <a:ext cx="2377440" cy="219456"/>
-          </a:xfrm>
-          <a:prstGeom prst="rect">
-            <a:avLst/>
-          </a:prstGeom>
-          <a:solidFill>
-            <a:srgbClr val="FFFFFF"/>
-          </a:solidFill>
-          <a:ln>
-            <a:noFill/>
-          </a:ln>
-        </p:spPr>
-        <p:txBody>
-          <a:bodyPr wrap="none" lIns="25400" rIns="25400" tIns="0" bIns="0">
-            <a:spAutoFit/>
-          </a:bodyPr>
-          <a:lstStyle/>
-          <a:p>
-            <a:pPr algn="r"/>
-            <a:r>
-              <a:rPr sz="850" b="1" i="0">
-                <a:solidFill>
-                  <a:srgbClr val="154FC2"/>
-                </a:solidFill>
-              </a:rPr>
-              <a:t>read req_op_id</a:t>
-            </a:r>
-          </a:p>
-        </p:txBody>
-      </p:sp>
-      <p:sp>
-        <p:nvSpPr>
-          <p:cNvPr id="34" name="Oval 33"/>
-          <p:cNvSpPr/>
-          <p:nvPr/>
-        </p:nvSpPr>
-        <p:spPr>
-          <a:xfrm>
-            <a:off x="10094976" y="3941064"/>
-            <a:ext cx="292608" cy="292608"/>
-          </a:xfrm>
-          <a:prstGeom prst="ellipse">
-            <a:avLst/>
-          </a:prstGeom>
-          <a:solidFill>
-            <a:srgbClr val="FFF49C"/>
-          </a:solidFill>
-          <a:ln w="19050">
-            <a:solidFill>
-              <a:srgbClr val="F9A825"/>
-            </a:solidFill>
-          </a:ln>
-        </p:spPr>
-        <p:style>
-          <a:lnRef idx="1">
-            <a:schemeClr val="accent1"/>
-          </a:lnRef>
-          <a:fillRef idx="3">
-            <a:schemeClr val="accent1"/>
-          </a:fillRef>
-          <a:effectRef idx="2">
-            <a:schemeClr val="accent1"/>
-          </a:effectRef>
-          <a:fontRef idx="minor">
-            <a:schemeClr val="lt1"/>
-          </a:fontRef>
-        </p:style>
-        <p:txBody>
-          <a:bodyPr rtlCol="0" anchor="ctr" lIns="0" rIns="0" tIns="0" bIns="0"/>
-          <a:lstStyle/>
-          <a:p>
-            <a:pPr algn="ctr"/>
-            <a:r>
-              <a:rPr sz="800" b="1">
-                <a:solidFill>
-                  <a:srgbClr val="333333"/>
-                </a:solidFill>
-              </a:rPr>
-              <a:t>I5</a:t>
-            </a:r>
-          </a:p>
-        </p:txBody>
-      </p:sp>
-      <p:sp>
-        <p:nvSpPr>
-          <p:cNvPr id="35" name="TextBox 34"/>
-          <p:cNvSpPr txBox="1"/>
-          <p:nvPr/>
-        </p:nvSpPr>
-        <p:spPr>
-          <a:xfrm>
-            <a:off x="7315199" y="3995928"/>
-            <a:ext cx="2743200" cy="219456"/>
-          </a:xfrm>
-          <a:prstGeom prst="rect">
-            <a:avLst/>
-          </a:prstGeom>
-          <a:solidFill>
-            <a:srgbClr val="FFFFFF"/>
-          </a:solidFill>
-          <a:ln>
-            <a:noFill/>
-          </a:ln>
-        </p:spPr>
-        <p:txBody>
-          <a:bodyPr wrap="none" lIns="25400" rIns="25400" tIns="0" bIns="0">
-            <a:spAutoFit/>
-          </a:bodyPr>
-          <a:lstStyle/>
-          <a:p>
-            <a:pPr algn="r"/>
-            <a:r>
-              <a:rPr sz="850" b="1" i="0">
-                <a:solidFill>
-                  <a:srgbClr val="154FC2"/>
-                </a:solidFill>
-              </a:rPr>
-              <a:t>cache_pool_set_stale; bucket_epoch++  (seqlock CAS)</a:t>
-            </a:r>
-          </a:p>
-        </p:txBody>
-      </p:sp>
-      <p:cxnSp>
-        <p:nvCxnSpPr>
-          <p:cNvPr id="36" name="Connector 35"/>
-          <p:cNvCxnSpPr/>
-          <p:nvPr/>
-        </p:nvCxnSpPr>
-        <p:spPr>
-          <a:xfrm flipH="1">
-            <a:off x="5486400" y="4288536"/>
-            <a:ext cx="4754880" cy="0"/>
-          </a:xfrm>
-          <a:prstGeom prst="line">
-            <a:avLst/>
-          </a:prstGeom>
-          <a:ln w="20320">
-            <a:solidFill>
-              <a:srgbClr val="154FC2"/>
-            </a:solidFill>
-            <a:tailEnd type="triangle" w="med" h="med"/>
-          </a:ln>
-        </p:spPr>
-        <p:style>
-          <a:lnRef idx="2">
-            <a:schemeClr val="accent1"/>
-          </a:lnRef>
-          <a:fillRef idx="0">
-            <a:schemeClr val="accent1"/>
-          </a:fillRef>
-          <a:effectRef idx="1">
-            <a:schemeClr val="accent1"/>
-          </a:effectRef>
-          <a:fontRef idx="minor">
-            <a:schemeClr val="tx1"/>
-          </a:fontRef>
-        </p:style>
-      </p:cxnSp>
-      <p:sp>
-        <p:nvSpPr>
-          <p:cNvPr id="37" name="Oval 36"/>
-          <p:cNvSpPr/>
-          <p:nvPr/>
-        </p:nvSpPr>
-        <p:spPr>
-          <a:xfrm>
-            <a:off x="7717536" y="4142232"/>
-            <a:ext cx="292608" cy="292608"/>
-          </a:xfrm>
-          <a:prstGeom prst="ellipse">
-            <a:avLst/>
-          </a:prstGeom>
-          <a:solidFill>
-            <a:srgbClr val="FFFFFF"/>
-          </a:solidFill>
-          <a:ln w="19050">
-            <a:solidFill>
-              <a:srgbClr val="154FC2"/>
-            </a:solidFill>
-          </a:ln>
-        </p:spPr>
-        <p:style>
-          <a:lnRef idx="1">
-            <a:schemeClr val="accent1"/>
-          </a:lnRef>
-          <a:fillRef idx="3">
-            <a:schemeClr val="accent1"/>
-          </a:fillRef>
-          <a:effectRef idx="2">
-            <a:schemeClr val="accent1"/>
-          </a:effectRef>
-          <a:fontRef idx="minor">
-            <a:schemeClr val="lt1"/>
-          </a:fontRef>
-        </p:style>
-        <p:txBody>
-          <a:bodyPr rtlCol="0" anchor="ctr" lIns="0" rIns="0" tIns="0" bIns="0"/>
-          <a:lstStyle/>
-          <a:p>
-            <a:pPr algn="ctr"/>
-            <a:r>
-              <a:rPr sz="800" b="1">
-                <a:solidFill>
-                  <a:srgbClr val="154FC2"/>
-                </a:solidFill>
-              </a:rPr>
-              <a:t>I6</a:t>
-            </a:r>
-          </a:p>
-        </p:txBody>
-      </p:sp>
-      <p:sp>
-        <p:nvSpPr>
-          <p:cNvPr id="38" name="TextBox 37"/>
-          <p:cNvSpPr txBox="1"/>
-          <p:nvPr/>
-        </p:nvSpPr>
-        <p:spPr>
-          <a:xfrm>
-            <a:off x="6400800" y="4379976"/>
-            <a:ext cx="2926080" cy="219456"/>
-          </a:xfrm>
-          <a:prstGeom prst="rect">
-            <a:avLst/>
-          </a:prstGeom>
-          <a:solidFill>
-            <a:srgbClr val="FFFFFF"/>
-          </a:solidFill>
-          <a:ln>
-            <a:noFill/>
-          </a:ln>
-        </p:spPr>
-        <p:txBody>
-          <a:bodyPr wrap="none" lIns="25400" rIns="25400" tIns="0" bIns="0">
-            <a:spAutoFit/>
-          </a:bodyPr>
-          <a:lstStyle/>
-          <a:p>
-            <a:pPr algn="l"/>
-            <a:r>
-              <a:rPr sz="850" b="1" i="0">
-                <a:solidFill>
-                  <a:srgbClr val="154FC2"/>
-                </a:solidFill>
-              </a:rPr>
-              <a:t>write resp_op_id ACK + flush + sfence</a:t>
-            </a:r>
-          </a:p>
-        </p:txBody>
-      </p:sp>
-      <p:sp>
-        <p:nvSpPr>
-          <p:cNvPr id="39" name="Oval 38"/>
-          <p:cNvSpPr/>
-          <p:nvPr/>
-        </p:nvSpPr>
-        <p:spPr>
-          <a:xfrm>
-            <a:off x="5340096" y="4343400"/>
-            <a:ext cx="292608" cy="292608"/>
-          </a:xfrm>
-          <a:prstGeom prst="ellipse">
-            <a:avLst/>
-          </a:prstGeom>
-          <a:solidFill>
-            <a:srgbClr val="FFFFFF"/>
-          </a:solidFill>
-          <a:ln w="19050">
-            <a:solidFill>
-              <a:srgbClr val="154FC2"/>
-            </a:solidFill>
-          </a:ln>
-        </p:spPr>
-        <p:style>
-          <a:lnRef idx="1">
-            <a:schemeClr val="accent1"/>
-          </a:lnRef>
-          <a:fillRef idx="3">
-            <a:schemeClr val="accent1"/>
-          </a:fillRef>
-          <a:effectRef idx="2">
-            <a:schemeClr val="accent1"/>
-          </a:effectRef>
-          <a:fontRef idx="minor">
-            <a:schemeClr val="lt1"/>
-          </a:fontRef>
-        </p:style>
-        <p:txBody>
-          <a:bodyPr rtlCol="0" anchor="ctr" lIns="0" rIns="0" tIns="0" bIns="0"/>
-          <a:lstStyle/>
-          <a:p>
-            <a:pPr algn="ctr"/>
-            <a:r>
-              <a:rPr sz="800" b="1">
-                <a:solidFill>
-                  <a:srgbClr val="154FC2"/>
-                </a:solidFill>
-              </a:rPr>
-              <a:t>I7</a:t>
-            </a:r>
-          </a:p>
-        </p:txBody>
-      </p:sp>
-      <p:sp>
-        <p:nvSpPr>
-          <p:cNvPr id="40" name="TextBox 39"/>
-          <p:cNvSpPr txBox="1"/>
-          <p:nvPr/>
-        </p:nvSpPr>
-        <p:spPr>
-          <a:xfrm>
-            <a:off x="5669280" y="4398264"/>
-            <a:ext cx="2743200" cy="219456"/>
-          </a:xfrm>
-          <a:prstGeom prst="rect">
-            <a:avLst/>
-          </a:prstGeom>
-          <a:solidFill>
-            <a:srgbClr val="FFFFFF"/>
-          </a:solidFill>
-          <a:ln>
-            <a:noFill/>
-          </a:ln>
-        </p:spPr>
-        <p:txBody>
-          <a:bodyPr wrap="none" lIns="25400" rIns="25400" tIns="0" bIns="0">
-            <a:spAutoFit/>
-          </a:bodyPr>
-          <a:lstStyle/>
-          <a:p>
-            <a:pPr algn="l"/>
-            <a:r>
-              <a:rPr sz="850" b="1" i="0">
-                <a:solidFill>
-                  <a:srgbClr val="154FC2"/>
-                </a:solidFill>
-              </a:rPr>
-              <a:t>spin observes ACK  (end of cross-host blocking)</a:t>
-            </a:r>
-          </a:p>
-        </p:txBody>
-      </p:sp>
-      <p:sp>
-        <p:nvSpPr>
-          <p:cNvPr id="41" name="Rectangle 40"/>
-          <p:cNvSpPr/>
-          <p:nvPr/>
-        </p:nvSpPr>
-        <p:spPr>
-          <a:xfrm>
-            <a:off x="5404104" y="3438144"/>
-            <a:ext cx="164592" cy="1216151"/>
+            <a:off x="1380744" y="2706623"/>
+            <a:ext cx="164592" cy="3218688"/>
           </a:xfrm>
           <a:prstGeom prst="rect">
             <a:avLst/>
@@ -5027,24 +5105,24 @@
       </p:sp>
       <p:sp>
         <p:nvSpPr>
-          <p:cNvPr id="42" name="Oval 41"/>
+          <p:cNvPr id="44" name="Rounded Rectangle 43"/>
           <p:cNvSpPr/>
           <p:nvPr/>
         </p:nvSpPr>
         <p:spPr>
           <a:xfrm>
-            <a:off x="5340096" y="4544568"/>
-            <a:ext cx="292608" cy="292608"/>
-          </a:xfrm>
-          <a:prstGeom prst="ellipse">
+            <a:off x="274320" y="5989320"/>
+            <a:ext cx="7772400" cy="292608"/>
+          </a:xfrm>
+          <a:prstGeom prst="roundRect">
             <a:avLst/>
           </a:prstGeom>
           <a:solidFill>
-            <a:srgbClr val="FFFFFF"/>
+            <a:srgbClr val="FFF49C"/>
           </a:solidFill>
-          <a:ln w="19050">
+          <a:ln w="9525">
             <a:solidFill>
-              <a:srgbClr val="154FC2"/>
+              <a:srgbClr val="F9A825"/>
             </a:solidFill>
           </a:ln>
         </p:spPr>
@@ -5063,788 +5141,24 @@
           </a:fontRef>
         </p:style>
         <p:txBody>
-          <a:bodyPr rtlCol="0" anchor="ctr" lIns="0" rIns="0" tIns="0" bIns="0"/>
-          <a:lstStyle/>
-          <a:p>
-            <a:pPr algn="ctr"/>
-            <a:r>
-              <a:rPr sz="800" b="1">
-                <a:solidFill>
-                  <a:srgbClr val="154FC2"/>
+          <a:bodyPr rtlCol="0" anchor="ctr" lIns="101600" rIns="101600" tIns="25400" bIns="25400"/>
+          <a:lstStyle/>
+          <a:p>
+            <a:pPr algn="l"/>
+            <a:r>
+              <a:rPr sz="1000" b="1">
+                <a:solidFill>
+                  <a:srgbClr val="0D327D"/>
                 </a:solidFill>
               </a:rPr>
-              <a:t>I8</a:t>
-            </a:r>
-          </a:p>
-        </p:txBody>
-      </p:sp>
-      <p:sp>
-        <p:nvSpPr>
-          <p:cNvPr id="43" name="TextBox 42"/>
-          <p:cNvSpPr txBox="1"/>
-          <p:nvPr/>
-        </p:nvSpPr>
-        <p:spPr>
-          <a:xfrm>
-            <a:off x="5669280" y="4599432"/>
-            <a:ext cx="2743200" cy="219456"/>
-          </a:xfrm>
-          <a:prstGeom prst="rect">
-            <a:avLst/>
-          </a:prstGeom>
-          <a:solidFill>
-            <a:srgbClr val="FFFFFF"/>
-          </a:solidFill>
-          <a:ln>
-            <a:noFill/>
-          </a:ln>
-        </p:spPr>
-        <p:txBody>
-          <a:bodyPr wrap="none" lIns="25400" rIns="25400" tIns="0" bIns="0">
-            <a:spAutoFit/>
-          </a:bodyPr>
-          <a:lstStyle/>
-          <a:p>
-            <a:pPr algn="l"/>
-            <a:r>
-              <a:rPr sz="850" b="1" i="0">
-                <a:solidFill>
-                  <a:srgbClr val="154FC2"/>
-                </a:solidFill>
-              </a:rPr>
-              <a:t>free InvalRing slot (req_op_id = 0)</a:t>
-            </a:r>
-          </a:p>
-        </p:txBody>
-      </p:sp>
-      <p:sp>
-        <p:nvSpPr>
-          <p:cNvPr id="44" name="Oval 43"/>
-          <p:cNvSpPr/>
-          <p:nvPr/>
-        </p:nvSpPr>
-        <p:spPr>
-          <a:xfrm>
-            <a:off x="5340096" y="4745736"/>
-            <a:ext cx="292608" cy="292608"/>
-          </a:xfrm>
-          <a:prstGeom prst="ellipse">
-            <a:avLst/>
-          </a:prstGeom>
-          <a:solidFill>
-            <a:srgbClr val="FFFFFF"/>
-          </a:solidFill>
-          <a:ln w="19050">
-            <a:solidFill>
-              <a:srgbClr val="154FC2"/>
-            </a:solidFill>
-          </a:ln>
-        </p:spPr>
-        <p:style>
-          <a:lnRef idx="1">
-            <a:schemeClr val="accent1"/>
-          </a:lnRef>
-          <a:fillRef idx="3">
-            <a:schemeClr val="accent1"/>
-          </a:fillRef>
-          <a:effectRef idx="2">
-            <a:schemeClr val="accent1"/>
-          </a:effectRef>
-          <a:fontRef idx="minor">
-            <a:schemeClr val="lt1"/>
-          </a:fontRef>
-        </p:style>
-        <p:txBody>
-          <a:bodyPr rtlCol="0" anchor="ctr" lIns="0" rIns="0" tIns="0" bIns="0"/>
-          <a:lstStyle/>
-          <a:p>
-            <a:pPr algn="ctr"/>
-            <a:r>
-              <a:rPr sz="800" b="1">
-                <a:solidFill>
-                  <a:srgbClr val="154FC2"/>
-                </a:solidFill>
-              </a:rPr>
-              <a:t>W6</a:t>
-            </a:r>
-          </a:p>
-        </p:txBody>
-      </p:sp>
-      <p:sp>
-        <p:nvSpPr>
-          <p:cNvPr id="45" name="TextBox 44"/>
-          <p:cNvSpPr txBox="1"/>
-          <p:nvPr/>
-        </p:nvSpPr>
-        <p:spPr>
-          <a:xfrm>
-            <a:off x="5669280" y="4800600"/>
-            <a:ext cx="2743200" cy="219456"/>
-          </a:xfrm>
-          <a:prstGeom prst="rect">
-            <a:avLst/>
-          </a:prstGeom>
-          <a:solidFill>
-            <a:srgbClr val="FFFFFF"/>
-          </a:solidFill>
-          <a:ln>
-            <a:noFill/>
-          </a:ln>
-        </p:spPr>
-        <p:txBody>
-          <a:bodyPr wrap="none" lIns="25400" rIns="25400" tIns="0" bIns="0">
-            <a:spAutoFit/>
-          </a:bodyPr>
-          <a:lstStyle/>
-          <a:p>
-            <a:pPr algn="l"/>
-            <a:r>
-              <a:rPr sz="850" b="1" i="0">
-                <a:solidFill>
-                  <a:srgbClr val="154FC2"/>
-                </a:solidFill>
-              </a:rPr>
-              <a:t>end of invalidate broadcast loop</a:t>
-            </a:r>
-          </a:p>
-        </p:txBody>
-      </p:sp>
-      <p:sp>
-        <p:nvSpPr>
-          <p:cNvPr id="46" name="Oval 45"/>
-          <p:cNvSpPr/>
-          <p:nvPr/>
-        </p:nvSpPr>
-        <p:spPr>
-          <a:xfrm>
-            <a:off x="5340096" y="4946903"/>
-            <a:ext cx="292608" cy="292608"/>
-          </a:xfrm>
-          <a:prstGeom prst="ellipse">
-            <a:avLst/>
-          </a:prstGeom>
-          <a:solidFill>
-            <a:srgbClr val="FFFFFF"/>
-          </a:solidFill>
-          <a:ln w="19050">
-            <a:solidFill>
-              <a:srgbClr val="154FC2"/>
-            </a:solidFill>
-          </a:ln>
-        </p:spPr>
-        <p:style>
-          <a:lnRef idx="1">
-            <a:schemeClr val="accent1"/>
-          </a:lnRef>
-          <a:fillRef idx="3">
-            <a:schemeClr val="accent1"/>
-          </a:fillRef>
-          <a:effectRef idx="2">
-            <a:schemeClr val="accent1"/>
-          </a:effectRef>
-          <a:fontRef idx="minor">
-            <a:schemeClr val="lt1"/>
-          </a:fontRef>
-        </p:style>
-        <p:txBody>
-          <a:bodyPr rtlCol="0" anchor="ctr" lIns="0" rIns="0" tIns="0" bIns="0"/>
-          <a:lstStyle/>
-          <a:p>
-            <a:pPr algn="ctr"/>
-            <a:r>
-              <a:rPr sz="800" b="1">
-                <a:solidFill>
-                  <a:srgbClr val="154FC2"/>
-                </a:solidFill>
-              </a:rPr>
-              <a:t>W7</a:t>
-            </a:r>
-          </a:p>
-        </p:txBody>
-      </p:sp>
-      <p:sp>
-        <p:nvSpPr>
-          <p:cNvPr id="47" name="TextBox 46"/>
-          <p:cNvSpPr txBox="1"/>
-          <p:nvPr/>
-        </p:nvSpPr>
-        <p:spPr>
-          <a:xfrm>
-            <a:off x="5669280" y="5001768"/>
-            <a:ext cx="2743200" cy="219456"/>
-          </a:xfrm>
-          <a:prstGeom prst="rect">
-            <a:avLst/>
-          </a:prstGeom>
-          <a:solidFill>
-            <a:srgbClr val="FFFFFF"/>
-          </a:solidFill>
-          <a:ln>
-            <a:noFill/>
-          </a:ln>
-        </p:spPr>
-        <p:txBody>
-          <a:bodyPr wrap="none" lIns="25400" rIns="25400" tIns="0" bIns="0">
-            <a:spAutoFit/>
-          </a:bodyPr>
-          <a:lstStyle/>
-          <a:p>
-            <a:pPr algn="l"/>
-            <a:r>
-              <a:rPr sz="850" b="1" i="0">
-                <a:solidFill>
-                  <a:srgbClr val="154FC2"/>
-                </a:solidFill>
-              </a:rPr>
-              <a:t>pool-&gt;alloc  (bump.fetch_add CXL atomic)</a:t>
-            </a:r>
-          </a:p>
-        </p:txBody>
-      </p:sp>
-      <p:sp>
-        <p:nvSpPr>
-          <p:cNvPr id="48" name="Oval 47"/>
-          <p:cNvSpPr/>
-          <p:nvPr/>
-        </p:nvSpPr>
-        <p:spPr>
-          <a:xfrm>
-            <a:off x="5340096" y="5148071"/>
-            <a:ext cx="292608" cy="292608"/>
-          </a:xfrm>
-          <a:prstGeom prst="ellipse">
-            <a:avLst/>
-          </a:prstGeom>
-          <a:solidFill>
-            <a:srgbClr val="FFFFFF"/>
-          </a:solidFill>
-          <a:ln w="19050">
-            <a:solidFill>
-              <a:srgbClr val="154FC2"/>
-            </a:solidFill>
-          </a:ln>
-        </p:spPr>
-        <p:style>
-          <a:lnRef idx="1">
-            <a:schemeClr val="accent1"/>
-          </a:lnRef>
-          <a:fillRef idx="3">
-            <a:schemeClr val="accent1"/>
-          </a:fillRef>
-          <a:effectRef idx="2">
-            <a:schemeClr val="accent1"/>
-          </a:effectRef>
-          <a:fontRef idx="minor">
-            <a:schemeClr val="lt1"/>
-          </a:fontRef>
-        </p:style>
-        <p:txBody>
-          <a:bodyPr rtlCol="0" anchor="ctr" lIns="0" rIns="0" tIns="0" bIns="0"/>
-          <a:lstStyle/>
-          <a:p>
-            <a:pPr algn="ctr"/>
-            <a:r>
-              <a:rPr sz="800" b="1">
-                <a:solidFill>
-                  <a:srgbClr val="154FC2"/>
-                </a:solidFill>
-              </a:rPr>
-              <a:t>W8</a:t>
-            </a:r>
-          </a:p>
-        </p:txBody>
-      </p:sp>
-      <p:sp>
-        <p:nvSpPr>
-          <p:cNvPr id="49" name="TextBox 48"/>
-          <p:cNvSpPr txBox="1"/>
-          <p:nvPr/>
-        </p:nvSpPr>
-        <p:spPr>
-          <a:xfrm>
-            <a:off x="5669280" y="5202936"/>
-            <a:ext cx="2743200" cy="219456"/>
-          </a:xfrm>
-          <a:prstGeom prst="rect">
-            <a:avLst/>
-          </a:prstGeom>
-          <a:solidFill>
-            <a:srgbClr val="FFFFFF"/>
-          </a:solidFill>
-          <a:ln>
-            <a:noFill/>
-          </a:ln>
-        </p:spPr>
-        <p:txBody>
-          <a:bodyPr wrap="none" lIns="25400" rIns="25400" tIns="0" bIns="0">
-            <a:spAutoFit/>
-          </a:bodyPr>
-          <a:lstStyle/>
-          <a:p>
-            <a:pPr algn="l"/>
-            <a:r>
-              <a:rPr sz="850" b="1" i="0">
-                <a:solidFill>
-                  <a:srgbClr val="154FC2"/>
-                </a:solidFill>
-              </a:rPr>
-              <a:t>pool-&gt;write  (memcpy + per-cacheline flush + sfence)</a:t>
-            </a:r>
-          </a:p>
-        </p:txBody>
-      </p:sp>
-      <p:sp>
-        <p:nvSpPr>
-          <p:cNvPr id="50" name="Oval 49"/>
-          <p:cNvSpPr/>
-          <p:nvPr/>
-        </p:nvSpPr>
-        <p:spPr>
-          <a:xfrm>
-            <a:off x="5340096" y="5349239"/>
-            <a:ext cx="292608" cy="292608"/>
-          </a:xfrm>
-          <a:prstGeom prst="ellipse">
-            <a:avLst/>
-          </a:prstGeom>
-          <a:solidFill>
-            <a:srgbClr val="FFF49C"/>
-          </a:solidFill>
-          <a:ln w="19050">
-            <a:solidFill>
-              <a:srgbClr val="F9A825"/>
-            </a:solidFill>
-          </a:ln>
-        </p:spPr>
-        <p:style>
-          <a:lnRef idx="1">
-            <a:schemeClr val="accent1"/>
-          </a:lnRef>
-          <a:fillRef idx="3">
-            <a:schemeClr val="accent1"/>
-          </a:fillRef>
-          <a:effectRef idx="2">
-            <a:schemeClr val="accent1"/>
-          </a:effectRef>
-          <a:fontRef idx="minor">
-            <a:schemeClr val="lt1"/>
-          </a:fontRef>
-        </p:style>
-        <p:txBody>
-          <a:bodyPr rtlCol="0" anchor="ctr" lIns="0" rIns="0" tIns="0" bIns="0"/>
-          <a:lstStyle/>
-          <a:p>
-            <a:pPr algn="ctr"/>
-            <a:r>
-              <a:rPr sz="800" b="1">
-                <a:solidFill>
-                  <a:srgbClr val="333333"/>
-                </a:solidFill>
-              </a:rPr>
-              <a:t>W9</a:t>
-            </a:r>
-          </a:p>
-        </p:txBody>
-      </p:sp>
-      <p:sp>
-        <p:nvSpPr>
-          <p:cNvPr id="51" name="TextBox 50"/>
-          <p:cNvSpPr txBox="1"/>
-          <p:nvPr/>
-        </p:nvSpPr>
-        <p:spPr>
-          <a:xfrm>
-            <a:off x="5669280" y="5404103"/>
-            <a:ext cx="2743200" cy="219456"/>
-          </a:xfrm>
-          <a:prstGeom prst="rect">
-            <a:avLst/>
-          </a:prstGeom>
-          <a:solidFill>
-            <a:srgbClr val="FFFFFF"/>
-          </a:solidFill>
-          <a:ln>
-            <a:noFill/>
-          </a:ln>
-        </p:spPr>
-        <p:txBody>
-          <a:bodyPr wrap="none" lIns="25400" rIns="25400" tIns="0" bIns="0">
-            <a:spAutoFit/>
-          </a:bodyPr>
-          <a:lstStyle/>
-          <a:p>
-            <a:pPr algn="l"/>
-            <a:r>
-              <a:rPr sz="850" b="1" i="0">
-                <a:solidFill>
-                  <a:srgbClr val="154FC2"/>
-                </a:solidFill>
-              </a:rPr>
-              <a:t>★ publish_slot_cow ★ — value flush + key flush + 2× sfence</a:t>
-            </a:r>
-          </a:p>
-        </p:txBody>
-      </p:sp>
-      <p:sp>
-        <p:nvSpPr>
-          <p:cNvPr id="52" name="Oval 51"/>
-          <p:cNvSpPr/>
-          <p:nvPr/>
-        </p:nvSpPr>
-        <p:spPr>
-          <a:xfrm>
-            <a:off x="5340096" y="5550407"/>
-            <a:ext cx="292608" cy="292608"/>
-          </a:xfrm>
-          <a:prstGeom prst="ellipse">
-            <a:avLst/>
-          </a:prstGeom>
-          <a:solidFill>
-            <a:srgbClr val="FFF49C"/>
-          </a:solidFill>
-          <a:ln w="19050">
-            <a:solidFill>
-              <a:srgbClr val="F9A825"/>
-            </a:solidFill>
-          </a:ln>
-        </p:spPr>
-        <p:style>
-          <a:lnRef idx="1">
-            <a:schemeClr val="accent1"/>
-          </a:lnRef>
-          <a:fillRef idx="3">
-            <a:schemeClr val="accent1"/>
-          </a:fillRef>
-          <a:effectRef idx="2">
-            <a:schemeClr val="accent1"/>
-          </a:effectRef>
-          <a:fontRef idx="minor">
-            <a:schemeClr val="lt1"/>
-          </a:fontRef>
-        </p:style>
-        <p:txBody>
-          <a:bodyPr rtlCol="0" anchor="ctr" lIns="0" rIns="0" tIns="0" bIns="0"/>
-          <a:lstStyle/>
-          <a:p>
-            <a:pPr algn="ctr"/>
-            <a:r>
-              <a:rPr sz="800" b="1">
-                <a:solidFill>
-                  <a:srgbClr val="333333"/>
-                </a:solidFill>
-              </a:rPr>
-              <a:t>W10</a:t>
-            </a:r>
-          </a:p>
-        </p:txBody>
-      </p:sp>
-      <p:sp>
-        <p:nvSpPr>
-          <p:cNvPr id="53" name="TextBox 52"/>
-          <p:cNvSpPr txBox="1"/>
-          <p:nvPr/>
-        </p:nvSpPr>
-        <p:spPr>
-          <a:xfrm>
-            <a:off x="5669280" y="5605271"/>
-            <a:ext cx="2743200" cy="219456"/>
-          </a:xfrm>
-          <a:prstGeom prst="rect">
-            <a:avLst/>
-          </a:prstGeom>
-          <a:solidFill>
-            <a:srgbClr val="FFFFFF"/>
-          </a:solidFill>
-          <a:ln>
-            <a:noFill/>
-          </a:ln>
-        </p:spPr>
-        <p:txBody>
-          <a:bodyPr wrap="none" lIns="25400" rIns="25400" tIns="0" bIns="0">
-            <a:spAutoFit/>
-          </a:bodyPr>
-          <a:lstStyle/>
-          <a:p>
-            <a:pPr algn="l"/>
-            <a:r>
-              <a:rPr sz="850" b="1" i="0">
-                <a:solidFill>
-                  <a:srgbClr val="154FC2"/>
-                </a:solidFill>
-              </a:rPr>
-              <a:t>directory update + cache_pool_insert + bucket_epoch++  ★ lin #2</a:t>
-            </a:r>
-          </a:p>
-        </p:txBody>
-      </p:sp>
-      <p:sp>
-        <p:nvSpPr>
-          <p:cNvPr id="54" name="Oval 53"/>
-          <p:cNvSpPr/>
-          <p:nvPr/>
-        </p:nvSpPr>
-        <p:spPr>
-          <a:xfrm>
-            <a:off x="5340096" y="5751575"/>
-            <a:ext cx="292608" cy="292608"/>
-          </a:xfrm>
-          <a:prstGeom prst="ellipse">
-            <a:avLst/>
-          </a:prstGeom>
-          <a:solidFill>
-            <a:srgbClr val="FFFFFF"/>
-          </a:solidFill>
-          <a:ln w="19050">
-            <a:solidFill>
-              <a:srgbClr val="154FC2"/>
-            </a:solidFill>
-          </a:ln>
-        </p:spPr>
-        <p:style>
-          <a:lnRef idx="1">
-            <a:schemeClr val="accent1"/>
-          </a:lnRef>
-          <a:fillRef idx="3">
-            <a:schemeClr val="accent1"/>
-          </a:fillRef>
-          <a:effectRef idx="2">
-            <a:schemeClr val="accent1"/>
-          </a:effectRef>
-          <a:fontRef idx="minor">
-            <a:schemeClr val="lt1"/>
-          </a:fontRef>
-        </p:style>
-        <p:txBody>
-          <a:bodyPr rtlCol="0" anchor="ctr" lIns="0" rIns="0" tIns="0" bIns="0"/>
-          <a:lstStyle/>
-          <a:p>
-            <a:pPr algn="ctr"/>
-            <a:r>
-              <a:rPr sz="800" b="1">
-                <a:solidFill>
-                  <a:srgbClr val="154FC2"/>
-                </a:solidFill>
-              </a:rPr>
-              <a:t>W12</a:t>
-            </a:r>
-          </a:p>
-        </p:txBody>
-      </p:sp>
-      <p:sp>
-        <p:nvSpPr>
-          <p:cNvPr id="55" name="TextBox 54"/>
-          <p:cNvSpPr txBox="1"/>
-          <p:nvPr/>
-        </p:nvSpPr>
-        <p:spPr>
-          <a:xfrm>
-            <a:off x="5669280" y="5806439"/>
-            <a:ext cx="2743200" cy="219456"/>
-          </a:xfrm>
-          <a:prstGeom prst="rect">
-            <a:avLst/>
-          </a:prstGeom>
-          <a:solidFill>
-            <a:srgbClr val="FFFFFF"/>
-          </a:solidFill>
-          <a:ln>
-            <a:noFill/>
-          </a:ln>
-        </p:spPr>
-        <p:txBody>
-          <a:bodyPr wrap="none" lIns="25400" rIns="25400" tIns="0" bIns="0">
-            <a:spAutoFit/>
-          </a:bodyPr>
-          <a:lstStyle/>
-          <a:p>
-            <a:pPr algn="l"/>
-            <a:r>
-              <a:rPr sz="850" b="1" i="0">
-                <a:solidFill>
-                  <a:srgbClr val="154FC2"/>
-                </a:solidFill>
-              </a:rPr>
-              <a:t>return 0 to write_receiver_loop</a:t>
-            </a:r>
-          </a:p>
-        </p:txBody>
-      </p:sp>
-      <p:cxnSp>
-        <p:nvCxnSpPr>
-          <p:cNvPr id="56" name="Connector 55"/>
-          <p:cNvCxnSpPr/>
-          <p:nvPr/>
-        </p:nvCxnSpPr>
-        <p:spPr>
-          <a:xfrm flipH="1">
-            <a:off x="1463040" y="6099047"/>
-            <a:ext cx="4023360" cy="0"/>
-          </a:xfrm>
-          <a:prstGeom prst="line">
-            <a:avLst/>
-          </a:prstGeom>
-          <a:ln w="20320">
-            <a:solidFill>
-              <a:srgbClr val="9E9E9E"/>
-            </a:solidFill>
-            <a:tailEnd type="triangle" w="med" h="med"/>
-          </a:ln>
-        </p:spPr>
-        <p:style>
-          <a:lnRef idx="2">
-            <a:schemeClr val="accent1"/>
-          </a:lnRef>
-          <a:fillRef idx="0">
-            <a:schemeClr val="accent1"/>
-          </a:fillRef>
-          <a:effectRef idx="1">
-            <a:schemeClr val="accent1"/>
-          </a:effectRef>
-          <a:fontRef idx="minor">
-            <a:schemeClr val="tx1"/>
-          </a:fontRef>
-        </p:style>
-      </p:cxnSp>
-      <p:sp>
-        <p:nvSpPr>
-          <p:cNvPr id="57" name="Oval 56"/>
-          <p:cNvSpPr/>
-          <p:nvPr/>
-        </p:nvSpPr>
-        <p:spPr>
-          <a:xfrm>
-            <a:off x="3328415" y="5952743"/>
-            <a:ext cx="292608" cy="292608"/>
-          </a:xfrm>
-          <a:prstGeom prst="ellipse">
-            <a:avLst/>
-          </a:prstGeom>
-          <a:solidFill>
-            <a:srgbClr val="FFFFFF"/>
-          </a:solidFill>
-          <a:ln w="19050">
-            <a:solidFill>
-              <a:srgbClr val="9E9E9E"/>
-            </a:solidFill>
-          </a:ln>
-        </p:spPr>
-        <p:style>
-          <a:lnRef idx="1">
-            <a:schemeClr val="accent1"/>
-          </a:lnRef>
-          <a:fillRef idx="3">
-            <a:schemeClr val="accent1"/>
-          </a:fillRef>
-          <a:effectRef idx="2">
-            <a:schemeClr val="accent1"/>
-          </a:effectRef>
-          <a:fontRef idx="minor">
-            <a:schemeClr val="lt1"/>
-          </a:fontRef>
-        </p:style>
-        <p:txBody>
-          <a:bodyPr rtlCol="0" anchor="ctr" lIns="0" rIns="0" tIns="0" bIns="0"/>
-          <a:lstStyle/>
-          <a:p>
-            <a:pPr algn="ctr"/>
-            <a:r>
-              <a:rPr sz="800" b="1">
-                <a:solidFill>
-                  <a:srgbClr val="9E9E9E"/>
-                </a:solidFill>
-              </a:rPr>
-              <a:t>—</a:t>
-            </a:r>
-          </a:p>
-        </p:txBody>
-      </p:sp>
-      <p:sp>
-        <p:nvSpPr>
-          <p:cNvPr id="58" name="TextBox 57"/>
-          <p:cNvSpPr txBox="1"/>
-          <p:nvPr/>
-        </p:nvSpPr>
-        <p:spPr>
-          <a:xfrm>
-            <a:off x="2011679" y="6190487"/>
-            <a:ext cx="2926080" cy="219456"/>
-          </a:xfrm>
-          <a:prstGeom prst="rect">
-            <a:avLst/>
-          </a:prstGeom>
-          <a:solidFill>
-            <a:srgbClr val="FFFFFF"/>
-          </a:solidFill>
-          <a:ln>
-            <a:noFill/>
-          </a:ln>
-        </p:spPr>
-        <p:txBody>
-          <a:bodyPr wrap="none" lIns="25400" rIns="25400" tIns="0" bIns="0">
-            <a:spAutoFit/>
-          </a:bodyPr>
-          <a:lstStyle/>
-          <a:p>
-            <a:pPr algn="l"/>
-            <a:r>
-              <a:rPr sz="850" b="1" i="0">
-                <a:solidFill>
-                  <a:srgbClr val="9E9E9E"/>
-                </a:solidFill>
-              </a:rPr>
-              <a:t>write WriteRing.resp_op_id ACK + flush; worker spin breaks; free slot</a:t>
-            </a:r>
-          </a:p>
-        </p:txBody>
-      </p:sp>
-      <p:sp>
-        <p:nvSpPr>
-          <p:cNvPr id="59" name="Rectangle 58"/>
-          <p:cNvSpPr/>
-          <p:nvPr/>
-        </p:nvSpPr>
-        <p:spPr>
-          <a:xfrm>
-            <a:off x="1380744" y="2029968"/>
-            <a:ext cx="164592" cy="4224527"/>
-          </a:xfrm>
-          <a:prstGeom prst="rect">
-            <a:avLst/>
-          </a:prstGeom>
-          <a:solidFill>
-            <a:srgbClr val="FFCDD2"/>
-          </a:solidFill>
-          <a:ln w="6350">
-            <a:solidFill>
-              <a:srgbClr val="C62828"/>
-            </a:solidFill>
-          </a:ln>
-        </p:spPr>
-        <p:style>
-          <a:lnRef idx="1">
-            <a:schemeClr val="accent1"/>
-          </a:lnRef>
-          <a:fillRef idx="3">
-            <a:schemeClr val="accent1"/>
-          </a:fillRef>
-          <a:effectRef idx="2">
-            <a:schemeClr val="accent1"/>
-          </a:effectRef>
-          <a:fontRef idx="minor">
-            <a:schemeClr val="lt1"/>
-          </a:fontRef>
-        </p:style>
-        <p:txBody>
-          <a:bodyPr rtlCol="0" anchor="ctr"/>
-          <a:lstStyle/>
-          <a:p>
-            <a:pPr algn="ctr"/>
-          </a:p>
-        </p:txBody>
-      </p:sp>
-      <p:sp>
-        <p:nvSpPr>
-          <p:cNvPr id="60" name="Rounded Rectangle 59"/>
+              <a:t>End-to-end:  with peer-sharer-invalidate (A7-A12 fire)  ≈ 22 µs   |   without (~93% of ops at T=64, sharer_bitmap reset by W10) ≈ 16 µs</a:t>
+            </a:r>
+          </a:p>
+        </p:txBody>
+      </p:sp>
+      <p:sp>
+        <p:nvSpPr>
+          <p:cNvPr id="45" name="Rounded Rectangle 44"/>
           <p:cNvSpPr/>
           <p:nvPr/>
         </p:nvSpPr>
@@ -5889,7 +5203,7 @@
       </p:sp>
       <p:sp>
         <p:nvSpPr>
-          <p:cNvPr id="61" name="TextBox 60"/>
+          <p:cNvPr id="46" name="TextBox 45"/>
           <p:cNvSpPr txBox="1"/>
           <p:nvPr/>
         </p:nvSpPr>
@@ -5916,14 +5230,14 @@
                   <a:srgbClr val="154FC2"/>
                 </a:solidFill>
               </a:rPr>
-              <a:t>● W1..W12 probe (host 1)</a:t>
-            </a:r>
-          </a:p>
-        </p:txBody>
-      </p:sp>
-      <p:sp>
-        <p:nvSpPr>
-          <p:cNvPr id="62" name="TextBox 61"/>
+              <a:t>● A* step</a:t>
+            </a:r>
+          </a:p>
+        </p:txBody>
+      </p:sp>
+      <p:sp>
+        <p:nvSpPr>
+          <p:cNvPr id="47" name="TextBox 46"/>
           <p:cNvSpPr txBox="1"/>
           <p:nvPr/>
         </p:nvSpPr>
@@ -5947,17 +5261,17 @@
             <a:r>
               <a:rPr sz="900" b="1">
                 <a:solidFill>
-                  <a:srgbClr val="154FC2"/>
+                  <a:srgbClr val="C62828"/>
                 </a:solidFill>
               </a:rPr>
-              <a:t>● I3..I6 probe (host 0)</a:t>
-            </a:r>
-          </a:p>
-        </p:txBody>
-      </p:sp>
-      <p:sp>
-        <p:nvSpPr>
-          <p:cNvPr id="63" name="TextBox 62"/>
+              <a:t>● Cross-host blocking</a:t>
+            </a:r>
+          </a:p>
+        </p:txBody>
+      </p:sp>
+      <p:sp>
+        <p:nvSpPr>
+          <p:cNvPr id="48" name="TextBox 47"/>
           <p:cNvSpPr txBox="1"/>
           <p:nvPr/>
         </p:nvSpPr>
@@ -5981,17 +5295,17 @@
             <a:r>
               <a:rPr sz="900" b="1">
                 <a:solidFill>
-                  <a:srgbClr val="9E9E9E"/>
+                  <a:srgbClr val="F9A825"/>
                 </a:solidFill>
               </a:rPr>
-              <a:t>untr — no PROBE_OP</a:t>
-            </a:r>
-          </a:p>
-        </p:txBody>
-      </p:sp>
-      <p:sp>
-        <p:nvSpPr>
-          <p:cNvPr id="64" name="TextBox 63"/>
+              <a:t>★ Linearization point</a:t>
+            </a:r>
+          </a:p>
+        </p:txBody>
+      </p:sp>
+      <p:sp>
+        <p:nvSpPr>
+          <p:cNvPr id="49" name="TextBox 48"/>
           <p:cNvSpPr txBox="1"/>
           <p:nvPr/>
         </p:nvSpPr>
@@ -6015,17 +5329,17 @@
             <a:r>
               <a:rPr sz="900" b="1">
                 <a:solidFill>
-                  <a:srgbClr val="F9A825"/>
+                  <a:srgbClr val="C62828"/>
                 </a:solidFill>
               </a:rPr>
-              <a:t>★ Linearization point</a:t>
-            </a:r>
-          </a:p>
-        </p:txBody>
-      </p:sp>
-      <p:sp>
-        <p:nvSpPr>
-          <p:cNvPr id="65" name="TextBox 64"/>
+              <a:t>▌ blocked lifeline</a:t>
+            </a:r>
+          </a:p>
+        </p:txBody>
+      </p:sp>
+      <p:sp>
+        <p:nvSpPr>
+          <p:cNvPr id="50" name="TextBox 49"/>
           <p:cNvSpPr txBox="1"/>
           <p:nvPr/>
         </p:nvSpPr>
@@ -6052,7 +5366,7 @@
                   <a:srgbClr val="0D327D"/>
                 </a:solidFill>
               </a:rPr>
-              <a:t>17 probed stages · 3 untracked · 2 blocking spans</a:t>
+              <a:t>14 steps · 3 actors · 2 blocking points</a:t>
             </a:r>
           </a:p>
         </p:txBody>
@@ -6103,7 +5417,7 @@
                   <a:srgbClr val="E65100"/>
                 </a:solidFill>
               </a:rPr>
-              <a:t>Protocol C — Write path: in-place under cross-host LFM lock</a:t>
+              <a:t>Protocol C — Write path: in-place  update(K, V=1024 B)  under cross-host LFM lock, T=64</a:t>
             </a:r>
           </a:p>
         </p:txBody>
@@ -6136,7 +5450,7 @@
                   <a:srgbClr val="9E9E9E"/>
                 </a:solidFill>
               </a:rPr>
-              <a:t>Steps labelled by DECOMP_REC stage tag (Lock / Scan / Publish / Epoch / Unlock). Same probe tags appear in slide 6 latency table. 1 actor · no cross-host messages.</a:t>
+              <a:t>7 narrative steps · 1 actor · per-step latency in [µs]  (measured = iter-2 DECOMP_REC; KV=1024 adds C0 pool alloc+write before C1)</a:t>
             </a:r>
           </a:p>
         </p:txBody>
@@ -6190,7 +5504,7 @@
                 </a:solidFill>
               </a:rPr>
               <a:t>host 0  worker (caller)
-insert / update / remove — DECOMP_REC probes</a:t>
+insert / update / remove</a:t>
             </a:r>
           </a:p>
         </p:txBody>
@@ -6292,8 +5606,8 @@
         </p:nvSpPr>
         <p:spPr>
           <a:xfrm>
-            <a:off x="6126480" y="1920240"/>
-            <a:ext cx="5486400" cy="502920"/>
+            <a:off x="6126480" y="1691640"/>
+            <a:ext cx="5486400" cy="411480"/>
           </a:xfrm>
           <a:prstGeom prst="roundRect">
             <a:avLst/>
@@ -6345,8 +5659,8 @@
         </p:nvSpPr>
         <p:spPr>
           <a:xfrm>
-            <a:off x="6126480" y="2606040"/>
-            <a:ext cx="5486400" cy="502920"/>
+            <a:off x="6126480" y="2194560"/>
+            <a:ext cx="5486400" cy="411480"/>
           </a:xfrm>
           <a:prstGeom prst="roundRect">
             <a:avLst/>
@@ -6398,18 +5712,18 @@
         </p:nvSpPr>
         <p:spPr>
           <a:xfrm>
-            <a:off x="6126480" y="3291840"/>
-            <a:ext cx="5486400" cy="502920"/>
+            <a:off x="6126480" y="2697480"/>
+            <a:ext cx="5486400" cy="411480"/>
           </a:xfrm>
           <a:prstGeom prst="roundRect">
             <a:avLst/>
           </a:prstGeom>
           <a:solidFill>
-            <a:srgbClr val="EEEEEE"/>
+            <a:srgbClr val="C8DAFB"/>
           </a:solidFill>
           <a:ln w="15875">
             <a:solidFill>
-              <a:srgbClr val="9E9E9E"/>
+              <a:srgbClr val="154FC2"/>
             </a:solidFill>
           </a:ln>
         </p:spPr>
@@ -6433,78 +5747,25 @@
           <a:p>
             <a:pPr algn="ctr"/>
             <a:r>
-              <a:rPr sz="1000" b="0">
-                <a:solidFill>
-                  <a:srgbClr val="333333"/>
+              <a:rPr sz="1000" b="1">
+                <a:solidFill>
+                  <a:srgbClr val="0D327D"/>
                 </a:solidFill>
               </a:rPr>
-              <a:t>KvBlockPool  (optional for value_len &gt; 8 B)</a:t>
-            </a:r>
-          </a:p>
-        </p:txBody>
-      </p:sp>
-      <p:sp>
-        <p:nvSpPr>
-          <p:cNvPr id="10" name="Rounded Rectangle 9"/>
-          <p:cNvSpPr/>
-          <p:nvPr/>
-        </p:nvSpPr>
-        <p:spPr>
-          <a:xfrm>
-            <a:off x="6126480" y="3977639"/>
-            <a:ext cx="5486400" cy="502920"/>
-          </a:xfrm>
-          <a:prstGeom prst="roundRect">
-            <a:avLst/>
-          </a:prstGeom>
-          <a:solidFill>
-            <a:srgbClr val="EEEEEE"/>
-          </a:solidFill>
-          <a:ln w="15875">
-            <a:solidFill>
-              <a:srgbClr val="9E9E9E"/>
-            </a:solidFill>
-          </a:ln>
-        </p:spPr>
-        <p:style>
-          <a:lnRef idx="1">
-            <a:schemeClr val="accent1"/>
-          </a:lnRef>
-          <a:fillRef idx="3">
-            <a:schemeClr val="accent1"/>
-          </a:fillRef>
-          <a:effectRef idx="2">
-            <a:schemeClr val="accent1"/>
-          </a:effectRef>
-          <a:fontRef idx="minor">
-            <a:schemeClr val="lt1"/>
-          </a:fontRef>
-        </p:style>
-        <p:txBody>
-          <a:bodyPr rtlCol="0" anchor="ctr" lIns="38100" rIns="38100" tIns="25400" bIns="25400" wrap="square"/>
-          <a:lstStyle/>
-          <a:p>
-            <a:pPr algn="ctr"/>
-            <a:r>
-              <a:rPr sz="1000" b="0">
-                <a:solidFill>
-                  <a:srgbClr val="333333"/>
-                </a:solidFill>
-              </a:rPr>
-              <a:t>OpLog  (optional, recovery)</a:t>
+              <a:t>KvBlockPool  •  1024-B blocks (used by KV&gt;8 path)</a:t>
             </a:r>
           </a:p>
         </p:txBody>
       </p:sp>
       <p:cxnSp>
         <p:nvCxnSpPr>
-          <p:cNvPr id="11" name="Connector 10"/>
+          <p:cNvPr id="10" name="Connector 9"/>
           <p:cNvCxnSpPr/>
           <p:nvPr/>
         </p:nvCxnSpPr>
         <p:spPr>
           <a:xfrm>
-            <a:off x="2194560" y="2103120"/>
+            <a:off x="2194560" y="3291840"/>
             <a:ext cx="3931920" cy="0"/>
           </a:xfrm>
           <a:prstGeom prst="line">
@@ -6535,13 +5796,142 @@
       </p:cxnSp>
       <p:sp>
         <p:nvSpPr>
-          <p:cNvPr id="12" name="Oval 11"/>
+          <p:cNvPr id="11" name="Oval 10"/>
           <p:cNvSpPr/>
           <p:nvPr/>
         </p:nvSpPr>
         <p:spPr>
           <a:xfrm>
-            <a:off x="4014215" y="1956815"/>
+            <a:off x="4014215" y="3145536"/>
+            <a:ext cx="292608" cy="292608"/>
+          </a:xfrm>
+          <a:prstGeom prst="ellipse">
+            <a:avLst/>
+          </a:prstGeom>
+          <a:solidFill>
+            <a:srgbClr val="FFFFFF"/>
+          </a:solidFill>
+          <a:ln w="19050">
+            <a:solidFill>
+              <a:srgbClr val="E65100"/>
+            </a:solidFill>
+          </a:ln>
+        </p:spPr>
+        <p:style>
+          <a:lnRef idx="1">
+            <a:schemeClr val="accent1"/>
+          </a:lnRef>
+          <a:fillRef idx="3">
+            <a:schemeClr val="accent1"/>
+          </a:fillRef>
+          <a:effectRef idx="2">
+            <a:schemeClr val="accent1"/>
+          </a:effectRef>
+          <a:fontRef idx="minor">
+            <a:schemeClr val="lt1"/>
+          </a:fontRef>
+        </p:style>
+        <p:txBody>
+          <a:bodyPr rtlCol="0" anchor="ctr" lIns="0" rIns="0" tIns="0" bIns="0"/>
+          <a:lstStyle/>
+          <a:p>
+            <a:pPr algn="ctr"/>
+            <a:r>
+              <a:rPr sz="800" b="1">
+                <a:solidFill>
+                  <a:srgbClr val="E65100"/>
+                </a:solidFill>
+              </a:rPr>
+              <a:t>C0</a:t>
+            </a:r>
+          </a:p>
+        </p:txBody>
+      </p:sp>
+      <p:sp>
+        <p:nvSpPr>
+          <p:cNvPr id="12" name="TextBox 11"/>
+          <p:cNvSpPr txBox="1"/>
+          <p:nvPr/>
+        </p:nvSpPr>
+        <p:spPr>
+          <a:xfrm>
+            <a:off x="2697479" y="3035808"/>
+            <a:ext cx="2926080" cy="219456"/>
+          </a:xfrm>
+          <a:prstGeom prst="rect">
+            <a:avLst/>
+          </a:prstGeom>
+          <a:solidFill>
+            <a:srgbClr val="FFFFFF"/>
+          </a:solidFill>
+          <a:ln>
+            <a:noFill/>
+          </a:ln>
+        </p:spPr>
+        <p:txBody>
+          <a:bodyPr wrap="none" lIns="25400" rIns="25400" tIns="0" bIns="0">
+            <a:spAutoFit/>
+          </a:bodyPr>
+          <a:lstStyle/>
+          <a:p>
+            <a:pPr algn="l"/>
+            <a:r>
+              <a:rPr sz="850" b="1" i="0">
+                <a:solidFill>
+                  <a:srgbClr val="E65100"/>
+                </a:solidFill>
+              </a:rPr>
+              <a:t>[2.4 µs est] blockpool-&gt;alloc (CXL atomic) + blockpool-&gt;write(1024 B)</a:t>
+            </a:r>
+          </a:p>
+        </p:txBody>
+      </p:sp>
+      <p:cxnSp>
+        <p:nvCxnSpPr>
+          <p:cNvPr id="13" name="Connector 12"/>
+          <p:cNvCxnSpPr/>
+          <p:nvPr/>
+        </p:nvCxnSpPr>
+        <p:spPr>
+          <a:xfrm>
+            <a:off x="2194560" y="3657600"/>
+            <a:ext cx="3931920" cy="0"/>
+          </a:xfrm>
+          <a:prstGeom prst="line">
+            <a:avLst/>
+          </a:prstGeom>
+          <a:ln w="20320">
+            <a:solidFill>
+              <a:srgbClr val="E65100"/>
+            </a:solidFill>
+            <a:tailEnd type="triangle" w="med" h="med"/>
+            <a:prstDash val="dash"/>
+          </a:ln>
+        </p:spPr>
+        <p:style>
+          <a:lnRef idx="2">
+            <a:schemeClr val="accent1"/>
+          </a:lnRef>
+          <a:fillRef idx="0">
+            <a:schemeClr val="accent1"/>
+          </a:fillRef>
+          <a:effectRef idx="1">
+            <a:schemeClr val="accent1"/>
+          </a:effectRef>
+          <a:fontRef idx="minor">
+            <a:schemeClr val="tx1"/>
+          </a:fontRef>
+        </p:style>
+      </p:cxnSp>
+      <p:sp>
+        <p:nvSpPr>
+          <p:cNvPr id="14" name="Oval 13"/>
+          <p:cNvSpPr/>
+          <p:nvPr/>
+        </p:nvSpPr>
+        <p:spPr>
+          <a:xfrm>
+            <a:off x="4014215" y="3511296"/>
             <a:ext cx="292608" cy="292608"/>
           </a:xfrm>
           <a:prstGeom prst="ellipse">
@@ -6581,20 +5971,20 @@
                   <a:srgbClr val="333333"/>
                 </a:solidFill>
               </a:rPr>
-              <a:t>Lock</a:t>
-            </a:r>
-          </a:p>
-        </p:txBody>
-      </p:sp>
-      <p:sp>
-        <p:nvSpPr>
-          <p:cNvPr id="13" name="TextBox 12"/>
+              <a:t>C1</a:t>
+            </a:r>
+          </a:p>
+        </p:txBody>
+      </p:sp>
+      <p:sp>
+        <p:nvSpPr>
+          <p:cNvPr id="15" name="TextBox 14"/>
           <p:cNvSpPr txBox="1"/>
           <p:nvPr/>
         </p:nvSpPr>
         <p:spPr>
           <a:xfrm>
-            <a:off x="2697479" y="1847087"/>
+            <a:off x="2697479" y="3401568"/>
             <a:ext cx="2926080" cy="219456"/>
           </a:xfrm>
           <a:prstGeom prst="rect">
@@ -6620,20 +6010,20 @@
                   <a:srgbClr val="E65100"/>
                 </a:solidFill>
               </a:rPr>
-              <a:t>lock_table_.lock(idx)   LFM acquire  (cross-host blocking spin)</a:t>
+              <a:t>[25.0 µs measured avg] lock_table_.lock(idx)   LFM acquire  (T=64 contention)</a:t>
             </a:r>
           </a:p>
         </p:txBody>
       </p:sp>
       <p:cxnSp>
         <p:nvCxnSpPr>
-          <p:cNvPr id="14" name="Connector 13"/>
+          <p:cNvPr id="16" name="Connector 15"/>
           <p:cNvCxnSpPr/>
           <p:nvPr/>
         </p:nvCxnSpPr>
         <p:spPr>
           <a:xfrm>
-            <a:off x="2194560" y="2514600"/>
+            <a:off x="2194560" y="4023360"/>
             <a:ext cx="3931920" cy="0"/>
           </a:xfrm>
           <a:prstGeom prst="line">
@@ -6664,13 +6054,13 @@
       </p:cxnSp>
       <p:sp>
         <p:nvSpPr>
-          <p:cNvPr id="15" name="Oval 14"/>
+          <p:cNvPr id="17" name="Oval 16"/>
           <p:cNvSpPr/>
           <p:nvPr/>
         </p:nvSpPr>
         <p:spPr>
           <a:xfrm>
-            <a:off x="4014215" y="2368296"/>
+            <a:off x="4014215" y="3877056"/>
             <a:ext cx="292608" cy="292608"/>
           </a:xfrm>
           <a:prstGeom prst="ellipse">
@@ -6710,20 +6100,20 @@
                   <a:srgbClr val="E65100"/>
                 </a:solidFill>
               </a:rPr>
-              <a:t>Scan</a:t>
-            </a:r>
-          </a:p>
-        </p:txBody>
-      </p:sp>
-      <p:sp>
-        <p:nvSpPr>
-          <p:cNvPr id="16" name="TextBox 15"/>
+              <a:t>C2</a:t>
+            </a:r>
+          </a:p>
+        </p:txBody>
+      </p:sp>
+      <p:sp>
+        <p:nvSpPr>
+          <p:cNvPr id="18" name="TextBox 17"/>
           <p:cNvSpPr txBox="1"/>
           <p:nvPr/>
         </p:nvSpPr>
         <p:spPr>
           <a:xfrm>
-            <a:off x="2697479" y="2258568"/>
+            <a:off x="2697479" y="3767328"/>
             <a:ext cx="2926080" cy="219456"/>
           </a:xfrm>
           <a:prstGeom prst="rect">
@@ -6749,20 +6139,20 @@
                   <a:srgbClr val="E65100"/>
                 </a:solidFill>
               </a:rPr>
-              <a:t>flush_line(slots[0]); flush_line(slots[4]); mfence; scan 7 slots</a:t>
+              <a:t>[0.15 µs measured] flush_line(slots[0]); flush_line(slots[4]); mfence</a:t>
             </a:r>
           </a:p>
         </p:txBody>
       </p:sp>
       <p:cxnSp>
         <p:nvCxnSpPr>
-          <p:cNvPr id="17" name="Connector 16"/>
+          <p:cNvPr id="19" name="Connector 18"/>
           <p:cNvCxnSpPr/>
           <p:nvPr/>
         </p:nvCxnSpPr>
         <p:spPr>
           <a:xfrm>
-            <a:off x="2194560" y="2926080"/>
+            <a:off x="2194560" y="4389120"/>
             <a:ext cx="3931920" cy="0"/>
           </a:xfrm>
           <a:prstGeom prst="line">
@@ -6793,13 +6183,13 @@
       </p:cxnSp>
       <p:sp>
         <p:nvSpPr>
-          <p:cNvPr id="18" name="Oval 17"/>
+          <p:cNvPr id="20" name="Oval 19"/>
           <p:cNvSpPr/>
           <p:nvPr/>
         </p:nvSpPr>
         <p:spPr>
           <a:xfrm>
-            <a:off x="4014215" y="2779776"/>
+            <a:off x="4014215" y="4242816"/>
             <a:ext cx="292608" cy="292608"/>
           </a:xfrm>
           <a:prstGeom prst="ellipse">
@@ -6839,20 +6229,20 @@
                   <a:srgbClr val="E65100"/>
                 </a:solidFill>
               </a:rPr>
-              <a:t>Pub</a:t>
-            </a:r>
-          </a:p>
-        </p:txBody>
-      </p:sp>
-      <p:sp>
-        <p:nvSpPr>
-          <p:cNvPr id="19" name="TextBox 18"/>
+              <a:t>C3</a:t>
+            </a:r>
+          </a:p>
+        </p:txBody>
+      </p:sp>
+      <p:sp>
+        <p:nvSpPr>
+          <p:cNvPr id="21" name="TextBox 20"/>
           <p:cNvSpPr txBox="1"/>
           <p:nvPr/>
         </p:nvSpPr>
         <p:spPr>
           <a:xfrm>
-            <a:off x="2697479" y="2670048"/>
+            <a:off x="2697479" y="4133088"/>
             <a:ext cx="2926080" cy="219456"/>
           </a:xfrm>
           <a:prstGeom prst="rect">
@@ -6878,20 +6268,20 @@
                   <a:srgbClr val="E65100"/>
                 </a:solidFill>
               </a:rPr>
-              <a:t>slot.value = V; flush; sfence    (INSERT: + key flush + sfence)</a:t>
+              <a:t>[1.25 µs measured] scan 7 slots; pick target_slot</a:t>
             </a:r>
           </a:p>
         </p:txBody>
       </p:sp>
       <p:cxnSp>
         <p:nvCxnSpPr>
-          <p:cNvPr id="20" name="Connector 19"/>
+          <p:cNvPr id="22" name="Connector 21"/>
           <p:cNvCxnSpPr/>
           <p:nvPr/>
         </p:nvCxnSpPr>
         <p:spPr>
           <a:xfrm>
-            <a:off x="2194560" y="3337560"/>
+            <a:off x="2194560" y="4754880"/>
             <a:ext cx="3931920" cy="0"/>
           </a:xfrm>
           <a:prstGeom prst="line">
@@ -6922,13 +6312,142 @@
       </p:cxnSp>
       <p:sp>
         <p:nvSpPr>
-          <p:cNvPr id="21" name="Oval 20"/>
+          <p:cNvPr id="23" name="Oval 22"/>
           <p:cNvSpPr/>
           <p:nvPr/>
         </p:nvSpPr>
         <p:spPr>
           <a:xfrm>
-            <a:off x="4014215" y="3191256"/>
+            <a:off x="4014215" y="4608576"/>
+            <a:ext cx="292608" cy="292608"/>
+          </a:xfrm>
+          <a:prstGeom prst="ellipse">
+            <a:avLst/>
+          </a:prstGeom>
+          <a:solidFill>
+            <a:srgbClr val="FFFFFF"/>
+          </a:solidFill>
+          <a:ln w="19050">
+            <a:solidFill>
+              <a:srgbClr val="E65100"/>
+            </a:solidFill>
+          </a:ln>
+        </p:spPr>
+        <p:style>
+          <a:lnRef idx="1">
+            <a:schemeClr val="accent1"/>
+          </a:lnRef>
+          <a:fillRef idx="3">
+            <a:schemeClr val="accent1"/>
+          </a:fillRef>
+          <a:effectRef idx="2">
+            <a:schemeClr val="accent1"/>
+          </a:effectRef>
+          <a:fontRef idx="minor">
+            <a:schemeClr val="lt1"/>
+          </a:fontRef>
+        </p:style>
+        <p:txBody>
+          <a:bodyPr rtlCol="0" anchor="ctr" lIns="0" rIns="0" tIns="0" bIns="0"/>
+          <a:lstStyle/>
+          <a:p>
+            <a:pPr algn="ctr"/>
+            <a:r>
+              <a:rPr sz="800" b="1">
+                <a:solidFill>
+                  <a:srgbClr val="E65100"/>
+                </a:solidFill>
+              </a:rPr>
+              <a:t>C4</a:t>
+            </a:r>
+          </a:p>
+        </p:txBody>
+      </p:sp>
+      <p:sp>
+        <p:nvSpPr>
+          <p:cNvPr id="24" name="TextBox 23"/>
+          <p:cNvSpPr txBox="1"/>
+          <p:nvPr/>
+        </p:nvSpPr>
+        <p:spPr>
+          <a:xfrm>
+            <a:off x="2697479" y="4498848"/>
+            <a:ext cx="2926080" cy="219456"/>
+          </a:xfrm>
+          <a:prstGeom prst="rect">
+            <a:avLst/>
+          </a:prstGeom>
+          <a:solidFill>
+            <a:srgbClr val="FFFFFF"/>
+          </a:solidFill>
+          <a:ln>
+            <a:noFill/>
+          </a:ln>
+        </p:spPr>
+        <p:txBody>
+          <a:bodyPr wrap="none" lIns="25400" rIns="25400" tIns="0" bIns="0">
+            <a:spAutoFit/>
+          </a:bodyPr>
+          <a:lstStyle/>
+          <a:p>
+            <a:pPr algn="l"/>
+            <a:r>
+              <a:rPr sz="850" b="1" i="0">
+                <a:solidFill>
+                  <a:srgbClr val="E65100"/>
+                </a:solidFill>
+              </a:rPr>
+              <a:t>[0.02 µs measured] slot.value = blk_off; flush; sfence</a:t>
+            </a:r>
+          </a:p>
+        </p:txBody>
+      </p:sp>
+      <p:cxnSp>
+        <p:nvCxnSpPr>
+          <p:cNvPr id="25" name="Connector 24"/>
+          <p:cNvCxnSpPr/>
+          <p:nvPr/>
+        </p:nvCxnSpPr>
+        <p:spPr>
+          <a:xfrm>
+            <a:off x="2194560" y="5120640"/>
+            <a:ext cx="3931920" cy="0"/>
+          </a:xfrm>
+          <a:prstGeom prst="line">
+            <a:avLst/>
+          </a:prstGeom>
+          <a:ln w="20320">
+            <a:solidFill>
+              <a:srgbClr val="E65100"/>
+            </a:solidFill>
+            <a:tailEnd type="triangle" w="med" h="med"/>
+            <a:prstDash val="dash"/>
+          </a:ln>
+        </p:spPr>
+        <p:style>
+          <a:lnRef idx="2">
+            <a:schemeClr val="accent1"/>
+          </a:lnRef>
+          <a:fillRef idx="0">
+            <a:schemeClr val="accent1"/>
+          </a:fillRef>
+          <a:effectRef idx="1">
+            <a:schemeClr val="accent1"/>
+          </a:effectRef>
+          <a:fontRef idx="minor">
+            <a:schemeClr val="tx1"/>
+          </a:fontRef>
+        </p:style>
+      </p:cxnSp>
+      <p:sp>
+        <p:nvSpPr>
+          <p:cNvPr id="26" name="Oval 25"/>
+          <p:cNvSpPr/>
+          <p:nvPr/>
+        </p:nvSpPr>
+        <p:spPr>
+          <a:xfrm>
+            <a:off x="4014215" y="4974336"/>
             <a:ext cx="292608" cy="292608"/>
           </a:xfrm>
           <a:prstGeom prst="ellipse">
@@ -6968,20 +6487,20 @@
                   <a:srgbClr val="333333"/>
                 </a:solidFill>
               </a:rPr>
-              <a:t>Epoch</a:t>
-            </a:r>
-          </a:p>
-        </p:txBody>
-      </p:sp>
-      <p:sp>
-        <p:nvSpPr>
-          <p:cNvPr id="22" name="TextBox 21"/>
+              <a:t>C5</a:t>
+            </a:r>
+          </a:p>
+        </p:txBody>
+      </p:sp>
+      <p:sp>
+        <p:nvSpPr>
+          <p:cNvPr id="27" name="TextBox 26"/>
           <p:cNvSpPr txBox="1"/>
           <p:nvPr/>
         </p:nvSpPr>
         <p:spPr>
           <a:xfrm>
-            <a:off x="2697479" y="3081528"/>
+            <a:off x="2697479" y="4864608"/>
             <a:ext cx="2926080" cy="219456"/>
           </a:xfrm>
           <a:prstGeom prst="rect">
@@ -7007,20 +6526,20 @@
                   <a:srgbClr val="E65100"/>
                 </a:solidFill>
               </a:rPr>
-              <a:t>★ atomic_add_fetch(&amp;write_epoch, 1) + flush + sfence ★  1.4 µs CXL atomic = peer-visible commit</a:t>
+              <a:t>[4.07 µs measured] ★ atomic_add_fetch(&amp;write_epoch, 1) + flush + sfence ★  (peer-visible commit)</a:t>
             </a:r>
           </a:p>
         </p:txBody>
       </p:sp>
       <p:cxnSp>
         <p:nvCxnSpPr>
-          <p:cNvPr id="23" name="Connector 22"/>
+          <p:cNvPr id="28" name="Connector 27"/>
           <p:cNvCxnSpPr/>
           <p:nvPr/>
         </p:nvCxnSpPr>
         <p:spPr>
           <a:xfrm>
-            <a:off x="2194560" y="3749040"/>
+            <a:off x="2194560" y="5486400"/>
             <a:ext cx="3931920" cy="0"/>
           </a:xfrm>
           <a:prstGeom prst="line">
@@ -7051,13 +6570,13 @@
       </p:cxnSp>
       <p:sp>
         <p:nvSpPr>
-          <p:cNvPr id="24" name="Oval 23"/>
+          <p:cNvPr id="29" name="Oval 28"/>
           <p:cNvSpPr/>
           <p:nvPr/>
         </p:nvSpPr>
         <p:spPr>
           <a:xfrm>
-            <a:off x="4014215" y="3602736"/>
+            <a:off x="4014215" y="5340096"/>
             <a:ext cx="292608" cy="292608"/>
           </a:xfrm>
           <a:prstGeom prst="ellipse">
@@ -7097,20 +6616,20 @@
                   <a:srgbClr val="E65100"/>
                 </a:solidFill>
               </a:rPr>
-              <a:t>Unlk</a:t>
-            </a:r>
-          </a:p>
-        </p:txBody>
-      </p:sp>
-      <p:sp>
-        <p:nvSpPr>
-          <p:cNvPr id="25" name="TextBox 24"/>
+              <a:t>C6</a:t>
+            </a:r>
+          </a:p>
+        </p:txBody>
+      </p:sp>
+      <p:sp>
+        <p:nvSpPr>
+          <p:cNvPr id="30" name="TextBox 29"/>
           <p:cNvSpPr txBox="1"/>
           <p:nvPr/>
         </p:nvSpPr>
         <p:spPr>
           <a:xfrm>
-            <a:off x="2697479" y="3493008"/>
+            <a:off x="2697479" y="5230368"/>
             <a:ext cx="2926080" cy="219456"/>
           </a:xfrm>
           <a:prstGeom prst="rect">
@@ -7136,31 +6655,31 @@
                   <a:srgbClr val="E65100"/>
                 </a:solidFill>
               </a:rPr>
-              <a:t>lock_table_.unlock()   LFM release  →  return 0</a:t>
-            </a:r>
-          </a:p>
-        </p:txBody>
-      </p:sp>
-      <p:sp>
-        <p:nvSpPr>
-          <p:cNvPr id="26" name="Rounded Rectangle 25"/>
+              <a:t>[0.03 µs measured] lock_table_.unlock()   LFM release  → return 0</a:t>
+            </a:r>
+          </a:p>
+        </p:txBody>
+      </p:sp>
+      <p:sp>
+        <p:nvSpPr>
+          <p:cNvPr id="31" name="Rounded Rectangle 30"/>
           <p:cNvSpPr/>
           <p:nvPr/>
         </p:nvSpPr>
         <p:spPr>
           <a:xfrm>
-            <a:off x="274320" y="4937760"/>
-            <a:ext cx="5212080" cy="1280160"/>
+            <a:off x="274320" y="5989320"/>
+            <a:ext cx="7772400" cy="292608"/>
           </a:xfrm>
           <a:prstGeom prst="roundRect">
             <a:avLst/>
           </a:prstGeom>
           <a:solidFill>
-            <a:srgbClr val="EEEEEE"/>
+            <a:srgbClr val="FFF49C"/>
           </a:solidFill>
-          <a:ln w="7620">
+          <a:ln w="9525">
             <a:solidFill>
-              <a:srgbClr val="9E9E9E"/>
+              <a:srgbClr val="F9A825"/>
             </a:solidFill>
           </a:ln>
         </p:spPr>
@@ -7179,64 +6698,24 @@
           </a:fontRef>
         </p:style>
         <p:txBody>
-          <a:bodyPr rtlCol="0" anchor="ctr" lIns="101600" rIns="101600" tIns="63500" bIns="63500" wrap="square"/>
-          <a:lstStyle/>
-          <a:p>
-            <a:pPr algn="ctr"/>
-            <a:r>
-              <a:rPr sz="1100" b="1">
+          <a:bodyPr rtlCol="0" anchor="ctr" lIns="101600" rIns="101600" tIns="25400" bIns="25400"/>
+          <a:lstStyle/>
+          <a:p>
+            <a:pPr algn="l"/>
+            <a:r>
+              <a:rPr sz="1000" b="1">
                 <a:solidFill>
                   <a:srgbClr val="8C3200"/>
                 </a:solidFill>
               </a:rPr>
-              <a:t>Key features of Protocol C write path:</a:t>
-            </a:r>
-          </a:p>
-          <a:p>
-            <a:r>
-              <a:rPr sz="1000">
-                <a:solidFill>
-                  <a:srgbClr val="333333"/>
-                </a:solidFill>
-              </a:rPr>
-              <a:t>• 1 actor — no senders / receivers / dispatchers</a:t>
-            </a:r>
-          </a:p>
-          <a:p>
-            <a:r>
-              <a:rPr sz="1000">
-                <a:solidFill>
-                  <a:srgbClr val="333333"/>
-                </a:solidFill>
-              </a:rPr>
-              <a:t>• 0 cross-host messages — coordination via shared CXL mutex + epoch</a:t>
-            </a:r>
-          </a:p>
-          <a:p>
-            <a:r>
-              <a:rPr sz="1000">
-                <a:solidFill>
-                  <a:srgbClr val="333333"/>
-                </a:solidFill>
-              </a:rPr>
-              <a:t>• 1 linearization point — Epoch atomic bump</a:t>
-            </a:r>
-          </a:p>
-          <a:p>
-            <a:r>
-              <a:rPr sz="1000">
-                <a:solidFill>
-                  <a:srgbClr val="333333"/>
-                </a:solidFill>
-              </a:rPr>
-              <a:t>• Failure mode: hot-bucket LFM contention scales catastrophically with T</a:t>
-            </a:r>
-          </a:p>
-        </p:txBody>
-      </p:sp>
-      <p:sp>
-        <p:nvSpPr>
-          <p:cNvPr id="27" name="Rounded Rectangle 26"/>
+              <a:t>End-to-end:  KV=1024 T=64 ≈ 33 µs avg  (C1 lock = 76% · C0 + C5 = 19% · others &lt; 5%)   |   uncontested T=1 ≈ 6 µs</a:t>
+            </a:r>
+          </a:p>
+        </p:txBody>
+      </p:sp>
+      <p:sp>
+        <p:nvSpPr>
+          <p:cNvPr id="32" name="Rounded Rectangle 31"/>
           <p:cNvSpPr/>
           <p:nvPr/>
         </p:nvSpPr>
@@ -7281,7 +6760,7 @@
       </p:sp>
       <p:sp>
         <p:nvSpPr>
-          <p:cNvPr id="28" name="TextBox 27"/>
+          <p:cNvPr id="33" name="TextBox 32"/>
           <p:cNvSpPr txBox="1"/>
           <p:nvPr/>
         </p:nvSpPr>
@@ -7308,14 +6787,14 @@
                   <a:srgbClr val="E65100"/>
                 </a:solidFill>
               </a:rPr>
-              <a:t>● DECOMP_REC probe</a:t>
-            </a:r>
-          </a:p>
-        </p:txBody>
-      </p:sp>
-      <p:sp>
-        <p:nvSpPr>
-          <p:cNvPr id="29" name="TextBox 28"/>
+              <a:t>╌╌▶  C* step</a:t>
+            </a:r>
+          </a:p>
+        </p:txBody>
+      </p:sp>
+      <p:sp>
+        <p:nvSpPr>
+          <p:cNvPr id="34" name="TextBox 33"/>
           <p:cNvSpPr txBox="1"/>
           <p:nvPr/>
         </p:nvSpPr>
@@ -7342,14 +6821,14 @@
                   <a:srgbClr val="F9A825"/>
                 </a:solidFill>
               </a:rPr>
-              <a:t>★ Linearization (Epoch)</a:t>
-            </a:r>
-          </a:p>
-        </p:txBody>
-      </p:sp>
-      <p:sp>
-        <p:nvSpPr>
-          <p:cNvPr id="30" name="TextBox 29"/>
+              <a:t>★ Linearization (C5 epoch)</a:t>
+            </a:r>
+          </a:p>
+        </p:txBody>
+      </p:sp>
+      <p:sp>
+        <p:nvSpPr>
+          <p:cNvPr id="35" name="TextBox 34"/>
           <p:cNvSpPr txBox="1"/>
           <p:nvPr/>
         </p:nvSpPr>
@@ -7376,14 +6855,14 @@
                   <a:srgbClr val="C62828"/>
                 </a:solidFill>
               </a:rPr>
-              <a:t>● Cross-host blocking (Lock)</a:t>
-            </a:r>
-          </a:p>
-        </p:txBody>
-      </p:sp>
-      <p:sp>
-        <p:nvSpPr>
-          <p:cNvPr id="31" name="TextBox 30"/>
+              <a:t>● Cross-host blocking (C1 LFM)</a:t>
+            </a:r>
+          </a:p>
+        </p:txBody>
+      </p:sp>
+      <p:sp>
+        <p:nvSpPr>
+          <p:cNvPr id="36" name="TextBox 35"/>
           <p:cNvSpPr txBox="1"/>
           <p:nvPr/>
         </p:nvSpPr>
@@ -7417,7 +6896,7 @@
       </p:sp>
       <p:sp>
         <p:nvSpPr>
-          <p:cNvPr id="32" name="TextBox 31"/>
+          <p:cNvPr id="37" name="TextBox 36"/>
           <p:cNvSpPr txBox="1"/>
           <p:nvPr/>
         </p:nvSpPr>
@@ -7444,7 +6923,7 @@
                   <a:srgbClr val="8C3200"/>
                 </a:solidFill>
               </a:rPr>
-              <a:t>5 probed stages · 1 actor · 1 blocking point</a:t>
+              <a:t>7 steps · 1 actor · 1 blocking point</a:t>
             </a:r>
           </a:p>
         </p:txBody>
@@ -7495,7 +6974,7 @@
                   <a:srgbClr val="154FC2"/>
                 </a:solidFill>
               </a:rPr>
-              <a:t>Protocol A — Read path: TLS L1 → L2 → cross-host forwarder-pool-direct</a:t>
+              <a:t>Protocol A — Read path: search(K=1024 B) cross-host miss path, T=64</a:t>
             </a:r>
           </a:p>
         </p:txBody>
@@ -7528,7 +7007,7 @@
                   <a:srgbClr val="9E9E9E"/>
                 </a:solidFill>
               </a:rPr>
-              <a:t>Steps labelled by path_decomp probe tag (R0_tls_hit, R1, R2hit, R2miss, R3, R4, R6). Greyed "untracked" steps = code without PROBE_OP. Same probe tags appear in slide 7 latency table.</a:t>
+              <a:t>16 narrative steps · 4 actors · per-step latency in [µs]  (early-exit branches at A2r, A3r short-circuit the path)</a:t>
             </a:r>
           </a:p>
         </p:txBody>
@@ -7581,8 +7060,7 @@
                   <a:srgbClr val="1565C0"/>
                 </a:solidFill>
               </a:rPr>
-              <a:t>host 0  worker (caller)
-search() — R* probes</a:t>
+              <a:t>host 0  worker (caller)</a:t>
             </a:r>
           </a:p>
         </p:txBody>
@@ -7743,8 +7221,7 @@
                   <a:srgbClr val="154FC2"/>
                 </a:solidFill>
               </a:rPr>
-              <a:t>host 1  ReadReceiver (cpu 67)
-read_handler — no R* probes</a:t>
+              <a:t>host 1  ReadReceiver (cpu 67)</a:t>
             </a:r>
           </a:p>
         </p:txBody>
@@ -8031,7 +7508,7 @@
                   <a:srgbClr val="154FC2"/>
                 </a:solidFill>
               </a:rPr>
-              <a:t>R1</a:t>
+              <a:t>A1r</a:t>
             </a:r>
           </a:p>
         </p:txBody>
@@ -8070,7 +7547,7 @@
                   <a:srgbClr val="154FC2"/>
                 </a:solidFill>
               </a:rPr>
-              <a:t>enter search(K)  PROBE_OP("R1")</a:t>
+              <a:t>[0.05 µs est] enter search(K); compute bucket_idx</a:t>
             </a:r>
           </a:p>
         </p:txBody>
@@ -8083,7 +7560,7 @@
         </p:nvCxnSpPr>
         <p:spPr>
           <a:xfrm>
-            <a:off x="1280160" y="1984248"/>
+            <a:off x="1280160" y="2029967"/>
             <a:ext cx="2423160" cy="0"/>
           </a:xfrm>
           <a:prstGeom prst="line">
@@ -8091,7 +7568,7 @@
           </a:prstGeom>
           <a:ln w="20320">
             <a:solidFill>
-              <a:srgbClr val="9E9E9E"/>
+              <a:srgbClr val="154FC2"/>
             </a:solidFill>
             <a:tailEnd type="triangle" w="med" h="med"/>
           </a:ln>
@@ -8119,99 +7596,7 @@
         </p:nvSpPr>
         <p:spPr>
           <a:xfrm>
-            <a:off x="2345435" y="1837943"/>
-            <a:ext cx="292608" cy="292608"/>
-          </a:xfrm>
-          <a:prstGeom prst="ellipse">
-            <a:avLst/>
-          </a:prstGeom>
-          <a:solidFill>
-            <a:srgbClr val="FFFFFF"/>
-          </a:solidFill>
-          <a:ln w="19050">
-            <a:solidFill>
-              <a:srgbClr val="9E9E9E"/>
-            </a:solidFill>
-          </a:ln>
-        </p:spPr>
-        <p:style>
-          <a:lnRef idx="1">
-            <a:schemeClr val="accent1"/>
-          </a:lnRef>
-          <a:fillRef idx="3">
-            <a:schemeClr val="accent1"/>
-          </a:fillRef>
-          <a:effectRef idx="2">
-            <a:schemeClr val="accent1"/>
-          </a:effectRef>
-          <a:fontRef idx="minor">
-            <a:schemeClr val="lt1"/>
-          </a:fontRef>
-        </p:style>
-        <p:txBody>
-          <a:bodyPr rtlCol="0" anchor="ctr" lIns="0" rIns="0" tIns="0" bIns="0"/>
-          <a:lstStyle/>
-          <a:p>
-            <a:pPr algn="ctr"/>
-            <a:r>
-              <a:rPr sz="800" b="1">
-                <a:solidFill>
-                  <a:srgbClr val="9E9E9E"/>
-                </a:solidFill>
-              </a:rPr>
-              <a:t>—</a:t>
-            </a:r>
-          </a:p>
-        </p:txBody>
-      </p:sp>
-      <p:sp>
-        <p:nvSpPr>
-          <p:cNvPr id="18" name="TextBox 17"/>
-          <p:cNvSpPr txBox="1"/>
-          <p:nvPr/>
-        </p:nvSpPr>
-        <p:spPr>
-          <a:xfrm>
-            <a:off x="1028699" y="1728216"/>
-            <a:ext cx="2926080" cy="219456"/>
-          </a:xfrm>
-          <a:prstGeom prst="rect">
-            <a:avLst/>
-          </a:prstGeom>
-          <a:solidFill>
-            <a:srgbClr val="FFFFFF"/>
-          </a:solidFill>
-          <a:ln>
-            <a:noFill/>
-          </a:ln>
-        </p:spPr>
-        <p:txBody>
-          <a:bodyPr wrap="none" lIns="25400" rIns="25400" tIns="0" bIns="0">
-            <a:spAutoFit/>
-          </a:bodyPr>
-          <a:lstStyle/>
-          <a:p>
-            <a:pPr algn="l"/>
-            <a:r>
-              <a:rPr sz="850" b="1" i="0">
-                <a:solidFill>
-                  <a:srgbClr val="9E9E9E"/>
-                </a:solidFill>
-              </a:rPr>
-              <a:t>tls_lookup: read bucket_epoch; compare observed_epoch</a:t>
-            </a:r>
-          </a:p>
-        </p:txBody>
-      </p:sp>
-      <p:sp>
-        <p:nvSpPr>
-          <p:cNvPr id="19" name="Oval 18"/>
-          <p:cNvSpPr/>
-          <p:nvPr/>
-        </p:nvSpPr>
-        <p:spPr>
-          <a:xfrm>
-            <a:off x="1133856" y="2039112"/>
+            <a:off x="2345435" y="1883663"/>
             <a:ext cx="292608" cy="292608"/>
           </a:xfrm>
           <a:prstGeom prst="ellipse">
@@ -8251,21 +7636,21 @@
                   <a:srgbClr val="333333"/>
                 </a:solidFill>
               </a:rPr>
-              <a:t>R0_h</a:t>
-            </a:r>
-          </a:p>
-        </p:txBody>
-      </p:sp>
-      <p:sp>
-        <p:nvSpPr>
-          <p:cNvPr id="20" name="TextBox 19"/>
+              <a:t>A2r</a:t>
+            </a:r>
+          </a:p>
+        </p:txBody>
+      </p:sp>
+      <p:sp>
+        <p:nvSpPr>
+          <p:cNvPr id="18" name="TextBox 17"/>
           <p:cNvSpPr txBox="1"/>
           <p:nvPr/>
         </p:nvSpPr>
         <p:spPr>
           <a:xfrm>
-            <a:off x="1463039" y="2093976"/>
-            <a:ext cx="2743200" cy="219456"/>
+            <a:off x="1028699" y="1773935"/>
+            <a:ext cx="2926080" cy="219456"/>
           </a:xfrm>
           <a:prstGeom prst="rect">
             <a:avLst/>
@@ -8290,20 +7675,20 @@
                   <a:srgbClr val="154FC2"/>
                 </a:solidFill>
               </a:rPr>
-              <a:t>★ if TLS hit + epoch fresh: PROBE_OP("R0_tls_hit") → return ~80 ns ★</a:t>
+              <a:t>[0.05 µs est] tls_lookup: bucket_epoch.load + compare  ★ on hit: return ~80 ns (~18% of reads)</a:t>
             </a:r>
           </a:p>
         </p:txBody>
       </p:sp>
       <p:cxnSp>
         <p:nvCxnSpPr>
-          <p:cNvPr id="21" name="Connector 20"/>
+          <p:cNvPr id="19" name="Connector 18"/>
           <p:cNvCxnSpPr/>
           <p:nvPr/>
         </p:nvCxnSpPr>
         <p:spPr>
           <a:xfrm>
-            <a:off x="1280160" y="2386584"/>
+            <a:off x="1280160" y="2276856"/>
             <a:ext cx="4846320" cy="0"/>
           </a:xfrm>
           <a:prstGeom prst="line">
@@ -8311,7 +7696,7 @@
           </a:prstGeom>
           <a:ln w="20320">
             <a:solidFill>
-              <a:srgbClr val="9E9E9E"/>
+              <a:srgbClr val="154FC2"/>
             </a:solidFill>
             <a:tailEnd type="triangle" w="med" h="med"/>
           </a:ln>
@@ -8333,105 +7718,13 @@
       </p:cxnSp>
       <p:sp>
         <p:nvSpPr>
-          <p:cNvPr id="22" name="Oval 21"/>
+          <p:cNvPr id="20" name="Oval 19"/>
           <p:cNvSpPr/>
           <p:nvPr/>
         </p:nvSpPr>
         <p:spPr>
           <a:xfrm>
-            <a:off x="3557015" y="2240280"/>
-            <a:ext cx="292608" cy="292608"/>
-          </a:xfrm>
-          <a:prstGeom prst="ellipse">
-            <a:avLst/>
-          </a:prstGeom>
-          <a:solidFill>
-            <a:srgbClr val="FFFFFF"/>
-          </a:solidFill>
-          <a:ln w="19050">
-            <a:solidFill>
-              <a:srgbClr val="9E9E9E"/>
-            </a:solidFill>
-          </a:ln>
-        </p:spPr>
-        <p:style>
-          <a:lnRef idx="1">
-            <a:schemeClr val="accent1"/>
-          </a:lnRef>
-          <a:fillRef idx="3">
-            <a:schemeClr val="accent1"/>
-          </a:fillRef>
-          <a:effectRef idx="2">
-            <a:schemeClr val="accent1"/>
-          </a:effectRef>
-          <a:fontRef idx="minor">
-            <a:schemeClr val="lt1"/>
-          </a:fontRef>
-        </p:style>
-        <p:txBody>
-          <a:bodyPr rtlCol="0" anchor="ctr" lIns="0" rIns="0" tIns="0" bIns="0"/>
-          <a:lstStyle/>
-          <a:p>
-            <a:pPr algn="ctr"/>
-            <a:r>
-              <a:rPr sz="800" b="1">
-                <a:solidFill>
-                  <a:srgbClr val="9E9E9E"/>
-                </a:solidFill>
-              </a:rPr>
-              <a:t>—</a:t>
-            </a:r>
-          </a:p>
-        </p:txBody>
-      </p:sp>
-      <p:sp>
-        <p:nvSpPr>
-          <p:cNvPr id="23" name="TextBox 22"/>
-          <p:cNvSpPr txBox="1"/>
-          <p:nvPr/>
-        </p:nvSpPr>
-        <p:spPr>
-          <a:xfrm>
-            <a:off x="2240279" y="2130552"/>
-            <a:ext cx="2926080" cy="219456"/>
-          </a:xfrm>
-          <a:prstGeom prst="rect">
-            <a:avLst/>
-          </a:prstGeom>
-          <a:solidFill>
-            <a:srgbClr val="FFFFFF"/>
-          </a:solidFill>
-          <a:ln>
-            <a:noFill/>
-          </a:ln>
-        </p:spPr>
-        <p:txBody>
-          <a:bodyPr wrap="none" lIns="25400" rIns="25400" tIns="0" bIns="0">
-            <a:spAutoFit/>
-          </a:bodyPr>
-          <a:lstStyle/>
-          <a:p>
-            <a:pPr algn="l"/>
-            <a:r>
-              <a:rPr sz="850" b="1" i="0">
-                <a:solidFill>
-                  <a:srgbClr val="9E9E9E"/>
-                </a:solidFill>
-              </a:rPr>
-              <a:t>else cache_pool_lookup: seqlock CAS read of L2 entry</a:t>
-            </a:r>
-          </a:p>
-        </p:txBody>
-      </p:sp>
-      <p:sp>
-        <p:nvSpPr>
-          <p:cNvPr id="24" name="Oval 23"/>
-          <p:cNvSpPr/>
-          <p:nvPr/>
-        </p:nvSpPr>
-        <p:spPr>
-          <a:xfrm>
-            <a:off x="1133856" y="2441448"/>
+            <a:off x="3557015" y="2130551"/>
             <a:ext cx="292608" cy="292608"/>
           </a:xfrm>
           <a:prstGeom prst="ellipse">
@@ -8471,21 +7764,21 @@
                   <a:srgbClr val="333333"/>
                 </a:solidFill>
               </a:rPr>
-              <a:t>R2hit</a:t>
-            </a:r>
-          </a:p>
-        </p:txBody>
-      </p:sp>
-      <p:sp>
-        <p:nvSpPr>
-          <p:cNvPr id="25" name="TextBox 24"/>
+              <a:t>A3r</a:t>
+            </a:r>
+          </a:p>
+        </p:txBody>
+      </p:sp>
+      <p:sp>
+        <p:nvSpPr>
+          <p:cNvPr id="21" name="TextBox 20"/>
           <p:cNvSpPr txBox="1"/>
           <p:nvPr/>
         </p:nvSpPr>
         <p:spPr>
           <a:xfrm>
-            <a:off x="1463039" y="2496312"/>
-            <a:ext cx="2743200" cy="219456"/>
+            <a:off x="2240279" y="2020824"/>
+            <a:ext cx="2926080" cy="219456"/>
           </a:xfrm>
           <a:prstGeom prst="rect">
             <a:avLst/>
@@ -8510,20 +7803,20 @@
                   <a:srgbClr val="154FC2"/>
                 </a:solidFill>
               </a:rPr>
-              <a:t>★ if L2 hit: PROBE_OP("R2hit") → populate TLS → return ~5-7 µs ★</a:t>
-            </a:r>
-          </a:p>
-        </p:txBody>
-      </p:sp>
-      <p:sp>
-        <p:nvSpPr>
-          <p:cNvPr id="26" name="Oval 25"/>
+              <a:t>[0.5 µs measured R2hit/miss] cache_pool_lookup: seqlock CAS  ★ on hit: return ~7 µs (~64% of reads incl memcpy)</a:t>
+            </a:r>
+          </a:p>
+        </p:txBody>
+      </p:sp>
+      <p:sp>
+        <p:nvSpPr>
+          <p:cNvPr id="22" name="Oval 21"/>
           <p:cNvSpPr/>
           <p:nvPr/>
         </p:nvSpPr>
         <p:spPr>
           <a:xfrm>
-            <a:off x="1133856" y="2642616"/>
+            <a:off x="1133856" y="2377439"/>
             <a:ext cx="292608" cy="292608"/>
           </a:xfrm>
           <a:prstGeom prst="ellipse">
@@ -8563,20 +7856,20 @@
                   <a:srgbClr val="154FC2"/>
                 </a:solidFill>
               </a:rPr>
-              <a:t>R2miss</a:t>
-            </a:r>
-          </a:p>
-        </p:txBody>
-      </p:sp>
-      <p:sp>
-        <p:nvSpPr>
-          <p:cNvPr id="27" name="TextBox 26"/>
+              <a:t>A4r</a:t>
+            </a:r>
+          </a:p>
+        </p:txBody>
+      </p:sp>
+      <p:sp>
+        <p:nvSpPr>
+          <p:cNvPr id="23" name="TextBox 22"/>
           <p:cNvSpPr txBox="1"/>
           <p:nvPr/>
         </p:nvSpPr>
         <p:spPr>
           <a:xfrm>
-            <a:off x="1463039" y="2697480"/>
+            <a:off x="1463039" y="2432303"/>
             <a:ext cx="2743200" cy="219456"/>
           </a:xfrm>
           <a:prstGeom prst="rect">
@@ -8602,20 +7895,56 @@
                   <a:srgbClr val="154FC2"/>
                 </a:solidFill>
               </a:rPr>
-              <a:t>L2 miss → forward_read_direct  PROBE_OP("R2miss")</a:t>
-            </a:r>
-          </a:p>
-        </p:txBody>
-      </p:sp>
-      <p:sp>
-        <p:nvSpPr>
-          <p:cNvPr id="28" name="Oval 27"/>
+              <a:t>[0.1 µs est] L2 miss → my_epoch_at_send = bucket_epoch.load  (C13 tag)</a:t>
+            </a:r>
+          </a:p>
+        </p:txBody>
+      </p:sp>
+      <p:cxnSp>
+        <p:nvCxnSpPr>
+          <p:cNvPr id="24" name="Connector 23"/>
+          <p:cNvCxnSpPr/>
+          <p:nvPr/>
+        </p:nvCxnSpPr>
+        <p:spPr>
+          <a:xfrm>
+            <a:off x="1280160" y="2770632"/>
+            <a:ext cx="9966960" cy="0"/>
+          </a:xfrm>
+          <a:prstGeom prst="line">
+            <a:avLst/>
+          </a:prstGeom>
+          <a:ln w="20320">
+            <a:solidFill>
+              <a:srgbClr val="154FC2"/>
+            </a:solidFill>
+            <a:tailEnd type="triangle" w="med" h="med"/>
+          </a:ln>
+        </p:spPr>
+        <p:style>
+          <a:lnRef idx="2">
+            <a:schemeClr val="accent1"/>
+          </a:lnRef>
+          <a:fillRef idx="0">
+            <a:schemeClr val="accent1"/>
+          </a:fillRef>
+          <a:effectRef idx="1">
+            <a:schemeClr val="accent1"/>
+          </a:effectRef>
+          <a:fontRef idx="minor">
+            <a:schemeClr val="tx1"/>
+          </a:fontRef>
+        </p:style>
+      </p:cxnSp>
+      <p:sp>
+        <p:nvSpPr>
+          <p:cNvPr id="25" name="Oval 24"/>
           <p:cNvSpPr/>
           <p:nvPr/>
         </p:nvSpPr>
         <p:spPr>
           <a:xfrm>
-            <a:off x="1133856" y="2843784"/>
+            <a:off x="6117336" y="2624327"/>
             <a:ext cx="292608" cy="292608"/>
           </a:xfrm>
           <a:prstGeom prst="ellipse">
@@ -8626,7 +7955,7 @@
           </a:solidFill>
           <a:ln w="19050">
             <a:solidFill>
-              <a:srgbClr val="9E9E9E"/>
+              <a:srgbClr val="154FC2"/>
             </a:solidFill>
           </a:ln>
         </p:spPr>
@@ -8652,24 +7981,24 @@
             <a:r>
               <a:rPr sz="800" b="1">
                 <a:solidFill>
-                  <a:srgbClr val="9E9E9E"/>
+                  <a:srgbClr val="154FC2"/>
                 </a:solidFill>
               </a:rPr>
-              <a:t>—</a:t>
-            </a:r>
-          </a:p>
-        </p:txBody>
-      </p:sp>
-      <p:sp>
-        <p:nvSpPr>
-          <p:cNvPr id="29" name="TextBox 28"/>
+              <a:t>A5r</a:t>
+            </a:r>
+          </a:p>
+        </p:txBody>
+      </p:sp>
+      <p:sp>
+        <p:nvSpPr>
+          <p:cNvPr id="26" name="TextBox 25"/>
           <p:cNvSpPr txBox="1"/>
           <p:nvPr/>
         </p:nvSpPr>
         <p:spPr>
           <a:xfrm>
-            <a:off x="1463039" y="2898648"/>
-            <a:ext cx="2743200" cy="219456"/>
+            <a:off x="4800600" y="2514600"/>
+            <a:ext cx="2926080" cy="219456"/>
           </a:xfrm>
           <a:prstGeom prst="rect">
             <a:avLst/>
@@ -8691,31 +8020,31 @@
             <a:r>
               <a:rPr sz="850" b="1" i="0">
                 <a:solidFill>
-                  <a:srgbClr val="9E9E9E"/>
+                  <a:srgbClr val="154FC2"/>
                 </a:solidFill>
               </a:rPr>
-              <a:t>my_epoch_at_send = bucket_epoch.load(K)   (C13 capture)</a:t>
+              <a:t>[0.1 µs est] staging.ready_op_id = 0; flush; sfence  (clear prior)</a:t>
             </a:r>
           </a:p>
         </p:txBody>
       </p:sp>
       <p:cxnSp>
         <p:nvCxnSpPr>
-          <p:cNvPr id="30" name="Connector 29"/>
+          <p:cNvPr id="27" name="Connector 26"/>
           <p:cNvCxnSpPr/>
           <p:nvPr/>
         </p:nvCxnSpPr>
         <p:spPr>
           <a:xfrm>
-            <a:off x="1280160" y="3191256"/>
-            <a:ext cx="9966960" cy="0"/>
+            <a:off x="1280160" y="3017520"/>
+            <a:ext cx="7726680" cy="0"/>
           </a:xfrm>
           <a:prstGeom prst="line">
             <a:avLst/>
           </a:prstGeom>
           <a:ln w="20320">
             <a:solidFill>
-              <a:srgbClr val="9E9E9E"/>
+              <a:srgbClr val="154FC2"/>
             </a:solidFill>
             <a:tailEnd type="triangle" w="med" h="med"/>
           </a:ln>
@@ -8737,13 +8066,13 @@
       </p:cxnSp>
       <p:sp>
         <p:nvSpPr>
-          <p:cNvPr id="31" name="Oval 30"/>
+          <p:cNvPr id="28" name="Oval 27"/>
           <p:cNvSpPr/>
           <p:nvPr/>
         </p:nvSpPr>
         <p:spPr>
           <a:xfrm>
-            <a:off x="6117336" y="3044952"/>
+            <a:off x="4997196" y="2871215"/>
             <a:ext cx="292608" cy="292608"/>
           </a:xfrm>
           <a:prstGeom prst="ellipse">
@@ -8754,7 +8083,7 @@
           </a:solidFill>
           <a:ln w="19050">
             <a:solidFill>
-              <a:srgbClr val="9E9E9E"/>
+              <a:srgbClr val="154FC2"/>
             </a:solidFill>
           </a:ln>
         </p:spPr>
@@ -8780,23 +8109,23 @@
             <a:r>
               <a:rPr sz="800" b="1">
                 <a:solidFill>
-                  <a:srgbClr val="9E9E9E"/>
+                  <a:srgbClr val="154FC2"/>
                 </a:solidFill>
               </a:rPr>
-              <a:t>—</a:t>
-            </a:r>
-          </a:p>
-        </p:txBody>
-      </p:sp>
-      <p:sp>
-        <p:nvSpPr>
-          <p:cNvPr id="32" name="TextBox 31"/>
+              <a:t>A6r</a:t>
+            </a:r>
+          </a:p>
+        </p:txBody>
+      </p:sp>
+      <p:sp>
+        <p:nvSpPr>
+          <p:cNvPr id="29" name="TextBox 28"/>
           <p:cNvSpPr txBox="1"/>
           <p:nvPr/>
         </p:nvSpPr>
         <p:spPr>
           <a:xfrm>
-            <a:off x="4800600" y="2935224"/>
+            <a:off x="3680460" y="2761487"/>
             <a:ext cx="2926080" cy="219456"/>
           </a:xfrm>
           <a:prstGeom prst="rect">
@@ -8819,23 +8148,23 @@
             <a:r>
               <a:rPr sz="850" b="1" i="0">
                 <a:solidFill>
-                  <a:srgbClr val="9E9E9E"/>
+                  <a:srgbClr val="154FC2"/>
                 </a:solidFill>
               </a:rPr>
-              <a:t>staging.ready_op_id = 0; flush; sfence  (clear prior signal)</a:t>
+              <a:t>[1.4 µs est] ReadRing[0][1].tail.fetch_add(1)  CXL atomic</a:t>
             </a:r>
           </a:p>
         </p:txBody>
       </p:sp>
       <p:cxnSp>
         <p:nvCxnSpPr>
-          <p:cNvPr id="33" name="Connector 32"/>
+          <p:cNvPr id="30" name="Connector 29"/>
           <p:cNvCxnSpPr/>
           <p:nvPr/>
         </p:nvCxnSpPr>
         <p:spPr>
           <a:xfrm>
-            <a:off x="1280160" y="3392424"/>
+            <a:off x="1280160" y="3264408"/>
             <a:ext cx="7726680" cy="0"/>
           </a:xfrm>
           <a:prstGeom prst="line">
@@ -8843,7 +8172,7 @@
           </a:prstGeom>
           <a:ln w="20320">
             <a:solidFill>
-              <a:srgbClr val="9E9E9E"/>
+              <a:srgbClr val="154FC2"/>
             </a:solidFill>
             <a:tailEnd type="triangle" w="med" h="med"/>
           </a:ln>
@@ -8865,13 +8194,13 @@
       </p:cxnSp>
       <p:sp>
         <p:nvSpPr>
-          <p:cNvPr id="34" name="Oval 33"/>
+          <p:cNvPr id="31" name="Oval 30"/>
           <p:cNvSpPr/>
           <p:nvPr/>
         </p:nvSpPr>
         <p:spPr>
           <a:xfrm>
-            <a:off x="4997196" y="3246120"/>
+            <a:off x="4997196" y="3118103"/>
             <a:ext cx="292608" cy="292608"/>
           </a:xfrm>
           <a:prstGeom prst="ellipse">
@@ -8882,7 +8211,7 @@
           </a:solidFill>
           <a:ln w="19050">
             <a:solidFill>
-              <a:srgbClr val="9E9E9E"/>
+              <a:srgbClr val="154FC2"/>
             </a:solidFill>
           </a:ln>
         </p:spPr>
@@ -8908,23 +8237,23 @@
             <a:r>
               <a:rPr sz="800" b="1">
                 <a:solidFill>
-                  <a:srgbClr val="9E9E9E"/>
+                  <a:srgbClr val="154FC2"/>
                 </a:solidFill>
               </a:rPr>
-              <a:t>—</a:t>
-            </a:r>
-          </a:p>
-        </p:txBody>
-      </p:sp>
-      <p:sp>
-        <p:nvSpPr>
-          <p:cNvPr id="35" name="TextBox 34"/>
+              <a:t>A7r</a:t>
+            </a:r>
+          </a:p>
+        </p:txBody>
+      </p:sp>
+      <p:sp>
+        <p:nvSpPr>
+          <p:cNvPr id="32" name="TextBox 31"/>
           <p:cNvSpPr txBox="1"/>
           <p:nvPr/>
         </p:nvSpPr>
         <p:spPr>
           <a:xfrm>
-            <a:off x="3680460" y="3136392"/>
+            <a:off x="3680460" y="3008376"/>
             <a:ext cx="2926080" cy="219456"/>
           </a:xfrm>
           <a:prstGeom prst="rect">
@@ -8947,23 +8276,59 @@
             <a:r>
               <a:rPr sz="850" b="1" i="0">
                 <a:solidFill>
-                  <a:srgbClr val="9E9E9E"/>
+                  <a:srgbClr val="154FC2"/>
                 </a:solidFill>
               </a:rPr>
-              <a:t>ReadRing[0][1].tail.fetch_add(1) + write Entry + flush + sfence</a:t>
-            </a:r>
-          </a:p>
-        </p:txBody>
-      </p:sp>
-      <p:sp>
-        <p:nvSpPr>
-          <p:cNvPr id="36" name="Oval 35"/>
+              <a:t>[0.1 µs est] write ReadEntry{key, req_op_id}; flush; sfence</a:t>
+            </a:r>
+          </a:p>
+        </p:txBody>
+      </p:sp>
+      <p:cxnSp>
+        <p:nvCxnSpPr>
+          <p:cNvPr id="33" name="Connector 32"/>
+          <p:cNvCxnSpPr/>
+          <p:nvPr/>
+        </p:nvCxnSpPr>
+        <p:spPr>
+          <a:xfrm>
+            <a:off x="1280160" y="3511296"/>
+            <a:ext cx="9966960" cy="0"/>
+          </a:xfrm>
+          <a:prstGeom prst="line">
+            <a:avLst/>
+          </a:prstGeom>
+          <a:ln w="20320">
+            <a:solidFill>
+              <a:srgbClr val="154FC2"/>
+            </a:solidFill>
+            <a:tailEnd type="triangle" w="med" h="med"/>
+          </a:ln>
+        </p:spPr>
+        <p:style>
+          <a:lnRef idx="2">
+            <a:schemeClr val="accent1"/>
+          </a:lnRef>
+          <a:fillRef idx="0">
+            <a:schemeClr val="accent1"/>
+          </a:fillRef>
+          <a:effectRef idx="1">
+            <a:schemeClr val="accent1"/>
+          </a:effectRef>
+          <a:fontRef idx="minor">
+            <a:schemeClr val="tx1"/>
+          </a:fontRef>
+        </p:style>
+      </p:cxnSp>
+      <p:sp>
+        <p:nvSpPr>
+          <p:cNvPr id="34" name="Oval 33"/>
           <p:cNvSpPr/>
           <p:nvPr/>
         </p:nvSpPr>
         <p:spPr>
           <a:xfrm>
-            <a:off x="1133856" y="3447288"/>
+            <a:off x="6117336" y="3364991"/>
             <a:ext cx="292608" cy="292608"/>
           </a:xfrm>
           <a:prstGeom prst="ellipse">
@@ -9003,21 +8368,21 @@
                   <a:srgbClr val="333333"/>
                 </a:solidFill>
               </a:rPr>
-              <a:t>R3</a:t>
-            </a:r>
-          </a:p>
-        </p:txBody>
-      </p:sp>
-      <p:sp>
-        <p:nvSpPr>
-          <p:cNvPr id="37" name="TextBox 36"/>
+              <a:t>A8r</a:t>
+            </a:r>
+          </a:p>
+        </p:txBody>
+      </p:sp>
+      <p:sp>
+        <p:nvSpPr>
+          <p:cNvPr id="35" name="TextBox 34"/>
           <p:cNvSpPr txBox="1"/>
           <p:nvPr/>
         </p:nvSpPr>
         <p:spPr>
           <a:xfrm>
-            <a:off x="1463039" y="3502152"/>
-            <a:ext cx="2743200" cy="219456"/>
+            <a:off x="4800600" y="3255263"/>
+            <a:ext cx="2926080" cy="219456"/>
           </a:xfrm>
           <a:prstGeom prst="rect">
             <a:avLst/>
@@ -9042,56 +8407,20 @@
                   <a:srgbClr val="154FC2"/>
                 </a:solidFill>
               </a:rPr>
-              <a:t>PROBE_OP("R3") emitted; worker spins on staging.ready_op_id  (200 ms cap)  ← measured interval starts here</a:t>
-            </a:r>
-          </a:p>
-        </p:txBody>
-      </p:sp>
-      <p:cxnSp>
-        <p:nvCxnSpPr>
-          <p:cNvPr id="38" name="Connector 37"/>
-          <p:cNvCxnSpPr/>
-          <p:nvPr/>
-        </p:nvCxnSpPr>
-        <p:spPr>
-          <a:xfrm>
-            <a:off x="1280160" y="3794760"/>
-            <a:ext cx="7726680" cy="0"/>
-          </a:xfrm>
-          <a:prstGeom prst="line">
-            <a:avLst/>
-          </a:prstGeom>
-          <a:ln w="20320">
-            <a:solidFill>
-              <a:srgbClr val="9E9E9E"/>
-            </a:solidFill>
-            <a:tailEnd type="triangle" w="med" h="med"/>
-          </a:ln>
-        </p:spPr>
-        <p:style>
-          <a:lnRef idx="2">
-            <a:schemeClr val="accent1"/>
-          </a:lnRef>
-          <a:fillRef idx="0">
-            <a:schemeClr val="accent1"/>
-          </a:fillRef>
-          <a:effectRef idx="1">
-            <a:schemeClr val="accent1"/>
-          </a:effectRef>
-          <a:fontRef idx="minor">
-            <a:schemeClr val="tx1"/>
-          </a:fontRef>
-        </p:style>
-      </p:cxnSp>
-      <p:sp>
-        <p:nvSpPr>
-          <p:cNvPr id="39" name="Oval 38"/>
+              <a:t>[~14 µs blocked  measured R3] worker spin on staging.ready_op_id  (200 ms cap)</a:t>
+            </a:r>
+          </a:p>
+        </p:txBody>
+      </p:sp>
+      <p:sp>
+        <p:nvSpPr>
+          <p:cNvPr id="36" name="Oval 35"/>
           <p:cNvSpPr/>
           <p:nvPr/>
         </p:nvSpPr>
         <p:spPr>
           <a:xfrm>
-            <a:off x="4997196" y="3648456"/>
+            <a:off x="8860536" y="3611879"/>
             <a:ext cx="292608" cy="292608"/>
           </a:xfrm>
           <a:prstGeom prst="ellipse">
@@ -9102,7 +8431,7 @@
           </a:solidFill>
           <a:ln w="19050">
             <a:solidFill>
-              <a:srgbClr val="9E9E9E"/>
+              <a:srgbClr val="154FC2"/>
             </a:solidFill>
           </a:ln>
         </p:spPr>
@@ -9128,24 +8457,24 @@
             <a:r>
               <a:rPr sz="800" b="1">
                 <a:solidFill>
-                  <a:srgbClr val="9E9E9E"/>
+                  <a:srgbClr val="154FC2"/>
                 </a:solidFill>
               </a:rPr>
-              <a:t>—</a:t>
-            </a:r>
-          </a:p>
-        </p:txBody>
-      </p:sp>
-      <p:sp>
-        <p:nvSpPr>
-          <p:cNvPr id="40" name="TextBox 39"/>
+              <a:t>A9r</a:t>
+            </a:r>
+          </a:p>
+        </p:txBody>
+      </p:sp>
+      <p:sp>
+        <p:nvSpPr>
+          <p:cNvPr id="37" name="TextBox 36"/>
           <p:cNvSpPr txBox="1"/>
           <p:nvPr/>
         </p:nvSpPr>
         <p:spPr>
           <a:xfrm>
-            <a:off x="3680460" y="3538728"/>
-            <a:ext cx="2926080" cy="219456"/>
+            <a:off x="9189719" y="3666744"/>
+            <a:ext cx="2743200" cy="219456"/>
           </a:xfrm>
           <a:prstGeom prst="rect">
             <a:avLst/>
@@ -9167,115 +8496,23 @@
             <a:r>
               <a:rPr sz="850" b="1" i="0">
                 <a:solidFill>
-                  <a:srgbClr val="9E9E9E"/>
+                  <a:srgbClr val="154FC2"/>
                 </a:solidFill>
               </a:rPr>
-              <a:t>ReadReceiver poll observes new ReadRing tail</a:t>
-            </a:r>
-          </a:p>
-        </p:txBody>
-      </p:sp>
-      <p:sp>
-        <p:nvSpPr>
-          <p:cNvPr id="41" name="Oval 40"/>
+              <a:t>[1.5 µs est] ReadReceiver poll ReadRing.tail; reads ReadEntry</a:t>
+            </a:r>
+          </a:p>
+        </p:txBody>
+      </p:sp>
+      <p:sp>
+        <p:nvSpPr>
+          <p:cNvPr id="38" name="Oval 37"/>
           <p:cNvSpPr/>
           <p:nvPr/>
         </p:nvSpPr>
         <p:spPr>
           <a:xfrm>
-            <a:off x="8860536" y="3849624"/>
-            <a:ext cx="292608" cy="292608"/>
-          </a:xfrm>
-          <a:prstGeom prst="ellipse">
-            <a:avLst/>
-          </a:prstGeom>
-          <a:solidFill>
-            <a:srgbClr val="FFFFFF"/>
-          </a:solidFill>
-          <a:ln w="19050">
-            <a:solidFill>
-              <a:srgbClr val="9E9E9E"/>
-            </a:solidFill>
-          </a:ln>
-        </p:spPr>
-        <p:style>
-          <a:lnRef idx="1">
-            <a:schemeClr val="accent1"/>
-          </a:lnRef>
-          <a:fillRef idx="3">
-            <a:schemeClr val="accent1"/>
-          </a:fillRef>
-          <a:effectRef idx="2">
-            <a:schemeClr val="accent1"/>
-          </a:effectRef>
-          <a:fontRef idx="minor">
-            <a:schemeClr val="lt1"/>
-          </a:fontRef>
-        </p:style>
-        <p:txBody>
-          <a:bodyPr rtlCol="0" anchor="ctr" lIns="0" rIns="0" tIns="0" bIns="0"/>
-          <a:lstStyle/>
-          <a:p>
-            <a:pPr algn="ctr"/>
-            <a:r>
-              <a:rPr sz="800" b="1">
-                <a:solidFill>
-                  <a:srgbClr val="9E9E9E"/>
-                </a:solidFill>
-              </a:rPr>
-              <a:t>—</a:t>
-            </a:r>
-          </a:p>
-        </p:txBody>
-      </p:sp>
-      <p:sp>
-        <p:nvSpPr>
-          <p:cNvPr id="42" name="TextBox 41"/>
-          <p:cNvSpPr txBox="1"/>
-          <p:nvPr/>
-        </p:nvSpPr>
-        <p:spPr>
-          <a:xfrm>
-            <a:off x="9189719" y="3904488"/>
-            <a:ext cx="2743200" cy="219456"/>
-          </a:xfrm>
-          <a:prstGeom prst="rect">
-            <a:avLst/>
-          </a:prstGeom>
-          <a:solidFill>
-            <a:srgbClr val="FFFFFF"/>
-          </a:solidFill>
-          <a:ln>
-            <a:noFill/>
-          </a:ln>
-        </p:spPr>
-        <p:txBody>
-          <a:bodyPr wrap="none" lIns="25400" rIns="25400" tIns="0" bIns="0">
-            <a:spAutoFit/>
-          </a:bodyPr>
-          <a:lstStyle/>
-          <a:p>
-            <a:pPr algn="l"/>
-            <a:r>
-              <a:rPr sz="850" b="1" i="0">
-                <a:solidFill>
-                  <a:srgbClr val="9E9E9E"/>
-                </a:solidFill>
-              </a:rPr>
-              <a:t>flush bucket cachelines; scan 7 slots</a:t>
-            </a:r>
-          </a:p>
-        </p:txBody>
-      </p:sp>
-      <p:sp>
-        <p:nvSpPr>
-          <p:cNvPr id="43" name="Oval 42"/>
-          <p:cNvSpPr/>
-          <p:nvPr/>
-        </p:nvSpPr>
-        <p:spPr>
-          <a:xfrm>
-            <a:off x="8860536" y="4050792"/>
+            <a:off x="8860536" y="3858767"/>
             <a:ext cx="292608" cy="292608"/>
           </a:xfrm>
           <a:prstGeom prst="ellipse">
@@ -9315,20 +8552,20 @@
                   <a:srgbClr val="333333"/>
                 </a:solidFill>
               </a:rPr>
-              <a:t>—</a:t>
-            </a:r>
-          </a:p>
-        </p:txBody>
-      </p:sp>
-      <p:sp>
-        <p:nvSpPr>
-          <p:cNvPr id="44" name="TextBox 43"/>
+              <a:t>A10r</a:t>
+            </a:r>
+          </a:p>
+        </p:txBody>
+      </p:sp>
+      <p:sp>
+        <p:nvSpPr>
+          <p:cNvPr id="39" name="TextBox 38"/>
           <p:cNvSpPr txBox="1"/>
           <p:nvPr/>
         </p:nvSpPr>
         <p:spPr>
           <a:xfrm>
-            <a:off x="9189719" y="4105656"/>
+            <a:off x="9189719" y="3913631"/>
             <a:ext cx="2743200" cy="219456"/>
           </a:xfrm>
           <a:prstGeom prst="rect">
@@ -9351,23 +8588,23 @@
             <a:r>
               <a:rPr sz="850" b="1" i="0">
                 <a:solidFill>
-                  <a:srgbClr val="9E9E9E"/>
+                  <a:srgbClr val="154FC2"/>
                 </a:solidFill>
               </a:rPr>
-              <a:t>acquire SlotDirectoryEntry.spinlock; sharer_bitmap |= (1&lt;&lt;src)  ★ peer-visible state change</a:t>
-            </a:r>
-          </a:p>
-        </p:txBody>
-      </p:sp>
-      <p:sp>
-        <p:nvSpPr>
-          <p:cNvPr id="45" name="Oval 44"/>
+              <a:t>[5 µs est] flush bucket + scan + acquire spinlock + sharer_bitmap |= (1&lt;&lt;src)  ★ peer-visible state change</a:t>
+            </a:r>
+          </a:p>
+        </p:txBody>
+      </p:sp>
+      <p:sp>
+        <p:nvSpPr>
+          <p:cNvPr id="40" name="Oval 39"/>
           <p:cNvSpPr/>
           <p:nvPr/>
         </p:nvSpPr>
         <p:spPr>
           <a:xfrm>
-            <a:off x="8860536" y="4251960"/>
+            <a:off x="8860536" y="4105655"/>
             <a:ext cx="292608" cy="292608"/>
           </a:xfrm>
           <a:prstGeom prst="ellipse">
@@ -9378,7 +8615,7 @@
           </a:solidFill>
           <a:ln w="19050">
             <a:solidFill>
-              <a:srgbClr val="9E9E9E"/>
+              <a:srgbClr val="154FC2"/>
             </a:solidFill>
           </a:ln>
         </p:spPr>
@@ -9404,23 +8641,23 @@
             <a:r>
               <a:rPr sz="800" b="1">
                 <a:solidFill>
-                  <a:srgbClr val="9E9E9E"/>
+                  <a:srgbClr val="154FC2"/>
                 </a:solidFill>
               </a:rPr>
-              <a:t>—</a:t>
-            </a:r>
-          </a:p>
-        </p:txBody>
-      </p:sp>
-      <p:sp>
-        <p:nvSpPr>
-          <p:cNvPr id="46" name="TextBox 45"/>
+              <a:t>A11r</a:t>
+            </a:r>
+          </a:p>
+        </p:txBody>
+      </p:sp>
+      <p:sp>
+        <p:nvSpPr>
+          <p:cNvPr id="41" name="TextBox 40"/>
           <p:cNvSpPr txBox="1"/>
           <p:nvPr/>
         </p:nvSpPr>
         <p:spPr>
           <a:xfrm>
-            <a:off x="9189719" y="4306824"/>
+            <a:off x="9189719" y="4160519"/>
             <a:ext cx="2743200" cy="219456"/>
           </a:xfrm>
           <a:prstGeom prst="rect">
@@ -9443,23 +8680,23 @@
             <a:r>
               <a:rPr sz="850" b="1" i="0">
                 <a:solidFill>
-                  <a:srgbClr val="9E9E9E"/>
+                  <a:srgbClr val="154FC2"/>
                 </a:solidFill>
               </a:rPr>
-              <a:t>pool-&gt;read(blk_off, 4) → value_len; pool-&gt;read(blk_off+4, vlen)</a:t>
+              <a:t>[5 µs est] pool-&gt;read(blk_off, 4) → value_len; pool-&gt;read(blk_off+4, 1024)</a:t>
             </a:r>
           </a:p>
         </p:txBody>
       </p:sp>
       <p:cxnSp>
         <p:nvCxnSpPr>
-          <p:cNvPr id="47" name="Connector 46"/>
+          <p:cNvPr id="42" name="Connector 41"/>
           <p:cNvCxnSpPr/>
           <p:nvPr/>
         </p:nvCxnSpPr>
         <p:spPr>
           <a:xfrm>
-            <a:off x="9006840" y="4599432"/>
+            <a:off x="9006840" y="4498847"/>
             <a:ext cx="2240280" cy="0"/>
           </a:xfrm>
           <a:prstGeom prst="line">
@@ -9467,7 +8704,7 @@
           </a:prstGeom>
           <a:ln w="20320">
             <a:solidFill>
-              <a:srgbClr val="9E9E9E"/>
+              <a:srgbClr val="154FC2"/>
             </a:solidFill>
             <a:tailEnd type="triangle" w="med" h="med"/>
           </a:ln>
@@ -9489,13 +8726,13 @@
       </p:cxnSp>
       <p:sp>
         <p:nvSpPr>
-          <p:cNvPr id="48" name="Oval 47"/>
+          <p:cNvPr id="43" name="Oval 42"/>
           <p:cNvSpPr/>
           <p:nvPr/>
         </p:nvSpPr>
         <p:spPr>
           <a:xfrm>
-            <a:off x="9980676" y="4453128"/>
+            <a:off x="9980676" y="4352543"/>
             <a:ext cx="292608" cy="292608"/>
           </a:xfrm>
           <a:prstGeom prst="ellipse">
@@ -9506,7 +8743,7 @@
           </a:solidFill>
           <a:ln w="19050">
             <a:solidFill>
-              <a:srgbClr val="9E9E9E"/>
+              <a:srgbClr val="154FC2"/>
             </a:solidFill>
           </a:ln>
         </p:spPr>
@@ -9532,23 +8769,23 @@
             <a:r>
               <a:rPr sz="800" b="1">
                 <a:solidFill>
-                  <a:srgbClr val="9E9E9E"/>
+                  <a:srgbClr val="154FC2"/>
                 </a:solidFill>
               </a:rPr>
-              <a:t>—</a:t>
-            </a:r>
-          </a:p>
-        </p:txBody>
-      </p:sp>
-      <p:sp>
-        <p:nvSpPr>
-          <p:cNvPr id="49" name="TextBox 48"/>
+              <a:t>A12r</a:t>
+            </a:r>
+          </a:p>
+        </p:txBody>
+      </p:sp>
+      <p:sp>
+        <p:nvSpPr>
+          <p:cNvPr id="44" name="TextBox 43"/>
           <p:cNvSpPr txBox="1"/>
           <p:nvPr/>
         </p:nvSpPr>
         <p:spPr>
           <a:xfrm>
-            <a:off x="8663940" y="4343400"/>
+            <a:off x="8663940" y="4242815"/>
             <a:ext cx="2926080" cy="219456"/>
           </a:xfrm>
           <a:prstGeom prst="rect">
@@ -9571,23 +8808,23 @@
             <a:r>
               <a:rPr sz="850" b="1" i="0">
                 <a:solidFill>
-                  <a:srgbClr val="9E9E9E"/>
+                  <a:srgbClr val="154FC2"/>
                 </a:solidFill>
               </a:rPr>
-              <a:t>write staging.value_bytes + lookup_epoch (C13 tag) + status; flush</a:t>
+              <a:t>[1.0 µs est] write staging.value_bytes + lookup_epoch (C13 tag) + status; flush 16 CL</a:t>
             </a:r>
           </a:p>
         </p:txBody>
       </p:sp>
       <p:cxnSp>
         <p:nvCxnSpPr>
-          <p:cNvPr id="50" name="Connector 49"/>
+          <p:cNvPr id="45" name="Connector 44"/>
           <p:cNvCxnSpPr/>
           <p:nvPr/>
         </p:nvCxnSpPr>
         <p:spPr>
           <a:xfrm>
-            <a:off x="9006840" y="4800600"/>
+            <a:off x="9006840" y="4745735"/>
             <a:ext cx="2240280" cy="0"/>
           </a:xfrm>
           <a:prstGeom prst="line">
@@ -9595,7 +8832,7 @@
           </a:prstGeom>
           <a:ln w="20320">
             <a:solidFill>
-              <a:srgbClr val="9E9E9E"/>
+              <a:srgbClr val="154FC2"/>
             </a:solidFill>
             <a:tailEnd type="triangle" w="med" h="med"/>
           </a:ln>
@@ -9617,13 +8854,13 @@
       </p:cxnSp>
       <p:sp>
         <p:nvSpPr>
-          <p:cNvPr id="51" name="Oval 50"/>
+          <p:cNvPr id="46" name="Oval 45"/>
           <p:cNvSpPr/>
           <p:nvPr/>
         </p:nvSpPr>
         <p:spPr>
           <a:xfrm>
-            <a:off x="9980676" y="4654296"/>
+            <a:off x="9980676" y="4599431"/>
             <a:ext cx="292608" cy="292608"/>
           </a:xfrm>
           <a:prstGeom prst="ellipse">
@@ -9663,20 +8900,20 @@
                   <a:srgbClr val="333333"/>
                 </a:solidFill>
               </a:rPr>
-              <a:t>—</a:t>
-            </a:r>
-          </a:p>
-        </p:txBody>
-      </p:sp>
-      <p:sp>
-        <p:nvSpPr>
-          <p:cNvPr id="52" name="TextBox 51"/>
+              <a:t>A13r</a:t>
+            </a:r>
+          </a:p>
+        </p:txBody>
+      </p:sp>
+      <p:sp>
+        <p:nvSpPr>
+          <p:cNvPr id="47" name="TextBox 46"/>
           <p:cNvSpPr txBox="1"/>
           <p:nvPr/>
         </p:nvSpPr>
         <p:spPr>
           <a:xfrm>
-            <a:off x="8663940" y="4892040"/>
+            <a:off x="8663940" y="4837175"/>
             <a:ext cx="2926080" cy="219456"/>
           </a:xfrm>
           <a:prstGeom prst="rect">
@@ -9699,23 +8936,23 @@
             <a:r>
               <a:rPr sz="850" b="1" i="0">
                 <a:solidFill>
-                  <a:srgbClr val="9E9E9E"/>
+                  <a:srgbClr val="154FC2"/>
                 </a:solidFill>
               </a:rPr>
-              <a:t>staging.ready_op_id = req_op_id  ★ release-publish ★</a:t>
+              <a:t>[0.07 µs est] ★ staging.ready_op_id = req_op_id ★  (release-publish)</a:t>
             </a:r>
           </a:p>
         </p:txBody>
       </p:sp>
       <p:cxnSp>
         <p:nvCxnSpPr>
-          <p:cNvPr id="53" name="Connector 52"/>
+          <p:cNvPr id="48" name="Connector 47"/>
           <p:cNvCxnSpPr/>
           <p:nvPr/>
         </p:nvCxnSpPr>
         <p:spPr>
           <a:xfrm flipH="1">
-            <a:off x="1280160" y="5001768"/>
+            <a:off x="1280160" y="4992623"/>
             <a:ext cx="9966960" cy="0"/>
           </a:xfrm>
           <a:prstGeom prst="line">
@@ -9723,7 +8960,7 @@
           </a:prstGeom>
           <a:ln w="20320">
             <a:solidFill>
-              <a:srgbClr val="9E9E9E"/>
+              <a:srgbClr val="154FC2"/>
             </a:solidFill>
             <a:tailEnd type="triangle" w="med" h="med"/>
           </a:ln>
@@ -9745,13 +8982,13 @@
       </p:cxnSp>
       <p:sp>
         <p:nvSpPr>
-          <p:cNvPr id="54" name="Oval 53"/>
+          <p:cNvPr id="49" name="Oval 48"/>
           <p:cNvSpPr/>
           <p:nvPr/>
         </p:nvSpPr>
         <p:spPr>
           <a:xfrm>
-            <a:off x="6117336" y="4855464"/>
+            <a:off x="6117336" y="4846319"/>
             <a:ext cx="292608" cy="292608"/>
           </a:xfrm>
           <a:prstGeom prst="ellipse">
@@ -9762,7 +8999,7 @@
           </a:solidFill>
           <a:ln w="19050">
             <a:solidFill>
-              <a:srgbClr val="9E9E9E"/>
+              <a:srgbClr val="154FC2"/>
             </a:solidFill>
           </a:ln>
         </p:spPr>
@@ -9788,23 +9025,23 @@
             <a:r>
               <a:rPr sz="800" b="1">
                 <a:solidFill>
-                  <a:srgbClr val="9E9E9E"/>
+                  <a:srgbClr val="154FC2"/>
                 </a:solidFill>
               </a:rPr>
-              <a:t>—</a:t>
-            </a:r>
-          </a:p>
-        </p:txBody>
-      </p:sp>
-      <p:sp>
-        <p:nvSpPr>
-          <p:cNvPr id="55" name="TextBox 54"/>
+              <a:t>A14r</a:t>
+            </a:r>
+          </a:p>
+        </p:txBody>
+      </p:sp>
+      <p:sp>
+        <p:nvSpPr>
+          <p:cNvPr id="50" name="TextBox 49"/>
           <p:cNvSpPr txBox="1"/>
           <p:nvPr/>
         </p:nvSpPr>
         <p:spPr>
           <a:xfrm>
-            <a:off x="4800600" y="5093207"/>
+            <a:off x="4800600" y="5084063"/>
             <a:ext cx="2926080" cy="219456"/>
           </a:xfrm>
           <a:prstGeom prst="rect">
@@ -9827,24 +9064,24 @@
             <a:r>
               <a:rPr sz="850" b="1" i="0">
                 <a:solidFill>
-                  <a:srgbClr val="9E9E9E"/>
+                  <a:srgbClr val="154FC2"/>
                 </a:solidFill>
               </a:rPr>
-              <a:t>worker spin observes ready_op_id  → break</a:t>
-            </a:r>
-          </a:p>
-        </p:txBody>
-      </p:sp>
-      <p:sp>
-        <p:nvSpPr>
-          <p:cNvPr id="56" name="Rectangle 55"/>
+              <a:t>[&lt; 0.1 µs est] worker A8r spin observes ready_op_id  → break</a:t>
+            </a:r>
+          </a:p>
+        </p:txBody>
+      </p:sp>
+      <p:sp>
+        <p:nvSpPr>
+          <p:cNvPr id="51" name="Rectangle 50"/>
           <p:cNvSpPr/>
           <p:nvPr/>
         </p:nvSpPr>
         <p:spPr>
           <a:xfrm>
-            <a:off x="1197863" y="3547872"/>
-            <a:ext cx="164592" cy="1618487"/>
+            <a:off x="1197863" y="3465576"/>
+            <a:ext cx="164592" cy="1737359"/>
           </a:xfrm>
           <a:prstGeom prst="rect">
             <a:avLst/>
@@ -9882,13 +9119,105 @@
       </p:sp>
       <p:sp>
         <p:nvSpPr>
-          <p:cNvPr id="57" name="Oval 56"/>
+          <p:cNvPr id="52" name="Oval 51"/>
           <p:cNvSpPr/>
           <p:nvPr/>
         </p:nvSpPr>
         <p:spPr>
           <a:xfrm>
-            <a:off x="1133856" y="5056631"/>
+            <a:off x="1133856" y="5093207"/>
+            <a:ext cx="292608" cy="292608"/>
+          </a:xfrm>
+          <a:prstGeom prst="ellipse">
+            <a:avLst/>
+          </a:prstGeom>
+          <a:solidFill>
+            <a:srgbClr val="FFF49C"/>
+          </a:solidFill>
+          <a:ln w="19050">
+            <a:solidFill>
+              <a:srgbClr val="F9A825"/>
+            </a:solidFill>
+          </a:ln>
+        </p:spPr>
+        <p:style>
+          <a:lnRef idx="1">
+            <a:schemeClr val="accent1"/>
+          </a:lnRef>
+          <a:fillRef idx="3">
+            <a:schemeClr val="accent1"/>
+          </a:fillRef>
+          <a:effectRef idx="2">
+            <a:schemeClr val="accent1"/>
+          </a:effectRef>
+          <a:fontRef idx="minor">
+            <a:schemeClr val="lt1"/>
+          </a:fontRef>
+        </p:style>
+        <p:txBody>
+          <a:bodyPr rtlCol="0" anchor="ctr" lIns="0" rIns="0" tIns="0" bIns="0"/>
+          <a:lstStyle/>
+          <a:p>
+            <a:pPr algn="ctr"/>
+            <a:r>
+              <a:rPr sz="800" b="1">
+                <a:solidFill>
+                  <a:srgbClr val="333333"/>
+                </a:solidFill>
+              </a:rPr>
+              <a:t>A15r</a:t>
+            </a:r>
+          </a:p>
+        </p:txBody>
+      </p:sp>
+      <p:sp>
+        <p:nvSpPr>
+          <p:cNvPr id="53" name="TextBox 52"/>
+          <p:cNvSpPr txBox="1"/>
+          <p:nvPr/>
+        </p:nvSpPr>
+        <p:spPr>
+          <a:xfrm>
+            <a:off x="1463039" y="5148071"/>
+            <a:ext cx="2743200" cy="219456"/>
+          </a:xfrm>
+          <a:prstGeom prst="rect">
+            <a:avLst/>
+          </a:prstGeom>
+          <a:solidFill>
+            <a:srgbClr val="FFFFFF"/>
+          </a:solidFill>
+          <a:ln>
+            <a:noFill/>
+          </a:ln>
+        </p:spPr>
+        <p:txBody>
+          <a:bodyPr wrap="none" lIns="25400" rIns="25400" tIns="0" bIns="0">
+            <a:spAutoFit/>
+          </a:bodyPr>
+          <a:lstStyle/>
+          <a:p>
+            <a:pPr algn="l"/>
+            <a:r>
+              <a:rPr sz="850" b="1" i="0">
+                <a:solidFill>
+                  <a:srgbClr val="154FC2"/>
+                </a:solidFill>
+              </a:rPr>
+              <a:t>[0.4 µs measured R4] C13 validate: lookup_epoch &gt;= my_epoch_at_send; memcpy value_bytes from staging</a:t>
+            </a:r>
+          </a:p>
+        </p:txBody>
+      </p:sp>
+      <p:sp>
+        <p:nvSpPr>
+          <p:cNvPr id="54" name="Oval 53"/>
+          <p:cNvSpPr/>
+          <p:nvPr/>
+        </p:nvSpPr>
+        <p:spPr>
+          <a:xfrm>
+            <a:off x="1133856" y="5340095"/>
             <a:ext cx="292608" cy="292608"/>
           </a:xfrm>
           <a:prstGeom prst="ellipse">
@@ -9928,20 +9257,20 @@
                   <a:srgbClr val="154FC2"/>
                 </a:solidFill>
               </a:rPr>
-              <a:t>R4</a:t>
-            </a:r>
-          </a:p>
-        </p:txBody>
-      </p:sp>
-      <p:sp>
-        <p:nvSpPr>
-          <p:cNvPr id="58" name="TextBox 57"/>
+              <a:t>A16r</a:t>
+            </a:r>
+          </a:p>
+        </p:txBody>
+      </p:sp>
+      <p:sp>
+        <p:nvSpPr>
+          <p:cNvPr id="55" name="TextBox 54"/>
           <p:cNvSpPr txBox="1"/>
           <p:nvPr/>
         </p:nvSpPr>
         <p:spPr>
           <a:xfrm>
-            <a:off x="1463039" y="5111496"/>
+            <a:off x="1463039" y="5394959"/>
             <a:ext cx="2743200" cy="219456"/>
           </a:xfrm>
           <a:prstGeom prst="rect">
@@ -9967,31 +9296,31 @@
                   <a:srgbClr val="154FC2"/>
                 </a:solidFill>
               </a:rPr>
-              <a:t>PROBE_OP("R4") emitted; C13 validate + memcpy from staging  ← measured interval R3→R4 ≈ 14 µs</a:t>
-            </a:r>
-          </a:p>
-        </p:txBody>
-      </p:sp>
-      <p:sp>
-        <p:nvSpPr>
-          <p:cNvPr id="59" name="Oval 58"/>
+              <a:t>[1.1 µs measured R6+misc] cache_pool_insert (L2); tls_insert (L1); return</a:t>
+            </a:r>
+          </a:p>
+        </p:txBody>
+      </p:sp>
+      <p:sp>
+        <p:nvSpPr>
+          <p:cNvPr id="56" name="Rounded Rectangle 55"/>
           <p:cNvSpPr/>
           <p:nvPr/>
         </p:nvSpPr>
         <p:spPr>
           <a:xfrm>
-            <a:off x="1133856" y="5257799"/>
-            <a:ext cx="292608" cy="292608"/>
-          </a:xfrm>
-          <a:prstGeom prst="ellipse">
+            <a:off x="274320" y="5989320"/>
+            <a:ext cx="7772400" cy="292608"/>
+          </a:xfrm>
+          <a:prstGeom prst="roundRect">
             <a:avLst/>
           </a:prstGeom>
           <a:solidFill>
-            <a:srgbClr val="FFFFFF"/>
+            <a:srgbClr val="FFF49C"/>
           </a:solidFill>
-          <a:ln w="19050">
+          <a:ln w="9525">
             <a:solidFill>
-              <a:srgbClr val="9E9E9E"/>
+              <a:srgbClr val="F9A825"/>
             </a:solidFill>
           </a:ln>
         </p:spPr>
@@ -10010,155 +9339,24 @@
           </a:fontRef>
         </p:style>
         <p:txBody>
-          <a:bodyPr rtlCol="0" anchor="ctr" lIns="0" rIns="0" tIns="0" bIns="0"/>
-          <a:lstStyle/>
-          <a:p>
-            <a:pPr algn="ctr"/>
-            <a:r>
-              <a:rPr sz="800" b="1">
-                <a:solidFill>
-                  <a:srgbClr val="9E9E9E"/>
+          <a:bodyPr rtlCol="0" anchor="ctr" lIns="101600" rIns="101600" tIns="25400" bIns="25400"/>
+          <a:lstStyle/>
+          <a:p>
+            <a:pPr algn="l"/>
+            <a:r>
+              <a:rPr sz="1000" b="1">
+                <a:solidFill>
+                  <a:srgbClr val="0D327D"/>
                 </a:solidFill>
               </a:rPr>
-              <a:t>—</a:t>
-            </a:r>
-          </a:p>
-        </p:txBody>
-      </p:sp>
-      <p:sp>
-        <p:nvSpPr>
-          <p:cNvPr id="60" name="TextBox 59"/>
-          <p:cNvSpPr txBox="1"/>
-          <p:nvPr/>
-        </p:nvSpPr>
-        <p:spPr>
-          <a:xfrm>
-            <a:off x="1463039" y="5312664"/>
-            <a:ext cx="2743200" cy="219456"/>
-          </a:xfrm>
-          <a:prstGeom prst="rect">
-            <a:avLst/>
-          </a:prstGeom>
-          <a:solidFill>
-            <a:srgbClr val="FFFFFF"/>
-          </a:solidFill>
-          <a:ln>
-            <a:noFill/>
-          </a:ln>
-        </p:spPr>
-        <p:txBody>
-          <a:bodyPr wrap="none" lIns="25400" rIns="25400" tIns="0" bIns="0">
-            <a:spAutoFit/>
-          </a:bodyPr>
-          <a:lstStyle/>
-          <a:p>
-            <a:pPr algn="l"/>
-            <a:r>
-              <a:rPr sz="850" b="1" i="0">
-                <a:solidFill>
-                  <a:srgbClr val="9E9E9E"/>
-                </a:solidFill>
-              </a:rPr>
-              <a:t>cache_pool_insert (L2 seqlock CAS); tls_insert (L1)</a:t>
-            </a:r>
-          </a:p>
-        </p:txBody>
-      </p:sp>
-      <p:sp>
-        <p:nvSpPr>
-          <p:cNvPr id="61" name="Oval 60"/>
-          <p:cNvSpPr/>
-          <p:nvPr/>
-        </p:nvSpPr>
-        <p:spPr>
-          <a:xfrm>
-            <a:off x="1133856" y="5458967"/>
-            <a:ext cx="292608" cy="292608"/>
-          </a:xfrm>
-          <a:prstGeom prst="ellipse">
-            <a:avLst/>
-          </a:prstGeom>
-          <a:solidFill>
-            <a:srgbClr val="FFFFFF"/>
-          </a:solidFill>
-          <a:ln w="19050">
-            <a:solidFill>
-              <a:srgbClr val="154FC2"/>
-            </a:solidFill>
-          </a:ln>
-        </p:spPr>
-        <p:style>
-          <a:lnRef idx="1">
-            <a:schemeClr val="accent1"/>
-          </a:lnRef>
-          <a:fillRef idx="3">
-            <a:schemeClr val="accent1"/>
-          </a:fillRef>
-          <a:effectRef idx="2">
-            <a:schemeClr val="accent1"/>
-          </a:effectRef>
-          <a:fontRef idx="minor">
-            <a:schemeClr val="lt1"/>
-          </a:fontRef>
-        </p:style>
-        <p:txBody>
-          <a:bodyPr rtlCol="0" anchor="ctr" lIns="0" rIns="0" tIns="0" bIns="0"/>
-          <a:lstStyle/>
-          <a:p>
-            <a:pPr algn="ctr"/>
-            <a:r>
-              <a:rPr sz="800" b="1">
-                <a:solidFill>
-                  <a:srgbClr val="154FC2"/>
-                </a:solidFill>
-              </a:rPr>
-              <a:t>R6</a:t>
-            </a:r>
-          </a:p>
-        </p:txBody>
-      </p:sp>
-      <p:sp>
-        <p:nvSpPr>
-          <p:cNvPr id="62" name="TextBox 61"/>
-          <p:cNvSpPr txBox="1"/>
-          <p:nvPr/>
-        </p:nvSpPr>
-        <p:spPr>
-          <a:xfrm>
-            <a:off x="1463039" y="5513831"/>
-            <a:ext cx="2743200" cy="219456"/>
-          </a:xfrm>
-          <a:prstGeom prst="rect">
-            <a:avLst/>
-          </a:prstGeom>
-          <a:solidFill>
-            <a:srgbClr val="FFFFFF"/>
-          </a:solidFill>
-          <a:ln>
-            <a:noFill/>
-          </a:ln>
-        </p:spPr>
-        <p:txBody>
-          <a:bodyPr wrap="none" lIns="25400" rIns="25400" tIns="0" bIns="0">
-            <a:spAutoFit/>
-          </a:bodyPr>
-          <a:lstStyle/>
-          <a:p>
-            <a:pPr algn="l"/>
-            <a:r>
-              <a:rPr sz="850" b="1" i="0">
-                <a:solidFill>
-                  <a:srgbClr val="154FC2"/>
-                </a:solidFill>
-              </a:rPr>
-              <a:t>PROBE_OP("R6"); return 0</a:t>
-            </a:r>
-          </a:p>
-        </p:txBody>
-      </p:sp>
-      <p:sp>
-        <p:nvSpPr>
-          <p:cNvPr id="63" name="Rounded Rectangle 62"/>
+              <a:t>End-to-end:  TLS hit  ≈ 80 ns (18%)  |  L2 hit  ≈ 7 µs (64%)  |  owner-self miss  ≈ 10 µs (17%)  |  cross-host miss  ≈ 22 µs (0.2%)</a:t>
+            </a:r>
+          </a:p>
+        </p:txBody>
+      </p:sp>
+      <p:sp>
+        <p:nvSpPr>
+          <p:cNvPr id="57" name="Rounded Rectangle 56"/>
           <p:cNvSpPr/>
           <p:nvPr/>
         </p:nvSpPr>
@@ -10203,7 +9401,7 @@
       </p:sp>
       <p:sp>
         <p:nvSpPr>
-          <p:cNvPr id="64" name="TextBox 63"/>
+          <p:cNvPr id="58" name="TextBox 57"/>
           <p:cNvSpPr txBox="1"/>
           <p:nvPr/>
         </p:nvSpPr>
@@ -10230,14 +9428,14 @@
                   <a:srgbClr val="154FC2"/>
                 </a:solidFill>
               </a:rPr>
-              <a:t>● R*  probe (worker)</a:t>
-            </a:r>
-          </a:p>
-        </p:txBody>
-      </p:sp>
-      <p:sp>
-        <p:nvSpPr>
-          <p:cNvPr id="65" name="TextBox 64"/>
+              <a:t>● A*r step</a:t>
+            </a:r>
+          </a:p>
+        </p:txBody>
+      </p:sp>
+      <p:sp>
+        <p:nvSpPr>
+          <p:cNvPr id="59" name="TextBox 58"/>
           <p:cNvSpPr txBox="1"/>
           <p:nvPr/>
         </p:nvSpPr>
@@ -10261,17 +9459,17 @@
             <a:r>
               <a:rPr sz="900" b="1">
                 <a:solidFill>
-                  <a:srgbClr val="9E9E9E"/>
+                  <a:srgbClr val="C62828"/>
                 </a:solidFill>
               </a:rPr>
-              <a:t>— = no PROBE_OP</a:t>
-            </a:r>
-          </a:p>
-        </p:txBody>
-      </p:sp>
-      <p:sp>
-        <p:nvSpPr>
-          <p:cNvPr id="66" name="TextBox 65"/>
+              <a:t>● Cross-host blocking (A8r)</a:t>
+            </a:r>
+          </a:p>
+        </p:txBody>
+      </p:sp>
+      <p:sp>
+        <p:nvSpPr>
+          <p:cNvPr id="60" name="TextBox 59"/>
           <p:cNvSpPr txBox="1"/>
           <p:nvPr/>
         </p:nvSpPr>
@@ -10298,14 +9496,14 @@
                   <a:srgbClr val="F9A825"/>
                 </a:solidFill>
               </a:rPr>
-              <a:t>★ Linearization checkpoint</a:t>
-            </a:r>
-          </a:p>
-        </p:txBody>
-      </p:sp>
-      <p:sp>
-        <p:nvSpPr>
-          <p:cNvPr id="67" name="TextBox 66"/>
+              <a:t>★ Linearization (A2r, A3r, A10r, A13r, A15r)</a:t>
+            </a:r>
+          </a:p>
+        </p:txBody>
+      </p:sp>
+      <p:sp>
+        <p:nvSpPr>
+          <p:cNvPr id="61" name="TextBox 60"/>
           <p:cNvSpPr txBox="1"/>
           <p:nvPr/>
         </p:nvSpPr>
@@ -10329,17 +9527,17 @@
             <a:r>
               <a:rPr sz="900" b="1">
                 <a:solidFill>
-                  <a:srgbClr val="C62828"/>
+                  <a:srgbClr val="FFFFFF"/>
                 </a:solidFill>
               </a:rPr>
-              <a:t>● Cross-host blocking (R3)</a:t>
-            </a:r>
-          </a:p>
-        </p:txBody>
-      </p:sp>
-      <p:sp>
-        <p:nvSpPr>
-          <p:cNvPr id="68" name="TextBox 67"/>
+              <a:t>—</a:t>
+            </a:r>
+          </a:p>
+        </p:txBody>
+      </p:sp>
+      <p:sp>
+        <p:nvSpPr>
+          <p:cNvPr id="62" name="TextBox 61"/>
           <p:cNvSpPr txBox="1"/>
           <p:nvPr/>
         </p:nvSpPr>
@@ -10366,7 +9564,7 @@
                   <a:srgbClr val="0D327D"/>
                 </a:solidFill>
               </a:rPr>
-              <a:t>5 probed stages · 14 untracked · 1 blocking span</a:t>
+              <a:t>16 steps · 4 actors · 1 blocking point</a:t>
             </a:r>
           </a:p>
         </p:txBody>
@@ -10417,7 +9615,7 @@
                   <a:srgbClr val="E65100"/>
                 </a:solidFill>
               </a:rPr>
-              <a:t>Protocol C — Read path: 1 epoch load + 1 flush + scan  (LRC read-singleshot)</a:t>
+              <a:t>Protocol C — Read path: search(K=1024 B) under LRC read-singleshot, T=64</a:t>
             </a:r>
           </a:p>
         </p:txBody>
@@ -10450,7 +9648,7 @@
                   <a:srgbClr val="9E9E9E"/>
                 </a:solidFill>
               </a:rPr>
-              <a:t>No DECOMP_REC probe on search() — latency inferred from primitives. 1 actor · 0 cross-host blocking · no seqlock revalidation (LRC: value is committed at SOME instant during scan).</a:t>
+              <a:t>5 narrative steps · 1 actor · per-step latency in [µs]  (C inferred from CXL primitives — no search() DECOMP_REC probe)</a:t>
             </a:r>
           </a:p>
         </p:txBody>
@@ -10605,8 +9803,8 @@
         </p:nvSpPr>
         <p:spPr>
           <a:xfrm>
-            <a:off x="6126480" y="1920240"/>
-            <a:ext cx="5486400" cy="502920"/>
+            <a:off x="6126480" y="1691640"/>
+            <a:ext cx="5486400" cy="365760"/>
           </a:xfrm>
           <a:prstGeom prst="roundRect">
             <a:avLst/>
@@ -10658,8 +9856,8 @@
         </p:nvSpPr>
         <p:spPr>
           <a:xfrm>
-            <a:off x="6126480" y="2606040"/>
-            <a:ext cx="5486400" cy="502920"/>
+            <a:off x="6126480" y="2148840"/>
+            <a:ext cx="5486400" cy="365760"/>
           </a:xfrm>
           <a:prstGeom prst="roundRect">
             <a:avLst/>
@@ -10711,8 +9909,61 @@
         </p:nvSpPr>
         <p:spPr>
           <a:xfrm>
-            <a:off x="6126480" y="3291840"/>
-            <a:ext cx="5486400" cy="502920"/>
+            <a:off x="6126480" y="2606040"/>
+            <a:ext cx="5486400" cy="365760"/>
+          </a:xfrm>
+          <a:prstGeom prst="roundRect">
+            <a:avLst/>
+          </a:prstGeom>
+          <a:solidFill>
+            <a:srgbClr val="C8DAFB"/>
+          </a:solidFill>
+          <a:ln w="15875">
+            <a:solidFill>
+              <a:srgbClr val="154FC2"/>
+            </a:solidFill>
+          </a:ln>
+        </p:spPr>
+        <p:style>
+          <a:lnRef idx="1">
+            <a:schemeClr val="accent1"/>
+          </a:lnRef>
+          <a:fillRef idx="3">
+            <a:schemeClr val="accent1"/>
+          </a:fillRef>
+          <a:effectRef idx="2">
+            <a:schemeClr val="accent1"/>
+          </a:effectRef>
+          <a:fontRef idx="minor">
+            <a:schemeClr val="lt1"/>
+          </a:fontRef>
+        </p:style>
+        <p:txBody>
+          <a:bodyPr rtlCol="0" anchor="ctr" lIns="38100" rIns="38100" tIns="25400" bIns="25400" wrap="square"/>
+          <a:lstStyle/>
+          <a:p>
+            <a:pPr algn="ctr"/>
+            <a:r>
+              <a:rPr sz="1000" b="1">
+                <a:solidFill>
+                  <a:srgbClr val="0D327D"/>
+                </a:solidFill>
+              </a:rPr>
+              <a:t>KvBlockPool  •  1024 B block holding value bytes</a:t>
+            </a:r>
+          </a:p>
+        </p:txBody>
+      </p:sp>
+      <p:sp>
+        <p:nvSpPr>
+          <p:cNvPr id="10" name="Rounded Rectangle 9"/>
+          <p:cNvSpPr/>
+          <p:nvPr/>
+        </p:nvSpPr>
+        <p:spPr>
+          <a:xfrm>
+            <a:off x="6126480" y="3063240"/>
+            <a:ext cx="5486400" cy="365760"/>
           </a:xfrm>
           <a:prstGeom prst="roundRect">
             <a:avLst/>
@@ -10751,20 +10002,20 @@
                   <a:srgbClr val="8C3200"/>
                 </a:solidFill>
               </a:rPr>
-              <a:t>DRAM bucket cache (optional, per-process)  •  cache_buckets_[idx], cache_epoch_[idx]</a:t>
-            </a:r>
-          </a:p>
-        </p:txBody>
-      </p:sp>
-      <p:sp>
-        <p:nvSpPr>
-          <p:cNvPr id="10" name="Oval 9"/>
+              <a:t>DRAM bucket cache (optional, per-process) — cache_buckets_, cache_epoch_</a:t>
+            </a:r>
+          </a:p>
+        </p:txBody>
+      </p:sp>
+      <p:sp>
+        <p:nvSpPr>
+          <p:cNvPr id="11" name="Oval 10"/>
           <p:cNvSpPr/>
           <p:nvPr/>
         </p:nvSpPr>
         <p:spPr>
           <a:xfrm>
-            <a:off x="2048255" y="2048255"/>
+            <a:off x="2048255" y="3511296"/>
             <a:ext cx="292608" cy="292608"/>
           </a:xfrm>
           <a:prstGeom prst="ellipse">
@@ -10811,13 +10062,13 @@
       </p:sp>
       <p:sp>
         <p:nvSpPr>
-          <p:cNvPr id="11" name="TextBox 10"/>
+          <p:cNvPr id="12" name="TextBox 11"/>
           <p:cNvSpPr txBox="1"/>
           <p:nvPr/>
         </p:nvSpPr>
         <p:spPr>
           <a:xfrm>
-            <a:off x="2377440" y="2103120"/>
+            <a:off x="2377440" y="3566160"/>
             <a:ext cx="2743200" cy="219456"/>
           </a:xfrm>
           <a:prstGeom prst="rect">
@@ -10843,20 +10094,20 @@
                   <a:srgbClr val="E65100"/>
                 </a:solidFill>
               </a:rPr>
-              <a:t>bucket_idx = fnv1a_u64(K) % B; entry = lock_table_.entry(idx)</a:t>
+              <a:t>[0.015 µs est] bucket_idx = fnv1a_u64(K) % B; entry = lock_table_.entry(idx)</a:t>
             </a:r>
           </a:p>
         </p:txBody>
       </p:sp>
       <p:cxnSp>
         <p:nvCxnSpPr>
-          <p:cNvPr id="12" name="Connector 11"/>
+          <p:cNvPr id="13" name="Connector 12"/>
           <p:cNvCxnSpPr/>
           <p:nvPr/>
         </p:nvCxnSpPr>
         <p:spPr>
           <a:xfrm>
-            <a:off x="2194560" y="2697480"/>
+            <a:off x="2194560" y="4023360"/>
             <a:ext cx="3931920" cy="0"/>
           </a:xfrm>
           <a:prstGeom prst="line">
@@ -10887,13 +10138,13 @@
       </p:cxnSp>
       <p:sp>
         <p:nvSpPr>
-          <p:cNvPr id="13" name="Oval 12"/>
+          <p:cNvPr id="14" name="Oval 13"/>
           <p:cNvSpPr/>
           <p:nvPr/>
         </p:nvSpPr>
         <p:spPr>
           <a:xfrm>
-            <a:off x="4014215" y="2551176"/>
+            <a:off x="4014215" y="3877056"/>
             <a:ext cx="292608" cy="292608"/>
           </a:xfrm>
           <a:prstGeom prst="ellipse">
@@ -10940,13 +10191,13 @@
       </p:sp>
       <p:sp>
         <p:nvSpPr>
-          <p:cNvPr id="14" name="TextBox 13"/>
+          <p:cNvPr id="15" name="TextBox 14"/>
           <p:cNvSpPr txBox="1"/>
           <p:nvPr/>
         </p:nvSpPr>
         <p:spPr>
           <a:xfrm>
-            <a:off x="2697479" y="2441448"/>
+            <a:off x="2697479" y="3767328"/>
             <a:ext cx="2926080" cy="219456"/>
           </a:xfrm>
           <a:prstGeom prst="rect">
@@ -10972,20 +10223,20 @@
                   <a:srgbClr val="E65100"/>
                 </a:solidFill>
               </a:rPr>
-              <a:t>load CXL write_epoch  (1 LD-CXL cacheline)  ★ if == cached_epoch_[idx]: scan DRAM copy + return ★</a:t>
+              <a:t>[0.7 µs est] load CXL write_epoch (1 LD-CXL)  ★ if == cached_epoch_[idx]: scan DRAM copy + return</a:t>
             </a:r>
           </a:p>
         </p:txBody>
       </p:sp>
       <p:cxnSp>
         <p:nvCxnSpPr>
-          <p:cNvPr id="15" name="Connector 14"/>
+          <p:cNvPr id="16" name="Connector 15"/>
           <p:cNvCxnSpPr/>
           <p:nvPr/>
         </p:nvCxnSpPr>
         <p:spPr>
           <a:xfrm>
-            <a:off x="2194560" y="3200400"/>
+            <a:off x="2194560" y="4389120"/>
             <a:ext cx="3931920" cy="0"/>
           </a:xfrm>
           <a:prstGeom prst="line">
@@ -11016,13 +10267,13 @@
       </p:cxnSp>
       <p:sp>
         <p:nvSpPr>
-          <p:cNvPr id="16" name="Oval 15"/>
+          <p:cNvPr id="17" name="Oval 16"/>
           <p:cNvSpPr/>
           <p:nvPr/>
         </p:nvSpPr>
         <p:spPr>
           <a:xfrm>
-            <a:off x="4014215" y="3054096"/>
+            <a:off x="4014215" y="4242816"/>
             <a:ext cx="292608" cy="292608"/>
           </a:xfrm>
           <a:prstGeom prst="ellipse">
@@ -11069,13 +10320,13 @@
       </p:sp>
       <p:sp>
         <p:nvSpPr>
-          <p:cNvPr id="17" name="TextBox 16"/>
+          <p:cNvPr id="18" name="TextBox 17"/>
           <p:cNvSpPr txBox="1"/>
           <p:nvPr/>
         </p:nvSpPr>
         <p:spPr>
           <a:xfrm>
-            <a:off x="2697479" y="2944368"/>
+            <a:off x="2697479" y="4133088"/>
             <a:ext cx="2926080" cy="219456"/>
           </a:xfrm>
           <a:prstGeom prst="rect">
@@ -11101,20 +10352,20 @@
                   <a:srgbClr val="E65100"/>
                 </a:solidFill>
               </a:rPr>
-              <a:t>cache miss / cache disabled: flush_line(slots[0]) + flush_line(slots[4]) + mfence</a:t>
-            </a:r>
-          </a:p>
-        </p:txBody>
-      </p:sp>
-      <p:sp>
-        <p:nvSpPr>
-          <p:cNvPr id="18" name="Oval 17"/>
+              <a:t>[0.15 µs est] cache miss → flush_line(slots[0]) + flush_line(slots[4]) + mfence</a:t>
+            </a:r>
+          </a:p>
+        </p:txBody>
+      </p:sp>
+      <p:sp>
+        <p:nvSpPr>
+          <p:cNvPr id="19" name="Oval 18"/>
           <p:cNvSpPr/>
           <p:nvPr/>
         </p:nvSpPr>
         <p:spPr>
           <a:xfrm>
-            <a:off x="2048255" y="3557015"/>
+            <a:off x="2048255" y="4608576"/>
             <a:ext cx="292608" cy="292608"/>
           </a:xfrm>
           <a:prstGeom prst="ellipse">
@@ -11161,13 +10412,13 @@
       </p:sp>
       <p:sp>
         <p:nvSpPr>
-          <p:cNvPr id="19" name="TextBox 18"/>
+          <p:cNvPr id="20" name="TextBox 19"/>
           <p:cNvSpPr txBox="1"/>
           <p:nvPr/>
         </p:nvSpPr>
         <p:spPr>
           <a:xfrm>
-            <a:off x="2377440" y="3611879"/>
+            <a:off x="2377440" y="4663440"/>
             <a:ext cx="2743200" cy="219456"/>
           </a:xfrm>
           <a:prstGeom prst="rect">
@@ -11193,31 +10444,68 @@
                   <a:srgbClr val="E65100"/>
                 </a:solidFill>
               </a:rPr>
-              <a:t>scan 7 slots in L1 (now fresh from CXL); return value or -1   ★ NO post-scan revalidation (LRC) ★</a:t>
-            </a:r>
-          </a:p>
-        </p:txBody>
-      </p:sp>
-      <p:sp>
-        <p:nvSpPr>
-          <p:cNvPr id="20" name="Rounded Rectangle 19"/>
+              <a:t>[0.05 µs est] scan 7 slots in L1; get slot.value (= blk_off)  ★ NO post-scan revalidation (LRC)</a:t>
+            </a:r>
+          </a:p>
+        </p:txBody>
+      </p:sp>
+      <p:cxnSp>
+        <p:nvCxnSpPr>
+          <p:cNvPr id="21" name="Connector 20"/>
+          <p:cNvCxnSpPr/>
+          <p:nvPr/>
+        </p:nvCxnSpPr>
+        <p:spPr>
+          <a:xfrm>
+            <a:off x="2194560" y="5120640"/>
+            <a:ext cx="3931920" cy="0"/>
+          </a:xfrm>
+          <a:prstGeom prst="line">
+            <a:avLst/>
+          </a:prstGeom>
+          <a:ln w="20320">
+            <a:solidFill>
+              <a:srgbClr val="E65100"/>
+            </a:solidFill>
+            <a:tailEnd type="triangle" w="med" h="med"/>
+            <a:prstDash val="dash"/>
+          </a:ln>
+        </p:spPr>
+        <p:style>
+          <a:lnRef idx="2">
+            <a:schemeClr val="accent1"/>
+          </a:lnRef>
+          <a:fillRef idx="0">
+            <a:schemeClr val="accent1"/>
+          </a:fillRef>
+          <a:effectRef idx="1">
+            <a:schemeClr val="accent1"/>
+          </a:effectRef>
+          <a:fontRef idx="minor">
+            <a:schemeClr val="tx1"/>
+          </a:fontRef>
+        </p:style>
+      </p:cxnSp>
+      <p:sp>
+        <p:nvSpPr>
+          <p:cNvPr id="22" name="Oval 21"/>
           <p:cNvSpPr/>
           <p:nvPr/>
         </p:nvSpPr>
         <p:spPr>
           <a:xfrm>
-            <a:off x="274320" y="4937760"/>
-            <a:ext cx="5212080" cy="1280160"/>
-          </a:xfrm>
-          <a:prstGeom prst="roundRect">
+            <a:off x="4014215" y="4974336"/>
+            <a:ext cx="292608" cy="292608"/>
+          </a:xfrm>
+          <a:prstGeom prst="ellipse">
             <a:avLst/>
           </a:prstGeom>
           <a:solidFill>
-            <a:srgbClr val="EEEEEE"/>
+            <a:srgbClr val="FFFFFF"/>
           </a:solidFill>
-          <a:ln w="7620">
+          <a:ln w="19050">
             <a:solidFill>
-              <a:srgbClr val="9E9E9E"/>
+              <a:srgbClr val="E65100"/>
             </a:solidFill>
           </a:ln>
         </p:spPr>
@@ -11236,64 +10524,116 @@
           </a:fontRef>
         </p:style>
         <p:txBody>
-          <a:bodyPr rtlCol="0" anchor="ctr" lIns="101600" rIns="101600" tIns="63500" bIns="63500" wrap="square"/>
+          <a:bodyPr rtlCol="0" anchor="ctr" lIns="0" rIns="0" tIns="0" bIns="0"/>
           <a:lstStyle/>
           <a:p>
             <a:pPr algn="ctr"/>
             <a:r>
-              <a:rPr sz="1100" b="1">
+              <a:rPr sz="800" b="1">
+                <a:solidFill>
+                  <a:srgbClr val="E65100"/>
+                </a:solidFill>
+              </a:rPr>
+              <a:t>C5r</a:t>
+            </a:r>
+          </a:p>
+        </p:txBody>
+      </p:sp>
+      <p:sp>
+        <p:nvSpPr>
+          <p:cNvPr id="23" name="TextBox 22"/>
+          <p:cNvSpPr txBox="1"/>
+          <p:nvPr/>
+        </p:nvSpPr>
+        <p:spPr>
+          <a:xfrm>
+            <a:off x="2697479" y="4864608"/>
+            <a:ext cx="2926080" cy="219456"/>
+          </a:xfrm>
+          <a:prstGeom prst="rect">
+            <a:avLst/>
+          </a:prstGeom>
+          <a:solidFill>
+            <a:srgbClr val="FFFFFF"/>
+          </a:solidFill>
+          <a:ln>
+            <a:noFill/>
+          </a:ln>
+        </p:spPr>
+        <p:txBody>
+          <a:bodyPr wrap="none" lIns="25400" rIns="25400" tIns="0" bIns="0">
+            <a:spAutoFit/>
+          </a:bodyPr>
+          <a:lstStyle/>
+          <a:p>
+            <a:pPr algn="l"/>
+            <a:r>
+              <a:rPr sz="850" b="1" i="0">
+                <a:solidFill>
+                  <a:srgbClr val="E65100"/>
+                </a:solidFill>
+              </a:rPr>
+              <a:t>[1.0 µs est] blockpool-&gt;read(blk_off, 1024)  (16 CL × LD-CXL for value bytes)</a:t>
+            </a:r>
+          </a:p>
+        </p:txBody>
+      </p:sp>
+      <p:sp>
+        <p:nvSpPr>
+          <p:cNvPr id="24" name="Rounded Rectangle 23"/>
+          <p:cNvSpPr/>
+          <p:nvPr/>
+        </p:nvSpPr>
+        <p:spPr>
+          <a:xfrm>
+            <a:off x="274320" y="5989320"/>
+            <a:ext cx="7772400" cy="292608"/>
+          </a:xfrm>
+          <a:prstGeom prst="roundRect">
+            <a:avLst/>
+          </a:prstGeom>
+          <a:solidFill>
+            <a:srgbClr val="FFF49C"/>
+          </a:solidFill>
+          <a:ln w="9525">
+            <a:solidFill>
+              <a:srgbClr val="F9A825"/>
+            </a:solidFill>
+          </a:ln>
+        </p:spPr>
+        <p:style>
+          <a:lnRef idx="1">
+            <a:schemeClr val="accent1"/>
+          </a:lnRef>
+          <a:fillRef idx="3">
+            <a:schemeClr val="accent1"/>
+          </a:fillRef>
+          <a:effectRef idx="2">
+            <a:schemeClr val="accent1"/>
+          </a:effectRef>
+          <a:fontRef idx="minor">
+            <a:schemeClr val="lt1"/>
+          </a:fontRef>
+        </p:style>
+        <p:txBody>
+          <a:bodyPr rtlCol="0" anchor="ctr" lIns="101600" rIns="101600" tIns="25400" bIns="25400"/>
+          <a:lstStyle/>
+          <a:p>
+            <a:pPr algn="l"/>
+            <a:r>
+              <a:rPr sz="1000" b="1">
                 <a:solidFill>
                   <a:srgbClr val="8C3200"/>
                 </a:solidFill>
               </a:rPr>
-              <a:t>Key features of Protocol C read path:</a:t>
-            </a:r>
-          </a:p>
-          <a:p>
-            <a:r>
-              <a:rPr sz="1000">
-                <a:solidFill>
-                  <a:srgbClr val="333333"/>
-                </a:solidFill>
-              </a:rPr>
-              <a:t>• Reader takes NO lock — bucket lock only serializes writers</a:t>
-            </a:r>
-          </a:p>
-          <a:p>
-            <a:r>
-              <a:rPr sz="1000">
-                <a:solidFill>
-                  <a:srgbClr val="333333"/>
-                </a:solidFill>
-              </a:rPr>
-              <a:t>• Optional DRAM cache hit path: ~700 ns (1 CXL epoch load + DRAM scan)</a:t>
-            </a:r>
-          </a:p>
-          <a:p>
-            <a:r>
-              <a:rPr sz="1000">
-                <a:solidFill>
-                  <a:srgbClr val="333333"/>
-                </a:solidFill>
-              </a:rPr>
-              <a:t>• Cache-miss path: ~1 µs (2 flushes + mfence + L1 scan)</a:t>
-            </a:r>
-          </a:p>
-          <a:p>
-            <a:r>
-              <a:rPr sz="1000">
-                <a:solidFill>
-                  <a:srgbClr val="333333"/>
-                </a:solidFill>
-              </a:rPr>
-              <a:t>• LRC semantics: returned value committed at SOME instant during scan</a:t>
-            </a:r>
-          </a:p>
-        </p:txBody>
-      </p:sp>
-      <p:sp>
-        <p:nvSpPr>
-          <p:cNvPr id="21" name="Rounded Rectangle 20"/>
+              <a:t>End-to-end:  cache hit + value read  ≈ 1.7 µs  |  cache miss + value read  ≈ 1.2 µs  |  no cross-host coordination, every read pays roughly the same</a:t>
+            </a:r>
+          </a:p>
+        </p:txBody>
+      </p:sp>
+      <p:sp>
+        <p:nvSpPr>
+          <p:cNvPr id="25" name="Rounded Rectangle 24"/>
           <p:cNvSpPr/>
           <p:nvPr/>
         </p:nvSpPr>
@@ -11338,7 +10678,7 @@
       </p:sp>
       <p:sp>
         <p:nvSpPr>
-          <p:cNvPr id="22" name="TextBox 21"/>
+          <p:cNvPr id="26" name="TextBox 25"/>
           <p:cNvSpPr txBox="1"/>
           <p:nvPr/>
         </p:nvSpPr>
@@ -11365,14 +10705,14 @@
                   <a:srgbClr val="E65100"/>
                 </a:solidFill>
               </a:rPr>
-              <a:t>╌╌▶  Step arrow</a:t>
-            </a:r>
-          </a:p>
-        </p:txBody>
-      </p:sp>
-      <p:sp>
-        <p:nvSpPr>
-          <p:cNvPr id="23" name="TextBox 22"/>
+              <a:t>╌╌▶  C*r step</a:t>
+            </a:r>
+          </a:p>
+        </p:txBody>
+      </p:sp>
+      <p:sp>
+        <p:nvSpPr>
+          <p:cNvPr id="27" name="TextBox 26"/>
           <p:cNvSpPr txBox="1"/>
           <p:nvPr/>
         </p:nvSpPr>
@@ -11399,14 +10739,14 @@
                   <a:srgbClr val="F9A825"/>
                 </a:solidFill>
               </a:rPr>
-              <a:t>● Linearization checkpoint</a:t>
-            </a:r>
-          </a:p>
-        </p:txBody>
-      </p:sp>
-      <p:sp>
-        <p:nvSpPr>
-          <p:cNvPr id="24" name="TextBox 23"/>
+              <a:t>★ Linearization (C2r, C4r)</a:t>
+            </a:r>
+          </a:p>
+        </p:txBody>
+      </p:sp>
+      <p:sp>
+        <p:nvSpPr>
+          <p:cNvPr id="28" name="TextBox 27"/>
           <p:cNvSpPr txBox="1"/>
           <p:nvPr/>
         </p:nvSpPr>
@@ -11440,7 +10780,7 @@
       </p:sp>
       <p:sp>
         <p:nvSpPr>
-          <p:cNvPr id="25" name="TextBox 24"/>
+          <p:cNvPr id="29" name="TextBox 28"/>
           <p:cNvSpPr txBox="1"/>
           <p:nvPr/>
         </p:nvSpPr>
@@ -11474,7 +10814,7 @@
       </p:sp>
       <p:sp>
         <p:nvSpPr>
-          <p:cNvPr id="26" name="TextBox 25"/>
+          <p:cNvPr id="30" name="TextBox 29"/>
           <p:cNvSpPr txBox="1"/>
           <p:nvPr/>
         </p:nvSpPr>
@@ -11501,7 +10841,7 @@
                   <a:srgbClr val="8C3200"/>
                 </a:solidFill>
               </a:rPr>
-              <a:t>4 steps · 1 actor · 0 blocking points</a:t>
+              <a:t>5 steps · 1 actor · 0 blocking points</a:t>
             </a:r>
           </a:p>
         </p:txBody>

--- a/docs/protocol_a_vs_c_path_comparison.pptx
+++ b/docs/protocol_a_vs_c_path_comparison.pptx
@@ -12,6 +12,8 @@
     <p:sldId id="260" r:id="rId11"/>
     <p:sldId id="261" r:id="rId12"/>
     <p:sldId id="262" r:id="rId13"/>
+    <p:sldId id="263" r:id="rId14"/>
+    <p:sldId id="264" r:id="rId15"/>
   </p:sldIdLst>
   <p:sldSz cx="12188952" cy="6858000" type="screen4x3"/>
   <p:notesSz cx="6858000" cy="9144000"/>
@@ -9612,10 +9614,10 @@
             <a:r>
               <a:rPr sz="2200" b="1">
                 <a:solidFill>
-                  <a:srgbClr val="E65100"/>
-                </a:solidFill>
-              </a:rPr>
-              <a:t>Protocol C — Read path: search(K=1024 B) under LRC read-singleshot, T=64</a:t>
+                  <a:srgbClr val="154FC2"/>
+                </a:solidFill>
+              </a:rPr>
+              <a:t>Protocol A — Read path WITHOUT TLS L1 (pre-iter-10A view)</a:t>
             </a:r>
           </a:p>
         </p:txBody>
@@ -9648,7 +9650,7 @@
                   <a:srgbClr val="9E9E9E"/>
                 </a:solidFill>
               </a:rPr>
-              <a:t>5 narrative steps · 1 actor · per-step latency in [µs]  (C inferred from CXL primitives — no search() DECOMP_REC probe)</a:t>
+              <a:t>15 narrative steps · 3 actors · per-step latency in [µs] · every read pays the L2 seqlock CAS + ~7 µs value_bytes memcpy under T=64 MESI ping-pong (no 80 ns TLS short-circuit)</a:t>
             </a:r>
           </a:p>
         </p:txBody>
@@ -9661,8 +9663,8 @@
         </p:nvSpPr>
         <p:spPr>
           <a:xfrm>
-            <a:off x="731519" y="1188720"/>
-            <a:ext cx="2926080" cy="411480"/>
+            <a:off x="182880" y="1188720"/>
+            <a:ext cx="2560320" cy="411480"/>
           </a:xfrm>
           <a:prstGeom prst="roundRect">
             <a:avLst/>
@@ -9706,16 +9708,177 @@
           </a:p>
         </p:txBody>
       </p:sp>
+      <p:sp>
+        <p:nvSpPr>
+          <p:cNvPr id="5" name="Rounded Rectangle 4"/>
+          <p:cNvSpPr/>
+          <p:nvPr/>
+        </p:nvSpPr>
+        <p:spPr>
+          <a:xfrm>
+            <a:off x="4023360" y="1188720"/>
+            <a:ext cx="2560320" cy="411480"/>
+          </a:xfrm>
+          <a:prstGeom prst="roundRect">
+            <a:avLst/>
+          </a:prstGeom>
+          <a:solidFill>
+            <a:srgbClr val="E3F2FD"/>
+          </a:solidFill>
+          <a:ln w="15875">
+            <a:solidFill>
+              <a:srgbClr val="1565C0"/>
+            </a:solidFill>
+          </a:ln>
+        </p:spPr>
+        <p:style>
+          <a:lnRef idx="1">
+            <a:schemeClr val="accent1"/>
+          </a:lnRef>
+          <a:fillRef idx="3">
+            <a:schemeClr val="accent1"/>
+          </a:fillRef>
+          <a:effectRef idx="2">
+            <a:schemeClr val="accent1"/>
+          </a:effectRef>
+          <a:fontRef idx="minor">
+            <a:schemeClr val="lt1"/>
+          </a:fontRef>
+        </p:style>
+        <p:txBody>
+          <a:bodyPr rtlCol="0" anchor="ctr" lIns="38100" rIns="38100" tIns="25400" bIns="25400" wrap="square"/>
+          <a:lstStyle/>
+          <a:p>
+            <a:pPr algn="ctr"/>
+            <a:r>
+              <a:rPr sz="1000" b="1">
+                <a:solidFill>
+                  <a:srgbClr val="1565C0"/>
+                </a:solidFill>
+              </a:rPr>
+              <a:t>L2 KvCachePool
+(MAP_SHARED DRAM, seqlock CAS)</a:t>
+            </a:r>
+          </a:p>
+        </p:txBody>
+      </p:sp>
+      <p:sp>
+        <p:nvSpPr>
+          <p:cNvPr id="6" name="Rounded Rectangle 5"/>
+          <p:cNvSpPr/>
+          <p:nvPr/>
+        </p:nvSpPr>
+        <p:spPr>
+          <a:xfrm>
+            <a:off x="7315200" y="1188720"/>
+            <a:ext cx="2560320" cy="411480"/>
+          </a:xfrm>
+          <a:prstGeom prst="roundRect">
+            <a:avLst/>
+          </a:prstGeom>
+          <a:solidFill>
+            <a:srgbClr val="C8DAFB"/>
+          </a:solidFill>
+          <a:ln w="15875">
+            <a:solidFill>
+              <a:srgbClr val="154FC2"/>
+            </a:solidFill>
+          </a:ln>
+        </p:spPr>
+        <p:style>
+          <a:lnRef idx="1">
+            <a:schemeClr val="accent1"/>
+          </a:lnRef>
+          <a:fillRef idx="3">
+            <a:schemeClr val="accent1"/>
+          </a:fillRef>
+          <a:effectRef idx="2">
+            <a:schemeClr val="accent1"/>
+          </a:effectRef>
+          <a:fontRef idx="minor">
+            <a:schemeClr val="lt1"/>
+          </a:fontRef>
+        </p:style>
+        <p:txBody>
+          <a:bodyPr rtlCol="0" anchor="ctr" lIns="38100" rIns="38100" tIns="25400" bIns="25400" wrap="square"/>
+          <a:lstStyle/>
+          <a:p>
+            <a:pPr algn="ctr"/>
+            <a:r>
+              <a:rPr sz="1000" b="1">
+                <a:solidFill>
+                  <a:srgbClr val="154FC2"/>
+                </a:solidFill>
+              </a:rPr>
+              <a:t>host 1  ReadReceiver (cpu 67)</a:t>
+            </a:r>
+          </a:p>
+        </p:txBody>
+      </p:sp>
+      <p:sp>
+        <p:nvSpPr>
+          <p:cNvPr id="7" name="Rounded Rectangle 6"/>
+          <p:cNvSpPr/>
+          <p:nvPr/>
+        </p:nvSpPr>
+        <p:spPr>
+          <a:xfrm>
+            <a:off x="10424160" y="1188720"/>
+            <a:ext cx="1645920" cy="457200"/>
+          </a:xfrm>
+          <a:prstGeom prst="roundRect">
+            <a:avLst/>
+          </a:prstGeom>
+          <a:solidFill>
+            <a:srgbClr val="FFF3E0"/>
+          </a:solidFill>
+          <a:ln w="15875">
+            <a:solidFill>
+              <a:srgbClr val="E65100"/>
+            </a:solidFill>
+          </a:ln>
+        </p:spPr>
+        <p:style>
+          <a:lnRef idx="1">
+            <a:schemeClr val="accent1"/>
+          </a:lnRef>
+          <a:fillRef idx="3">
+            <a:schemeClr val="accent1"/>
+          </a:fillRef>
+          <a:effectRef idx="2">
+            <a:schemeClr val="accent1"/>
+          </a:effectRef>
+          <a:fontRef idx="minor">
+            <a:schemeClr val="lt1"/>
+          </a:fontRef>
+        </p:style>
+        <p:txBody>
+          <a:bodyPr rtlCol="0" anchor="ctr" lIns="38100" rIns="38100" tIns="25400" bIns="25400" wrap="square"/>
+          <a:lstStyle/>
+          <a:p>
+            <a:pPr algn="ctr"/>
+            <a:r>
+              <a:rPr sz="900" b="1">
+                <a:solidFill>
+                  <a:srgbClr val="8C3200"/>
+                </a:solidFill>
+              </a:rPr>
+              <a:t>ReadStaging[0][1]
+(CXL arena)</a:t>
+            </a:r>
+          </a:p>
+        </p:txBody>
+      </p:sp>
       <p:cxnSp>
         <p:nvCxnSpPr>
-          <p:cNvPr id="5" name="Connector 4"/>
+          <p:cNvPr id="8" name="Connector 7"/>
           <p:cNvCxnSpPr/>
           <p:nvPr/>
         </p:nvCxnSpPr>
         <p:spPr>
           <a:xfrm>
-            <a:off x="2194560" y="1600200"/>
-            <a:ext cx="0" cy="4389120"/>
+            <a:off x="1463040" y="1691640"/>
+            <a:ext cx="0" cy="4297680"/>
           </a:xfrm>
           <a:prstGeom prst="line">
             <a:avLst/>
@@ -9742,382 +9905,24 @@
           </a:fontRef>
         </p:style>
       </p:cxnSp>
-      <p:sp>
-        <p:nvSpPr>
-          <p:cNvPr id="6" name="Rounded Rectangle 5"/>
-          <p:cNvSpPr/>
-          <p:nvPr/>
-        </p:nvSpPr>
-        <p:spPr>
-          <a:xfrm>
-            <a:off x="5943600" y="1188720"/>
-            <a:ext cx="5852160" cy="411480"/>
-          </a:xfrm>
-          <a:prstGeom prst="roundRect">
-            <a:avLst/>
-          </a:prstGeom>
-          <a:solidFill>
-            <a:srgbClr val="FFF3E0"/>
-          </a:solidFill>
-          <a:ln w="15875">
-            <a:solidFill>
-              <a:srgbClr val="E65100"/>
-            </a:solidFill>
-          </a:ln>
-        </p:spPr>
-        <p:style>
-          <a:lnRef idx="1">
-            <a:schemeClr val="accent1"/>
-          </a:lnRef>
-          <a:fillRef idx="3">
-            <a:schemeClr val="accent1"/>
-          </a:fillRef>
-          <a:effectRef idx="2">
-            <a:schemeClr val="accent1"/>
-          </a:effectRef>
-          <a:fontRef idx="minor">
-            <a:schemeClr val="lt1"/>
-          </a:fontRef>
-        </p:style>
-        <p:txBody>
-          <a:bodyPr rtlCol="0" anchor="ctr" lIns="38100" rIns="38100" tIns="25400" bIns="25400" wrap="square"/>
-          <a:lstStyle/>
-          <a:p>
-            <a:pPr algn="ctr"/>
-            <a:r>
-              <a:rPr sz="1100" b="1">
-                <a:solidFill>
-                  <a:srgbClr val="8C3200"/>
-                </a:solidFill>
-              </a:rPr>
-              <a:t>CXL state read on the search path</a:t>
-            </a:r>
-          </a:p>
-        </p:txBody>
-      </p:sp>
-      <p:sp>
-        <p:nvSpPr>
-          <p:cNvPr id="7" name="Rounded Rectangle 6"/>
-          <p:cNvSpPr/>
-          <p:nvPr/>
-        </p:nvSpPr>
-        <p:spPr>
-          <a:xfrm>
-            <a:off x="6126480" y="1691640"/>
-            <a:ext cx="5486400" cy="365760"/>
-          </a:xfrm>
-          <a:prstGeom prst="roundRect">
-            <a:avLst/>
-          </a:prstGeom>
-          <a:solidFill>
-            <a:srgbClr val="C8DAFB"/>
-          </a:solidFill>
-          <a:ln w="15875">
-            <a:solidFill>
-              <a:srgbClr val="154FC2"/>
-            </a:solidFill>
-          </a:ln>
-        </p:spPr>
-        <p:style>
-          <a:lnRef idx="1">
-            <a:schemeClr val="accent1"/>
-          </a:lnRef>
-          <a:fillRef idx="3">
-            <a:schemeClr val="accent1"/>
-          </a:fillRef>
-          <a:effectRef idx="2">
-            <a:schemeClr val="accent1"/>
-          </a:effectRef>
-          <a:fontRef idx="minor">
-            <a:schemeClr val="lt1"/>
-          </a:fontRef>
-        </p:style>
-        <p:txBody>
-          <a:bodyPr rtlCol="0" anchor="ctr" lIns="38100" rIns="38100" tIns="25400" bIns="25400" wrap="square"/>
-          <a:lstStyle/>
-          <a:p>
-            <a:pPr algn="ctr"/>
-            <a:r>
-              <a:rPr sz="1000" b="1">
-                <a:solidFill>
-                  <a:srgbClr val="0D327D"/>
-                </a:solidFill>
-              </a:rPr>
-              <a:t>BucketLockEntry.write_epoch (cacheline_u64) — read seqlock tag</a:t>
-            </a:r>
-          </a:p>
-        </p:txBody>
-      </p:sp>
-      <p:sp>
-        <p:nvSpPr>
-          <p:cNvPr id="8" name="Rounded Rectangle 7"/>
-          <p:cNvSpPr/>
-          <p:nvPr/>
-        </p:nvSpPr>
-        <p:spPr>
-          <a:xfrm>
-            <a:off x="6126480" y="2148840"/>
-            <a:ext cx="5486400" cy="365760"/>
-          </a:xfrm>
-          <a:prstGeom prst="roundRect">
-            <a:avLst/>
-          </a:prstGeom>
-          <a:solidFill>
-            <a:srgbClr val="C8DAFB"/>
-          </a:solidFill>
-          <a:ln w="15875">
-            <a:solidFill>
-              <a:srgbClr val="154FC2"/>
-            </a:solidFill>
-          </a:ln>
-        </p:spPr>
-        <p:style>
-          <a:lnRef idx="1">
-            <a:schemeClr val="accent1"/>
-          </a:lnRef>
-          <a:fillRef idx="3">
-            <a:schemeClr val="accent1"/>
-          </a:fillRef>
-          <a:effectRef idx="2">
-            <a:schemeClr val="accent1"/>
-          </a:effectRef>
-          <a:fontRef idx="minor">
-            <a:schemeClr val="lt1"/>
-          </a:fontRef>
-        </p:style>
-        <p:txBody>
-          <a:bodyPr rtlCol="0" anchor="ctr" lIns="38100" rIns="38100" tIns="25400" bIns="25400" wrap="square"/>
-          <a:lstStyle/>
-          <a:p>
-            <a:pPr algn="ctr"/>
-            <a:r>
-              <a:rPr sz="1000" b="1">
-                <a:solidFill>
-                  <a:srgbClr val="0D327D"/>
-                </a:solidFill>
-              </a:rPr>
-              <a:t>CxlKvBucket  •  flush 2 cachelines, scan 7 slots in L1</a:t>
-            </a:r>
-          </a:p>
-        </p:txBody>
-      </p:sp>
-      <p:sp>
-        <p:nvSpPr>
-          <p:cNvPr id="9" name="Rounded Rectangle 8"/>
-          <p:cNvSpPr/>
-          <p:nvPr/>
-        </p:nvSpPr>
-        <p:spPr>
-          <a:xfrm>
-            <a:off x="6126480" y="2606040"/>
-            <a:ext cx="5486400" cy="365760"/>
-          </a:xfrm>
-          <a:prstGeom prst="roundRect">
-            <a:avLst/>
-          </a:prstGeom>
-          <a:solidFill>
-            <a:srgbClr val="C8DAFB"/>
-          </a:solidFill>
-          <a:ln w="15875">
-            <a:solidFill>
-              <a:srgbClr val="154FC2"/>
-            </a:solidFill>
-          </a:ln>
-        </p:spPr>
-        <p:style>
-          <a:lnRef idx="1">
-            <a:schemeClr val="accent1"/>
-          </a:lnRef>
-          <a:fillRef idx="3">
-            <a:schemeClr val="accent1"/>
-          </a:fillRef>
-          <a:effectRef idx="2">
-            <a:schemeClr val="accent1"/>
-          </a:effectRef>
-          <a:fontRef idx="minor">
-            <a:schemeClr val="lt1"/>
-          </a:fontRef>
-        </p:style>
-        <p:txBody>
-          <a:bodyPr rtlCol="0" anchor="ctr" lIns="38100" rIns="38100" tIns="25400" bIns="25400" wrap="square"/>
-          <a:lstStyle/>
-          <a:p>
-            <a:pPr algn="ctr"/>
-            <a:r>
-              <a:rPr sz="1000" b="1">
-                <a:solidFill>
-                  <a:srgbClr val="0D327D"/>
-                </a:solidFill>
-              </a:rPr>
-              <a:t>KvBlockPool  •  1024 B block holding value bytes</a:t>
-            </a:r>
-          </a:p>
-        </p:txBody>
-      </p:sp>
-      <p:sp>
-        <p:nvSpPr>
-          <p:cNvPr id="10" name="Rounded Rectangle 9"/>
-          <p:cNvSpPr/>
-          <p:nvPr/>
-        </p:nvSpPr>
-        <p:spPr>
-          <a:xfrm>
-            <a:off x="6126480" y="3063240"/>
-            <a:ext cx="5486400" cy="365760"/>
-          </a:xfrm>
-          <a:prstGeom prst="roundRect">
-            <a:avLst/>
-          </a:prstGeom>
-          <a:solidFill>
-            <a:srgbClr val="FFE0B2"/>
-          </a:solidFill>
-          <a:ln w="15875">
-            <a:solidFill>
-              <a:srgbClr val="E65100"/>
-            </a:solidFill>
-          </a:ln>
-        </p:spPr>
-        <p:style>
-          <a:lnRef idx="1">
-            <a:schemeClr val="accent1"/>
-          </a:lnRef>
-          <a:fillRef idx="3">
-            <a:schemeClr val="accent1"/>
-          </a:fillRef>
-          <a:effectRef idx="2">
-            <a:schemeClr val="accent1"/>
-          </a:effectRef>
-          <a:fontRef idx="minor">
-            <a:schemeClr val="lt1"/>
-          </a:fontRef>
-        </p:style>
-        <p:txBody>
-          <a:bodyPr rtlCol="0" anchor="ctr" lIns="38100" rIns="38100" tIns="25400" bIns="25400" wrap="square"/>
-          <a:lstStyle/>
-          <a:p>
-            <a:pPr algn="ctr"/>
-            <a:r>
-              <a:rPr sz="1000" b="1">
-                <a:solidFill>
-                  <a:srgbClr val="8C3200"/>
-                </a:solidFill>
-              </a:rPr>
-              <a:t>DRAM bucket cache (optional, per-process) — cache_buckets_, cache_epoch_</a:t>
-            </a:r>
-          </a:p>
-        </p:txBody>
-      </p:sp>
-      <p:sp>
-        <p:nvSpPr>
-          <p:cNvPr id="11" name="Oval 10"/>
-          <p:cNvSpPr/>
-          <p:nvPr/>
-        </p:nvSpPr>
-        <p:spPr>
-          <a:xfrm>
-            <a:off x="2048255" y="3511296"/>
-            <a:ext cx="292608" cy="292608"/>
-          </a:xfrm>
-          <a:prstGeom prst="ellipse">
-            <a:avLst/>
-          </a:prstGeom>
-          <a:solidFill>
-            <a:srgbClr val="FFFFFF"/>
-          </a:solidFill>
-          <a:ln w="19050">
-            <a:solidFill>
-              <a:srgbClr val="E65100"/>
-            </a:solidFill>
-          </a:ln>
-        </p:spPr>
-        <p:style>
-          <a:lnRef idx="1">
-            <a:schemeClr val="accent1"/>
-          </a:lnRef>
-          <a:fillRef idx="3">
-            <a:schemeClr val="accent1"/>
-          </a:fillRef>
-          <a:effectRef idx="2">
-            <a:schemeClr val="accent1"/>
-          </a:effectRef>
-          <a:fontRef idx="minor">
-            <a:schemeClr val="lt1"/>
-          </a:fontRef>
-        </p:style>
-        <p:txBody>
-          <a:bodyPr rtlCol="0" anchor="ctr" lIns="0" rIns="0" tIns="0" bIns="0"/>
-          <a:lstStyle/>
-          <a:p>
-            <a:pPr algn="ctr"/>
-            <a:r>
-              <a:rPr sz="800" b="1">
-                <a:solidFill>
-                  <a:srgbClr val="E65100"/>
-                </a:solidFill>
-              </a:rPr>
-              <a:t>C1r</a:t>
-            </a:r>
-          </a:p>
-        </p:txBody>
-      </p:sp>
-      <p:sp>
-        <p:nvSpPr>
-          <p:cNvPr id="12" name="TextBox 11"/>
-          <p:cNvSpPr txBox="1"/>
-          <p:nvPr/>
-        </p:nvSpPr>
-        <p:spPr>
-          <a:xfrm>
-            <a:off x="2377440" y="3566160"/>
-            <a:ext cx="2743200" cy="219456"/>
-          </a:xfrm>
-          <a:prstGeom prst="rect">
-            <a:avLst/>
-          </a:prstGeom>
-          <a:solidFill>
-            <a:srgbClr val="FFFFFF"/>
-          </a:solidFill>
-          <a:ln>
-            <a:noFill/>
-          </a:ln>
-        </p:spPr>
-        <p:txBody>
-          <a:bodyPr wrap="none" lIns="25400" rIns="25400" tIns="0" bIns="0">
-            <a:spAutoFit/>
-          </a:bodyPr>
-          <a:lstStyle/>
-          <a:p>
-            <a:pPr algn="l"/>
-            <a:r>
-              <a:rPr sz="850" b="1" i="0">
-                <a:solidFill>
-                  <a:srgbClr val="E65100"/>
-                </a:solidFill>
-              </a:rPr>
-              <a:t>[0.015 µs est] bucket_idx = fnv1a_u64(K) % B; entry = lock_table_.entry(idx)</a:t>
-            </a:r>
-          </a:p>
-        </p:txBody>
-      </p:sp>
       <p:cxnSp>
         <p:nvCxnSpPr>
-          <p:cNvPr id="13" name="Connector 12"/>
+          <p:cNvPr id="9" name="Connector 8"/>
           <p:cNvCxnSpPr/>
           <p:nvPr/>
         </p:nvCxnSpPr>
         <p:spPr>
           <a:xfrm>
-            <a:off x="2194560" y="4023360"/>
-            <a:ext cx="3931920" cy="0"/>
+            <a:off x="5303520" y="1691640"/>
+            <a:ext cx="0" cy="4297680"/>
           </a:xfrm>
           <a:prstGeom prst="line">
             <a:avLst/>
           </a:prstGeom>
-          <a:ln w="20320">
+          <a:ln w="7620">
             <a:solidFill>
-              <a:srgbClr val="E65100"/>
+              <a:srgbClr val="9E9E9E"/>
             </a:solidFill>
-            <a:tailEnd type="triangle" w="med" h="med"/>
             <a:prstDash val="dash"/>
           </a:ln>
         </p:spPr>
@@ -10136,117 +9941,24 @@
           </a:fontRef>
         </p:style>
       </p:cxnSp>
-      <p:sp>
-        <p:nvSpPr>
-          <p:cNvPr id="14" name="Oval 13"/>
-          <p:cNvSpPr/>
-          <p:nvPr/>
-        </p:nvSpPr>
-        <p:spPr>
-          <a:xfrm>
-            <a:off x="4014215" y="3877056"/>
-            <a:ext cx="292608" cy="292608"/>
-          </a:xfrm>
-          <a:prstGeom prst="ellipse">
-            <a:avLst/>
-          </a:prstGeom>
-          <a:solidFill>
-            <a:srgbClr val="FFF49C"/>
-          </a:solidFill>
-          <a:ln w="19050">
-            <a:solidFill>
-              <a:srgbClr val="F9A825"/>
-            </a:solidFill>
-          </a:ln>
-        </p:spPr>
-        <p:style>
-          <a:lnRef idx="1">
-            <a:schemeClr val="accent1"/>
-          </a:lnRef>
-          <a:fillRef idx="3">
-            <a:schemeClr val="accent1"/>
-          </a:fillRef>
-          <a:effectRef idx="2">
-            <a:schemeClr val="accent1"/>
-          </a:effectRef>
-          <a:fontRef idx="minor">
-            <a:schemeClr val="lt1"/>
-          </a:fontRef>
-        </p:style>
-        <p:txBody>
-          <a:bodyPr rtlCol="0" anchor="ctr" lIns="0" rIns="0" tIns="0" bIns="0"/>
-          <a:lstStyle/>
-          <a:p>
-            <a:pPr algn="ctr"/>
-            <a:r>
-              <a:rPr sz="800" b="1">
-                <a:solidFill>
-                  <a:srgbClr val="333333"/>
-                </a:solidFill>
-              </a:rPr>
-              <a:t>C2r</a:t>
-            </a:r>
-          </a:p>
-        </p:txBody>
-      </p:sp>
-      <p:sp>
-        <p:nvSpPr>
-          <p:cNvPr id="15" name="TextBox 14"/>
-          <p:cNvSpPr txBox="1"/>
-          <p:nvPr/>
-        </p:nvSpPr>
-        <p:spPr>
-          <a:xfrm>
-            <a:off x="2697479" y="3767328"/>
-            <a:ext cx="2926080" cy="219456"/>
-          </a:xfrm>
-          <a:prstGeom prst="rect">
-            <a:avLst/>
-          </a:prstGeom>
-          <a:solidFill>
-            <a:srgbClr val="FFFFFF"/>
-          </a:solidFill>
-          <a:ln>
-            <a:noFill/>
-          </a:ln>
-        </p:spPr>
-        <p:txBody>
-          <a:bodyPr wrap="none" lIns="25400" rIns="25400" tIns="0" bIns="0">
-            <a:spAutoFit/>
-          </a:bodyPr>
-          <a:lstStyle/>
-          <a:p>
-            <a:pPr algn="l"/>
-            <a:r>
-              <a:rPr sz="850" b="1" i="0">
-                <a:solidFill>
-                  <a:srgbClr val="E65100"/>
-                </a:solidFill>
-              </a:rPr>
-              <a:t>[0.7 µs est] load CXL write_epoch (1 LD-CXL)  ★ if == cached_epoch_[idx]: scan DRAM copy + return</a:t>
-            </a:r>
-          </a:p>
-        </p:txBody>
-      </p:sp>
       <p:cxnSp>
         <p:nvCxnSpPr>
-          <p:cNvPr id="16" name="Connector 15"/>
+          <p:cNvPr id="10" name="Connector 9"/>
           <p:cNvCxnSpPr/>
           <p:nvPr/>
         </p:nvCxnSpPr>
         <p:spPr>
           <a:xfrm>
-            <a:off x="2194560" y="4389120"/>
-            <a:ext cx="3931920" cy="0"/>
+            <a:off x="8595360" y="1691640"/>
+            <a:ext cx="0" cy="4297680"/>
           </a:xfrm>
           <a:prstGeom prst="line">
             <a:avLst/>
           </a:prstGeom>
-          <a:ln w="20320">
+          <a:ln w="7620">
             <a:solidFill>
-              <a:srgbClr val="E65100"/>
+              <a:srgbClr val="9E9E9E"/>
             </a:solidFill>
-            <a:tailEnd type="triangle" w="med" h="med"/>
             <a:prstDash val="dash"/>
           </a:ln>
         </p:spPr>
@@ -10265,209 +9977,24 @@
           </a:fontRef>
         </p:style>
       </p:cxnSp>
-      <p:sp>
-        <p:nvSpPr>
-          <p:cNvPr id="17" name="Oval 16"/>
-          <p:cNvSpPr/>
-          <p:nvPr/>
-        </p:nvSpPr>
-        <p:spPr>
-          <a:xfrm>
-            <a:off x="4014215" y="4242816"/>
-            <a:ext cx="292608" cy="292608"/>
-          </a:xfrm>
-          <a:prstGeom prst="ellipse">
-            <a:avLst/>
-          </a:prstGeom>
-          <a:solidFill>
-            <a:srgbClr val="FFFFFF"/>
-          </a:solidFill>
-          <a:ln w="19050">
-            <a:solidFill>
-              <a:srgbClr val="E65100"/>
-            </a:solidFill>
-          </a:ln>
-        </p:spPr>
-        <p:style>
-          <a:lnRef idx="1">
-            <a:schemeClr val="accent1"/>
-          </a:lnRef>
-          <a:fillRef idx="3">
-            <a:schemeClr val="accent1"/>
-          </a:fillRef>
-          <a:effectRef idx="2">
-            <a:schemeClr val="accent1"/>
-          </a:effectRef>
-          <a:fontRef idx="minor">
-            <a:schemeClr val="lt1"/>
-          </a:fontRef>
-        </p:style>
-        <p:txBody>
-          <a:bodyPr rtlCol="0" anchor="ctr" lIns="0" rIns="0" tIns="0" bIns="0"/>
-          <a:lstStyle/>
-          <a:p>
-            <a:pPr algn="ctr"/>
-            <a:r>
-              <a:rPr sz="800" b="1">
-                <a:solidFill>
-                  <a:srgbClr val="E65100"/>
-                </a:solidFill>
-              </a:rPr>
-              <a:t>C3r</a:t>
-            </a:r>
-          </a:p>
-        </p:txBody>
-      </p:sp>
-      <p:sp>
-        <p:nvSpPr>
-          <p:cNvPr id="18" name="TextBox 17"/>
-          <p:cNvSpPr txBox="1"/>
-          <p:nvPr/>
-        </p:nvSpPr>
-        <p:spPr>
-          <a:xfrm>
-            <a:off x="2697479" y="4133088"/>
-            <a:ext cx="2926080" cy="219456"/>
-          </a:xfrm>
-          <a:prstGeom prst="rect">
-            <a:avLst/>
-          </a:prstGeom>
-          <a:solidFill>
-            <a:srgbClr val="FFFFFF"/>
-          </a:solidFill>
-          <a:ln>
-            <a:noFill/>
-          </a:ln>
-        </p:spPr>
-        <p:txBody>
-          <a:bodyPr wrap="none" lIns="25400" rIns="25400" tIns="0" bIns="0">
-            <a:spAutoFit/>
-          </a:bodyPr>
-          <a:lstStyle/>
-          <a:p>
-            <a:pPr algn="l"/>
-            <a:r>
-              <a:rPr sz="850" b="1" i="0">
-                <a:solidFill>
-                  <a:srgbClr val="E65100"/>
-                </a:solidFill>
-              </a:rPr>
-              <a:t>[0.15 µs est] cache miss → flush_line(slots[0]) + flush_line(slots[4]) + mfence</a:t>
-            </a:r>
-          </a:p>
-        </p:txBody>
-      </p:sp>
-      <p:sp>
-        <p:nvSpPr>
-          <p:cNvPr id="19" name="Oval 18"/>
-          <p:cNvSpPr/>
-          <p:nvPr/>
-        </p:nvSpPr>
-        <p:spPr>
-          <a:xfrm>
-            <a:off x="2048255" y="4608576"/>
-            <a:ext cx="292608" cy="292608"/>
-          </a:xfrm>
-          <a:prstGeom prst="ellipse">
-            <a:avLst/>
-          </a:prstGeom>
-          <a:solidFill>
-            <a:srgbClr val="FFF49C"/>
-          </a:solidFill>
-          <a:ln w="19050">
-            <a:solidFill>
-              <a:srgbClr val="F9A825"/>
-            </a:solidFill>
-          </a:ln>
-        </p:spPr>
-        <p:style>
-          <a:lnRef idx="1">
-            <a:schemeClr val="accent1"/>
-          </a:lnRef>
-          <a:fillRef idx="3">
-            <a:schemeClr val="accent1"/>
-          </a:fillRef>
-          <a:effectRef idx="2">
-            <a:schemeClr val="accent1"/>
-          </a:effectRef>
-          <a:fontRef idx="minor">
-            <a:schemeClr val="lt1"/>
-          </a:fontRef>
-        </p:style>
-        <p:txBody>
-          <a:bodyPr rtlCol="0" anchor="ctr" lIns="0" rIns="0" tIns="0" bIns="0"/>
-          <a:lstStyle/>
-          <a:p>
-            <a:pPr algn="ctr"/>
-            <a:r>
-              <a:rPr sz="800" b="1">
-                <a:solidFill>
-                  <a:srgbClr val="333333"/>
-                </a:solidFill>
-              </a:rPr>
-              <a:t>C4r</a:t>
-            </a:r>
-          </a:p>
-        </p:txBody>
-      </p:sp>
-      <p:sp>
-        <p:nvSpPr>
-          <p:cNvPr id="20" name="TextBox 19"/>
-          <p:cNvSpPr txBox="1"/>
-          <p:nvPr/>
-        </p:nvSpPr>
-        <p:spPr>
-          <a:xfrm>
-            <a:off x="2377440" y="4663440"/>
-            <a:ext cx="2743200" cy="219456"/>
-          </a:xfrm>
-          <a:prstGeom prst="rect">
-            <a:avLst/>
-          </a:prstGeom>
-          <a:solidFill>
-            <a:srgbClr val="FFFFFF"/>
-          </a:solidFill>
-          <a:ln>
-            <a:noFill/>
-          </a:ln>
-        </p:spPr>
-        <p:txBody>
-          <a:bodyPr wrap="none" lIns="25400" rIns="25400" tIns="0" bIns="0">
-            <a:spAutoFit/>
-          </a:bodyPr>
-          <a:lstStyle/>
-          <a:p>
-            <a:pPr algn="l"/>
-            <a:r>
-              <a:rPr sz="850" b="1" i="0">
-                <a:solidFill>
-                  <a:srgbClr val="E65100"/>
-                </a:solidFill>
-              </a:rPr>
-              <a:t>[0.05 µs est] scan 7 slots in L1; get slot.value (= blk_off)  ★ NO post-scan revalidation (LRC)</a:t>
-            </a:r>
-          </a:p>
-        </p:txBody>
-      </p:sp>
       <p:cxnSp>
         <p:nvCxnSpPr>
-          <p:cNvPr id="21" name="Connector 20"/>
+          <p:cNvPr id="11" name="Connector 10"/>
           <p:cNvCxnSpPr/>
           <p:nvPr/>
         </p:nvCxnSpPr>
         <p:spPr>
           <a:xfrm>
-            <a:off x="2194560" y="5120640"/>
-            <a:ext cx="3931920" cy="0"/>
+            <a:off x="11247120" y="1691640"/>
+            <a:ext cx="0" cy="4297680"/>
           </a:xfrm>
           <a:prstGeom prst="line">
             <a:avLst/>
           </a:prstGeom>
-          <a:ln w="20320">
+          <a:ln w="7620">
             <a:solidFill>
-              <a:srgbClr val="E65100"/>
+              <a:srgbClr val="9E9E9E"/>
             </a:solidFill>
-            <a:tailEnd type="triangle" w="med" h="med"/>
             <a:prstDash val="dash"/>
           </a:ln>
         </p:spPr>
@@ -10488,13 +10015,13 @@
       </p:cxnSp>
       <p:sp>
         <p:nvSpPr>
-          <p:cNvPr id="22" name="Oval 21"/>
+          <p:cNvPr id="12" name="Oval 11"/>
           <p:cNvSpPr/>
           <p:nvPr/>
         </p:nvSpPr>
         <p:spPr>
           <a:xfrm>
-            <a:off x="4014215" y="4974336"/>
+            <a:off x="1316736" y="1682496"/>
             <a:ext cx="292608" cy="292608"/>
           </a:xfrm>
           <a:prstGeom prst="ellipse">
@@ -10505,7 +10032,7 @@
           </a:solidFill>
           <a:ln w="19050">
             <a:solidFill>
-              <a:srgbClr val="E65100"/>
+              <a:srgbClr val="154FC2"/>
             </a:solidFill>
           </a:ln>
         </p:spPr>
@@ -10531,24 +10058,24 @@
             <a:r>
               <a:rPr sz="800" b="1">
                 <a:solidFill>
-                  <a:srgbClr val="E65100"/>
-                </a:solidFill>
-              </a:rPr>
-              <a:t>C5r</a:t>
-            </a:r>
-          </a:p>
-        </p:txBody>
-      </p:sp>
-      <p:sp>
-        <p:nvSpPr>
-          <p:cNvPr id="23" name="TextBox 22"/>
+                  <a:srgbClr val="154FC2"/>
+                </a:solidFill>
+              </a:rPr>
+              <a:t>A1r</a:t>
+            </a:r>
+          </a:p>
+        </p:txBody>
+      </p:sp>
+      <p:sp>
+        <p:nvSpPr>
+          <p:cNvPr id="13" name="TextBox 12"/>
           <p:cNvSpPr txBox="1"/>
           <p:nvPr/>
         </p:nvSpPr>
         <p:spPr>
           <a:xfrm>
-            <a:off x="2697479" y="4864608"/>
-            <a:ext cx="2926080" cy="219456"/>
+            <a:off x="1645920" y="1737360"/>
+            <a:ext cx="2743200" cy="219456"/>
           </a:xfrm>
           <a:prstGeom prst="rect">
             <a:avLst/>
@@ -10570,32 +10097,68 @@
             <a:r>
               <a:rPr sz="850" b="1" i="0">
                 <a:solidFill>
-                  <a:srgbClr val="E65100"/>
-                </a:solidFill>
-              </a:rPr>
-              <a:t>[1.0 µs est] blockpool-&gt;read(blk_off, 1024)  (16 CL × LD-CXL for value bytes)</a:t>
-            </a:r>
-          </a:p>
-        </p:txBody>
-      </p:sp>
-      <p:sp>
-        <p:nvSpPr>
-          <p:cNvPr id="24" name="Rounded Rectangle 23"/>
+                  <a:srgbClr val="154FC2"/>
+                </a:solidFill>
+              </a:rPr>
+              <a:t>[0.05 µs est] enter search(K); compute bucket_idx</a:t>
+            </a:r>
+          </a:p>
+        </p:txBody>
+      </p:sp>
+      <p:cxnSp>
+        <p:nvCxnSpPr>
+          <p:cNvPr id="14" name="Connector 13"/>
+          <p:cNvCxnSpPr/>
+          <p:nvPr/>
+        </p:nvCxnSpPr>
+        <p:spPr>
+          <a:xfrm>
+            <a:off x="1463040" y="2084832"/>
+            <a:ext cx="3840480" cy="0"/>
+          </a:xfrm>
+          <a:prstGeom prst="line">
+            <a:avLst/>
+          </a:prstGeom>
+          <a:ln w="20320">
+            <a:solidFill>
+              <a:srgbClr val="154FC2"/>
+            </a:solidFill>
+            <a:tailEnd type="triangle" w="med" h="med"/>
+          </a:ln>
+        </p:spPr>
+        <p:style>
+          <a:lnRef idx="2">
+            <a:schemeClr val="accent1"/>
+          </a:lnRef>
+          <a:fillRef idx="0">
+            <a:schemeClr val="accent1"/>
+          </a:fillRef>
+          <a:effectRef idx="1">
+            <a:schemeClr val="accent1"/>
+          </a:effectRef>
+          <a:fontRef idx="minor">
+            <a:schemeClr val="tx1"/>
+          </a:fontRef>
+        </p:style>
+      </p:cxnSp>
+      <p:sp>
+        <p:nvSpPr>
+          <p:cNvPr id="15" name="Oval 14"/>
           <p:cNvSpPr/>
           <p:nvPr/>
         </p:nvSpPr>
         <p:spPr>
           <a:xfrm>
-            <a:off x="274320" y="5989320"/>
-            <a:ext cx="7772400" cy="292608"/>
-          </a:xfrm>
-          <a:prstGeom prst="roundRect">
+            <a:off x="3236976" y="1938528"/>
+            <a:ext cx="292608" cy="292608"/>
+          </a:xfrm>
+          <a:prstGeom prst="ellipse">
             <a:avLst/>
           </a:prstGeom>
           <a:solidFill>
             <a:srgbClr val="FFF49C"/>
           </a:solidFill>
-          <a:ln w="9525">
+          <a:ln w="19050">
             <a:solidFill>
               <a:srgbClr val="F9A825"/>
             </a:solidFill>
@@ -10616,41 +10179,80 @@
           </a:fontRef>
         </p:style>
         <p:txBody>
-          <a:bodyPr rtlCol="0" anchor="ctr" lIns="101600" rIns="101600" tIns="25400" bIns="25400"/>
+          <a:bodyPr rtlCol="0" anchor="ctr" lIns="0" rIns="0" tIns="0" bIns="0"/>
+          <a:lstStyle/>
+          <a:p>
+            <a:pPr algn="ctr"/>
+            <a:r>
+              <a:rPr sz="800" b="1">
+                <a:solidFill>
+                  <a:srgbClr val="333333"/>
+                </a:solidFill>
+              </a:rPr>
+              <a:t>A2r</a:t>
+            </a:r>
+          </a:p>
+        </p:txBody>
+      </p:sp>
+      <p:sp>
+        <p:nvSpPr>
+          <p:cNvPr id="16" name="TextBox 15"/>
+          <p:cNvSpPr txBox="1"/>
+          <p:nvPr/>
+        </p:nvSpPr>
+        <p:spPr>
+          <a:xfrm>
+            <a:off x="1920240" y="1828800"/>
+            <a:ext cx="2926080" cy="219456"/>
+          </a:xfrm>
+          <a:prstGeom prst="rect">
+            <a:avLst/>
+          </a:prstGeom>
+          <a:solidFill>
+            <a:srgbClr val="FFFFFF"/>
+          </a:solidFill>
+          <a:ln>
+            <a:noFill/>
+          </a:ln>
+        </p:spPr>
+        <p:txBody>
+          <a:bodyPr wrap="none" lIns="25400" rIns="25400" tIns="0" bIns="0">
+            <a:spAutoFit/>
+          </a:bodyPr>
           <a:lstStyle/>
           <a:p>
             <a:pPr algn="l"/>
             <a:r>
-              <a:rPr sz="1000" b="1">
-                <a:solidFill>
-                  <a:srgbClr val="8C3200"/>
-                </a:solidFill>
-              </a:rPr>
-              <a:t>End-to-end:  cache hit + value read  ≈ 1.7 µs  |  cache miss + value read  ≈ 1.2 µs  |  no cross-host coordination, every read pays roughly the same</a:t>
-            </a:r>
-          </a:p>
-        </p:txBody>
-      </p:sp>
-      <p:sp>
-        <p:nvSpPr>
-          <p:cNvPr id="25" name="Rounded Rectangle 24"/>
+              <a:rPr sz="850" b="1" i="0">
+                <a:solidFill>
+                  <a:srgbClr val="154FC2"/>
+                </a:solidFill>
+              </a:rPr>
+              <a:t>[~7 µs measured KV=1024] cache_pool_lookup: seqlock CAS read of L2 entry  ★ on hit: return (~82% of reads, KV memcpy under MESI ping-pong)</a:t>
+            </a:r>
+          </a:p>
+        </p:txBody>
+      </p:sp>
+      <p:sp>
+        <p:nvSpPr>
+          <p:cNvPr id="17" name="Oval 16"/>
           <p:cNvSpPr/>
           <p:nvPr/>
         </p:nvSpPr>
         <p:spPr>
           <a:xfrm>
-            <a:off x="274320" y="6355080"/>
-            <a:ext cx="7772400" cy="365760"/>
-          </a:xfrm>
-          <a:prstGeom prst="roundRect">
+            <a:off x="1316736" y="2194560"/>
+            <a:ext cx="292608" cy="292608"/>
+          </a:xfrm>
+          <a:prstGeom prst="ellipse">
             <a:avLst/>
           </a:prstGeom>
           <a:solidFill>
             <a:srgbClr val="FFFFFF"/>
           </a:solidFill>
-          <a:ln w="7620">
+          <a:ln w="19050">
             <a:solidFill>
-              <a:srgbClr val="9E9E9E"/>
+              <a:srgbClr val="154FC2"/>
             </a:solidFill>
           </a:ln>
         </p:spPr>
@@ -10669,28 +10271,41 @@
           </a:fontRef>
         </p:style>
         <p:txBody>
-          <a:bodyPr rtlCol="0" anchor="ctr"/>
+          <a:bodyPr rtlCol="0" anchor="ctr" lIns="0" rIns="0" tIns="0" bIns="0"/>
           <a:lstStyle/>
           <a:p>
             <a:pPr algn="ctr"/>
-          </a:p>
-        </p:txBody>
-      </p:sp>
-      <p:sp>
-        <p:nvSpPr>
-          <p:cNvPr id="26" name="TextBox 25"/>
+            <a:r>
+              <a:rPr sz="800" b="1">
+                <a:solidFill>
+                  <a:srgbClr val="154FC2"/>
+                </a:solidFill>
+              </a:rPr>
+              <a:t>A3r</a:t>
+            </a:r>
+          </a:p>
+        </p:txBody>
+      </p:sp>
+      <p:sp>
+        <p:nvSpPr>
+          <p:cNvPr id="18" name="TextBox 17"/>
           <p:cNvSpPr txBox="1"/>
           <p:nvPr/>
         </p:nvSpPr>
         <p:spPr>
           <a:xfrm>
-            <a:off x="365760" y="6391656"/>
-            <a:ext cx="1828800" cy="292608"/>
+            <a:off x="1645920" y="2249424"/>
+            <a:ext cx="2743200" cy="219456"/>
           </a:xfrm>
           <a:prstGeom prst="rect">
             <a:avLst/>
           </a:prstGeom>
-          <a:noFill/>
+          <a:solidFill>
+            <a:srgbClr val="FFFFFF"/>
+          </a:solidFill>
+          <a:ln>
+            <a:noFill/>
+          </a:ln>
         </p:spPr>
         <p:txBody>
           <a:bodyPr wrap="none" lIns="25400" rIns="25400" tIns="0" bIns="0">
@@ -10700,31 +10315,125 @@
           <a:p>
             <a:pPr algn="l"/>
             <a:r>
-              <a:rPr sz="900" b="1">
-                <a:solidFill>
-                  <a:srgbClr val="E65100"/>
-                </a:solidFill>
-              </a:rPr>
-              <a:t>╌╌▶  C*r step</a:t>
-            </a:r>
-          </a:p>
-        </p:txBody>
-      </p:sp>
-      <p:sp>
-        <p:nvSpPr>
-          <p:cNvPr id="27" name="TextBox 26"/>
+              <a:rPr sz="850" b="1" i="0">
+                <a:solidFill>
+                  <a:srgbClr val="154FC2"/>
+                </a:solidFill>
+              </a:rPr>
+              <a:t>[0.1 µs est] L2 miss → my_epoch_at_send = bucket_epoch.load  (C13 tag)</a:t>
+            </a:r>
+          </a:p>
+        </p:txBody>
+      </p:sp>
+      <p:cxnSp>
+        <p:nvCxnSpPr>
+          <p:cNvPr id="19" name="Connector 18"/>
+          <p:cNvCxnSpPr/>
+          <p:nvPr/>
+        </p:nvCxnSpPr>
+        <p:spPr>
+          <a:xfrm>
+            <a:off x="1463040" y="2596896"/>
+            <a:ext cx="9784080" cy="0"/>
+          </a:xfrm>
+          <a:prstGeom prst="line">
+            <a:avLst/>
+          </a:prstGeom>
+          <a:ln w="20320">
+            <a:solidFill>
+              <a:srgbClr val="154FC2"/>
+            </a:solidFill>
+            <a:tailEnd type="triangle" w="med" h="med"/>
+          </a:ln>
+        </p:spPr>
+        <p:style>
+          <a:lnRef idx="2">
+            <a:schemeClr val="accent1"/>
+          </a:lnRef>
+          <a:fillRef idx="0">
+            <a:schemeClr val="accent1"/>
+          </a:fillRef>
+          <a:effectRef idx="1">
+            <a:schemeClr val="accent1"/>
+          </a:effectRef>
+          <a:fontRef idx="minor">
+            <a:schemeClr val="tx1"/>
+          </a:fontRef>
+        </p:style>
+      </p:cxnSp>
+      <p:sp>
+        <p:nvSpPr>
+          <p:cNvPr id="20" name="Oval 19"/>
+          <p:cNvSpPr/>
+          <p:nvPr/>
+        </p:nvSpPr>
+        <p:spPr>
+          <a:xfrm>
+            <a:off x="6208776" y="2450592"/>
+            <a:ext cx="292608" cy="292608"/>
+          </a:xfrm>
+          <a:prstGeom prst="ellipse">
+            <a:avLst/>
+          </a:prstGeom>
+          <a:solidFill>
+            <a:srgbClr val="FFFFFF"/>
+          </a:solidFill>
+          <a:ln w="19050">
+            <a:solidFill>
+              <a:srgbClr val="154FC2"/>
+            </a:solidFill>
+          </a:ln>
+        </p:spPr>
+        <p:style>
+          <a:lnRef idx="1">
+            <a:schemeClr val="accent1"/>
+          </a:lnRef>
+          <a:fillRef idx="3">
+            <a:schemeClr val="accent1"/>
+          </a:fillRef>
+          <a:effectRef idx="2">
+            <a:schemeClr val="accent1"/>
+          </a:effectRef>
+          <a:fontRef idx="minor">
+            <a:schemeClr val="lt1"/>
+          </a:fontRef>
+        </p:style>
+        <p:txBody>
+          <a:bodyPr rtlCol="0" anchor="ctr" lIns="0" rIns="0" tIns="0" bIns="0"/>
+          <a:lstStyle/>
+          <a:p>
+            <a:pPr algn="ctr"/>
+            <a:r>
+              <a:rPr sz="800" b="1">
+                <a:solidFill>
+                  <a:srgbClr val="154FC2"/>
+                </a:solidFill>
+              </a:rPr>
+              <a:t>A4r</a:t>
+            </a:r>
+          </a:p>
+        </p:txBody>
+      </p:sp>
+      <p:sp>
+        <p:nvSpPr>
+          <p:cNvPr id="21" name="TextBox 20"/>
           <p:cNvSpPr txBox="1"/>
           <p:nvPr/>
         </p:nvSpPr>
         <p:spPr>
           <a:xfrm>
-            <a:off x="2240279" y="6391656"/>
-            <a:ext cx="1828800" cy="292608"/>
+            <a:off x="4892040" y="2340864"/>
+            <a:ext cx="2926080" cy="219456"/>
           </a:xfrm>
           <a:prstGeom prst="rect">
             <a:avLst/>
           </a:prstGeom>
-          <a:noFill/>
+          <a:solidFill>
+            <a:srgbClr val="FFFFFF"/>
+          </a:solidFill>
+          <a:ln>
+            <a:noFill/>
+          </a:ln>
         </p:spPr>
         <p:txBody>
           <a:bodyPr wrap="none" lIns="25400" rIns="25400" tIns="0" bIns="0">
@@ -10734,31 +10443,125 @@
           <a:p>
             <a:pPr algn="l"/>
             <a:r>
-              <a:rPr sz="900" b="1">
-                <a:solidFill>
-                  <a:srgbClr val="F9A825"/>
-                </a:solidFill>
-              </a:rPr>
-              <a:t>★ Linearization (C2r, C4r)</a:t>
-            </a:r>
-          </a:p>
-        </p:txBody>
-      </p:sp>
-      <p:sp>
-        <p:nvSpPr>
-          <p:cNvPr id="28" name="TextBox 27"/>
+              <a:rPr sz="850" b="1" i="0">
+                <a:solidFill>
+                  <a:srgbClr val="154FC2"/>
+                </a:solidFill>
+              </a:rPr>
+              <a:t>[0.1 µs est] staging.ready_op_id = 0; flush; sfence  (clear prior)</a:t>
+            </a:r>
+          </a:p>
+        </p:txBody>
+      </p:sp>
+      <p:cxnSp>
+        <p:nvCxnSpPr>
+          <p:cNvPr id="22" name="Connector 21"/>
+          <p:cNvCxnSpPr/>
+          <p:nvPr/>
+        </p:nvCxnSpPr>
+        <p:spPr>
+          <a:xfrm>
+            <a:off x="1463040" y="2852928"/>
+            <a:ext cx="7132320" cy="0"/>
+          </a:xfrm>
+          <a:prstGeom prst="line">
+            <a:avLst/>
+          </a:prstGeom>
+          <a:ln w="20320">
+            <a:solidFill>
+              <a:srgbClr val="154FC2"/>
+            </a:solidFill>
+            <a:tailEnd type="triangle" w="med" h="med"/>
+          </a:ln>
+        </p:spPr>
+        <p:style>
+          <a:lnRef idx="2">
+            <a:schemeClr val="accent1"/>
+          </a:lnRef>
+          <a:fillRef idx="0">
+            <a:schemeClr val="accent1"/>
+          </a:fillRef>
+          <a:effectRef idx="1">
+            <a:schemeClr val="accent1"/>
+          </a:effectRef>
+          <a:fontRef idx="minor">
+            <a:schemeClr val="tx1"/>
+          </a:fontRef>
+        </p:style>
+      </p:cxnSp>
+      <p:sp>
+        <p:nvSpPr>
+          <p:cNvPr id="23" name="Oval 22"/>
+          <p:cNvSpPr/>
+          <p:nvPr/>
+        </p:nvSpPr>
+        <p:spPr>
+          <a:xfrm>
+            <a:off x="4882896" y="2706624"/>
+            <a:ext cx="292608" cy="292608"/>
+          </a:xfrm>
+          <a:prstGeom prst="ellipse">
+            <a:avLst/>
+          </a:prstGeom>
+          <a:solidFill>
+            <a:srgbClr val="FFFFFF"/>
+          </a:solidFill>
+          <a:ln w="19050">
+            <a:solidFill>
+              <a:srgbClr val="154FC2"/>
+            </a:solidFill>
+          </a:ln>
+        </p:spPr>
+        <p:style>
+          <a:lnRef idx="1">
+            <a:schemeClr val="accent1"/>
+          </a:lnRef>
+          <a:fillRef idx="3">
+            <a:schemeClr val="accent1"/>
+          </a:fillRef>
+          <a:effectRef idx="2">
+            <a:schemeClr val="accent1"/>
+          </a:effectRef>
+          <a:fontRef idx="minor">
+            <a:schemeClr val="lt1"/>
+          </a:fontRef>
+        </p:style>
+        <p:txBody>
+          <a:bodyPr rtlCol="0" anchor="ctr" lIns="0" rIns="0" tIns="0" bIns="0"/>
+          <a:lstStyle/>
+          <a:p>
+            <a:pPr algn="ctr"/>
+            <a:r>
+              <a:rPr sz="800" b="1">
+                <a:solidFill>
+                  <a:srgbClr val="154FC2"/>
+                </a:solidFill>
+              </a:rPr>
+              <a:t>A5r</a:t>
+            </a:r>
+          </a:p>
+        </p:txBody>
+      </p:sp>
+      <p:sp>
+        <p:nvSpPr>
+          <p:cNvPr id="24" name="TextBox 23"/>
           <p:cNvSpPr txBox="1"/>
           <p:nvPr/>
         </p:nvSpPr>
         <p:spPr>
           <a:xfrm>
-            <a:off x="4114800" y="6391656"/>
-            <a:ext cx="1828800" cy="292608"/>
+            <a:off x="3566160" y="2596896"/>
+            <a:ext cx="2926080" cy="219456"/>
           </a:xfrm>
           <a:prstGeom prst="rect">
             <a:avLst/>
           </a:prstGeom>
-          <a:noFill/>
+          <a:solidFill>
+            <a:srgbClr val="FFFFFF"/>
+          </a:solidFill>
+          <a:ln>
+            <a:noFill/>
+          </a:ln>
         </p:spPr>
         <p:txBody>
           <a:bodyPr wrap="none" lIns="25400" rIns="25400" tIns="0" bIns="0">
@@ -10768,31 +10571,125 @@
           <a:p>
             <a:pPr algn="l"/>
             <a:r>
-              <a:rPr sz="900" b="1">
-                <a:solidFill>
-                  <a:srgbClr val="C62828"/>
-                </a:solidFill>
-              </a:rPr>
-              <a:t>● Cross-host blocking (none!)</a:t>
-            </a:r>
-          </a:p>
-        </p:txBody>
-      </p:sp>
-      <p:sp>
-        <p:nvSpPr>
-          <p:cNvPr id="29" name="TextBox 28"/>
+              <a:rPr sz="850" b="1" i="0">
+                <a:solidFill>
+                  <a:srgbClr val="154FC2"/>
+                </a:solidFill>
+              </a:rPr>
+              <a:t>[1.4 µs est] ReadRing[0][1].tail.fetch_add(1)  CXL atomic</a:t>
+            </a:r>
+          </a:p>
+        </p:txBody>
+      </p:sp>
+      <p:cxnSp>
+        <p:nvCxnSpPr>
+          <p:cNvPr id="25" name="Connector 24"/>
+          <p:cNvCxnSpPr/>
+          <p:nvPr/>
+        </p:nvCxnSpPr>
+        <p:spPr>
+          <a:xfrm>
+            <a:off x="1463040" y="3108960"/>
+            <a:ext cx="7132320" cy="0"/>
+          </a:xfrm>
+          <a:prstGeom prst="line">
+            <a:avLst/>
+          </a:prstGeom>
+          <a:ln w="20320">
+            <a:solidFill>
+              <a:srgbClr val="154FC2"/>
+            </a:solidFill>
+            <a:tailEnd type="triangle" w="med" h="med"/>
+          </a:ln>
+        </p:spPr>
+        <p:style>
+          <a:lnRef idx="2">
+            <a:schemeClr val="accent1"/>
+          </a:lnRef>
+          <a:fillRef idx="0">
+            <a:schemeClr val="accent1"/>
+          </a:fillRef>
+          <a:effectRef idx="1">
+            <a:schemeClr val="accent1"/>
+          </a:effectRef>
+          <a:fontRef idx="minor">
+            <a:schemeClr val="tx1"/>
+          </a:fontRef>
+        </p:style>
+      </p:cxnSp>
+      <p:sp>
+        <p:nvSpPr>
+          <p:cNvPr id="26" name="Oval 25"/>
+          <p:cNvSpPr/>
+          <p:nvPr/>
+        </p:nvSpPr>
+        <p:spPr>
+          <a:xfrm>
+            <a:off x="4882896" y="2962656"/>
+            <a:ext cx="292608" cy="292608"/>
+          </a:xfrm>
+          <a:prstGeom prst="ellipse">
+            <a:avLst/>
+          </a:prstGeom>
+          <a:solidFill>
+            <a:srgbClr val="FFFFFF"/>
+          </a:solidFill>
+          <a:ln w="19050">
+            <a:solidFill>
+              <a:srgbClr val="154FC2"/>
+            </a:solidFill>
+          </a:ln>
+        </p:spPr>
+        <p:style>
+          <a:lnRef idx="1">
+            <a:schemeClr val="accent1"/>
+          </a:lnRef>
+          <a:fillRef idx="3">
+            <a:schemeClr val="accent1"/>
+          </a:fillRef>
+          <a:effectRef idx="2">
+            <a:schemeClr val="accent1"/>
+          </a:effectRef>
+          <a:fontRef idx="minor">
+            <a:schemeClr val="lt1"/>
+          </a:fontRef>
+        </p:style>
+        <p:txBody>
+          <a:bodyPr rtlCol="0" anchor="ctr" lIns="0" rIns="0" tIns="0" bIns="0"/>
+          <a:lstStyle/>
+          <a:p>
+            <a:pPr algn="ctr"/>
+            <a:r>
+              <a:rPr sz="800" b="1">
+                <a:solidFill>
+                  <a:srgbClr val="154FC2"/>
+                </a:solidFill>
+              </a:rPr>
+              <a:t>A6r</a:t>
+            </a:r>
+          </a:p>
+        </p:txBody>
+      </p:sp>
+      <p:sp>
+        <p:nvSpPr>
+          <p:cNvPr id="27" name="TextBox 26"/>
           <p:cNvSpPr txBox="1"/>
           <p:nvPr/>
         </p:nvSpPr>
         <p:spPr>
           <a:xfrm>
-            <a:off x="5989320" y="6391656"/>
-            <a:ext cx="1828800" cy="292608"/>
+            <a:off x="3566160" y="2852928"/>
+            <a:ext cx="2926080" cy="219456"/>
           </a:xfrm>
           <a:prstGeom prst="rect">
             <a:avLst/>
           </a:prstGeom>
-          <a:noFill/>
+          <a:solidFill>
+            <a:srgbClr val="FFFFFF"/>
+          </a:solidFill>
+          <a:ln>
+            <a:noFill/>
+          </a:ln>
         </p:spPr>
         <p:txBody>
           <a:bodyPr wrap="none" lIns="25400" rIns="25400" tIns="0" bIns="0">
@@ -10802,8 +10699,1259 @@
           <a:p>
             <a:pPr algn="l"/>
             <a:r>
+              <a:rPr sz="850" b="1" i="0">
+                <a:solidFill>
+                  <a:srgbClr val="154FC2"/>
+                </a:solidFill>
+              </a:rPr>
+              <a:t>[0.1 µs est] write ReadEntry{key, req_op_id}; flush; sfence</a:t>
+            </a:r>
+          </a:p>
+        </p:txBody>
+      </p:sp>
+      <p:cxnSp>
+        <p:nvCxnSpPr>
+          <p:cNvPr id="28" name="Connector 27"/>
+          <p:cNvCxnSpPr/>
+          <p:nvPr/>
+        </p:nvCxnSpPr>
+        <p:spPr>
+          <a:xfrm>
+            <a:off x="1463040" y="3364992"/>
+            <a:ext cx="9784080" cy="0"/>
+          </a:xfrm>
+          <a:prstGeom prst="line">
+            <a:avLst/>
+          </a:prstGeom>
+          <a:ln w="20320">
+            <a:solidFill>
+              <a:srgbClr val="154FC2"/>
+            </a:solidFill>
+            <a:tailEnd type="triangle" w="med" h="med"/>
+          </a:ln>
+        </p:spPr>
+        <p:style>
+          <a:lnRef idx="2">
+            <a:schemeClr val="accent1"/>
+          </a:lnRef>
+          <a:fillRef idx="0">
+            <a:schemeClr val="accent1"/>
+          </a:fillRef>
+          <a:effectRef idx="1">
+            <a:schemeClr val="accent1"/>
+          </a:effectRef>
+          <a:fontRef idx="minor">
+            <a:schemeClr val="tx1"/>
+          </a:fontRef>
+        </p:style>
+      </p:cxnSp>
+      <p:sp>
+        <p:nvSpPr>
+          <p:cNvPr id="29" name="Oval 28"/>
+          <p:cNvSpPr/>
+          <p:nvPr/>
+        </p:nvSpPr>
+        <p:spPr>
+          <a:xfrm>
+            <a:off x="6208776" y="3218688"/>
+            <a:ext cx="292608" cy="292608"/>
+          </a:xfrm>
+          <a:prstGeom prst="ellipse">
+            <a:avLst/>
+          </a:prstGeom>
+          <a:solidFill>
+            <a:srgbClr val="FFCDD2"/>
+          </a:solidFill>
+          <a:ln w="19050">
+            <a:solidFill>
+              <a:srgbClr val="C62828"/>
+            </a:solidFill>
+          </a:ln>
+        </p:spPr>
+        <p:style>
+          <a:lnRef idx="1">
+            <a:schemeClr val="accent1"/>
+          </a:lnRef>
+          <a:fillRef idx="3">
+            <a:schemeClr val="accent1"/>
+          </a:fillRef>
+          <a:effectRef idx="2">
+            <a:schemeClr val="accent1"/>
+          </a:effectRef>
+          <a:fontRef idx="minor">
+            <a:schemeClr val="lt1"/>
+          </a:fontRef>
+        </p:style>
+        <p:txBody>
+          <a:bodyPr rtlCol="0" anchor="ctr" lIns="0" rIns="0" tIns="0" bIns="0"/>
+          <a:lstStyle/>
+          <a:p>
+            <a:pPr algn="ctr"/>
+            <a:r>
+              <a:rPr sz="800" b="1">
+                <a:solidFill>
+                  <a:srgbClr val="333333"/>
+                </a:solidFill>
+              </a:rPr>
+              <a:t>A7r</a:t>
+            </a:r>
+          </a:p>
+        </p:txBody>
+      </p:sp>
+      <p:sp>
+        <p:nvSpPr>
+          <p:cNvPr id="30" name="TextBox 29"/>
+          <p:cNvSpPr txBox="1"/>
+          <p:nvPr/>
+        </p:nvSpPr>
+        <p:spPr>
+          <a:xfrm>
+            <a:off x="4892040" y="3108960"/>
+            <a:ext cx="2926080" cy="219456"/>
+          </a:xfrm>
+          <a:prstGeom prst="rect">
+            <a:avLst/>
+          </a:prstGeom>
+          <a:solidFill>
+            <a:srgbClr val="FFFFFF"/>
+          </a:solidFill>
+          <a:ln>
+            <a:noFill/>
+          </a:ln>
+        </p:spPr>
+        <p:txBody>
+          <a:bodyPr wrap="none" lIns="25400" rIns="25400" tIns="0" bIns="0">
+            <a:spAutoFit/>
+          </a:bodyPr>
+          <a:lstStyle/>
+          <a:p>
+            <a:pPr algn="l"/>
+            <a:r>
+              <a:rPr sz="850" b="1" i="0">
+                <a:solidFill>
+                  <a:srgbClr val="154FC2"/>
+                </a:solidFill>
+              </a:rPr>
+              <a:t>[~14 µs blocked measured R3] worker spin on staging.ready_op_id  (200 ms cap)</a:t>
+            </a:r>
+          </a:p>
+        </p:txBody>
+      </p:sp>
+      <p:sp>
+        <p:nvSpPr>
+          <p:cNvPr id="31" name="Oval 30"/>
+          <p:cNvSpPr/>
+          <p:nvPr/>
+        </p:nvSpPr>
+        <p:spPr>
+          <a:xfrm>
+            <a:off x="8449056" y="3474720"/>
+            <a:ext cx="292608" cy="292608"/>
+          </a:xfrm>
+          <a:prstGeom prst="ellipse">
+            <a:avLst/>
+          </a:prstGeom>
+          <a:solidFill>
+            <a:srgbClr val="FFFFFF"/>
+          </a:solidFill>
+          <a:ln w="19050">
+            <a:solidFill>
+              <a:srgbClr val="154FC2"/>
+            </a:solidFill>
+          </a:ln>
+        </p:spPr>
+        <p:style>
+          <a:lnRef idx="1">
+            <a:schemeClr val="accent1"/>
+          </a:lnRef>
+          <a:fillRef idx="3">
+            <a:schemeClr val="accent1"/>
+          </a:fillRef>
+          <a:effectRef idx="2">
+            <a:schemeClr val="accent1"/>
+          </a:effectRef>
+          <a:fontRef idx="minor">
+            <a:schemeClr val="lt1"/>
+          </a:fontRef>
+        </p:style>
+        <p:txBody>
+          <a:bodyPr rtlCol="0" anchor="ctr" lIns="0" rIns="0" tIns="0" bIns="0"/>
+          <a:lstStyle/>
+          <a:p>
+            <a:pPr algn="ctr"/>
+            <a:r>
+              <a:rPr sz="800" b="1">
+                <a:solidFill>
+                  <a:srgbClr val="154FC2"/>
+                </a:solidFill>
+              </a:rPr>
+              <a:t>A8r</a:t>
+            </a:r>
+          </a:p>
+        </p:txBody>
+      </p:sp>
+      <p:sp>
+        <p:nvSpPr>
+          <p:cNvPr id="32" name="TextBox 31"/>
+          <p:cNvSpPr txBox="1"/>
+          <p:nvPr/>
+        </p:nvSpPr>
+        <p:spPr>
+          <a:xfrm>
+            <a:off x="8778240" y="3529584"/>
+            <a:ext cx="2743200" cy="219456"/>
+          </a:xfrm>
+          <a:prstGeom prst="rect">
+            <a:avLst/>
+          </a:prstGeom>
+          <a:solidFill>
+            <a:srgbClr val="FFFFFF"/>
+          </a:solidFill>
+          <a:ln>
+            <a:noFill/>
+          </a:ln>
+        </p:spPr>
+        <p:txBody>
+          <a:bodyPr wrap="none" lIns="25400" rIns="25400" tIns="0" bIns="0">
+            <a:spAutoFit/>
+          </a:bodyPr>
+          <a:lstStyle/>
+          <a:p>
+            <a:pPr algn="l"/>
+            <a:r>
+              <a:rPr sz="850" b="1" i="0">
+                <a:solidFill>
+                  <a:srgbClr val="154FC2"/>
+                </a:solidFill>
+              </a:rPr>
+              <a:t>[1.5 µs est] ReadReceiver poll ReadRing.tail; reads ReadEntry</a:t>
+            </a:r>
+          </a:p>
+        </p:txBody>
+      </p:sp>
+      <p:sp>
+        <p:nvSpPr>
+          <p:cNvPr id="33" name="Oval 32"/>
+          <p:cNvSpPr/>
+          <p:nvPr/>
+        </p:nvSpPr>
+        <p:spPr>
+          <a:xfrm>
+            <a:off x="8449056" y="3730752"/>
+            <a:ext cx="292608" cy="292608"/>
+          </a:xfrm>
+          <a:prstGeom prst="ellipse">
+            <a:avLst/>
+          </a:prstGeom>
+          <a:solidFill>
+            <a:srgbClr val="FFF49C"/>
+          </a:solidFill>
+          <a:ln w="19050">
+            <a:solidFill>
+              <a:srgbClr val="F9A825"/>
+            </a:solidFill>
+          </a:ln>
+        </p:spPr>
+        <p:style>
+          <a:lnRef idx="1">
+            <a:schemeClr val="accent1"/>
+          </a:lnRef>
+          <a:fillRef idx="3">
+            <a:schemeClr val="accent1"/>
+          </a:fillRef>
+          <a:effectRef idx="2">
+            <a:schemeClr val="accent1"/>
+          </a:effectRef>
+          <a:fontRef idx="minor">
+            <a:schemeClr val="lt1"/>
+          </a:fontRef>
+        </p:style>
+        <p:txBody>
+          <a:bodyPr rtlCol="0" anchor="ctr" lIns="0" rIns="0" tIns="0" bIns="0"/>
+          <a:lstStyle/>
+          <a:p>
+            <a:pPr algn="ctr"/>
+            <a:r>
+              <a:rPr sz="800" b="1">
+                <a:solidFill>
+                  <a:srgbClr val="333333"/>
+                </a:solidFill>
+              </a:rPr>
+              <a:t>A9r</a:t>
+            </a:r>
+          </a:p>
+        </p:txBody>
+      </p:sp>
+      <p:sp>
+        <p:nvSpPr>
+          <p:cNvPr id="34" name="TextBox 33"/>
+          <p:cNvSpPr txBox="1"/>
+          <p:nvPr/>
+        </p:nvSpPr>
+        <p:spPr>
+          <a:xfrm>
+            <a:off x="8778240" y="3785616"/>
+            <a:ext cx="2743200" cy="219456"/>
+          </a:xfrm>
+          <a:prstGeom prst="rect">
+            <a:avLst/>
+          </a:prstGeom>
+          <a:solidFill>
+            <a:srgbClr val="FFFFFF"/>
+          </a:solidFill>
+          <a:ln>
+            <a:noFill/>
+          </a:ln>
+        </p:spPr>
+        <p:txBody>
+          <a:bodyPr wrap="none" lIns="25400" rIns="25400" tIns="0" bIns="0">
+            <a:spAutoFit/>
+          </a:bodyPr>
+          <a:lstStyle/>
+          <a:p>
+            <a:pPr algn="l"/>
+            <a:r>
+              <a:rPr sz="850" b="1" i="0">
+                <a:solidFill>
+                  <a:srgbClr val="154FC2"/>
+                </a:solidFill>
+              </a:rPr>
+              <a:t>[5 µs est] flush bucket + scan + acquire spinlock + sharer_bitmap |= (1&lt;&lt;src)  ★ peer-visible state change</a:t>
+            </a:r>
+          </a:p>
+        </p:txBody>
+      </p:sp>
+      <p:sp>
+        <p:nvSpPr>
+          <p:cNvPr id="35" name="Oval 34"/>
+          <p:cNvSpPr/>
+          <p:nvPr/>
+        </p:nvSpPr>
+        <p:spPr>
+          <a:xfrm>
+            <a:off x="8449056" y="3986784"/>
+            <a:ext cx="292608" cy="292608"/>
+          </a:xfrm>
+          <a:prstGeom prst="ellipse">
+            <a:avLst/>
+          </a:prstGeom>
+          <a:solidFill>
+            <a:srgbClr val="FFFFFF"/>
+          </a:solidFill>
+          <a:ln w="19050">
+            <a:solidFill>
+              <a:srgbClr val="154FC2"/>
+            </a:solidFill>
+          </a:ln>
+        </p:spPr>
+        <p:style>
+          <a:lnRef idx="1">
+            <a:schemeClr val="accent1"/>
+          </a:lnRef>
+          <a:fillRef idx="3">
+            <a:schemeClr val="accent1"/>
+          </a:fillRef>
+          <a:effectRef idx="2">
+            <a:schemeClr val="accent1"/>
+          </a:effectRef>
+          <a:fontRef idx="minor">
+            <a:schemeClr val="lt1"/>
+          </a:fontRef>
+        </p:style>
+        <p:txBody>
+          <a:bodyPr rtlCol="0" anchor="ctr" lIns="0" rIns="0" tIns="0" bIns="0"/>
+          <a:lstStyle/>
+          <a:p>
+            <a:pPr algn="ctr"/>
+            <a:r>
+              <a:rPr sz="800" b="1">
+                <a:solidFill>
+                  <a:srgbClr val="154FC2"/>
+                </a:solidFill>
+              </a:rPr>
+              <a:t>A10r</a:t>
+            </a:r>
+          </a:p>
+        </p:txBody>
+      </p:sp>
+      <p:sp>
+        <p:nvSpPr>
+          <p:cNvPr id="36" name="TextBox 35"/>
+          <p:cNvSpPr txBox="1"/>
+          <p:nvPr/>
+        </p:nvSpPr>
+        <p:spPr>
+          <a:xfrm>
+            <a:off x="8778240" y="4041648"/>
+            <a:ext cx="2743200" cy="219456"/>
+          </a:xfrm>
+          <a:prstGeom prst="rect">
+            <a:avLst/>
+          </a:prstGeom>
+          <a:solidFill>
+            <a:srgbClr val="FFFFFF"/>
+          </a:solidFill>
+          <a:ln>
+            <a:noFill/>
+          </a:ln>
+        </p:spPr>
+        <p:txBody>
+          <a:bodyPr wrap="none" lIns="25400" rIns="25400" tIns="0" bIns="0">
+            <a:spAutoFit/>
+          </a:bodyPr>
+          <a:lstStyle/>
+          <a:p>
+            <a:pPr algn="l"/>
+            <a:r>
+              <a:rPr sz="850" b="1" i="0">
+                <a:solidFill>
+                  <a:srgbClr val="154FC2"/>
+                </a:solidFill>
+              </a:rPr>
+              <a:t>[5 µs est] pool-&gt;read(blk_off, 4) → value_len; pool-&gt;read(blk_off+4, 1024)</a:t>
+            </a:r>
+          </a:p>
+        </p:txBody>
+      </p:sp>
+      <p:cxnSp>
+        <p:nvCxnSpPr>
+          <p:cNvPr id="37" name="Connector 36"/>
+          <p:cNvCxnSpPr/>
+          <p:nvPr/>
+        </p:nvCxnSpPr>
+        <p:spPr>
+          <a:xfrm>
+            <a:off x="8595360" y="4389120"/>
+            <a:ext cx="2651760" cy="0"/>
+          </a:xfrm>
+          <a:prstGeom prst="line">
+            <a:avLst/>
+          </a:prstGeom>
+          <a:ln w="20320">
+            <a:solidFill>
+              <a:srgbClr val="154FC2"/>
+            </a:solidFill>
+            <a:tailEnd type="triangle" w="med" h="med"/>
+          </a:ln>
+        </p:spPr>
+        <p:style>
+          <a:lnRef idx="2">
+            <a:schemeClr val="accent1"/>
+          </a:lnRef>
+          <a:fillRef idx="0">
+            <a:schemeClr val="accent1"/>
+          </a:fillRef>
+          <a:effectRef idx="1">
+            <a:schemeClr val="accent1"/>
+          </a:effectRef>
+          <a:fontRef idx="minor">
+            <a:schemeClr val="tx1"/>
+          </a:fontRef>
+        </p:style>
+      </p:cxnSp>
+      <p:sp>
+        <p:nvSpPr>
+          <p:cNvPr id="38" name="Oval 37"/>
+          <p:cNvSpPr/>
+          <p:nvPr/>
+        </p:nvSpPr>
+        <p:spPr>
+          <a:xfrm>
+            <a:off x="9774936" y="4242816"/>
+            <a:ext cx="292608" cy="292608"/>
+          </a:xfrm>
+          <a:prstGeom prst="ellipse">
+            <a:avLst/>
+          </a:prstGeom>
+          <a:solidFill>
+            <a:srgbClr val="FFFFFF"/>
+          </a:solidFill>
+          <a:ln w="19050">
+            <a:solidFill>
+              <a:srgbClr val="154FC2"/>
+            </a:solidFill>
+          </a:ln>
+        </p:spPr>
+        <p:style>
+          <a:lnRef idx="1">
+            <a:schemeClr val="accent1"/>
+          </a:lnRef>
+          <a:fillRef idx="3">
+            <a:schemeClr val="accent1"/>
+          </a:fillRef>
+          <a:effectRef idx="2">
+            <a:schemeClr val="accent1"/>
+          </a:effectRef>
+          <a:fontRef idx="minor">
+            <a:schemeClr val="lt1"/>
+          </a:fontRef>
+        </p:style>
+        <p:txBody>
+          <a:bodyPr rtlCol="0" anchor="ctr" lIns="0" rIns="0" tIns="0" bIns="0"/>
+          <a:lstStyle/>
+          <a:p>
+            <a:pPr algn="ctr"/>
+            <a:r>
+              <a:rPr sz="800" b="1">
+                <a:solidFill>
+                  <a:srgbClr val="154FC2"/>
+                </a:solidFill>
+              </a:rPr>
+              <a:t>A11r</a:t>
+            </a:r>
+          </a:p>
+        </p:txBody>
+      </p:sp>
+      <p:sp>
+        <p:nvSpPr>
+          <p:cNvPr id="39" name="TextBox 38"/>
+          <p:cNvSpPr txBox="1"/>
+          <p:nvPr/>
+        </p:nvSpPr>
+        <p:spPr>
+          <a:xfrm>
+            <a:off x="8458200" y="4133088"/>
+            <a:ext cx="2926080" cy="219456"/>
+          </a:xfrm>
+          <a:prstGeom prst="rect">
+            <a:avLst/>
+          </a:prstGeom>
+          <a:solidFill>
+            <a:srgbClr val="FFFFFF"/>
+          </a:solidFill>
+          <a:ln>
+            <a:noFill/>
+          </a:ln>
+        </p:spPr>
+        <p:txBody>
+          <a:bodyPr wrap="none" lIns="25400" rIns="25400" tIns="0" bIns="0">
+            <a:spAutoFit/>
+          </a:bodyPr>
+          <a:lstStyle/>
+          <a:p>
+            <a:pPr algn="l"/>
+            <a:r>
+              <a:rPr sz="850" b="1" i="0">
+                <a:solidFill>
+                  <a:srgbClr val="154FC2"/>
+                </a:solidFill>
+              </a:rPr>
+              <a:t>[1.0 µs est] write staging.value_bytes + lookup_epoch (C13) + status; flush 16 CL</a:t>
+            </a:r>
+          </a:p>
+        </p:txBody>
+      </p:sp>
+      <p:cxnSp>
+        <p:nvCxnSpPr>
+          <p:cNvPr id="40" name="Connector 39"/>
+          <p:cNvCxnSpPr/>
+          <p:nvPr/>
+        </p:nvCxnSpPr>
+        <p:spPr>
+          <a:xfrm>
+            <a:off x="8595360" y="4645152"/>
+            <a:ext cx="2651760" cy="0"/>
+          </a:xfrm>
+          <a:prstGeom prst="line">
+            <a:avLst/>
+          </a:prstGeom>
+          <a:ln w="20320">
+            <a:solidFill>
+              <a:srgbClr val="154FC2"/>
+            </a:solidFill>
+            <a:tailEnd type="triangle" w="med" h="med"/>
+          </a:ln>
+        </p:spPr>
+        <p:style>
+          <a:lnRef idx="2">
+            <a:schemeClr val="accent1"/>
+          </a:lnRef>
+          <a:fillRef idx="0">
+            <a:schemeClr val="accent1"/>
+          </a:fillRef>
+          <a:effectRef idx="1">
+            <a:schemeClr val="accent1"/>
+          </a:effectRef>
+          <a:fontRef idx="minor">
+            <a:schemeClr val="tx1"/>
+          </a:fontRef>
+        </p:style>
+      </p:cxnSp>
+      <p:sp>
+        <p:nvSpPr>
+          <p:cNvPr id="41" name="Oval 40"/>
+          <p:cNvSpPr/>
+          <p:nvPr/>
+        </p:nvSpPr>
+        <p:spPr>
+          <a:xfrm>
+            <a:off x="9774936" y="4498848"/>
+            <a:ext cx="292608" cy="292608"/>
+          </a:xfrm>
+          <a:prstGeom prst="ellipse">
+            <a:avLst/>
+          </a:prstGeom>
+          <a:solidFill>
+            <a:srgbClr val="FFF49C"/>
+          </a:solidFill>
+          <a:ln w="19050">
+            <a:solidFill>
+              <a:srgbClr val="F9A825"/>
+            </a:solidFill>
+          </a:ln>
+        </p:spPr>
+        <p:style>
+          <a:lnRef idx="1">
+            <a:schemeClr val="accent1"/>
+          </a:lnRef>
+          <a:fillRef idx="3">
+            <a:schemeClr val="accent1"/>
+          </a:fillRef>
+          <a:effectRef idx="2">
+            <a:schemeClr val="accent1"/>
+          </a:effectRef>
+          <a:fontRef idx="minor">
+            <a:schemeClr val="lt1"/>
+          </a:fontRef>
+        </p:style>
+        <p:txBody>
+          <a:bodyPr rtlCol="0" anchor="ctr" lIns="0" rIns="0" tIns="0" bIns="0"/>
+          <a:lstStyle/>
+          <a:p>
+            <a:pPr algn="ctr"/>
+            <a:r>
+              <a:rPr sz="800" b="1">
+                <a:solidFill>
+                  <a:srgbClr val="333333"/>
+                </a:solidFill>
+              </a:rPr>
+              <a:t>A12r</a:t>
+            </a:r>
+          </a:p>
+        </p:txBody>
+      </p:sp>
+      <p:sp>
+        <p:nvSpPr>
+          <p:cNvPr id="42" name="TextBox 41"/>
+          <p:cNvSpPr txBox="1"/>
+          <p:nvPr/>
+        </p:nvSpPr>
+        <p:spPr>
+          <a:xfrm>
+            <a:off x="8458200" y="4736592"/>
+            <a:ext cx="2926080" cy="219456"/>
+          </a:xfrm>
+          <a:prstGeom prst="rect">
+            <a:avLst/>
+          </a:prstGeom>
+          <a:solidFill>
+            <a:srgbClr val="FFFFFF"/>
+          </a:solidFill>
+          <a:ln>
+            <a:noFill/>
+          </a:ln>
+        </p:spPr>
+        <p:txBody>
+          <a:bodyPr wrap="none" lIns="25400" rIns="25400" tIns="0" bIns="0">
+            <a:spAutoFit/>
+          </a:bodyPr>
+          <a:lstStyle/>
+          <a:p>
+            <a:pPr algn="l"/>
+            <a:r>
+              <a:rPr sz="850" b="1" i="0">
+                <a:solidFill>
+                  <a:srgbClr val="154FC2"/>
+                </a:solidFill>
+              </a:rPr>
+              <a:t>[0.07 µs est] ★ staging.ready_op_id = req_op_id ★  (release-publish)</a:t>
+            </a:r>
+          </a:p>
+        </p:txBody>
+      </p:sp>
+      <p:cxnSp>
+        <p:nvCxnSpPr>
+          <p:cNvPr id="43" name="Connector 42"/>
+          <p:cNvCxnSpPr/>
+          <p:nvPr/>
+        </p:nvCxnSpPr>
+        <p:spPr>
+          <a:xfrm flipH="1">
+            <a:off x="1463040" y="4901184"/>
+            <a:ext cx="9784080" cy="0"/>
+          </a:xfrm>
+          <a:prstGeom prst="line">
+            <a:avLst/>
+          </a:prstGeom>
+          <a:ln w="20320">
+            <a:solidFill>
+              <a:srgbClr val="154FC2"/>
+            </a:solidFill>
+            <a:tailEnd type="triangle" w="med" h="med"/>
+          </a:ln>
+        </p:spPr>
+        <p:style>
+          <a:lnRef idx="2">
+            <a:schemeClr val="accent1"/>
+          </a:lnRef>
+          <a:fillRef idx="0">
+            <a:schemeClr val="accent1"/>
+          </a:fillRef>
+          <a:effectRef idx="1">
+            <a:schemeClr val="accent1"/>
+          </a:effectRef>
+          <a:fontRef idx="minor">
+            <a:schemeClr val="tx1"/>
+          </a:fontRef>
+        </p:style>
+      </p:cxnSp>
+      <p:sp>
+        <p:nvSpPr>
+          <p:cNvPr id="44" name="Oval 43"/>
+          <p:cNvSpPr/>
+          <p:nvPr/>
+        </p:nvSpPr>
+        <p:spPr>
+          <a:xfrm>
+            <a:off x="6208776" y="4754880"/>
+            <a:ext cx="292608" cy="292608"/>
+          </a:xfrm>
+          <a:prstGeom prst="ellipse">
+            <a:avLst/>
+          </a:prstGeom>
+          <a:solidFill>
+            <a:srgbClr val="FFFFFF"/>
+          </a:solidFill>
+          <a:ln w="19050">
+            <a:solidFill>
+              <a:srgbClr val="154FC2"/>
+            </a:solidFill>
+          </a:ln>
+        </p:spPr>
+        <p:style>
+          <a:lnRef idx="1">
+            <a:schemeClr val="accent1"/>
+          </a:lnRef>
+          <a:fillRef idx="3">
+            <a:schemeClr val="accent1"/>
+          </a:fillRef>
+          <a:effectRef idx="2">
+            <a:schemeClr val="accent1"/>
+          </a:effectRef>
+          <a:fontRef idx="minor">
+            <a:schemeClr val="lt1"/>
+          </a:fontRef>
+        </p:style>
+        <p:txBody>
+          <a:bodyPr rtlCol="0" anchor="ctr" lIns="0" rIns="0" tIns="0" bIns="0"/>
+          <a:lstStyle/>
+          <a:p>
+            <a:pPr algn="ctr"/>
+            <a:r>
+              <a:rPr sz="800" b="1">
+                <a:solidFill>
+                  <a:srgbClr val="154FC2"/>
+                </a:solidFill>
+              </a:rPr>
+              <a:t>A13r</a:t>
+            </a:r>
+          </a:p>
+        </p:txBody>
+      </p:sp>
+      <p:sp>
+        <p:nvSpPr>
+          <p:cNvPr id="45" name="TextBox 44"/>
+          <p:cNvSpPr txBox="1"/>
+          <p:nvPr/>
+        </p:nvSpPr>
+        <p:spPr>
+          <a:xfrm>
+            <a:off x="4892040" y="4992624"/>
+            <a:ext cx="2926080" cy="219456"/>
+          </a:xfrm>
+          <a:prstGeom prst="rect">
+            <a:avLst/>
+          </a:prstGeom>
+          <a:solidFill>
+            <a:srgbClr val="FFFFFF"/>
+          </a:solidFill>
+          <a:ln>
+            <a:noFill/>
+          </a:ln>
+        </p:spPr>
+        <p:txBody>
+          <a:bodyPr wrap="none" lIns="25400" rIns="25400" tIns="0" bIns="0">
+            <a:spAutoFit/>
+          </a:bodyPr>
+          <a:lstStyle/>
+          <a:p>
+            <a:pPr algn="l"/>
+            <a:r>
+              <a:rPr sz="850" b="1" i="0">
+                <a:solidFill>
+                  <a:srgbClr val="154FC2"/>
+                </a:solidFill>
+              </a:rPr>
+              <a:t>[&lt; 0.1 µs est] worker A7r spin observes ready_op_id  → break</a:t>
+            </a:r>
+          </a:p>
+        </p:txBody>
+      </p:sp>
+      <p:sp>
+        <p:nvSpPr>
+          <p:cNvPr id="46" name="Rectangle 45"/>
+          <p:cNvSpPr/>
+          <p:nvPr/>
+        </p:nvSpPr>
+        <p:spPr>
+          <a:xfrm>
+            <a:off x="1380744" y="3319272"/>
+            <a:ext cx="164592" cy="1801368"/>
+          </a:xfrm>
+          <a:prstGeom prst="rect">
+            <a:avLst/>
+          </a:prstGeom>
+          <a:solidFill>
+            <a:srgbClr val="FFCDD2"/>
+          </a:solidFill>
+          <a:ln w="6350">
+            <a:solidFill>
+              <a:srgbClr val="C62828"/>
+            </a:solidFill>
+          </a:ln>
+        </p:spPr>
+        <p:style>
+          <a:lnRef idx="1">
+            <a:schemeClr val="accent1"/>
+          </a:lnRef>
+          <a:fillRef idx="3">
+            <a:schemeClr val="accent1"/>
+          </a:fillRef>
+          <a:effectRef idx="2">
+            <a:schemeClr val="accent1"/>
+          </a:effectRef>
+          <a:fontRef idx="minor">
+            <a:schemeClr val="lt1"/>
+          </a:fontRef>
+        </p:style>
+        <p:txBody>
+          <a:bodyPr rtlCol="0" anchor="ctr"/>
+          <a:lstStyle/>
+          <a:p>
+            <a:pPr algn="ctr"/>
+          </a:p>
+        </p:txBody>
+      </p:sp>
+      <p:sp>
+        <p:nvSpPr>
+          <p:cNvPr id="47" name="Oval 46"/>
+          <p:cNvSpPr/>
+          <p:nvPr/>
+        </p:nvSpPr>
+        <p:spPr>
+          <a:xfrm>
+            <a:off x="1316736" y="5010912"/>
+            <a:ext cx="292608" cy="292608"/>
+          </a:xfrm>
+          <a:prstGeom prst="ellipse">
+            <a:avLst/>
+          </a:prstGeom>
+          <a:solidFill>
+            <a:srgbClr val="FFF49C"/>
+          </a:solidFill>
+          <a:ln w="19050">
+            <a:solidFill>
+              <a:srgbClr val="F9A825"/>
+            </a:solidFill>
+          </a:ln>
+        </p:spPr>
+        <p:style>
+          <a:lnRef idx="1">
+            <a:schemeClr val="accent1"/>
+          </a:lnRef>
+          <a:fillRef idx="3">
+            <a:schemeClr val="accent1"/>
+          </a:fillRef>
+          <a:effectRef idx="2">
+            <a:schemeClr val="accent1"/>
+          </a:effectRef>
+          <a:fontRef idx="minor">
+            <a:schemeClr val="lt1"/>
+          </a:fontRef>
+        </p:style>
+        <p:txBody>
+          <a:bodyPr rtlCol="0" anchor="ctr" lIns="0" rIns="0" tIns="0" bIns="0"/>
+          <a:lstStyle/>
+          <a:p>
+            <a:pPr algn="ctr"/>
+            <a:r>
+              <a:rPr sz="800" b="1">
+                <a:solidFill>
+                  <a:srgbClr val="333333"/>
+                </a:solidFill>
+              </a:rPr>
+              <a:t>A14r</a:t>
+            </a:r>
+          </a:p>
+        </p:txBody>
+      </p:sp>
+      <p:sp>
+        <p:nvSpPr>
+          <p:cNvPr id="48" name="TextBox 47"/>
+          <p:cNvSpPr txBox="1"/>
+          <p:nvPr/>
+        </p:nvSpPr>
+        <p:spPr>
+          <a:xfrm>
+            <a:off x="1645920" y="5065776"/>
+            <a:ext cx="2743200" cy="219456"/>
+          </a:xfrm>
+          <a:prstGeom prst="rect">
+            <a:avLst/>
+          </a:prstGeom>
+          <a:solidFill>
+            <a:srgbClr val="FFFFFF"/>
+          </a:solidFill>
+          <a:ln>
+            <a:noFill/>
+          </a:ln>
+        </p:spPr>
+        <p:txBody>
+          <a:bodyPr wrap="none" lIns="25400" rIns="25400" tIns="0" bIns="0">
+            <a:spAutoFit/>
+          </a:bodyPr>
+          <a:lstStyle/>
+          <a:p>
+            <a:pPr algn="l"/>
+            <a:r>
+              <a:rPr sz="850" b="1" i="0">
+                <a:solidFill>
+                  <a:srgbClr val="154FC2"/>
+                </a:solidFill>
+              </a:rPr>
+              <a:t>[0.4 µs measured R4] C13 validate: lookup_epoch &gt;= my_epoch_at_send; memcpy value_bytes from staging</a:t>
+            </a:r>
+          </a:p>
+        </p:txBody>
+      </p:sp>
+      <p:sp>
+        <p:nvSpPr>
+          <p:cNvPr id="49" name="Oval 48"/>
+          <p:cNvSpPr/>
+          <p:nvPr/>
+        </p:nvSpPr>
+        <p:spPr>
+          <a:xfrm>
+            <a:off x="1316736" y="5266944"/>
+            <a:ext cx="292608" cy="292608"/>
+          </a:xfrm>
+          <a:prstGeom prst="ellipse">
+            <a:avLst/>
+          </a:prstGeom>
+          <a:solidFill>
+            <a:srgbClr val="FFFFFF"/>
+          </a:solidFill>
+          <a:ln w="19050">
+            <a:solidFill>
+              <a:srgbClr val="154FC2"/>
+            </a:solidFill>
+          </a:ln>
+        </p:spPr>
+        <p:style>
+          <a:lnRef idx="1">
+            <a:schemeClr val="accent1"/>
+          </a:lnRef>
+          <a:fillRef idx="3">
+            <a:schemeClr val="accent1"/>
+          </a:fillRef>
+          <a:effectRef idx="2">
+            <a:schemeClr val="accent1"/>
+          </a:effectRef>
+          <a:fontRef idx="minor">
+            <a:schemeClr val="lt1"/>
+          </a:fontRef>
+        </p:style>
+        <p:txBody>
+          <a:bodyPr rtlCol="0" anchor="ctr" lIns="0" rIns="0" tIns="0" bIns="0"/>
+          <a:lstStyle/>
+          <a:p>
+            <a:pPr algn="ctr"/>
+            <a:r>
+              <a:rPr sz="800" b="1">
+                <a:solidFill>
+                  <a:srgbClr val="154FC2"/>
+                </a:solidFill>
+              </a:rPr>
+              <a:t>A15r</a:t>
+            </a:r>
+          </a:p>
+        </p:txBody>
+      </p:sp>
+      <p:sp>
+        <p:nvSpPr>
+          <p:cNvPr id="50" name="TextBox 49"/>
+          <p:cNvSpPr txBox="1"/>
+          <p:nvPr/>
+        </p:nvSpPr>
+        <p:spPr>
+          <a:xfrm>
+            <a:off x="1645920" y="5321808"/>
+            <a:ext cx="2743200" cy="219456"/>
+          </a:xfrm>
+          <a:prstGeom prst="rect">
+            <a:avLst/>
+          </a:prstGeom>
+          <a:solidFill>
+            <a:srgbClr val="FFFFFF"/>
+          </a:solidFill>
+          <a:ln>
+            <a:noFill/>
+          </a:ln>
+        </p:spPr>
+        <p:txBody>
+          <a:bodyPr wrap="none" lIns="25400" rIns="25400" tIns="0" bIns="0">
+            <a:spAutoFit/>
+          </a:bodyPr>
+          <a:lstStyle/>
+          <a:p>
+            <a:pPr algn="l"/>
+            <a:r>
+              <a:rPr sz="850" b="1" i="0">
+                <a:solidFill>
+                  <a:srgbClr val="154FC2"/>
+                </a:solidFill>
+              </a:rPr>
+              <a:t>[1.0 µs measured R6+misc] cache_pool_insert (L2 only — no TLS L1 to populate); return</a:t>
+            </a:r>
+          </a:p>
+        </p:txBody>
+      </p:sp>
+      <p:sp>
+        <p:nvSpPr>
+          <p:cNvPr id="51" name="Rounded Rectangle 50"/>
+          <p:cNvSpPr/>
+          <p:nvPr/>
+        </p:nvSpPr>
+        <p:spPr>
+          <a:xfrm>
+            <a:off x="274320" y="5989320"/>
+            <a:ext cx="7772400" cy="292608"/>
+          </a:xfrm>
+          <a:prstGeom prst="roundRect">
+            <a:avLst/>
+          </a:prstGeom>
+          <a:solidFill>
+            <a:srgbClr val="FFF49C"/>
+          </a:solidFill>
+          <a:ln w="9525">
+            <a:solidFill>
+              <a:srgbClr val="F9A825"/>
+            </a:solidFill>
+          </a:ln>
+        </p:spPr>
+        <p:style>
+          <a:lnRef idx="1">
+            <a:schemeClr val="accent1"/>
+          </a:lnRef>
+          <a:fillRef idx="3">
+            <a:schemeClr val="accent1"/>
+          </a:fillRef>
+          <a:effectRef idx="2">
+            <a:schemeClr val="accent1"/>
+          </a:effectRef>
+          <a:fontRef idx="minor">
+            <a:schemeClr val="lt1"/>
+          </a:fontRef>
+        </p:style>
+        <p:txBody>
+          <a:bodyPr rtlCol="0" anchor="ctr" lIns="101600" rIns="101600" tIns="25400" bIns="25400"/>
+          <a:lstStyle/>
+          <a:p>
+            <a:pPr algn="l"/>
+            <a:r>
+              <a:rPr sz="1000" b="1">
+                <a:solidFill>
+                  <a:srgbClr val="0D327D"/>
+                </a:solidFill>
+              </a:rPr>
+              <a:t>End-to-end:  L2 hit ≈ 7 µs (82%, no TLS short-circuit)  |  owner-self miss ≈ 10 µs (17%)  |  cross-host miss ≈ 22 µs (0.2%)</a:t>
+            </a:r>
+          </a:p>
+        </p:txBody>
+      </p:sp>
+      <p:sp>
+        <p:nvSpPr>
+          <p:cNvPr id="52" name="Rounded Rectangle 51"/>
+          <p:cNvSpPr/>
+          <p:nvPr/>
+        </p:nvSpPr>
+        <p:spPr>
+          <a:xfrm>
+            <a:off x="274320" y="6355080"/>
+            <a:ext cx="7772400" cy="365760"/>
+          </a:xfrm>
+          <a:prstGeom prst="roundRect">
+            <a:avLst/>
+          </a:prstGeom>
+          <a:solidFill>
+            <a:srgbClr val="FFFFFF"/>
+          </a:solidFill>
+          <a:ln w="7620">
+            <a:solidFill>
+              <a:srgbClr val="9E9E9E"/>
+            </a:solidFill>
+          </a:ln>
+        </p:spPr>
+        <p:style>
+          <a:lnRef idx="1">
+            <a:schemeClr val="accent1"/>
+          </a:lnRef>
+          <a:fillRef idx="3">
+            <a:schemeClr val="accent1"/>
+          </a:fillRef>
+          <a:effectRef idx="2">
+            <a:schemeClr val="accent1"/>
+          </a:effectRef>
+          <a:fontRef idx="minor">
+            <a:schemeClr val="lt1"/>
+          </a:fontRef>
+        </p:style>
+        <p:txBody>
+          <a:bodyPr rtlCol="0" anchor="ctr"/>
+          <a:lstStyle/>
+          <a:p>
+            <a:pPr algn="ctr"/>
+          </a:p>
+        </p:txBody>
+      </p:sp>
+      <p:sp>
+        <p:nvSpPr>
+          <p:cNvPr id="53" name="TextBox 52"/>
+          <p:cNvSpPr txBox="1"/>
+          <p:nvPr/>
+        </p:nvSpPr>
+        <p:spPr>
+          <a:xfrm>
+            <a:off x="365760" y="6391656"/>
+            <a:ext cx="1828800" cy="292608"/>
+          </a:xfrm>
+          <a:prstGeom prst="rect">
+            <a:avLst/>
+          </a:prstGeom>
+          <a:noFill/>
+        </p:spPr>
+        <p:txBody>
+          <a:bodyPr wrap="none" lIns="25400" rIns="25400" tIns="0" bIns="0">
+            <a:spAutoFit/>
+          </a:bodyPr>
+          <a:lstStyle/>
+          <a:p>
+            <a:pPr algn="l"/>
+            <a:r>
               <a:rPr sz="900" b="1">
                 <a:solidFill>
+                  <a:srgbClr val="154FC2"/>
+                </a:solidFill>
+              </a:rPr>
+              <a:t>● A*r step</a:t>
+            </a:r>
+          </a:p>
+        </p:txBody>
+      </p:sp>
+      <p:sp>
+        <p:nvSpPr>
+          <p:cNvPr id="54" name="TextBox 53"/>
+          <p:cNvSpPr txBox="1"/>
+          <p:nvPr/>
+        </p:nvSpPr>
+        <p:spPr>
+          <a:xfrm>
+            <a:off x="2240279" y="6391656"/>
+            <a:ext cx="1828800" cy="292608"/>
+          </a:xfrm>
+          <a:prstGeom prst="rect">
+            <a:avLst/>
+          </a:prstGeom>
+          <a:noFill/>
+        </p:spPr>
+        <p:txBody>
+          <a:bodyPr wrap="none" lIns="25400" rIns="25400" tIns="0" bIns="0">
+            <a:spAutoFit/>
+          </a:bodyPr>
+          <a:lstStyle/>
+          <a:p>
+            <a:pPr algn="l"/>
+            <a:r>
+              <a:rPr sz="900" b="1">
+                <a:solidFill>
+                  <a:srgbClr val="C62828"/>
+                </a:solidFill>
+              </a:rPr>
+              <a:t>● Cross-host blocking (A7r)</a:t>
+            </a:r>
+          </a:p>
+        </p:txBody>
+      </p:sp>
+      <p:sp>
+        <p:nvSpPr>
+          <p:cNvPr id="55" name="TextBox 54"/>
+          <p:cNvSpPr txBox="1"/>
+          <p:nvPr/>
+        </p:nvSpPr>
+        <p:spPr>
+          <a:xfrm>
+            <a:off x="4114800" y="6391656"/>
+            <a:ext cx="1828800" cy="292608"/>
+          </a:xfrm>
+          <a:prstGeom prst="rect">
+            <a:avLst/>
+          </a:prstGeom>
+          <a:noFill/>
+        </p:spPr>
+        <p:txBody>
+          <a:bodyPr wrap="none" lIns="25400" rIns="25400" tIns="0" bIns="0">
+            <a:spAutoFit/>
+          </a:bodyPr>
+          <a:lstStyle/>
+          <a:p>
+            <a:pPr algn="l"/>
+            <a:r>
+              <a:rPr sz="900" b="1">
+                <a:solidFill>
+                  <a:srgbClr val="F9A825"/>
+                </a:solidFill>
+              </a:rPr>
+              <a:t>★ Linearization (A2r, A9r, A12r, A14r)</a:t>
+            </a:r>
+          </a:p>
+        </p:txBody>
+      </p:sp>
+      <p:sp>
+        <p:nvSpPr>
+          <p:cNvPr id="56" name="TextBox 55"/>
+          <p:cNvSpPr txBox="1"/>
+          <p:nvPr/>
+        </p:nvSpPr>
+        <p:spPr>
+          <a:xfrm>
+            <a:off x="5989320" y="6391656"/>
+            <a:ext cx="1828800" cy="292608"/>
+          </a:xfrm>
+          <a:prstGeom prst="rect">
+            <a:avLst/>
+          </a:prstGeom>
+          <a:noFill/>
+        </p:spPr>
+        <p:txBody>
+          <a:bodyPr wrap="none" lIns="25400" rIns="25400" tIns="0" bIns="0">
+            <a:spAutoFit/>
+          </a:bodyPr>
+          <a:lstStyle/>
+          <a:p>
+            <a:pPr algn="l"/>
+            <a:r>
+              <a:rPr sz="900" b="1">
+                <a:solidFill>
                   <a:srgbClr val="FFFFFF"/>
                 </a:solidFill>
               </a:rPr>
@@ -10814,7 +11962,7 @@
       </p:sp>
       <p:sp>
         <p:nvSpPr>
-          <p:cNvPr id="30" name="TextBox 29"/>
+          <p:cNvPr id="57" name="TextBox 56"/>
           <p:cNvSpPr txBox="1"/>
           <p:nvPr/>
         </p:nvSpPr>
@@ -10838,10 +11986,10 @@
             <a:r>
               <a:rPr sz="1100" b="1">
                 <a:solidFill>
-                  <a:srgbClr val="8C3200"/>
-                </a:solidFill>
-              </a:rPr>
-              <a:t>5 steps · 1 actor · 0 blocking points</a:t>
+                  <a:srgbClr val="0D327D"/>
+                </a:solidFill>
+              </a:rPr>
+              <a:t>15 steps · 3 actors · 1 blocking point  (NO TLS)</a:t>
             </a:r>
           </a:p>
         </p:txBody>
@@ -10855,6 +12003,1283 @@
 </file>
 
 <file path=ppt/slides/slide6.xml><?xml version="1.0" encoding="utf-8"?>
+<p:sld xmlns:a="http://schemas.openxmlformats.org/drawingml/2006/main" xmlns:p="http://schemas.openxmlformats.org/presentationml/2006/main" xmlns:r="http://schemas.openxmlformats.org/officeDocument/2006/relationships">
+  <p:cSld>
+    <p:spTree>
+      <p:nvGrpSpPr>
+        <p:cNvPr id="1" name=""/>
+        <p:cNvGrpSpPr/>
+        <p:nvPr/>
+      </p:nvGrpSpPr>
+      <p:grpSpPr/>
+      <p:sp>
+        <p:nvSpPr>
+          <p:cNvPr id="2" name="TextBox 1"/>
+          <p:cNvSpPr txBox="1"/>
+          <p:nvPr/>
+        </p:nvSpPr>
+        <p:spPr>
+          <a:xfrm>
+            <a:off x="274320" y="91440"/>
+            <a:ext cx="11704320" cy="502920"/>
+          </a:xfrm>
+          <a:prstGeom prst="rect">
+            <a:avLst/>
+          </a:prstGeom>
+          <a:noFill/>
+        </p:spPr>
+        <p:txBody>
+          <a:bodyPr wrap="none" tIns="0" bIns="0">
+            <a:spAutoFit/>
+          </a:bodyPr>
+          <a:lstStyle/>
+          <a:p>
+            <a:r>
+              <a:rPr sz="2200" b="1">
+                <a:solidFill>
+                  <a:srgbClr val="E65100"/>
+                </a:solidFill>
+              </a:rPr>
+              <a:t>Protocol C — Read path: search(K=1024 B) under LRC read-singleshot, T=64</a:t>
+            </a:r>
+          </a:p>
+        </p:txBody>
+      </p:sp>
+      <p:sp>
+        <p:nvSpPr>
+          <p:cNvPr id="3" name="TextBox 2"/>
+          <p:cNvSpPr txBox="1"/>
+          <p:nvPr/>
+        </p:nvSpPr>
+        <p:spPr>
+          <a:xfrm>
+            <a:off x="274320" y="566928"/>
+            <a:ext cx="11704320" cy="292608"/>
+          </a:xfrm>
+          <a:prstGeom prst="rect">
+            <a:avLst/>
+          </a:prstGeom>
+          <a:noFill/>
+        </p:spPr>
+        <p:txBody>
+          <a:bodyPr wrap="none" tIns="0" bIns="0">
+            <a:spAutoFit/>
+          </a:bodyPr>
+          <a:lstStyle/>
+          <a:p>
+            <a:r>
+              <a:rPr sz="1100" i="1">
+                <a:solidFill>
+                  <a:srgbClr val="9E9E9E"/>
+                </a:solidFill>
+              </a:rPr>
+              <a:t>5 narrative steps · 1 actor · per-step latency in [µs]  (C inferred from CXL primitives — no search() DECOMP_REC probe)</a:t>
+            </a:r>
+          </a:p>
+        </p:txBody>
+      </p:sp>
+      <p:sp>
+        <p:nvSpPr>
+          <p:cNvPr id="4" name="Rounded Rectangle 3"/>
+          <p:cNvSpPr/>
+          <p:nvPr/>
+        </p:nvSpPr>
+        <p:spPr>
+          <a:xfrm>
+            <a:off x="731519" y="1188720"/>
+            <a:ext cx="2926080" cy="411480"/>
+          </a:xfrm>
+          <a:prstGeom prst="roundRect">
+            <a:avLst/>
+          </a:prstGeom>
+          <a:solidFill>
+            <a:srgbClr val="E3F2FD"/>
+          </a:solidFill>
+          <a:ln w="15875">
+            <a:solidFill>
+              <a:srgbClr val="1565C0"/>
+            </a:solidFill>
+          </a:ln>
+        </p:spPr>
+        <p:style>
+          <a:lnRef idx="1">
+            <a:schemeClr val="accent1"/>
+          </a:lnRef>
+          <a:fillRef idx="3">
+            <a:schemeClr val="accent1"/>
+          </a:fillRef>
+          <a:effectRef idx="2">
+            <a:schemeClr val="accent1"/>
+          </a:effectRef>
+          <a:fontRef idx="minor">
+            <a:schemeClr val="lt1"/>
+          </a:fontRef>
+        </p:style>
+        <p:txBody>
+          <a:bodyPr rtlCol="0" anchor="ctr" lIns="38100" rIns="38100" tIns="25400" bIns="25400" wrap="square"/>
+          <a:lstStyle/>
+          <a:p>
+            <a:pPr algn="ctr"/>
+            <a:r>
+              <a:rPr sz="1000" b="1">
+                <a:solidFill>
+                  <a:srgbClr val="1565C0"/>
+                </a:solidFill>
+              </a:rPr>
+              <a:t>host 0  worker (caller)</a:t>
+            </a:r>
+          </a:p>
+        </p:txBody>
+      </p:sp>
+      <p:cxnSp>
+        <p:nvCxnSpPr>
+          <p:cNvPr id="5" name="Connector 4"/>
+          <p:cNvCxnSpPr/>
+          <p:nvPr/>
+        </p:nvCxnSpPr>
+        <p:spPr>
+          <a:xfrm>
+            <a:off x="2194560" y="1600200"/>
+            <a:ext cx="0" cy="4389120"/>
+          </a:xfrm>
+          <a:prstGeom prst="line">
+            <a:avLst/>
+          </a:prstGeom>
+          <a:ln w="7620">
+            <a:solidFill>
+              <a:srgbClr val="9E9E9E"/>
+            </a:solidFill>
+            <a:prstDash val="dash"/>
+          </a:ln>
+        </p:spPr>
+        <p:style>
+          <a:lnRef idx="2">
+            <a:schemeClr val="accent1"/>
+          </a:lnRef>
+          <a:fillRef idx="0">
+            <a:schemeClr val="accent1"/>
+          </a:fillRef>
+          <a:effectRef idx="1">
+            <a:schemeClr val="accent1"/>
+          </a:effectRef>
+          <a:fontRef idx="minor">
+            <a:schemeClr val="tx1"/>
+          </a:fontRef>
+        </p:style>
+      </p:cxnSp>
+      <p:sp>
+        <p:nvSpPr>
+          <p:cNvPr id="6" name="Rounded Rectangle 5"/>
+          <p:cNvSpPr/>
+          <p:nvPr/>
+        </p:nvSpPr>
+        <p:spPr>
+          <a:xfrm>
+            <a:off x="5943600" y="1188720"/>
+            <a:ext cx="5852160" cy="411480"/>
+          </a:xfrm>
+          <a:prstGeom prst="roundRect">
+            <a:avLst/>
+          </a:prstGeom>
+          <a:solidFill>
+            <a:srgbClr val="FFF3E0"/>
+          </a:solidFill>
+          <a:ln w="15875">
+            <a:solidFill>
+              <a:srgbClr val="E65100"/>
+            </a:solidFill>
+          </a:ln>
+        </p:spPr>
+        <p:style>
+          <a:lnRef idx="1">
+            <a:schemeClr val="accent1"/>
+          </a:lnRef>
+          <a:fillRef idx="3">
+            <a:schemeClr val="accent1"/>
+          </a:fillRef>
+          <a:effectRef idx="2">
+            <a:schemeClr val="accent1"/>
+          </a:effectRef>
+          <a:fontRef idx="minor">
+            <a:schemeClr val="lt1"/>
+          </a:fontRef>
+        </p:style>
+        <p:txBody>
+          <a:bodyPr rtlCol="0" anchor="ctr" lIns="38100" rIns="38100" tIns="25400" bIns="25400" wrap="square"/>
+          <a:lstStyle/>
+          <a:p>
+            <a:pPr algn="ctr"/>
+            <a:r>
+              <a:rPr sz="1100" b="1">
+                <a:solidFill>
+                  <a:srgbClr val="8C3200"/>
+                </a:solidFill>
+              </a:rPr>
+              <a:t>CXL state read on the search path</a:t>
+            </a:r>
+          </a:p>
+        </p:txBody>
+      </p:sp>
+      <p:sp>
+        <p:nvSpPr>
+          <p:cNvPr id="7" name="Rounded Rectangle 6"/>
+          <p:cNvSpPr/>
+          <p:nvPr/>
+        </p:nvSpPr>
+        <p:spPr>
+          <a:xfrm>
+            <a:off x="6126480" y="1691640"/>
+            <a:ext cx="5486400" cy="365760"/>
+          </a:xfrm>
+          <a:prstGeom prst="roundRect">
+            <a:avLst/>
+          </a:prstGeom>
+          <a:solidFill>
+            <a:srgbClr val="C8DAFB"/>
+          </a:solidFill>
+          <a:ln w="15875">
+            <a:solidFill>
+              <a:srgbClr val="154FC2"/>
+            </a:solidFill>
+          </a:ln>
+        </p:spPr>
+        <p:style>
+          <a:lnRef idx="1">
+            <a:schemeClr val="accent1"/>
+          </a:lnRef>
+          <a:fillRef idx="3">
+            <a:schemeClr val="accent1"/>
+          </a:fillRef>
+          <a:effectRef idx="2">
+            <a:schemeClr val="accent1"/>
+          </a:effectRef>
+          <a:fontRef idx="minor">
+            <a:schemeClr val="lt1"/>
+          </a:fontRef>
+        </p:style>
+        <p:txBody>
+          <a:bodyPr rtlCol="0" anchor="ctr" lIns="38100" rIns="38100" tIns="25400" bIns="25400" wrap="square"/>
+          <a:lstStyle/>
+          <a:p>
+            <a:pPr algn="ctr"/>
+            <a:r>
+              <a:rPr sz="1000" b="1">
+                <a:solidFill>
+                  <a:srgbClr val="0D327D"/>
+                </a:solidFill>
+              </a:rPr>
+              <a:t>BucketLockEntry.write_epoch (cacheline_u64) — read seqlock tag</a:t>
+            </a:r>
+          </a:p>
+        </p:txBody>
+      </p:sp>
+      <p:sp>
+        <p:nvSpPr>
+          <p:cNvPr id="8" name="Rounded Rectangle 7"/>
+          <p:cNvSpPr/>
+          <p:nvPr/>
+        </p:nvSpPr>
+        <p:spPr>
+          <a:xfrm>
+            <a:off x="6126480" y="2148840"/>
+            <a:ext cx="5486400" cy="365760"/>
+          </a:xfrm>
+          <a:prstGeom prst="roundRect">
+            <a:avLst/>
+          </a:prstGeom>
+          <a:solidFill>
+            <a:srgbClr val="C8DAFB"/>
+          </a:solidFill>
+          <a:ln w="15875">
+            <a:solidFill>
+              <a:srgbClr val="154FC2"/>
+            </a:solidFill>
+          </a:ln>
+        </p:spPr>
+        <p:style>
+          <a:lnRef idx="1">
+            <a:schemeClr val="accent1"/>
+          </a:lnRef>
+          <a:fillRef idx="3">
+            <a:schemeClr val="accent1"/>
+          </a:fillRef>
+          <a:effectRef idx="2">
+            <a:schemeClr val="accent1"/>
+          </a:effectRef>
+          <a:fontRef idx="minor">
+            <a:schemeClr val="lt1"/>
+          </a:fontRef>
+        </p:style>
+        <p:txBody>
+          <a:bodyPr rtlCol="0" anchor="ctr" lIns="38100" rIns="38100" tIns="25400" bIns="25400" wrap="square"/>
+          <a:lstStyle/>
+          <a:p>
+            <a:pPr algn="ctr"/>
+            <a:r>
+              <a:rPr sz="1000" b="1">
+                <a:solidFill>
+                  <a:srgbClr val="0D327D"/>
+                </a:solidFill>
+              </a:rPr>
+              <a:t>CxlKvBucket  •  flush 2 cachelines, scan 7 slots in L1</a:t>
+            </a:r>
+          </a:p>
+        </p:txBody>
+      </p:sp>
+      <p:sp>
+        <p:nvSpPr>
+          <p:cNvPr id="9" name="Rounded Rectangle 8"/>
+          <p:cNvSpPr/>
+          <p:nvPr/>
+        </p:nvSpPr>
+        <p:spPr>
+          <a:xfrm>
+            <a:off x="6126480" y="2606040"/>
+            <a:ext cx="5486400" cy="365760"/>
+          </a:xfrm>
+          <a:prstGeom prst="roundRect">
+            <a:avLst/>
+          </a:prstGeom>
+          <a:solidFill>
+            <a:srgbClr val="C8DAFB"/>
+          </a:solidFill>
+          <a:ln w="15875">
+            <a:solidFill>
+              <a:srgbClr val="154FC2"/>
+            </a:solidFill>
+          </a:ln>
+        </p:spPr>
+        <p:style>
+          <a:lnRef idx="1">
+            <a:schemeClr val="accent1"/>
+          </a:lnRef>
+          <a:fillRef idx="3">
+            <a:schemeClr val="accent1"/>
+          </a:fillRef>
+          <a:effectRef idx="2">
+            <a:schemeClr val="accent1"/>
+          </a:effectRef>
+          <a:fontRef idx="minor">
+            <a:schemeClr val="lt1"/>
+          </a:fontRef>
+        </p:style>
+        <p:txBody>
+          <a:bodyPr rtlCol="0" anchor="ctr" lIns="38100" rIns="38100" tIns="25400" bIns="25400" wrap="square"/>
+          <a:lstStyle/>
+          <a:p>
+            <a:pPr algn="ctr"/>
+            <a:r>
+              <a:rPr sz="1000" b="1">
+                <a:solidFill>
+                  <a:srgbClr val="0D327D"/>
+                </a:solidFill>
+              </a:rPr>
+              <a:t>KvBlockPool  •  1024 B block holding value bytes</a:t>
+            </a:r>
+          </a:p>
+        </p:txBody>
+      </p:sp>
+      <p:sp>
+        <p:nvSpPr>
+          <p:cNvPr id="10" name="Rounded Rectangle 9"/>
+          <p:cNvSpPr/>
+          <p:nvPr/>
+        </p:nvSpPr>
+        <p:spPr>
+          <a:xfrm>
+            <a:off x="6126480" y="3063240"/>
+            <a:ext cx="5486400" cy="365760"/>
+          </a:xfrm>
+          <a:prstGeom prst="roundRect">
+            <a:avLst/>
+          </a:prstGeom>
+          <a:solidFill>
+            <a:srgbClr val="FFE0B2"/>
+          </a:solidFill>
+          <a:ln w="15875">
+            <a:solidFill>
+              <a:srgbClr val="E65100"/>
+            </a:solidFill>
+          </a:ln>
+        </p:spPr>
+        <p:style>
+          <a:lnRef idx="1">
+            <a:schemeClr val="accent1"/>
+          </a:lnRef>
+          <a:fillRef idx="3">
+            <a:schemeClr val="accent1"/>
+          </a:fillRef>
+          <a:effectRef idx="2">
+            <a:schemeClr val="accent1"/>
+          </a:effectRef>
+          <a:fontRef idx="minor">
+            <a:schemeClr val="lt1"/>
+          </a:fontRef>
+        </p:style>
+        <p:txBody>
+          <a:bodyPr rtlCol="0" anchor="ctr" lIns="38100" rIns="38100" tIns="25400" bIns="25400" wrap="square"/>
+          <a:lstStyle/>
+          <a:p>
+            <a:pPr algn="ctr"/>
+            <a:r>
+              <a:rPr sz="1000" b="1">
+                <a:solidFill>
+                  <a:srgbClr val="8C3200"/>
+                </a:solidFill>
+              </a:rPr>
+              <a:t>DRAM bucket cache (optional, per-process) — cache_buckets_, cache_epoch_</a:t>
+            </a:r>
+          </a:p>
+        </p:txBody>
+      </p:sp>
+      <p:sp>
+        <p:nvSpPr>
+          <p:cNvPr id="11" name="Oval 10"/>
+          <p:cNvSpPr/>
+          <p:nvPr/>
+        </p:nvSpPr>
+        <p:spPr>
+          <a:xfrm>
+            <a:off x="2048255" y="3511296"/>
+            <a:ext cx="292608" cy="292608"/>
+          </a:xfrm>
+          <a:prstGeom prst="ellipse">
+            <a:avLst/>
+          </a:prstGeom>
+          <a:solidFill>
+            <a:srgbClr val="FFFFFF"/>
+          </a:solidFill>
+          <a:ln w="19050">
+            <a:solidFill>
+              <a:srgbClr val="E65100"/>
+            </a:solidFill>
+          </a:ln>
+        </p:spPr>
+        <p:style>
+          <a:lnRef idx="1">
+            <a:schemeClr val="accent1"/>
+          </a:lnRef>
+          <a:fillRef idx="3">
+            <a:schemeClr val="accent1"/>
+          </a:fillRef>
+          <a:effectRef idx="2">
+            <a:schemeClr val="accent1"/>
+          </a:effectRef>
+          <a:fontRef idx="minor">
+            <a:schemeClr val="lt1"/>
+          </a:fontRef>
+        </p:style>
+        <p:txBody>
+          <a:bodyPr rtlCol="0" anchor="ctr" lIns="0" rIns="0" tIns="0" bIns="0"/>
+          <a:lstStyle/>
+          <a:p>
+            <a:pPr algn="ctr"/>
+            <a:r>
+              <a:rPr sz="800" b="1">
+                <a:solidFill>
+                  <a:srgbClr val="E65100"/>
+                </a:solidFill>
+              </a:rPr>
+              <a:t>C1r</a:t>
+            </a:r>
+          </a:p>
+        </p:txBody>
+      </p:sp>
+      <p:sp>
+        <p:nvSpPr>
+          <p:cNvPr id="12" name="TextBox 11"/>
+          <p:cNvSpPr txBox="1"/>
+          <p:nvPr/>
+        </p:nvSpPr>
+        <p:spPr>
+          <a:xfrm>
+            <a:off x="2377440" y="3566160"/>
+            <a:ext cx="2743200" cy="219456"/>
+          </a:xfrm>
+          <a:prstGeom prst="rect">
+            <a:avLst/>
+          </a:prstGeom>
+          <a:solidFill>
+            <a:srgbClr val="FFFFFF"/>
+          </a:solidFill>
+          <a:ln>
+            <a:noFill/>
+          </a:ln>
+        </p:spPr>
+        <p:txBody>
+          <a:bodyPr wrap="none" lIns="25400" rIns="25400" tIns="0" bIns="0">
+            <a:spAutoFit/>
+          </a:bodyPr>
+          <a:lstStyle/>
+          <a:p>
+            <a:pPr algn="l"/>
+            <a:r>
+              <a:rPr sz="850" b="1" i="0">
+                <a:solidFill>
+                  <a:srgbClr val="E65100"/>
+                </a:solidFill>
+              </a:rPr>
+              <a:t>[0.015 µs est] bucket_idx = fnv1a_u64(K) % B; entry = lock_table_.entry(idx)</a:t>
+            </a:r>
+          </a:p>
+        </p:txBody>
+      </p:sp>
+      <p:cxnSp>
+        <p:nvCxnSpPr>
+          <p:cNvPr id="13" name="Connector 12"/>
+          <p:cNvCxnSpPr/>
+          <p:nvPr/>
+        </p:nvCxnSpPr>
+        <p:spPr>
+          <a:xfrm>
+            <a:off x="2194560" y="4023360"/>
+            <a:ext cx="3931920" cy="0"/>
+          </a:xfrm>
+          <a:prstGeom prst="line">
+            <a:avLst/>
+          </a:prstGeom>
+          <a:ln w="20320">
+            <a:solidFill>
+              <a:srgbClr val="E65100"/>
+            </a:solidFill>
+            <a:tailEnd type="triangle" w="med" h="med"/>
+            <a:prstDash val="dash"/>
+          </a:ln>
+        </p:spPr>
+        <p:style>
+          <a:lnRef idx="2">
+            <a:schemeClr val="accent1"/>
+          </a:lnRef>
+          <a:fillRef idx="0">
+            <a:schemeClr val="accent1"/>
+          </a:fillRef>
+          <a:effectRef idx="1">
+            <a:schemeClr val="accent1"/>
+          </a:effectRef>
+          <a:fontRef idx="minor">
+            <a:schemeClr val="tx1"/>
+          </a:fontRef>
+        </p:style>
+      </p:cxnSp>
+      <p:sp>
+        <p:nvSpPr>
+          <p:cNvPr id="14" name="Oval 13"/>
+          <p:cNvSpPr/>
+          <p:nvPr/>
+        </p:nvSpPr>
+        <p:spPr>
+          <a:xfrm>
+            <a:off x="4014215" y="3877056"/>
+            <a:ext cx="292608" cy="292608"/>
+          </a:xfrm>
+          <a:prstGeom prst="ellipse">
+            <a:avLst/>
+          </a:prstGeom>
+          <a:solidFill>
+            <a:srgbClr val="FFF49C"/>
+          </a:solidFill>
+          <a:ln w="19050">
+            <a:solidFill>
+              <a:srgbClr val="F9A825"/>
+            </a:solidFill>
+          </a:ln>
+        </p:spPr>
+        <p:style>
+          <a:lnRef idx="1">
+            <a:schemeClr val="accent1"/>
+          </a:lnRef>
+          <a:fillRef idx="3">
+            <a:schemeClr val="accent1"/>
+          </a:fillRef>
+          <a:effectRef idx="2">
+            <a:schemeClr val="accent1"/>
+          </a:effectRef>
+          <a:fontRef idx="minor">
+            <a:schemeClr val="lt1"/>
+          </a:fontRef>
+        </p:style>
+        <p:txBody>
+          <a:bodyPr rtlCol="0" anchor="ctr" lIns="0" rIns="0" tIns="0" bIns="0"/>
+          <a:lstStyle/>
+          <a:p>
+            <a:pPr algn="ctr"/>
+            <a:r>
+              <a:rPr sz="800" b="1">
+                <a:solidFill>
+                  <a:srgbClr val="333333"/>
+                </a:solidFill>
+              </a:rPr>
+              <a:t>C2r</a:t>
+            </a:r>
+          </a:p>
+        </p:txBody>
+      </p:sp>
+      <p:sp>
+        <p:nvSpPr>
+          <p:cNvPr id="15" name="TextBox 14"/>
+          <p:cNvSpPr txBox="1"/>
+          <p:nvPr/>
+        </p:nvSpPr>
+        <p:spPr>
+          <a:xfrm>
+            <a:off x="2697479" y="3767328"/>
+            <a:ext cx="2926080" cy="219456"/>
+          </a:xfrm>
+          <a:prstGeom prst="rect">
+            <a:avLst/>
+          </a:prstGeom>
+          <a:solidFill>
+            <a:srgbClr val="FFFFFF"/>
+          </a:solidFill>
+          <a:ln>
+            <a:noFill/>
+          </a:ln>
+        </p:spPr>
+        <p:txBody>
+          <a:bodyPr wrap="none" lIns="25400" rIns="25400" tIns="0" bIns="0">
+            <a:spAutoFit/>
+          </a:bodyPr>
+          <a:lstStyle/>
+          <a:p>
+            <a:pPr algn="l"/>
+            <a:r>
+              <a:rPr sz="850" b="1" i="0">
+                <a:solidFill>
+                  <a:srgbClr val="E65100"/>
+                </a:solidFill>
+              </a:rPr>
+              <a:t>[0.7 µs est] load CXL write_epoch (1 LD-CXL)  ★ if == cached_epoch_[idx]: scan DRAM copy + return</a:t>
+            </a:r>
+          </a:p>
+        </p:txBody>
+      </p:sp>
+      <p:cxnSp>
+        <p:nvCxnSpPr>
+          <p:cNvPr id="16" name="Connector 15"/>
+          <p:cNvCxnSpPr/>
+          <p:nvPr/>
+        </p:nvCxnSpPr>
+        <p:spPr>
+          <a:xfrm>
+            <a:off x="2194560" y="4389120"/>
+            <a:ext cx="3931920" cy="0"/>
+          </a:xfrm>
+          <a:prstGeom prst="line">
+            <a:avLst/>
+          </a:prstGeom>
+          <a:ln w="20320">
+            <a:solidFill>
+              <a:srgbClr val="E65100"/>
+            </a:solidFill>
+            <a:tailEnd type="triangle" w="med" h="med"/>
+            <a:prstDash val="dash"/>
+          </a:ln>
+        </p:spPr>
+        <p:style>
+          <a:lnRef idx="2">
+            <a:schemeClr val="accent1"/>
+          </a:lnRef>
+          <a:fillRef idx="0">
+            <a:schemeClr val="accent1"/>
+          </a:fillRef>
+          <a:effectRef idx="1">
+            <a:schemeClr val="accent1"/>
+          </a:effectRef>
+          <a:fontRef idx="minor">
+            <a:schemeClr val="tx1"/>
+          </a:fontRef>
+        </p:style>
+      </p:cxnSp>
+      <p:sp>
+        <p:nvSpPr>
+          <p:cNvPr id="17" name="Oval 16"/>
+          <p:cNvSpPr/>
+          <p:nvPr/>
+        </p:nvSpPr>
+        <p:spPr>
+          <a:xfrm>
+            <a:off x="4014215" y="4242816"/>
+            <a:ext cx="292608" cy="292608"/>
+          </a:xfrm>
+          <a:prstGeom prst="ellipse">
+            <a:avLst/>
+          </a:prstGeom>
+          <a:solidFill>
+            <a:srgbClr val="FFFFFF"/>
+          </a:solidFill>
+          <a:ln w="19050">
+            <a:solidFill>
+              <a:srgbClr val="E65100"/>
+            </a:solidFill>
+          </a:ln>
+        </p:spPr>
+        <p:style>
+          <a:lnRef idx="1">
+            <a:schemeClr val="accent1"/>
+          </a:lnRef>
+          <a:fillRef idx="3">
+            <a:schemeClr val="accent1"/>
+          </a:fillRef>
+          <a:effectRef idx="2">
+            <a:schemeClr val="accent1"/>
+          </a:effectRef>
+          <a:fontRef idx="minor">
+            <a:schemeClr val="lt1"/>
+          </a:fontRef>
+        </p:style>
+        <p:txBody>
+          <a:bodyPr rtlCol="0" anchor="ctr" lIns="0" rIns="0" tIns="0" bIns="0"/>
+          <a:lstStyle/>
+          <a:p>
+            <a:pPr algn="ctr"/>
+            <a:r>
+              <a:rPr sz="800" b="1">
+                <a:solidFill>
+                  <a:srgbClr val="E65100"/>
+                </a:solidFill>
+              </a:rPr>
+              <a:t>C3r</a:t>
+            </a:r>
+          </a:p>
+        </p:txBody>
+      </p:sp>
+      <p:sp>
+        <p:nvSpPr>
+          <p:cNvPr id="18" name="TextBox 17"/>
+          <p:cNvSpPr txBox="1"/>
+          <p:nvPr/>
+        </p:nvSpPr>
+        <p:spPr>
+          <a:xfrm>
+            <a:off x="2697479" y="4133088"/>
+            <a:ext cx="2926080" cy="219456"/>
+          </a:xfrm>
+          <a:prstGeom prst="rect">
+            <a:avLst/>
+          </a:prstGeom>
+          <a:solidFill>
+            <a:srgbClr val="FFFFFF"/>
+          </a:solidFill>
+          <a:ln>
+            <a:noFill/>
+          </a:ln>
+        </p:spPr>
+        <p:txBody>
+          <a:bodyPr wrap="none" lIns="25400" rIns="25400" tIns="0" bIns="0">
+            <a:spAutoFit/>
+          </a:bodyPr>
+          <a:lstStyle/>
+          <a:p>
+            <a:pPr algn="l"/>
+            <a:r>
+              <a:rPr sz="850" b="1" i="0">
+                <a:solidFill>
+                  <a:srgbClr val="E65100"/>
+                </a:solidFill>
+              </a:rPr>
+              <a:t>[0.15 µs est] cache miss → flush_line(slots[0]) + flush_line(slots[4]) + mfence</a:t>
+            </a:r>
+          </a:p>
+        </p:txBody>
+      </p:sp>
+      <p:sp>
+        <p:nvSpPr>
+          <p:cNvPr id="19" name="Oval 18"/>
+          <p:cNvSpPr/>
+          <p:nvPr/>
+        </p:nvSpPr>
+        <p:spPr>
+          <a:xfrm>
+            <a:off x="2048255" y="4608576"/>
+            <a:ext cx="292608" cy="292608"/>
+          </a:xfrm>
+          <a:prstGeom prst="ellipse">
+            <a:avLst/>
+          </a:prstGeom>
+          <a:solidFill>
+            <a:srgbClr val="FFF49C"/>
+          </a:solidFill>
+          <a:ln w="19050">
+            <a:solidFill>
+              <a:srgbClr val="F9A825"/>
+            </a:solidFill>
+          </a:ln>
+        </p:spPr>
+        <p:style>
+          <a:lnRef idx="1">
+            <a:schemeClr val="accent1"/>
+          </a:lnRef>
+          <a:fillRef idx="3">
+            <a:schemeClr val="accent1"/>
+          </a:fillRef>
+          <a:effectRef idx="2">
+            <a:schemeClr val="accent1"/>
+          </a:effectRef>
+          <a:fontRef idx="minor">
+            <a:schemeClr val="lt1"/>
+          </a:fontRef>
+        </p:style>
+        <p:txBody>
+          <a:bodyPr rtlCol="0" anchor="ctr" lIns="0" rIns="0" tIns="0" bIns="0"/>
+          <a:lstStyle/>
+          <a:p>
+            <a:pPr algn="ctr"/>
+            <a:r>
+              <a:rPr sz="800" b="1">
+                <a:solidFill>
+                  <a:srgbClr val="333333"/>
+                </a:solidFill>
+              </a:rPr>
+              <a:t>C4r</a:t>
+            </a:r>
+          </a:p>
+        </p:txBody>
+      </p:sp>
+      <p:sp>
+        <p:nvSpPr>
+          <p:cNvPr id="20" name="TextBox 19"/>
+          <p:cNvSpPr txBox="1"/>
+          <p:nvPr/>
+        </p:nvSpPr>
+        <p:spPr>
+          <a:xfrm>
+            <a:off x="2377440" y="4663440"/>
+            <a:ext cx="2743200" cy="219456"/>
+          </a:xfrm>
+          <a:prstGeom prst="rect">
+            <a:avLst/>
+          </a:prstGeom>
+          <a:solidFill>
+            <a:srgbClr val="FFFFFF"/>
+          </a:solidFill>
+          <a:ln>
+            <a:noFill/>
+          </a:ln>
+        </p:spPr>
+        <p:txBody>
+          <a:bodyPr wrap="none" lIns="25400" rIns="25400" tIns="0" bIns="0">
+            <a:spAutoFit/>
+          </a:bodyPr>
+          <a:lstStyle/>
+          <a:p>
+            <a:pPr algn="l"/>
+            <a:r>
+              <a:rPr sz="850" b="1" i="0">
+                <a:solidFill>
+                  <a:srgbClr val="E65100"/>
+                </a:solidFill>
+              </a:rPr>
+              <a:t>[0.05 µs est] scan 7 slots in L1; get slot.value (= blk_off)  ★ NO post-scan revalidation (LRC)</a:t>
+            </a:r>
+          </a:p>
+        </p:txBody>
+      </p:sp>
+      <p:cxnSp>
+        <p:nvCxnSpPr>
+          <p:cNvPr id="21" name="Connector 20"/>
+          <p:cNvCxnSpPr/>
+          <p:nvPr/>
+        </p:nvCxnSpPr>
+        <p:spPr>
+          <a:xfrm>
+            <a:off x="2194560" y="5120640"/>
+            <a:ext cx="3931920" cy="0"/>
+          </a:xfrm>
+          <a:prstGeom prst="line">
+            <a:avLst/>
+          </a:prstGeom>
+          <a:ln w="20320">
+            <a:solidFill>
+              <a:srgbClr val="E65100"/>
+            </a:solidFill>
+            <a:tailEnd type="triangle" w="med" h="med"/>
+            <a:prstDash val="dash"/>
+          </a:ln>
+        </p:spPr>
+        <p:style>
+          <a:lnRef idx="2">
+            <a:schemeClr val="accent1"/>
+          </a:lnRef>
+          <a:fillRef idx="0">
+            <a:schemeClr val="accent1"/>
+          </a:fillRef>
+          <a:effectRef idx="1">
+            <a:schemeClr val="accent1"/>
+          </a:effectRef>
+          <a:fontRef idx="minor">
+            <a:schemeClr val="tx1"/>
+          </a:fontRef>
+        </p:style>
+      </p:cxnSp>
+      <p:sp>
+        <p:nvSpPr>
+          <p:cNvPr id="22" name="Oval 21"/>
+          <p:cNvSpPr/>
+          <p:nvPr/>
+        </p:nvSpPr>
+        <p:spPr>
+          <a:xfrm>
+            <a:off x="4014215" y="4974336"/>
+            <a:ext cx="292608" cy="292608"/>
+          </a:xfrm>
+          <a:prstGeom prst="ellipse">
+            <a:avLst/>
+          </a:prstGeom>
+          <a:solidFill>
+            <a:srgbClr val="FFFFFF"/>
+          </a:solidFill>
+          <a:ln w="19050">
+            <a:solidFill>
+              <a:srgbClr val="E65100"/>
+            </a:solidFill>
+          </a:ln>
+        </p:spPr>
+        <p:style>
+          <a:lnRef idx="1">
+            <a:schemeClr val="accent1"/>
+          </a:lnRef>
+          <a:fillRef idx="3">
+            <a:schemeClr val="accent1"/>
+          </a:fillRef>
+          <a:effectRef idx="2">
+            <a:schemeClr val="accent1"/>
+          </a:effectRef>
+          <a:fontRef idx="minor">
+            <a:schemeClr val="lt1"/>
+          </a:fontRef>
+        </p:style>
+        <p:txBody>
+          <a:bodyPr rtlCol="0" anchor="ctr" lIns="0" rIns="0" tIns="0" bIns="0"/>
+          <a:lstStyle/>
+          <a:p>
+            <a:pPr algn="ctr"/>
+            <a:r>
+              <a:rPr sz="800" b="1">
+                <a:solidFill>
+                  <a:srgbClr val="E65100"/>
+                </a:solidFill>
+              </a:rPr>
+              <a:t>C5r</a:t>
+            </a:r>
+          </a:p>
+        </p:txBody>
+      </p:sp>
+      <p:sp>
+        <p:nvSpPr>
+          <p:cNvPr id="23" name="TextBox 22"/>
+          <p:cNvSpPr txBox="1"/>
+          <p:nvPr/>
+        </p:nvSpPr>
+        <p:spPr>
+          <a:xfrm>
+            <a:off x="2697479" y="4864608"/>
+            <a:ext cx="2926080" cy="219456"/>
+          </a:xfrm>
+          <a:prstGeom prst="rect">
+            <a:avLst/>
+          </a:prstGeom>
+          <a:solidFill>
+            <a:srgbClr val="FFFFFF"/>
+          </a:solidFill>
+          <a:ln>
+            <a:noFill/>
+          </a:ln>
+        </p:spPr>
+        <p:txBody>
+          <a:bodyPr wrap="none" lIns="25400" rIns="25400" tIns="0" bIns="0">
+            <a:spAutoFit/>
+          </a:bodyPr>
+          <a:lstStyle/>
+          <a:p>
+            <a:pPr algn="l"/>
+            <a:r>
+              <a:rPr sz="850" b="1" i="0">
+                <a:solidFill>
+                  <a:srgbClr val="E65100"/>
+                </a:solidFill>
+              </a:rPr>
+              <a:t>[1.0 µs est] blockpool-&gt;read(blk_off, 1024)  (16 CL × LD-CXL for value bytes)</a:t>
+            </a:r>
+          </a:p>
+        </p:txBody>
+      </p:sp>
+      <p:sp>
+        <p:nvSpPr>
+          <p:cNvPr id="24" name="Rounded Rectangle 23"/>
+          <p:cNvSpPr/>
+          <p:nvPr/>
+        </p:nvSpPr>
+        <p:spPr>
+          <a:xfrm>
+            <a:off x="274320" y="5989320"/>
+            <a:ext cx="7772400" cy="292608"/>
+          </a:xfrm>
+          <a:prstGeom prst="roundRect">
+            <a:avLst/>
+          </a:prstGeom>
+          <a:solidFill>
+            <a:srgbClr val="FFF49C"/>
+          </a:solidFill>
+          <a:ln w="9525">
+            <a:solidFill>
+              <a:srgbClr val="F9A825"/>
+            </a:solidFill>
+          </a:ln>
+        </p:spPr>
+        <p:style>
+          <a:lnRef idx="1">
+            <a:schemeClr val="accent1"/>
+          </a:lnRef>
+          <a:fillRef idx="3">
+            <a:schemeClr val="accent1"/>
+          </a:fillRef>
+          <a:effectRef idx="2">
+            <a:schemeClr val="accent1"/>
+          </a:effectRef>
+          <a:fontRef idx="minor">
+            <a:schemeClr val="lt1"/>
+          </a:fontRef>
+        </p:style>
+        <p:txBody>
+          <a:bodyPr rtlCol="0" anchor="ctr" lIns="101600" rIns="101600" tIns="25400" bIns="25400"/>
+          <a:lstStyle/>
+          <a:p>
+            <a:pPr algn="l"/>
+            <a:r>
+              <a:rPr sz="1000" b="1">
+                <a:solidFill>
+                  <a:srgbClr val="8C3200"/>
+                </a:solidFill>
+              </a:rPr>
+              <a:t>End-to-end:  cache hit + value read  ≈ 1.7 µs  |  cache miss + value read  ≈ 1.2 µs  |  no cross-host coordination, every read pays roughly the same</a:t>
+            </a:r>
+          </a:p>
+        </p:txBody>
+      </p:sp>
+      <p:sp>
+        <p:nvSpPr>
+          <p:cNvPr id="25" name="Rounded Rectangle 24"/>
+          <p:cNvSpPr/>
+          <p:nvPr/>
+        </p:nvSpPr>
+        <p:spPr>
+          <a:xfrm>
+            <a:off x="274320" y="6355080"/>
+            <a:ext cx="7772400" cy="365760"/>
+          </a:xfrm>
+          <a:prstGeom prst="roundRect">
+            <a:avLst/>
+          </a:prstGeom>
+          <a:solidFill>
+            <a:srgbClr val="FFFFFF"/>
+          </a:solidFill>
+          <a:ln w="7620">
+            <a:solidFill>
+              <a:srgbClr val="9E9E9E"/>
+            </a:solidFill>
+          </a:ln>
+        </p:spPr>
+        <p:style>
+          <a:lnRef idx="1">
+            <a:schemeClr val="accent1"/>
+          </a:lnRef>
+          <a:fillRef idx="3">
+            <a:schemeClr val="accent1"/>
+          </a:fillRef>
+          <a:effectRef idx="2">
+            <a:schemeClr val="accent1"/>
+          </a:effectRef>
+          <a:fontRef idx="minor">
+            <a:schemeClr val="lt1"/>
+          </a:fontRef>
+        </p:style>
+        <p:txBody>
+          <a:bodyPr rtlCol="0" anchor="ctr"/>
+          <a:lstStyle/>
+          <a:p>
+            <a:pPr algn="ctr"/>
+          </a:p>
+        </p:txBody>
+      </p:sp>
+      <p:sp>
+        <p:nvSpPr>
+          <p:cNvPr id="26" name="TextBox 25"/>
+          <p:cNvSpPr txBox="1"/>
+          <p:nvPr/>
+        </p:nvSpPr>
+        <p:spPr>
+          <a:xfrm>
+            <a:off x="365760" y="6391656"/>
+            <a:ext cx="1828800" cy="292608"/>
+          </a:xfrm>
+          <a:prstGeom prst="rect">
+            <a:avLst/>
+          </a:prstGeom>
+          <a:noFill/>
+        </p:spPr>
+        <p:txBody>
+          <a:bodyPr wrap="none" lIns="25400" rIns="25400" tIns="0" bIns="0">
+            <a:spAutoFit/>
+          </a:bodyPr>
+          <a:lstStyle/>
+          <a:p>
+            <a:pPr algn="l"/>
+            <a:r>
+              <a:rPr sz="900" b="1">
+                <a:solidFill>
+                  <a:srgbClr val="E65100"/>
+                </a:solidFill>
+              </a:rPr>
+              <a:t>╌╌▶  C*r step</a:t>
+            </a:r>
+          </a:p>
+        </p:txBody>
+      </p:sp>
+      <p:sp>
+        <p:nvSpPr>
+          <p:cNvPr id="27" name="TextBox 26"/>
+          <p:cNvSpPr txBox="1"/>
+          <p:nvPr/>
+        </p:nvSpPr>
+        <p:spPr>
+          <a:xfrm>
+            <a:off x="2240279" y="6391656"/>
+            <a:ext cx="1828800" cy="292608"/>
+          </a:xfrm>
+          <a:prstGeom prst="rect">
+            <a:avLst/>
+          </a:prstGeom>
+          <a:noFill/>
+        </p:spPr>
+        <p:txBody>
+          <a:bodyPr wrap="none" lIns="25400" rIns="25400" tIns="0" bIns="0">
+            <a:spAutoFit/>
+          </a:bodyPr>
+          <a:lstStyle/>
+          <a:p>
+            <a:pPr algn="l"/>
+            <a:r>
+              <a:rPr sz="900" b="1">
+                <a:solidFill>
+                  <a:srgbClr val="F9A825"/>
+                </a:solidFill>
+              </a:rPr>
+              <a:t>★ Linearization (C2r, C4r)</a:t>
+            </a:r>
+          </a:p>
+        </p:txBody>
+      </p:sp>
+      <p:sp>
+        <p:nvSpPr>
+          <p:cNvPr id="28" name="TextBox 27"/>
+          <p:cNvSpPr txBox="1"/>
+          <p:nvPr/>
+        </p:nvSpPr>
+        <p:spPr>
+          <a:xfrm>
+            <a:off x="4114800" y="6391656"/>
+            <a:ext cx="1828800" cy="292608"/>
+          </a:xfrm>
+          <a:prstGeom prst="rect">
+            <a:avLst/>
+          </a:prstGeom>
+          <a:noFill/>
+        </p:spPr>
+        <p:txBody>
+          <a:bodyPr wrap="none" lIns="25400" rIns="25400" tIns="0" bIns="0">
+            <a:spAutoFit/>
+          </a:bodyPr>
+          <a:lstStyle/>
+          <a:p>
+            <a:pPr algn="l"/>
+            <a:r>
+              <a:rPr sz="900" b="1">
+                <a:solidFill>
+                  <a:srgbClr val="C62828"/>
+                </a:solidFill>
+              </a:rPr>
+              <a:t>● Cross-host blocking (none!)</a:t>
+            </a:r>
+          </a:p>
+        </p:txBody>
+      </p:sp>
+      <p:sp>
+        <p:nvSpPr>
+          <p:cNvPr id="29" name="TextBox 28"/>
+          <p:cNvSpPr txBox="1"/>
+          <p:nvPr/>
+        </p:nvSpPr>
+        <p:spPr>
+          <a:xfrm>
+            <a:off x="5989320" y="6391656"/>
+            <a:ext cx="1828800" cy="292608"/>
+          </a:xfrm>
+          <a:prstGeom prst="rect">
+            <a:avLst/>
+          </a:prstGeom>
+          <a:noFill/>
+        </p:spPr>
+        <p:txBody>
+          <a:bodyPr wrap="none" lIns="25400" rIns="25400" tIns="0" bIns="0">
+            <a:spAutoFit/>
+          </a:bodyPr>
+          <a:lstStyle/>
+          <a:p>
+            <a:pPr algn="l"/>
+            <a:r>
+              <a:rPr sz="900" b="1">
+                <a:solidFill>
+                  <a:srgbClr val="FFFFFF"/>
+                </a:solidFill>
+              </a:rPr>
+              <a:t>—</a:t>
+            </a:r>
+          </a:p>
+        </p:txBody>
+      </p:sp>
+      <p:sp>
+        <p:nvSpPr>
+          <p:cNvPr id="30" name="TextBox 29"/>
+          <p:cNvSpPr txBox="1"/>
+          <p:nvPr/>
+        </p:nvSpPr>
+        <p:spPr>
+          <a:xfrm>
+            <a:off x="8229600" y="6355080"/>
+            <a:ext cx="3840480" cy="365760"/>
+          </a:xfrm>
+          <a:prstGeom prst="rect">
+            <a:avLst/>
+          </a:prstGeom>
+          <a:noFill/>
+        </p:spPr>
+        <p:txBody>
+          <a:bodyPr wrap="none" tIns="38100">
+            <a:spAutoFit/>
+          </a:bodyPr>
+          <a:lstStyle/>
+          <a:p>
+            <a:pPr algn="r"/>
+            <a:r>
+              <a:rPr sz="1100" b="1">
+                <a:solidFill>
+                  <a:srgbClr val="8C3200"/>
+                </a:solidFill>
+              </a:rPr>
+              <a:t>5 steps · 1 actor · 0 blocking points</a:t>
+            </a:r>
+          </a:p>
+        </p:txBody>
+      </p:sp>
+    </p:spTree>
+  </p:cSld>
+  <p:clrMapOvr>
+    <a:masterClrMapping/>
+  </p:clrMapOvr>
+</p:sld>
+</file>
+
+<file path=ppt/slides/slide7.xml><?xml version="1.0" encoding="utf-8"?>
 <p:sld xmlns:a="http://schemas.openxmlformats.org/drawingml/2006/main" xmlns:p="http://schemas.openxmlformats.org/presentationml/2006/main" xmlns:r="http://schemas.openxmlformats.org/officeDocument/2006/relationships">
   <p:cSld>
     <p:spTree>
@@ -14539,7 +16964,7 @@
 </p:sld>
 </file>
 
-<file path=ppt/slides/slide7.xml><?xml version="1.0" encoding="utf-8"?>
+<file path=ppt/slides/slide8.xml><?xml version="1.0" encoding="utf-8"?>
 <p:sld xmlns:a="http://schemas.openxmlformats.org/drawingml/2006/main" xmlns:p="http://schemas.openxmlformats.org/presentationml/2006/main" xmlns:r="http://schemas.openxmlformats.org/officeDocument/2006/relationships">
   <p:cSld>
     <p:spTree>
@@ -17610,6 +20035,5545 @@
 </p:sld>
 </file>
 
+<file path=ppt/slides/slide9.xml><?xml version="1.0" encoding="utf-8"?>
+<p:sld xmlns:a="http://schemas.openxmlformats.org/drawingml/2006/main" xmlns:p="http://schemas.openxmlformats.org/presentationml/2006/main" xmlns:r="http://schemas.openxmlformats.org/officeDocument/2006/relationships">
+  <p:cSld>
+    <p:spTree>
+      <p:nvGrpSpPr>
+        <p:cNvPr id="1" name=""/>
+        <p:cNvGrpSpPr/>
+        <p:nvPr/>
+      </p:nvGrpSpPr>
+      <p:grpSpPr/>
+      <p:sp>
+        <p:nvSpPr>
+          <p:cNvPr id="2" name="TextBox 1"/>
+          <p:cNvSpPr txBox="1"/>
+          <p:nvPr/>
+        </p:nvSpPr>
+        <p:spPr>
+          <a:xfrm>
+            <a:off x="274320" y="91440"/>
+            <a:ext cx="11704320" cy="502920"/>
+          </a:xfrm>
+          <a:prstGeom prst="rect">
+            <a:avLst/>
+          </a:prstGeom>
+          <a:noFill/>
+        </p:spPr>
+        <p:txBody>
+          <a:bodyPr wrap="none" tIns="0" bIns="0">
+            <a:spAutoFit/>
+          </a:bodyPr>
+          <a:lstStyle/>
+          <a:p>
+            <a:r>
+              <a:rPr sz="2200" b="1">
+                <a:solidFill>
+                  <a:srgbClr val="333333"/>
+                </a:solidFill>
+              </a:rPr>
+              <a:t>Protocol A vs C — stages × latency (T=64 KV=1024 workload-A)</a:t>
+            </a:r>
+          </a:p>
+        </p:txBody>
+      </p:sp>
+      <p:sp>
+        <p:nvSpPr>
+          <p:cNvPr id="3" name="TextBox 2"/>
+          <p:cNvSpPr txBox="1"/>
+          <p:nvPr/>
+        </p:nvSpPr>
+        <p:spPr>
+          <a:xfrm>
+            <a:off x="274320" y="566928"/>
+            <a:ext cx="11704320" cy="292608"/>
+          </a:xfrm>
+          <a:prstGeom prst="rect">
+            <a:avLst/>
+          </a:prstGeom>
+          <a:noFill/>
+        </p:spPr>
+        <p:txBody>
+          <a:bodyPr wrap="none" tIns="0" bIns="0">
+            <a:spAutoFit/>
+          </a:bodyPr>
+          <a:lstStyle/>
+          <a:p>
+            <a:r>
+              <a:rPr sz="1100" i="1">
+                <a:solidFill>
+                  <a:srgbClr val="9E9E9E"/>
+                </a:solidFill>
+              </a:rPr>
+              <a:t>Each row = one read/write path; each column = the n-th stage of that path. Yellow = linearization point · Red = dominant cost / blocking</a:t>
+            </a:r>
+          </a:p>
+        </p:txBody>
+      </p:sp>
+      <p:sp>
+        <p:nvSpPr>
+          <p:cNvPr id="4" name="Rectangle 3"/>
+          <p:cNvSpPr/>
+          <p:nvPr/>
+        </p:nvSpPr>
+        <p:spPr>
+          <a:xfrm>
+            <a:off x="274320" y="1188720"/>
+            <a:ext cx="1417320" cy="365760"/>
+          </a:xfrm>
+          <a:prstGeom prst="rect">
+            <a:avLst/>
+          </a:prstGeom>
+          <a:solidFill>
+            <a:srgbClr val="EEEEEE"/>
+          </a:solidFill>
+          <a:ln w="15875">
+            <a:solidFill>
+              <a:srgbClr val="9E9E9E"/>
+            </a:solidFill>
+          </a:ln>
+        </p:spPr>
+        <p:style>
+          <a:lnRef idx="1">
+            <a:schemeClr val="accent1"/>
+          </a:lnRef>
+          <a:fillRef idx="3">
+            <a:schemeClr val="accent1"/>
+          </a:fillRef>
+          <a:effectRef idx="2">
+            <a:schemeClr val="accent1"/>
+          </a:effectRef>
+          <a:fontRef idx="minor">
+            <a:schemeClr val="lt1"/>
+          </a:fontRef>
+        </p:style>
+        <p:txBody>
+          <a:bodyPr rtlCol="0" anchor="ctr" lIns="38100" rIns="38100" tIns="25400" bIns="25400" wrap="square"/>
+          <a:lstStyle/>
+          <a:p>
+            <a:pPr algn="ctr"/>
+            <a:r>
+              <a:rPr sz="1000" b="1">
+                <a:solidFill>
+                  <a:srgbClr val="333333"/>
+                </a:solidFill>
+              </a:rPr>
+              <a:t>Path</a:t>
+            </a:r>
+          </a:p>
+        </p:txBody>
+      </p:sp>
+      <p:sp>
+        <p:nvSpPr>
+          <p:cNvPr id="5" name="Rectangle 4"/>
+          <p:cNvSpPr/>
+          <p:nvPr/>
+        </p:nvSpPr>
+        <p:spPr>
+          <a:xfrm>
+            <a:off x="1691640" y="1188720"/>
+            <a:ext cx="594359" cy="365760"/>
+          </a:xfrm>
+          <a:prstGeom prst="rect">
+            <a:avLst/>
+          </a:prstGeom>
+          <a:solidFill>
+            <a:srgbClr val="EEEEEE"/>
+          </a:solidFill>
+          <a:ln w="15875">
+            <a:solidFill>
+              <a:srgbClr val="9E9E9E"/>
+            </a:solidFill>
+          </a:ln>
+        </p:spPr>
+        <p:style>
+          <a:lnRef idx="1">
+            <a:schemeClr val="accent1"/>
+          </a:lnRef>
+          <a:fillRef idx="3">
+            <a:schemeClr val="accent1"/>
+          </a:fillRef>
+          <a:effectRef idx="2">
+            <a:schemeClr val="accent1"/>
+          </a:effectRef>
+          <a:fontRef idx="minor">
+            <a:schemeClr val="lt1"/>
+          </a:fontRef>
+        </p:style>
+        <p:txBody>
+          <a:bodyPr rtlCol="0" anchor="ctr" lIns="38100" rIns="38100" tIns="25400" bIns="25400" wrap="square"/>
+          <a:lstStyle/>
+          <a:p>
+            <a:pPr algn="ctr"/>
+            <a:r>
+              <a:rPr sz="900" b="1">
+                <a:solidFill>
+                  <a:srgbClr val="333333"/>
+                </a:solidFill>
+              </a:rPr>
+              <a:t>#1</a:t>
+            </a:r>
+          </a:p>
+        </p:txBody>
+      </p:sp>
+      <p:sp>
+        <p:nvSpPr>
+          <p:cNvPr id="6" name="Rectangle 5"/>
+          <p:cNvSpPr/>
+          <p:nvPr/>
+        </p:nvSpPr>
+        <p:spPr>
+          <a:xfrm>
+            <a:off x="2286000" y="1188720"/>
+            <a:ext cx="594359" cy="365760"/>
+          </a:xfrm>
+          <a:prstGeom prst="rect">
+            <a:avLst/>
+          </a:prstGeom>
+          <a:solidFill>
+            <a:srgbClr val="EEEEEE"/>
+          </a:solidFill>
+          <a:ln w="15875">
+            <a:solidFill>
+              <a:srgbClr val="9E9E9E"/>
+            </a:solidFill>
+          </a:ln>
+        </p:spPr>
+        <p:style>
+          <a:lnRef idx="1">
+            <a:schemeClr val="accent1"/>
+          </a:lnRef>
+          <a:fillRef idx="3">
+            <a:schemeClr val="accent1"/>
+          </a:fillRef>
+          <a:effectRef idx="2">
+            <a:schemeClr val="accent1"/>
+          </a:effectRef>
+          <a:fontRef idx="minor">
+            <a:schemeClr val="lt1"/>
+          </a:fontRef>
+        </p:style>
+        <p:txBody>
+          <a:bodyPr rtlCol="0" anchor="ctr" lIns="38100" rIns="38100" tIns="25400" bIns="25400" wrap="square"/>
+          <a:lstStyle/>
+          <a:p>
+            <a:pPr algn="ctr"/>
+            <a:r>
+              <a:rPr sz="900" b="1">
+                <a:solidFill>
+                  <a:srgbClr val="333333"/>
+                </a:solidFill>
+              </a:rPr>
+              <a:t>#2</a:t>
+            </a:r>
+          </a:p>
+        </p:txBody>
+      </p:sp>
+      <p:sp>
+        <p:nvSpPr>
+          <p:cNvPr id="7" name="Rectangle 6"/>
+          <p:cNvSpPr/>
+          <p:nvPr/>
+        </p:nvSpPr>
+        <p:spPr>
+          <a:xfrm>
+            <a:off x="2880360" y="1188720"/>
+            <a:ext cx="594359" cy="365760"/>
+          </a:xfrm>
+          <a:prstGeom prst="rect">
+            <a:avLst/>
+          </a:prstGeom>
+          <a:solidFill>
+            <a:srgbClr val="EEEEEE"/>
+          </a:solidFill>
+          <a:ln w="15875">
+            <a:solidFill>
+              <a:srgbClr val="9E9E9E"/>
+            </a:solidFill>
+          </a:ln>
+        </p:spPr>
+        <p:style>
+          <a:lnRef idx="1">
+            <a:schemeClr val="accent1"/>
+          </a:lnRef>
+          <a:fillRef idx="3">
+            <a:schemeClr val="accent1"/>
+          </a:fillRef>
+          <a:effectRef idx="2">
+            <a:schemeClr val="accent1"/>
+          </a:effectRef>
+          <a:fontRef idx="minor">
+            <a:schemeClr val="lt1"/>
+          </a:fontRef>
+        </p:style>
+        <p:txBody>
+          <a:bodyPr rtlCol="0" anchor="ctr" lIns="38100" rIns="38100" tIns="25400" bIns="25400" wrap="square"/>
+          <a:lstStyle/>
+          <a:p>
+            <a:pPr algn="ctr"/>
+            <a:r>
+              <a:rPr sz="900" b="1">
+                <a:solidFill>
+                  <a:srgbClr val="333333"/>
+                </a:solidFill>
+              </a:rPr>
+              <a:t>#3</a:t>
+            </a:r>
+          </a:p>
+        </p:txBody>
+      </p:sp>
+      <p:sp>
+        <p:nvSpPr>
+          <p:cNvPr id="8" name="Rectangle 7"/>
+          <p:cNvSpPr/>
+          <p:nvPr/>
+        </p:nvSpPr>
+        <p:spPr>
+          <a:xfrm>
+            <a:off x="3474720" y="1188720"/>
+            <a:ext cx="594359" cy="365760"/>
+          </a:xfrm>
+          <a:prstGeom prst="rect">
+            <a:avLst/>
+          </a:prstGeom>
+          <a:solidFill>
+            <a:srgbClr val="EEEEEE"/>
+          </a:solidFill>
+          <a:ln w="15875">
+            <a:solidFill>
+              <a:srgbClr val="9E9E9E"/>
+            </a:solidFill>
+          </a:ln>
+        </p:spPr>
+        <p:style>
+          <a:lnRef idx="1">
+            <a:schemeClr val="accent1"/>
+          </a:lnRef>
+          <a:fillRef idx="3">
+            <a:schemeClr val="accent1"/>
+          </a:fillRef>
+          <a:effectRef idx="2">
+            <a:schemeClr val="accent1"/>
+          </a:effectRef>
+          <a:fontRef idx="minor">
+            <a:schemeClr val="lt1"/>
+          </a:fontRef>
+        </p:style>
+        <p:txBody>
+          <a:bodyPr rtlCol="0" anchor="ctr" lIns="38100" rIns="38100" tIns="25400" bIns="25400" wrap="square"/>
+          <a:lstStyle/>
+          <a:p>
+            <a:pPr algn="ctr"/>
+            <a:r>
+              <a:rPr sz="900" b="1">
+                <a:solidFill>
+                  <a:srgbClr val="333333"/>
+                </a:solidFill>
+              </a:rPr>
+              <a:t>#4</a:t>
+            </a:r>
+          </a:p>
+        </p:txBody>
+      </p:sp>
+      <p:sp>
+        <p:nvSpPr>
+          <p:cNvPr id="9" name="Rectangle 8"/>
+          <p:cNvSpPr/>
+          <p:nvPr/>
+        </p:nvSpPr>
+        <p:spPr>
+          <a:xfrm>
+            <a:off x="4069079" y="1188720"/>
+            <a:ext cx="594359" cy="365760"/>
+          </a:xfrm>
+          <a:prstGeom prst="rect">
+            <a:avLst/>
+          </a:prstGeom>
+          <a:solidFill>
+            <a:srgbClr val="EEEEEE"/>
+          </a:solidFill>
+          <a:ln w="15875">
+            <a:solidFill>
+              <a:srgbClr val="9E9E9E"/>
+            </a:solidFill>
+          </a:ln>
+        </p:spPr>
+        <p:style>
+          <a:lnRef idx="1">
+            <a:schemeClr val="accent1"/>
+          </a:lnRef>
+          <a:fillRef idx="3">
+            <a:schemeClr val="accent1"/>
+          </a:fillRef>
+          <a:effectRef idx="2">
+            <a:schemeClr val="accent1"/>
+          </a:effectRef>
+          <a:fontRef idx="minor">
+            <a:schemeClr val="lt1"/>
+          </a:fontRef>
+        </p:style>
+        <p:txBody>
+          <a:bodyPr rtlCol="0" anchor="ctr" lIns="38100" rIns="38100" tIns="25400" bIns="25400" wrap="square"/>
+          <a:lstStyle/>
+          <a:p>
+            <a:pPr algn="ctr"/>
+            <a:r>
+              <a:rPr sz="900" b="1">
+                <a:solidFill>
+                  <a:srgbClr val="333333"/>
+                </a:solidFill>
+              </a:rPr>
+              <a:t>#5</a:t>
+            </a:r>
+          </a:p>
+        </p:txBody>
+      </p:sp>
+      <p:sp>
+        <p:nvSpPr>
+          <p:cNvPr id="10" name="Rectangle 9"/>
+          <p:cNvSpPr/>
+          <p:nvPr/>
+        </p:nvSpPr>
+        <p:spPr>
+          <a:xfrm>
+            <a:off x="4663440" y="1188720"/>
+            <a:ext cx="594359" cy="365760"/>
+          </a:xfrm>
+          <a:prstGeom prst="rect">
+            <a:avLst/>
+          </a:prstGeom>
+          <a:solidFill>
+            <a:srgbClr val="EEEEEE"/>
+          </a:solidFill>
+          <a:ln w="15875">
+            <a:solidFill>
+              <a:srgbClr val="9E9E9E"/>
+            </a:solidFill>
+          </a:ln>
+        </p:spPr>
+        <p:style>
+          <a:lnRef idx="1">
+            <a:schemeClr val="accent1"/>
+          </a:lnRef>
+          <a:fillRef idx="3">
+            <a:schemeClr val="accent1"/>
+          </a:fillRef>
+          <a:effectRef idx="2">
+            <a:schemeClr val="accent1"/>
+          </a:effectRef>
+          <a:fontRef idx="minor">
+            <a:schemeClr val="lt1"/>
+          </a:fontRef>
+        </p:style>
+        <p:txBody>
+          <a:bodyPr rtlCol="0" anchor="ctr" lIns="38100" rIns="38100" tIns="25400" bIns="25400" wrap="square"/>
+          <a:lstStyle/>
+          <a:p>
+            <a:pPr algn="ctr"/>
+            <a:r>
+              <a:rPr sz="900" b="1">
+                <a:solidFill>
+                  <a:srgbClr val="333333"/>
+                </a:solidFill>
+              </a:rPr>
+              <a:t>#6</a:t>
+            </a:r>
+          </a:p>
+        </p:txBody>
+      </p:sp>
+      <p:sp>
+        <p:nvSpPr>
+          <p:cNvPr id="11" name="Rectangle 10"/>
+          <p:cNvSpPr/>
+          <p:nvPr/>
+        </p:nvSpPr>
+        <p:spPr>
+          <a:xfrm>
+            <a:off x="5257800" y="1188720"/>
+            <a:ext cx="594359" cy="365760"/>
+          </a:xfrm>
+          <a:prstGeom prst="rect">
+            <a:avLst/>
+          </a:prstGeom>
+          <a:solidFill>
+            <a:srgbClr val="EEEEEE"/>
+          </a:solidFill>
+          <a:ln w="15875">
+            <a:solidFill>
+              <a:srgbClr val="9E9E9E"/>
+            </a:solidFill>
+          </a:ln>
+        </p:spPr>
+        <p:style>
+          <a:lnRef idx="1">
+            <a:schemeClr val="accent1"/>
+          </a:lnRef>
+          <a:fillRef idx="3">
+            <a:schemeClr val="accent1"/>
+          </a:fillRef>
+          <a:effectRef idx="2">
+            <a:schemeClr val="accent1"/>
+          </a:effectRef>
+          <a:fontRef idx="minor">
+            <a:schemeClr val="lt1"/>
+          </a:fontRef>
+        </p:style>
+        <p:txBody>
+          <a:bodyPr rtlCol="0" anchor="ctr" lIns="38100" rIns="38100" tIns="25400" bIns="25400" wrap="square"/>
+          <a:lstStyle/>
+          <a:p>
+            <a:pPr algn="ctr"/>
+            <a:r>
+              <a:rPr sz="900" b="1">
+                <a:solidFill>
+                  <a:srgbClr val="333333"/>
+                </a:solidFill>
+              </a:rPr>
+              <a:t>#7</a:t>
+            </a:r>
+          </a:p>
+        </p:txBody>
+      </p:sp>
+      <p:sp>
+        <p:nvSpPr>
+          <p:cNvPr id="12" name="Rectangle 11"/>
+          <p:cNvSpPr/>
+          <p:nvPr/>
+        </p:nvSpPr>
+        <p:spPr>
+          <a:xfrm>
+            <a:off x="5852159" y="1188720"/>
+            <a:ext cx="594359" cy="365760"/>
+          </a:xfrm>
+          <a:prstGeom prst="rect">
+            <a:avLst/>
+          </a:prstGeom>
+          <a:solidFill>
+            <a:srgbClr val="EEEEEE"/>
+          </a:solidFill>
+          <a:ln w="15875">
+            <a:solidFill>
+              <a:srgbClr val="9E9E9E"/>
+            </a:solidFill>
+          </a:ln>
+        </p:spPr>
+        <p:style>
+          <a:lnRef idx="1">
+            <a:schemeClr val="accent1"/>
+          </a:lnRef>
+          <a:fillRef idx="3">
+            <a:schemeClr val="accent1"/>
+          </a:fillRef>
+          <a:effectRef idx="2">
+            <a:schemeClr val="accent1"/>
+          </a:effectRef>
+          <a:fontRef idx="minor">
+            <a:schemeClr val="lt1"/>
+          </a:fontRef>
+        </p:style>
+        <p:txBody>
+          <a:bodyPr rtlCol="0" anchor="ctr" lIns="38100" rIns="38100" tIns="25400" bIns="25400" wrap="square"/>
+          <a:lstStyle/>
+          <a:p>
+            <a:pPr algn="ctr"/>
+            <a:r>
+              <a:rPr sz="900" b="1">
+                <a:solidFill>
+                  <a:srgbClr val="333333"/>
+                </a:solidFill>
+              </a:rPr>
+              <a:t>#8</a:t>
+            </a:r>
+          </a:p>
+        </p:txBody>
+      </p:sp>
+      <p:sp>
+        <p:nvSpPr>
+          <p:cNvPr id="13" name="Rectangle 12"/>
+          <p:cNvSpPr/>
+          <p:nvPr/>
+        </p:nvSpPr>
+        <p:spPr>
+          <a:xfrm>
+            <a:off x="6446519" y="1188720"/>
+            <a:ext cx="594359" cy="365760"/>
+          </a:xfrm>
+          <a:prstGeom prst="rect">
+            <a:avLst/>
+          </a:prstGeom>
+          <a:solidFill>
+            <a:srgbClr val="EEEEEE"/>
+          </a:solidFill>
+          <a:ln w="15875">
+            <a:solidFill>
+              <a:srgbClr val="9E9E9E"/>
+            </a:solidFill>
+          </a:ln>
+        </p:spPr>
+        <p:style>
+          <a:lnRef idx="1">
+            <a:schemeClr val="accent1"/>
+          </a:lnRef>
+          <a:fillRef idx="3">
+            <a:schemeClr val="accent1"/>
+          </a:fillRef>
+          <a:effectRef idx="2">
+            <a:schemeClr val="accent1"/>
+          </a:effectRef>
+          <a:fontRef idx="minor">
+            <a:schemeClr val="lt1"/>
+          </a:fontRef>
+        </p:style>
+        <p:txBody>
+          <a:bodyPr rtlCol="0" anchor="ctr" lIns="38100" rIns="38100" tIns="25400" bIns="25400" wrap="square"/>
+          <a:lstStyle/>
+          <a:p>
+            <a:pPr algn="ctr"/>
+            <a:r>
+              <a:rPr sz="900" b="1">
+                <a:solidFill>
+                  <a:srgbClr val="333333"/>
+                </a:solidFill>
+              </a:rPr>
+              <a:t>#9</a:t>
+            </a:r>
+          </a:p>
+        </p:txBody>
+      </p:sp>
+      <p:sp>
+        <p:nvSpPr>
+          <p:cNvPr id="14" name="Rectangle 13"/>
+          <p:cNvSpPr/>
+          <p:nvPr/>
+        </p:nvSpPr>
+        <p:spPr>
+          <a:xfrm>
+            <a:off x="7040879" y="1188720"/>
+            <a:ext cx="594359" cy="365760"/>
+          </a:xfrm>
+          <a:prstGeom prst="rect">
+            <a:avLst/>
+          </a:prstGeom>
+          <a:solidFill>
+            <a:srgbClr val="EEEEEE"/>
+          </a:solidFill>
+          <a:ln w="15875">
+            <a:solidFill>
+              <a:srgbClr val="9E9E9E"/>
+            </a:solidFill>
+          </a:ln>
+        </p:spPr>
+        <p:style>
+          <a:lnRef idx="1">
+            <a:schemeClr val="accent1"/>
+          </a:lnRef>
+          <a:fillRef idx="3">
+            <a:schemeClr val="accent1"/>
+          </a:fillRef>
+          <a:effectRef idx="2">
+            <a:schemeClr val="accent1"/>
+          </a:effectRef>
+          <a:fontRef idx="minor">
+            <a:schemeClr val="lt1"/>
+          </a:fontRef>
+        </p:style>
+        <p:txBody>
+          <a:bodyPr rtlCol="0" anchor="ctr" lIns="38100" rIns="38100" tIns="25400" bIns="25400" wrap="square"/>
+          <a:lstStyle/>
+          <a:p>
+            <a:pPr algn="ctr"/>
+            <a:r>
+              <a:rPr sz="900" b="1">
+                <a:solidFill>
+                  <a:srgbClr val="333333"/>
+                </a:solidFill>
+              </a:rPr>
+              <a:t>#10</a:t>
+            </a:r>
+          </a:p>
+        </p:txBody>
+      </p:sp>
+      <p:sp>
+        <p:nvSpPr>
+          <p:cNvPr id="15" name="Rectangle 14"/>
+          <p:cNvSpPr/>
+          <p:nvPr/>
+        </p:nvSpPr>
+        <p:spPr>
+          <a:xfrm>
+            <a:off x="7635240" y="1188720"/>
+            <a:ext cx="594359" cy="365760"/>
+          </a:xfrm>
+          <a:prstGeom prst="rect">
+            <a:avLst/>
+          </a:prstGeom>
+          <a:solidFill>
+            <a:srgbClr val="EEEEEE"/>
+          </a:solidFill>
+          <a:ln w="15875">
+            <a:solidFill>
+              <a:srgbClr val="9E9E9E"/>
+            </a:solidFill>
+          </a:ln>
+        </p:spPr>
+        <p:style>
+          <a:lnRef idx="1">
+            <a:schemeClr val="accent1"/>
+          </a:lnRef>
+          <a:fillRef idx="3">
+            <a:schemeClr val="accent1"/>
+          </a:fillRef>
+          <a:effectRef idx="2">
+            <a:schemeClr val="accent1"/>
+          </a:effectRef>
+          <a:fontRef idx="minor">
+            <a:schemeClr val="lt1"/>
+          </a:fontRef>
+        </p:style>
+        <p:txBody>
+          <a:bodyPr rtlCol="0" anchor="ctr" lIns="38100" rIns="38100" tIns="25400" bIns="25400" wrap="square"/>
+          <a:lstStyle/>
+          <a:p>
+            <a:pPr algn="ctr"/>
+            <a:r>
+              <a:rPr sz="900" b="1">
+                <a:solidFill>
+                  <a:srgbClr val="333333"/>
+                </a:solidFill>
+              </a:rPr>
+              <a:t>#11</a:t>
+            </a:r>
+          </a:p>
+        </p:txBody>
+      </p:sp>
+      <p:sp>
+        <p:nvSpPr>
+          <p:cNvPr id="16" name="Rectangle 15"/>
+          <p:cNvSpPr/>
+          <p:nvPr/>
+        </p:nvSpPr>
+        <p:spPr>
+          <a:xfrm>
+            <a:off x="8229599" y="1188720"/>
+            <a:ext cx="594359" cy="365760"/>
+          </a:xfrm>
+          <a:prstGeom prst="rect">
+            <a:avLst/>
+          </a:prstGeom>
+          <a:solidFill>
+            <a:srgbClr val="EEEEEE"/>
+          </a:solidFill>
+          <a:ln w="15875">
+            <a:solidFill>
+              <a:srgbClr val="9E9E9E"/>
+            </a:solidFill>
+          </a:ln>
+        </p:spPr>
+        <p:style>
+          <a:lnRef idx="1">
+            <a:schemeClr val="accent1"/>
+          </a:lnRef>
+          <a:fillRef idx="3">
+            <a:schemeClr val="accent1"/>
+          </a:fillRef>
+          <a:effectRef idx="2">
+            <a:schemeClr val="accent1"/>
+          </a:effectRef>
+          <a:fontRef idx="minor">
+            <a:schemeClr val="lt1"/>
+          </a:fontRef>
+        </p:style>
+        <p:txBody>
+          <a:bodyPr rtlCol="0" anchor="ctr" lIns="38100" rIns="38100" tIns="25400" bIns="25400" wrap="square"/>
+          <a:lstStyle/>
+          <a:p>
+            <a:pPr algn="ctr"/>
+            <a:r>
+              <a:rPr sz="900" b="1">
+                <a:solidFill>
+                  <a:srgbClr val="333333"/>
+                </a:solidFill>
+              </a:rPr>
+              <a:t>#12</a:t>
+            </a:r>
+          </a:p>
+        </p:txBody>
+      </p:sp>
+      <p:sp>
+        <p:nvSpPr>
+          <p:cNvPr id="17" name="Rectangle 16"/>
+          <p:cNvSpPr/>
+          <p:nvPr/>
+        </p:nvSpPr>
+        <p:spPr>
+          <a:xfrm>
+            <a:off x="8823959" y="1188720"/>
+            <a:ext cx="594359" cy="365760"/>
+          </a:xfrm>
+          <a:prstGeom prst="rect">
+            <a:avLst/>
+          </a:prstGeom>
+          <a:solidFill>
+            <a:srgbClr val="EEEEEE"/>
+          </a:solidFill>
+          <a:ln w="15875">
+            <a:solidFill>
+              <a:srgbClr val="9E9E9E"/>
+            </a:solidFill>
+          </a:ln>
+        </p:spPr>
+        <p:style>
+          <a:lnRef idx="1">
+            <a:schemeClr val="accent1"/>
+          </a:lnRef>
+          <a:fillRef idx="3">
+            <a:schemeClr val="accent1"/>
+          </a:fillRef>
+          <a:effectRef idx="2">
+            <a:schemeClr val="accent1"/>
+          </a:effectRef>
+          <a:fontRef idx="minor">
+            <a:schemeClr val="lt1"/>
+          </a:fontRef>
+        </p:style>
+        <p:txBody>
+          <a:bodyPr rtlCol="0" anchor="ctr" lIns="38100" rIns="38100" tIns="25400" bIns="25400" wrap="square"/>
+          <a:lstStyle/>
+          <a:p>
+            <a:pPr algn="ctr"/>
+            <a:r>
+              <a:rPr sz="900" b="1">
+                <a:solidFill>
+                  <a:srgbClr val="333333"/>
+                </a:solidFill>
+              </a:rPr>
+              <a:t>#13</a:t>
+            </a:r>
+          </a:p>
+        </p:txBody>
+      </p:sp>
+      <p:sp>
+        <p:nvSpPr>
+          <p:cNvPr id="18" name="Rectangle 17"/>
+          <p:cNvSpPr/>
+          <p:nvPr/>
+        </p:nvSpPr>
+        <p:spPr>
+          <a:xfrm>
+            <a:off x="9418319" y="1188720"/>
+            <a:ext cx="594359" cy="365760"/>
+          </a:xfrm>
+          <a:prstGeom prst="rect">
+            <a:avLst/>
+          </a:prstGeom>
+          <a:solidFill>
+            <a:srgbClr val="EEEEEE"/>
+          </a:solidFill>
+          <a:ln w="15875">
+            <a:solidFill>
+              <a:srgbClr val="9E9E9E"/>
+            </a:solidFill>
+          </a:ln>
+        </p:spPr>
+        <p:style>
+          <a:lnRef idx="1">
+            <a:schemeClr val="accent1"/>
+          </a:lnRef>
+          <a:fillRef idx="3">
+            <a:schemeClr val="accent1"/>
+          </a:fillRef>
+          <a:effectRef idx="2">
+            <a:schemeClr val="accent1"/>
+          </a:effectRef>
+          <a:fontRef idx="minor">
+            <a:schemeClr val="lt1"/>
+          </a:fontRef>
+        </p:style>
+        <p:txBody>
+          <a:bodyPr rtlCol="0" anchor="ctr" lIns="38100" rIns="38100" tIns="25400" bIns="25400" wrap="square"/>
+          <a:lstStyle/>
+          <a:p>
+            <a:pPr algn="ctr"/>
+            <a:r>
+              <a:rPr sz="900" b="1">
+                <a:solidFill>
+                  <a:srgbClr val="333333"/>
+                </a:solidFill>
+              </a:rPr>
+              <a:t>#14</a:t>
+            </a:r>
+          </a:p>
+        </p:txBody>
+      </p:sp>
+      <p:sp>
+        <p:nvSpPr>
+          <p:cNvPr id="19" name="Rectangle 18"/>
+          <p:cNvSpPr/>
+          <p:nvPr/>
+        </p:nvSpPr>
+        <p:spPr>
+          <a:xfrm>
+            <a:off x="10012679" y="1188720"/>
+            <a:ext cx="594359" cy="365760"/>
+          </a:xfrm>
+          <a:prstGeom prst="rect">
+            <a:avLst/>
+          </a:prstGeom>
+          <a:solidFill>
+            <a:srgbClr val="EEEEEE"/>
+          </a:solidFill>
+          <a:ln w="15875">
+            <a:solidFill>
+              <a:srgbClr val="9E9E9E"/>
+            </a:solidFill>
+          </a:ln>
+        </p:spPr>
+        <p:style>
+          <a:lnRef idx="1">
+            <a:schemeClr val="accent1"/>
+          </a:lnRef>
+          <a:fillRef idx="3">
+            <a:schemeClr val="accent1"/>
+          </a:fillRef>
+          <a:effectRef idx="2">
+            <a:schemeClr val="accent1"/>
+          </a:effectRef>
+          <a:fontRef idx="minor">
+            <a:schemeClr val="lt1"/>
+          </a:fontRef>
+        </p:style>
+        <p:txBody>
+          <a:bodyPr rtlCol="0" anchor="ctr" lIns="38100" rIns="38100" tIns="25400" bIns="25400" wrap="square"/>
+          <a:lstStyle/>
+          <a:p>
+            <a:pPr algn="ctr"/>
+            <a:r>
+              <a:rPr sz="900" b="1">
+                <a:solidFill>
+                  <a:srgbClr val="333333"/>
+                </a:solidFill>
+              </a:rPr>
+              <a:t>#15</a:t>
+            </a:r>
+          </a:p>
+        </p:txBody>
+      </p:sp>
+      <p:sp>
+        <p:nvSpPr>
+          <p:cNvPr id="20" name="Rectangle 19"/>
+          <p:cNvSpPr/>
+          <p:nvPr/>
+        </p:nvSpPr>
+        <p:spPr>
+          <a:xfrm>
+            <a:off x="10607039" y="1188720"/>
+            <a:ext cx="594359" cy="365760"/>
+          </a:xfrm>
+          <a:prstGeom prst="rect">
+            <a:avLst/>
+          </a:prstGeom>
+          <a:solidFill>
+            <a:srgbClr val="EEEEEE"/>
+          </a:solidFill>
+          <a:ln w="15875">
+            <a:solidFill>
+              <a:srgbClr val="9E9E9E"/>
+            </a:solidFill>
+          </a:ln>
+        </p:spPr>
+        <p:style>
+          <a:lnRef idx="1">
+            <a:schemeClr val="accent1"/>
+          </a:lnRef>
+          <a:fillRef idx="3">
+            <a:schemeClr val="accent1"/>
+          </a:fillRef>
+          <a:effectRef idx="2">
+            <a:schemeClr val="accent1"/>
+          </a:effectRef>
+          <a:fontRef idx="minor">
+            <a:schemeClr val="lt1"/>
+          </a:fontRef>
+        </p:style>
+        <p:txBody>
+          <a:bodyPr rtlCol="0" anchor="ctr" lIns="38100" rIns="38100" tIns="25400" bIns="25400" wrap="square"/>
+          <a:lstStyle/>
+          <a:p>
+            <a:pPr algn="ctr"/>
+            <a:r>
+              <a:rPr sz="900" b="1">
+                <a:solidFill>
+                  <a:srgbClr val="333333"/>
+                </a:solidFill>
+              </a:rPr>
+              <a:t>#16</a:t>
+            </a:r>
+          </a:p>
+        </p:txBody>
+      </p:sp>
+      <p:sp>
+        <p:nvSpPr>
+          <p:cNvPr id="21" name="Rectangle 20"/>
+          <p:cNvSpPr/>
+          <p:nvPr/>
+        </p:nvSpPr>
+        <p:spPr>
+          <a:xfrm>
+            <a:off x="11201399" y="1188720"/>
+            <a:ext cx="914400" cy="365760"/>
+          </a:xfrm>
+          <a:prstGeom prst="rect">
+            <a:avLst/>
+          </a:prstGeom>
+          <a:solidFill>
+            <a:srgbClr val="EEEEEE"/>
+          </a:solidFill>
+          <a:ln w="15875">
+            <a:solidFill>
+              <a:srgbClr val="9E9E9E"/>
+            </a:solidFill>
+          </a:ln>
+        </p:spPr>
+        <p:style>
+          <a:lnRef idx="1">
+            <a:schemeClr val="accent1"/>
+          </a:lnRef>
+          <a:fillRef idx="3">
+            <a:schemeClr val="accent1"/>
+          </a:fillRef>
+          <a:effectRef idx="2">
+            <a:schemeClr val="accent1"/>
+          </a:effectRef>
+          <a:fontRef idx="minor">
+            <a:schemeClr val="lt1"/>
+          </a:fontRef>
+        </p:style>
+        <p:txBody>
+          <a:bodyPr rtlCol="0" anchor="ctr" lIns="38100" rIns="38100" tIns="25400" bIns="25400" wrap="square"/>
+          <a:lstStyle/>
+          <a:p>
+            <a:pPr algn="ctr"/>
+            <a:r>
+              <a:rPr sz="900" b="1">
+                <a:solidFill>
+                  <a:srgbClr val="333333"/>
+                </a:solidFill>
+              </a:rPr>
+              <a:t>End-to-end</a:t>
+            </a:r>
+          </a:p>
+        </p:txBody>
+      </p:sp>
+      <p:sp>
+        <p:nvSpPr>
+          <p:cNvPr id="22" name="Rectangle 21"/>
+          <p:cNvSpPr/>
+          <p:nvPr/>
+        </p:nvSpPr>
+        <p:spPr>
+          <a:xfrm>
+            <a:off x="274320" y="1554480"/>
+            <a:ext cx="1417320" cy="1005840"/>
+          </a:xfrm>
+          <a:prstGeom prst="rect">
+            <a:avLst/>
+          </a:prstGeom>
+          <a:solidFill>
+            <a:srgbClr val="C8DAFB"/>
+          </a:solidFill>
+          <a:ln w="15875">
+            <a:solidFill>
+              <a:srgbClr val="154FC2"/>
+            </a:solidFill>
+          </a:ln>
+        </p:spPr>
+        <p:style>
+          <a:lnRef idx="1">
+            <a:schemeClr val="accent1"/>
+          </a:lnRef>
+          <a:fillRef idx="3">
+            <a:schemeClr val="accent1"/>
+          </a:fillRef>
+          <a:effectRef idx="2">
+            <a:schemeClr val="accent1"/>
+          </a:effectRef>
+          <a:fontRef idx="minor">
+            <a:schemeClr val="lt1"/>
+          </a:fontRef>
+        </p:style>
+        <p:txBody>
+          <a:bodyPr rtlCol="0" anchor="ctr" lIns="38100" rIns="38100" tIns="25400" bIns="25400" wrap="square"/>
+          <a:lstStyle/>
+          <a:p>
+            <a:pPr algn="ctr"/>
+            <a:r>
+              <a:rPr sz="1000" b="1">
+                <a:solidFill>
+                  <a:srgbClr val="154FC2"/>
+                </a:solidFill>
+              </a:rPr>
+              <a:t>Protocol A — write</a:t>
+            </a:r>
+          </a:p>
+        </p:txBody>
+      </p:sp>
+      <p:sp>
+        <p:nvSpPr>
+          <p:cNvPr id="23" name="Rectangle 22"/>
+          <p:cNvSpPr/>
+          <p:nvPr/>
+        </p:nvSpPr>
+        <p:spPr>
+          <a:xfrm>
+            <a:off x="1691640" y="1554480"/>
+            <a:ext cx="594359" cy="1005840"/>
+          </a:xfrm>
+          <a:prstGeom prst="rect">
+            <a:avLst/>
+          </a:prstGeom>
+          <a:solidFill>
+            <a:srgbClr val="FFFFFF"/>
+          </a:solidFill>
+          <a:ln w="9525">
+            <a:solidFill>
+              <a:srgbClr val="9E9E9E"/>
+            </a:solidFill>
+          </a:ln>
+        </p:spPr>
+        <p:style>
+          <a:lnRef idx="1">
+            <a:schemeClr val="accent1"/>
+          </a:lnRef>
+          <a:fillRef idx="3">
+            <a:schemeClr val="accent1"/>
+          </a:fillRef>
+          <a:effectRef idx="2">
+            <a:schemeClr val="accent1"/>
+          </a:effectRef>
+          <a:fontRef idx="minor">
+            <a:schemeClr val="lt1"/>
+          </a:fontRef>
+        </p:style>
+        <p:txBody>
+          <a:bodyPr rtlCol="0" anchor="ctr" lIns="25400" rIns="25400" tIns="38100" bIns="38100" wrap="square"/>
+          <a:lstStyle/>
+          <a:p>
+            <a:pPr algn="ctr"/>
+            <a:r>
+              <a:rPr sz="900" b="1">
+                <a:solidFill>
+                  <a:srgbClr val="154FC2"/>
+                </a:solidFill>
+              </a:rPr>
+              <a:t>A1</a:t>
+            </a:r>
+          </a:p>
+          <a:p>
+            <a:pPr algn="ctr"/>
+            <a:r>
+              <a:rPr sz="750">
+                <a:solidFill>
+                  <a:srgbClr val="333333"/>
+                </a:solidFill>
+              </a:rPr>
+              <a:t>
+1.1 µs</a:t>
+            </a:r>
+          </a:p>
+        </p:txBody>
+      </p:sp>
+      <p:sp>
+        <p:nvSpPr>
+          <p:cNvPr id="24" name="Rectangle 23"/>
+          <p:cNvSpPr/>
+          <p:nvPr/>
+        </p:nvSpPr>
+        <p:spPr>
+          <a:xfrm>
+            <a:off x="2286000" y="1554480"/>
+            <a:ext cx="594359" cy="1005840"/>
+          </a:xfrm>
+          <a:prstGeom prst="rect">
+            <a:avLst/>
+          </a:prstGeom>
+          <a:solidFill>
+            <a:srgbClr val="FFFFFF"/>
+          </a:solidFill>
+          <a:ln w="9525">
+            <a:solidFill>
+              <a:srgbClr val="9E9E9E"/>
+            </a:solidFill>
+          </a:ln>
+        </p:spPr>
+        <p:style>
+          <a:lnRef idx="1">
+            <a:schemeClr val="accent1"/>
+          </a:lnRef>
+          <a:fillRef idx="3">
+            <a:schemeClr val="accent1"/>
+          </a:fillRef>
+          <a:effectRef idx="2">
+            <a:schemeClr val="accent1"/>
+          </a:effectRef>
+          <a:fontRef idx="minor">
+            <a:schemeClr val="lt1"/>
+          </a:fontRef>
+        </p:style>
+        <p:txBody>
+          <a:bodyPr rtlCol="0" anchor="ctr" lIns="25400" rIns="25400" tIns="38100" bIns="38100" wrap="square"/>
+          <a:lstStyle/>
+          <a:p>
+            <a:pPr algn="ctr"/>
+            <a:r>
+              <a:rPr sz="900" b="1">
+                <a:solidFill>
+                  <a:srgbClr val="154FC2"/>
+                </a:solidFill>
+              </a:rPr>
+              <a:t>A2</a:t>
+            </a:r>
+          </a:p>
+          <a:p>
+            <a:pPr algn="ctr"/>
+            <a:r>
+              <a:rPr sz="750">
+                <a:solidFill>
+                  <a:srgbClr val="333333"/>
+                </a:solidFill>
+              </a:rPr>
+              <a:t>
+1.4 µs</a:t>
+            </a:r>
+          </a:p>
+        </p:txBody>
+      </p:sp>
+      <p:sp>
+        <p:nvSpPr>
+          <p:cNvPr id="25" name="Rectangle 24"/>
+          <p:cNvSpPr/>
+          <p:nvPr/>
+        </p:nvSpPr>
+        <p:spPr>
+          <a:xfrm>
+            <a:off x="2880360" y="1554480"/>
+            <a:ext cx="594359" cy="1005840"/>
+          </a:xfrm>
+          <a:prstGeom prst="rect">
+            <a:avLst/>
+          </a:prstGeom>
+          <a:solidFill>
+            <a:srgbClr val="FFFFFF"/>
+          </a:solidFill>
+          <a:ln w="9525">
+            <a:solidFill>
+              <a:srgbClr val="9E9E9E"/>
+            </a:solidFill>
+          </a:ln>
+        </p:spPr>
+        <p:style>
+          <a:lnRef idx="1">
+            <a:schemeClr val="accent1"/>
+          </a:lnRef>
+          <a:fillRef idx="3">
+            <a:schemeClr val="accent1"/>
+          </a:fillRef>
+          <a:effectRef idx="2">
+            <a:schemeClr val="accent1"/>
+          </a:effectRef>
+          <a:fontRef idx="minor">
+            <a:schemeClr val="lt1"/>
+          </a:fontRef>
+        </p:style>
+        <p:txBody>
+          <a:bodyPr rtlCol="0" anchor="ctr" lIns="25400" rIns="25400" tIns="38100" bIns="38100" wrap="square"/>
+          <a:lstStyle/>
+          <a:p>
+            <a:pPr algn="ctr"/>
+            <a:r>
+              <a:rPr sz="900" b="1">
+                <a:solidFill>
+                  <a:srgbClr val="154FC2"/>
+                </a:solidFill>
+              </a:rPr>
+              <a:t>A3</a:t>
+            </a:r>
+          </a:p>
+          <a:p>
+            <a:pPr algn="ctr"/>
+            <a:r>
+              <a:rPr sz="750">
+                <a:solidFill>
+                  <a:srgbClr val="333333"/>
+                </a:solidFill>
+              </a:rPr>
+              <a:t>
+0.1 µs</a:t>
+            </a:r>
+          </a:p>
+        </p:txBody>
+      </p:sp>
+      <p:sp>
+        <p:nvSpPr>
+          <p:cNvPr id="26" name="Rectangle 25"/>
+          <p:cNvSpPr/>
+          <p:nvPr/>
+        </p:nvSpPr>
+        <p:spPr>
+          <a:xfrm>
+            <a:off x="3474720" y="1554480"/>
+            <a:ext cx="594359" cy="1005840"/>
+          </a:xfrm>
+          <a:prstGeom prst="rect">
+            <a:avLst/>
+          </a:prstGeom>
+          <a:solidFill>
+            <a:srgbClr val="FFCDD2"/>
+          </a:solidFill>
+          <a:ln w="19050">
+            <a:solidFill>
+              <a:srgbClr val="C62828"/>
+            </a:solidFill>
+          </a:ln>
+        </p:spPr>
+        <p:style>
+          <a:lnRef idx="1">
+            <a:schemeClr val="accent1"/>
+          </a:lnRef>
+          <a:fillRef idx="3">
+            <a:schemeClr val="accent1"/>
+          </a:fillRef>
+          <a:effectRef idx="2">
+            <a:schemeClr val="accent1"/>
+          </a:effectRef>
+          <a:fontRef idx="minor">
+            <a:schemeClr val="lt1"/>
+          </a:fontRef>
+        </p:style>
+        <p:txBody>
+          <a:bodyPr rtlCol="0" anchor="ctr" lIns="25400" rIns="25400" tIns="38100" bIns="38100" wrap="square"/>
+          <a:lstStyle/>
+          <a:p>
+            <a:pPr algn="ctr"/>
+            <a:r>
+              <a:rPr sz="900" b="1">
+                <a:solidFill>
+                  <a:srgbClr val="333333"/>
+                </a:solidFill>
+              </a:rPr>
+              <a:t>A4</a:t>
+            </a:r>
+          </a:p>
+          <a:p>
+            <a:pPr algn="ctr"/>
+            <a:r>
+              <a:rPr sz="750" b="1">
+                <a:solidFill>
+                  <a:srgbClr val="333333"/>
+                </a:solidFill>
+              </a:rPr>
+              <a:t>
+~22 spin µs</a:t>
+            </a:r>
+          </a:p>
+        </p:txBody>
+      </p:sp>
+      <p:sp>
+        <p:nvSpPr>
+          <p:cNvPr id="27" name="Rectangle 26"/>
+          <p:cNvSpPr/>
+          <p:nvPr/>
+        </p:nvSpPr>
+        <p:spPr>
+          <a:xfrm>
+            <a:off x="4069079" y="1554480"/>
+            <a:ext cx="594359" cy="1005840"/>
+          </a:xfrm>
+          <a:prstGeom prst="rect">
+            <a:avLst/>
+          </a:prstGeom>
+          <a:solidFill>
+            <a:srgbClr val="FFFFFF"/>
+          </a:solidFill>
+          <a:ln w="9525">
+            <a:solidFill>
+              <a:srgbClr val="9E9E9E"/>
+            </a:solidFill>
+          </a:ln>
+        </p:spPr>
+        <p:style>
+          <a:lnRef idx="1">
+            <a:schemeClr val="accent1"/>
+          </a:lnRef>
+          <a:fillRef idx="3">
+            <a:schemeClr val="accent1"/>
+          </a:fillRef>
+          <a:effectRef idx="2">
+            <a:schemeClr val="accent1"/>
+          </a:effectRef>
+          <a:fontRef idx="minor">
+            <a:schemeClr val="lt1"/>
+          </a:fontRef>
+        </p:style>
+        <p:txBody>
+          <a:bodyPr rtlCol="0" anchor="ctr" lIns="25400" rIns="25400" tIns="38100" bIns="38100" wrap="square"/>
+          <a:lstStyle/>
+          <a:p>
+            <a:pPr algn="ctr"/>
+            <a:r>
+              <a:rPr sz="900" b="1">
+                <a:solidFill>
+                  <a:srgbClr val="154FC2"/>
+                </a:solidFill>
+              </a:rPr>
+              <a:t>A5</a:t>
+            </a:r>
+          </a:p>
+          <a:p>
+            <a:pPr algn="ctr"/>
+            <a:r>
+              <a:rPr sz="750">
+                <a:solidFill>
+                  <a:srgbClr val="333333"/>
+                </a:solidFill>
+              </a:rPr>
+              <a:t>
+1.5 µs</a:t>
+            </a:r>
+          </a:p>
+        </p:txBody>
+      </p:sp>
+      <p:sp>
+        <p:nvSpPr>
+          <p:cNvPr id="28" name="Rectangle 27"/>
+          <p:cNvSpPr/>
+          <p:nvPr/>
+        </p:nvSpPr>
+        <p:spPr>
+          <a:xfrm>
+            <a:off x="4663440" y="1554480"/>
+            <a:ext cx="594359" cy="1005840"/>
+          </a:xfrm>
+          <a:prstGeom prst="rect">
+            <a:avLst/>
+          </a:prstGeom>
+          <a:solidFill>
+            <a:srgbClr val="FFFFFF"/>
+          </a:solidFill>
+          <a:ln w="9525">
+            <a:solidFill>
+              <a:srgbClr val="9E9E9E"/>
+            </a:solidFill>
+          </a:ln>
+        </p:spPr>
+        <p:style>
+          <a:lnRef idx="1">
+            <a:schemeClr val="accent1"/>
+          </a:lnRef>
+          <a:fillRef idx="3">
+            <a:schemeClr val="accent1"/>
+          </a:fillRef>
+          <a:effectRef idx="2">
+            <a:schemeClr val="accent1"/>
+          </a:effectRef>
+          <a:fontRef idx="minor">
+            <a:schemeClr val="lt1"/>
+          </a:fontRef>
+        </p:style>
+        <p:txBody>
+          <a:bodyPr rtlCol="0" anchor="ctr" lIns="25400" rIns="25400" tIns="38100" bIns="38100" wrap="square"/>
+          <a:lstStyle/>
+          <a:p>
+            <a:pPr algn="ctr"/>
+            <a:r>
+              <a:rPr sz="900" b="1">
+                <a:solidFill>
+                  <a:srgbClr val="154FC2"/>
+                </a:solidFill>
+              </a:rPr>
+              <a:t>A6</a:t>
+            </a:r>
+          </a:p>
+          <a:p>
+            <a:pPr algn="ctr"/>
+            <a:r>
+              <a:rPr sz="750">
+                <a:solidFill>
+                  <a:srgbClr val="333333"/>
+                </a:solidFill>
+              </a:rPr>
+              <a:t>
+5.0 µs</a:t>
+            </a:r>
+          </a:p>
+        </p:txBody>
+      </p:sp>
+      <p:sp>
+        <p:nvSpPr>
+          <p:cNvPr id="29" name="Rectangle 28"/>
+          <p:cNvSpPr/>
+          <p:nvPr/>
+        </p:nvSpPr>
+        <p:spPr>
+          <a:xfrm>
+            <a:off x="5257800" y="1554480"/>
+            <a:ext cx="594359" cy="1005840"/>
+          </a:xfrm>
+          <a:prstGeom prst="rect">
+            <a:avLst/>
+          </a:prstGeom>
+          <a:solidFill>
+            <a:srgbClr val="FFFFFF"/>
+          </a:solidFill>
+          <a:ln w="9525">
+            <a:solidFill>
+              <a:srgbClr val="9E9E9E"/>
+            </a:solidFill>
+          </a:ln>
+        </p:spPr>
+        <p:style>
+          <a:lnRef idx="1">
+            <a:schemeClr val="accent1"/>
+          </a:lnRef>
+          <a:fillRef idx="3">
+            <a:schemeClr val="accent1"/>
+          </a:fillRef>
+          <a:effectRef idx="2">
+            <a:schemeClr val="accent1"/>
+          </a:effectRef>
+          <a:fontRef idx="minor">
+            <a:schemeClr val="lt1"/>
+          </a:fontRef>
+        </p:style>
+        <p:txBody>
+          <a:bodyPr rtlCol="0" anchor="ctr" lIns="25400" rIns="25400" tIns="38100" bIns="38100" wrap="square"/>
+          <a:lstStyle/>
+          <a:p>
+            <a:pPr algn="ctr"/>
+            <a:r>
+              <a:rPr sz="900" b="1">
+                <a:solidFill>
+                  <a:srgbClr val="154FC2"/>
+                </a:solidFill>
+              </a:rPr>
+              <a:t>A7</a:t>
+            </a:r>
+          </a:p>
+          <a:p>
+            <a:pPr algn="ctr"/>
+            <a:r>
+              <a:rPr sz="750">
+                <a:solidFill>
+                  <a:srgbClr val="333333"/>
+                </a:solidFill>
+              </a:rPr>
+              <a:t>
+1.65 µs</a:t>
+            </a:r>
+          </a:p>
+        </p:txBody>
+      </p:sp>
+      <p:sp>
+        <p:nvSpPr>
+          <p:cNvPr id="30" name="Rectangle 29"/>
+          <p:cNvSpPr/>
+          <p:nvPr/>
+        </p:nvSpPr>
+        <p:spPr>
+          <a:xfrm>
+            <a:off x="5852159" y="1554480"/>
+            <a:ext cx="594359" cy="1005840"/>
+          </a:xfrm>
+          <a:prstGeom prst="rect">
+            <a:avLst/>
+          </a:prstGeom>
+          <a:solidFill>
+            <a:srgbClr val="FFFFFF"/>
+          </a:solidFill>
+          <a:ln w="9525">
+            <a:solidFill>
+              <a:srgbClr val="9E9E9E"/>
+            </a:solidFill>
+          </a:ln>
+        </p:spPr>
+        <p:style>
+          <a:lnRef idx="1">
+            <a:schemeClr val="accent1"/>
+          </a:lnRef>
+          <a:fillRef idx="3">
+            <a:schemeClr val="accent1"/>
+          </a:fillRef>
+          <a:effectRef idx="2">
+            <a:schemeClr val="accent1"/>
+          </a:effectRef>
+          <a:fontRef idx="minor">
+            <a:schemeClr val="lt1"/>
+          </a:fontRef>
+        </p:style>
+        <p:txBody>
+          <a:bodyPr rtlCol="0" anchor="ctr" lIns="25400" rIns="25400" tIns="38100" bIns="38100" wrap="square"/>
+          <a:lstStyle/>
+          <a:p>
+            <a:pPr algn="ctr"/>
+            <a:r>
+              <a:rPr sz="900" b="1">
+                <a:solidFill>
+                  <a:srgbClr val="154FC2"/>
+                </a:solidFill>
+              </a:rPr>
+              <a:t>A8</a:t>
+            </a:r>
+          </a:p>
+          <a:p>
+            <a:pPr algn="ctr"/>
+            <a:r>
+              <a:rPr sz="750">
+                <a:solidFill>
+                  <a:srgbClr val="333333"/>
+                </a:solidFill>
+              </a:rPr>
+              <a:t>
+3.7 µs</a:t>
+            </a:r>
+          </a:p>
+        </p:txBody>
+      </p:sp>
+      <p:sp>
+        <p:nvSpPr>
+          <p:cNvPr id="31" name="Rectangle 30"/>
+          <p:cNvSpPr/>
+          <p:nvPr/>
+        </p:nvSpPr>
+        <p:spPr>
+          <a:xfrm>
+            <a:off x="6446519" y="1554480"/>
+            <a:ext cx="594359" cy="1005840"/>
+          </a:xfrm>
+          <a:prstGeom prst="rect">
+            <a:avLst/>
+          </a:prstGeom>
+          <a:solidFill>
+            <a:srgbClr val="FFCDD2"/>
+          </a:solidFill>
+          <a:ln w="19050">
+            <a:solidFill>
+              <a:srgbClr val="C62828"/>
+            </a:solidFill>
+          </a:ln>
+        </p:spPr>
+        <p:style>
+          <a:lnRef idx="1">
+            <a:schemeClr val="accent1"/>
+          </a:lnRef>
+          <a:fillRef idx="3">
+            <a:schemeClr val="accent1"/>
+          </a:fillRef>
+          <a:effectRef idx="2">
+            <a:schemeClr val="accent1"/>
+          </a:effectRef>
+          <a:fontRef idx="minor">
+            <a:schemeClr val="lt1"/>
+          </a:fontRef>
+        </p:style>
+        <p:txBody>
+          <a:bodyPr rtlCol="0" anchor="ctr" lIns="25400" rIns="25400" tIns="38100" bIns="38100" wrap="square"/>
+          <a:lstStyle/>
+          <a:p>
+            <a:pPr algn="ctr"/>
+            <a:r>
+              <a:rPr sz="900" b="1">
+                <a:solidFill>
+                  <a:srgbClr val="333333"/>
+                </a:solidFill>
+              </a:rPr>
+              <a:t>A9</a:t>
+            </a:r>
+          </a:p>
+          <a:p>
+            <a:pPr algn="ctr"/>
+            <a:r>
+              <a:rPr sz="750" b="1">
+                <a:solidFill>
+                  <a:srgbClr val="333333"/>
+                </a:solidFill>
+              </a:rPr>
+              <a:t>
+~1.9 spin µs</a:t>
+            </a:r>
+          </a:p>
+        </p:txBody>
+      </p:sp>
+      <p:sp>
+        <p:nvSpPr>
+          <p:cNvPr id="32" name="Rectangle 31"/>
+          <p:cNvSpPr/>
+          <p:nvPr/>
+        </p:nvSpPr>
+        <p:spPr>
+          <a:xfrm>
+            <a:off x="7040879" y="1554480"/>
+            <a:ext cx="594359" cy="1005840"/>
+          </a:xfrm>
+          <a:prstGeom prst="rect">
+            <a:avLst/>
+          </a:prstGeom>
+          <a:solidFill>
+            <a:srgbClr val="FFFFFF"/>
+          </a:solidFill>
+          <a:ln w="9525">
+            <a:solidFill>
+              <a:srgbClr val="9E9E9E"/>
+            </a:solidFill>
+          </a:ln>
+        </p:spPr>
+        <p:style>
+          <a:lnRef idx="1">
+            <a:schemeClr val="accent1"/>
+          </a:lnRef>
+          <a:fillRef idx="3">
+            <a:schemeClr val="accent1"/>
+          </a:fillRef>
+          <a:effectRef idx="2">
+            <a:schemeClr val="accent1"/>
+          </a:effectRef>
+          <a:fontRef idx="minor">
+            <a:schemeClr val="lt1"/>
+          </a:fontRef>
+        </p:style>
+        <p:txBody>
+          <a:bodyPr rtlCol="0" anchor="ctr" lIns="25400" rIns="25400" tIns="38100" bIns="38100" wrap="square"/>
+          <a:lstStyle/>
+          <a:p>
+            <a:pPr algn="ctr"/>
+            <a:r>
+              <a:rPr sz="900" b="1">
+                <a:solidFill>
+                  <a:srgbClr val="154FC2"/>
+                </a:solidFill>
+              </a:rPr>
+              <a:t>A10</a:t>
+            </a:r>
+          </a:p>
+          <a:p>
+            <a:pPr algn="ctr"/>
+            <a:r>
+              <a:rPr sz="750">
+                <a:solidFill>
+                  <a:srgbClr val="333333"/>
+                </a:solidFill>
+              </a:rPr>
+              <a:t>
+1.75 µs</a:t>
+            </a:r>
+          </a:p>
+        </p:txBody>
+      </p:sp>
+      <p:sp>
+        <p:nvSpPr>
+          <p:cNvPr id="33" name="Rectangle 32"/>
+          <p:cNvSpPr/>
+          <p:nvPr/>
+        </p:nvSpPr>
+        <p:spPr>
+          <a:xfrm>
+            <a:off x="7635240" y="1554480"/>
+            <a:ext cx="594359" cy="1005840"/>
+          </a:xfrm>
+          <a:prstGeom prst="rect">
+            <a:avLst/>
+          </a:prstGeom>
+          <a:solidFill>
+            <a:srgbClr val="FFF49C"/>
+          </a:solidFill>
+          <a:ln w="19050">
+            <a:solidFill>
+              <a:srgbClr val="F9A825"/>
+            </a:solidFill>
+          </a:ln>
+        </p:spPr>
+        <p:style>
+          <a:lnRef idx="1">
+            <a:schemeClr val="accent1"/>
+          </a:lnRef>
+          <a:fillRef idx="3">
+            <a:schemeClr val="accent1"/>
+          </a:fillRef>
+          <a:effectRef idx="2">
+            <a:schemeClr val="accent1"/>
+          </a:effectRef>
+          <a:fontRef idx="minor">
+            <a:schemeClr val="lt1"/>
+          </a:fontRef>
+        </p:style>
+        <p:txBody>
+          <a:bodyPr rtlCol="0" anchor="ctr" lIns="25400" rIns="25400" tIns="38100" bIns="38100" wrap="square"/>
+          <a:lstStyle/>
+          <a:p>
+            <a:pPr algn="ctr"/>
+            <a:r>
+              <a:rPr sz="900" b="1">
+                <a:solidFill>
+                  <a:srgbClr val="333333"/>
+                </a:solidFill>
+              </a:rPr>
+              <a:t>A11</a:t>
+            </a:r>
+          </a:p>
+          <a:p>
+            <a:pPr algn="ctr"/>
+            <a:r>
+              <a:rPr sz="750">
+                <a:solidFill>
+                  <a:srgbClr val="333333"/>
+                </a:solidFill>
+              </a:rPr>
+              <a:t>
+0.03 µs</a:t>
+            </a:r>
+          </a:p>
+        </p:txBody>
+      </p:sp>
+      <p:sp>
+        <p:nvSpPr>
+          <p:cNvPr id="34" name="Rectangle 33"/>
+          <p:cNvSpPr/>
+          <p:nvPr/>
+        </p:nvSpPr>
+        <p:spPr>
+          <a:xfrm>
+            <a:off x="8229599" y="1554480"/>
+            <a:ext cx="594359" cy="1005840"/>
+          </a:xfrm>
+          <a:prstGeom prst="rect">
+            <a:avLst/>
+          </a:prstGeom>
+          <a:solidFill>
+            <a:srgbClr val="FFFFFF"/>
+          </a:solidFill>
+          <a:ln w="9525">
+            <a:solidFill>
+              <a:srgbClr val="9E9E9E"/>
+            </a:solidFill>
+          </a:ln>
+        </p:spPr>
+        <p:style>
+          <a:lnRef idx="1">
+            <a:schemeClr val="accent1"/>
+          </a:lnRef>
+          <a:fillRef idx="3">
+            <a:schemeClr val="accent1"/>
+          </a:fillRef>
+          <a:effectRef idx="2">
+            <a:schemeClr val="accent1"/>
+          </a:effectRef>
+          <a:fontRef idx="minor">
+            <a:schemeClr val="lt1"/>
+          </a:fontRef>
+        </p:style>
+        <p:txBody>
+          <a:bodyPr rtlCol="0" anchor="ctr" lIns="25400" rIns="25400" tIns="38100" bIns="38100" wrap="square"/>
+          <a:lstStyle/>
+          <a:p>
+            <a:pPr algn="ctr"/>
+            <a:r>
+              <a:rPr sz="900" b="1">
+                <a:solidFill>
+                  <a:srgbClr val="154FC2"/>
+                </a:solidFill>
+              </a:rPr>
+              <a:t>A12</a:t>
+            </a:r>
+          </a:p>
+          <a:p>
+            <a:pPr algn="ctr"/>
+            <a:r>
+              <a:rPr sz="750">
+                <a:solidFill>
+                  <a:srgbClr val="333333"/>
+                </a:solidFill>
+              </a:rPr>
+              <a:t>
+0.07 µs</a:t>
+            </a:r>
+          </a:p>
+        </p:txBody>
+      </p:sp>
+      <p:sp>
+        <p:nvSpPr>
+          <p:cNvPr id="35" name="Rectangle 34"/>
+          <p:cNvSpPr/>
+          <p:nvPr/>
+        </p:nvSpPr>
+        <p:spPr>
+          <a:xfrm>
+            <a:off x="8823959" y="1554480"/>
+            <a:ext cx="594359" cy="1005840"/>
+          </a:xfrm>
+          <a:prstGeom prst="rect">
+            <a:avLst/>
+          </a:prstGeom>
+          <a:solidFill>
+            <a:srgbClr val="FFCDD2"/>
+          </a:solidFill>
+          <a:ln w="19050">
+            <a:solidFill>
+              <a:srgbClr val="C62828"/>
+            </a:solidFill>
+          </a:ln>
+        </p:spPr>
+        <p:style>
+          <a:lnRef idx="1">
+            <a:schemeClr val="accent1"/>
+          </a:lnRef>
+          <a:fillRef idx="3">
+            <a:schemeClr val="accent1"/>
+          </a:fillRef>
+          <a:effectRef idx="2">
+            <a:schemeClr val="accent1"/>
+          </a:effectRef>
+          <a:fontRef idx="minor">
+            <a:schemeClr val="lt1"/>
+          </a:fontRef>
+        </p:style>
+        <p:txBody>
+          <a:bodyPr rtlCol="0" anchor="ctr" lIns="25400" rIns="25400" tIns="38100" bIns="38100" wrap="square"/>
+          <a:lstStyle/>
+          <a:p>
+            <a:pPr algn="ctr"/>
+            <a:r>
+              <a:rPr sz="900" b="1">
+                <a:solidFill>
+                  <a:srgbClr val="333333"/>
+                </a:solidFill>
+              </a:rPr>
+              <a:t>A13</a:t>
+            </a:r>
+          </a:p>
+          <a:p>
+            <a:pPr algn="ctr"/>
+            <a:r>
+              <a:rPr sz="750" b="1">
+                <a:solidFill>
+                  <a:srgbClr val="333333"/>
+                </a:solidFill>
+              </a:rPr>
+              <a:t>
+10  ★W9 ★W10 µs</a:t>
+            </a:r>
+          </a:p>
+        </p:txBody>
+      </p:sp>
+      <p:sp>
+        <p:nvSpPr>
+          <p:cNvPr id="36" name="Rectangle 35"/>
+          <p:cNvSpPr/>
+          <p:nvPr/>
+        </p:nvSpPr>
+        <p:spPr>
+          <a:xfrm>
+            <a:off x="9418319" y="1554480"/>
+            <a:ext cx="594359" cy="1005840"/>
+          </a:xfrm>
+          <a:prstGeom prst="rect">
+            <a:avLst/>
+          </a:prstGeom>
+          <a:solidFill>
+            <a:srgbClr val="FFFFFF"/>
+          </a:solidFill>
+          <a:ln w="9525">
+            <a:solidFill>
+              <a:srgbClr val="9E9E9E"/>
+            </a:solidFill>
+          </a:ln>
+        </p:spPr>
+        <p:style>
+          <a:lnRef idx="1">
+            <a:schemeClr val="accent1"/>
+          </a:lnRef>
+          <a:fillRef idx="3">
+            <a:schemeClr val="accent1"/>
+          </a:fillRef>
+          <a:effectRef idx="2">
+            <a:schemeClr val="accent1"/>
+          </a:effectRef>
+          <a:fontRef idx="minor">
+            <a:schemeClr val="lt1"/>
+          </a:fontRef>
+        </p:style>
+        <p:txBody>
+          <a:bodyPr rtlCol="0" anchor="ctr" lIns="25400" rIns="25400" tIns="38100" bIns="38100" wrap="square"/>
+          <a:lstStyle/>
+          <a:p>
+            <a:pPr algn="ctr"/>
+            <a:r>
+              <a:rPr sz="900" b="1">
+                <a:solidFill>
+                  <a:srgbClr val="154FC2"/>
+                </a:solidFill>
+              </a:rPr>
+              <a:t>A14</a:t>
+            </a:r>
+          </a:p>
+          <a:p>
+            <a:pPr algn="ctr"/>
+            <a:r>
+              <a:rPr sz="750">
+                <a:solidFill>
+                  <a:srgbClr val="333333"/>
+                </a:solidFill>
+              </a:rPr>
+              <a:t>
+0.2 µs</a:t>
+            </a:r>
+          </a:p>
+        </p:txBody>
+      </p:sp>
+      <p:sp>
+        <p:nvSpPr>
+          <p:cNvPr id="37" name="Rectangle 36"/>
+          <p:cNvSpPr/>
+          <p:nvPr/>
+        </p:nvSpPr>
+        <p:spPr>
+          <a:xfrm>
+            <a:off x="10012679" y="1554480"/>
+            <a:ext cx="594359" cy="1005840"/>
+          </a:xfrm>
+          <a:prstGeom prst="rect">
+            <a:avLst/>
+          </a:prstGeom>
+          <a:solidFill>
+            <a:srgbClr val="FFFFFF"/>
+          </a:solidFill>
+          <a:ln w="15875">
+            <a:solidFill>
+              <a:srgbClr val="9E9E9E"/>
+            </a:solidFill>
+          </a:ln>
+        </p:spPr>
+        <p:style>
+          <a:lnRef idx="1">
+            <a:schemeClr val="accent1"/>
+          </a:lnRef>
+          <a:fillRef idx="3">
+            <a:schemeClr val="accent1"/>
+          </a:fillRef>
+          <a:effectRef idx="2">
+            <a:schemeClr val="accent1"/>
+          </a:effectRef>
+          <a:fontRef idx="minor">
+            <a:schemeClr val="lt1"/>
+          </a:fontRef>
+        </p:style>
+        <p:txBody>
+          <a:bodyPr rtlCol="0" anchor="ctr" lIns="38100" rIns="38100" tIns="25400" bIns="25400" wrap="square"/>
+          <a:lstStyle/>
+          <a:p>
+            <a:pPr algn="ctr"/>
+            <a:r>
+              <a:rPr sz="800" b="0">
+                <a:solidFill>
+                  <a:srgbClr val="333333"/>
+                </a:solidFill>
+              </a:rPr>
+              <a:t/>
+            </a:r>
+          </a:p>
+        </p:txBody>
+      </p:sp>
+      <p:sp>
+        <p:nvSpPr>
+          <p:cNvPr id="38" name="Rectangle 37"/>
+          <p:cNvSpPr/>
+          <p:nvPr/>
+        </p:nvSpPr>
+        <p:spPr>
+          <a:xfrm>
+            <a:off x="10607039" y="1554480"/>
+            <a:ext cx="594359" cy="1005840"/>
+          </a:xfrm>
+          <a:prstGeom prst="rect">
+            <a:avLst/>
+          </a:prstGeom>
+          <a:solidFill>
+            <a:srgbClr val="FFFFFF"/>
+          </a:solidFill>
+          <a:ln w="15875">
+            <a:solidFill>
+              <a:srgbClr val="9E9E9E"/>
+            </a:solidFill>
+          </a:ln>
+        </p:spPr>
+        <p:style>
+          <a:lnRef idx="1">
+            <a:schemeClr val="accent1"/>
+          </a:lnRef>
+          <a:fillRef idx="3">
+            <a:schemeClr val="accent1"/>
+          </a:fillRef>
+          <a:effectRef idx="2">
+            <a:schemeClr val="accent1"/>
+          </a:effectRef>
+          <a:fontRef idx="minor">
+            <a:schemeClr val="lt1"/>
+          </a:fontRef>
+        </p:style>
+        <p:txBody>
+          <a:bodyPr rtlCol="0" anchor="ctr" lIns="38100" rIns="38100" tIns="25400" bIns="25400" wrap="square"/>
+          <a:lstStyle/>
+          <a:p>
+            <a:pPr algn="ctr"/>
+            <a:r>
+              <a:rPr sz="800" b="0">
+                <a:solidFill>
+                  <a:srgbClr val="333333"/>
+                </a:solidFill>
+              </a:rPr>
+              <a:t/>
+            </a:r>
+          </a:p>
+        </p:txBody>
+      </p:sp>
+      <p:sp>
+        <p:nvSpPr>
+          <p:cNvPr id="39" name="Rectangle 38"/>
+          <p:cNvSpPr/>
+          <p:nvPr/>
+        </p:nvSpPr>
+        <p:spPr>
+          <a:xfrm>
+            <a:off x="11201399" y="1554480"/>
+            <a:ext cx="914400" cy="1005840"/>
+          </a:xfrm>
+          <a:prstGeom prst="rect">
+            <a:avLst/>
+          </a:prstGeom>
+          <a:solidFill>
+            <a:srgbClr val="C8DAFB"/>
+          </a:solidFill>
+          <a:ln w="15875">
+            <a:solidFill>
+              <a:srgbClr val="154FC2"/>
+            </a:solidFill>
+          </a:ln>
+        </p:spPr>
+        <p:style>
+          <a:lnRef idx="1">
+            <a:schemeClr val="accent1"/>
+          </a:lnRef>
+          <a:fillRef idx="3">
+            <a:schemeClr val="accent1"/>
+          </a:fillRef>
+          <a:effectRef idx="2">
+            <a:schemeClr val="accent1"/>
+          </a:effectRef>
+          <a:fontRef idx="minor">
+            <a:schemeClr val="lt1"/>
+          </a:fontRef>
+        </p:style>
+        <p:txBody>
+          <a:bodyPr rtlCol="0" anchor="ctr" lIns="38100" rIns="38100" tIns="25400" bIns="25400" wrap="square"/>
+          <a:lstStyle/>
+          <a:p>
+            <a:pPr algn="ctr"/>
+            <a:r>
+              <a:rPr sz="1000" b="1">
+                <a:solidFill>
+                  <a:srgbClr val="154FC2"/>
+                </a:solidFill>
+              </a:rPr>
+              <a:t>~22 µs</a:t>
+            </a:r>
+          </a:p>
+        </p:txBody>
+      </p:sp>
+      <p:sp>
+        <p:nvSpPr>
+          <p:cNvPr id="40" name="Rectangle 39"/>
+          <p:cNvSpPr/>
+          <p:nvPr/>
+        </p:nvSpPr>
+        <p:spPr>
+          <a:xfrm>
+            <a:off x="274320" y="2560320"/>
+            <a:ext cx="1417320" cy="1005840"/>
+          </a:xfrm>
+          <a:prstGeom prst="rect">
+            <a:avLst/>
+          </a:prstGeom>
+          <a:solidFill>
+            <a:srgbClr val="C8DAFB"/>
+          </a:solidFill>
+          <a:ln w="15875">
+            <a:solidFill>
+              <a:srgbClr val="154FC2"/>
+            </a:solidFill>
+          </a:ln>
+        </p:spPr>
+        <p:style>
+          <a:lnRef idx="1">
+            <a:schemeClr val="accent1"/>
+          </a:lnRef>
+          <a:fillRef idx="3">
+            <a:schemeClr val="accent1"/>
+          </a:fillRef>
+          <a:effectRef idx="2">
+            <a:schemeClr val="accent1"/>
+          </a:effectRef>
+          <a:fontRef idx="minor">
+            <a:schemeClr val="lt1"/>
+          </a:fontRef>
+        </p:style>
+        <p:txBody>
+          <a:bodyPr rtlCol="0" anchor="ctr" lIns="38100" rIns="38100" tIns="25400" bIns="25400" wrap="square"/>
+          <a:lstStyle/>
+          <a:p>
+            <a:pPr algn="ctr"/>
+            <a:r>
+              <a:rPr sz="1000" b="1">
+                <a:solidFill>
+                  <a:srgbClr val="154FC2"/>
+                </a:solidFill>
+              </a:rPr>
+              <a:t>Protocol A — read</a:t>
+            </a:r>
+          </a:p>
+        </p:txBody>
+      </p:sp>
+      <p:sp>
+        <p:nvSpPr>
+          <p:cNvPr id="41" name="Rectangle 40"/>
+          <p:cNvSpPr/>
+          <p:nvPr/>
+        </p:nvSpPr>
+        <p:spPr>
+          <a:xfrm>
+            <a:off x="1691640" y="2560320"/>
+            <a:ext cx="594359" cy="1005840"/>
+          </a:xfrm>
+          <a:prstGeom prst="rect">
+            <a:avLst/>
+          </a:prstGeom>
+          <a:solidFill>
+            <a:srgbClr val="FFFFFF"/>
+          </a:solidFill>
+          <a:ln w="9525">
+            <a:solidFill>
+              <a:srgbClr val="9E9E9E"/>
+            </a:solidFill>
+          </a:ln>
+        </p:spPr>
+        <p:style>
+          <a:lnRef idx="1">
+            <a:schemeClr val="accent1"/>
+          </a:lnRef>
+          <a:fillRef idx="3">
+            <a:schemeClr val="accent1"/>
+          </a:fillRef>
+          <a:effectRef idx="2">
+            <a:schemeClr val="accent1"/>
+          </a:effectRef>
+          <a:fontRef idx="minor">
+            <a:schemeClr val="lt1"/>
+          </a:fontRef>
+        </p:style>
+        <p:txBody>
+          <a:bodyPr rtlCol="0" anchor="ctr" lIns="25400" rIns="25400" tIns="38100" bIns="38100" wrap="square"/>
+          <a:lstStyle/>
+          <a:p>
+            <a:pPr algn="ctr"/>
+            <a:r>
+              <a:rPr sz="900" b="1">
+                <a:solidFill>
+                  <a:srgbClr val="154FC2"/>
+                </a:solidFill>
+              </a:rPr>
+              <a:t>A1r</a:t>
+            </a:r>
+          </a:p>
+          <a:p>
+            <a:pPr algn="ctr"/>
+            <a:r>
+              <a:rPr sz="750">
+                <a:solidFill>
+                  <a:srgbClr val="333333"/>
+                </a:solidFill>
+              </a:rPr>
+              <a:t>
+0.05 µs</a:t>
+            </a:r>
+          </a:p>
+        </p:txBody>
+      </p:sp>
+      <p:sp>
+        <p:nvSpPr>
+          <p:cNvPr id="42" name="Rectangle 41"/>
+          <p:cNvSpPr/>
+          <p:nvPr/>
+        </p:nvSpPr>
+        <p:spPr>
+          <a:xfrm>
+            <a:off x="2286000" y="2560320"/>
+            <a:ext cx="594359" cy="1005840"/>
+          </a:xfrm>
+          <a:prstGeom prst="rect">
+            <a:avLst/>
+          </a:prstGeom>
+          <a:solidFill>
+            <a:srgbClr val="FFF49C"/>
+          </a:solidFill>
+          <a:ln w="19050">
+            <a:solidFill>
+              <a:srgbClr val="F9A825"/>
+            </a:solidFill>
+          </a:ln>
+        </p:spPr>
+        <p:style>
+          <a:lnRef idx="1">
+            <a:schemeClr val="accent1"/>
+          </a:lnRef>
+          <a:fillRef idx="3">
+            <a:schemeClr val="accent1"/>
+          </a:fillRef>
+          <a:effectRef idx="2">
+            <a:schemeClr val="accent1"/>
+          </a:effectRef>
+          <a:fontRef idx="minor">
+            <a:schemeClr val="lt1"/>
+          </a:fontRef>
+        </p:style>
+        <p:txBody>
+          <a:bodyPr rtlCol="0" anchor="ctr" lIns="25400" rIns="25400" tIns="38100" bIns="38100" wrap="square"/>
+          <a:lstStyle/>
+          <a:p>
+            <a:pPr algn="ctr"/>
+            <a:r>
+              <a:rPr sz="900" b="1">
+                <a:solidFill>
+                  <a:srgbClr val="333333"/>
+                </a:solidFill>
+              </a:rPr>
+              <a:t>A2r</a:t>
+            </a:r>
+          </a:p>
+          <a:p>
+            <a:pPr algn="ctr"/>
+            <a:r>
+              <a:rPr sz="750">
+                <a:solidFill>
+                  <a:srgbClr val="333333"/>
+                </a:solidFill>
+              </a:rPr>
+              <a:t>
+0.05  ★TLS µs</a:t>
+            </a:r>
+          </a:p>
+        </p:txBody>
+      </p:sp>
+      <p:sp>
+        <p:nvSpPr>
+          <p:cNvPr id="43" name="Rectangle 42"/>
+          <p:cNvSpPr/>
+          <p:nvPr/>
+        </p:nvSpPr>
+        <p:spPr>
+          <a:xfrm>
+            <a:off x="2880360" y="2560320"/>
+            <a:ext cx="594359" cy="1005840"/>
+          </a:xfrm>
+          <a:prstGeom prst="rect">
+            <a:avLst/>
+          </a:prstGeom>
+          <a:solidFill>
+            <a:srgbClr val="FFF49C"/>
+          </a:solidFill>
+          <a:ln w="19050">
+            <a:solidFill>
+              <a:srgbClr val="F9A825"/>
+            </a:solidFill>
+          </a:ln>
+        </p:spPr>
+        <p:style>
+          <a:lnRef idx="1">
+            <a:schemeClr val="accent1"/>
+          </a:lnRef>
+          <a:fillRef idx="3">
+            <a:schemeClr val="accent1"/>
+          </a:fillRef>
+          <a:effectRef idx="2">
+            <a:schemeClr val="accent1"/>
+          </a:effectRef>
+          <a:fontRef idx="minor">
+            <a:schemeClr val="lt1"/>
+          </a:fontRef>
+        </p:style>
+        <p:txBody>
+          <a:bodyPr rtlCol="0" anchor="ctr" lIns="25400" rIns="25400" tIns="38100" bIns="38100" wrap="square"/>
+          <a:lstStyle/>
+          <a:p>
+            <a:pPr algn="ctr"/>
+            <a:r>
+              <a:rPr sz="900" b="1">
+                <a:solidFill>
+                  <a:srgbClr val="333333"/>
+                </a:solidFill>
+              </a:rPr>
+              <a:t>A3r</a:t>
+            </a:r>
+          </a:p>
+          <a:p>
+            <a:pPr algn="ctr"/>
+            <a:r>
+              <a:rPr sz="750">
+                <a:solidFill>
+                  <a:srgbClr val="333333"/>
+                </a:solidFill>
+              </a:rPr>
+              <a:t>
+0.5  ★L2 µs</a:t>
+            </a:r>
+          </a:p>
+        </p:txBody>
+      </p:sp>
+      <p:sp>
+        <p:nvSpPr>
+          <p:cNvPr id="44" name="Rectangle 43"/>
+          <p:cNvSpPr/>
+          <p:nvPr/>
+        </p:nvSpPr>
+        <p:spPr>
+          <a:xfrm>
+            <a:off x="3474720" y="2560320"/>
+            <a:ext cx="594359" cy="1005840"/>
+          </a:xfrm>
+          <a:prstGeom prst="rect">
+            <a:avLst/>
+          </a:prstGeom>
+          <a:solidFill>
+            <a:srgbClr val="FFFFFF"/>
+          </a:solidFill>
+          <a:ln w="9525">
+            <a:solidFill>
+              <a:srgbClr val="9E9E9E"/>
+            </a:solidFill>
+          </a:ln>
+        </p:spPr>
+        <p:style>
+          <a:lnRef idx="1">
+            <a:schemeClr val="accent1"/>
+          </a:lnRef>
+          <a:fillRef idx="3">
+            <a:schemeClr val="accent1"/>
+          </a:fillRef>
+          <a:effectRef idx="2">
+            <a:schemeClr val="accent1"/>
+          </a:effectRef>
+          <a:fontRef idx="minor">
+            <a:schemeClr val="lt1"/>
+          </a:fontRef>
+        </p:style>
+        <p:txBody>
+          <a:bodyPr rtlCol="0" anchor="ctr" lIns="25400" rIns="25400" tIns="38100" bIns="38100" wrap="square"/>
+          <a:lstStyle/>
+          <a:p>
+            <a:pPr algn="ctr"/>
+            <a:r>
+              <a:rPr sz="900" b="1">
+                <a:solidFill>
+                  <a:srgbClr val="154FC2"/>
+                </a:solidFill>
+              </a:rPr>
+              <a:t>A4r</a:t>
+            </a:r>
+          </a:p>
+          <a:p>
+            <a:pPr algn="ctr"/>
+            <a:r>
+              <a:rPr sz="750">
+                <a:solidFill>
+                  <a:srgbClr val="333333"/>
+                </a:solidFill>
+              </a:rPr>
+              <a:t>
+0.1 µs</a:t>
+            </a:r>
+          </a:p>
+        </p:txBody>
+      </p:sp>
+      <p:sp>
+        <p:nvSpPr>
+          <p:cNvPr id="45" name="Rectangle 44"/>
+          <p:cNvSpPr/>
+          <p:nvPr/>
+        </p:nvSpPr>
+        <p:spPr>
+          <a:xfrm>
+            <a:off x="4069079" y="2560320"/>
+            <a:ext cx="594359" cy="1005840"/>
+          </a:xfrm>
+          <a:prstGeom prst="rect">
+            <a:avLst/>
+          </a:prstGeom>
+          <a:solidFill>
+            <a:srgbClr val="FFFFFF"/>
+          </a:solidFill>
+          <a:ln w="9525">
+            <a:solidFill>
+              <a:srgbClr val="9E9E9E"/>
+            </a:solidFill>
+          </a:ln>
+        </p:spPr>
+        <p:style>
+          <a:lnRef idx="1">
+            <a:schemeClr val="accent1"/>
+          </a:lnRef>
+          <a:fillRef idx="3">
+            <a:schemeClr val="accent1"/>
+          </a:fillRef>
+          <a:effectRef idx="2">
+            <a:schemeClr val="accent1"/>
+          </a:effectRef>
+          <a:fontRef idx="minor">
+            <a:schemeClr val="lt1"/>
+          </a:fontRef>
+        </p:style>
+        <p:txBody>
+          <a:bodyPr rtlCol="0" anchor="ctr" lIns="25400" rIns="25400" tIns="38100" bIns="38100" wrap="square"/>
+          <a:lstStyle/>
+          <a:p>
+            <a:pPr algn="ctr"/>
+            <a:r>
+              <a:rPr sz="900" b="1">
+                <a:solidFill>
+                  <a:srgbClr val="154FC2"/>
+                </a:solidFill>
+              </a:rPr>
+              <a:t>A5r</a:t>
+            </a:r>
+          </a:p>
+          <a:p>
+            <a:pPr algn="ctr"/>
+            <a:r>
+              <a:rPr sz="750">
+                <a:solidFill>
+                  <a:srgbClr val="333333"/>
+                </a:solidFill>
+              </a:rPr>
+              <a:t>
+0.1 µs</a:t>
+            </a:r>
+          </a:p>
+        </p:txBody>
+      </p:sp>
+      <p:sp>
+        <p:nvSpPr>
+          <p:cNvPr id="46" name="Rectangle 45"/>
+          <p:cNvSpPr/>
+          <p:nvPr/>
+        </p:nvSpPr>
+        <p:spPr>
+          <a:xfrm>
+            <a:off x="4663440" y="2560320"/>
+            <a:ext cx="594359" cy="1005840"/>
+          </a:xfrm>
+          <a:prstGeom prst="rect">
+            <a:avLst/>
+          </a:prstGeom>
+          <a:solidFill>
+            <a:srgbClr val="FFFFFF"/>
+          </a:solidFill>
+          <a:ln w="9525">
+            <a:solidFill>
+              <a:srgbClr val="9E9E9E"/>
+            </a:solidFill>
+          </a:ln>
+        </p:spPr>
+        <p:style>
+          <a:lnRef idx="1">
+            <a:schemeClr val="accent1"/>
+          </a:lnRef>
+          <a:fillRef idx="3">
+            <a:schemeClr val="accent1"/>
+          </a:fillRef>
+          <a:effectRef idx="2">
+            <a:schemeClr val="accent1"/>
+          </a:effectRef>
+          <a:fontRef idx="minor">
+            <a:schemeClr val="lt1"/>
+          </a:fontRef>
+        </p:style>
+        <p:txBody>
+          <a:bodyPr rtlCol="0" anchor="ctr" lIns="25400" rIns="25400" tIns="38100" bIns="38100" wrap="square"/>
+          <a:lstStyle/>
+          <a:p>
+            <a:pPr algn="ctr"/>
+            <a:r>
+              <a:rPr sz="900" b="1">
+                <a:solidFill>
+                  <a:srgbClr val="154FC2"/>
+                </a:solidFill>
+              </a:rPr>
+              <a:t>A6r</a:t>
+            </a:r>
+          </a:p>
+          <a:p>
+            <a:pPr algn="ctr"/>
+            <a:r>
+              <a:rPr sz="750">
+                <a:solidFill>
+                  <a:srgbClr val="333333"/>
+                </a:solidFill>
+              </a:rPr>
+              <a:t>
+1.4 µs</a:t>
+            </a:r>
+          </a:p>
+        </p:txBody>
+      </p:sp>
+      <p:sp>
+        <p:nvSpPr>
+          <p:cNvPr id="47" name="Rectangle 46"/>
+          <p:cNvSpPr/>
+          <p:nvPr/>
+        </p:nvSpPr>
+        <p:spPr>
+          <a:xfrm>
+            <a:off x="5257800" y="2560320"/>
+            <a:ext cx="594359" cy="1005840"/>
+          </a:xfrm>
+          <a:prstGeom prst="rect">
+            <a:avLst/>
+          </a:prstGeom>
+          <a:solidFill>
+            <a:srgbClr val="FFFFFF"/>
+          </a:solidFill>
+          <a:ln w="9525">
+            <a:solidFill>
+              <a:srgbClr val="9E9E9E"/>
+            </a:solidFill>
+          </a:ln>
+        </p:spPr>
+        <p:style>
+          <a:lnRef idx="1">
+            <a:schemeClr val="accent1"/>
+          </a:lnRef>
+          <a:fillRef idx="3">
+            <a:schemeClr val="accent1"/>
+          </a:fillRef>
+          <a:effectRef idx="2">
+            <a:schemeClr val="accent1"/>
+          </a:effectRef>
+          <a:fontRef idx="minor">
+            <a:schemeClr val="lt1"/>
+          </a:fontRef>
+        </p:style>
+        <p:txBody>
+          <a:bodyPr rtlCol="0" anchor="ctr" lIns="25400" rIns="25400" tIns="38100" bIns="38100" wrap="square"/>
+          <a:lstStyle/>
+          <a:p>
+            <a:pPr algn="ctr"/>
+            <a:r>
+              <a:rPr sz="900" b="1">
+                <a:solidFill>
+                  <a:srgbClr val="154FC2"/>
+                </a:solidFill>
+              </a:rPr>
+              <a:t>A7r</a:t>
+            </a:r>
+          </a:p>
+          <a:p>
+            <a:pPr algn="ctr"/>
+            <a:r>
+              <a:rPr sz="750">
+                <a:solidFill>
+                  <a:srgbClr val="333333"/>
+                </a:solidFill>
+              </a:rPr>
+              <a:t>
+0.1 µs</a:t>
+            </a:r>
+          </a:p>
+        </p:txBody>
+      </p:sp>
+      <p:sp>
+        <p:nvSpPr>
+          <p:cNvPr id="48" name="Rectangle 47"/>
+          <p:cNvSpPr/>
+          <p:nvPr/>
+        </p:nvSpPr>
+        <p:spPr>
+          <a:xfrm>
+            <a:off x="5852159" y="2560320"/>
+            <a:ext cx="594359" cy="1005840"/>
+          </a:xfrm>
+          <a:prstGeom prst="rect">
+            <a:avLst/>
+          </a:prstGeom>
+          <a:solidFill>
+            <a:srgbClr val="FFCDD2"/>
+          </a:solidFill>
+          <a:ln w="19050">
+            <a:solidFill>
+              <a:srgbClr val="C62828"/>
+            </a:solidFill>
+          </a:ln>
+        </p:spPr>
+        <p:style>
+          <a:lnRef idx="1">
+            <a:schemeClr val="accent1"/>
+          </a:lnRef>
+          <a:fillRef idx="3">
+            <a:schemeClr val="accent1"/>
+          </a:fillRef>
+          <a:effectRef idx="2">
+            <a:schemeClr val="accent1"/>
+          </a:effectRef>
+          <a:fontRef idx="minor">
+            <a:schemeClr val="lt1"/>
+          </a:fontRef>
+        </p:style>
+        <p:txBody>
+          <a:bodyPr rtlCol="0" anchor="ctr" lIns="25400" rIns="25400" tIns="38100" bIns="38100" wrap="square"/>
+          <a:lstStyle/>
+          <a:p>
+            <a:pPr algn="ctr"/>
+            <a:r>
+              <a:rPr sz="900" b="1">
+                <a:solidFill>
+                  <a:srgbClr val="333333"/>
+                </a:solidFill>
+              </a:rPr>
+              <a:t>A8r</a:t>
+            </a:r>
+          </a:p>
+          <a:p>
+            <a:pPr algn="ctr"/>
+            <a:r>
+              <a:rPr sz="750" b="1">
+                <a:solidFill>
+                  <a:srgbClr val="333333"/>
+                </a:solidFill>
+              </a:rPr>
+              <a:t>
+~14 spin µs</a:t>
+            </a:r>
+          </a:p>
+        </p:txBody>
+      </p:sp>
+      <p:sp>
+        <p:nvSpPr>
+          <p:cNvPr id="49" name="Rectangle 48"/>
+          <p:cNvSpPr/>
+          <p:nvPr/>
+        </p:nvSpPr>
+        <p:spPr>
+          <a:xfrm>
+            <a:off x="6446519" y="2560320"/>
+            <a:ext cx="594359" cy="1005840"/>
+          </a:xfrm>
+          <a:prstGeom prst="rect">
+            <a:avLst/>
+          </a:prstGeom>
+          <a:solidFill>
+            <a:srgbClr val="FFFFFF"/>
+          </a:solidFill>
+          <a:ln w="9525">
+            <a:solidFill>
+              <a:srgbClr val="9E9E9E"/>
+            </a:solidFill>
+          </a:ln>
+        </p:spPr>
+        <p:style>
+          <a:lnRef idx="1">
+            <a:schemeClr val="accent1"/>
+          </a:lnRef>
+          <a:fillRef idx="3">
+            <a:schemeClr val="accent1"/>
+          </a:fillRef>
+          <a:effectRef idx="2">
+            <a:schemeClr val="accent1"/>
+          </a:effectRef>
+          <a:fontRef idx="minor">
+            <a:schemeClr val="lt1"/>
+          </a:fontRef>
+        </p:style>
+        <p:txBody>
+          <a:bodyPr rtlCol="0" anchor="ctr" lIns="25400" rIns="25400" tIns="38100" bIns="38100" wrap="square"/>
+          <a:lstStyle/>
+          <a:p>
+            <a:pPr algn="ctr"/>
+            <a:r>
+              <a:rPr sz="900" b="1">
+                <a:solidFill>
+                  <a:srgbClr val="154FC2"/>
+                </a:solidFill>
+              </a:rPr>
+              <a:t>A9r</a:t>
+            </a:r>
+          </a:p>
+          <a:p>
+            <a:pPr algn="ctr"/>
+            <a:r>
+              <a:rPr sz="750">
+                <a:solidFill>
+                  <a:srgbClr val="333333"/>
+                </a:solidFill>
+              </a:rPr>
+              <a:t>
+1.5 µs</a:t>
+            </a:r>
+          </a:p>
+        </p:txBody>
+      </p:sp>
+      <p:sp>
+        <p:nvSpPr>
+          <p:cNvPr id="50" name="Rectangle 49"/>
+          <p:cNvSpPr/>
+          <p:nvPr/>
+        </p:nvSpPr>
+        <p:spPr>
+          <a:xfrm>
+            <a:off x="7040879" y="2560320"/>
+            <a:ext cx="594359" cy="1005840"/>
+          </a:xfrm>
+          <a:prstGeom prst="rect">
+            <a:avLst/>
+          </a:prstGeom>
+          <a:solidFill>
+            <a:srgbClr val="FFF49C"/>
+          </a:solidFill>
+          <a:ln w="19050">
+            <a:solidFill>
+              <a:srgbClr val="F9A825"/>
+            </a:solidFill>
+          </a:ln>
+        </p:spPr>
+        <p:style>
+          <a:lnRef idx="1">
+            <a:schemeClr val="accent1"/>
+          </a:lnRef>
+          <a:fillRef idx="3">
+            <a:schemeClr val="accent1"/>
+          </a:fillRef>
+          <a:effectRef idx="2">
+            <a:schemeClr val="accent1"/>
+          </a:effectRef>
+          <a:fontRef idx="minor">
+            <a:schemeClr val="lt1"/>
+          </a:fontRef>
+        </p:style>
+        <p:txBody>
+          <a:bodyPr rtlCol="0" anchor="ctr" lIns="25400" rIns="25400" tIns="38100" bIns="38100" wrap="square"/>
+          <a:lstStyle/>
+          <a:p>
+            <a:pPr algn="ctr"/>
+            <a:r>
+              <a:rPr sz="900" b="1">
+                <a:solidFill>
+                  <a:srgbClr val="333333"/>
+                </a:solidFill>
+              </a:rPr>
+              <a:t>A10r</a:t>
+            </a:r>
+          </a:p>
+          <a:p>
+            <a:pPr algn="ctr"/>
+            <a:r>
+              <a:rPr sz="750">
+                <a:solidFill>
+                  <a:srgbClr val="333333"/>
+                </a:solidFill>
+              </a:rPr>
+              <a:t>
+5  ★bmap µs</a:t>
+            </a:r>
+          </a:p>
+        </p:txBody>
+      </p:sp>
+      <p:sp>
+        <p:nvSpPr>
+          <p:cNvPr id="51" name="Rectangle 50"/>
+          <p:cNvSpPr/>
+          <p:nvPr/>
+        </p:nvSpPr>
+        <p:spPr>
+          <a:xfrm>
+            <a:off x="7635240" y="2560320"/>
+            <a:ext cx="594359" cy="1005840"/>
+          </a:xfrm>
+          <a:prstGeom prst="rect">
+            <a:avLst/>
+          </a:prstGeom>
+          <a:solidFill>
+            <a:srgbClr val="FFFFFF"/>
+          </a:solidFill>
+          <a:ln w="9525">
+            <a:solidFill>
+              <a:srgbClr val="9E9E9E"/>
+            </a:solidFill>
+          </a:ln>
+        </p:spPr>
+        <p:style>
+          <a:lnRef idx="1">
+            <a:schemeClr val="accent1"/>
+          </a:lnRef>
+          <a:fillRef idx="3">
+            <a:schemeClr val="accent1"/>
+          </a:fillRef>
+          <a:effectRef idx="2">
+            <a:schemeClr val="accent1"/>
+          </a:effectRef>
+          <a:fontRef idx="minor">
+            <a:schemeClr val="lt1"/>
+          </a:fontRef>
+        </p:style>
+        <p:txBody>
+          <a:bodyPr rtlCol="0" anchor="ctr" lIns="25400" rIns="25400" tIns="38100" bIns="38100" wrap="square"/>
+          <a:lstStyle/>
+          <a:p>
+            <a:pPr algn="ctr"/>
+            <a:r>
+              <a:rPr sz="900" b="1">
+                <a:solidFill>
+                  <a:srgbClr val="154FC2"/>
+                </a:solidFill>
+              </a:rPr>
+              <a:t>A11r</a:t>
+            </a:r>
+          </a:p>
+          <a:p>
+            <a:pPr algn="ctr"/>
+            <a:r>
+              <a:rPr sz="750">
+                <a:solidFill>
+                  <a:srgbClr val="333333"/>
+                </a:solidFill>
+              </a:rPr>
+              <a:t>
+5 µs</a:t>
+            </a:r>
+          </a:p>
+        </p:txBody>
+      </p:sp>
+      <p:sp>
+        <p:nvSpPr>
+          <p:cNvPr id="52" name="Rectangle 51"/>
+          <p:cNvSpPr/>
+          <p:nvPr/>
+        </p:nvSpPr>
+        <p:spPr>
+          <a:xfrm>
+            <a:off x="8229599" y="2560320"/>
+            <a:ext cx="594359" cy="1005840"/>
+          </a:xfrm>
+          <a:prstGeom prst="rect">
+            <a:avLst/>
+          </a:prstGeom>
+          <a:solidFill>
+            <a:srgbClr val="FFFFFF"/>
+          </a:solidFill>
+          <a:ln w="9525">
+            <a:solidFill>
+              <a:srgbClr val="9E9E9E"/>
+            </a:solidFill>
+          </a:ln>
+        </p:spPr>
+        <p:style>
+          <a:lnRef idx="1">
+            <a:schemeClr val="accent1"/>
+          </a:lnRef>
+          <a:fillRef idx="3">
+            <a:schemeClr val="accent1"/>
+          </a:fillRef>
+          <a:effectRef idx="2">
+            <a:schemeClr val="accent1"/>
+          </a:effectRef>
+          <a:fontRef idx="minor">
+            <a:schemeClr val="lt1"/>
+          </a:fontRef>
+        </p:style>
+        <p:txBody>
+          <a:bodyPr rtlCol="0" anchor="ctr" lIns="25400" rIns="25400" tIns="38100" bIns="38100" wrap="square"/>
+          <a:lstStyle/>
+          <a:p>
+            <a:pPr algn="ctr"/>
+            <a:r>
+              <a:rPr sz="900" b="1">
+                <a:solidFill>
+                  <a:srgbClr val="154FC2"/>
+                </a:solidFill>
+              </a:rPr>
+              <a:t>A12r</a:t>
+            </a:r>
+          </a:p>
+          <a:p>
+            <a:pPr algn="ctr"/>
+            <a:r>
+              <a:rPr sz="750">
+                <a:solidFill>
+                  <a:srgbClr val="333333"/>
+                </a:solidFill>
+              </a:rPr>
+              <a:t>
+1.0 µs</a:t>
+            </a:r>
+          </a:p>
+        </p:txBody>
+      </p:sp>
+      <p:sp>
+        <p:nvSpPr>
+          <p:cNvPr id="53" name="Rectangle 52"/>
+          <p:cNvSpPr/>
+          <p:nvPr/>
+        </p:nvSpPr>
+        <p:spPr>
+          <a:xfrm>
+            <a:off x="8823959" y="2560320"/>
+            <a:ext cx="594359" cy="1005840"/>
+          </a:xfrm>
+          <a:prstGeom prst="rect">
+            <a:avLst/>
+          </a:prstGeom>
+          <a:solidFill>
+            <a:srgbClr val="FFF49C"/>
+          </a:solidFill>
+          <a:ln w="19050">
+            <a:solidFill>
+              <a:srgbClr val="F9A825"/>
+            </a:solidFill>
+          </a:ln>
+        </p:spPr>
+        <p:style>
+          <a:lnRef idx="1">
+            <a:schemeClr val="accent1"/>
+          </a:lnRef>
+          <a:fillRef idx="3">
+            <a:schemeClr val="accent1"/>
+          </a:fillRef>
+          <a:effectRef idx="2">
+            <a:schemeClr val="accent1"/>
+          </a:effectRef>
+          <a:fontRef idx="minor">
+            <a:schemeClr val="lt1"/>
+          </a:fontRef>
+        </p:style>
+        <p:txBody>
+          <a:bodyPr rtlCol="0" anchor="ctr" lIns="25400" rIns="25400" tIns="38100" bIns="38100" wrap="square"/>
+          <a:lstStyle/>
+          <a:p>
+            <a:pPr algn="ctr"/>
+            <a:r>
+              <a:rPr sz="900" b="1">
+                <a:solidFill>
+                  <a:srgbClr val="333333"/>
+                </a:solidFill>
+              </a:rPr>
+              <a:t>A13r</a:t>
+            </a:r>
+          </a:p>
+          <a:p>
+            <a:pPr algn="ctr"/>
+            <a:r>
+              <a:rPr sz="750">
+                <a:solidFill>
+                  <a:srgbClr val="333333"/>
+                </a:solidFill>
+              </a:rPr>
+              <a:t>
+0.07  ★pub µs</a:t>
+            </a:r>
+          </a:p>
+        </p:txBody>
+      </p:sp>
+      <p:sp>
+        <p:nvSpPr>
+          <p:cNvPr id="54" name="Rectangle 53"/>
+          <p:cNvSpPr/>
+          <p:nvPr/>
+        </p:nvSpPr>
+        <p:spPr>
+          <a:xfrm>
+            <a:off x="9418319" y="2560320"/>
+            <a:ext cx="594359" cy="1005840"/>
+          </a:xfrm>
+          <a:prstGeom prst="rect">
+            <a:avLst/>
+          </a:prstGeom>
+          <a:solidFill>
+            <a:srgbClr val="FFFFFF"/>
+          </a:solidFill>
+          <a:ln w="9525">
+            <a:solidFill>
+              <a:srgbClr val="9E9E9E"/>
+            </a:solidFill>
+          </a:ln>
+        </p:spPr>
+        <p:style>
+          <a:lnRef idx="1">
+            <a:schemeClr val="accent1"/>
+          </a:lnRef>
+          <a:fillRef idx="3">
+            <a:schemeClr val="accent1"/>
+          </a:fillRef>
+          <a:effectRef idx="2">
+            <a:schemeClr val="accent1"/>
+          </a:effectRef>
+          <a:fontRef idx="minor">
+            <a:schemeClr val="lt1"/>
+          </a:fontRef>
+        </p:style>
+        <p:txBody>
+          <a:bodyPr rtlCol="0" anchor="ctr" lIns="25400" rIns="25400" tIns="38100" bIns="38100" wrap="square"/>
+          <a:lstStyle/>
+          <a:p>
+            <a:pPr algn="ctr"/>
+            <a:r>
+              <a:rPr sz="900" b="1">
+                <a:solidFill>
+                  <a:srgbClr val="154FC2"/>
+                </a:solidFill>
+              </a:rPr>
+              <a:t>A14r</a:t>
+            </a:r>
+          </a:p>
+          <a:p>
+            <a:pPr algn="ctr"/>
+            <a:r>
+              <a:rPr sz="750">
+                <a:solidFill>
+                  <a:srgbClr val="333333"/>
+                </a:solidFill>
+              </a:rPr>
+              <a:t>
+&lt;0.1 µs</a:t>
+            </a:r>
+          </a:p>
+        </p:txBody>
+      </p:sp>
+      <p:sp>
+        <p:nvSpPr>
+          <p:cNvPr id="55" name="Rectangle 54"/>
+          <p:cNvSpPr/>
+          <p:nvPr/>
+        </p:nvSpPr>
+        <p:spPr>
+          <a:xfrm>
+            <a:off x="10012679" y="2560320"/>
+            <a:ext cx="594359" cy="1005840"/>
+          </a:xfrm>
+          <a:prstGeom prst="rect">
+            <a:avLst/>
+          </a:prstGeom>
+          <a:solidFill>
+            <a:srgbClr val="FFF49C"/>
+          </a:solidFill>
+          <a:ln w="19050">
+            <a:solidFill>
+              <a:srgbClr val="F9A825"/>
+            </a:solidFill>
+          </a:ln>
+        </p:spPr>
+        <p:style>
+          <a:lnRef idx="1">
+            <a:schemeClr val="accent1"/>
+          </a:lnRef>
+          <a:fillRef idx="3">
+            <a:schemeClr val="accent1"/>
+          </a:fillRef>
+          <a:effectRef idx="2">
+            <a:schemeClr val="accent1"/>
+          </a:effectRef>
+          <a:fontRef idx="minor">
+            <a:schemeClr val="lt1"/>
+          </a:fontRef>
+        </p:style>
+        <p:txBody>
+          <a:bodyPr rtlCol="0" anchor="ctr" lIns="25400" rIns="25400" tIns="38100" bIns="38100" wrap="square"/>
+          <a:lstStyle/>
+          <a:p>
+            <a:pPr algn="ctr"/>
+            <a:r>
+              <a:rPr sz="900" b="1">
+                <a:solidFill>
+                  <a:srgbClr val="333333"/>
+                </a:solidFill>
+              </a:rPr>
+              <a:t>A15r</a:t>
+            </a:r>
+          </a:p>
+          <a:p>
+            <a:pPr algn="ctr"/>
+            <a:r>
+              <a:rPr sz="750">
+                <a:solidFill>
+                  <a:srgbClr val="333333"/>
+                </a:solidFill>
+              </a:rPr>
+              <a:t>
+0.4  ★C13 µs</a:t>
+            </a:r>
+          </a:p>
+        </p:txBody>
+      </p:sp>
+      <p:sp>
+        <p:nvSpPr>
+          <p:cNvPr id="56" name="Rectangle 55"/>
+          <p:cNvSpPr/>
+          <p:nvPr/>
+        </p:nvSpPr>
+        <p:spPr>
+          <a:xfrm>
+            <a:off x="10607039" y="2560320"/>
+            <a:ext cx="594359" cy="1005840"/>
+          </a:xfrm>
+          <a:prstGeom prst="rect">
+            <a:avLst/>
+          </a:prstGeom>
+          <a:solidFill>
+            <a:srgbClr val="FFFFFF"/>
+          </a:solidFill>
+          <a:ln w="9525">
+            <a:solidFill>
+              <a:srgbClr val="9E9E9E"/>
+            </a:solidFill>
+          </a:ln>
+        </p:spPr>
+        <p:style>
+          <a:lnRef idx="1">
+            <a:schemeClr val="accent1"/>
+          </a:lnRef>
+          <a:fillRef idx="3">
+            <a:schemeClr val="accent1"/>
+          </a:fillRef>
+          <a:effectRef idx="2">
+            <a:schemeClr val="accent1"/>
+          </a:effectRef>
+          <a:fontRef idx="minor">
+            <a:schemeClr val="lt1"/>
+          </a:fontRef>
+        </p:style>
+        <p:txBody>
+          <a:bodyPr rtlCol="0" anchor="ctr" lIns="25400" rIns="25400" tIns="38100" bIns="38100" wrap="square"/>
+          <a:lstStyle/>
+          <a:p>
+            <a:pPr algn="ctr"/>
+            <a:r>
+              <a:rPr sz="900" b="1">
+                <a:solidFill>
+                  <a:srgbClr val="154FC2"/>
+                </a:solidFill>
+              </a:rPr>
+              <a:t>A16r</a:t>
+            </a:r>
+          </a:p>
+          <a:p>
+            <a:pPr algn="ctr"/>
+            <a:r>
+              <a:rPr sz="750">
+                <a:solidFill>
+                  <a:srgbClr val="333333"/>
+                </a:solidFill>
+              </a:rPr>
+              <a:t>
+1.1 µs</a:t>
+            </a:r>
+          </a:p>
+        </p:txBody>
+      </p:sp>
+      <p:sp>
+        <p:nvSpPr>
+          <p:cNvPr id="57" name="Rectangle 56"/>
+          <p:cNvSpPr/>
+          <p:nvPr/>
+        </p:nvSpPr>
+        <p:spPr>
+          <a:xfrm>
+            <a:off x="11201399" y="2560320"/>
+            <a:ext cx="914400" cy="1005840"/>
+          </a:xfrm>
+          <a:prstGeom prst="rect">
+            <a:avLst/>
+          </a:prstGeom>
+          <a:solidFill>
+            <a:srgbClr val="C8DAFB"/>
+          </a:solidFill>
+          <a:ln w="15875">
+            <a:solidFill>
+              <a:srgbClr val="154FC2"/>
+            </a:solidFill>
+          </a:ln>
+        </p:spPr>
+        <p:style>
+          <a:lnRef idx="1">
+            <a:schemeClr val="accent1"/>
+          </a:lnRef>
+          <a:fillRef idx="3">
+            <a:schemeClr val="accent1"/>
+          </a:fillRef>
+          <a:effectRef idx="2">
+            <a:schemeClr val="accent1"/>
+          </a:effectRef>
+          <a:fontRef idx="minor">
+            <a:schemeClr val="lt1"/>
+          </a:fontRef>
+        </p:style>
+        <p:txBody>
+          <a:bodyPr rtlCol="0" anchor="ctr" lIns="38100" rIns="38100" tIns="25400" bIns="25400" wrap="square"/>
+          <a:lstStyle/>
+          <a:p>
+            <a:pPr algn="ctr"/>
+            <a:r>
+              <a:rPr sz="1000" b="1">
+                <a:solidFill>
+                  <a:srgbClr val="154FC2"/>
+                </a:solidFill>
+              </a:rPr>
+              <a:t>~7 µs (L2 hit)</a:t>
+            </a:r>
+          </a:p>
+        </p:txBody>
+      </p:sp>
+      <p:sp>
+        <p:nvSpPr>
+          <p:cNvPr id="58" name="Rectangle 57"/>
+          <p:cNvSpPr/>
+          <p:nvPr/>
+        </p:nvSpPr>
+        <p:spPr>
+          <a:xfrm>
+            <a:off x="274320" y="3566160"/>
+            <a:ext cx="1417320" cy="1005840"/>
+          </a:xfrm>
+          <a:prstGeom prst="rect">
+            <a:avLst/>
+          </a:prstGeom>
+          <a:solidFill>
+            <a:srgbClr val="FFE0B2"/>
+          </a:solidFill>
+          <a:ln w="15875">
+            <a:solidFill>
+              <a:srgbClr val="E65100"/>
+            </a:solidFill>
+          </a:ln>
+        </p:spPr>
+        <p:style>
+          <a:lnRef idx="1">
+            <a:schemeClr val="accent1"/>
+          </a:lnRef>
+          <a:fillRef idx="3">
+            <a:schemeClr val="accent1"/>
+          </a:fillRef>
+          <a:effectRef idx="2">
+            <a:schemeClr val="accent1"/>
+          </a:effectRef>
+          <a:fontRef idx="minor">
+            <a:schemeClr val="lt1"/>
+          </a:fontRef>
+        </p:style>
+        <p:txBody>
+          <a:bodyPr rtlCol="0" anchor="ctr" lIns="38100" rIns="38100" tIns="25400" bIns="25400" wrap="square"/>
+          <a:lstStyle/>
+          <a:p>
+            <a:pPr algn="ctr"/>
+            <a:r>
+              <a:rPr sz="1000" b="1">
+                <a:solidFill>
+                  <a:srgbClr val="E65100"/>
+                </a:solidFill>
+              </a:rPr>
+              <a:t>Protocol C — write</a:t>
+            </a:r>
+          </a:p>
+        </p:txBody>
+      </p:sp>
+      <p:sp>
+        <p:nvSpPr>
+          <p:cNvPr id="59" name="Rectangle 58"/>
+          <p:cNvSpPr/>
+          <p:nvPr/>
+        </p:nvSpPr>
+        <p:spPr>
+          <a:xfrm>
+            <a:off x="1691640" y="3566160"/>
+            <a:ext cx="594359" cy="1005840"/>
+          </a:xfrm>
+          <a:prstGeom prst="rect">
+            <a:avLst/>
+          </a:prstGeom>
+          <a:solidFill>
+            <a:srgbClr val="FFFFFF"/>
+          </a:solidFill>
+          <a:ln w="9525">
+            <a:solidFill>
+              <a:srgbClr val="9E9E9E"/>
+            </a:solidFill>
+          </a:ln>
+        </p:spPr>
+        <p:style>
+          <a:lnRef idx="1">
+            <a:schemeClr val="accent1"/>
+          </a:lnRef>
+          <a:fillRef idx="3">
+            <a:schemeClr val="accent1"/>
+          </a:fillRef>
+          <a:effectRef idx="2">
+            <a:schemeClr val="accent1"/>
+          </a:effectRef>
+          <a:fontRef idx="minor">
+            <a:schemeClr val="lt1"/>
+          </a:fontRef>
+        </p:style>
+        <p:txBody>
+          <a:bodyPr rtlCol="0" anchor="ctr" lIns="25400" rIns="25400" tIns="38100" bIns="38100" wrap="square"/>
+          <a:lstStyle/>
+          <a:p>
+            <a:pPr algn="ctr"/>
+            <a:r>
+              <a:rPr sz="900" b="1">
+                <a:solidFill>
+                  <a:srgbClr val="E65100"/>
+                </a:solidFill>
+              </a:rPr>
+              <a:t>C0</a:t>
+            </a:r>
+          </a:p>
+          <a:p>
+            <a:pPr algn="ctr"/>
+            <a:r>
+              <a:rPr sz="750">
+                <a:solidFill>
+                  <a:srgbClr val="333333"/>
+                </a:solidFill>
+              </a:rPr>
+              <a:t>
+2.4 µs</a:t>
+            </a:r>
+          </a:p>
+        </p:txBody>
+      </p:sp>
+      <p:sp>
+        <p:nvSpPr>
+          <p:cNvPr id="60" name="Rectangle 59"/>
+          <p:cNvSpPr/>
+          <p:nvPr/>
+        </p:nvSpPr>
+        <p:spPr>
+          <a:xfrm>
+            <a:off x="2286000" y="3566160"/>
+            <a:ext cx="594359" cy="1005840"/>
+          </a:xfrm>
+          <a:prstGeom prst="rect">
+            <a:avLst/>
+          </a:prstGeom>
+          <a:solidFill>
+            <a:srgbClr val="FFCDD2"/>
+          </a:solidFill>
+          <a:ln w="19050">
+            <a:solidFill>
+              <a:srgbClr val="C62828"/>
+            </a:solidFill>
+          </a:ln>
+        </p:spPr>
+        <p:style>
+          <a:lnRef idx="1">
+            <a:schemeClr val="accent1"/>
+          </a:lnRef>
+          <a:fillRef idx="3">
+            <a:schemeClr val="accent1"/>
+          </a:fillRef>
+          <a:effectRef idx="2">
+            <a:schemeClr val="accent1"/>
+          </a:effectRef>
+          <a:fontRef idx="minor">
+            <a:schemeClr val="lt1"/>
+          </a:fontRef>
+        </p:style>
+        <p:txBody>
+          <a:bodyPr rtlCol="0" anchor="ctr" lIns="25400" rIns="25400" tIns="38100" bIns="38100" wrap="square"/>
+          <a:lstStyle/>
+          <a:p>
+            <a:pPr algn="ctr"/>
+            <a:r>
+              <a:rPr sz="900" b="1">
+                <a:solidFill>
+                  <a:srgbClr val="333333"/>
+                </a:solidFill>
+              </a:rPr>
+              <a:t>C1</a:t>
+            </a:r>
+          </a:p>
+          <a:p>
+            <a:pPr algn="ctr"/>
+            <a:r>
+              <a:rPr sz="750" b="1">
+                <a:solidFill>
+                  <a:srgbClr val="333333"/>
+                </a:solidFill>
+              </a:rPr>
+              <a:t>
+25.0 µs</a:t>
+            </a:r>
+          </a:p>
+        </p:txBody>
+      </p:sp>
+      <p:sp>
+        <p:nvSpPr>
+          <p:cNvPr id="61" name="Rectangle 60"/>
+          <p:cNvSpPr/>
+          <p:nvPr/>
+        </p:nvSpPr>
+        <p:spPr>
+          <a:xfrm>
+            <a:off x="2880360" y="3566160"/>
+            <a:ext cx="594359" cy="1005840"/>
+          </a:xfrm>
+          <a:prstGeom prst="rect">
+            <a:avLst/>
+          </a:prstGeom>
+          <a:solidFill>
+            <a:srgbClr val="FFFFFF"/>
+          </a:solidFill>
+          <a:ln w="9525">
+            <a:solidFill>
+              <a:srgbClr val="9E9E9E"/>
+            </a:solidFill>
+          </a:ln>
+        </p:spPr>
+        <p:style>
+          <a:lnRef idx="1">
+            <a:schemeClr val="accent1"/>
+          </a:lnRef>
+          <a:fillRef idx="3">
+            <a:schemeClr val="accent1"/>
+          </a:fillRef>
+          <a:effectRef idx="2">
+            <a:schemeClr val="accent1"/>
+          </a:effectRef>
+          <a:fontRef idx="minor">
+            <a:schemeClr val="lt1"/>
+          </a:fontRef>
+        </p:style>
+        <p:txBody>
+          <a:bodyPr rtlCol="0" anchor="ctr" lIns="25400" rIns="25400" tIns="38100" bIns="38100" wrap="square"/>
+          <a:lstStyle/>
+          <a:p>
+            <a:pPr algn="ctr"/>
+            <a:r>
+              <a:rPr sz="900" b="1">
+                <a:solidFill>
+                  <a:srgbClr val="E65100"/>
+                </a:solidFill>
+              </a:rPr>
+              <a:t>C2</a:t>
+            </a:r>
+          </a:p>
+          <a:p>
+            <a:pPr algn="ctr"/>
+            <a:r>
+              <a:rPr sz="750">
+                <a:solidFill>
+                  <a:srgbClr val="333333"/>
+                </a:solidFill>
+              </a:rPr>
+              <a:t>
+0.15 µs</a:t>
+            </a:r>
+          </a:p>
+        </p:txBody>
+      </p:sp>
+      <p:sp>
+        <p:nvSpPr>
+          <p:cNvPr id="62" name="Rectangle 61"/>
+          <p:cNvSpPr/>
+          <p:nvPr/>
+        </p:nvSpPr>
+        <p:spPr>
+          <a:xfrm>
+            <a:off x="3474720" y="3566160"/>
+            <a:ext cx="594359" cy="1005840"/>
+          </a:xfrm>
+          <a:prstGeom prst="rect">
+            <a:avLst/>
+          </a:prstGeom>
+          <a:solidFill>
+            <a:srgbClr val="FFFFFF"/>
+          </a:solidFill>
+          <a:ln w="9525">
+            <a:solidFill>
+              <a:srgbClr val="9E9E9E"/>
+            </a:solidFill>
+          </a:ln>
+        </p:spPr>
+        <p:style>
+          <a:lnRef idx="1">
+            <a:schemeClr val="accent1"/>
+          </a:lnRef>
+          <a:fillRef idx="3">
+            <a:schemeClr val="accent1"/>
+          </a:fillRef>
+          <a:effectRef idx="2">
+            <a:schemeClr val="accent1"/>
+          </a:effectRef>
+          <a:fontRef idx="minor">
+            <a:schemeClr val="lt1"/>
+          </a:fontRef>
+        </p:style>
+        <p:txBody>
+          <a:bodyPr rtlCol="0" anchor="ctr" lIns="25400" rIns="25400" tIns="38100" bIns="38100" wrap="square"/>
+          <a:lstStyle/>
+          <a:p>
+            <a:pPr algn="ctr"/>
+            <a:r>
+              <a:rPr sz="900" b="1">
+                <a:solidFill>
+                  <a:srgbClr val="E65100"/>
+                </a:solidFill>
+              </a:rPr>
+              <a:t>C3</a:t>
+            </a:r>
+          </a:p>
+          <a:p>
+            <a:pPr algn="ctr"/>
+            <a:r>
+              <a:rPr sz="750">
+                <a:solidFill>
+                  <a:srgbClr val="333333"/>
+                </a:solidFill>
+              </a:rPr>
+              <a:t>
+1.25 µs</a:t>
+            </a:r>
+          </a:p>
+        </p:txBody>
+      </p:sp>
+      <p:sp>
+        <p:nvSpPr>
+          <p:cNvPr id="63" name="Rectangle 62"/>
+          <p:cNvSpPr/>
+          <p:nvPr/>
+        </p:nvSpPr>
+        <p:spPr>
+          <a:xfrm>
+            <a:off x="4069079" y="3566160"/>
+            <a:ext cx="594359" cy="1005840"/>
+          </a:xfrm>
+          <a:prstGeom prst="rect">
+            <a:avLst/>
+          </a:prstGeom>
+          <a:solidFill>
+            <a:srgbClr val="FFFFFF"/>
+          </a:solidFill>
+          <a:ln w="9525">
+            <a:solidFill>
+              <a:srgbClr val="9E9E9E"/>
+            </a:solidFill>
+          </a:ln>
+        </p:spPr>
+        <p:style>
+          <a:lnRef idx="1">
+            <a:schemeClr val="accent1"/>
+          </a:lnRef>
+          <a:fillRef idx="3">
+            <a:schemeClr val="accent1"/>
+          </a:fillRef>
+          <a:effectRef idx="2">
+            <a:schemeClr val="accent1"/>
+          </a:effectRef>
+          <a:fontRef idx="minor">
+            <a:schemeClr val="lt1"/>
+          </a:fontRef>
+        </p:style>
+        <p:txBody>
+          <a:bodyPr rtlCol="0" anchor="ctr" lIns="25400" rIns="25400" tIns="38100" bIns="38100" wrap="square"/>
+          <a:lstStyle/>
+          <a:p>
+            <a:pPr algn="ctr"/>
+            <a:r>
+              <a:rPr sz="900" b="1">
+                <a:solidFill>
+                  <a:srgbClr val="E65100"/>
+                </a:solidFill>
+              </a:rPr>
+              <a:t>C4</a:t>
+            </a:r>
+          </a:p>
+          <a:p>
+            <a:pPr algn="ctr"/>
+            <a:r>
+              <a:rPr sz="750">
+                <a:solidFill>
+                  <a:srgbClr val="333333"/>
+                </a:solidFill>
+              </a:rPr>
+              <a:t>
+0.02 µs</a:t>
+            </a:r>
+          </a:p>
+        </p:txBody>
+      </p:sp>
+      <p:sp>
+        <p:nvSpPr>
+          <p:cNvPr id="64" name="Rectangle 63"/>
+          <p:cNvSpPr/>
+          <p:nvPr/>
+        </p:nvSpPr>
+        <p:spPr>
+          <a:xfrm>
+            <a:off x="4663440" y="3566160"/>
+            <a:ext cx="594359" cy="1005840"/>
+          </a:xfrm>
+          <a:prstGeom prst="rect">
+            <a:avLst/>
+          </a:prstGeom>
+          <a:solidFill>
+            <a:srgbClr val="FFF49C"/>
+          </a:solidFill>
+          <a:ln w="19050">
+            <a:solidFill>
+              <a:srgbClr val="F9A825"/>
+            </a:solidFill>
+          </a:ln>
+        </p:spPr>
+        <p:style>
+          <a:lnRef idx="1">
+            <a:schemeClr val="accent1"/>
+          </a:lnRef>
+          <a:fillRef idx="3">
+            <a:schemeClr val="accent1"/>
+          </a:fillRef>
+          <a:effectRef idx="2">
+            <a:schemeClr val="accent1"/>
+          </a:effectRef>
+          <a:fontRef idx="minor">
+            <a:schemeClr val="lt1"/>
+          </a:fontRef>
+        </p:style>
+        <p:txBody>
+          <a:bodyPr rtlCol="0" anchor="ctr" lIns="25400" rIns="25400" tIns="38100" bIns="38100" wrap="square"/>
+          <a:lstStyle/>
+          <a:p>
+            <a:pPr algn="ctr"/>
+            <a:r>
+              <a:rPr sz="900" b="1">
+                <a:solidFill>
+                  <a:srgbClr val="333333"/>
+                </a:solidFill>
+              </a:rPr>
+              <a:t>C5</a:t>
+            </a:r>
+          </a:p>
+          <a:p>
+            <a:pPr algn="ctr"/>
+            <a:r>
+              <a:rPr sz="750">
+                <a:solidFill>
+                  <a:srgbClr val="333333"/>
+                </a:solidFill>
+              </a:rPr>
+              <a:t>
+4.07  ★epoch µs</a:t>
+            </a:r>
+          </a:p>
+        </p:txBody>
+      </p:sp>
+      <p:sp>
+        <p:nvSpPr>
+          <p:cNvPr id="65" name="Rectangle 64"/>
+          <p:cNvSpPr/>
+          <p:nvPr/>
+        </p:nvSpPr>
+        <p:spPr>
+          <a:xfrm>
+            <a:off x="5257800" y="3566160"/>
+            <a:ext cx="594359" cy="1005840"/>
+          </a:xfrm>
+          <a:prstGeom prst="rect">
+            <a:avLst/>
+          </a:prstGeom>
+          <a:solidFill>
+            <a:srgbClr val="FFFFFF"/>
+          </a:solidFill>
+          <a:ln w="9525">
+            <a:solidFill>
+              <a:srgbClr val="9E9E9E"/>
+            </a:solidFill>
+          </a:ln>
+        </p:spPr>
+        <p:style>
+          <a:lnRef idx="1">
+            <a:schemeClr val="accent1"/>
+          </a:lnRef>
+          <a:fillRef idx="3">
+            <a:schemeClr val="accent1"/>
+          </a:fillRef>
+          <a:effectRef idx="2">
+            <a:schemeClr val="accent1"/>
+          </a:effectRef>
+          <a:fontRef idx="minor">
+            <a:schemeClr val="lt1"/>
+          </a:fontRef>
+        </p:style>
+        <p:txBody>
+          <a:bodyPr rtlCol="0" anchor="ctr" lIns="25400" rIns="25400" tIns="38100" bIns="38100" wrap="square"/>
+          <a:lstStyle/>
+          <a:p>
+            <a:pPr algn="ctr"/>
+            <a:r>
+              <a:rPr sz="900" b="1">
+                <a:solidFill>
+                  <a:srgbClr val="E65100"/>
+                </a:solidFill>
+              </a:rPr>
+              <a:t>C6</a:t>
+            </a:r>
+          </a:p>
+          <a:p>
+            <a:pPr algn="ctr"/>
+            <a:r>
+              <a:rPr sz="750">
+                <a:solidFill>
+                  <a:srgbClr val="333333"/>
+                </a:solidFill>
+              </a:rPr>
+              <a:t>
+0.03 µs</a:t>
+            </a:r>
+          </a:p>
+        </p:txBody>
+      </p:sp>
+      <p:sp>
+        <p:nvSpPr>
+          <p:cNvPr id="66" name="Rectangle 65"/>
+          <p:cNvSpPr/>
+          <p:nvPr/>
+        </p:nvSpPr>
+        <p:spPr>
+          <a:xfrm>
+            <a:off x="5852159" y="3566160"/>
+            <a:ext cx="594359" cy="1005840"/>
+          </a:xfrm>
+          <a:prstGeom prst="rect">
+            <a:avLst/>
+          </a:prstGeom>
+          <a:solidFill>
+            <a:srgbClr val="FFFFFF"/>
+          </a:solidFill>
+          <a:ln w="15875">
+            <a:solidFill>
+              <a:srgbClr val="9E9E9E"/>
+            </a:solidFill>
+          </a:ln>
+        </p:spPr>
+        <p:style>
+          <a:lnRef idx="1">
+            <a:schemeClr val="accent1"/>
+          </a:lnRef>
+          <a:fillRef idx="3">
+            <a:schemeClr val="accent1"/>
+          </a:fillRef>
+          <a:effectRef idx="2">
+            <a:schemeClr val="accent1"/>
+          </a:effectRef>
+          <a:fontRef idx="minor">
+            <a:schemeClr val="lt1"/>
+          </a:fontRef>
+        </p:style>
+        <p:txBody>
+          <a:bodyPr rtlCol="0" anchor="ctr" lIns="38100" rIns="38100" tIns="25400" bIns="25400" wrap="square"/>
+          <a:lstStyle/>
+          <a:p>
+            <a:pPr algn="ctr"/>
+            <a:r>
+              <a:rPr sz="800" b="0">
+                <a:solidFill>
+                  <a:srgbClr val="333333"/>
+                </a:solidFill>
+              </a:rPr>
+              <a:t/>
+            </a:r>
+          </a:p>
+        </p:txBody>
+      </p:sp>
+      <p:sp>
+        <p:nvSpPr>
+          <p:cNvPr id="67" name="Rectangle 66"/>
+          <p:cNvSpPr/>
+          <p:nvPr/>
+        </p:nvSpPr>
+        <p:spPr>
+          <a:xfrm>
+            <a:off x="6446519" y="3566160"/>
+            <a:ext cx="594359" cy="1005840"/>
+          </a:xfrm>
+          <a:prstGeom prst="rect">
+            <a:avLst/>
+          </a:prstGeom>
+          <a:solidFill>
+            <a:srgbClr val="FFFFFF"/>
+          </a:solidFill>
+          <a:ln w="15875">
+            <a:solidFill>
+              <a:srgbClr val="9E9E9E"/>
+            </a:solidFill>
+          </a:ln>
+        </p:spPr>
+        <p:style>
+          <a:lnRef idx="1">
+            <a:schemeClr val="accent1"/>
+          </a:lnRef>
+          <a:fillRef idx="3">
+            <a:schemeClr val="accent1"/>
+          </a:fillRef>
+          <a:effectRef idx="2">
+            <a:schemeClr val="accent1"/>
+          </a:effectRef>
+          <a:fontRef idx="minor">
+            <a:schemeClr val="lt1"/>
+          </a:fontRef>
+        </p:style>
+        <p:txBody>
+          <a:bodyPr rtlCol="0" anchor="ctr" lIns="38100" rIns="38100" tIns="25400" bIns="25400" wrap="square"/>
+          <a:lstStyle/>
+          <a:p>
+            <a:pPr algn="ctr"/>
+            <a:r>
+              <a:rPr sz="800" b="0">
+                <a:solidFill>
+                  <a:srgbClr val="333333"/>
+                </a:solidFill>
+              </a:rPr>
+              <a:t/>
+            </a:r>
+          </a:p>
+        </p:txBody>
+      </p:sp>
+      <p:sp>
+        <p:nvSpPr>
+          <p:cNvPr id="68" name="Rectangle 67"/>
+          <p:cNvSpPr/>
+          <p:nvPr/>
+        </p:nvSpPr>
+        <p:spPr>
+          <a:xfrm>
+            <a:off x="7040879" y="3566160"/>
+            <a:ext cx="594359" cy="1005840"/>
+          </a:xfrm>
+          <a:prstGeom prst="rect">
+            <a:avLst/>
+          </a:prstGeom>
+          <a:solidFill>
+            <a:srgbClr val="FFFFFF"/>
+          </a:solidFill>
+          <a:ln w="15875">
+            <a:solidFill>
+              <a:srgbClr val="9E9E9E"/>
+            </a:solidFill>
+          </a:ln>
+        </p:spPr>
+        <p:style>
+          <a:lnRef idx="1">
+            <a:schemeClr val="accent1"/>
+          </a:lnRef>
+          <a:fillRef idx="3">
+            <a:schemeClr val="accent1"/>
+          </a:fillRef>
+          <a:effectRef idx="2">
+            <a:schemeClr val="accent1"/>
+          </a:effectRef>
+          <a:fontRef idx="minor">
+            <a:schemeClr val="lt1"/>
+          </a:fontRef>
+        </p:style>
+        <p:txBody>
+          <a:bodyPr rtlCol="0" anchor="ctr" lIns="38100" rIns="38100" tIns="25400" bIns="25400" wrap="square"/>
+          <a:lstStyle/>
+          <a:p>
+            <a:pPr algn="ctr"/>
+            <a:r>
+              <a:rPr sz="800" b="0">
+                <a:solidFill>
+                  <a:srgbClr val="333333"/>
+                </a:solidFill>
+              </a:rPr>
+              <a:t/>
+            </a:r>
+          </a:p>
+        </p:txBody>
+      </p:sp>
+      <p:sp>
+        <p:nvSpPr>
+          <p:cNvPr id="69" name="Rectangle 68"/>
+          <p:cNvSpPr/>
+          <p:nvPr/>
+        </p:nvSpPr>
+        <p:spPr>
+          <a:xfrm>
+            <a:off x="7635240" y="3566160"/>
+            <a:ext cx="594359" cy="1005840"/>
+          </a:xfrm>
+          <a:prstGeom prst="rect">
+            <a:avLst/>
+          </a:prstGeom>
+          <a:solidFill>
+            <a:srgbClr val="FFFFFF"/>
+          </a:solidFill>
+          <a:ln w="15875">
+            <a:solidFill>
+              <a:srgbClr val="9E9E9E"/>
+            </a:solidFill>
+          </a:ln>
+        </p:spPr>
+        <p:style>
+          <a:lnRef idx="1">
+            <a:schemeClr val="accent1"/>
+          </a:lnRef>
+          <a:fillRef idx="3">
+            <a:schemeClr val="accent1"/>
+          </a:fillRef>
+          <a:effectRef idx="2">
+            <a:schemeClr val="accent1"/>
+          </a:effectRef>
+          <a:fontRef idx="minor">
+            <a:schemeClr val="lt1"/>
+          </a:fontRef>
+        </p:style>
+        <p:txBody>
+          <a:bodyPr rtlCol="0" anchor="ctr" lIns="38100" rIns="38100" tIns="25400" bIns="25400" wrap="square"/>
+          <a:lstStyle/>
+          <a:p>
+            <a:pPr algn="ctr"/>
+            <a:r>
+              <a:rPr sz="800" b="0">
+                <a:solidFill>
+                  <a:srgbClr val="333333"/>
+                </a:solidFill>
+              </a:rPr>
+              <a:t/>
+            </a:r>
+          </a:p>
+        </p:txBody>
+      </p:sp>
+      <p:sp>
+        <p:nvSpPr>
+          <p:cNvPr id="70" name="Rectangle 69"/>
+          <p:cNvSpPr/>
+          <p:nvPr/>
+        </p:nvSpPr>
+        <p:spPr>
+          <a:xfrm>
+            <a:off x="8229599" y="3566160"/>
+            <a:ext cx="594359" cy="1005840"/>
+          </a:xfrm>
+          <a:prstGeom prst="rect">
+            <a:avLst/>
+          </a:prstGeom>
+          <a:solidFill>
+            <a:srgbClr val="FFFFFF"/>
+          </a:solidFill>
+          <a:ln w="15875">
+            <a:solidFill>
+              <a:srgbClr val="9E9E9E"/>
+            </a:solidFill>
+          </a:ln>
+        </p:spPr>
+        <p:style>
+          <a:lnRef idx="1">
+            <a:schemeClr val="accent1"/>
+          </a:lnRef>
+          <a:fillRef idx="3">
+            <a:schemeClr val="accent1"/>
+          </a:fillRef>
+          <a:effectRef idx="2">
+            <a:schemeClr val="accent1"/>
+          </a:effectRef>
+          <a:fontRef idx="minor">
+            <a:schemeClr val="lt1"/>
+          </a:fontRef>
+        </p:style>
+        <p:txBody>
+          <a:bodyPr rtlCol="0" anchor="ctr" lIns="38100" rIns="38100" tIns="25400" bIns="25400" wrap="square"/>
+          <a:lstStyle/>
+          <a:p>
+            <a:pPr algn="ctr"/>
+            <a:r>
+              <a:rPr sz="800" b="0">
+                <a:solidFill>
+                  <a:srgbClr val="333333"/>
+                </a:solidFill>
+              </a:rPr>
+              <a:t/>
+            </a:r>
+          </a:p>
+        </p:txBody>
+      </p:sp>
+      <p:sp>
+        <p:nvSpPr>
+          <p:cNvPr id="71" name="Rectangle 70"/>
+          <p:cNvSpPr/>
+          <p:nvPr/>
+        </p:nvSpPr>
+        <p:spPr>
+          <a:xfrm>
+            <a:off x="8823959" y="3566160"/>
+            <a:ext cx="594359" cy="1005840"/>
+          </a:xfrm>
+          <a:prstGeom prst="rect">
+            <a:avLst/>
+          </a:prstGeom>
+          <a:solidFill>
+            <a:srgbClr val="FFFFFF"/>
+          </a:solidFill>
+          <a:ln w="15875">
+            <a:solidFill>
+              <a:srgbClr val="9E9E9E"/>
+            </a:solidFill>
+          </a:ln>
+        </p:spPr>
+        <p:style>
+          <a:lnRef idx="1">
+            <a:schemeClr val="accent1"/>
+          </a:lnRef>
+          <a:fillRef idx="3">
+            <a:schemeClr val="accent1"/>
+          </a:fillRef>
+          <a:effectRef idx="2">
+            <a:schemeClr val="accent1"/>
+          </a:effectRef>
+          <a:fontRef idx="minor">
+            <a:schemeClr val="lt1"/>
+          </a:fontRef>
+        </p:style>
+        <p:txBody>
+          <a:bodyPr rtlCol="0" anchor="ctr" lIns="38100" rIns="38100" tIns="25400" bIns="25400" wrap="square"/>
+          <a:lstStyle/>
+          <a:p>
+            <a:pPr algn="ctr"/>
+            <a:r>
+              <a:rPr sz="800" b="0">
+                <a:solidFill>
+                  <a:srgbClr val="333333"/>
+                </a:solidFill>
+              </a:rPr>
+              <a:t/>
+            </a:r>
+          </a:p>
+        </p:txBody>
+      </p:sp>
+      <p:sp>
+        <p:nvSpPr>
+          <p:cNvPr id="72" name="Rectangle 71"/>
+          <p:cNvSpPr/>
+          <p:nvPr/>
+        </p:nvSpPr>
+        <p:spPr>
+          <a:xfrm>
+            <a:off x="9418319" y="3566160"/>
+            <a:ext cx="594359" cy="1005840"/>
+          </a:xfrm>
+          <a:prstGeom prst="rect">
+            <a:avLst/>
+          </a:prstGeom>
+          <a:solidFill>
+            <a:srgbClr val="FFFFFF"/>
+          </a:solidFill>
+          <a:ln w="15875">
+            <a:solidFill>
+              <a:srgbClr val="9E9E9E"/>
+            </a:solidFill>
+          </a:ln>
+        </p:spPr>
+        <p:style>
+          <a:lnRef idx="1">
+            <a:schemeClr val="accent1"/>
+          </a:lnRef>
+          <a:fillRef idx="3">
+            <a:schemeClr val="accent1"/>
+          </a:fillRef>
+          <a:effectRef idx="2">
+            <a:schemeClr val="accent1"/>
+          </a:effectRef>
+          <a:fontRef idx="minor">
+            <a:schemeClr val="lt1"/>
+          </a:fontRef>
+        </p:style>
+        <p:txBody>
+          <a:bodyPr rtlCol="0" anchor="ctr" lIns="38100" rIns="38100" tIns="25400" bIns="25400" wrap="square"/>
+          <a:lstStyle/>
+          <a:p>
+            <a:pPr algn="ctr"/>
+            <a:r>
+              <a:rPr sz="800" b="0">
+                <a:solidFill>
+                  <a:srgbClr val="333333"/>
+                </a:solidFill>
+              </a:rPr>
+              <a:t/>
+            </a:r>
+          </a:p>
+        </p:txBody>
+      </p:sp>
+      <p:sp>
+        <p:nvSpPr>
+          <p:cNvPr id="73" name="Rectangle 72"/>
+          <p:cNvSpPr/>
+          <p:nvPr/>
+        </p:nvSpPr>
+        <p:spPr>
+          <a:xfrm>
+            <a:off x="10012679" y="3566160"/>
+            <a:ext cx="594359" cy="1005840"/>
+          </a:xfrm>
+          <a:prstGeom prst="rect">
+            <a:avLst/>
+          </a:prstGeom>
+          <a:solidFill>
+            <a:srgbClr val="FFFFFF"/>
+          </a:solidFill>
+          <a:ln w="15875">
+            <a:solidFill>
+              <a:srgbClr val="9E9E9E"/>
+            </a:solidFill>
+          </a:ln>
+        </p:spPr>
+        <p:style>
+          <a:lnRef idx="1">
+            <a:schemeClr val="accent1"/>
+          </a:lnRef>
+          <a:fillRef idx="3">
+            <a:schemeClr val="accent1"/>
+          </a:fillRef>
+          <a:effectRef idx="2">
+            <a:schemeClr val="accent1"/>
+          </a:effectRef>
+          <a:fontRef idx="minor">
+            <a:schemeClr val="lt1"/>
+          </a:fontRef>
+        </p:style>
+        <p:txBody>
+          <a:bodyPr rtlCol="0" anchor="ctr" lIns="38100" rIns="38100" tIns="25400" bIns="25400" wrap="square"/>
+          <a:lstStyle/>
+          <a:p>
+            <a:pPr algn="ctr"/>
+            <a:r>
+              <a:rPr sz="800" b="0">
+                <a:solidFill>
+                  <a:srgbClr val="333333"/>
+                </a:solidFill>
+              </a:rPr>
+              <a:t/>
+            </a:r>
+          </a:p>
+        </p:txBody>
+      </p:sp>
+      <p:sp>
+        <p:nvSpPr>
+          <p:cNvPr id="74" name="Rectangle 73"/>
+          <p:cNvSpPr/>
+          <p:nvPr/>
+        </p:nvSpPr>
+        <p:spPr>
+          <a:xfrm>
+            <a:off x="10607039" y="3566160"/>
+            <a:ext cx="594359" cy="1005840"/>
+          </a:xfrm>
+          <a:prstGeom prst="rect">
+            <a:avLst/>
+          </a:prstGeom>
+          <a:solidFill>
+            <a:srgbClr val="FFFFFF"/>
+          </a:solidFill>
+          <a:ln w="15875">
+            <a:solidFill>
+              <a:srgbClr val="9E9E9E"/>
+            </a:solidFill>
+          </a:ln>
+        </p:spPr>
+        <p:style>
+          <a:lnRef idx="1">
+            <a:schemeClr val="accent1"/>
+          </a:lnRef>
+          <a:fillRef idx="3">
+            <a:schemeClr val="accent1"/>
+          </a:fillRef>
+          <a:effectRef idx="2">
+            <a:schemeClr val="accent1"/>
+          </a:effectRef>
+          <a:fontRef idx="minor">
+            <a:schemeClr val="lt1"/>
+          </a:fontRef>
+        </p:style>
+        <p:txBody>
+          <a:bodyPr rtlCol="0" anchor="ctr" lIns="38100" rIns="38100" tIns="25400" bIns="25400" wrap="square"/>
+          <a:lstStyle/>
+          <a:p>
+            <a:pPr algn="ctr"/>
+            <a:r>
+              <a:rPr sz="800" b="0">
+                <a:solidFill>
+                  <a:srgbClr val="333333"/>
+                </a:solidFill>
+              </a:rPr>
+              <a:t/>
+            </a:r>
+          </a:p>
+        </p:txBody>
+      </p:sp>
+      <p:sp>
+        <p:nvSpPr>
+          <p:cNvPr id="75" name="Rectangle 74"/>
+          <p:cNvSpPr/>
+          <p:nvPr/>
+        </p:nvSpPr>
+        <p:spPr>
+          <a:xfrm>
+            <a:off x="11201399" y="3566160"/>
+            <a:ext cx="914400" cy="1005840"/>
+          </a:xfrm>
+          <a:prstGeom prst="rect">
+            <a:avLst/>
+          </a:prstGeom>
+          <a:solidFill>
+            <a:srgbClr val="FFE0B2"/>
+          </a:solidFill>
+          <a:ln w="15875">
+            <a:solidFill>
+              <a:srgbClr val="E65100"/>
+            </a:solidFill>
+          </a:ln>
+        </p:spPr>
+        <p:style>
+          <a:lnRef idx="1">
+            <a:schemeClr val="accent1"/>
+          </a:lnRef>
+          <a:fillRef idx="3">
+            <a:schemeClr val="accent1"/>
+          </a:fillRef>
+          <a:effectRef idx="2">
+            <a:schemeClr val="accent1"/>
+          </a:effectRef>
+          <a:fontRef idx="minor">
+            <a:schemeClr val="lt1"/>
+          </a:fontRef>
+        </p:style>
+        <p:txBody>
+          <a:bodyPr rtlCol="0" anchor="ctr" lIns="38100" rIns="38100" tIns="25400" bIns="25400" wrap="square"/>
+          <a:lstStyle/>
+          <a:p>
+            <a:pPr algn="ctr"/>
+            <a:r>
+              <a:rPr sz="1000" b="1">
+                <a:solidFill>
+                  <a:srgbClr val="E65100"/>
+                </a:solidFill>
+              </a:rPr>
+              <a:t>~33 µs</a:t>
+            </a:r>
+          </a:p>
+        </p:txBody>
+      </p:sp>
+      <p:sp>
+        <p:nvSpPr>
+          <p:cNvPr id="76" name="Rectangle 75"/>
+          <p:cNvSpPr/>
+          <p:nvPr/>
+        </p:nvSpPr>
+        <p:spPr>
+          <a:xfrm>
+            <a:off x="274320" y="4572000"/>
+            <a:ext cx="1417320" cy="1005840"/>
+          </a:xfrm>
+          <a:prstGeom prst="rect">
+            <a:avLst/>
+          </a:prstGeom>
+          <a:solidFill>
+            <a:srgbClr val="FFE0B2"/>
+          </a:solidFill>
+          <a:ln w="15875">
+            <a:solidFill>
+              <a:srgbClr val="E65100"/>
+            </a:solidFill>
+          </a:ln>
+        </p:spPr>
+        <p:style>
+          <a:lnRef idx="1">
+            <a:schemeClr val="accent1"/>
+          </a:lnRef>
+          <a:fillRef idx="3">
+            <a:schemeClr val="accent1"/>
+          </a:fillRef>
+          <a:effectRef idx="2">
+            <a:schemeClr val="accent1"/>
+          </a:effectRef>
+          <a:fontRef idx="minor">
+            <a:schemeClr val="lt1"/>
+          </a:fontRef>
+        </p:style>
+        <p:txBody>
+          <a:bodyPr rtlCol="0" anchor="ctr" lIns="38100" rIns="38100" tIns="25400" bIns="25400" wrap="square"/>
+          <a:lstStyle/>
+          <a:p>
+            <a:pPr algn="ctr"/>
+            <a:r>
+              <a:rPr sz="1000" b="1">
+                <a:solidFill>
+                  <a:srgbClr val="E65100"/>
+                </a:solidFill>
+              </a:rPr>
+              <a:t>Protocol C — read</a:t>
+            </a:r>
+          </a:p>
+        </p:txBody>
+      </p:sp>
+      <p:sp>
+        <p:nvSpPr>
+          <p:cNvPr id="77" name="Rectangle 76"/>
+          <p:cNvSpPr/>
+          <p:nvPr/>
+        </p:nvSpPr>
+        <p:spPr>
+          <a:xfrm>
+            <a:off x="1691640" y="4572000"/>
+            <a:ext cx="594359" cy="1005840"/>
+          </a:xfrm>
+          <a:prstGeom prst="rect">
+            <a:avLst/>
+          </a:prstGeom>
+          <a:solidFill>
+            <a:srgbClr val="FFFFFF"/>
+          </a:solidFill>
+          <a:ln w="9525">
+            <a:solidFill>
+              <a:srgbClr val="9E9E9E"/>
+            </a:solidFill>
+          </a:ln>
+        </p:spPr>
+        <p:style>
+          <a:lnRef idx="1">
+            <a:schemeClr val="accent1"/>
+          </a:lnRef>
+          <a:fillRef idx="3">
+            <a:schemeClr val="accent1"/>
+          </a:fillRef>
+          <a:effectRef idx="2">
+            <a:schemeClr val="accent1"/>
+          </a:effectRef>
+          <a:fontRef idx="minor">
+            <a:schemeClr val="lt1"/>
+          </a:fontRef>
+        </p:style>
+        <p:txBody>
+          <a:bodyPr rtlCol="0" anchor="ctr" lIns="25400" rIns="25400" tIns="38100" bIns="38100" wrap="square"/>
+          <a:lstStyle/>
+          <a:p>
+            <a:pPr algn="ctr"/>
+            <a:r>
+              <a:rPr sz="900" b="1">
+                <a:solidFill>
+                  <a:srgbClr val="E65100"/>
+                </a:solidFill>
+              </a:rPr>
+              <a:t>C1r</a:t>
+            </a:r>
+          </a:p>
+          <a:p>
+            <a:pPr algn="ctr"/>
+            <a:r>
+              <a:rPr sz="750">
+                <a:solidFill>
+                  <a:srgbClr val="333333"/>
+                </a:solidFill>
+              </a:rPr>
+              <a:t>
+0.015 µs</a:t>
+            </a:r>
+          </a:p>
+        </p:txBody>
+      </p:sp>
+      <p:sp>
+        <p:nvSpPr>
+          <p:cNvPr id="78" name="Rectangle 77"/>
+          <p:cNvSpPr/>
+          <p:nvPr/>
+        </p:nvSpPr>
+        <p:spPr>
+          <a:xfrm>
+            <a:off x="2286000" y="4572000"/>
+            <a:ext cx="594359" cy="1005840"/>
+          </a:xfrm>
+          <a:prstGeom prst="rect">
+            <a:avLst/>
+          </a:prstGeom>
+          <a:solidFill>
+            <a:srgbClr val="FFF49C"/>
+          </a:solidFill>
+          <a:ln w="19050">
+            <a:solidFill>
+              <a:srgbClr val="F9A825"/>
+            </a:solidFill>
+          </a:ln>
+        </p:spPr>
+        <p:style>
+          <a:lnRef idx="1">
+            <a:schemeClr val="accent1"/>
+          </a:lnRef>
+          <a:fillRef idx="3">
+            <a:schemeClr val="accent1"/>
+          </a:fillRef>
+          <a:effectRef idx="2">
+            <a:schemeClr val="accent1"/>
+          </a:effectRef>
+          <a:fontRef idx="minor">
+            <a:schemeClr val="lt1"/>
+          </a:fontRef>
+        </p:style>
+        <p:txBody>
+          <a:bodyPr rtlCol="0" anchor="ctr" lIns="25400" rIns="25400" tIns="38100" bIns="38100" wrap="square"/>
+          <a:lstStyle/>
+          <a:p>
+            <a:pPr algn="ctr"/>
+            <a:r>
+              <a:rPr sz="900" b="1">
+                <a:solidFill>
+                  <a:srgbClr val="333333"/>
+                </a:solidFill>
+              </a:rPr>
+              <a:t>C2r</a:t>
+            </a:r>
+          </a:p>
+          <a:p>
+            <a:pPr algn="ctr"/>
+            <a:r>
+              <a:rPr sz="750">
+                <a:solidFill>
+                  <a:srgbClr val="333333"/>
+                </a:solidFill>
+              </a:rPr>
+              <a:t>
+0.7  ★epoch µs</a:t>
+            </a:r>
+          </a:p>
+        </p:txBody>
+      </p:sp>
+      <p:sp>
+        <p:nvSpPr>
+          <p:cNvPr id="79" name="Rectangle 78"/>
+          <p:cNvSpPr/>
+          <p:nvPr/>
+        </p:nvSpPr>
+        <p:spPr>
+          <a:xfrm>
+            <a:off x="2880360" y="4572000"/>
+            <a:ext cx="594359" cy="1005840"/>
+          </a:xfrm>
+          <a:prstGeom prst="rect">
+            <a:avLst/>
+          </a:prstGeom>
+          <a:solidFill>
+            <a:srgbClr val="FFFFFF"/>
+          </a:solidFill>
+          <a:ln w="9525">
+            <a:solidFill>
+              <a:srgbClr val="9E9E9E"/>
+            </a:solidFill>
+          </a:ln>
+        </p:spPr>
+        <p:style>
+          <a:lnRef idx="1">
+            <a:schemeClr val="accent1"/>
+          </a:lnRef>
+          <a:fillRef idx="3">
+            <a:schemeClr val="accent1"/>
+          </a:fillRef>
+          <a:effectRef idx="2">
+            <a:schemeClr val="accent1"/>
+          </a:effectRef>
+          <a:fontRef idx="minor">
+            <a:schemeClr val="lt1"/>
+          </a:fontRef>
+        </p:style>
+        <p:txBody>
+          <a:bodyPr rtlCol="0" anchor="ctr" lIns="25400" rIns="25400" tIns="38100" bIns="38100" wrap="square"/>
+          <a:lstStyle/>
+          <a:p>
+            <a:pPr algn="ctr"/>
+            <a:r>
+              <a:rPr sz="900" b="1">
+                <a:solidFill>
+                  <a:srgbClr val="E65100"/>
+                </a:solidFill>
+              </a:rPr>
+              <a:t>C3r</a:t>
+            </a:r>
+          </a:p>
+          <a:p>
+            <a:pPr algn="ctr"/>
+            <a:r>
+              <a:rPr sz="750">
+                <a:solidFill>
+                  <a:srgbClr val="333333"/>
+                </a:solidFill>
+              </a:rPr>
+              <a:t>
+0.15 µs</a:t>
+            </a:r>
+          </a:p>
+        </p:txBody>
+      </p:sp>
+      <p:sp>
+        <p:nvSpPr>
+          <p:cNvPr id="80" name="Rectangle 79"/>
+          <p:cNvSpPr/>
+          <p:nvPr/>
+        </p:nvSpPr>
+        <p:spPr>
+          <a:xfrm>
+            <a:off x="3474720" y="4572000"/>
+            <a:ext cx="594359" cy="1005840"/>
+          </a:xfrm>
+          <a:prstGeom prst="rect">
+            <a:avLst/>
+          </a:prstGeom>
+          <a:solidFill>
+            <a:srgbClr val="FFF49C"/>
+          </a:solidFill>
+          <a:ln w="19050">
+            <a:solidFill>
+              <a:srgbClr val="F9A825"/>
+            </a:solidFill>
+          </a:ln>
+        </p:spPr>
+        <p:style>
+          <a:lnRef idx="1">
+            <a:schemeClr val="accent1"/>
+          </a:lnRef>
+          <a:fillRef idx="3">
+            <a:schemeClr val="accent1"/>
+          </a:fillRef>
+          <a:effectRef idx="2">
+            <a:schemeClr val="accent1"/>
+          </a:effectRef>
+          <a:fontRef idx="minor">
+            <a:schemeClr val="lt1"/>
+          </a:fontRef>
+        </p:style>
+        <p:txBody>
+          <a:bodyPr rtlCol="0" anchor="ctr" lIns="25400" rIns="25400" tIns="38100" bIns="38100" wrap="square"/>
+          <a:lstStyle/>
+          <a:p>
+            <a:pPr algn="ctr"/>
+            <a:r>
+              <a:rPr sz="900" b="1">
+                <a:solidFill>
+                  <a:srgbClr val="333333"/>
+                </a:solidFill>
+              </a:rPr>
+              <a:t>C4r</a:t>
+            </a:r>
+          </a:p>
+          <a:p>
+            <a:pPr algn="ctr"/>
+            <a:r>
+              <a:rPr sz="750">
+                <a:solidFill>
+                  <a:srgbClr val="333333"/>
+                </a:solidFill>
+              </a:rPr>
+              <a:t>
+0.05  ★LRC µs</a:t>
+            </a:r>
+          </a:p>
+        </p:txBody>
+      </p:sp>
+      <p:sp>
+        <p:nvSpPr>
+          <p:cNvPr id="81" name="Rectangle 80"/>
+          <p:cNvSpPr/>
+          <p:nvPr/>
+        </p:nvSpPr>
+        <p:spPr>
+          <a:xfrm>
+            <a:off x="4069079" y="4572000"/>
+            <a:ext cx="594359" cy="1005840"/>
+          </a:xfrm>
+          <a:prstGeom prst="rect">
+            <a:avLst/>
+          </a:prstGeom>
+          <a:solidFill>
+            <a:srgbClr val="FFFFFF"/>
+          </a:solidFill>
+          <a:ln w="9525">
+            <a:solidFill>
+              <a:srgbClr val="9E9E9E"/>
+            </a:solidFill>
+          </a:ln>
+        </p:spPr>
+        <p:style>
+          <a:lnRef idx="1">
+            <a:schemeClr val="accent1"/>
+          </a:lnRef>
+          <a:fillRef idx="3">
+            <a:schemeClr val="accent1"/>
+          </a:fillRef>
+          <a:effectRef idx="2">
+            <a:schemeClr val="accent1"/>
+          </a:effectRef>
+          <a:fontRef idx="minor">
+            <a:schemeClr val="lt1"/>
+          </a:fontRef>
+        </p:style>
+        <p:txBody>
+          <a:bodyPr rtlCol="0" anchor="ctr" lIns="25400" rIns="25400" tIns="38100" bIns="38100" wrap="square"/>
+          <a:lstStyle/>
+          <a:p>
+            <a:pPr algn="ctr"/>
+            <a:r>
+              <a:rPr sz="900" b="1">
+                <a:solidFill>
+                  <a:srgbClr val="E65100"/>
+                </a:solidFill>
+              </a:rPr>
+              <a:t>C5r</a:t>
+            </a:r>
+          </a:p>
+          <a:p>
+            <a:pPr algn="ctr"/>
+            <a:r>
+              <a:rPr sz="750">
+                <a:solidFill>
+                  <a:srgbClr val="333333"/>
+                </a:solidFill>
+              </a:rPr>
+              <a:t>
+1.0 µs</a:t>
+            </a:r>
+          </a:p>
+        </p:txBody>
+      </p:sp>
+      <p:sp>
+        <p:nvSpPr>
+          <p:cNvPr id="82" name="Rectangle 81"/>
+          <p:cNvSpPr/>
+          <p:nvPr/>
+        </p:nvSpPr>
+        <p:spPr>
+          <a:xfrm>
+            <a:off x="4663440" y="4572000"/>
+            <a:ext cx="594359" cy="1005840"/>
+          </a:xfrm>
+          <a:prstGeom prst="rect">
+            <a:avLst/>
+          </a:prstGeom>
+          <a:solidFill>
+            <a:srgbClr val="FFFFFF"/>
+          </a:solidFill>
+          <a:ln w="15875">
+            <a:solidFill>
+              <a:srgbClr val="9E9E9E"/>
+            </a:solidFill>
+          </a:ln>
+        </p:spPr>
+        <p:style>
+          <a:lnRef idx="1">
+            <a:schemeClr val="accent1"/>
+          </a:lnRef>
+          <a:fillRef idx="3">
+            <a:schemeClr val="accent1"/>
+          </a:fillRef>
+          <a:effectRef idx="2">
+            <a:schemeClr val="accent1"/>
+          </a:effectRef>
+          <a:fontRef idx="minor">
+            <a:schemeClr val="lt1"/>
+          </a:fontRef>
+        </p:style>
+        <p:txBody>
+          <a:bodyPr rtlCol="0" anchor="ctr" lIns="38100" rIns="38100" tIns="25400" bIns="25400" wrap="square"/>
+          <a:lstStyle/>
+          <a:p>
+            <a:pPr algn="ctr"/>
+            <a:r>
+              <a:rPr sz="800" b="0">
+                <a:solidFill>
+                  <a:srgbClr val="333333"/>
+                </a:solidFill>
+              </a:rPr>
+              <a:t/>
+            </a:r>
+          </a:p>
+        </p:txBody>
+      </p:sp>
+      <p:sp>
+        <p:nvSpPr>
+          <p:cNvPr id="83" name="Rectangle 82"/>
+          <p:cNvSpPr/>
+          <p:nvPr/>
+        </p:nvSpPr>
+        <p:spPr>
+          <a:xfrm>
+            <a:off x="5257800" y="4572000"/>
+            <a:ext cx="594359" cy="1005840"/>
+          </a:xfrm>
+          <a:prstGeom prst="rect">
+            <a:avLst/>
+          </a:prstGeom>
+          <a:solidFill>
+            <a:srgbClr val="FFFFFF"/>
+          </a:solidFill>
+          <a:ln w="15875">
+            <a:solidFill>
+              <a:srgbClr val="9E9E9E"/>
+            </a:solidFill>
+          </a:ln>
+        </p:spPr>
+        <p:style>
+          <a:lnRef idx="1">
+            <a:schemeClr val="accent1"/>
+          </a:lnRef>
+          <a:fillRef idx="3">
+            <a:schemeClr val="accent1"/>
+          </a:fillRef>
+          <a:effectRef idx="2">
+            <a:schemeClr val="accent1"/>
+          </a:effectRef>
+          <a:fontRef idx="minor">
+            <a:schemeClr val="lt1"/>
+          </a:fontRef>
+        </p:style>
+        <p:txBody>
+          <a:bodyPr rtlCol="0" anchor="ctr" lIns="38100" rIns="38100" tIns="25400" bIns="25400" wrap="square"/>
+          <a:lstStyle/>
+          <a:p>
+            <a:pPr algn="ctr"/>
+            <a:r>
+              <a:rPr sz="800" b="0">
+                <a:solidFill>
+                  <a:srgbClr val="333333"/>
+                </a:solidFill>
+              </a:rPr>
+              <a:t/>
+            </a:r>
+          </a:p>
+        </p:txBody>
+      </p:sp>
+      <p:sp>
+        <p:nvSpPr>
+          <p:cNvPr id="84" name="Rectangle 83"/>
+          <p:cNvSpPr/>
+          <p:nvPr/>
+        </p:nvSpPr>
+        <p:spPr>
+          <a:xfrm>
+            <a:off x="5852159" y="4572000"/>
+            <a:ext cx="594359" cy="1005840"/>
+          </a:xfrm>
+          <a:prstGeom prst="rect">
+            <a:avLst/>
+          </a:prstGeom>
+          <a:solidFill>
+            <a:srgbClr val="FFFFFF"/>
+          </a:solidFill>
+          <a:ln w="15875">
+            <a:solidFill>
+              <a:srgbClr val="9E9E9E"/>
+            </a:solidFill>
+          </a:ln>
+        </p:spPr>
+        <p:style>
+          <a:lnRef idx="1">
+            <a:schemeClr val="accent1"/>
+          </a:lnRef>
+          <a:fillRef idx="3">
+            <a:schemeClr val="accent1"/>
+          </a:fillRef>
+          <a:effectRef idx="2">
+            <a:schemeClr val="accent1"/>
+          </a:effectRef>
+          <a:fontRef idx="minor">
+            <a:schemeClr val="lt1"/>
+          </a:fontRef>
+        </p:style>
+        <p:txBody>
+          <a:bodyPr rtlCol="0" anchor="ctr" lIns="38100" rIns="38100" tIns="25400" bIns="25400" wrap="square"/>
+          <a:lstStyle/>
+          <a:p>
+            <a:pPr algn="ctr"/>
+            <a:r>
+              <a:rPr sz="800" b="0">
+                <a:solidFill>
+                  <a:srgbClr val="333333"/>
+                </a:solidFill>
+              </a:rPr>
+              <a:t/>
+            </a:r>
+          </a:p>
+        </p:txBody>
+      </p:sp>
+      <p:sp>
+        <p:nvSpPr>
+          <p:cNvPr id="85" name="Rectangle 84"/>
+          <p:cNvSpPr/>
+          <p:nvPr/>
+        </p:nvSpPr>
+        <p:spPr>
+          <a:xfrm>
+            <a:off x="6446519" y="4572000"/>
+            <a:ext cx="594359" cy="1005840"/>
+          </a:xfrm>
+          <a:prstGeom prst="rect">
+            <a:avLst/>
+          </a:prstGeom>
+          <a:solidFill>
+            <a:srgbClr val="FFFFFF"/>
+          </a:solidFill>
+          <a:ln w="15875">
+            <a:solidFill>
+              <a:srgbClr val="9E9E9E"/>
+            </a:solidFill>
+          </a:ln>
+        </p:spPr>
+        <p:style>
+          <a:lnRef idx="1">
+            <a:schemeClr val="accent1"/>
+          </a:lnRef>
+          <a:fillRef idx="3">
+            <a:schemeClr val="accent1"/>
+          </a:fillRef>
+          <a:effectRef idx="2">
+            <a:schemeClr val="accent1"/>
+          </a:effectRef>
+          <a:fontRef idx="minor">
+            <a:schemeClr val="lt1"/>
+          </a:fontRef>
+        </p:style>
+        <p:txBody>
+          <a:bodyPr rtlCol="0" anchor="ctr" lIns="38100" rIns="38100" tIns="25400" bIns="25400" wrap="square"/>
+          <a:lstStyle/>
+          <a:p>
+            <a:pPr algn="ctr"/>
+            <a:r>
+              <a:rPr sz="800" b="0">
+                <a:solidFill>
+                  <a:srgbClr val="333333"/>
+                </a:solidFill>
+              </a:rPr>
+              <a:t/>
+            </a:r>
+          </a:p>
+        </p:txBody>
+      </p:sp>
+      <p:sp>
+        <p:nvSpPr>
+          <p:cNvPr id="86" name="Rectangle 85"/>
+          <p:cNvSpPr/>
+          <p:nvPr/>
+        </p:nvSpPr>
+        <p:spPr>
+          <a:xfrm>
+            <a:off x="7040879" y="4572000"/>
+            <a:ext cx="594359" cy="1005840"/>
+          </a:xfrm>
+          <a:prstGeom prst="rect">
+            <a:avLst/>
+          </a:prstGeom>
+          <a:solidFill>
+            <a:srgbClr val="FFFFFF"/>
+          </a:solidFill>
+          <a:ln w="15875">
+            <a:solidFill>
+              <a:srgbClr val="9E9E9E"/>
+            </a:solidFill>
+          </a:ln>
+        </p:spPr>
+        <p:style>
+          <a:lnRef idx="1">
+            <a:schemeClr val="accent1"/>
+          </a:lnRef>
+          <a:fillRef idx="3">
+            <a:schemeClr val="accent1"/>
+          </a:fillRef>
+          <a:effectRef idx="2">
+            <a:schemeClr val="accent1"/>
+          </a:effectRef>
+          <a:fontRef idx="minor">
+            <a:schemeClr val="lt1"/>
+          </a:fontRef>
+        </p:style>
+        <p:txBody>
+          <a:bodyPr rtlCol="0" anchor="ctr" lIns="38100" rIns="38100" tIns="25400" bIns="25400" wrap="square"/>
+          <a:lstStyle/>
+          <a:p>
+            <a:pPr algn="ctr"/>
+            <a:r>
+              <a:rPr sz="800" b="0">
+                <a:solidFill>
+                  <a:srgbClr val="333333"/>
+                </a:solidFill>
+              </a:rPr>
+              <a:t/>
+            </a:r>
+          </a:p>
+        </p:txBody>
+      </p:sp>
+      <p:sp>
+        <p:nvSpPr>
+          <p:cNvPr id="87" name="Rectangle 86"/>
+          <p:cNvSpPr/>
+          <p:nvPr/>
+        </p:nvSpPr>
+        <p:spPr>
+          <a:xfrm>
+            <a:off x="7635240" y="4572000"/>
+            <a:ext cx="594359" cy="1005840"/>
+          </a:xfrm>
+          <a:prstGeom prst="rect">
+            <a:avLst/>
+          </a:prstGeom>
+          <a:solidFill>
+            <a:srgbClr val="FFFFFF"/>
+          </a:solidFill>
+          <a:ln w="15875">
+            <a:solidFill>
+              <a:srgbClr val="9E9E9E"/>
+            </a:solidFill>
+          </a:ln>
+        </p:spPr>
+        <p:style>
+          <a:lnRef idx="1">
+            <a:schemeClr val="accent1"/>
+          </a:lnRef>
+          <a:fillRef idx="3">
+            <a:schemeClr val="accent1"/>
+          </a:fillRef>
+          <a:effectRef idx="2">
+            <a:schemeClr val="accent1"/>
+          </a:effectRef>
+          <a:fontRef idx="minor">
+            <a:schemeClr val="lt1"/>
+          </a:fontRef>
+        </p:style>
+        <p:txBody>
+          <a:bodyPr rtlCol="0" anchor="ctr" lIns="38100" rIns="38100" tIns="25400" bIns="25400" wrap="square"/>
+          <a:lstStyle/>
+          <a:p>
+            <a:pPr algn="ctr"/>
+            <a:r>
+              <a:rPr sz="800" b="0">
+                <a:solidFill>
+                  <a:srgbClr val="333333"/>
+                </a:solidFill>
+              </a:rPr>
+              <a:t/>
+            </a:r>
+          </a:p>
+        </p:txBody>
+      </p:sp>
+      <p:sp>
+        <p:nvSpPr>
+          <p:cNvPr id="88" name="Rectangle 87"/>
+          <p:cNvSpPr/>
+          <p:nvPr/>
+        </p:nvSpPr>
+        <p:spPr>
+          <a:xfrm>
+            <a:off x="8229599" y="4572000"/>
+            <a:ext cx="594359" cy="1005840"/>
+          </a:xfrm>
+          <a:prstGeom prst="rect">
+            <a:avLst/>
+          </a:prstGeom>
+          <a:solidFill>
+            <a:srgbClr val="FFFFFF"/>
+          </a:solidFill>
+          <a:ln w="15875">
+            <a:solidFill>
+              <a:srgbClr val="9E9E9E"/>
+            </a:solidFill>
+          </a:ln>
+        </p:spPr>
+        <p:style>
+          <a:lnRef idx="1">
+            <a:schemeClr val="accent1"/>
+          </a:lnRef>
+          <a:fillRef idx="3">
+            <a:schemeClr val="accent1"/>
+          </a:fillRef>
+          <a:effectRef idx="2">
+            <a:schemeClr val="accent1"/>
+          </a:effectRef>
+          <a:fontRef idx="minor">
+            <a:schemeClr val="lt1"/>
+          </a:fontRef>
+        </p:style>
+        <p:txBody>
+          <a:bodyPr rtlCol="0" anchor="ctr" lIns="38100" rIns="38100" tIns="25400" bIns="25400" wrap="square"/>
+          <a:lstStyle/>
+          <a:p>
+            <a:pPr algn="ctr"/>
+            <a:r>
+              <a:rPr sz="800" b="0">
+                <a:solidFill>
+                  <a:srgbClr val="333333"/>
+                </a:solidFill>
+              </a:rPr>
+              <a:t/>
+            </a:r>
+          </a:p>
+        </p:txBody>
+      </p:sp>
+      <p:sp>
+        <p:nvSpPr>
+          <p:cNvPr id="89" name="Rectangle 88"/>
+          <p:cNvSpPr/>
+          <p:nvPr/>
+        </p:nvSpPr>
+        <p:spPr>
+          <a:xfrm>
+            <a:off x="8823959" y="4572000"/>
+            <a:ext cx="594359" cy="1005840"/>
+          </a:xfrm>
+          <a:prstGeom prst="rect">
+            <a:avLst/>
+          </a:prstGeom>
+          <a:solidFill>
+            <a:srgbClr val="FFFFFF"/>
+          </a:solidFill>
+          <a:ln w="15875">
+            <a:solidFill>
+              <a:srgbClr val="9E9E9E"/>
+            </a:solidFill>
+          </a:ln>
+        </p:spPr>
+        <p:style>
+          <a:lnRef idx="1">
+            <a:schemeClr val="accent1"/>
+          </a:lnRef>
+          <a:fillRef idx="3">
+            <a:schemeClr val="accent1"/>
+          </a:fillRef>
+          <a:effectRef idx="2">
+            <a:schemeClr val="accent1"/>
+          </a:effectRef>
+          <a:fontRef idx="minor">
+            <a:schemeClr val="lt1"/>
+          </a:fontRef>
+        </p:style>
+        <p:txBody>
+          <a:bodyPr rtlCol="0" anchor="ctr" lIns="38100" rIns="38100" tIns="25400" bIns="25400" wrap="square"/>
+          <a:lstStyle/>
+          <a:p>
+            <a:pPr algn="ctr"/>
+            <a:r>
+              <a:rPr sz="800" b="0">
+                <a:solidFill>
+                  <a:srgbClr val="333333"/>
+                </a:solidFill>
+              </a:rPr>
+              <a:t/>
+            </a:r>
+          </a:p>
+        </p:txBody>
+      </p:sp>
+      <p:sp>
+        <p:nvSpPr>
+          <p:cNvPr id="90" name="Rectangle 89"/>
+          <p:cNvSpPr/>
+          <p:nvPr/>
+        </p:nvSpPr>
+        <p:spPr>
+          <a:xfrm>
+            <a:off x="9418319" y="4572000"/>
+            <a:ext cx="594359" cy="1005840"/>
+          </a:xfrm>
+          <a:prstGeom prst="rect">
+            <a:avLst/>
+          </a:prstGeom>
+          <a:solidFill>
+            <a:srgbClr val="FFFFFF"/>
+          </a:solidFill>
+          <a:ln w="15875">
+            <a:solidFill>
+              <a:srgbClr val="9E9E9E"/>
+            </a:solidFill>
+          </a:ln>
+        </p:spPr>
+        <p:style>
+          <a:lnRef idx="1">
+            <a:schemeClr val="accent1"/>
+          </a:lnRef>
+          <a:fillRef idx="3">
+            <a:schemeClr val="accent1"/>
+          </a:fillRef>
+          <a:effectRef idx="2">
+            <a:schemeClr val="accent1"/>
+          </a:effectRef>
+          <a:fontRef idx="minor">
+            <a:schemeClr val="lt1"/>
+          </a:fontRef>
+        </p:style>
+        <p:txBody>
+          <a:bodyPr rtlCol="0" anchor="ctr" lIns="38100" rIns="38100" tIns="25400" bIns="25400" wrap="square"/>
+          <a:lstStyle/>
+          <a:p>
+            <a:pPr algn="ctr"/>
+            <a:r>
+              <a:rPr sz="800" b="0">
+                <a:solidFill>
+                  <a:srgbClr val="333333"/>
+                </a:solidFill>
+              </a:rPr>
+              <a:t/>
+            </a:r>
+          </a:p>
+        </p:txBody>
+      </p:sp>
+      <p:sp>
+        <p:nvSpPr>
+          <p:cNvPr id="91" name="Rectangle 90"/>
+          <p:cNvSpPr/>
+          <p:nvPr/>
+        </p:nvSpPr>
+        <p:spPr>
+          <a:xfrm>
+            <a:off x="10012679" y="4572000"/>
+            <a:ext cx="594359" cy="1005840"/>
+          </a:xfrm>
+          <a:prstGeom prst="rect">
+            <a:avLst/>
+          </a:prstGeom>
+          <a:solidFill>
+            <a:srgbClr val="FFFFFF"/>
+          </a:solidFill>
+          <a:ln w="15875">
+            <a:solidFill>
+              <a:srgbClr val="9E9E9E"/>
+            </a:solidFill>
+          </a:ln>
+        </p:spPr>
+        <p:style>
+          <a:lnRef idx="1">
+            <a:schemeClr val="accent1"/>
+          </a:lnRef>
+          <a:fillRef idx="3">
+            <a:schemeClr val="accent1"/>
+          </a:fillRef>
+          <a:effectRef idx="2">
+            <a:schemeClr val="accent1"/>
+          </a:effectRef>
+          <a:fontRef idx="minor">
+            <a:schemeClr val="lt1"/>
+          </a:fontRef>
+        </p:style>
+        <p:txBody>
+          <a:bodyPr rtlCol="0" anchor="ctr" lIns="38100" rIns="38100" tIns="25400" bIns="25400" wrap="square"/>
+          <a:lstStyle/>
+          <a:p>
+            <a:pPr algn="ctr"/>
+            <a:r>
+              <a:rPr sz="800" b="0">
+                <a:solidFill>
+                  <a:srgbClr val="333333"/>
+                </a:solidFill>
+              </a:rPr>
+              <a:t/>
+            </a:r>
+          </a:p>
+        </p:txBody>
+      </p:sp>
+      <p:sp>
+        <p:nvSpPr>
+          <p:cNvPr id="92" name="Rectangle 91"/>
+          <p:cNvSpPr/>
+          <p:nvPr/>
+        </p:nvSpPr>
+        <p:spPr>
+          <a:xfrm>
+            <a:off x="10607039" y="4572000"/>
+            <a:ext cx="594359" cy="1005840"/>
+          </a:xfrm>
+          <a:prstGeom prst="rect">
+            <a:avLst/>
+          </a:prstGeom>
+          <a:solidFill>
+            <a:srgbClr val="FFFFFF"/>
+          </a:solidFill>
+          <a:ln w="15875">
+            <a:solidFill>
+              <a:srgbClr val="9E9E9E"/>
+            </a:solidFill>
+          </a:ln>
+        </p:spPr>
+        <p:style>
+          <a:lnRef idx="1">
+            <a:schemeClr val="accent1"/>
+          </a:lnRef>
+          <a:fillRef idx="3">
+            <a:schemeClr val="accent1"/>
+          </a:fillRef>
+          <a:effectRef idx="2">
+            <a:schemeClr val="accent1"/>
+          </a:effectRef>
+          <a:fontRef idx="minor">
+            <a:schemeClr val="lt1"/>
+          </a:fontRef>
+        </p:style>
+        <p:txBody>
+          <a:bodyPr rtlCol="0" anchor="ctr" lIns="38100" rIns="38100" tIns="25400" bIns="25400" wrap="square"/>
+          <a:lstStyle/>
+          <a:p>
+            <a:pPr algn="ctr"/>
+            <a:r>
+              <a:rPr sz="800" b="0">
+                <a:solidFill>
+                  <a:srgbClr val="333333"/>
+                </a:solidFill>
+              </a:rPr>
+              <a:t/>
+            </a:r>
+          </a:p>
+        </p:txBody>
+      </p:sp>
+      <p:sp>
+        <p:nvSpPr>
+          <p:cNvPr id="93" name="Rectangle 92"/>
+          <p:cNvSpPr/>
+          <p:nvPr/>
+        </p:nvSpPr>
+        <p:spPr>
+          <a:xfrm>
+            <a:off x="11201399" y="4572000"/>
+            <a:ext cx="914400" cy="1005840"/>
+          </a:xfrm>
+          <a:prstGeom prst="rect">
+            <a:avLst/>
+          </a:prstGeom>
+          <a:solidFill>
+            <a:srgbClr val="FFE0B2"/>
+          </a:solidFill>
+          <a:ln w="15875">
+            <a:solidFill>
+              <a:srgbClr val="E65100"/>
+            </a:solidFill>
+          </a:ln>
+        </p:spPr>
+        <p:style>
+          <a:lnRef idx="1">
+            <a:schemeClr val="accent1"/>
+          </a:lnRef>
+          <a:fillRef idx="3">
+            <a:schemeClr val="accent1"/>
+          </a:fillRef>
+          <a:effectRef idx="2">
+            <a:schemeClr val="accent1"/>
+          </a:effectRef>
+          <a:fontRef idx="minor">
+            <a:schemeClr val="lt1"/>
+          </a:fontRef>
+        </p:style>
+        <p:txBody>
+          <a:bodyPr rtlCol="0" anchor="ctr" lIns="38100" rIns="38100" tIns="25400" bIns="25400" wrap="square"/>
+          <a:lstStyle/>
+          <a:p>
+            <a:pPr algn="ctr"/>
+            <a:r>
+              <a:rPr sz="1000" b="1">
+                <a:solidFill>
+                  <a:srgbClr val="E65100"/>
+                </a:solidFill>
+              </a:rPr>
+              <a:t>~1.7 µs</a:t>
+            </a:r>
+          </a:p>
+        </p:txBody>
+      </p:sp>
+      <p:sp>
+        <p:nvSpPr>
+          <p:cNvPr id="94" name="Rounded Rectangle 93"/>
+          <p:cNvSpPr/>
+          <p:nvPr/>
+        </p:nvSpPr>
+        <p:spPr>
+          <a:xfrm>
+            <a:off x="274320" y="5806440"/>
+            <a:ext cx="7772400" cy="365760"/>
+          </a:xfrm>
+          <a:prstGeom prst="roundRect">
+            <a:avLst/>
+          </a:prstGeom>
+          <a:solidFill>
+            <a:srgbClr val="FFFFFF"/>
+          </a:solidFill>
+          <a:ln w="7620">
+            <a:solidFill>
+              <a:srgbClr val="9E9E9E"/>
+            </a:solidFill>
+          </a:ln>
+        </p:spPr>
+        <p:style>
+          <a:lnRef idx="1">
+            <a:schemeClr val="accent1"/>
+          </a:lnRef>
+          <a:fillRef idx="3">
+            <a:schemeClr val="accent1"/>
+          </a:fillRef>
+          <a:effectRef idx="2">
+            <a:schemeClr val="accent1"/>
+          </a:effectRef>
+          <a:fontRef idx="minor">
+            <a:schemeClr val="lt1"/>
+          </a:fontRef>
+        </p:style>
+        <p:txBody>
+          <a:bodyPr rtlCol="0" anchor="ctr"/>
+          <a:lstStyle/>
+          <a:p>
+            <a:pPr algn="ctr"/>
+          </a:p>
+        </p:txBody>
+      </p:sp>
+      <p:sp>
+        <p:nvSpPr>
+          <p:cNvPr id="95" name="TextBox 94"/>
+          <p:cNvSpPr txBox="1"/>
+          <p:nvPr/>
+        </p:nvSpPr>
+        <p:spPr>
+          <a:xfrm>
+            <a:off x="365760" y="5843016"/>
+            <a:ext cx="1828800" cy="292608"/>
+          </a:xfrm>
+          <a:prstGeom prst="rect">
+            <a:avLst/>
+          </a:prstGeom>
+          <a:noFill/>
+        </p:spPr>
+        <p:txBody>
+          <a:bodyPr wrap="none" lIns="25400" rIns="25400" tIns="0" bIns="0">
+            <a:spAutoFit/>
+          </a:bodyPr>
+          <a:lstStyle/>
+          <a:p>
+            <a:pPr algn="l"/>
+            <a:r>
+              <a:rPr sz="900" b="1">
+                <a:solidFill>
+                  <a:srgbClr val="F9A825"/>
+                </a:solidFill>
+              </a:rPr>
+              <a:t>★ Linearization point</a:t>
+            </a:r>
+          </a:p>
+        </p:txBody>
+      </p:sp>
+      <p:sp>
+        <p:nvSpPr>
+          <p:cNvPr id="96" name="TextBox 95"/>
+          <p:cNvSpPr txBox="1"/>
+          <p:nvPr/>
+        </p:nvSpPr>
+        <p:spPr>
+          <a:xfrm>
+            <a:off x="2240279" y="5843016"/>
+            <a:ext cx="1828800" cy="292608"/>
+          </a:xfrm>
+          <a:prstGeom prst="rect">
+            <a:avLst/>
+          </a:prstGeom>
+          <a:noFill/>
+        </p:spPr>
+        <p:txBody>
+          <a:bodyPr wrap="none" lIns="25400" rIns="25400" tIns="0" bIns="0">
+            <a:spAutoFit/>
+          </a:bodyPr>
+          <a:lstStyle/>
+          <a:p>
+            <a:pPr algn="l"/>
+            <a:r>
+              <a:rPr sz="900" b="1">
+                <a:solidFill>
+                  <a:srgbClr val="C62828"/>
+                </a:solidFill>
+              </a:rPr>
+              <a:t>★ Dominant cost / blocking</a:t>
+            </a:r>
+          </a:p>
+        </p:txBody>
+      </p:sp>
+      <p:sp>
+        <p:nvSpPr>
+          <p:cNvPr id="97" name="TextBox 96"/>
+          <p:cNvSpPr txBox="1"/>
+          <p:nvPr/>
+        </p:nvSpPr>
+        <p:spPr>
+          <a:xfrm>
+            <a:off x="4114800" y="5843016"/>
+            <a:ext cx="1828800" cy="292608"/>
+          </a:xfrm>
+          <a:prstGeom prst="rect">
+            <a:avLst/>
+          </a:prstGeom>
+          <a:noFill/>
+        </p:spPr>
+        <p:txBody>
+          <a:bodyPr wrap="none" lIns="25400" rIns="25400" tIns="0" bIns="0">
+            <a:spAutoFit/>
+          </a:bodyPr>
+          <a:lstStyle/>
+          <a:p>
+            <a:pPr algn="l"/>
+            <a:r>
+              <a:rPr sz="900" b="1">
+                <a:solidFill>
+                  <a:srgbClr val="154FC2"/>
+                </a:solidFill>
+              </a:rPr>
+              <a:t>A write: W10 cache_pool_insert MESI</a:t>
+            </a:r>
+          </a:p>
+        </p:txBody>
+      </p:sp>
+      <p:sp>
+        <p:nvSpPr>
+          <p:cNvPr id="98" name="TextBox 97"/>
+          <p:cNvSpPr txBox="1"/>
+          <p:nvPr/>
+        </p:nvSpPr>
+        <p:spPr>
+          <a:xfrm>
+            <a:off x="5989320" y="5843016"/>
+            <a:ext cx="1828800" cy="292608"/>
+          </a:xfrm>
+          <a:prstGeom prst="rect">
+            <a:avLst/>
+          </a:prstGeom>
+          <a:noFill/>
+        </p:spPr>
+        <p:txBody>
+          <a:bodyPr wrap="none" lIns="25400" rIns="25400" tIns="0" bIns="0">
+            <a:spAutoFit/>
+          </a:bodyPr>
+          <a:lstStyle/>
+          <a:p>
+            <a:pPr algn="l"/>
+            <a:r>
+              <a:rPr sz="900" b="1">
+                <a:solidFill>
+                  <a:srgbClr val="E65100"/>
+                </a:solidFill>
+              </a:rPr>
+              <a:t>C write: C1 LFM 25 µs 76%</a:t>
+            </a:r>
+          </a:p>
+        </p:txBody>
+      </p:sp>
+    </p:spTree>
+  </p:cSld>
+  <p:clrMapOvr>
+    <a:masterClrMapping/>
+  </p:clrMapOvr>
+</p:sld>
+</file>
+
 <file path=ppt/theme/theme1.xml><?xml version="1.0" encoding="utf-8"?>
 <a:theme xmlns:a="http://schemas.openxmlformats.org/drawingml/2006/main" name="Office Theme">
   <a:themeElements>
